--- a/docs/dev_summary.pptx
+++ b/docs/dev_summary.pptx
@@ -6667,7 +6667,7 @@
         <p:spPr>
           <a:xfrm>
             <a:off x="457200" y="1188720"/>
-            <a:ext cx="3657600" cy="2103120"/>
+            <a:ext cx="3657600" cy="2286000"/>
           </a:xfrm>
           <a:prstGeom prst="roundRect">
             <a:avLst/>
@@ -6709,7 +6709,7 @@
         </p:nvSpPr>
         <p:spPr>
           <a:xfrm>
-            <a:off x="457200" y="1371600"/>
+            <a:off x="457200" y="1325880"/>
             <a:ext cx="3657600" cy="365760"/>
           </a:xfrm>
           <a:prstGeom prst="rect">
@@ -6744,7 +6744,7 @@
         </p:nvSpPr>
         <p:spPr>
           <a:xfrm>
-            <a:off x="457200" y="1828800"/>
+            <a:off x="457200" y="1737360"/>
             <a:ext cx="3657600" cy="822960"/>
           </a:xfrm>
           <a:prstGeom prst="rect">
@@ -6760,13 +6760,13 @@
           <a:p>
             <a:pPr algn="ctr"/>
             <a:r>
-              <a:rPr sz="4400" b="1">
+              <a:rPr sz="4000" b="1">
                 <a:solidFill>
                   <a:srgbClr val="FFFFFF"/>
                 </a:solidFill>
                 <a:latin typeface="Microsoft YaHei"/>
               </a:rPr>
-              <a:t>~32 个</a:t>
+              <a:t>~30 个</a:t>
             </a:r>
           </a:p>
         </p:txBody>
@@ -6779,8 +6779,8 @@
         </p:nvSpPr>
         <p:spPr>
           <a:xfrm>
-            <a:off x="457200" y="2788920"/>
-            <a:ext cx="3657600" cy="365760"/>
+            <a:off x="457200" y="2697480"/>
+            <a:ext cx="3657600" cy="320040"/>
           </a:xfrm>
           <a:prstGeom prst="rect">
             <a:avLst/>
@@ -6801,21 +6801,56 @@
                 </a:solidFill>
                 <a:latin typeface="Microsoft YaHei"/>
               </a:rPr>
-              <a:t>UI体验 · 部署环境 · 运行时崩溃</a:t>
-            </a:r>
-          </a:p>
-        </p:txBody>
-      </p:sp>
-      <p:sp>
-        <p:nvSpPr>
-          <p:cNvPr id="8" name="Rounded Rectangle 7"/>
+              <a:t>UI 体验 · 部署环境 · 运行时崩溃</a:t>
+            </a:r>
+          </a:p>
+        </p:txBody>
+      </p:sp>
+      <p:sp>
+        <p:nvSpPr>
+          <p:cNvPr id="8" name="TextBox 7"/>
+          <p:cNvSpPr txBox="1"/>
+          <p:nvPr/>
+        </p:nvSpPr>
+        <p:spPr>
+          <a:xfrm>
+            <a:off x="457200" y="3063239"/>
+            <a:ext cx="3657600" cy="320040"/>
+          </a:xfrm>
+          <a:prstGeom prst="rect">
+            <a:avLst/>
+          </a:prstGeom>
+          <a:noFill/>
+        </p:spPr>
+        <p:txBody>
+          <a:bodyPr wrap="square" lIns="0" rIns="0" tIns="0" bIns="0">
+            <a:spAutoFit/>
+          </a:bodyPr>
+          <a:lstStyle/>
+          <a:p>
+            <a:pPr algn="ctr"/>
+            <a:r>
+              <a:rPr sz="1000" b="0">
+                <a:solidFill>
+                  <a:srgbClr val="FFFFFF"/>
+                </a:solidFill>
+                <a:latin typeface="Microsoft YaHei"/>
+              </a:rPr>
+              <a:t/>
+            </a:r>
+          </a:p>
+        </p:txBody>
+      </p:sp>
+      <p:sp>
+        <p:nvSpPr>
+          <p:cNvPr id="9" name="Rounded Rectangle 8"/>
           <p:cNvSpPr/>
           <p:nvPr/>
         </p:nvSpPr>
         <p:spPr>
           <a:xfrm>
             <a:off x="4297680" y="1188720"/>
-            <a:ext cx="3657600" cy="2103120"/>
+            <a:ext cx="3657600" cy="2286000"/>
           </a:xfrm>
           <a:prstGeom prst="roundRect">
             <a:avLst/>
@@ -6851,13 +6886,13 @@
       </p:sp>
       <p:sp>
         <p:nvSpPr>
-          <p:cNvPr id="9" name="TextBox 8"/>
+          <p:cNvPr id="10" name="TextBox 9"/>
           <p:cNvSpPr txBox="1"/>
           <p:nvPr/>
         </p:nvSpPr>
         <p:spPr>
           <a:xfrm>
-            <a:off x="4297680" y="1371600"/>
+            <a:off x="4297680" y="1325880"/>
             <a:ext cx="3657600" cy="365760"/>
           </a:xfrm>
           <a:prstGeom prst="rect">
@@ -6879,20 +6914,20 @@
                 </a:solidFill>
                 <a:latin typeface="Microsoft YaHei"/>
               </a:rPr>
-              <a:t>🔵 AI 静态审查</a:t>
-            </a:r>
-          </a:p>
-        </p:txBody>
-      </p:sp>
-      <p:sp>
-        <p:nvSpPr>
-          <p:cNvPr id="10" name="TextBox 9"/>
+              <a:t>🔵 AI #1：Claude Code</a:t>
+            </a:r>
+          </a:p>
+        </p:txBody>
+      </p:sp>
+      <p:sp>
+        <p:nvSpPr>
+          <p:cNvPr id="11" name="TextBox 10"/>
           <p:cNvSpPr txBox="1"/>
           <p:nvPr/>
         </p:nvSpPr>
         <p:spPr>
           <a:xfrm>
-            <a:off x="4297680" y="1828800"/>
+            <a:off x="4297680" y="1737360"/>
             <a:ext cx="3657600" cy="822960"/>
           </a:xfrm>
           <a:prstGeom prst="rect">
@@ -6908,7 +6943,7 @@
           <a:p>
             <a:pPr algn="ctr"/>
             <a:r>
-              <a:rPr sz="4400" b="1">
+              <a:rPr sz="4000" b="1">
                 <a:solidFill>
                   <a:srgbClr val="FFFFFF"/>
                 </a:solidFill>
@@ -6921,14 +6956,14 @@
       </p:sp>
       <p:sp>
         <p:nvSpPr>
-          <p:cNvPr id="11" name="TextBox 10"/>
+          <p:cNvPr id="12" name="TextBox 11"/>
           <p:cNvSpPr txBox="1"/>
           <p:nvPr/>
         </p:nvSpPr>
         <p:spPr>
           <a:xfrm>
-            <a:off x="4297680" y="2788920"/>
-            <a:ext cx="3657600" cy="365760"/>
+            <a:off x="4297680" y="2697480"/>
+            <a:ext cx="3657600" cy="320040"/>
           </a:xfrm>
           <a:prstGeom prst="rect">
             <a:avLst/>
@@ -6949,21 +6984,56 @@
                 </a:solidFill>
                 <a:latin typeface="Microsoft YaHei"/>
               </a:rPr>
-              <a:t>逻辑错误 · 并发 · 协议细节</a:t>
-            </a:r>
-          </a:p>
-        </p:txBody>
-      </p:sp>
-      <p:sp>
-        <p:nvSpPr>
-          <p:cNvPr id="12" name="Rounded Rectangle 11"/>
+              <a:t>全量扫描 · 跨文件链路 · 并发陷阱</a:t>
+            </a:r>
+          </a:p>
+        </p:txBody>
+      </p:sp>
+      <p:sp>
+        <p:nvSpPr>
+          <p:cNvPr id="13" name="TextBox 12"/>
+          <p:cNvSpPr txBox="1"/>
+          <p:nvPr/>
+        </p:nvSpPr>
+        <p:spPr>
+          <a:xfrm>
+            <a:off x="4297680" y="3063239"/>
+            <a:ext cx="3657600" cy="320040"/>
+          </a:xfrm>
+          <a:prstGeom prst="rect">
+            <a:avLst/>
+          </a:prstGeom>
+          <a:noFill/>
+        </p:spPr>
+        <p:txBody>
+          <a:bodyPr wrap="square" lIns="0" rIns="0" tIns="0" bIns="0">
+            <a:spAutoFit/>
+          </a:bodyPr>
+          <a:lstStyle/>
+          <a:p>
+            <a:pPr algn="ctr"/>
+            <a:r>
+              <a:rPr sz="1000" b="0">
+                <a:solidFill>
+                  <a:srgbClr val="FFFFFF"/>
+                </a:solidFill>
+                <a:latin typeface="Microsoft YaHei"/>
+              </a:rPr>
+              <a:t>claude-opus-4-7 / sonnet-4-6</a:t>
+            </a:r>
+          </a:p>
+        </p:txBody>
+      </p:sp>
+      <p:sp>
+        <p:nvSpPr>
+          <p:cNvPr id="14" name="Rounded Rectangle 13"/>
           <p:cNvSpPr/>
           <p:nvPr/>
         </p:nvSpPr>
         <p:spPr>
           <a:xfrm>
             <a:off x="8138160" y="1188720"/>
-            <a:ext cx="3657600" cy="2103120"/>
+            <a:ext cx="3657600" cy="2286000"/>
           </a:xfrm>
           <a:prstGeom prst="roundRect">
             <a:avLst/>
@@ -6999,13 +7069,13 @@
       </p:sp>
       <p:sp>
         <p:nvSpPr>
-          <p:cNvPr id="13" name="TextBox 12"/>
+          <p:cNvPr id="15" name="TextBox 14"/>
           <p:cNvSpPr txBox="1"/>
           <p:nvPr/>
         </p:nvSpPr>
         <p:spPr>
           <a:xfrm>
-            <a:off x="8138160" y="1371600"/>
+            <a:off x="8138160" y="1325880"/>
             <a:ext cx="3657600" cy="365760"/>
           </a:xfrm>
           <a:prstGeom prst="rect">
@@ -7027,20 +7097,20 @@
                 </a:solidFill>
                 <a:latin typeface="Microsoft YaHei"/>
               </a:rPr>
-              <a:t>🟡 Code Review Bot</a:t>
-            </a:r>
-          </a:p>
-        </p:txBody>
-      </p:sp>
-      <p:sp>
-        <p:nvSpPr>
-          <p:cNvPr id="14" name="TextBox 13"/>
+              <a:t>🟡 AI #2：ChatGPT Codex</a:t>
+            </a:r>
+          </a:p>
+        </p:txBody>
+      </p:sp>
+      <p:sp>
+        <p:nvSpPr>
+          <p:cNvPr id="16" name="TextBox 15"/>
           <p:cNvSpPr txBox="1"/>
           <p:nvPr/>
         </p:nvSpPr>
         <p:spPr>
           <a:xfrm>
-            <a:off x="8138160" y="1828800"/>
+            <a:off x="8138160" y="1737360"/>
             <a:ext cx="3657600" cy="822960"/>
           </a:xfrm>
           <a:prstGeom prst="rect">
@@ -7056,27 +7126,27 @@
           <a:p>
             <a:pPr algn="ctr"/>
             <a:r>
-              <a:rPr sz="4400" b="1">
+              <a:rPr sz="4000" b="1">
                 <a:solidFill>
                   <a:srgbClr val="FFFFFF"/>
                 </a:solidFill>
                 <a:latin typeface="Microsoft YaHei"/>
               </a:rPr>
-              <a:t>2 个</a:t>
-            </a:r>
-          </a:p>
-        </p:txBody>
-      </p:sp>
-      <p:sp>
-        <p:nvSpPr>
-          <p:cNvPr id="15" name="TextBox 14"/>
+              <a:t>3 个</a:t>
+            </a:r>
+          </a:p>
+        </p:txBody>
+      </p:sp>
+      <p:sp>
+        <p:nvSpPr>
+          <p:cNvPr id="17" name="TextBox 16"/>
           <p:cNvSpPr txBox="1"/>
           <p:nvPr/>
         </p:nvSpPr>
         <p:spPr>
           <a:xfrm>
-            <a:off x="8138160" y="2788920"/>
-            <a:ext cx="3657600" cy="365760"/>
+            <a:off x="8138160" y="2697480"/>
+            <a:ext cx="3657600" cy="320040"/>
           </a:xfrm>
           <a:prstGeom prst="rect">
             <a:avLst/>
@@ -7097,21 +7167,56 @@
                 </a:solidFill>
                 <a:latin typeface="Microsoft YaHei"/>
               </a:rPr>
-              <a:t>PR 自动审查额外发现</a:t>
-            </a:r>
-          </a:p>
-        </p:txBody>
-      </p:sp>
-      <p:sp>
-        <p:nvSpPr>
-          <p:cNvPr id="16" name="Rounded Rectangle 15"/>
+              <a:t>PR 自动审查 · 细粒度风险点</a:t>
+            </a:r>
+          </a:p>
+        </p:txBody>
+      </p:sp>
+      <p:sp>
+        <p:nvSpPr>
+          <p:cNvPr id="18" name="TextBox 17"/>
+          <p:cNvSpPr txBox="1"/>
+          <p:nvPr/>
+        </p:nvSpPr>
+        <p:spPr>
+          <a:xfrm>
+            <a:off x="8138160" y="3063239"/>
+            <a:ext cx="3657600" cy="320040"/>
+          </a:xfrm>
+          <a:prstGeom prst="rect">
+            <a:avLst/>
+          </a:prstGeom>
+          <a:noFill/>
+        </p:spPr>
+        <p:txBody>
+          <a:bodyPr wrap="square" lIns="0" rIns="0" tIns="0" bIns="0">
+            <a:spAutoFit/>
+          </a:bodyPr>
+          <a:lstStyle/>
+          <a:p>
+            <a:pPr algn="ctr"/>
+            <a:r>
+              <a:rPr sz="1000" b="0">
+                <a:solidFill>
+                  <a:srgbClr val="FFFFFF"/>
+                </a:solidFill>
+                <a:latin typeface="Microsoft YaHei"/>
+              </a:rPr>
+              <a:t>chatgpt-codex-connector[bot]</a:t>
+            </a:r>
+          </a:p>
+        </p:txBody>
+      </p:sp>
+      <p:sp>
+        <p:nvSpPr>
+          <p:cNvPr id="19" name="Rounded Rectangle 18"/>
           <p:cNvSpPr/>
           <p:nvPr/>
         </p:nvSpPr>
         <p:spPr>
           <a:xfrm>
-            <a:off x="457200" y="3657600"/>
-            <a:ext cx="11338560" cy="2651760"/>
+            <a:off x="457200" y="3749039"/>
+            <a:ext cx="11338560" cy="2606040"/>
           </a:xfrm>
           <a:prstGeom prst="roundRect">
             <a:avLst/>
@@ -7149,13 +7254,13 @@
       </p:sp>
       <p:sp>
         <p:nvSpPr>
-          <p:cNvPr id="17" name="TextBox 16"/>
+          <p:cNvPr id="20" name="TextBox 19"/>
           <p:cNvSpPr txBox="1"/>
           <p:nvPr/>
         </p:nvSpPr>
         <p:spPr>
           <a:xfrm>
-            <a:off x="731520" y="3840480"/>
+            <a:off x="731520" y="3931920"/>
             <a:ext cx="10972800" cy="457200"/>
           </a:xfrm>
           <a:prstGeom prst="rect">
@@ -7184,13 +7289,13 @@
       </p:sp>
       <p:sp>
         <p:nvSpPr>
-          <p:cNvPr id="18" name="TextBox 17"/>
+          <p:cNvPr id="21" name="TextBox 20"/>
           <p:cNvSpPr txBox="1"/>
           <p:nvPr/>
         </p:nvSpPr>
         <p:spPr>
           <a:xfrm>
-            <a:off x="731520" y="4389120"/>
+            <a:off x="731520" y="4434840"/>
             <a:ext cx="10972800" cy="457200"/>
           </a:xfrm>
           <a:prstGeom prst="rect">
@@ -7206,26 +7311,26 @@
           <a:p>
             <a:pPr algn="l"/>
             <a:r>
-              <a:rPr sz="1600" b="1">
+              <a:rPr sz="1400" b="1">
                 <a:solidFill>
                   <a:srgbClr val="202020"/>
                 </a:solidFill>
                 <a:latin typeface="Microsoft YaHei"/>
               </a:rPr>
-              <a:t>人工看见「症状」，AI 挖出「根因」 — 两者几乎不重叠，而是互补</a:t>
-            </a:r>
-          </a:p>
-        </p:txBody>
-      </p:sp>
-      <p:sp>
-        <p:nvSpPr>
-          <p:cNvPr id="19" name="TextBox 18"/>
+              <a:t>人工看见「症状」 · Claude 挖「根因」 · Codex 找「细节风险」 — 三者几乎不重叠</a:t>
+            </a:r>
+          </a:p>
+        </p:txBody>
+      </p:sp>
+      <p:sp>
+        <p:nvSpPr>
+          <p:cNvPr id="22" name="TextBox 21"/>
           <p:cNvSpPr txBox="1"/>
           <p:nvPr/>
         </p:nvSpPr>
         <p:spPr>
           <a:xfrm>
-            <a:off x="731520" y="4937760"/>
+            <a:off x="731520" y="4892040"/>
             <a:ext cx="10972800" cy="457200"/>
           </a:xfrm>
           <a:prstGeom prst="rect">
@@ -7241,26 +7346,26 @@
           <a:p>
             <a:pPr algn="l"/>
             <a:r>
-              <a:rPr sz="1400" b="0">
+              <a:rPr sz="1200" b="0">
                 <a:solidFill>
                   <a:srgbClr val="202020"/>
                 </a:solidFill>
                 <a:latin typeface="Microsoft YaHei"/>
               </a:rPr>
-              <a:t>·  人工：截图 / 真机崩溃 / 部署环境问题（AI 无法获知）</a:t>
-            </a:r>
-          </a:p>
-        </p:txBody>
-      </p:sp>
-      <p:sp>
-        <p:nvSpPr>
-          <p:cNvPr id="20" name="TextBox 19"/>
+              <a:t>·  人工：截图 / 真机崩溃 / 部署环境问题</a:t>
+            </a:r>
+          </a:p>
+        </p:txBody>
+      </p:sp>
+      <p:sp>
+        <p:nvSpPr>
+          <p:cNvPr id="23" name="TextBox 22"/>
           <p:cNvSpPr txBox="1"/>
           <p:nvPr/>
         </p:nvSpPr>
         <p:spPr>
           <a:xfrm>
-            <a:off x="731520" y="5349240"/>
+            <a:off x="731520" y="5212080"/>
             <a:ext cx="10972800" cy="457200"/>
           </a:xfrm>
           <a:prstGeom prst="rect">
@@ -7276,26 +7381,26 @@
           <a:p>
             <a:pPr algn="l"/>
             <a:r>
-              <a:rPr sz="1400" b="0">
+              <a:rPr sz="1200" b="0">
                 <a:solidFill>
                   <a:srgbClr val="202020"/>
                 </a:solidFill>
                 <a:latin typeface="Microsoft YaHei"/>
               </a:rPr>
-              <a:t>·  AI：跨文件链路 / 时序逻辑 / 并发陷阱（人工难以全量覆盖）</a:t>
-            </a:r>
-          </a:p>
-        </p:txBody>
-      </p:sp>
-      <p:sp>
-        <p:nvSpPr>
-          <p:cNvPr id="21" name="TextBox 20"/>
+              <a:t>·  Claude Code Agent：跨文件链路 / 并发陷阱 / 协议一致性</a:t>
+            </a:r>
+          </a:p>
+        </p:txBody>
+      </p:sp>
+      <p:sp>
+        <p:nvSpPr>
+          <p:cNvPr id="24" name="TextBox 23"/>
           <p:cNvSpPr txBox="1"/>
           <p:nvPr/>
         </p:nvSpPr>
         <p:spPr>
           <a:xfrm>
-            <a:off x="731520" y="5806440"/>
+            <a:off x="731520" y="5532120"/>
             <a:ext cx="10972800" cy="457200"/>
           </a:xfrm>
           <a:prstGeom prst="rect">
@@ -7311,20 +7416,55 @@
           <a:p>
             <a:pPr algn="l"/>
             <a:r>
-              <a:rPr sz="1400" b="0">
-                <a:solidFill>
-                  <a:srgbClr val="606060"/>
+              <a:rPr sz="1200" b="0">
+                <a:solidFill>
+                  <a:srgbClr val="202020"/>
                 </a:solidFill>
                 <a:latin typeface="Microsoft YaHei"/>
               </a:rPr>
-              <a:t>→  任何只有一方参与的流程，都会漏掉至少 40% 的问题</a:t>
-            </a:r>
-          </a:p>
-        </p:txBody>
-      </p:sp>
-      <p:sp>
-        <p:nvSpPr>
-          <p:cNvPr id="22" name="TextBox 21"/>
+              <a:t>·  ChatGPT Codex Bot：UUID 截断 / loading 卡死 / UI/服务端不一致</a:t>
+            </a:r>
+          </a:p>
+        </p:txBody>
+      </p:sp>
+      <p:sp>
+        <p:nvSpPr>
+          <p:cNvPr id="25" name="TextBox 24"/>
+          <p:cNvSpPr txBox="1"/>
+          <p:nvPr/>
+        </p:nvSpPr>
+        <p:spPr>
+          <a:xfrm>
+            <a:off x="731520" y="5897880"/>
+            <a:ext cx="10972800" cy="457200"/>
+          </a:xfrm>
+          <a:prstGeom prst="rect">
+            <a:avLst/>
+          </a:prstGeom>
+          <a:noFill/>
+        </p:spPr>
+        <p:txBody>
+          <a:bodyPr wrap="square" lIns="0" rIns="0" tIns="0" bIns="0">
+            <a:spAutoFit/>
+          </a:bodyPr>
+          <a:lstStyle/>
+          <a:p>
+            <a:pPr algn="l"/>
+            <a:r>
+              <a:rPr sz="1200" b="1">
+                <a:solidFill>
+                  <a:srgbClr val="1A73E8"/>
+                </a:solidFill>
+                <a:latin typeface="Microsoft YaHei"/>
+              </a:rPr>
+              <a:t>→  多 AI 交叉审查比单一审查更可靠</a:t>
+            </a:r>
+          </a:p>
+        </p:txBody>
+      </p:sp>
+      <p:sp>
+        <p:nvSpPr>
+          <p:cNvPr id="26" name="TextBox 25"/>
           <p:cNvSpPr txBox="1"/>
           <p:nvPr/>
         </p:nvSpPr>
@@ -8295,7 +8435,7 @@
                 </a:solidFill>
                 <a:latin typeface="Microsoft YaHei"/>
               </a:rPr>
-              <a:t>四、AI 发现的问题（~35 个，4 轮审查）</a:t>
+              <a:t>四、AI 发现的问题（~38 个）</a:t>
             </a:r>
           </a:p>
         </p:txBody>
@@ -8351,7 +8491,7 @@
         </p:nvSpPr>
         <p:spPr>
           <a:xfrm>
-            <a:off x="457200" y="960120"/>
+            <a:off x="457200" y="914400"/>
             <a:ext cx="11247120" cy="365760"/>
           </a:xfrm>
           <a:prstGeom prst="rect">
@@ -8373,22 +8513,57 @@
                 </a:solidFill>
                 <a:latin typeface="Microsoft YaHei"/>
               </a:rPr>
-              <a:t>第 1 轮：综合审查（~20 个）</a:t>
+              <a:t>🔵 AI #1：Claude Code Agent（~35 个，4 轮审查）</a:t>
+            </a:r>
+          </a:p>
+        </p:txBody>
+      </p:sp>
+      <p:sp>
+        <p:nvSpPr>
+          <p:cNvPr id="5" name="TextBox 4"/>
+          <p:cNvSpPr txBox="1"/>
+          <p:nvPr/>
+        </p:nvSpPr>
+        <p:spPr>
+          <a:xfrm>
+            <a:off x="457200" y="1280160"/>
+            <a:ext cx="11247120" cy="365760"/>
+          </a:xfrm>
+          <a:prstGeom prst="rect">
+            <a:avLst/>
+          </a:prstGeom>
+          <a:noFill/>
+        </p:spPr>
+        <p:txBody>
+          <a:bodyPr wrap="square" lIns="0" rIns="0" tIns="0" bIns="0">
+            <a:spAutoFit/>
+          </a:bodyPr>
+          <a:lstStyle/>
+          <a:p>
+            <a:pPr algn="l"/>
+            <a:r>
+              <a:rPr sz="1000" b="0">
+                <a:solidFill>
+                  <a:srgbClr val="606060"/>
+                </a:solidFill>
+                <a:latin typeface="Microsoft YaHei"/>
+              </a:rPr>
+              <a:t>模型：claude-opus-4-7（1M 上下文）+ claude-sonnet-4-6  ·  工作模式：Level 4「自查自纠」</a:t>
             </a:r>
           </a:p>
         </p:txBody>
       </p:sp>
       <p:graphicFrame>
         <p:nvGraphicFramePr>
-          <p:cNvPr id="5" name="Table 4"/>
+          <p:cNvPr id="6" name="Table 5"/>
           <p:cNvGraphicFramePr>
             <a:graphicFrameLocks noGrp="1"/>
           </p:cNvGraphicFramePr>
           <p:nvPr/>
         </p:nvGraphicFramePr>
         <p:xfrm>
-          <a:off x="457200" y="1371600"/>
-          <a:ext cx="11247120" cy="2377440"/>
+          <a:off x="457200" y="1691640"/>
+          <a:ext cx="11247120" cy="1783080"/>
         </p:xfrm>
         <a:graphic>
           <a:graphicData uri="http://schemas.openxmlformats.org/drawingml/2006/table">
@@ -8397,10 +8572,10 @@
                 <a:tableStyleId>{5C22544A-7EE6-4342-B048-85BDC9FD1C3A}</a:tableStyleId>
               </a:tblPr>
               <a:tblGrid>
-                <a:gridCol w="2560320"/>
-                <a:gridCol w="8686800"/>
+                <a:gridCol w="2743200"/>
+                <a:gridCol w="8503920"/>
               </a:tblGrid>
-              <a:tr h="396240">
+              <a:tr h="445770">
                 <a:tc>
                   <a:txBody>
                     <a:bodyPr lIns="40000" rIns="40000" tIns="15000" bIns="15000"/>
@@ -8414,7 +8589,7 @@
                           </a:solidFill>
                           <a:latin typeface="Microsoft YaHei"/>
                         </a:rPr>
-                        <a:t>类别</a:t>
+                        <a:t>审查轮次</a:t>
                       </a:r>
                     </a:p>
                   </a:txBody>
@@ -8448,21 +8623,21 @@
                   </a:tcPr>
                 </a:tc>
               </a:tr>
-              <a:tr h="396240">
-                <a:tc>
-                  <a:txBody>
-                    <a:bodyPr lIns="40000" rIns="40000" tIns="10000" bIns="10000" wrap="square"/>
-                    <a:lstStyle/>
-                    <a:p>
-                      <a:pPr algn="l"/>
-                      <a:r>
-                        <a:rPr sz="1200">
-                          <a:solidFill>
-                            <a:srgbClr val="202020"/>
-                          </a:solidFill>
-                          <a:latin typeface="Microsoft YaHei"/>
-                        </a:rPr>
-                        <a:t>协议 / 序列化 (4)</a:t>
+              <a:tr h="445770">
+                <a:tc>
+                  <a:txBody>
+                    <a:bodyPr lIns="40000" rIns="40000" tIns="10000" bIns="10000" wrap="square"/>
+                    <a:lstStyle/>
+                    <a:p>
+                      <a:pPr algn="l"/>
+                      <a:r>
+                        <a:rPr sz="1200">
+                          <a:solidFill>
+                            <a:srgbClr val="202020"/>
+                          </a:solidFill>
+                          <a:latin typeface="Microsoft YaHei"/>
+                        </a:rPr>
+                        <a:t>第 1 轮 综合审查 (~20)</a:t>
                       </a:r>
                     </a:p>
                   </a:txBody>
@@ -8485,7 +8660,7 @@
                           </a:solidFill>
                           <a:latin typeface="Microsoft YaHei"/>
                         </a:rPr>
-                        <a:t>sealed class 缺 classDiscriminator；枚举值不对齐</a:t>
+                        <a:t>协议/序列化 4 · 会话/重连 3 · 房间状态机 4 · UI/状态同步 6 · 其他 3</a:t>
                       </a:r>
                     </a:p>
                   </a:txBody>
@@ -8496,21 +8671,21 @@
                   </a:tcPr>
                 </a:tc>
               </a:tr>
-              <a:tr h="396240">
-                <a:tc>
-                  <a:txBody>
-                    <a:bodyPr lIns="40000" rIns="40000" tIns="10000" bIns="10000" wrap="square"/>
-                    <a:lstStyle/>
-                    <a:p>
-                      <a:pPr algn="l"/>
-                      <a:r>
-                        <a:rPr sz="1200">
-                          <a:solidFill>
-                            <a:srgbClr val="202020"/>
-                          </a:solidFill>
-                          <a:latin typeface="Microsoft YaHei"/>
-                        </a:rPr>
-                        <a:t>会话 / 重连 (3)</a:t>
+              <a:tr h="445770">
+                <a:tc>
+                  <a:txBody>
+                    <a:bodyPr lIns="40000" rIns="40000" tIns="10000" bIns="10000" wrap="square"/>
+                    <a:lstStyle/>
+                    <a:p>
+                      <a:pPr algn="l"/>
+                      <a:r>
+                        <a:rPr sz="1200">
+                          <a:solidFill>
+                            <a:srgbClr val="202020"/>
+                          </a:solidFill>
+                          <a:latin typeface="Microsoft YaHei"/>
+                        </a:rPr>
+                        <a:t>第 2-3 轮 深层 (~8)</a:t>
                       </a:r>
                     </a:p>
                   </a:txBody>
@@ -8533,7 +8708,7 @@
                           </a:solidFill>
                           <a:latin typeface="Microsoft YaHei"/>
                         </a:rPr>
-                        <a:t>sessionToken 未设置；leaveRoom 未清空 token</a:t>
+                        <a:t>回合错位 · ArrayList 并发 · AI 回退链缺失 · collectedScore 硬编码 0</a:t>
                       </a:r>
                     </a:p>
                   </a:txBody>
@@ -8544,21 +8719,21 @@
                   </a:tcPr>
                 </a:tc>
               </a:tr>
-              <a:tr h="396240">
-                <a:tc>
-                  <a:txBody>
-                    <a:bodyPr lIns="40000" rIns="40000" tIns="10000" bIns="10000" wrap="square"/>
-                    <a:lstStyle/>
-                    <a:p>
-                      <a:pPr algn="l"/>
-                      <a:r>
-                        <a:rPr sz="1200">
-                          <a:solidFill>
-                            <a:srgbClr val="202020"/>
-                          </a:solidFill>
-                          <a:latin typeface="Microsoft YaHei"/>
-                        </a:rPr>
-                        <a:t>房间状态机 (4)</a:t>
+              <a:tr h="445770">
+                <a:tc>
+                  <a:txBody>
+                    <a:bodyPr lIns="40000" rIns="40000" tIns="10000" bIns="10000" wrap="square"/>
+                    <a:lstStyle/>
+                    <a:p>
+                      <a:pPr algn="l"/>
+                      <a:r>
+                        <a:rPr sz="1200">
+                          <a:solidFill>
+                            <a:srgbClr val="202020"/>
+                          </a:solidFill>
+                          <a:latin typeface="Microsoft YaHei"/>
+                        </a:rPr>
+                        <a:t>第 4 轮 根因 (~7) ⭐</a:t>
                       </a:r>
                     </a:p>
                   </a:txBody>
@@ -8581,103 +8756,7 @@
                           </a:solidFill>
                           <a:latin typeface="Microsoft YaHei"/>
                         </a:rPr>
-                        <a:t>未检查 WAITING；退出不补 AI；重复加入</a:t>
-                      </a:r>
-                    </a:p>
-                  </a:txBody>
-                  <a:tcPr>
-                    <a:solidFill>
-                      <a:srgbClr val="FFFFFF"/>
-                    </a:solidFill>
-                  </a:tcPr>
-                </a:tc>
-              </a:tr>
-              <a:tr h="396240">
-                <a:tc>
-                  <a:txBody>
-                    <a:bodyPr lIns="40000" rIns="40000" tIns="10000" bIns="10000" wrap="square"/>
-                    <a:lstStyle/>
-                    <a:p>
-                      <a:pPr algn="l"/>
-                      <a:r>
-                        <a:rPr sz="1200">
-                          <a:solidFill>
-                            <a:srgbClr val="202020"/>
-                          </a:solidFill>
-                          <a:latin typeface="Microsoft YaHei"/>
-                        </a:rPr>
-                        <a:t>UI / 状态同步 (6)</a:t>
-                      </a:r>
-                    </a:p>
-                  </a:txBody>
-                  <a:tcPr>
-                    <a:solidFill>
-                      <a:srgbClr val="F0F4FF"/>
-                    </a:solidFill>
-                  </a:tcPr>
-                </a:tc>
-                <a:tc>
-                  <a:txBody>
-                    <a:bodyPr lIns="40000" rIns="40000" tIns="10000" bIns="10000" wrap="square"/>
-                    <a:lstStyle/>
-                    <a:p>
-                      <a:pPr algn="l"/>
-                      <a:r>
-                        <a:rPr sz="1200">
-                          <a:solidFill>
-                            <a:srgbClr val="202020"/>
-                          </a:solidFill>
-                          <a:latin typeface="Microsoft YaHei"/>
-                        </a:rPr>
-                        <a:t>seatIndex%2 误算；初始化未刷新；onDestroy 未 guard</a:t>
-                      </a:r>
-                    </a:p>
-                  </a:txBody>
-                  <a:tcPr>
-                    <a:solidFill>
-                      <a:srgbClr val="F0F4FF"/>
-                    </a:solidFill>
-                  </a:tcPr>
-                </a:tc>
-              </a:tr>
-              <a:tr h="396240">
-                <a:tc>
-                  <a:txBody>
-                    <a:bodyPr lIns="40000" rIns="40000" tIns="10000" bIns="10000" wrap="square"/>
-                    <a:lstStyle/>
-                    <a:p>
-                      <a:pPr algn="l"/>
-                      <a:r>
-                        <a:rPr sz="1200">
-                          <a:solidFill>
-                            <a:srgbClr val="202020"/>
-                          </a:solidFill>
-                          <a:latin typeface="Microsoft YaHei"/>
-                        </a:rPr>
-                        <a:t>其他 (3)</a:t>
-                      </a:r>
-                    </a:p>
-                  </a:txBody>
-                  <a:tcPr>
-                    <a:solidFill>
-                      <a:srgbClr val="FFFFFF"/>
-                    </a:solidFill>
-                  </a:tcPr>
-                </a:tc>
-                <a:tc>
-                  <a:txBody>
-                    <a:bodyPr lIns="40000" rIns="40000" tIns="10000" bIns="10000" wrap="square"/>
-                    <a:lstStyle/>
-                    <a:p>
-                      <a:pPr algn="l"/>
-                      <a:r>
-                        <a:rPr sz="1200">
-                          <a:solidFill>
-                            <a:srgbClr val="202020"/>
-                          </a:solidFill>
-                          <a:latin typeface="Microsoft YaHei"/>
-                        </a:rPr>
-                        <a:t>applyState 版本反向；senderId 不稳定</a:t>
+                        <a:t>WebSocket CONNECTING send() 静默失败 · 多协程无锁并发 · 结算公式漏算</a:t>
                       </a:r>
                     </a:p>
                   </a:txBody>
@@ -8694,13 +8773,13 @@
       </p:graphicFrame>
       <p:sp>
         <p:nvSpPr>
-          <p:cNvPr id="6" name="TextBox 5"/>
+          <p:cNvPr id="7" name="TextBox 6"/>
           <p:cNvSpPr txBox="1"/>
           <p:nvPr/>
         </p:nvSpPr>
         <p:spPr>
           <a:xfrm>
-            <a:off x="457200" y="3931920"/>
+            <a:off x="457200" y="3703320"/>
             <a:ext cx="11247120" cy="365760"/>
           </a:xfrm>
           <a:prstGeom prst="rect">
@@ -8718,25 +8797,25 @@
             <a:r>
               <a:rPr sz="1400" b="1">
                 <a:solidFill>
-                  <a:srgbClr val="1A73E8"/>
+                  <a:srgbClr val="F57C00"/>
                 </a:solidFill>
                 <a:latin typeface="Microsoft YaHei"/>
               </a:rPr>
-              <a:t>第 2-3 轮：深层审查（~8 个）</a:t>
-            </a:r>
-          </a:p>
-        </p:txBody>
-      </p:sp>
-      <p:sp>
-        <p:nvSpPr>
-          <p:cNvPr id="7" name="TextBox 6"/>
+              <a:t>🟡 AI #2：ChatGPT Codex Review Bot（3 个）</a:t>
+            </a:r>
+          </a:p>
+        </p:txBody>
+      </p:sp>
+      <p:sp>
+        <p:nvSpPr>
+          <p:cNvPr id="8" name="TextBox 7"/>
           <p:cNvSpPr txBox="1"/>
           <p:nvPr/>
         </p:nvSpPr>
         <p:spPr>
           <a:xfrm>
-            <a:off x="640080" y="4343400"/>
-            <a:ext cx="10972800" cy="411480"/>
+            <a:off x="457200" y="4069080"/>
+            <a:ext cx="11247120" cy="365760"/>
           </a:xfrm>
           <a:prstGeom prst="rect">
             <a:avLst/>
@@ -8751,118 +8830,564 @@
           <a:p>
             <a:pPr algn="l"/>
             <a:r>
-              <a:rPr sz="1200" b="0">
-                <a:solidFill>
-                  <a:srgbClr val="202020"/>
+              <a:rPr sz="1000" b="0">
+                <a:solidFill>
+                  <a:srgbClr val="606060"/>
                 </a:solidFill>
                 <a:latin typeface="Microsoft YaHei"/>
               </a:rPr>
-              <a:t>·  赢家未设为下轮首家  ·  ArrayList 并发修改  ·  AI 回退链缺失  ·  collectedScore 硬编码 0</a:t>
-            </a:r>
-          </a:p>
-        </p:txBody>
-      </p:sp>
-      <p:sp>
-        <p:nvSpPr>
-          <p:cNvPr id="8" name="TextBox 7"/>
-          <p:cNvSpPr txBox="1"/>
-          <p:nvPr/>
-        </p:nvSpPr>
-        <p:spPr>
-          <a:xfrm>
-            <a:off x="457200" y="4937760"/>
-            <a:ext cx="11247120" cy="365760"/>
-          </a:xfrm>
-          <a:prstGeom prst="rect">
+              <a:t>Agent：chatgpt-codex-connector[bot]  ·  PR 自动审查触发  ·  按 P1/P2 标注优先级</a:t>
+            </a:r>
+          </a:p>
+        </p:txBody>
+      </p:sp>
+      <p:graphicFrame>
+        <p:nvGraphicFramePr>
+          <p:cNvPr id="9" name="Table 8"/>
+          <p:cNvGraphicFramePr>
+            <a:graphicFrameLocks noGrp="1"/>
+          </p:cNvGraphicFramePr>
+          <p:nvPr/>
+        </p:nvGraphicFramePr>
+        <p:xfrm>
+          <a:off x="457200" y="4526280"/>
+          <a:ext cx="11247120" cy="1463040"/>
+        </p:xfrm>
+        <a:graphic>
+          <a:graphicData uri="http://schemas.openxmlformats.org/drawingml/2006/table">
+            <a:tbl>
+              <a:tblPr firstRow="1" bandRow="1">
+                <a:tableStyleId>{5C22544A-7EE6-4342-B048-85BDC9FD1C3A}</a:tableStyleId>
+              </a:tblPr>
+              <a:tblGrid>
+                <a:gridCol w="731520"/>
+                <a:gridCol w="822960"/>
+                <a:gridCol w="2194560"/>
+                <a:gridCol w="5029200"/>
+                <a:gridCol w="2468880"/>
+              </a:tblGrid>
+              <a:tr h="365760">
+                <a:tc>
+                  <a:txBody>
+                    <a:bodyPr lIns="40000" rIns="40000" tIns="15000" bIns="15000"/>
+                    <a:lstStyle/>
+                    <a:p>
+                      <a:pPr algn="ctr"/>
+                      <a:r>
+                        <a:rPr sz="1200" b="1">
+                          <a:solidFill>
+                            <a:srgbClr val="FFFFFF"/>
+                          </a:solidFill>
+                          <a:latin typeface="Microsoft YaHei"/>
+                        </a:rPr>
+                        <a:t>PR</a:t>
+                      </a:r>
+                    </a:p>
+                  </a:txBody>
+                  <a:tcPr>
+                    <a:solidFill>
+                      <a:srgbClr val="F57C00"/>
+                    </a:solidFill>
+                  </a:tcPr>
+                </a:tc>
+                <a:tc>
+                  <a:txBody>
+                    <a:bodyPr lIns="40000" rIns="40000" tIns="15000" bIns="15000"/>
+                    <a:lstStyle/>
+                    <a:p>
+                      <a:pPr algn="ctr"/>
+                      <a:r>
+                        <a:rPr sz="1200" b="1">
+                          <a:solidFill>
+                            <a:srgbClr val="FFFFFF"/>
+                          </a:solidFill>
+                          <a:latin typeface="Microsoft YaHei"/>
+                        </a:rPr>
+                        <a:t>优先级</a:t>
+                      </a:r>
+                    </a:p>
+                  </a:txBody>
+                  <a:tcPr>
+                    <a:solidFill>
+                      <a:srgbClr val="F57C00"/>
+                    </a:solidFill>
+                  </a:tcPr>
+                </a:tc>
+                <a:tc>
+                  <a:txBody>
+                    <a:bodyPr lIns="40000" rIns="40000" tIns="15000" bIns="15000"/>
+                    <a:lstStyle/>
+                    <a:p>
+                      <a:pPr algn="ctr"/>
+                      <a:r>
+                        <a:rPr sz="1200" b="1">
+                          <a:solidFill>
+                            <a:srgbClr val="FFFFFF"/>
+                          </a:solidFill>
+                          <a:latin typeface="Microsoft YaHei"/>
+                        </a:rPr>
+                        <a:t>位置</a:t>
+                      </a:r>
+                    </a:p>
+                  </a:txBody>
+                  <a:tcPr>
+                    <a:solidFill>
+                      <a:srgbClr val="F57C00"/>
+                    </a:solidFill>
+                  </a:tcPr>
+                </a:tc>
+                <a:tc>
+                  <a:txBody>
+                    <a:bodyPr lIns="40000" rIns="40000" tIns="15000" bIns="15000"/>
+                    <a:lstStyle/>
+                    <a:p>
+                      <a:pPr algn="ctr"/>
+                      <a:r>
+                        <a:rPr sz="1200" b="1">
+                          <a:solidFill>
+                            <a:srgbClr val="FFFFFF"/>
+                          </a:solidFill>
+                          <a:latin typeface="Microsoft YaHei"/>
+                        </a:rPr>
+                        <a:t>意见</a:t>
+                      </a:r>
+                    </a:p>
+                  </a:txBody>
+                  <a:tcPr>
+                    <a:solidFill>
+                      <a:srgbClr val="F57C00"/>
+                    </a:solidFill>
+                  </a:tcPr>
+                </a:tc>
+                <a:tc>
+                  <a:txBody>
+                    <a:bodyPr lIns="40000" rIns="40000" tIns="15000" bIns="15000"/>
+                    <a:lstStyle/>
+                    <a:p>
+                      <a:pPr algn="ctr"/>
+                      <a:r>
+                        <a:rPr sz="1200" b="1">
+                          <a:solidFill>
+                            <a:srgbClr val="FFFFFF"/>
+                          </a:solidFill>
+                          <a:latin typeface="Microsoft YaHei"/>
+                        </a:rPr>
+                        <a:t>处置</a:t>
+                      </a:r>
+                    </a:p>
+                  </a:txBody>
+                  <a:tcPr>
+                    <a:solidFill>
+                      <a:srgbClr val="F57C00"/>
+                    </a:solidFill>
+                  </a:tcPr>
+                </a:tc>
+              </a:tr>
+              <a:tr h="365760">
+                <a:tc>
+                  <a:txBody>
+                    <a:bodyPr lIns="40000" rIns="40000" tIns="10000" bIns="10000" wrap="square"/>
+                    <a:lstStyle/>
+                    <a:p>
+                      <a:pPr algn="l"/>
+                      <a:r>
+                        <a:rPr sz="1200">
+                          <a:solidFill>
+                            <a:srgbClr val="202020"/>
+                          </a:solidFill>
+                          <a:latin typeface="Microsoft YaHei"/>
+                        </a:rPr>
+                        <a:t>#29</a:t>
+                      </a:r>
+                    </a:p>
+                  </a:txBody>
+                  <a:tcPr>
+                    <a:solidFill>
+                      <a:srgbClr val="FFFFFF"/>
+                    </a:solidFill>
+                  </a:tcPr>
+                </a:tc>
+                <a:tc>
+                  <a:txBody>
+                    <a:bodyPr lIns="40000" rIns="40000" tIns="10000" bIns="10000" wrap="square"/>
+                    <a:lstStyle/>
+                    <a:p>
+                      <a:pPr algn="l"/>
+                      <a:r>
+                        <a:rPr sz="1200">
+                          <a:solidFill>
+                            <a:srgbClr val="202020"/>
+                          </a:solidFill>
+                          <a:latin typeface="Microsoft YaHei"/>
+                        </a:rPr>
+                        <a:t>P1</a:t>
+                      </a:r>
+                    </a:p>
+                  </a:txBody>
+                  <a:tcPr>
+                    <a:solidFill>
+                      <a:srgbClr val="FFFFFF"/>
+                    </a:solidFill>
+                  </a:tcPr>
+                </a:tc>
+                <a:tc>
+                  <a:txBody>
+                    <a:bodyPr lIns="40000" rIns="40000" tIns="10000" bIns="10000" wrap="square"/>
+                    <a:lstStyle/>
+                    <a:p>
+                      <a:pPr algn="l"/>
+                      <a:r>
+                        <a:rPr sz="1200">
+                          <a:solidFill>
+                            <a:srgbClr val="202020"/>
+                          </a:solidFill>
+                          <a:latin typeface="Microsoft YaHei"/>
+                        </a:rPr>
+                        <a:t>Application.kt:48</a:t>
+                      </a:r>
+                    </a:p>
+                  </a:txBody>
+                  <a:tcPr>
+                    <a:solidFill>
+                      <a:srgbClr val="FFFFFF"/>
+                    </a:solidFill>
+                  </a:tcPr>
+                </a:tc>
+                <a:tc>
+                  <a:txBody>
+                    <a:bodyPr lIns="40000" rIns="40000" tIns="10000" bIns="10000" wrap="square"/>
+                    <a:lstStyle/>
+                    <a:p>
+                      <a:pPr algn="l"/>
+                      <a:r>
+                        <a:rPr sz="1200">
+                          <a:solidFill>
+                            <a:srgbClr val="202020"/>
+                          </a:solidFill>
+                          <a:latin typeface="Microsoft YaHei"/>
+                        </a:rPr>
+                        <a:t>UUID 截断到 8 字符 → 碰撞致跨用户混乱</a:t>
+                      </a:r>
+                    </a:p>
+                  </a:txBody>
+                  <a:tcPr>
+                    <a:solidFill>
+                      <a:srgbClr val="FFFFFF"/>
+                    </a:solidFill>
+                  </a:tcPr>
+                </a:tc>
+                <a:tc>
+                  <a:txBody>
+                    <a:bodyPr lIns="40000" rIns="40000" tIns="10000" bIns="10000" wrap="square"/>
+                    <a:lstStyle/>
+                    <a:p>
+                      <a:pPr algn="l"/>
+                      <a:r>
+                        <a:rPr sz="1200">
+                          <a:solidFill>
+                            <a:srgbClr val="202020"/>
+                          </a:solidFill>
+                          <a:latin typeface="Microsoft YaHei"/>
+                        </a:rPr>
+                        <a:t>❌→✅ 本次修复</a:t>
+                      </a:r>
+                    </a:p>
+                  </a:txBody>
+                  <a:tcPr>
+                    <a:solidFill>
+                      <a:srgbClr val="FFFFFF"/>
+                    </a:solidFill>
+                  </a:tcPr>
+                </a:tc>
+              </a:tr>
+              <a:tr h="365760">
+                <a:tc>
+                  <a:txBody>
+                    <a:bodyPr lIns="40000" rIns="40000" tIns="10000" bIns="10000" wrap="square"/>
+                    <a:lstStyle/>
+                    <a:p>
+                      <a:pPr algn="l"/>
+                      <a:r>
+                        <a:rPr sz="1200">
+                          <a:solidFill>
+                            <a:srgbClr val="202020"/>
+                          </a:solidFill>
+                          <a:latin typeface="Microsoft YaHei"/>
+                        </a:rPr>
+                        <a:t>#31</a:t>
+                      </a:r>
+                    </a:p>
+                  </a:txBody>
+                  <a:tcPr>
+                    <a:solidFill>
+                      <a:srgbClr val="F0F4FF"/>
+                    </a:solidFill>
+                  </a:tcPr>
+                </a:tc>
+                <a:tc>
+                  <a:txBody>
+                    <a:bodyPr lIns="40000" rIns="40000" tIns="10000" bIns="10000" wrap="square"/>
+                    <a:lstStyle/>
+                    <a:p>
+                      <a:pPr algn="l"/>
+                      <a:r>
+                        <a:rPr sz="1200">
+                          <a:solidFill>
+                            <a:srgbClr val="202020"/>
+                          </a:solidFill>
+                          <a:latin typeface="Microsoft YaHei"/>
+                        </a:rPr>
+                        <a:t>P1</a:t>
+                      </a:r>
+                    </a:p>
+                  </a:txBody>
+                  <a:tcPr>
+                    <a:solidFill>
+                      <a:srgbClr val="F0F4FF"/>
+                    </a:solidFill>
+                  </a:tcPr>
+                </a:tc>
+                <a:tc>
+                  <a:txBody>
+                    <a:bodyPr lIns="40000" rIns="40000" tIns="10000" bIns="10000" wrap="square"/>
+                    <a:lstStyle/>
+                    <a:p>
+                      <a:pPr algn="l"/>
+                      <a:r>
+                        <a:rPr sz="1200">
+                          <a:solidFill>
+                            <a:srgbClr val="202020"/>
+                          </a:solidFill>
+                          <a:latin typeface="Microsoft YaHei"/>
+                        </a:rPr>
+                        <a:t>LobbyActivity.kt:219</a:t>
+                      </a:r>
+                    </a:p>
+                  </a:txBody>
+                  <a:tcPr>
+                    <a:solidFill>
+                      <a:srgbClr val="F0F4FF"/>
+                    </a:solidFill>
+                  </a:tcPr>
+                </a:tc>
+                <a:tc>
+                  <a:txBody>
+                    <a:bodyPr lIns="40000" rIns="40000" tIns="10000" bIns="10000" wrap="square"/>
+                    <a:lstStyle/>
+                    <a:p>
+                      <a:pPr algn="l"/>
+                      <a:r>
+                        <a:rPr sz="1200">
+                          <a:solidFill>
+                            <a:srgbClr val="202020"/>
+                          </a:solidFill>
+                          <a:latin typeface="Microsoft YaHei"/>
+                        </a:rPr>
+                        <a:t>重连后 loading 遮罩可能永久卡住</a:t>
+                      </a:r>
+                    </a:p>
+                  </a:txBody>
+                  <a:tcPr>
+                    <a:solidFill>
+                      <a:srgbClr val="F0F4FF"/>
+                    </a:solidFill>
+                  </a:tcPr>
+                </a:tc>
+                <a:tc>
+                  <a:txBody>
+                    <a:bodyPr lIns="40000" rIns="40000" tIns="10000" bIns="10000" wrap="square"/>
+                    <a:lstStyle/>
+                    <a:p>
+                      <a:pPr algn="l"/>
+                      <a:r>
+                        <a:rPr sz="1200">
+                          <a:solidFill>
+                            <a:srgbClr val="202020"/>
+                          </a:solidFill>
+                          <a:latin typeface="Microsoft YaHei"/>
+                        </a:rPr>
+                        <a:t>✅ PR #33 已修复</a:t>
+                      </a:r>
+                    </a:p>
+                  </a:txBody>
+                  <a:tcPr>
+                    <a:solidFill>
+                      <a:srgbClr val="F0F4FF"/>
+                    </a:solidFill>
+                  </a:tcPr>
+                </a:tc>
+              </a:tr>
+              <a:tr h="365760">
+                <a:tc>
+                  <a:txBody>
+                    <a:bodyPr lIns="40000" rIns="40000" tIns="10000" bIns="10000" wrap="square"/>
+                    <a:lstStyle/>
+                    <a:p>
+                      <a:pPr algn="l"/>
+                      <a:r>
+                        <a:rPr sz="1200">
+                          <a:solidFill>
+                            <a:srgbClr val="202020"/>
+                          </a:solidFill>
+                          <a:latin typeface="Microsoft YaHei"/>
+                        </a:rPr>
+                        <a:t>#33</a:t>
+                      </a:r>
+                    </a:p>
+                  </a:txBody>
+                  <a:tcPr>
+                    <a:solidFill>
+                      <a:srgbClr val="FFFFFF"/>
+                    </a:solidFill>
+                  </a:tcPr>
+                </a:tc>
+                <a:tc>
+                  <a:txBody>
+                    <a:bodyPr lIns="40000" rIns="40000" tIns="10000" bIns="10000" wrap="square"/>
+                    <a:lstStyle/>
+                    <a:p>
+                      <a:pPr algn="l"/>
+                      <a:r>
+                        <a:rPr sz="1200">
+                          <a:solidFill>
+                            <a:srgbClr val="202020"/>
+                          </a:solidFill>
+                          <a:latin typeface="Microsoft YaHei"/>
+                        </a:rPr>
+                        <a:t>P2</a:t>
+                      </a:r>
+                    </a:p>
+                  </a:txBody>
+                  <a:tcPr>
+                    <a:solidFill>
+                      <a:srgbClr val="FFFFFF"/>
+                    </a:solidFill>
+                  </a:tcPr>
+                </a:tc>
+                <a:tc>
+                  <a:txBody>
+                    <a:bodyPr lIns="40000" rIns="40000" tIns="10000" bIns="10000" wrap="square"/>
+                    <a:lstStyle/>
+                    <a:p>
+                      <a:pPr algn="l"/>
+                      <a:r>
+                        <a:rPr sz="1200">
+                          <a:solidFill>
+                            <a:srgbClr val="202020"/>
+                          </a:solidFill>
+                          <a:latin typeface="Microsoft YaHei"/>
+                        </a:rPr>
+                        <a:t>MainActivity.kt</a:t>
+                      </a:r>
+                    </a:p>
+                  </a:txBody>
+                  <a:tcPr>
+                    <a:solidFill>
+                      <a:srgbClr val="FFFFFF"/>
+                    </a:solidFill>
+                  </a:tcPr>
+                </a:tc>
+                <a:tc>
+                  <a:txBody>
+                    <a:bodyPr lIns="40000" rIns="40000" tIns="10000" bIns="10000" wrap="square"/>
+                    <a:lstStyle/>
+                    <a:p>
+                      <a:pPr algn="l"/>
+                      <a:r>
+                        <a:rPr sz="1200">
+                          <a:solidFill>
+                            <a:srgbClr val="202020"/>
+                          </a:solidFill>
+                          <a:latin typeface="Microsoft YaHei"/>
+                        </a:rPr>
+                        <a:t>UI 提示按房间名加入但服务端不支持</a:t>
+                      </a:r>
+                    </a:p>
+                  </a:txBody>
+                  <a:tcPr>
+                    <a:solidFill>
+                      <a:srgbClr val="FFFFFF"/>
+                    </a:solidFill>
+                  </a:tcPr>
+                </a:tc>
+                <a:tc>
+                  <a:txBody>
+                    <a:bodyPr lIns="40000" rIns="40000" tIns="10000" bIns="10000" wrap="square"/>
+                    <a:lstStyle/>
+                    <a:p>
+                      <a:pPr algn="l"/>
+                      <a:r>
+                        <a:rPr sz="1200">
+                          <a:solidFill>
+                            <a:srgbClr val="202020"/>
+                          </a:solidFill>
+                          <a:latin typeface="Microsoft YaHei"/>
+                        </a:rPr>
+                        <a:t>✅ UI 重构后修复</a:t>
+                      </a:r>
+                    </a:p>
+                  </a:txBody>
+                  <a:tcPr>
+                    <a:solidFill>
+                      <a:srgbClr val="FFFFFF"/>
+                    </a:solidFill>
+                  </a:tcPr>
+                </a:tc>
+              </a:tr>
+            </a:tbl>
+          </a:graphicData>
+        </a:graphic>
+      </p:graphicFrame>
+      <p:sp>
+        <p:nvSpPr>
+          <p:cNvPr id="10" name="Rounded Rectangle 9"/>
+          <p:cNvSpPr/>
+          <p:nvPr/>
+        </p:nvSpPr>
+        <p:spPr>
+          <a:xfrm>
+            <a:off x="457200" y="6126480"/>
+            <a:ext cx="11338560" cy="502920"/>
+          </a:xfrm>
+          <a:prstGeom prst="roundRect">
             <a:avLst/>
           </a:prstGeom>
-          <a:noFill/>
-        </p:spPr>
-        <p:txBody>
-          <a:bodyPr wrap="square" lIns="0" rIns="0" tIns="0" bIns="0">
-            <a:spAutoFit/>
-          </a:bodyPr>
-          <a:lstStyle/>
-          <a:p>
-            <a:pPr algn="l"/>
-            <a:r>
-              <a:rPr sz="1400" b="1">
-                <a:solidFill>
-                  <a:srgbClr val="E53935"/>
+          <a:solidFill>
+            <a:srgbClr val="F0F4FF"/>
+          </a:solidFill>
+          <a:ln>
+            <a:solidFill>
+              <a:srgbClr val="1A73E8"/>
+            </a:solidFill>
+          </a:ln>
+        </p:spPr>
+        <p:style>
+          <a:lnRef idx="1">
+            <a:schemeClr val="accent1"/>
+          </a:lnRef>
+          <a:fillRef idx="3">
+            <a:schemeClr val="accent1"/>
+          </a:fillRef>
+          <a:effectRef idx="2">
+            <a:schemeClr val="accent1"/>
+          </a:effectRef>
+          <a:fontRef idx="minor">
+            <a:schemeClr val="lt1"/>
+          </a:fontRef>
+        </p:style>
+        <p:txBody>
+          <a:bodyPr rtlCol="0" anchor="ctr" wrap="square" lIns="150000" rIns="150000"/>
+          <a:lstStyle/>
+          <a:p>
+            <a:pPr algn="ctr"/>
+            <a:r>
+              <a:rPr sz="1200" b="1">
+                <a:solidFill>
+                  <a:srgbClr val="1A73E8"/>
                 </a:solidFill>
                 <a:latin typeface="Microsoft YaHei"/>
               </a:rPr>
-              <a:t>第 4 轮：根因专项（~7 个） — 这一轮才挖到真正的卡死根因</a:t>
-            </a:r>
-          </a:p>
-        </p:txBody>
-      </p:sp>
-      <p:sp>
-        <p:nvSpPr>
-          <p:cNvPr id="9" name="TextBox 8"/>
-          <p:cNvSpPr txBox="1"/>
-          <p:nvPr/>
-        </p:nvSpPr>
-        <p:spPr>
-          <a:xfrm>
-            <a:off x="640080" y="5349240"/>
-            <a:ext cx="10972800" cy="411480"/>
-          </a:xfrm>
-          <a:prstGeom prst="rect">
-            <a:avLst/>
-          </a:prstGeom>
-          <a:noFill/>
-        </p:spPr>
-        <p:txBody>
-          <a:bodyPr wrap="square" lIns="0" rIns="0" tIns="0" bIns="0">
-            <a:spAutoFit/>
-          </a:bodyPr>
-          <a:lstStyle/>
-          <a:p>
-            <a:pPr algn="l"/>
-            <a:r>
-              <a:rPr sz="1200" b="0">
-                <a:solidFill>
-                  <a:srgbClr val="202020"/>
-                </a:solidFill>
-                <a:latin typeface="Microsoft YaHei"/>
-              </a:rPr>
-              <a:t>·  WebSocket CONNECTING 时 send() 静默失败（重连根因）</a:t>
-            </a:r>
-          </a:p>
-        </p:txBody>
-      </p:sp>
-      <p:sp>
-        <p:nvSpPr>
-          <p:cNvPr id="10" name="TextBox 9"/>
-          <p:cNvSpPr txBox="1"/>
-          <p:nvPr/>
-        </p:nvSpPr>
-        <p:spPr>
-          <a:xfrm>
-            <a:off x="640080" y="5715000"/>
-            <a:ext cx="10972800" cy="411480"/>
-          </a:xfrm>
-          <a:prstGeom prst="rect">
-            <a:avLst/>
-          </a:prstGeom>
-          <a:noFill/>
-        </p:spPr>
-        <p:txBody>
-          <a:bodyPr wrap="square" lIns="0" rIns="0" tIns="0" bIns="0">
-            <a:spAutoFit/>
-          </a:bodyPr>
-          <a:lstStyle/>
-          <a:p>
-            <a:pPr algn="l"/>
-            <a:r>
-              <a:rPr sz="1200" b="0">
-                <a:solidFill>
-                  <a:srgbClr val="202020"/>
-                </a:solidFill>
-                <a:latin typeface="Microsoft YaHei"/>
-              </a:rPr>
-              <a:t>·  多协程无锁并发写 state.hands（卡死根因）</a:t>
+              <a:t>💡 关键观察：Claude 偏向「全局逻辑链路」 vs Codex 偏向「细粒度风险点」 — 两 AI 几乎不重叠</a:t>
             </a:r>
           </a:p>
         </p:txBody>
@@ -8870,41 +9395,6 @@
       <p:sp>
         <p:nvSpPr>
           <p:cNvPr id="11" name="TextBox 10"/>
-          <p:cNvSpPr txBox="1"/>
-          <p:nvPr/>
-        </p:nvSpPr>
-        <p:spPr>
-          <a:xfrm>
-            <a:off x="640080" y="6080760"/>
-            <a:ext cx="10972800" cy="411480"/>
-          </a:xfrm>
-          <a:prstGeom prst="rect">
-            <a:avLst/>
-          </a:prstGeom>
-          <a:noFill/>
-        </p:spPr>
-        <p:txBody>
-          <a:bodyPr wrap="square" lIns="0" rIns="0" tIns="0" bIns="0">
-            <a:spAutoFit/>
-          </a:bodyPr>
-          <a:lstStyle/>
-          <a:p>
-            <a:pPr algn="l"/>
-            <a:r>
-              <a:rPr sz="1200" b="0">
-                <a:solidFill>
-                  <a:srgbClr val="202020"/>
-                </a:solidFill>
-                <a:latin typeface="Microsoft YaHei"/>
-              </a:rPr>
-              <a:t>·  playerScores 整体缺失  ·  结算公式漏算输方未走完已收分</a:t>
-            </a:r>
-          </a:p>
-        </p:txBody>
-      </p:sp>
-      <p:sp>
-        <p:nvSpPr>
-          <p:cNvPr id="12" name="TextBox 11"/>
           <p:cNvSpPr txBox="1"/>
           <p:nvPr/>
         </p:nvSpPr>

--- a/docs/dev_summary.pptx
+++ b/docs/dev_summary.pptx
@@ -15,6 +15,9 @@
     <p:sldId id="263" r:id="rId14"/>
     <p:sldId id="264" r:id="rId15"/>
     <p:sldId id="265" r:id="rId16"/>
+    <p:sldId id="266" r:id="rId17"/>
+    <p:sldId id="267" r:id="rId18"/>
+    <p:sldId id="268" r:id="rId19"/>
   </p:sldIdLst>
   <p:sldSz cx="12191695" cy="6858000" type="screen4x3"/>
   <p:notesSz cx="6858000" cy="9144000"/>
@@ -3380,7 +3383,42 @@
                 </a:solidFill>
                 <a:latin typeface="Microsoft YaHei"/>
               </a:rPr>
-              <a:t>⑤  关键技术修复    ⑥  经验总结与后续行动</a:t>
+              <a:t>⑤  AI 质量改进路径：多 Claude 协同 + 跨 vendor</a:t>
+            </a:r>
+          </a:p>
+        </p:txBody>
+      </p:sp>
+      <p:sp>
+        <p:nvSpPr>
+          <p:cNvPr id="10" name="TextBox 9"/>
+          <p:cNvSpPr txBox="1"/>
+          <p:nvPr/>
+        </p:nvSpPr>
+        <p:spPr>
+          <a:xfrm>
+            <a:off x="914400" y="5486400"/>
+            <a:ext cx="10058400" cy="365760"/>
+          </a:xfrm>
+          <a:prstGeom prst="rect">
+            <a:avLst/>
+          </a:prstGeom>
+          <a:noFill/>
+        </p:spPr>
+        <p:txBody>
+          <a:bodyPr wrap="square" lIns="0" rIns="0" tIns="0" bIns="0">
+            <a:spAutoFit/>
+          </a:bodyPr>
+          <a:lstStyle/>
+          <a:p>
+            <a:pPr algn="l"/>
+            <a:r>
+              <a:rPr sz="1400" b="0">
+                <a:solidFill>
+                  <a:srgbClr val="202020"/>
+                </a:solidFill>
+                <a:latin typeface="Microsoft YaHei"/>
+              </a:rPr>
+              <a:t>⑥  关键技术修复    ⑦  经验总结与后续行动</a:t>
             </a:r>
           </a:p>
         </p:txBody>
@@ -3433,7 +3471,2298 @@
                 </a:solidFill>
                 <a:latin typeface="Microsoft YaHei"/>
               </a:rPr>
-              <a:t>七、经验总结 &amp; 后续行动</a:t>
+              <a:t>六、多 Claude 模型协同的 5 种模式</a:t>
+            </a:r>
+          </a:p>
+        </p:txBody>
+      </p:sp>
+      <p:sp>
+        <p:nvSpPr>
+          <p:cNvPr id="3" name="Rectangle 2"/>
+          <p:cNvSpPr/>
+          <p:nvPr/>
+        </p:nvSpPr>
+        <p:spPr>
+          <a:xfrm>
+            <a:off x="457200" y="777240"/>
+            <a:ext cx="11247120" cy="36576"/>
+          </a:xfrm>
+          <a:prstGeom prst="rect">
+            <a:avLst/>
+          </a:prstGeom>
+          <a:solidFill>
+            <a:srgbClr val="1A73E8"/>
+          </a:solidFill>
+          <a:ln>
+            <a:noFill/>
+          </a:ln>
+        </p:spPr>
+        <p:style>
+          <a:lnRef idx="1">
+            <a:schemeClr val="accent1"/>
+          </a:lnRef>
+          <a:fillRef idx="3">
+            <a:schemeClr val="accent1"/>
+          </a:fillRef>
+          <a:effectRef idx="2">
+            <a:schemeClr val="accent1"/>
+          </a:effectRef>
+          <a:fontRef idx="minor">
+            <a:schemeClr val="lt1"/>
+          </a:fontRef>
+        </p:style>
+        <p:txBody>
+          <a:bodyPr rtlCol="0" anchor="ctr"/>
+          <a:lstStyle/>
+          <a:p>
+            <a:pPr algn="ctr"/>
+          </a:p>
+        </p:txBody>
+      </p:sp>
+      <p:sp>
+        <p:nvSpPr>
+          <p:cNvPr id="4" name="TextBox 3"/>
+          <p:cNvSpPr txBox="1"/>
+          <p:nvPr/>
+        </p:nvSpPr>
+        <p:spPr>
+          <a:xfrm>
+            <a:off x="457200" y="914400"/>
+            <a:ext cx="11247120" cy="365760"/>
+          </a:xfrm>
+          <a:prstGeom prst="rect">
+            <a:avLst/>
+          </a:prstGeom>
+          <a:noFill/>
+        </p:spPr>
+        <p:txBody>
+          <a:bodyPr wrap="square" lIns="0" rIns="0" tIns="0" bIns="0">
+            <a:spAutoFit/>
+          </a:bodyPr>
+          <a:lstStyle/>
+          <a:p>
+            <a:pPr algn="l"/>
+            <a:r>
+              <a:rPr sz="1400" b="1">
+                <a:solidFill>
+                  <a:srgbClr val="1A73E8"/>
+                </a:solidFill>
+                <a:latin typeface="Microsoft YaHei"/>
+              </a:rPr>
+              <a:t>可用模型</a:t>
+            </a:r>
+          </a:p>
+        </p:txBody>
+      </p:sp>
+      <p:graphicFrame>
+        <p:nvGraphicFramePr>
+          <p:cNvPr id="5" name="Table 4"/>
+          <p:cNvGraphicFramePr>
+            <a:graphicFrameLocks noGrp="1"/>
+          </p:cNvGraphicFramePr>
+          <p:nvPr/>
+        </p:nvGraphicFramePr>
+        <p:xfrm>
+          <a:off x="457200" y="1325880"/>
+          <a:ext cx="11247120" cy="1463040"/>
+        </p:xfrm>
+        <a:graphic>
+          <a:graphicData uri="http://schemas.openxmlformats.org/drawingml/2006/table">
+            <a:tbl>
+              <a:tblPr firstRow="1" bandRow="1">
+                <a:tableStyleId>{5C22544A-7EE6-4342-B048-85BDC9FD1C3A}</a:tableStyleId>
+              </a:tblPr>
+              <a:tblGrid>
+                <a:gridCol w="2743200"/>
+                <a:gridCol w="4114800"/>
+                <a:gridCol w="4389120"/>
+              </a:tblGrid>
+              <a:tr h="365760">
+                <a:tc>
+                  <a:txBody>
+                    <a:bodyPr lIns="40000" rIns="40000" tIns="15000" bIns="15000"/>
+                    <a:lstStyle/>
+                    <a:p>
+                      <a:pPr algn="ctr"/>
+                      <a:r>
+                        <a:rPr sz="1200" b="1">
+                          <a:solidFill>
+                            <a:srgbClr val="FFFFFF"/>
+                          </a:solidFill>
+                          <a:latin typeface="Microsoft YaHei"/>
+                        </a:rPr>
+                        <a:t>模型</a:t>
+                      </a:r>
+                    </a:p>
+                  </a:txBody>
+                  <a:tcPr>
+                    <a:solidFill>
+                      <a:srgbClr val="1A73E8"/>
+                    </a:solidFill>
+                  </a:tcPr>
+                </a:tc>
+                <a:tc>
+                  <a:txBody>
+                    <a:bodyPr lIns="40000" rIns="40000" tIns="15000" bIns="15000"/>
+                    <a:lstStyle/>
+                    <a:p>
+                      <a:pPr algn="ctr"/>
+                      <a:r>
+                        <a:rPr sz="1200" b="1">
+                          <a:solidFill>
+                            <a:srgbClr val="FFFFFF"/>
+                          </a:solidFill>
+                          <a:latin typeface="Microsoft YaHei"/>
+                        </a:rPr>
+                        <a:t>特点</a:t>
+                      </a:r>
+                    </a:p>
+                  </a:txBody>
+                  <a:tcPr>
+                    <a:solidFill>
+                      <a:srgbClr val="1A73E8"/>
+                    </a:solidFill>
+                  </a:tcPr>
+                </a:tc>
+                <a:tc>
+                  <a:txBody>
+                    <a:bodyPr lIns="40000" rIns="40000" tIns="15000" bIns="15000"/>
+                    <a:lstStyle/>
+                    <a:p>
+                      <a:pPr algn="ctr"/>
+                      <a:r>
+                        <a:rPr sz="1200" b="1">
+                          <a:solidFill>
+                            <a:srgbClr val="FFFFFF"/>
+                          </a:solidFill>
+                          <a:latin typeface="Microsoft YaHei"/>
+                        </a:rPr>
+                        <a:t>适合的角色</a:t>
+                      </a:r>
+                    </a:p>
+                  </a:txBody>
+                  <a:tcPr>
+                    <a:solidFill>
+                      <a:srgbClr val="1A73E8"/>
+                    </a:solidFill>
+                  </a:tcPr>
+                </a:tc>
+              </a:tr>
+              <a:tr h="365760">
+                <a:tc>
+                  <a:txBody>
+                    <a:bodyPr lIns="40000" rIns="40000" tIns="10000" bIns="10000" wrap="square"/>
+                    <a:lstStyle/>
+                    <a:p>
+                      <a:pPr algn="l"/>
+                      <a:r>
+                        <a:rPr sz="1200">
+                          <a:solidFill>
+                            <a:srgbClr val="202020"/>
+                          </a:solidFill>
+                          <a:latin typeface="Microsoft YaHei"/>
+                        </a:rPr>
+                        <a:t>Claude Opus 4.7（1M）</a:t>
+                      </a:r>
+                    </a:p>
+                  </a:txBody>
+                  <a:tcPr>
+                    <a:solidFill>
+                      <a:srgbClr val="FFFFFF"/>
+                    </a:solidFill>
+                  </a:tcPr>
+                </a:tc>
+                <a:tc>
+                  <a:txBody>
+                    <a:bodyPr lIns="40000" rIns="40000" tIns="10000" bIns="10000" wrap="square"/>
+                    <a:lstStyle/>
+                    <a:p>
+                      <a:pPr algn="l"/>
+                      <a:r>
+                        <a:rPr sz="1200">
+                          <a:solidFill>
+                            <a:srgbClr val="202020"/>
+                          </a:solidFill>
+                          <a:latin typeface="Microsoft YaHei"/>
+                        </a:rPr>
+                        <a:t>推理深度最强，全局视角</a:t>
+                      </a:r>
+                    </a:p>
+                  </a:txBody>
+                  <a:tcPr>
+                    <a:solidFill>
+                      <a:srgbClr val="FFFFFF"/>
+                    </a:solidFill>
+                  </a:tcPr>
+                </a:tc>
+                <a:tc>
+                  <a:txBody>
+                    <a:bodyPr lIns="40000" rIns="40000" tIns="10000" bIns="10000" wrap="square"/>
+                    <a:lstStyle/>
+                    <a:p>
+                      <a:pPr algn="l"/>
+                      <a:r>
+                        <a:rPr sz="1200">
+                          <a:solidFill>
+                            <a:srgbClr val="202020"/>
+                          </a:solidFill>
+                          <a:latin typeface="Microsoft YaHei"/>
+                        </a:rPr>
+                        <a:t>架构 / 根因分析 / 深度审查</a:t>
+                      </a:r>
+                    </a:p>
+                  </a:txBody>
+                  <a:tcPr>
+                    <a:solidFill>
+                      <a:srgbClr val="FFFFFF"/>
+                    </a:solidFill>
+                  </a:tcPr>
+                </a:tc>
+              </a:tr>
+              <a:tr h="365760">
+                <a:tc>
+                  <a:txBody>
+                    <a:bodyPr lIns="40000" rIns="40000" tIns="10000" bIns="10000" wrap="square"/>
+                    <a:lstStyle/>
+                    <a:p>
+                      <a:pPr algn="l"/>
+                      <a:r>
+                        <a:rPr sz="1200">
+                          <a:solidFill>
+                            <a:srgbClr val="202020"/>
+                          </a:solidFill>
+                          <a:latin typeface="Microsoft YaHei"/>
+                        </a:rPr>
+                        <a:t>Claude Sonnet 4.6</a:t>
+                      </a:r>
+                    </a:p>
+                  </a:txBody>
+                  <a:tcPr>
+                    <a:solidFill>
+                      <a:srgbClr val="F0F4FF"/>
+                    </a:solidFill>
+                  </a:tcPr>
+                </a:tc>
+                <a:tc>
+                  <a:txBody>
+                    <a:bodyPr lIns="40000" rIns="40000" tIns="10000" bIns="10000" wrap="square"/>
+                    <a:lstStyle/>
+                    <a:p>
+                      <a:pPr algn="l"/>
+                      <a:r>
+                        <a:rPr sz="1200">
+                          <a:solidFill>
+                            <a:srgbClr val="202020"/>
+                          </a:solidFill>
+                          <a:latin typeface="Microsoft YaHei"/>
+                        </a:rPr>
+                        <a:t>平衡速度与能力</a:t>
+                      </a:r>
+                    </a:p>
+                  </a:txBody>
+                  <a:tcPr>
+                    <a:solidFill>
+                      <a:srgbClr val="F0F4FF"/>
+                    </a:solidFill>
+                  </a:tcPr>
+                </a:tc>
+                <a:tc>
+                  <a:txBody>
+                    <a:bodyPr lIns="40000" rIns="40000" tIns="10000" bIns="10000" wrap="square"/>
+                    <a:lstStyle/>
+                    <a:p>
+                      <a:pPr algn="l"/>
+                      <a:r>
+                        <a:rPr sz="1200">
+                          <a:solidFill>
+                            <a:srgbClr val="202020"/>
+                          </a:solidFill>
+                          <a:latin typeface="Microsoft YaHei"/>
+                        </a:rPr>
+                        <a:t>主要实现 / PR review</a:t>
+                      </a:r>
+                    </a:p>
+                  </a:txBody>
+                  <a:tcPr>
+                    <a:solidFill>
+                      <a:srgbClr val="F0F4FF"/>
+                    </a:solidFill>
+                  </a:tcPr>
+                </a:tc>
+              </a:tr>
+              <a:tr h="365760">
+                <a:tc>
+                  <a:txBody>
+                    <a:bodyPr lIns="40000" rIns="40000" tIns="10000" bIns="10000" wrap="square"/>
+                    <a:lstStyle/>
+                    <a:p>
+                      <a:pPr algn="l"/>
+                      <a:r>
+                        <a:rPr sz="1200">
+                          <a:solidFill>
+                            <a:srgbClr val="202020"/>
+                          </a:solidFill>
+                          <a:latin typeface="Microsoft YaHei"/>
+                        </a:rPr>
+                        <a:t>Claude Haiku 4.5</a:t>
+                      </a:r>
+                    </a:p>
+                  </a:txBody>
+                  <a:tcPr>
+                    <a:solidFill>
+                      <a:srgbClr val="FFFFFF"/>
+                    </a:solidFill>
+                  </a:tcPr>
+                </a:tc>
+                <a:tc>
+                  <a:txBody>
+                    <a:bodyPr lIns="40000" rIns="40000" tIns="10000" bIns="10000" wrap="square"/>
+                    <a:lstStyle/>
+                    <a:p>
+                      <a:pPr algn="l"/>
+                      <a:r>
+                        <a:rPr sz="1200">
+                          <a:solidFill>
+                            <a:srgbClr val="202020"/>
+                          </a:solidFill>
+                          <a:latin typeface="Microsoft YaHei"/>
+                        </a:rPr>
+                        <a:t>极快、便宜</a:t>
+                      </a:r>
+                    </a:p>
+                  </a:txBody>
+                  <a:tcPr>
+                    <a:solidFill>
+                      <a:srgbClr val="FFFFFF"/>
+                    </a:solidFill>
+                  </a:tcPr>
+                </a:tc>
+                <a:tc>
+                  <a:txBody>
+                    <a:bodyPr lIns="40000" rIns="40000" tIns="10000" bIns="10000" wrap="square"/>
+                    <a:lstStyle/>
+                    <a:p>
+                      <a:pPr algn="l"/>
+                      <a:r>
+                        <a:rPr sz="1200">
+                          <a:solidFill>
+                            <a:srgbClr val="202020"/>
+                          </a:solidFill>
+                          <a:latin typeface="Microsoft YaHei"/>
+                        </a:rPr>
+                        <a:t>静态扫描 / 测试生成 / 批量检查</a:t>
+                      </a:r>
+                    </a:p>
+                  </a:txBody>
+                  <a:tcPr>
+                    <a:solidFill>
+                      <a:srgbClr val="FFFFFF"/>
+                    </a:solidFill>
+                  </a:tcPr>
+                </a:tc>
+              </a:tr>
+            </a:tbl>
+          </a:graphicData>
+        </a:graphic>
+      </p:graphicFrame>
+      <p:sp>
+        <p:nvSpPr>
+          <p:cNvPr id="6" name="TextBox 5"/>
+          <p:cNvSpPr txBox="1"/>
+          <p:nvPr/>
+        </p:nvSpPr>
+        <p:spPr>
+          <a:xfrm>
+            <a:off x="457200" y="2971800"/>
+            <a:ext cx="11247120" cy="365760"/>
+          </a:xfrm>
+          <a:prstGeom prst="rect">
+            <a:avLst/>
+          </a:prstGeom>
+          <a:noFill/>
+        </p:spPr>
+        <p:txBody>
+          <a:bodyPr wrap="square" lIns="0" rIns="0" tIns="0" bIns="0">
+            <a:spAutoFit/>
+          </a:bodyPr>
+          <a:lstStyle/>
+          <a:p>
+            <a:pPr algn="l"/>
+            <a:r>
+              <a:rPr sz="1400" b="1">
+                <a:solidFill>
+                  <a:srgbClr val="1A73E8"/>
+                </a:solidFill>
+                <a:latin typeface="Microsoft YaHei"/>
+              </a:rPr>
+              <a:t>5 种协同模式（按可行性排序）</a:t>
+            </a:r>
+          </a:p>
+        </p:txBody>
+      </p:sp>
+      <p:graphicFrame>
+        <p:nvGraphicFramePr>
+          <p:cNvPr id="7" name="Table 6"/>
+          <p:cNvGraphicFramePr>
+            <a:graphicFrameLocks noGrp="1"/>
+          </p:cNvGraphicFramePr>
+          <p:nvPr/>
+        </p:nvGraphicFramePr>
+        <p:xfrm>
+          <a:off x="457200" y="3383280"/>
+          <a:ext cx="11247120" cy="3108960"/>
+        </p:xfrm>
+        <a:graphic>
+          <a:graphicData uri="http://schemas.openxmlformats.org/drawingml/2006/table">
+            <a:tbl>
+              <a:tblPr firstRow="1" bandRow="1">
+                <a:tableStyleId>{5C22544A-7EE6-4342-B048-85BDC9FD1C3A}</a:tableStyleId>
+              </a:tblPr>
+              <a:tblGrid>
+                <a:gridCol w="457200"/>
+                <a:gridCol w="3200400"/>
+                <a:gridCol w="7589520"/>
+              </a:tblGrid>
+              <a:tr h="518160">
+                <a:tc>
+                  <a:txBody>
+                    <a:bodyPr lIns="40000" rIns="40000" tIns="15000" bIns="15000"/>
+                    <a:lstStyle/>
+                    <a:p>
+                      <a:pPr algn="ctr"/>
+                      <a:r>
+                        <a:rPr sz="1200" b="1">
+                          <a:solidFill>
+                            <a:srgbClr val="FFFFFF"/>
+                          </a:solidFill>
+                          <a:latin typeface="Microsoft YaHei"/>
+                        </a:rPr>
+                        <a:t>#</a:t>
+                      </a:r>
+                    </a:p>
+                  </a:txBody>
+                  <a:tcPr>
+                    <a:solidFill>
+                      <a:srgbClr val="1A73E8"/>
+                    </a:solidFill>
+                  </a:tcPr>
+                </a:tc>
+                <a:tc>
+                  <a:txBody>
+                    <a:bodyPr lIns="40000" rIns="40000" tIns="15000" bIns="15000"/>
+                    <a:lstStyle/>
+                    <a:p>
+                      <a:pPr algn="ctr"/>
+                      <a:r>
+                        <a:rPr sz="1200" b="1">
+                          <a:solidFill>
+                            <a:srgbClr val="FFFFFF"/>
+                          </a:solidFill>
+                          <a:latin typeface="Microsoft YaHei"/>
+                        </a:rPr>
+                        <a:t>模式</a:t>
+                      </a:r>
+                    </a:p>
+                  </a:txBody>
+                  <a:tcPr>
+                    <a:solidFill>
+                      <a:srgbClr val="1A73E8"/>
+                    </a:solidFill>
+                  </a:tcPr>
+                </a:tc>
+                <a:tc>
+                  <a:txBody>
+                    <a:bodyPr lIns="40000" rIns="40000" tIns="15000" bIns="15000"/>
+                    <a:lstStyle/>
+                    <a:p>
+                      <a:pPr algn="ctr"/>
+                      <a:r>
+                        <a:rPr sz="1200" b="1">
+                          <a:solidFill>
+                            <a:srgbClr val="FFFFFF"/>
+                          </a:solidFill>
+                          <a:latin typeface="Microsoft YaHei"/>
+                        </a:rPr>
+                        <a:t>做法 / 适用场景</a:t>
+                      </a:r>
+                    </a:p>
+                  </a:txBody>
+                  <a:tcPr>
+                    <a:solidFill>
+                      <a:srgbClr val="1A73E8"/>
+                    </a:solidFill>
+                  </a:tcPr>
+                </a:tc>
+              </a:tr>
+              <a:tr h="518160">
+                <a:tc>
+                  <a:txBody>
+                    <a:bodyPr lIns="40000" rIns="40000" tIns="10000" bIns="10000" wrap="square"/>
+                    <a:lstStyle/>
+                    <a:p>
+                      <a:pPr algn="l"/>
+                      <a:r>
+                        <a:rPr sz="1200">
+                          <a:solidFill>
+                            <a:srgbClr val="202020"/>
+                          </a:solidFill>
+                          <a:latin typeface="Microsoft YaHei"/>
+                        </a:rPr>
+                        <a:t>①</a:t>
+                      </a:r>
+                    </a:p>
+                  </a:txBody>
+                  <a:tcPr>
+                    <a:solidFill>
+                      <a:srgbClr val="FFFFFF"/>
+                    </a:solidFill>
+                  </a:tcPr>
+                </a:tc>
+                <a:tc>
+                  <a:txBody>
+                    <a:bodyPr lIns="40000" rIns="40000" tIns="10000" bIns="10000" wrap="square"/>
+                    <a:lstStyle/>
+                    <a:p>
+                      <a:pPr algn="l"/>
+                      <a:r>
+                        <a:rPr sz="1200">
+                          <a:solidFill>
+                            <a:srgbClr val="202020"/>
+                          </a:solidFill>
+                          <a:latin typeface="Microsoft YaHei"/>
+                        </a:rPr>
+                        <a:t>开新会话 = 等价的「另一个 Claude」</a:t>
+                      </a:r>
+                    </a:p>
+                  </a:txBody>
+                  <a:tcPr>
+                    <a:solidFill>
+                      <a:srgbClr val="FFFFFF"/>
+                    </a:solidFill>
+                  </a:tcPr>
+                </a:tc>
+                <a:tc>
+                  <a:txBody>
+                    <a:bodyPr lIns="40000" rIns="40000" tIns="10000" bIns="10000" wrap="square"/>
+                    <a:lstStyle/>
+                    <a:p>
+                      <a:pPr algn="l"/>
+                      <a:r>
+                        <a:rPr sz="1200">
+                          <a:solidFill>
+                            <a:srgbClr val="202020"/>
+                          </a:solidFill>
+                          <a:latin typeface="Microsoft YaHei"/>
+                        </a:rPr>
+                        <a:t>上下文重置打破自审偏差，零成本，本项目 4 轮自查实质即此 — 推荐</a:t>
+                      </a:r>
+                    </a:p>
+                  </a:txBody>
+                  <a:tcPr>
+                    <a:solidFill>
+                      <a:srgbClr val="FFFFFF"/>
+                    </a:solidFill>
+                  </a:tcPr>
+                </a:tc>
+              </a:tr>
+              <a:tr h="518160">
+                <a:tc>
+                  <a:txBody>
+                    <a:bodyPr lIns="40000" rIns="40000" tIns="10000" bIns="10000" wrap="square"/>
+                    <a:lstStyle/>
+                    <a:p>
+                      <a:pPr algn="l"/>
+                      <a:r>
+                        <a:rPr sz="1200">
+                          <a:solidFill>
+                            <a:srgbClr val="202020"/>
+                          </a:solidFill>
+                          <a:latin typeface="Microsoft YaHei"/>
+                        </a:rPr>
+                        <a:t>②</a:t>
+                      </a:r>
+                    </a:p>
+                  </a:txBody>
+                  <a:tcPr>
+                    <a:solidFill>
+                      <a:srgbClr val="F0F4FF"/>
+                    </a:solidFill>
+                  </a:tcPr>
+                </a:tc>
+                <a:tc>
+                  <a:txBody>
+                    <a:bodyPr lIns="40000" rIns="40000" tIns="10000" bIns="10000" wrap="square"/>
+                    <a:lstStyle/>
+                    <a:p>
+                      <a:pPr algn="l"/>
+                      <a:r>
+                        <a:rPr sz="1200">
+                          <a:solidFill>
+                            <a:srgbClr val="202020"/>
+                          </a:solidFill>
+                          <a:latin typeface="Microsoft YaHei"/>
+                        </a:rPr>
+                        <a:t>Generator / Reviewer 分工</a:t>
+                      </a:r>
+                    </a:p>
+                  </a:txBody>
+                  <a:tcPr>
+                    <a:solidFill>
+                      <a:srgbClr val="F0F4FF"/>
+                    </a:solidFill>
+                  </a:tcPr>
+                </a:tc>
+                <a:tc>
+                  <a:txBody>
+                    <a:bodyPr lIns="40000" rIns="40000" tIns="10000" bIns="10000" wrap="square"/>
+                    <a:lstStyle/>
+                    <a:p>
+                      <a:pPr algn="l"/>
+                      <a:r>
+                        <a:rPr sz="1200">
+                          <a:solidFill>
+                            <a:srgbClr val="202020"/>
+                          </a:solidFill>
+                          <a:latin typeface="Microsoft YaHei"/>
+                        </a:rPr>
+                        <a:t>Opus 架构 → Sonnet 实现 → Haiku 静态扫描 → Opus（新会话）根因审查</a:t>
+                      </a:r>
+                    </a:p>
+                  </a:txBody>
+                  <a:tcPr>
+                    <a:solidFill>
+                      <a:srgbClr val="F0F4FF"/>
+                    </a:solidFill>
+                  </a:tcPr>
+                </a:tc>
+              </a:tr>
+              <a:tr h="518160">
+                <a:tc>
+                  <a:txBody>
+                    <a:bodyPr lIns="40000" rIns="40000" tIns="10000" bIns="10000" wrap="square"/>
+                    <a:lstStyle/>
+                    <a:p>
+                      <a:pPr algn="l"/>
+                      <a:r>
+                        <a:rPr sz="1200">
+                          <a:solidFill>
+                            <a:srgbClr val="202020"/>
+                          </a:solidFill>
+                          <a:latin typeface="Microsoft YaHei"/>
+                        </a:rPr>
+                        <a:t>③</a:t>
+                      </a:r>
+                    </a:p>
+                  </a:txBody>
+                  <a:tcPr>
+                    <a:solidFill>
+                      <a:srgbClr val="FFFFFF"/>
+                    </a:solidFill>
+                  </a:tcPr>
+                </a:tc>
+                <a:tc>
+                  <a:txBody>
+                    <a:bodyPr lIns="40000" rIns="40000" tIns="10000" bIns="10000" wrap="square"/>
+                    <a:lstStyle/>
+                    <a:p>
+                      <a:pPr algn="l"/>
+                      <a:r>
+                        <a:rPr sz="1200">
+                          <a:solidFill>
+                            <a:srgbClr val="202020"/>
+                          </a:solidFill>
+                          <a:latin typeface="Microsoft YaHei"/>
+                        </a:rPr>
+                        <a:t>对抗式审查（Adversarial）</a:t>
+                      </a:r>
+                    </a:p>
+                  </a:txBody>
+                  <a:tcPr>
+                    <a:solidFill>
+                      <a:srgbClr val="FFFFFF"/>
+                    </a:solidFill>
+                  </a:tcPr>
+                </a:tc>
+                <a:tc>
+                  <a:txBody>
+                    <a:bodyPr lIns="40000" rIns="40000" tIns="10000" bIns="10000" wrap="square"/>
+                    <a:lstStyle/>
+                    <a:p>
+                      <a:pPr algn="l"/>
+                      <a:r>
+                        <a:rPr sz="1200">
+                          <a:solidFill>
+                            <a:srgbClr val="202020"/>
+                          </a:solidFill>
+                          <a:latin typeface="Microsoft YaHei"/>
+                        </a:rPr>
+                        <a:t>A 实现 / B 攻击「找崩溃场景」 / C 仲裁 — 适合金钱/分数/安全代码</a:t>
+                      </a:r>
+                    </a:p>
+                  </a:txBody>
+                  <a:tcPr>
+                    <a:solidFill>
+                      <a:srgbClr val="FFFFFF"/>
+                    </a:solidFill>
+                  </a:tcPr>
+                </a:tc>
+              </a:tr>
+              <a:tr h="518160">
+                <a:tc>
+                  <a:txBody>
+                    <a:bodyPr lIns="40000" rIns="40000" tIns="10000" bIns="10000" wrap="square"/>
+                    <a:lstStyle/>
+                    <a:p>
+                      <a:pPr algn="l"/>
+                      <a:r>
+                        <a:rPr sz="1200">
+                          <a:solidFill>
+                            <a:srgbClr val="202020"/>
+                          </a:solidFill>
+                          <a:latin typeface="Microsoft YaHei"/>
+                        </a:rPr>
+                        <a:t>④</a:t>
+                      </a:r>
+                    </a:p>
+                  </a:txBody>
+                  <a:tcPr>
+                    <a:solidFill>
+                      <a:srgbClr val="F0F4FF"/>
+                    </a:solidFill>
+                  </a:tcPr>
+                </a:tc>
+                <a:tc>
+                  <a:txBody>
+                    <a:bodyPr lIns="40000" rIns="40000" tIns="10000" bIns="10000" wrap="square"/>
+                    <a:lstStyle/>
+                    <a:p>
+                      <a:pPr algn="l"/>
+                      <a:r>
+                        <a:rPr sz="1200">
+                          <a:solidFill>
+                            <a:srgbClr val="202020"/>
+                          </a:solidFill>
+                          <a:latin typeface="Microsoft YaHei"/>
+                        </a:rPr>
+                        <a:t>TDD 反向流</a:t>
+                      </a:r>
+                    </a:p>
+                  </a:txBody>
+                  <a:tcPr>
+                    <a:solidFill>
+                      <a:srgbClr val="F0F4FF"/>
+                    </a:solidFill>
+                  </a:tcPr>
+                </a:tc>
+                <a:tc>
+                  <a:txBody>
+                    <a:bodyPr lIns="40000" rIns="40000" tIns="10000" bIns="10000" wrap="square"/>
+                    <a:lstStyle/>
+                    <a:p>
+                      <a:pPr algn="l"/>
+                      <a:r>
+                        <a:rPr sz="1200">
+                          <a:solidFill>
+                            <a:srgbClr val="202020"/>
+                          </a:solidFill>
+                          <a:latin typeface="Microsoft YaHei"/>
+                        </a:rPr>
+                        <a:t>Haiku 先写边界用例 → Sonnet 实现到通过 → Opus 审查覆盖率 — 最压低 Bug</a:t>
+                      </a:r>
+                    </a:p>
+                  </a:txBody>
+                  <a:tcPr>
+                    <a:solidFill>
+                      <a:srgbClr val="F0F4FF"/>
+                    </a:solidFill>
+                  </a:tcPr>
+                </a:tc>
+              </a:tr>
+              <a:tr h="518160">
+                <a:tc>
+                  <a:txBody>
+                    <a:bodyPr lIns="40000" rIns="40000" tIns="10000" bIns="10000" wrap="square"/>
+                    <a:lstStyle/>
+                    <a:p>
+                      <a:pPr algn="l"/>
+                      <a:r>
+                        <a:rPr sz="1200">
+                          <a:solidFill>
+                            <a:srgbClr val="202020"/>
+                          </a:solidFill>
+                          <a:latin typeface="Microsoft YaHei"/>
+                        </a:rPr>
+                        <a:t>⑤</a:t>
+                      </a:r>
+                    </a:p>
+                  </a:txBody>
+                  <a:tcPr>
+                    <a:solidFill>
+                      <a:srgbClr val="FFFFFF"/>
+                    </a:solidFill>
+                  </a:tcPr>
+                </a:tc>
+                <a:tc>
+                  <a:txBody>
+                    <a:bodyPr lIns="40000" rIns="40000" tIns="10000" bIns="10000" wrap="square"/>
+                    <a:lstStyle/>
+                    <a:p>
+                      <a:pPr algn="l"/>
+                      <a:r>
+                        <a:rPr sz="1200">
+                          <a:solidFill>
+                            <a:srgbClr val="202020"/>
+                          </a:solidFill>
+                          <a:latin typeface="Microsoft YaHei"/>
+                        </a:rPr>
+                        <a:t>Self-Consistency 校验</a:t>
+                      </a:r>
+                    </a:p>
+                  </a:txBody>
+                  <a:tcPr>
+                    <a:solidFill>
+                      <a:srgbClr val="FFFFFF"/>
+                    </a:solidFill>
+                  </a:tcPr>
+                </a:tc>
+                <a:tc>
+                  <a:txBody>
+                    <a:bodyPr lIns="40000" rIns="40000" tIns="10000" bIns="10000" wrap="square"/>
+                    <a:lstStyle/>
+                    <a:p>
+                      <a:pPr algn="l"/>
+                      <a:r>
+                        <a:rPr sz="1200">
+                          <a:solidFill>
+                            <a:srgbClr val="202020"/>
+                          </a:solidFill>
+                          <a:latin typeface="Microsoft YaHei"/>
+                        </a:rPr>
+                        <a:t>同一任务 Opus 跑 3 次对比，差异处标记为「不确定区」 — 关键代码</a:t>
+                      </a:r>
+                    </a:p>
+                  </a:txBody>
+                  <a:tcPr>
+                    <a:solidFill>
+                      <a:srgbClr val="FFFFFF"/>
+                    </a:solidFill>
+                  </a:tcPr>
+                </a:tc>
+              </a:tr>
+            </a:tbl>
+          </a:graphicData>
+        </a:graphic>
+      </p:graphicFrame>
+      <p:sp>
+        <p:nvSpPr>
+          <p:cNvPr id="8" name="TextBox 7"/>
+          <p:cNvSpPr txBox="1"/>
+          <p:nvPr/>
+        </p:nvSpPr>
+        <p:spPr>
+          <a:xfrm>
+            <a:off x="10789920" y="6446520"/>
+            <a:ext cx="1188720" cy="274320"/>
+          </a:xfrm>
+          <a:prstGeom prst="rect">
+            <a:avLst/>
+          </a:prstGeom>
+          <a:noFill/>
+        </p:spPr>
+        <p:txBody>
+          <a:bodyPr wrap="square" lIns="0" rIns="0" tIns="0" bIns="0">
+            <a:spAutoFit/>
+          </a:bodyPr>
+          <a:lstStyle/>
+          <a:p>
+            <a:pPr algn="r"/>
+            <a:r>
+              <a:rPr sz="1000" b="0">
+                <a:solidFill>
+                  <a:srgbClr val="606060"/>
+                </a:solidFill>
+                <a:latin typeface="Microsoft YaHei"/>
+              </a:rPr>
+              <a:t>10 / 13</a:t>
+            </a:r>
+          </a:p>
+        </p:txBody>
+      </p:sp>
+    </p:spTree>
+  </p:cSld>
+  <p:clrMapOvr>
+    <a:masterClrMapping/>
+  </p:clrMapOvr>
+</p:sld>
+</file>
+
+<file path=ppt/slides/slide11.xml><?xml version="1.0" encoding="utf-8"?>
+<p:sld xmlns:a="http://schemas.openxmlformats.org/drawingml/2006/main" xmlns:p="http://schemas.openxmlformats.org/presentationml/2006/main" xmlns:r="http://schemas.openxmlformats.org/officeDocument/2006/relationships">
+  <p:cSld>
+    <p:spTree>
+      <p:nvGrpSpPr>
+        <p:cNvPr id="1" name=""/>
+        <p:cNvGrpSpPr/>
+        <p:nvPr/>
+      </p:nvGrpSpPr>
+      <p:grpSpPr/>
+      <p:sp>
+        <p:nvSpPr>
+          <p:cNvPr id="2" name="TextBox 1"/>
+          <p:cNvSpPr txBox="1"/>
+          <p:nvPr/>
+        </p:nvSpPr>
+        <p:spPr>
+          <a:xfrm>
+            <a:off x="457200" y="274320"/>
+            <a:ext cx="11247120" cy="457200"/>
+          </a:xfrm>
+          <a:prstGeom prst="rect">
+            <a:avLst/>
+          </a:prstGeom>
+          <a:noFill/>
+        </p:spPr>
+        <p:txBody>
+          <a:bodyPr wrap="square" lIns="0" rIns="0" tIns="0" bIns="0">
+            <a:spAutoFit/>
+          </a:bodyPr>
+          <a:lstStyle/>
+          <a:p>
+            <a:pPr algn="l"/>
+            <a:r>
+              <a:rPr sz="2400" b="1">
+                <a:solidFill>
+                  <a:srgbClr val="1A73E8"/>
+                </a:solidFill>
+                <a:latin typeface="Microsoft YaHei"/>
+              </a:rPr>
+              <a:t>六、协同天花板 &amp; 推荐工作流</a:t>
+            </a:r>
+          </a:p>
+        </p:txBody>
+      </p:sp>
+      <p:sp>
+        <p:nvSpPr>
+          <p:cNvPr id="3" name="Rectangle 2"/>
+          <p:cNvSpPr/>
+          <p:nvPr/>
+        </p:nvSpPr>
+        <p:spPr>
+          <a:xfrm>
+            <a:off x="457200" y="777240"/>
+            <a:ext cx="11247120" cy="36576"/>
+          </a:xfrm>
+          <a:prstGeom prst="rect">
+            <a:avLst/>
+          </a:prstGeom>
+          <a:solidFill>
+            <a:srgbClr val="1A73E8"/>
+          </a:solidFill>
+          <a:ln>
+            <a:noFill/>
+          </a:ln>
+        </p:spPr>
+        <p:style>
+          <a:lnRef idx="1">
+            <a:schemeClr val="accent1"/>
+          </a:lnRef>
+          <a:fillRef idx="3">
+            <a:schemeClr val="accent1"/>
+          </a:fillRef>
+          <a:effectRef idx="2">
+            <a:schemeClr val="accent1"/>
+          </a:effectRef>
+          <a:fontRef idx="minor">
+            <a:schemeClr val="lt1"/>
+          </a:fontRef>
+        </p:style>
+        <p:txBody>
+          <a:bodyPr rtlCol="0" anchor="ctr"/>
+          <a:lstStyle/>
+          <a:p>
+            <a:pPr algn="ctr"/>
+          </a:p>
+        </p:txBody>
+      </p:sp>
+      <p:sp>
+        <p:nvSpPr>
+          <p:cNvPr id="4" name="TextBox 3"/>
+          <p:cNvSpPr txBox="1"/>
+          <p:nvPr/>
+        </p:nvSpPr>
+        <p:spPr>
+          <a:xfrm>
+            <a:off x="457200" y="914400"/>
+            <a:ext cx="11247120" cy="365760"/>
+          </a:xfrm>
+          <a:prstGeom prst="rect">
+            <a:avLst/>
+          </a:prstGeom>
+          <a:noFill/>
+        </p:spPr>
+        <p:txBody>
+          <a:bodyPr wrap="square" lIns="0" rIns="0" tIns="0" bIns="0">
+            <a:spAutoFit/>
+          </a:bodyPr>
+          <a:lstStyle/>
+          <a:p>
+            <a:pPr algn="l"/>
+            <a:r>
+              <a:rPr sz="1400" b="1">
+                <a:solidFill>
+                  <a:srgbClr val="E53935"/>
+                </a:solidFill>
+                <a:latin typeface="Microsoft YaHei"/>
+              </a:rPr>
+              <a:t>⚠ 多 Claude 协同的天花板：相关性盲区</a:t>
+            </a:r>
+          </a:p>
+        </p:txBody>
+      </p:sp>
+      <p:sp>
+        <p:nvSpPr>
+          <p:cNvPr id="5" name="TextBox 4"/>
+          <p:cNvSpPr txBox="1"/>
+          <p:nvPr/>
+        </p:nvSpPr>
+        <p:spPr>
+          <a:xfrm>
+            <a:off x="640080" y="1325880"/>
+            <a:ext cx="10972800" cy="365760"/>
+          </a:xfrm>
+          <a:prstGeom prst="rect">
+            <a:avLst/>
+          </a:prstGeom>
+          <a:noFill/>
+        </p:spPr>
+        <p:txBody>
+          <a:bodyPr wrap="square" lIns="0" rIns="0" tIns="0" bIns="0">
+            <a:spAutoFit/>
+          </a:bodyPr>
+          <a:lstStyle/>
+          <a:p>
+            <a:pPr algn="l"/>
+            <a:r>
+              <a:rPr sz="1200" b="0">
+                <a:solidFill>
+                  <a:srgbClr val="202020"/>
+                </a:solidFill>
+                <a:latin typeface="Microsoft YaHei"/>
+              </a:rPr>
+              <a:t>原因：所有 Claude 共享同一训练语料 + 同一训练目标 + 同一架构</a:t>
+            </a:r>
+          </a:p>
+        </p:txBody>
+      </p:sp>
+      <p:sp>
+        <p:nvSpPr>
+          <p:cNvPr id="6" name="TextBox 5"/>
+          <p:cNvSpPr txBox="1"/>
+          <p:nvPr/>
+        </p:nvSpPr>
+        <p:spPr>
+          <a:xfrm>
+            <a:off x="640080" y="1691640"/>
+            <a:ext cx="10972800" cy="365760"/>
+          </a:xfrm>
+          <a:prstGeom prst="rect">
+            <a:avLst/>
+          </a:prstGeom>
+          <a:noFill/>
+        </p:spPr>
+        <p:txBody>
+          <a:bodyPr wrap="square" lIns="0" rIns="0" tIns="0" bIns="0">
+            <a:spAutoFit/>
+          </a:bodyPr>
+          <a:lstStyle/>
+          <a:p>
+            <a:pPr algn="l"/>
+            <a:r>
+              <a:rPr sz="1200" b="0">
+                <a:solidFill>
+                  <a:srgbClr val="606060"/>
+                </a:solidFill>
+                <a:latin typeface="Microsoft YaHei"/>
+              </a:rPr>
+              <a:t>→ Codex Bot 找到的 3 个问题（UUID 截断 / loading 卡死 / UI 不一致）多 Claude 也大概率找不出</a:t>
+            </a:r>
+          </a:p>
+        </p:txBody>
+      </p:sp>
+      <p:sp>
+        <p:nvSpPr>
+          <p:cNvPr id="7" name="TextBox 6"/>
+          <p:cNvSpPr txBox="1"/>
+          <p:nvPr/>
+        </p:nvSpPr>
+        <p:spPr>
+          <a:xfrm>
+            <a:off x="457200" y="2194560"/>
+            <a:ext cx="11247120" cy="365760"/>
+          </a:xfrm>
+          <a:prstGeom prst="rect">
+            <a:avLst/>
+          </a:prstGeom>
+          <a:noFill/>
+        </p:spPr>
+        <p:txBody>
+          <a:bodyPr wrap="square" lIns="0" rIns="0" tIns="0" bIns="0">
+            <a:spAutoFit/>
+          </a:bodyPr>
+          <a:lstStyle/>
+          <a:p>
+            <a:pPr algn="l"/>
+            <a:r>
+              <a:rPr sz="1400" b="1">
+                <a:solidFill>
+                  <a:srgbClr val="1A73E8"/>
+                </a:solidFill>
+                <a:latin typeface="Microsoft YaHei"/>
+              </a:rPr>
+              <a:t>📊 真正补盲区的策略对比</a:t>
+            </a:r>
+          </a:p>
+        </p:txBody>
+      </p:sp>
+      <p:graphicFrame>
+        <p:nvGraphicFramePr>
+          <p:cNvPr id="8" name="Table 7"/>
+          <p:cNvGraphicFramePr>
+            <a:graphicFrameLocks noGrp="1"/>
+          </p:cNvGraphicFramePr>
+          <p:nvPr/>
+        </p:nvGraphicFramePr>
+        <p:xfrm>
+          <a:off x="457200" y="2606040"/>
+          <a:ext cx="11247120" cy="1645920"/>
+        </p:xfrm>
+        <a:graphic>
+          <a:graphicData uri="http://schemas.openxmlformats.org/drawingml/2006/table">
+            <a:tbl>
+              <a:tblPr firstRow="1" bandRow="1">
+                <a:tableStyleId>{5C22544A-7EE6-4342-B048-85BDC9FD1C3A}</a:tableStyleId>
+              </a:tblPr>
+              <a:tblGrid>
+                <a:gridCol w="4114800"/>
+                <a:gridCol w="5029200"/>
+                <a:gridCol w="2103120"/>
+              </a:tblGrid>
+              <a:tr h="329184">
+                <a:tc>
+                  <a:txBody>
+                    <a:bodyPr lIns="40000" rIns="40000" tIns="15000" bIns="15000"/>
+                    <a:lstStyle/>
+                    <a:p>
+                      <a:pPr algn="ctr"/>
+                      <a:r>
+                        <a:rPr sz="1200" b="1">
+                          <a:solidFill>
+                            <a:srgbClr val="FFFFFF"/>
+                          </a:solidFill>
+                          <a:latin typeface="Microsoft YaHei"/>
+                        </a:rPr>
+                        <a:t>组合</a:t>
+                      </a:r>
+                    </a:p>
+                  </a:txBody>
+                  <a:tcPr>
+                    <a:solidFill>
+                      <a:srgbClr val="1A73E8"/>
+                    </a:solidFill>
+                  </a:tcPr>
+                </a:tc>
+                <a:tc>
+                  <a:txBody>
+                    <a:bodyPr lIns="40000" rIns="40000" tIns="15000" bIns="15000"/>
+                    <a:lstStyle/>
+                    <a:p>
+                      <a:pPr algn="ctr"/>
+                      <a:r>
+                        <a:rPr sz="1200" b="1">
+                          <a:solidFill>
+                            <a:srgbClr val="FFFFFF"/>
+                          </a:solidFill>
+                          <a:latin typeface="Microsoft YaHei"/>
+                        </a:rPr>
+                        <a:t>找到的问题类型</a:t>
+                      </a:r>
+                    </a:p>
+                  </a:txBody>
+                  <a:tcPr>
+                    <a:solidFill>
+                      <a:srgbClr val="1A73E8"/>
+                    </a:solidFill>
+                  </a:tcPr>
+                </a:tc>
+                <a:tc>
+                  <a:txBody>
+                    <a:bodyPr lIns="40000" rIns="40000" tIns="15000" bIns="15000"/>
+                    <a:lstStyle/>
+                    <a:p>
+                      <a:pPr algn="ctr"/>
+                      <a:r>
+                        <a:rPr sz="1200" b="1">
+                          <a:solidFill>
+                            <a:srgbClr val="FFFFFF"/>
+                          </a:solidFill>
+                          <a:latin typeface="Microsoft YaHei"/>
+                        </a:rPr>
+                        <a:t>互补程度</a:t>
+                      </a:r>
+                    </a:p>
+                  </a:txBody>
+                  <a:tcPr>
+                    <a:solidFill>
+                      <a:srgbClr val="1A73E8"/>
+                    </a:solidFill>
+                  </a:tcPr>
+                </a:tc>
+              </a:tr>
+              <a:tr h="329184">
+                <a:tc>
+                  <a:txBody>
+                    <a:bodyPr lIns="40000" rIns="40000" tIns="10000" bIns="10000" wrap="square"/>
+                    <a:lstStyle/>
+                    <a:p>
+                      <a:pPr algn="l"/>
+                      <a:r>
+                        <a:rPr sz="1200">
+                          <a:solidFill>
+                            <a:srgbClr val="202020"/>
+                          </a:solidFill>
+                          <a:latin typeface="Microsoft YaHei"/>
+                        </a:rPr>
+                        <a:t>多个 Claude 实例</a:t>
+                      </a:r>
+                    </a:p>
+                  </a:txBody>
+                  <a:tcPr>
+                    <a:solidFill>
+                      <a:srgbClr val="FFFFFF"/>
+                    </a:solidFill>
+                  </a:tcPr>
+                </a:tc>
+                <a:tc>
+                  <a:txBody>
+                    <a:bodyPr lIns="40000" rIns="40000" tIns="10000" bIns="10000" wrap="square"/>
+                    <a:lstStyle/>
+                    <a:p>
+                      <a:pPr algn="l"/>
+                      <a:r>
+                        <a:rPr sz="1200">
+                          <a:solidFill>
+                            <a:srgbClr val="202020"/>
+                          </a:solidFill>
+                          <a:latin typeface="Microsoft YaHei"/>
+                        </a:rPr>
+                        <a:t>全局架构 + 逻辑链路（多角度）</a:t>
+                      </a:r>
+                    </a:p>
+                  </a:txBody>
+                  <a:tcPr>
+                    <a:solidFill>
+                      <a:srgbClr val="FFFFFF"/>
+                    </a:solidFill>
+                  </a:tcPr>
+                </a:tc>
+                <a:tc>
+                  <a:txBody>
+                    <a:bodyPr lIns="40000" rIns="40000" tIns="10000" bIns="10000" wrap="square"/>
+                    <a:lstStyle/>
+                    <a:p>
+                      <a:pPr algn="l"/>
+                      <a:r>
+                        <a:rPr sz="1200">
+                          <a:solidFill>
+                            <a:srgbClr val="202020"/>
+                          </a:solidFill>
+                          <a:latin typeface="Microsoft YaHei"/>
+                        </a:rPr>
+                        <a:t>中等</a:t>
+                      </a:r>
+                    </a:p>
+                  </a:txBody>
+                  <a:tcPr>
+                    <a:solidFill>
+                      <a:srgbClr val="FFFFFF"/>
+                    </a:solidFill>
+                  </a:tcPr>
+                </a:tc>
+              </a:tr>
+              <a:tr h="329184">
+                <a:tc>
+                  <a:txBody>
+                    <a:bodyPr lIns="40000" rIns="40000" tIns="10000" bIns="10000" wrap="square"/>
+                    <a:lstStyle/>
+                    <a:p>
+                      <a:pPr algn="l"/>
+                      <a:r>
+                        <a:rPr sz="1200">
+                          <a:solidFill>
+                            <a:srgbClr val="202020"/>
+                          </a:solidFill>
+                          <a:latin typeface="Microsoft YaHei"/>
+                        </a:rPr>
+                        <a:t>Claude + Codex（OpenAI）</a:t>
+                      </a:r>
+                    </a:p>
+                  </a:txBody>
+                  <a:tcPr>
+                    <a:solidFill>
+                      <a:srgbClr val="F0F4FF"/>
+                    </a:solidFill>
+                  </a:tcPr>
+                </a:tc>
+                <a:tc>
+                  <a:txBody>
+                    <a:bodyPr lIns="40000" rIns="40000" tIns="10000" bIns="10000" wrap="square"/>
+                    <a:lstStyle/>
+                    <a:p>
+                      <a:pPr algn="l"/>
+                      <a:r>
+                        <a:rPr sz="1200">
+                          <a:solidFill>
+                            <a:srgbClr val="202020"/>
+                          </a:solidFill>
+                          <a:latin typeface="Microsoft YaHei"/>
+                        </a:rPr>
+                        <a:t>增加细粒度风险点</a:t>
+                      </a:r>
+                    </a:p>
+                  </a:txBody>
+                  <a:tcPr>
+                    <a:solidFill>
+                      <a:srgbClr val="F0F4FF"/>
+                    </a:solidFill>
+                  </a:tcPr>
+                </a:tc>
+                <a:tc>
+                  <a:txBody>
+                    <a:bodyPr lIns="40000" rIns="40000" tIns="10000" bIns="10000" wrap="square"/>
+                    <a:lstStyle/>
+                    <a:p>
+                      <a:pPr algn="l"/>
+                      <a:r>
+                        <a:rPr sz="1200">
+                          <a:solidFill>
+                            <a:srgbClr val="202020"/>
+                          </a:solidFill>
+                          <a:latin typeface="Microsoft YaHei"/>
+                        </a:rPr>
+                        <a:t>较高</a:t>
+                      </a:r>
+                    </a:p>
+                  </a:txBody>
+                  <a:tcPr>
+                    <a:solidFill>
+                      <a:srgbClr val="F0F4FF"/>
+                    </a:solidFill>
+                  </a:tcPr>
+                </a:tc>
+              </a:tr>
+              <a:tr h="329184">
+                <a:tc>
+                  <a:txBody>
+                    <a:bodyPr lIns="40000" rIns="40000" tIns="10000" bIns="10000" wrap="square"/>
+                    <a:lstStyle/>
+                    <a:p>
+                      <a:pPr algn="l"/>
+                      <a:r>
+                        <a:rPr sz="1200">
+                          <a:solidFill>
+                            <a:srgbClr val="202020"/>
+                          </a:solidFill>
+                          <a:latin typeface="Microsoft YaHei"/>
+                        </a:rPr>
+                        <a:t>Claude + Codex + Gemini</a:t>
+                      </a:r>
+                    </a:p>
+                  </a:txBody>
+                  <a:tcPr>
+                    <a:solidFill>
+                      <a:srgbClr val="FFFFFF"/>
+                    </a:solidFill>
+                  </a:tcPr>
+                </a:tc>
+                <a:tc>
+                  <a:txBody>
+                    <a:bodyPr lIns="40000" rIns="40000" tIns="10000" bIns="10000" wrap="square"/>
+                    <a:lstStyle/>
+                    <a:p>
+                      <a:pPr algn="l"/>
+                      <a:r>
+                        <a:rPr sz="1200">
+                          <a:solidFill>
+                            <a:srgbClr val="202020"/>
+                          </a:solidFill>
+                          <a:latin typeface="Microsoft YaHei"/>
+                        </a:rPr>
+                        <a:t>不同训练目标，覆盖最广</a:t>
+                      </a:r>
+                    </a:p>
+                  </a:txBody>
+                  <a:tcPr>
+                    <a:solidFill>
+                      <a:srgbClr val="FFFFFF"/>
+                    </a:solidFill>
+                  </a:tcPr>
+                </a:tc>
+                <a:tc>
+                  <a:txBody>
+                    <a:bodyPr lIns="40000" rIns="40000" tIns="10000" bIns="10000" wrap="square"/>
+                    <a:lstStyle/>
+                    <a:p>
+                      <a:pPr algn="l"/>
+                      <a:r>
+                        <a:rPr sz="1200">
+                          <a:solidFill>
+                            <a:srgbClr val="202020"/>
+                          </a:solidFill>
+                          <a:latin typeface="Microsoft YaHei"/>
+                        </a:rPr>
+                        <a:t>最高</a:t>
+                      </a:r>
+                    </a:p>
+                  </a:txBody>
+                  <a:tcPr>
+                    <a:solidFill>
+                      <a:srgbClr val="FFFFFF"/>
+                    </a:solidFill>
+                  </a:tcPr>
+                </a:tc>
+              </a:tr>
+              <a:tr h="329184">
+                <a:tc>
+                  <a:txBody>
+                    <a:bodyPr lIns="40000" rIns="40000" tIns="10000" bIns="10000" wrap="square"/>
+                    <a:lstStyle/>
+                    <a:p>
+                      <a:pPr algn="l"/>
+                      <a:r>
+                        <a:rPr sz="1200">
+                          <a:solidFill>
+                            <a:srgbClr val="202020"/>
+                          </a:solidFill>
+                          <a:latin typeface="Microsoft YaHei"/>
+                        </a:rPr>
+                        <a:t>Claude + Detekt / SpotBugs / kover</a:t>
+                      </a:r>
+                    </a:p>
+                  </a:txBody>
+                  <a:tcPr>
+                    <a:solidFill>
+                      <a:srgbClr val="F0F4FF"/>
+                    </a:solidFill>
+                  </a:tcPr>
+                </a:tc>
+                <a:tc>
+                  <a:txBody>
+                    <a:bodyPr lIns="40000" rIns="40000" tIns="10000" bIns="10000" wrap="square"/>
+                    <a:lstStyle/>
+                    <a:p>
+                      <a:pPr algn="l"/>
+                      <a:r>
+                        <a:rPr sz="1200">
+                          <a:solidFill>
+                            <a:srgbClr val="202020"/>
+                          </a:solidFill>
+                          <a:latin typeface="Microsoft YaHei"/>
+                        </a:rPr>
+                        <a:t>规则化盲区</a:t>
+                      </a:r>
+                    </a:p>
+                  </a:txBody>
+                  <a:tcPr>
+                    <a:solidFill>
+                      <a:srgbClr val="F0F4FF"/>
+                    </a:solidFill>
+                  </a:tcPr>
+                </a:tc>
+                <a:tc>
+                  <a:txBody>
+                    <a:bodyPr lIns="40000" rIns="40000" tIns="10000" bIns="10000" wrap="square"/>
+                    <a:lstStyle/>
+                    <a:p>
+                      <a:pPr algn="l"/>
+                      <a:r>
+                        <a:rPr sz="1200">
+                          <a:solidFill>
+                            <a:srgbClr val="202020"/>
+                          </a:solidFill>
+                          <a:latin typeface="Microsoft YaHei"/>
+                        </a:rPr>
+                        <a:t>必要</a:t>
+                      </a:r>
+                    </a:p>
+                  </a:txBody>
+                  <a:tcPr>
+                    <a:solidFill>
+                      <a:srgbClr val="F0F4FF"/>
+                    </a:solidFill>
+                  </a:tcPr>
+                </a:tc>
+              </a:tr>
+            </a:tbl>
+          </a:graphicData>
+        </a:graphic>
+      </p:graphicFrame>
+      <p:sp>
+        <p:nvSpPr>
+          <p:cNvPr id="9" name="TextBox 8"/>
+          <p:cNvSpPr txBox="1"/>
+          <p:nvPr/>
+        </p:nvSpPr>
+        <p:spPr>
+          <a:xfrm>
+            <a:off x="457200" y="4434840"/>
+            <a:ext cx="11247120" cy="365760"/>
+          </a:xfrm>
+          <a:prstGeom prst="rect">
+            <a:avLst/>
+          </a:prstGeom>
+          <a:noFill/>
+        </p:spPr>
+        <p:txBody>
+          <a:bodyPr wrap="square" lIns="0" rIns="0" tIns="0" bIns="0">
+            <a:spAutoFit/>
+          </a:bodyPr>
+          <a:lstStyle/>
+          <a:p>
+            <a:pPr algn="l"/>
+            <a:r>
+              <a:rPr sz="1400" b="1">
+                <a:solidFill>
+                  <a:srgbClr val="2E7D32"/>
+                </a:solidFill>
+                <a:latin typeface="Microsoft YaHei"/>
+              </a:rPr>
+              <a:t>🚀 给本项目的推荐工作流（如果重做联网模块）</a:t>
+            </a:r>
+          </a:p>
+        </p:txBody>
+      </p:sp>
+      <p:sp>
+        <p:nvSpPr>
+          <p:cNvPr id="10" name="Rectangle 9"/>
+          <p:cNvSpPr/>
+          <p:nvPr/>
+        </p:nvSpPr>
+        <p:spPr>
+          <a:xfrm>
+            <a:off x="457200" y="4846320"/>
+            <a:ext cx="11247120" cy="1463040"/>
+          </a:xfrm>
+          <a:prstGeom prst="rect">
+            <a:avLst/>
+          </a:prstGeom>
+          <a:solidFill>
+            <a:srgbClr val="F4F4F4"/>
+          </a:solidFill>
+          <a:ln>
+            <a:solidFill>
+              <a:srgbClr val="D0D0D0"/>
+            </a:solidFill>
+          </a:ln>
+        </p:spPr>
+        <p:style>
+          <a:lnRef idx="1">
+            <a:schemeClr val="accent1"/>
+          </a:lnRef>
+          <a:fillRef idx="3">
+            <a:schemeClr val="accent1"/>
+          </a:fillRef>
+          <a:effectRef idx="2">
+            <a:schemeClr val="accent1"/>
+          </a:effectRef>
+          <a:fontRef idx="minor">
+            <a:schemeClr val="lt1"/>
+          </a:fontRef>
+        </p:style>
+        <p:txBody>
+          <a:bodyPr rtlCol="0" anchor="ctr" wrap="square" lIns="120000" rIns="120000" tIns="80000" bIns="80000"/>
+          <a:lstStyle/>
+          <a:p>
+            <a:pPr algn="ctr"/>
+            <a:r>
+              <a:rPr sz="1200">
+                <a:solidFill>
+                  <a:srgbClr val="202020"/>
+                </a:solidFill>
+                <a:latin typeface="Consolas"/>
+              </a:rPr>
+              <a:t>开发：  Opus 4.7 (1M)  架构 + 协议    Sonnet 4.6  实现    Haiku 4.5  静态扫描</a:t>
+            </a:r>
+          </a:p>
+          <a:p>
+            <a:r>
+              <a:rPr sz="1200">
+                <a:solidFill>
+                  <a:srgbClr val="202020"/>
+                </a:solidFill>
+                <a:latin typeface="Consolas"/>
+              </a:rPr>
+              <a:t> </a:t>
+            </a:r>
+          </a:p>
+          <a:p>
+            <a:r>
+              <a:rPr sz="1200">
+                <a:solidFill>
+                  <a:srgbClr val="202020"/>
+                </a:solidFill>
+                <a:latin typeface="Consolas"/>
+              </a:rPr>
+              <a:t>PR 4 关：  Claude PR Review (新会话)  +  Codex Bot  +  Detekt  +  人工真机验证</a:t>
+            </a:r>
+          </a:p>
+          <a:p>
+            <a:r>
+              <a:rPr sz="1200">
+                <a:solidFill>
+                  <a:srgbClr val="202020"/>
+                </a:solidFill>
+                <a:latin typeface="Consolas"/>
+              </a:rPr>
+              <a:t> </a:t>
+            </a:r>
+          </a:p>
+          <a:p>
+            <a:r>
+              <a:rPr sz="1200">
+                <a:solidFill>
+                  <a:srgbClr val="202020"/>
+                </a:solidFill>
+                <a:latin typeface="Consolas"/>
+              </a:rPr>
+              <a:t>测试驱动：  关键路径（结算 / 协议 / 并发）必须 TDD，Haiku 4.5 批量生成边界用例</a:t>
+            </a:r>
+          </a:p>
+        </p:txBody>
+      </p:sp>
+      <p:sp>
+        <p:nvSpPr>
+          <p:cNvPr id="11" name="Rounded Rectangle 10"/>
+          <p:cNvSpPr/>
+          <p:nvPr/>
+        </p:nvSpPr>
+        <p:spPr>
+          <a:xfrm>
+            <a:off x="457200" y="6400800"/>
+            <a:ext cx="11338560" cy="365760"/>
+          </a:xfrm>
+          <a:prstGeom prst="roundRect">
+            <a:avLst/>
+          </a:prstGeom>
+          <a:solidFill>
+            <a:srgbClr val="F0F4FF"/>
+          </a:solidFill>
+          <a:ln>
+            <a:solidFill>
+              <a:srgbClr val="1A73E8"/>
+            </a:solidFill>
+          </a:ln>
+        </p:spPr>
+        <p:style>
+          <a:lnRef idx="1">
+            <a:schemeClr val="accent1"/>
+          </a:lnRef>
+          <a:fillRef idx="3">
+            <a:schemeClr val="accent1"/>
+          </a:fillRef>
+          <a:effectRef idx="2">
+            <a:schemeClr val="accent1"/>
+          </a:effectRef>
+          <a:fontRef idx="minor">
+            <a:schemeClr val="lt1"/>
+          </a:fontRef>
+        </p:style>
+        <p:txBody>
+          <a:bodyPr rtlCol="0" anchor="ctr" wrap="square" lIns="150000" rIns="150000"/>
+          <a:lstStyle/>
+          <a:p>
+            <a:pPr algn="ctr"/>
+            <a:r>
+              <a:rPr sz="1000" b="1">
+                <a:solidFill>
+                  <a:srgbClr val="1A73E8"/>
+                </a:solidFill>
+                <a:latin typeface="Microsoft YaHei"/>
+              </a:rPr>
+              <a:t>💡 单 Claude 多轮 = 时间换覆盖率  ·  多 Claude = 视角换覆盖率  ·  多 vendor + 静态 + 真机 = 异构换覆盖率（边际收益最大）</a:t>
+            </a:r>
+          </a:p>
+        </p:txBody>
+      </p:sp>
+      <p:sp>
+        <p:nvSpPr>
+          <p:cNvPr id="12" name="TextBox 11"/>
+          <p:cNvSpPr txBox="1"/>
+          <p:nvPr/>
+        </p:nvSpPr>
+        <p:spPr>
+          <a:xfrm>
+            <a:off x="10789920" y="6446520"/>
+            <a:ext cx="1188720" cy="274320"/>
+          </a:xfrm>
+          <a:prstGeom prst="rect">
+            <a:avLst/>
+          </a:prstGeom>
+          <a:noFill/>
+        </p:spPr>
+        <p:txBody>
+          <a:bodyPr wrap="square" lIns="0" rIns="0" tIns="0" bIns="0">
+            <a:spAutoFit/>
+          </a:bodyPr>
+          <a:lstStyle/>
+          <a:p>
+            <a:pPr algn="r"/>
+            <a:r>
+              <a:rPr sz="1000" b="0">
+                <a:solidFill>
+                  <a:srgbClr val="606060"/>
+                </a:solidFill>
+                <a:latin typeface="Microsoft YaHei"/>
+              </a:rPr>
+              <a:t>11 / 13</a:t>
+            </a:r>
+          </a:p>
+        </p:txBody>
+      </p:sp>
+    </p:spTree>
+  </p:cSld>
+  <p:clrMapOvr>
+    <a:masterClrMapping/>
+  </p:clrMapOvr>
+</p:sld>
+</file>
+
+<file path=ppt/slides/slide12.xml><?xml version="1.0" encoding="utf-8"?>
+<p:sld xmlns:a="http://schemas.openxmlformats.org/drawingml/2006/main" xmlns:p="http://schemas.openxmlformats.org/presentationml/2006/main" xmlns:r="http://schemas.openxmlformats.org/officeDocument/2006/relationships">
+  <p:cSld>
+    <p:spTree>
+      <p:nvGrpSpPr>
+        <p:cNvPr id="1" name=""/>
+        <p:cNvGrpSpPr/>
+        <p:nvPr/>
+      </p:nvGrpSpPr>
+      <p:grpSpPr/>
+      <p:sp>
+        <p:nvSpPr>
+          <p:cNvPr id="2" name="TextBox 1"/>
+          <p:cNvSpPr txBox="1"/>
+          <p:nvPr/>
+        </p:nvSpPr>
+        <p:spPr>
+          <a:xfrm>
+            <a:off x="457200" y="274320"/>
+            <a:ext cx="11247120" cy="457200"/>
+          </a:xfrm>
+          <a:prstGeom prst="rect">
+            <a:avLst/>
+          </a:prstGeom>
+          <a:noFill/>
+        </p:spPr>
+        <p:txBody>
+          <a:bodyPr wrap="square" lIns="0" rIns="0" tIns="0" bIns="0">
+            <a:spAutoFit/>
+          </a:bodyPr>
+          <a:lstStyle/>
+          <a:p>
+            <a:pPr algn="l"/>
+            <a:r>
+              <a:rPr sz="2400" b="1">
+                <a:solidFill>
+                  <a:srgbClr val="1A73E8"/>
+                </a:solidFill>
+                <a:latin typeface="Microsoft YaHei"/>
+              </a:rPr>
+              <a:t>七、关键技术修复（3 处核心）</a:t>
+            </a:r>
+          </a:p>
+        </p:txBody>
+      </p:sp>
+      <p:sp>
+        <p:nvSpPr>
+          <p:cNvPr id="3" name="Rectangle 2"/>
+          <p:cNvSpPr/>
+          <p:nvPr/>
+        </p:nvSpPr>
+        <p:spPr>
+          <a:xfrm>
+            <a:off x="457200" y="777240"/>
+            <a:ext cx="11247120" cy="36576"/>
+          </a:xfrm>
+          <a:prstGeom prst="rect">
+            <a:avLst/>
+          </a:prstGeom>
+          <a:solidFill>
+            <a:srgbClr val="1A73E8"/>
+          </a:solidFill>
+          <a:ln>
+            <a:noFill/>
+          </a:ln>
+        </p:spPr>
+        <p:style>
+          <a:lnRef idx="1">
+            <a:schemeClr val="accent1"/>
+          </a:lnRef>
+          <a:fillRef idx="3">
+            <a:schemeClr val="accent1"/>
+          </a:fillRef>
+          <a:effectRef idx="2">
+            <a:schemeClr val="accent1"/>
+          </a:effectRef>
+          <a:fontRef idx="minor">
+            <a:schemeClr val="lt1"/>
+          </a:fontRef>
+        </p:style>
+        <p:txBody>
+          <a:bodyPr rtlCol="0" anchor="ctr"/>
+          <a:lstStyle/>
+          <a:p>
+            <a:pPr algn="ctr"/>
+          </a:p>
+        </p:txBody>
+      </p:sp>
+      <p:sp>
+        <p:nvSpPr>
+          <p:cNvPr id="4" name="TextBox 3"/>
+          <p:cNvSpPr txBox="1"/>
+          <p:nvPr/>
+        </p:nvSpPr>
+        <p:spPr>
+          <a:xfrm>
+            <a:off x="457200" y="960120"/>
+            <a:ext cx="11247120" cy="365760"/>
+          </a:xfrm>
+          <a:prstGeom prst="rect">
+            <a:avLst/>
+          </a:prstGeom>
+          <a:noFill/>
+        </p:spPr>
+        <p:txBody>
+          <a:bodyPr wrap="square" lIns="0" rIns="0" tIns="0" bIns="0">
+            <a:spAutoFit/>
+          </a:bodyPr>
+          <a:lstStyle/>
+          <a:p>
+            <a:pPr algn="l"/>
+            <a:r>
+              <a:rPr sz="1400" b="1">
+                <a:solidFill>
+                  <a:srgbClr val="1A73E8"/>
+                </a:solidFill>
+                <a:latin typeface="Microsoft YaHei"/>
+              </a:rPr>
+              <a:t>1️⃣ 游戏卡死 — 四层防御</a:t>
+            </a:r>
+          </a:p>
+        </p:txBody>
+      </p:sp>
+      <p:sp>
+        <p:nvSpPr>
+          <p:cNvPr id="5" name="Rectangle 4"/>
+          <p:cNvSpPr/>
+          <p:nvPr/>
+        </p:nvSpPr>
+        <p:spPr>
+          <a:xfrm>
+            <a:off x="457200" y="1371600"/>
+            <a:ext cx="11247120" cy="1554480"/>
+          </a:xfrm>
+          <a:prstGeom prst="rect">
+            <a:avLst/>
+          </a:prstGeom>
+          <a:solidFill>
+            <a:srgbClr val="F4F4F4"/>
+          </a:solidFill>
+          <a:ln>
+            <a:solidFill>
+              <a:srgbClr val="D0D0D0"/>
+            </a:solidFill>
+          </a:ln>
+        </p:spPr>
+        <p:style>
+          <a:lnRef idx="1">
+            <a:schemeClr val="accent1"/>
+          </a:lnRef>
+          <a:fillRef idx="3">
+            <a:schemeClr val="accent1"/>
+          </a:fillRef>
+          <a:effectRef idx="2">
+            <a:schemeClr val="accent1"/>
+          </a:effectRef>
+          <a:fontRef idx="minor">
+            <a:schemeClr val="lt1"/>
+          </a:fontRef>
+        </p:style>
+        <p:txBody>
+          <a:bodyPr rtlCol="0" anchor="ctr" wrap="square" lIns="120000" rIns="120000" tIns="80000" bIns="80000"/>
+          <a:lstStyle/>
+          <a:p>
+            <a:pPr algn="ctr"/>
+            <a:r>
+              <a:rPr sz="1200">
+                <a:solidFill>
+                  <a:srgbClr val="202020"/>
+                </a:solidFill>
+                <a:latin typeface="Consolas"/>
+              </a:rPr>
+              <a:t>[层1] canBeat 炸弹比较错误：大张数应直接胜（修复前要求同张数）</a:t>
+            </a:r>
+          </a:p>
+          <a:p>
+            <a:r>
+              <a:rPr sz="1200">
+                <a:solidFill>
+                  <a:srgbClr val="202020"/>
+                </a:solidFill>
+                <a:latin typeface="Consolas"/>
+              </a:rPr>
+              <a:t>[层2] AI 失败无回退：增加三级回退（首选 → 过牌 → 最小单张）</a:t>
+            </a:r>
+          </a:p>
+          <a:p>
+            <a:r>
+              <a:rPr sz="1200">
+                <a:solidFill>
+                  <a:srgbClr val="202020"/>
+                </a:solidFill>
+                <a:latin typeface="Consolas"/>
+              </a:rPr>
+              <a:t>[层3] 多协程无锁并发写 state.hands：每房间一把 Mutex（改在锁内/广播在锁外）</a:t>
+            </a:r>
+          </a:p>
+          <a:p>
+            <a:r>
+              <a:rPr sz="1200">
+                <a:solidFill>
+                  <a:srgbClr val="202020"/>
+                </a:solidFill>
+                <a:latin typeface="Consolas"/>
+              </a:rPr>
+              <a:t>[层4] 三级回退仍失败：broadcastForceAdvance 强制推进兜底</a:t>
+            </a:r>
+          </a:p>
+        </p:txBody>
+      </p:sp>
+      <p:sp>
+        <p:nvSpPr>
+          <p:cNvPr id="6" name="TextBox 5"/>
+          <p:cNvSpPr txBox="1"/>
+          <p:nvPr/>
+        </p:nvSpPr>
+        <p:spPr>
+          <a:xfrm>
+            <a:off x="457200" y="3017520"/>
+            <a:ext cx="11247120" cy="365760"/>
+          </a:xfrm>
+          <a:prstGeom prst="rect">
+            <a:avLst/>
+          </a:prstGeom>
+          <a:noFill/>
+        </p:spPr>
+        <p:txBody>
+          <a:bodyPr wrap="square" lIns="0" rIns="0" tIns="0" bIns="0">
+            <a:spAutoFit/>
+          </a:bodyPr>
+          <a:lstStyle/>
+          <a:p>
+            <a:pPr algn="l"/>
+            <a:r>
+              <a:rPr sz="1400" b="1">
+                <a:solidFill>
+                  <a:srgbClr val="1A73E8"/>
+                </a:solidFill>
+                <a:latin typeface="Microsoft YaHei"/>
+              </a:rPr>
+              <a:t>2️⃣ 重连失效 — 异步时序陷阱</a:t>
+            </a:r>
+          </a:p>
+        </p:txBody>
+      </p:sp>
+      <p:sp>
+        <p:nvSpPr>
+          <p:cNvPr id="7" name="Rectangle 6"/>
+          <p:cNvSpPr/>
+          <p:nvPr/>
+        </p:nvSpPr>
+        <p:spPr>
+          <a:xfrm>
+            <a:off x="457200" y="3429000"/>
+            <a:ext cx="11247120" cy="1280160"/>
+          </a:xfrm>
+          <a:prstGeom prst="rect">
+            <a:avLst/>
+          </a:prstGeom>
+          <a:solidFill>
+            <a:srgbClr val="F4F4F4"/>
+          </a:solidFill>
+          <a:ln>
+            <a:solidFill>
+              <a:srgbClr val="D0D0D0"/>
+            </a:solidFill>
+          </a:ln>
+        </p:spPr>
+        <p:style>
+          <a:lnRef idx="1">
+            <a:schemeClr val="accent1"/>
+          </a:lnRef>
+          <a:fillRef idx="3">
+            <a:schemeClr val="accent1"/>
+          </a:fillRef>
+          <a:effectRef idx="2">
+            <a:schemeClr val="accent1"/>
+          </a:effectRef>
+          <a:fontRef idx="minor">
+            <a:schemeClr val="lt1"/>
+          </a:fontRef>
+        </p:style>
+        <p:txBody>
+          <a:bodyPr rtlCol="0" anchor="ctr" wrap="square" lIns="120000" rIns="120000" tIns="80000" bIns="80000"/>
+          <a:lstStyle/>
+          <a:p>
+            <a:pPr algn="ctr"/>
+            <a:r>
+              <a:rPr sz="1200">
+                <a:solidFill>
+                  <a:srgbClr val="202020"/>
+                </a:solidFill>
+                <a:latin typeface="Consolas"/>
+              </a:rPr>
+              <a:t>❌ 修复前：newWebSocket() 后立即 send(Reconnect)，ws 仍在 CONNECTING → 静默丢弃</a:t>
+            </a:r>
+          </a:p>
+          <a:p>
+            <a:r>
+              <a:rPr sz="1200">
+                <a:solidFill>
+                  <a:srgbClr val="202020"/>
+                </a:solidFill>
+                <a:latin typeface="Consolas"/>
+              </a:rPr>
+              <a:t>✅ 修复后：在 onOpen 回调内 send，确保 ws 已 OPEN</a:t>
+            </a:r>
+          </a:p>
+          <a:p>
+            <a:r>
+              <a:rPr sz="1200">
+                <a:solidFill>
+                  <a:srgbClr val="202020"/>
+                </a:solidFill>
+                <a:latin typeface="Consolas"/>
+              </a:rPr>
+              <a:t>教训：「创建连接」≠「连接已建立」，异步 API 必须在回调中操作</a:t>
+            </a:r>
+          </a:p>
+        </p:txBody>
+      </p:sp>
+      <p:sp>
+        <p:nvSpPr>
+          <p:cNvPr id="8" name="TextBox 7"/>
+          <p:cNvSpPr txBox="1"/>
+          <p:nvPr/>
+        </p:nvSpPr>
+        <p:spPr>
+          <a:xfrm>
+            <a:off x="457200" y="4800600"/>
+            <a:ext cx="11247120" cy="365760"/>
+          </a:xfrm>
+          <a:prstGeom prst="rect">
+            <a:avLst/>
+          </a:prstGeom>
+          <a:noFill/>
+        </p:spPr>
+        <p:txBody>
+          <a:bodyPr wrap="square" lIns="0" rIns="0" tIns="0" bIns="0">
+            <a:spAutoFit/>
+          </a:bodyPr>
+          <a:lstStyle/>
+          <a:p>
+            <a:pPr algn="l"/>
+            <a:r>
+              <a:rPr sz="1400" b="1">
+                <a:solidFill>
+                  <a:srgbClr val="1A73E8"/>
+                </a:solidFill>
+                <a:latin typeface="Microsoft YaHei"/>
+              </a:rPr>
+              <a:t>3️⃣ 两端结算不一致 — 统一公式</a:t>
+            </a:r>
+          </a:p>
+        </p:txBody>
+      </p:sp>
+      <p:sp>
+        <p:nvSpPr>
+          <p:cNvPr id="9" name="Rectangle 8"/>
+          <p:cNvSpPr/>
+          <p:nvPr/>
+        </p:nvSpPr>
+        <p:spPr>
+          <a:xfrm>
+            <a:off x="457200" y="5212080"/>
+            <a:ext cx="11247120" cy="1371600"/>
+          </a:xfrm>
+          <a:prstGeom prst="rect">
+            <a:avLst/>
+          </a:prstGeom>
+          <a:solidFill>
+            <a:srgbClr val="F4F4F4"/>
+          </a:solidFill>
+          <a:ln>
+            <a:solidFill>
+              <a:srgbClr val="D0D0D0"/>
+            </a:solidFill>
+          </a:ln>
+        </p:spPr>
+        <p:style>
+          <a:lnRef idx="1">
+            <a:schemeClr val="accent1"/>
+          </a:lnRef>
+          <a:fillRef idx="3">
+            <a:schemeClr val="accent1"/>
+          </a:fillRef>
+          <a:effectRef idx="2">
+            <a:schemeClr val="accent1"/>
+          </a:effectRef>
+          <a:fontRef idx="minor">
+            <a:schemeClr val="lt1"/>
+          </a:fontRef>
+        </p:style>
+        <p:txBody>
+          <a:bodyPr rtlCol="0" anchor="ctr" wrap="square" lIns="120000" rIns="120000" tIns="80000" bIns="80000"/>
+          <a:lstStyle/>
+          <a:p>
+            <a:pPr algn="ctr"/>
+            <a:r>
+              <a:rPr sz="1200">
+                <a:solidFill>
+                  <a:srgbClr val="202020"/>
+                </a:solidFill>
+                <a:latin typeface="Consolas"/>
+              </a:rPr>
+              <a:t>根因：collectedScore 硬编码为 0；服务端漏算「输方未走完已收分」</a:t>
+            </a:r>
+          </a:p>
+          <a:p>
+            <a:r>
+              <a:rPr sz="1200">
+                <a:solidFill>
+                  <a:srgbClr val="202020"/>
+                </a:solidFill>
+                <a:latin typeface="Consolas"/>
+              </a:rPr>
+              <a:t>统一公式：赢方 = 赢方所有已收 + 输方未走完(已收 + 手牌分)；输方 = 输方已走完已收</a:t>
+            </a:r>
+          </a:p>
+          <a:p>
+            <a:r>
+              <a:rPr sz="1200">
+                <a:solidFill>
+                  <a:srgbClr val="202020"/>
+                </a:solidFill>
+                <a:latin typeface="Consolas"/>
+              </a:rPr>
+              <a:t>新增 state.playerScores: MutableMap&lt;Int,Int&gt; 实时追踪每人已收分</a:t>
+            </a:r>
+          </a:p>
+          <a:p>
+            <a:r>
+              <a:rPr sz="1200">
+                <a:solidFill>
+                  <a:srgbClr val="202020"/>
+                </a:solidFill>
+                <a:latin typeface="Consolas"/>
+              </a:rPr>
+              <a:t>✓ 15 个验证用例全部通过（含提前结算、速度流、极端场景）</a:t>
+            </a:r>
+          </a:p>
+        </p:txBody>
+      </p:sp>
+      <p:sp>
+        <p:nvSpPr>
+          <p:cNvPr id="10" name="TextBox 9"/>
+          <p:cNvSpPr txBox="1"/>
+          <p:nvPr/>
+        </p:nvSpPr>
+        <p:spPr>
+          <a:xfrm>
+            <a:off x="10789920" y="6446520"/>
+            <a:ext cx="1188720" cy="274320"/>
+          </a:xfrm>
+          <a:prstGeom prst="rect">
+            <a:avLst/>
+          </a:prstGeom>
+          <a:noFill/>
+        </p:spPr>
+        <p:txBody>
+          <a:bodyPr wrap="square" lIns="0" rIns="0" tIns="0" bIns="0">
+            <a:spAutoFit/>
+          </a:bodyPr>
+          <a:lstStyle/>
+          <a:p>
+            <a:pPr algn="r"/>
+            <a:r>
+              <a:rPr sz="1000" b="0">
+                <a:solidFill>
+                  <a:srgbClr val="606060"/>
+                </a:solidFill>
+                <a:latin typeface="Microsoft YaHei"/>
+              </a:rPr>
+              <a:t>12 / 13</a:t>
+            </a:r>
+          </a:p>
+        </p:txBody>
+      </p:sp>
+    </p:spTree>
+  </p:cSld>
+  <p:clrMapOvr>
+    <a:masterClrMapping/>
+  </p:clrMapOvr>
+</p:sld>
+</file>
+
+<file path=ppt/slides/slide13.xml><?xml version="1.0" encoding="utf-8"?>
+<p:sld xmlns:a="http://schemas.openxmlformats.org/drawingml/2006/main" xmlns:p="http://schemas.openxmlformats.org/presentationml/2006/main" xmlns:r="http://schemas.openxmlformats.org/officeDocument/2006/relationships">
+  <p:cSld>
+    <p:spTree>
+      <p:nvGrpSpPr>
+        <p:cNvPr id="1" name=""/>
+        <p:cNvGrpSpPr/>
+        <p:nvPr/>
+      </p:nvGrpSpPr>
+      <p:grpSpPr/>
+      <p:sp>
+        <p:nvSpPr>
+          <p:cNvPr id="2" name="TextBox 1"/>
+          <p:cNvSpPr txBox="1"/>
+          <p:nvPr/>
+        </p:nvSpPr>
+        <p:spPr>
+          <a:xfrm>
+            <a:off x="457200" y="274320"/>
+            <a:ext cx="11247120" cy="457200"/>
+          </a:xfrm>
+          <a:prstGeom prst="rect">
+            <a:avLst/>
+          </a:prstGeom>
+          <a:noFill/>
+        </p:spPr>
+        <p:txBody>
+          <a:bodyPr wrap="square" lIns="0" rIns="0" tIns="0" bIns="0">
+            <a:spAutoFit/>
+          </a:bodyPr>
+          <a:lstStyle/>
+          <a:p>
+            <a:pPr algn="l"/>
+            <a:r>
+              <a:rPr sz="2400" b="1">
+                <a:solidFill>
+                  <a:srgbClr val="1A73E8"/>
+                </a:solidFill>
+                <a:latin typeface="Microsoft YaHei"/>
+              </a:rPr>
+              <a:t>八、经验总结 &amp; 后续行动</a:t>
             </a:r>
           </a:p>
         </p:txBody>
@@ -4255,7 +6584,7 @@
                 </a:solidFill>
                 <a:latin typeface="Microsoft YaHei"/>
               </a:rPr>
-              <a:t>10 / 10</a:t>
+              <a:t>13 / 13</a:t>
             </a:r>
           </a:p>
         </p:txBody>
@@ -5511,7 +7840,7 @@
                 </a:solidFill>
                 <a:latin typeface="Microsoft YaHei"/>
               </a:rPr>
-              <a:t>2 / 10</a:t>
+              <a:t>2 / 13</a:t>
             </a:r>
           </a:p>
         </p:txBody>
@@ -6557,7 +8886,7 @@
                 </a:solidFill>
                 <a:latin typeface="Microsoft YaHei"/>
               </a:rPr>
-              <a:t>3 / 10</a:t>
+              <a:t>3 / 13</a:t>
             </a:r>
           </a:p>
         </p:txBody>
@@ -7492,7 +9821,7 @@
                 </a:solidFill>
                 <a:latin typeface="Microsoft YaHei"/>
               </a:rPr>
-              <a:t>4 / 10</a:t>
+              <a:t>4 / 13</a:t>
             </a:r>
           </a:p>
         </p:txBody>
@@ -8382,7 +10711,7 @@
                 </a:solidFill>
                 <a:latin typeface="Microsoft YaHei"/>
               </a:rPr>
-              <a:t>5 / 10</a:t>
+              <a:t>5 / 13</a:t>
             </a:r>
           </a:p>
         </p:txBody>
@@ -9422,7 +11751,7 @@
                 </a:solidFill>
                 <a:latin typeface="Microsoft YaHei"/>
               </a:rPr>
-              <a:t>6 / 10</a:t>
+              <a:t>6 / 13</a:t>
             </a:r>
           </a:p>
         </p:txBody>
@@ -10763,7 +13092,7 @@
                 </a:solidFill>
                 <a:latin typeface="Microsoft YaHei"/>
               </a:rPr>
-              <a:t>7 / 10</a:t>
+              <a:t>7 / 13</a:t>
             </a:r>
           </a:p>
         </p:txBody>
@@ -11916,7 +14245,7 @@
                 </a:solidFill>
                 <a:latin typeface="Microsoft YaHei"/>
               </a:rPr>
-              <a:t>8 / 10</a:t>
+              <a:t>8 / 13</a:t>
             </a:r>
           </a:p>
         </p:txBody>
@@ -11969,7 +14298,7 @@
                 </a:solidFill>
                 <a:latin typeface="Microsoft YaHei"/>
               </a:rPr>
-              <a:t>六、关键技术修复（3 处核心）</a:t>
+              <a:t>六、反思：为什么 AI 写的代码 Bug 不少？</a:t>
             </a:r>
           </a:p>
         </p:txBody>
@@ -12025,7 +14354,7 @@
         </p:nvSpPr>
         <p:spPr>
           <a:xfrm>
-            <a:off x="457200" y="960120"/>
+            <a:off x="457200" y="914400"/>
             <a:ext cx="11247120" cy="365760"/>
           </a:xfrm>
           <a:prstGeom prst="rect">
@@ -12047,31 +14376,901 @@
                 </a:solidFill>
                 <a:latin typeface="Microsoft YaHei"/>
               </a:rPr>
-              <a:t>1️⃣ 游戏卡死 — 四层防御</a:t>
-            </a:r>
-          </a:p>
-        </p:txBody>
-      </p:sp>
-      <p:sp>
-        <p:nvSpPr>
-          <p:cNvPr id="5" name="Rectangle 4"/>
-          <p:cNvSpPr/>
-          <p:nvPr/>
-        </p:nvSpPr>
-        <p:spPr>
-          <a:xfrm>
-            <a:off x="457200" y="1371600"/>
-            <a:ext cx="11247120" cy="1554480"/>
+              <a:t>🔵 生成阶段必然有 Bug 的 5 个结构性原因</a:t>
+            </a:r>
+          </a:p>
+        </p:txBody>
+      </p:sp>
+      <p:graphicFrame>
+        <p:nvGraphicFramePr>
+          <p:cNvPr id="5" name="Table 4"/>
+          <p:cNvGraphicFramePr>
+            <a:graphicFrameLocks noGrp="1"/>
+          </p:cNvGraphicFramePr>
+          <p:nvPr/>
+        </p:nvGraphicFramePr>
+        <p:xfrm>
+          <a:off x="457200" y="1325880"/>
+          <a:ext cx="11247120" cy="2286000"/>
+        </p:xfrm>
+        <a:graphic>
+          <a:graphicData uri="http://schemas.openxmlformats.org/drawingml/2006/table">
+            <a:tbl>
+              <a:tblPr firstRow="1" bandRow="1">
+                <a:tableStyleId>{5C22544A-7EE6-4342-B048-85BDC9FD1C3A}</a:tableStyleId>
+              </a:tblPr>
+              <a:tblGrid>
+                <a:gridCol w="457200"/>
+                <a:gridCol w="4114800"/>
+                <a:gridCol w="6675120"/>
+              </a:tblGrid>
+              <a:tr h="381000">
+                <a:tc>
+                  <a:txBody>
+                    <a:bodyPr lIns="40000" rIns="40000" tIns="15000" bIns="15000"/>
+                    <a:lstStyle/>
+                    <a:p>
+                      <a:pPr algn="ctr"/>
+                      <a:r>
+                        <a:rPr sz="1200" b="1">
+                          <a:solidFill>
+                            <a:srgbClr val="FFFFFF"/>
+                          </a:solidFill>
+                          <a:latin typeface="Microsoft YaHei"/>
+                        </a:rPr>
+                        <a:t>#</a:t>
+                      </a:r>
+                    </a:p>
+                  </a:txBody>
+                  <a:tcPr>
+                    <a:solidFill>
+                      <a:srgbClr val="1A73E8"/>
+                    </a:solidFill>
+                  </a:tcPr>
+                </a:tc>
+                <a:tc>
+                  <a:txBody>
+                    <a:bodyPr lIns="40000" rIns="40000" tIns="15000" bIns="15000"/>
+                    <a:lstStyle/>
+                    <a:p>
+                      <a:pPr algn="ctr"/>
+                      <a:r>
+                        <a:rPr sz="1200" b="1">
+                          <a:solidFill>
+                            <a:srgbClr val="FFFFFF"/>
+                          </a:solidFill>
+                          <a:latin typeface="Microsoft YaHei"/>
+                        </a:rPr>
+                        <a:t>原因</a:t>
+                      </a:r>
+                    </a:p>
+                  </a:txBody>
+                  <a:tcPr>
+                    <a:solidFill>
+                      <a:srgbClr val="1A73E8"/>
+                    </a:solidFill>
+                  </a:tcPr>
+                </a:tc>
+                <a:tc>
+                  <a:txBody>
+                    <a:bodyPr lIns="40000" rIns="40000" tIns="15000" bIns="15000"/>
+                    <a:lstStyle/>
+                    <a:p>
+                      <a:pPr algn="ctr"/>
+                      <a:r>
+                        <a:rPr sz="1200" b="1">
+                          <a:solidFill>
+                            <a:srgbClr val="FFFFFF"/>
+                          </a:solidFill>
+                          <a:latin typeface="Microsoft YaHei"/>
+                        </a:rPr>
+                        <a:t>本项目例子</a:t>
+                      </a:r>
+                    </a:p>
+                  </a:txBody>
+                  <a:tcPr>
+                    <a:solidFill>
+                      <a:srgbClr val="1A73E8"/>
+                    </a:solidFill>
+                  </a:tcPr>
+                </a:tc>
+              </a:tr>
+              <a:tr h="381000">
+                <a:tc>
+                  <a:txBody>
+                    <a:bodyPr lIns="40000" rIns="40000" tIns="10000" bIns="10000" wrap="square"/>
+                    <a:lstStyle/>
+                    <a:p>
+                      <a:pPr algn="l"/>
+                      <a:r>
+                        <a:rPr sz="1200">
+                          <a:solidFill>
+                            <a:srgbClr val="202020"/>
+                          </a:solidFill>
+                          <a:latin typeface="Microsoft YaHei"/>
+                        </a:rPr>
+                        <a:t>1</a:t>
+                      </a:r>
+                    </a:p>
+                  </a:txBody>
+                  <a:tcPr>
+                    <a:solidFill>
+                      <a:srgbClr val="FFFFFF"/>
+                    </a:solidFill>
+                  </a:tcPr>
+                </a:tc>
+                <a:tc>
+                  <a:txBody>
+                    <a:bodyPr lIns="40000" rIns="40000" tIns="10000" bIns="10000" wrap="square"/>
+                    <a:lstStyle/>
+                    <a:p>
+                      <a:pPr algn="l"/>
+                      <a:r>
+                        <a:rPr sz="1200">
+                          <a:solidFill>
+                            <a:srgbClr val="202020"/>
+                          </a:solidFill>
+                          <a:latin typeface="Microsoft YaHei"/>
+                        </a:rPr>
+                        <a:t>生成 vs 验证是不同认知任务</a:t>
+                      </a:r>
+                    </a:p>
+                  </a:txBody>
+                  <a:tcPr>
+                    <a:solidFill>
+                      <a:srgbClr val="FFFFFF"/>
+                    </a:solidFill>
+                  </a:tcPr>
+                </a:tc>
+                <a:tc>
+                  <a:txBody>
+                    <a:bodyPr lIns="40000" rIns="40000" tIns="10000" bIns="10000" wrap="square"/>
+                    <a:lstStyle/>
+                    <a:p>
+                      <a:pPr algn="l"/>
+                      <a:r>
+                        <a:rPr sz="1200">
+                          <a:solidFill>
+                            <a:srgbClr val="202020"/>
+                          </a:solidFill>
+                          <a:latin typeface="Microsoft YaHei"/>
+                        </a:rPr>
+                        <a:t>canBeat 套用「同张数比大小」常用模式，忽略大炸弹直胜</a:t>
+                      </a:r>
+                    </a:p>
+                  </a:txBody>
+                  <a:tcPr>
+                    <a:solidFill>
+                      <a:srgbClr val="FFFFFF"/>
+                    </a:solidFill>
+                  </a:tcPr>
+                </a:tc>
+              </a:tr>
+              <a:tr h="381000">
+                <a:tc>
+                  <a:txBody>
+                    <a:bodyPr lIns="40000" rIns="40000" tIns="10000" bIns="10000" wrap="square"/>
+                    <a:lstStyle/>
+                    <a:p>
+                      <a:pPr algn="l"/>
+                      <a:r>
+                        <a:rPr sz="1200">
+                          <a:solidFill>
+                            <a:srgbClr val="202020"/>
+                          </a:solidFill>
+                          <a:latin typeface="Microsoft YaHei"/>
+                        </a:rPr>
+                        <a:t>2</a:t>
+                      </a:r>
+                    </a:p>
+                  </a:txBody>
+                  <a:tcPr>
+                    <a:solidFill>
+                      <a:srgbClr val="F0F4FF"/>
+                    </a:solidFill>
+                  </a:tcPr>
+                </a:tc>
+                <a:tc>
+                  <a:txBody>
+                    <a:bodyPr lIns="40000" rIns="40000" tIns="10000" bIns="10000" wrap="square"/>
+                    <a:lstStyle/>
+                    <a:p>
+                      <a:pPr algn="l"/>
+                      <a:r>
+                        <a:rPr sz="1200">
+                          <a:solidFill>
+                            <a:srgbClr val="202020"/>
+                          </a:solidFill>
+                          <a:latin typeface="Microsoft YaHei"/>
+                        </a:rPr>
+                        <a:t>生成时无执行反馈，时序/并发是盲区</a:t>
+                      </a:r>
+                    </a:p>
+                  </a:txBody>
+                  <a:tcPr>
+                    <a:solidFill>
+                      <a:srgbClr val="F0F4FF"/>
+                    </a:solidFill>
+                  </a:tcPr>
+                </a:tc>
+                <a:tc>
+                  <a:txBody>
+                    <a:bodyPr lIns="40000" rIns="40000" tIns="10000" bIns="10000" wrap="square"/>
+                    <a:lstStyle/>
+                    <a:p>
+                      <a:pPr algn="l"/>
+                      <a:r>
+                        <a:rPr sz="1200">
+                          <a:solidFill>
+                            <a:srgbClr val="202020"/>
+                          </a:solidFill>
+                          <a:latin typeface="Microsoft YaHei"/>
+                        </a:rPr>
+                        <a:t>WebSocket CONNECTING 时 send() 静默失败</a:t>
+                      </a:r>
+                    </a:p>
+                  </a:txBody>
+                  <a:tcPr>
+                    <a:solidFill>
+                      <a:srgbClr val="F0F4FF"/>
+                    </a:solidFill>
+                  </a:tcPr>
+                </a:tc>
+              </a:tr>
+              <a:tr h="381000">
+                <a:tc>
+                  <a:txBody>
+                    <a:bodyPr lIns="40000" rIns="40000" tIns="10000" bIns="10000" wrap="square"/>
+                    <a:lstStyle/>
+                    <a:p>
+                      <a:pPr algn="l"/>
+                      <a:r>
+                        <a:rPr sz="1200">
+                          <a:solidFill>
+                            <a:srgbClr val="202020"/>
+                          </a:solidFill>
+                          <a:latin typeface="Microsoft YaHei"/>
+                        </a:rPr>
+                        <a:t>3</a:t>
+                      </a:r>
+                    </a:p>
+                  </a:txBody>
+                  <a:tcPr>
+                    <a:solidFill>
+                      <a:srgbClr val="FFFFFF"/>
+                    </a:solidFill>
+                  </a:tcPr>
+                </a:tc>
+                <a:tc>
+                  <a:txBody>
+                    <a:bodyPr lIns="40000" rIns="40000" tIns="10000" bIns="10000" wrap="square"/>
+                    <a:lstStyle/>
+                    <a:p>
+                      <a:pPr algn="l"/>
+                      <a:r>
+                        <a:rPr sz="1200">
+                          <a:solidFill>
+                            <a:srgbClr val="202020"/>
+                          </a:solidFill>
+                          <a:latin typeface="Microsoft YaHei"/>
+                        </a:rPr>
+                        <a:t>自然语言规格隐式不完整</a:t>
+                      </a:r>
+                    </a:p>
+                  </a:txBody>
+                  <a:tcPr>
+                    <a:solidFill>
+                      <a:srgbClr val="FFFFFF"/>
+                    </a:solidFill>
+                  </a:tcPr>
+                </a:tc>
+                <a:tc>
+                  <a:txBody>
+                    <a:bodyPr lIns="40000" rIns="40000" tIns="10000" bIns="10000" wrap="square"/>
+                    <a:lstStyle/>
+                    <a:p>
+                      <a:pPr algn="l"/>
+                      <a:r>
+                        <a:rPr sz="1200">
+                          <a:solidFill>
+                            <a:srgbClr val="202020"/>
+                          </a:solidFill>
+                          <a:latin typeface="Microsoft YaHei"/>
+                        </a:rPr>
+                        <a:t>「重连后游戏继续」未明确秒数和保留状态</a:t>
+                      </a:r>
+                    </a:p>
+                  </a:txBody>
+                  <a:tcPr>
+                    <a:solidFill>
+                      <a:srgbClr val="FFFFFF"/>
+                    </a:solidFill>
+                  </a:tcPr>
+                </a:tc>
+              </a:tr>
+              <a:tr h="381000">
+                <a:tc>
+                  <a:txBody>
+                    <a:bodyPr lIns="40000" rIns="40000" tIns="10000" bIns="10000" wrap="square"/>
+                    <a:lstStyle/>
+                    <a:p>
+                      <a:pPr algn="l"/>
+                      <a:r>
+                        <a:rPr sz="1200">
+                          <a:solidFill>
+                            <a:srgbClr val="202020"/>
+                          </a:solidFill>
+                          <a:latin typeface="Microsoft YaHei"/>
+                        </a:rPr>
+                        <a:t>4</a:t>
+                      </a:r>
+                    </a:p>
+                  </a:txBody>
+                  <a:tcPr>
+                    <a:solidFill>
+                      <a:srgbClr val="F0F4FF"/>
+                    </a:solidFill>
+                  </a:tcPr>
+                </a:tc>
+                <a:tc>
+                  <a:txBody>
+                    <a:bodyPr lIns="40000" rIns="40000" tIns="10000" bIns="10000" wrap="square"/>
+                    <a:lstStyle/>
+                    <a:p>
+                      <a:pPr algn="l"/>
+                      <a:r>
+                        <a:rPr sz="1200">
+                          <a:solidFill>
+                            <a:srgbClr val="202020"/>
+                          </a:solidFill>
+                          <a:latin typeface="Microsoft YaHei"/>
+                        </a:rPr>
+                        <a:t>模式匹配编码「常用 ≠ 正确」</a:t>
+                      </a:r>
+                    </a:p>
+                  </a:txBody>
+                  <a:tcPr>
+                    <a:solidFill>
+                      <a:srgbClr val="F0F4FF"/>
+                    </a:solidFill>
+                  </a:tcPr>
+                </a:tc>
+                <a:tc>
+                  <a:txBody>
+                    <a:bodyPr lIns="40000" rIns="40000" tIns="10000" bIns="10000" wrap="square"/>
+                    <a:lstStyle/>
+                    <a:p>
+                      <a:pPr algn="l"/>
+                      <a:r>
+                        <a:rPr sz="1200">
+                          <a:solidFill>
+                            <a:srgbClr val="202020"/>
+                          </a:solidFill>
+                          <a:latin typeface="Microsoft YaHei"/>
+                        </a:rPr>
+                        <a:t>UUID.take(8) / ArrayList — 常用但联网场景错</a:t>
+                      </a:r>
+                    </a:p>
+                  </a:txBody>
+                  <a:tcPr>
+                    <a:solidFill>
+                      <a:srgbClr val="F0F4FF"/>
+                    </a:solidFill>
+                  </a:tcPr>
+                </a:tc>
+              </a:tr>
+              <a:tr h="381000">
+                <a:tc>
+                  <a:txBody>
+                    <a:bodyPr lIns="40000" rIns="40000" tIns="10000" bIns="10000" wrap="square"/>
+                    <a:lstStyle/>
+                    <a:p>
+                      <a:pPr algn="l"/>
+                      <a:r>
+                        <a:rPr sz="1200">
+                          <a:solidFill>
+                            <a:srgbClr val="202020"/>
+                          </a:solidFill>
+                          <a:latin typeface="Microsoft YaHei"/>
+                        </a:rPr>
+                        <a:t>5</a:t>
+                      </a:r>
+                    </a:p>
+                  </a:txBody>
+                  <a:tcPr>
+                    <a:solidFill>
+                      <a:srgbClr val="FFFFFF"/>
+                    </a:solidFill>
+                  </a:tcPr>
+                </a:tc>
+                <a:tc>
+                  <a:txBody>
+                    <a:bodyPr lIns="40000" rIns="40000" tIns="10000" bIns="10000" wrap="square"/>
+                    <a:lstStyle/>
+                    <a:p>
+                      <a:pPr algn="l"/>
+                      <a:r>
+                        <a:rPr sz="1200">
+                          <a:solidFill>
+                            <a:srgbClr val="202020"/>
+                          </a:solidFill>
+                          <a:latin typeface="Microsoft YaHei"/>
+                        </a:rPr>
+                        <a:t>跨文件一致性是结构盲区</a:t>
+                      </a:r>
+                    </a:p>
+                  </a:txBody>
+                  <a:tcPr>
+                    <a:solidFill>
+                      <a:srgbClr val="FFFFFF"/>
+                    </a:solidFill>
+                  </a:tcPr>
+                </a:tc>
+                <a:tc>
+                  <a:txBody>
+                    <a:bodyPr lIns="40000" rIns="40000" tIns="10000" bIns="10000" wrap="square"/>
+                    <a:lstStyle/>
+                    <a:p>
+                      <a:pPr algn="l"/>
+                      <a:r>
+                        <a:rPr sz="1200">
+                          <a:solidFill>
+                            <a:srgbClr val="202020"/>
+                          </a:solidFill>
+                          <a:latin typeface="Microsoft YaHei"/>
+                        </a:rPr>
+                        <a:t>单机 CardRules vs 服务端 canBeat — 双份 3 处不一致</a:t>
+                      </a:r>
+                    </a:p>
+                  </a:txBody>
+                  <a:tcPr>
+                    <a:solidFill>
+                      <a:srgbClr val="FFFFFF"/>
+                    </a:solidFill>
+                  </a:tcPr>
+                </a:tc>
+              </a:tr>
+            </a:tbl>
+          </a:graphicData>
+        </a:graphic>
+      </p:graphicFrame>
+      <p:sp>
+        <p:nvSpPr>
+          <p:cNvPr id="6" name="TextBox 5"/>
+          <p:cNvSpPr txBox="1"/>
+          <p:nvPr/>
+        </p:nvSpPr>
+        <p:spPr>
+          <a:xfrm>
+            <a:off x="457200" y="3794760"/>
+            <a:ext cx="11247120" cy="365760"/>
           </a:xfrm>
           <a:prstGeom prst="rect">
             <a:avLst/>
           </a:prstGeom>
+          <a:noFill/>
+        </p:spPr>
+        <p:txBody>
+          <a:bodyPr wrap="square" lIns="0" rIns="0" tIns="0" bIns="0">
+            <a:spAutoFit/>
+          </a:bodyPr>
+          <a:lstStyle/>
+          <a:p>
+            <a:pPr algn="l"/>
+            <a:r>
+              <a:rPr sz="1400" b="1">
+                <a:solidFill>
+                  <a:srgbClr val="F57C00"/>
+                </a:solidFill>
+                <a:latin typeface="Microsoft YaHei"/>
+              </a:rPr>
+              <a:t>🔁 多轮自审仍能发现新问题的 4 个原因</a:t>
+            </a:r>
+          </a:p>
+        </p:txBody>
+      </p:sp>
+      <p:graphicFrame>
+        <p:nvGraphicFramePr>
+          <p:cNvPr id="7" name="Table 6"/>
+          <p:cNvGraphicFramePr>
+            <a:graphicFrameLocks noGrp="1"/>
+          </p:cNvGraphicFramePr>
+          <p:nvPr/>
+        </p:nvGraphicFramePr>
+        <p:xfrm>
+          <a:off x="457200" y="4206240"/>
+          <a:ext cx="11247120" cy="1828800"/>
+        </p:xfrm>
+        <a:graphic>
+          <a:graphicData uri="http://schemas.openxmlformats.org/drawingml/2006/table">
+            <a:tbl>
+              <a:tblPr firstRow="1" bandRow="1">
+                <a:tableStyleId>{5C22544A-7EE6-4342-B048-85BDC9FD1C3A}</a:tableStyleId>
+              </a:tblPr>
+              <a:tblGrid>
+                <a:gridCol w="457200"/>
+                <a:gridCol w="4114800"/>
+                <a:gridCol w="6675120"/>
+              </a:tblGrid>
+              <a:tr h="365760">
+                <a:tc>
+                  <a:txBody>
+                    <a:bodyPr lIns="40000" rIns="40000" tIns="15000" bIns="15000"/>
+                    <a:lstStyle/>
+                    <a:p>
+                      <a:pPr algn="ctr"/>
+                      <a:r>
+                        <a:rPr sz="1200" b="1">
+                          <a:solidFill>
+                            <a:srgbClr val="FFFFFF"/>
+                          </a:solidFill>
+                          <a:latin typeface="Microsoft YaHei"/>
+                        </a:rPr>
+                        <a:t>#</a:t>
+                      </a:r>
+                    </a:p>
+                  </a:txBody>
+                  <a:tcPr>
+                    <a:solidFill>
+                      <a:srgbClr val="F57C00"/>
+                    </a:solidFill>
+                  </a:tcPr>
+                </a:tc>
+                <a:tc>
+                  <a:txBody>
+                    <a:bodyPr lIns="40000" rIns="40000" tIns="15000" bIns="15000"/>
+                    <a:lstStyle/>
+                    <a:p>
+                      <a:pPr algn="ctr"/>
+                      <a:r>
+                        <a:rPr sz="1200" b="1">
+                          <a:solidFill>
+                            <a:srgbClr val="FFFFFF"/>
+                          </a:solidFill>
+                          <a:latin typeface="Microsoft YaHei"/>
+                        </a:rPr>
+                        <a:t>原因</a:t>
+                      </a:r>
+                    </a:p>
+                  </a:txBody>
+                  <a:tcPr>
+                    <a:solidFill>
+                      <a:srgbClr val="F57C00"/>
+                    </a:solidFill>
+                  </a:tcPr>
+                </a:tc>
+                <a:tc>
+                  <a:txBody>
+                    <a:bodyPr lIns="40000" rIns="40000" tIns="15000" bIns="15000"/>
+                    <a:lstStyle/>
+                    <a:p>
+                      <a:pPr algn="ctr"/>
+                      <a:r>
+                        <a:rPr sz="1200" b="1">
+                          <a:solidFill>
+                            <a:srgbClr val="FFFFFF"/>
+                          </a:solidFill>
+                          <a:latin typeface="Microsoft YaHei"/>
+                        </a:rPr>
+                        <a:t>本项目体现</a:t>
+                      </a:r>
+                    </a:p>
+                  </a:txBody>
+                  <a:tcPr>
+                    <a:solidFill>
+                      <a:srgbClr val="F57C00"/>
+                    </a:solidFill>
+                  </a:tcPr>
+                </a:tc>
+              </a:tr>
+              <a:tr h="365760">
+                <a:tc>
+                  <a:txBody>
+                    <a:bodyPr lIns="40000" rIns="40000" tIns="10000" bIns="10000" wrap="square"/>
+                    <a:lstStyle/>
+                    <a:p>
+                      <a:pPr algn="l"/>
+                      <a:r>
+                        <a:rPr sz="1200">
+                          <a:solidFill>
+                            <a:srgbClr val="202020"/>
+                          </a:solidFill>
+                          <a:latin typeface="Microsoft YaHei"/>
+                        </a:rPr>
+                        <a:t>1</a:t>
+                      </a:r>
+                    </a:p>
+                  </a:txBody>
+                  <a:tcPr>
+                    <a:solidFill>
+                      <a:srgbClr val="FFFFFF"/>
+                    </a:solidFill>
+                  </a:tcPr>
+                </a:tc>
+                <a:tc>
+                  <a:txBody>
+                    <a:bodyPr lIns="40000" rIns="40000" tIns="10000" bIns="10000" wrap="square"/>
+                    <a:lstStyle/>
+                    <a:p>
+                      <a:pPr algn="l"/>
+                      <a:r>
+                        <a:rPr sz="1200">
+                          <a:solidFill>
+                            <a:srgbClr val="202020"/>
+                          </a:solidFill>
+                          <a:latin typeface="Microsoft YaHei"/>
+                        </a:rPr>
+                        <a:t>每轮在问不同的问题</a:t>
+                      </a:r>
+                    </a:p>
+                  </a:txBody>
+                  <a:tcPr>
+                    <a:solidFill>
+                      <a:srgbClr val="FFFFFF"/>
+                    </a:solidFill>
+                  </a:tcPr>
+                </a:tc>
+                <a:tc>
+                  <a:txBody>
+                    <a:bodyPr lIns="40000" rIns="40000" tIns="10000" bIns="10000" wrap="square"/>
+                    <a:lstStyle/>
+                    <a:p>
+                      <a:pPr algn="l"/>
+                      <a:r>
+                        <a:rPr sz="1200">
+                          <a:solidFill>
+                            <a:srgbClr val="202020"/>
+                          </a:solidFill>
+                          <a:latin typeface="Microsoft YaHei"/>
+                        </a:rPr>
+                        <a:t>R1:「代码整洁吗？」 R4:「为什么 3 次修了还卡？」</a:t>
+                      </a:r>
+                    </a:p>
+                  </a:txBody>
+                  <a:tcPr>
+                    <a:solidFill>
+                      <a:srgbClr val="FFFFFF"/>
+                    </a:solidFill>
+                  </a:tcPr>
+                </a:tc>
+              </a:tr>
+              <a:tr h="365760">
+                <a:tc>
+                  <a:txBody>
+                    <a:bodyPr lIns="40000" rIns="40000" tIns="10000" bIns="10000" wrap="square"/>
+                    <a:lstStyle/>
+                    <a:p>
+                      <a:pPr algn="l"/>
+                      <a:r>
+                        <a:rPr sz="1200">
+                          <a:solidFill>
+                            <a:srgbClr val="202020"/>
+                          </a:solidFill>
+                          <a:latin typeface="Microsoft YaHei"/>
+                        </a:rPr>
+                        <a:t>2</a:t>
+                      </a:r>
+                    </a:p>
+                  </a:txBody>
+                  <a:tcPr>
+                    <a:solidFill>
+                      <a:srgbClr val="F0F4FF"/>
+                    </a:solidFill>
+                  </a:tcPr>
+                </a:tc>
+                <a:tc>
+                  <a:txBody>
+                    <a:bodyPr lIns="40000" rIns="40000" tIns="10000" bIns="10000" wrap="square"/>
+                    <a:lstStyle/>
+                    <a:p>
+                      <a:pPr algn="l"/>
+                      <a:r>
+                        <a:rPr sz="1200">
+                          <a:solidFill>
+                            <a:srgbClr val="202020"/>
+                          </a:solidFill>
+                          <a:latin typeface="Microsoft YaHei"/>
+                        </a:rPr>
+                        <a:t>自审有确认偏差，用户「还卡住」才打破</a:t>
+                      </a:r>
+                    </a:p>
+                  </a:txBody>
+                  <a:tcPr>
+                    <a:solidFill>
+                      <a:srgbClr val="F0F4FF"/>
+                    </a:solidFill>
+                  </a:tcPr>
+                </a:tc>
+                <a:tc>
+                  <a:txBody>
+                    <a:bodyPr lIns="40000" rIns="40000" tIns="10000" bIns="10000" wrap="square"/>
+                    <a:lstStyle/>
+                    <a:p>
+                      <a:pPr algn="l"/>
+                      <a:r>
+                        <a:rPr sz="1200">
+                          <a:solidFill>
+                            <a:srgbClr val="202020"/>
+                          </a:solidFill>
+                          <a:latin typeface="Microsoft YaHei"/>
+                        </a:rPr>
+                        <a:t>4 轮逐层挖到 send() 静默失败</a:t>
+                      </a:r>
+                    </a:p>
+                  </a:txBody>
+                  <a:tcPr>
+                    <a:solidFill>
+                      <a:srgbClr val="F0F4FF"/>
+                    </a:solidFill>
+                  </a:tcPr>
+                </a:tc>
+              </a:tr>
+              <a:tr h="365760">
+                <a:tc>
+                  <a:txBody>
+                    <a:bodyPr lIns="40000" rIns="40000" tIns="10000" bIns="10000" wrap="square"/>
+                    <a:lstStyle/>
+                    <a:p>
+                      <a:pPr algn="l"/>
+                      <a:r>
+                        <a:rPr sz="1200">
+                          <a:solidFill>
+                            <a:srgbClr val="202020"/>
+                          </a:solidFill>
+                          <a:latin typeface="Microsoft YaHei"/>
+                        </a:rPr>
+                        <a:t>3</a:t>
+                      </a:r>
+                    </a:p>
+                  </a:txBody>
+                  <a:tcPr>
+                    <a:solidFill>
+                      <a:srgbClr val="FFFFFF"/>
+                    </a:solidFill>
+                  </a:tcPr>
+                </a:tc>
+                <a:tc>
+                  <a:txBody>
+                    <a:bodyPr lIns="40000" rIns="40000" tIns="10000" bIns="10000" wrap="square"/>
+                    <a:lstStyle/>
+                    <a:p>
+                      <a:pPr algn="l"/>
+                      <a:r>
+                        <a:rPr sz="1200">
+                          <a:solidFill>
+                            <a:srgbClr val="202020"/>
+                          </a:solidFill>
+                          <a:latin typeface="Microsoft YaHei"/>
+                        </a:rPr>
+                        <a:t>症状被消除后下一层根因才暴露</a:t>
+                      </a:r>
+                    </a:p>
+                  </a:txBody>
+                  <a:tcPr>
+                    <a:solidFill>
+                      <a:srgbClr val="FFFFFF"/>
+                    </a:solidFill>
+                  </a:tcPr>
+                </a:tc>
+                <a:tc>
+                  <a:txBody>
+                    <a:bodyPr lIns="40000" rIns="40000" tIns="10000" bIns="10000" wrap="square"/>
+                    <a:lstStyle/>
+                    <a:p>
+                      <a:pPr algn="l"/>
+                      <a:r>
+                        <a:rPr sz="1200">
+                          <a:solidFill>
+                            <a:srgbClr val="202020"/>
+                          </a:solidFill>
+                          <a:latin typeface="Microsoft YaHei"/>
+                        </a:rPr>
+                        <a:t>canBeat → 回退链 → Mutex → 兜底 必须按序解锁</a:t>
+                      </a:r>
+                    </a:p>
+                  </a:txBody>
+                  <a:tcPr>
+                    <a:solidFill>
+                      <a:srgbClr val="FFFFFF"/>
+                    </a:solidFill>
+                  </a:tcPr>
+                </a:tc>
+              </a:tr>
+              <a:tr h="365760">
+                <a:tc>
+                  <a:txBody>
+                    <a:bodyPr lIns="40000" rIns="40000" tIns="10000" bIns="10000" wrap="square"/>
+                    <a:lstStyle/>
+                    <a:p>
+                      <a:pPr algn="l"/>
+                      <a:r>
+                        <a:rPr sz="1200">
+                          <a:solidFill>
+                            <a:srgbClr val="202020"/>
+                          </a:solidFill>
+                          <a:latin typeface="Microsoft YaHei"/>
+                        </a:rPr>
+                        <a:t>4</a:t>
+                      </a:r>
+                    </a:p>
+                  </a:txBody>
+                  <a:tcPr>
+                    <a:solidFill>
+                      <a:srgbClr val="F0F4FF"/>
+                    </a:solidFill>
+                  </a:tcPr>
+                </a:tc>
+                <a:tc>
+                  <a:txBody>
+                    <a:bodyPr lIns="40000" rIns="40000" tIns="10000" bIns="10000" wrap="square"/>
+                    <a:lstStyle/>
+                    <a:p>
+                      <a:pPr algn="l"/>
+                      <a:r>
+                        <a:rPr sz="1200">
+                          <a:solidFill>
+                            <a:srgbClr val="202020"/>
+                          </a:solidFill>
+                          <a:latin typeface="Microsoft YaHei"/>
+                        </a:rPr>
+                        <a:t>注意力有限，单轮无法全部仔细看</a:t>
+                      </a:r>
+                    </a:p>
+                  </a:txBody>
+                  <a:tcPr>
+                    <a:solidFill>
+                      <a:srgbClr val="F0F4FF"/>
+                    </a:solidFill>
+                  </a:tcPr>
+                </a:tc>
+                <a:tc>
+                  <a:txBody>
+                    <a:bodyPr lIns="40000" rIns="40000" tIns="10000" bIns="10000" wrap="square"/>
+                    <a:lstStyle/>
+                    <a:p>
+                      <a:pPr algn="l"/>
+                      <a:r>
+                        <a:rPr sz="1200">
+                          <a:solidFill>
+                            <a:srgbClr val="202020"/>
+                          </a:solidFill>
+                          <a:latin typeface="Microsoft YaHei"/>
+                        </a:rPr>
+                        <a:t>1M 上下文 ≠ 全部能仔细分析</a:t>
+                      </a:r>
+                    </a:p>
+                  </a:txBody>
+                  <a:tcPr>
+                    <a:solidFill>
+                      <a:srgbClr val="F0F4FF"/>
+                    </a:solidFill>
+                  </a:tcPr>
+                </a:tc>
+              </a:tr>
+            </a:tbl>
+          </a:graphicData>
+        </a:graphic>
+      </p:graphicFrame>
+      <p:sp>
+        <p:nvSpPr>
+          <p:cNvPr id="8" name="Rounded Rectangle 7"/>
+          <p:cNvSpPr/>
+          <p:nvPr/>
+        </p:nvSpPr>
+        <p:spPr>
+          <a:xfrm>
+            <a:off x="457200" y="6172200"/>
+            <a:ext cx="11338560" cy="502920"/>
+          </a:xfrm>
+          <a:prstGeom prst="roundRect">
+            <a:avLst/>
+          </a:prstGeom>
           <a:solidFill>
-            <a:srgbClr val="F4F4F4"/>
+            <a:srgbClr val="F0F4FF"/>
           </a:solidFill>
           <a:ln>
             <a:solidFill>
-              <a:srgbClr val="D0D0D0"/>
+              <a:srgbClr val="1A73E8"/>
             </a:solidFill>
           </a:ln>
         </p:spPr>
@@ -12090,65 +15289,32 @@
           </a:fontRef>
         </p:style>
         <p:txBody>
-          <a:bodyPr rtlCol="0" anchor="ctr" wrap="square" lIns="120000" rIns="120000" tIns="80000" bIns="80000"/>
+          <a:bodyPr rtlCol="0" anchor="ctr" wrap="square" lIns="150000" rIns="150000"/>
           <a:lstStyle/>
           <a:p>
             <a:pPr algn="ctr"/>
             <a:r>
-              <a:rPr sz="1200">
-                <a:solidFill>
-                  <a:srgbClr val="202020"/>
-                </a:solidFill>
-                <a:latin typeface="Consolas"/>
-              </a:rPr>
-              <a:t>[层1] canBeat 炸弹比较错误：大张数应直接胜（修复前要求同张数）</a:t>
-            </a:r>
-          </a:p>
-          <a:p>
-            <a:r>
-              <a:rPr sz="1200">
-                <a:solidFill>
-                  <a:srgbClr val="202020"/>
-                </a:solidFill>
-                <a:latin typeface="Consolas"/>
-              </a:rPr>
-              <a:t>[层2] AI 失败无回退：增加三级回退（首选 → 过牌 → 最小单张）</a:t>
-            </a:r>
-          </a:p>
-          <a:p>
-            <a:r>
-              <a:rPr sz="1200">
-                <a:solidFill>
-                  <a:srgbClr val="202020"/>
-                </a:solidFill>
-                <a:latin typeface="Consolas"/>
-              </a:rPr>
-              <a:t>[层3] 多协程无锁并发写 state.hands：每房间一把 Mutex（改在锁内/广播在锁外）</a:t>
-            </a:r>
-          </a:p>
-          <a:p>
-            <a:r>
-              <a:rPr sz="1200">
-                <a:solidFill>
-                  <a:srgbClr val="202020"/>
-                </a:solidFill>
-                <a:latin typeface="Consolas"/>
-              </a:rPr>
-              <a:t>[层4] 三级回退仍失败：broadcastForceAdvance 强制推进兜底</a:t>
-            </a:r>
-          </a:p>
-        </p:txBody>
-      </p:sp>
-      <p:sp>
-        <p:nvSpPr>
-          <p:cNvPr id="6" name="TextBox 5"/>
+              <a:rPr sz="1200" b="1">
+                <a:solidFill>
+                  <a:srgbClr val="1A73E8"/>
+                </a:solidFill>
+                <a:latin typeface="Microsoft YaHei"/>
+              </a:rPr>
+              <a:t>💡 启示：AI 写代码不是「一次到位」，而是「快速迭代到位」 — 接受多轮，但用工具/流程压低轮次</a:t>
+            </a:r>
+          </a:p>
+        </p:txBody>
+      </p:sp>
+      <p:sp>
+        <p:nvSpPr>
+          <p:cNvPr id="9" name="TextBox 8"/>
           <p:cNvSpPr txBox="1"/>
           <p:nvPr/>
         </p:nvSpPr>
         <p:spPr>
           <a:xfrm>
-            <a:off x="457200" y="3017520"/>
-            <a:ext cx="11247120" cy="365760"/>
+            <a:off x="10789920" y="6446520"/>
+            <a:ext cx="1188720" cy="274320"/>
           </a:xfrm>
           <a:prstGeom prst="rect">
             <a:avLst/>
@@ -12161,248 +15327,15 @@
           </a:bodyPr>
           <a:lstStyle/>
           <a:p>
-            <a:pPr algn="l"/>
-            <a:r>
-              <a:rPr sz="1400" b="1">
-                <a:solidFill>
-                  <a:srgbClr val="1A73E8"/>
+            <a:pPr algn="r"/>
+            <a:r>
+              <a:rPr sz="1000" b="0">
+                <a:solidFill>
+                  <a:srgbClr val="606060"/>
                 </a:solidFill>
                 <a:latin typeface="Microsoft YaHei"/>
               </a:rPr>
-              <a:t>2️⃣ 重连失效 — 异步时序陷阱</a:t>
-            </a:r>
-          </a:p>
-        </p:txBody>
-      </p:sp>
-      <p:sp>
-        <p:nvSpPr>
-          <p:cNvPr id="7" name="Rectangle 6"/>
-          <p:cNvSpPr/>
-          <p:nvPr/>
-        </p:nvSpPr>
-        <p:spPr>
-          <a:xfrm>
-            <a:off x="457200" y="3429000"/>
-            <a:ext cx="11247120" cy="1280160"/>
-          </a:xfrm>
-          <a:prstGeom prst="rect">
-            <a:avLst/>
-          </a:prstGeom>
-          <a:solidFill>
-            <a:srgbClr val="F4F4F4"/>
-          </a:solidFill>
-          <a:ln>
-            <a:solidFill>
-              <a:srgbClr val="D0D0D0"/>
-            </a:solidFill>
-          </a:ln>
-        </p:spPr>
-        <p:style>
-          <a:lnRef idx="1">
-            <a:schemeClr val="accent1"/>
-          </a:lnRef>
-          <a:fillRef idx="3">
-            <a:schemeClr val="accent1"/>
-          </a:fillRef>
-          <a:effectRef idx="2">
-            <a:schemeClr val="accent1"/>
-          </a:effectRef>
-          <a:fontRef idx="minor">
-            <a:schemeClr val="lt1"/>
-          </a:fontRef>
-        </p:style>
-        <p:txBody>
-          <a:bodyPr rtlCol="0" anchor="ctr" wrap="square" lIns="120000" rIns="120000" tIns="80000" bIns="80000"/>
-          <a:lstStyle/>
-          <a:p>
-            <a:pPr algn="ctr"/>
-            <a:r>
-              <a:rPr sz="1200">
-                <a:solidFill>
-                  <a:srgbClr val="202020"/>
-                </a:solidFill>
-                <a:latin typeface="Consolas"/>
-              </a:rPr>
-              <a:t>❌ 修复前：newWebSocket() 后立即 send(Reconnect)，ws 仍在 CONNECTING → 静默丢弃</a:t>
-            </a:r>
-          </a:p>
-          <a:p>
-            <a:r>
-              <a:rPr sz="1200">
-                <a:solidFill>
-                  <a:srgbClr val="202020"/>
-                </a:solidFill>
-                <a:latin typeface="Consolas"/>
-              </a:rPr>
-              <a:t>✅ 修复后：在 onOpen 回调内 send，确保 ws 已 OPEN</a:t>
-            </a:r>
-          </a:p>
-          <a:p>
-            <a:r>
-              <a:rPr sz="1200">
-                <a:solidFill>
-                  <a:srgbClr val="202020"/>
-                </a:solidFill>
-                <a:latin typeface="Consolas"/>
-              </a:rPr>
-              <a:t>教训：「创建连接」≠「连接已建立」，异步 API 必须在回调中操作</a:t>
-            </a:r>
-          </a:p>
-        </p:txBody>
-      </p:sp>
-      <p:sp>
-        <p:nvSpPr>
-          <p:cNvPr id="8" name="TextBox 7"/>
-          <p:cNvSpPr txBox="1"/>
-          <p:nvPr/>
-        </p:nvSpPr>
-        <p:spPr>
-          <a:xfrm>
-            <a:off x="457200" y="4800600"/>
-            <a:ext cx="11247120" cy="365760"/>
-          </a:xfrm>
-          <a:prstGeom prst="rect">
-            <a:avLst/>
-          </a:prstGeom>
-          <a:noFill/>
-        </p:spPr>
-        <p:txBody>
-          <a:bodyPr wrap="square" lIns="0" rIns="0" tIns="0" bIns="0">
-            <a:spAutoFit/>
-          </a:bodyPr>
-          <a:lstStyle/>
-          <a:p>
-            <a:pPr algn="l"/>
-            <a:r>
-              <a:rPr sz="1400" b="1">
-                <a:solidFill>
-                  <a:srgbClr val="1A73E8"/>
-                </a:solidFill>
-                <a:latin typeface="Microsoft YaHei"/>
-              </a:rPr>
-              <a:t>3️⃣ 两端结算不一致 — 统一公式</a:t>
-            </a:r>
-          </a:p>
-        </p:txBody>
-      </p:sp>
-      <p:sp>
-        <p:nvSpPr>
-          <p:cNvPr id="9" name="Rectangle 8"/>
-          <p:cNvSpPr/>
-          <p:nvPr/>
-        </p:nvSpPr>
-        <p:spPr>
-          <a:xfrm>
-            <a:off x="457200" y="5212080"/>
-            <a:ext cx="11247120" cy="1371600"/>
-          </a:xfrm>
-          <a:prstGeom prst="rect">
-            <a:avLst/>
-          </a:prstGeom>
-          <a:solidFill>
-            <a:srgbClr val="F4F4F4"/>
-          </a:solidFill>
-          <a:ln>
-            <a:solidFill>
-              <a:srgbClr val="D0D0D0"/>
-            </a:solidFill>
-          </a:ln>
-        </p:spPr>
-        <p:style>
-          <a:lnRef idx="1">
-            <a:schemeClr val="accent1"/>
-          </a:lnRef>
-          <a:fillRef idx="3">
-            <a:schemeClr val="accent1"/>
-          </a:fillRef>
-          <a:effectRef idx="2">
-            <a:schemeClr val="accent1"/>
-          </a:effectRef>
-          <a:fontRef idx="minor">
-            <a:schemeClr val="lt1"/>
-          </a:fontRef>
-        </p:style>
-        <p:txBody>
-          <a:bodyPr rtlCol="0" anchor="ctr" wrap="square" lIns="120000" rIns="120000" tIns="80000" bIns="80000"/>
-          <a:lstStyle/>
-          <a:p>
-            <a:pPr algn="ctr"/>
-            <a:r>
-              <a:rPr sz="1200">
-                <a:solidFill>
-                  <a:srgbClr val="202020"/>
-                </a:solidFill>
-                <a:latin typeface="Consolas"/>
-              </a:rPr>
-              <a:t>根因：collectedScore 硬编码为 0；服务端漏算「输方未走完已收分」</a:t>
-            </a:r>
-          </a:p>
-          <a:p>
-            <a:r>
-              <a:rPr sz="1200">
-                <a:solidFill>
-                  <a:srgbClr val="202020"/>
-                </a:solidFill>
-                <a:latin typeface="Consolas"/>
-              </a:rPr>
-              <a:t>统一公式：赢方 = 赢方所有已收 + 输方未走完(已收 + 手牌分)；输方 = 输方已走完已收</a:t>
-            </a:r>
-          </a:p>
-          <a:p>
-            <a:r>
-              <a:rPr sz="1200">
-                <a:solidFill>
-                  <a:srgbClr val="202020"/>
-                </a:solidFill>
-                <a:latin typeface="Consolas"/>
-              </a:rPr>
-              <a:t>新增 state.playerScores: MutableMap&lt;Int,Int&gt; 实时追踪每人已收分</a:t>
-            </a:r>
-          </a:p>
-          <a:p>
-            <a:r>
-              <a:rPr sz="1200">
-                <a:solidFill>
-                  <a:srgbClr val="202020"/>
-                </a:solidFill>
-                <a:latin typeface="Consolas"/>
-              </a:rPr>
-              <a:t>✓ 15 个验证用例全部通过（含提前结算、速度流、极端场景）</a:t>
-            </a:r>
-          </a:p>
-        </p:txBody>
-      </p:sp>
-      <p:sp>
-        <p:nvSpPr>
-          <p:cNvPr id="10" name="TextBox 9"/>
-          <p:cNvSpPr txBox="1"/>
-          <p:nvPr/>
-        </p:nvSpPr>
-        <p:spPr>
-          <a:xfrm>
-            <a:off x="10789920" y="6446520"/>
-            <a:ext cx="1188720" cy="274320"/>
-          </a:xfrm>
-          <a:prstGeom prst="rect">
-            <a:avLst/>
-          </a:prstGeom>
-          <a:noFill/>
-        </p:spPr>
-        <p:txBody>
-          <a:bodyPr wrap="square" lIns="0" rIns="0" tIns="0" bIns="0">
-            <a:spAutoFit/>
-          </a:bodyPr>
-          <a:lstStyle/>
-          <a:p>
-            <a:pPr algn="r"/>
-            <a:r>
-              <a:rPr sz="1000" b="0">
-                <a:solidFill>
-                  <a:srgbClr val="606060"/>
-                </a:solidFill>
-                <a:latin typeface="Microsoft YaHei"/>
-              </a:rPr>
-              <a:t>9 / 10</a:t>
+              <a:t>9 / 13</a:t>
             </a:r>
           </a:p>
         </p:txBody>

--- a/docs/dev_summary.pptx
+++ b/docs/dev_summary.pptx
@@ -18,6 +18,9 @@
     <p:sldId id="266" r:id="rId17"/>
     <p:sldId id="267" r:id="rId18"/>
     <p:sldId id="268" r:id="rId19"/>
+    <p:sldId id="269" r:id="rId20"/>
+    <p:sldId id="270" r:id="rId21"/>
+    <p:sldId id="271" r:id="rId22"/>
   </p:sldIdLst>
   <p:sldSz cx="12191695" cy="6858000" type="screen4x3"/>
   <p:notesSz cx="6858000" cy="9144000"/>
@@ -4383,7 +4386,7 @@
                 </a:solidFill>
                 <a:latin typeface="Microsoft YaHei"/>
               </a:rPr>
-              <a:t>10 / 13</a:t>
+              <a:t>10 / 16</a:t>
             </a:r>
           </a:p>
         </p:txBody>
@@ -5223,7 +5226,7 @@
                 </a:solidFill>
                 <a:latin typeface="Microsoft YaHei"/>
               </a:rPr>
-              <a:t>11 / 13</a:t>
+              <a:t>11 / 16</a:t>
             </a:r>
           </a:p>
         </p:txBody>
@@ -5709,7 +5712,7 @@
                 </a:solidFill>
                 <a:latin typeface="Microsoft YaHei"/>
               </a:rPr>
-              <a:t>12 / 13</a:t>
+              <a:t>12 / 16</a:t>
             </a:r>
           </a:p>
         </p:txBody>
@@ -6584,7 +6587,1946 @@
                 </a:solidFill>
                 <a:latin typeface="Microsoft YaHei"/>
               </a:rPr>
-              <a:t>13 / 13</a:t>
+              <a:t>13 / 16</a:t>
+            </a:r>
+          </a:p>
+        </p:txBody>
+      </p:sp>
+    </p:spTree>
+  </p:cSld>
+  <p:clrMapOvr>
+    <a:masterClrMapping/>
+  </p:clrMapOvr>
+</p:sld>
+</file>
+
+<file path=ppt/slides/slide14.xml><?xml version="1.0" encoding="utf-8"?>
+<p:sld xmlns:a="http://schemas.openxmlformats.org/drawingml/2006/main" xmlns:p="http://schemas.openxmlformats.org/presentationml/2006/main" xmlns:r="http://schemas.openxmlformats.org/officeDocument/2006/relationships">
+  <p:cSld>
+    <p:spTree>
+      <p:nvGrpSpPr>
+        <p:cNvPr id="1" name=""/>
+        <p:cNvGrpSpPr/>
+        <p:nvPr/>
+      </p:nvGrpSpPr>
+      <p:grpSpPr/>
+      <p:sp>
+        <p:nvSpPr>
+          <p:cNvPr id="2" name="TextBox 1"/>
+          <p:cNvSpPr txBox="1"/>
+          <p:nvPr/>
+        </p:nvSpPr>
+        <p:spPr>
+          <a:xfrm>
+            <a:off x="457200" y="274320"/>
+            <a:ext cx="11247120" cy="457200"/>
+          </a:xfrm>
+          <a:prstGeom prst="rect">
+            <a:avLst/>
+          </a:prstGeom>
+          <a:noFill/>
+        </p:spPr>
+        <p:txBody>
+          <a:bodyPr wrap="square" lIns="0" rIns="0" tIns="0" bIns="0">
+            <a:spAutoFit/>
+          </a:bodyPr>
+          <a:lstStyle/>
+          <a:p>
+            <a:pPr algn="l"/>
+            <a:r>
+              <a:rPr sz="2400" b="1">
+                <a:solidFill>
+                  <a:srgbClr val="1A73E8"/>
+                </a:solidFill>
+                <a:latin typeface="Microsoft YaHei"/>
+              </a:rPr>
+              <a:t>八、harness 跨会话经验（1/3）</a:t>
+            </a:r>
+          </a:p>
+        </p:txBody>
+      </p:sp>
+      <p:sp>
+        <p:nvSpPr>
+          <p:cNvPr id="3" name="Rectangle 2"/>
+          <p:cNvSpPr/>
+          <p:nvPr/>
+        </p:nvSpPr>
+        <p:spPr>
+          <a:xfrm>
+            <a:off x="457200" y="777240"/>
+            <a:ext cx="11247120" cy="36576"/>
+          </a:xfrm>
+          <a:prstGeom prst="rect">
+            <a:avLst/>
+          </a:prstGeom>
+          <a:solidFill>
+            <a:srgbClr val="1A73E8"/>
+          </a:solidFill>
+          <a:ln>
+            <a:noFill/>
+          </a:ln>
+        </p:spPr>
+        <p:style>
+          <a:lnRef idx="1">
+            <a:schemeClr val="accent1"/>
+          </a:lnRef>
+          <a:fillRef idx="3">
+            <a:schemeClr val="accent1"/>
+          </a:fillRef>
+          <a:effectRef idx="2">
+            <a:schemeClr val="accent1"/>
+          </a:effectRef>
+          <a:fontRef idx="minor">
+            <a:schemeClr val="lt1"/>
+          </a:fontRef>
+        </p:style>
+        <p:txBody>
+          <a:bodyPr rtlCol="0" anchor="ctr"/>
+          <a:lstStyle/>
+          <a:p>
+            <a:pPr algn="ctr"/>
+          </a:p>
+        </p:txBody>
+      </p:sp>
+      <p:sp>
+        <p:nvSpPr>
+          <p:cNvPr id="4" name="TextBox 3"/>
+          <p:cNvSpPr txBox="1"/>
+          <p:nvPr/>
+        </p:nvSpPr>
+        <p:spPr>
+          <a:xfrm>
+            <a:off x="457200" y="960120"/>
+            <a:ext cx="5669280" cy="365760"/>
+          </a:xfrm>
+          <a:prstGeom prst="rect">
+            <a:avLst/>
+          </a:prstGeom>
+          <a:noFill/>
+        </p:spPr>
+        <p:txBody>
+          <a:bodyPr wrap="square" lIns="0" rIns="0" tIns="0" bIns="0">
+            <a:spAutoFit/>
+          </a:bodyPr>
+          <a:lstStyle/>
+          <a:p>
+            <a:pPr algn="l"/>
+            <a:r>
+              <a:rPr sz="1600" b="1">
+                <a:solidFill>
+                  <a:srgbClr val="1A73E8"/>
+                </a:solidFill>
+                <a:latin typeface="Microsoft YaHei"/>
+              </a:rPr>
+              <a:t>📦 大特性的 Phase 分段提交</a:t>
+            </a:r>
+          </a:p>
+        </p:txBody>
+      </p:sp>
+      <p:graphicFrame>
+        <p:nvGraphicFramePr>
+          <p:cNvPr id="5" name="Table 4"/>
+          <p:cNvGraphicFramePr>
+            <a:graphicFrameLocks noGrp="1"/>
+          </p:cNvGraphicFramePr>
+          <p:nvPr/>
+        </p:nvGraphicFramePr>
+        <p:xfrm>
+          <a:off x="457200" y="1371600"/>
+          <a:ext cx="5669280" cy="2011680"/>
+        </p:xfrm>
+        <a:graphic>
+          <a:graphicData uri="http://schemas.openxmlformats.org/drawingml/2006/table">
+            <a:tbl>
+              <a:tblPr firstRow="1" bandRow="1">
+                <a:tableStyleId>{5C22544A-7EE6-4342-B048-85BDC9FD1C3A}</a:tableStyleId>
+              </a:tblPr>
+              <a:tblGrid>
+                <a:gridCol w="914400"/>
+                <a:gridCol w="2377440"/>
+                <a:gridCol w="2377440"/>
+              </a:tblGrid>
+              <a:tr h="502920">
+                <a:tc>
+                  <a:txBody>
+                    <a:bodyPr lIns="40000" rIns="40000" tIns="15000" bIns="15000"/>
+                    <a:lstStyle/>
+                    <a:p>
+                      <a:pPr algn="ctr"/>
+                      <a:r>
+                        <a:rPr sz="1200" b="1">
+                          <a:solidFill>
+                            <a:srgbClr val="FFFFFF"/>
+                          </a:solidFill>
+                          <a:latin typeface="Microsoft YaHei"/>
+                        </a:rPr>
+                        <a:t>Phase</a:t>
+                      </a:r>
+                    </a:p>
+                  </a:txBody>
+                  <a:tcPr>
+                    <a:solidFill>
+                      <a:srgbClr val="1A73E8"/>
+                    </a:solidFill>
+                  </a:tcPr>
+                </a:tc>
+                <a:tc>
+                  <a:txBody>
+                    <a:bodyPr lIns="40000" rIns="40000" tIns="15000" bIns="15000"/>
+                    <a:lstStyle/>
+                    <a:p>
+                      <a:pPr algn="ctr"/>
+                      <a:r>
+                        <a:rPr sz="1200" b="1">
+                          <a:solidFill>
+                            <a:srgbClr val="FFFFFF"/>
+                          </a:solidFill>
+                          <a:latin typeface="Microsoft YaHei"/>
+                        </a:rPr>
+                        <a:t>内容</a:t>
+                      </a:r>
+                    </a:p>
+                  </a:txBody>
+                  <a:tcPr>
+                    <a:solidFill>
+                      <a:srgbClr val="1A73E8"/>
+                    </a:solidFill>
+                  </a:tcPr>
+                </a:tc>
+                <a:tc>
+                  <a:txBody>
+                    <a:bodyPr lIns="40000" rIns="40000" tIns="15000" bIns="15000"/>
+                    <a:lstStyle/>
+                    <a:p>
+                      <a:pPr algn="ctr"/>
+                      <a:r>
+                        <a:rPr sz="1200" b="1">
+                          <a:solidFill>
+                            <a:srgbClr val="FFFFFF"/>
+                          </a:solidFill>
+                          <a:latin typeface="Microsoft YaHei"/>
+                        </a:rPr>
+                        <a:t>价值</a:t>
+                      </a:r>
+                    </a:p>
+                  </a:txBody>
+                  <a:tcPr>
+                    <a:solidFill>
+                      <a:srgbClr val="1A73E8"/>
+                    </a:solidFill>
+                  </a:tcPr>
+                </a:tc>
+              </a:tr>
+              <a:tr h="502920">
+                <a:tc>
+                  <a:txBody>
+                    <a:bodyPr lIns="40000" rIns="40000" tIns="10000" bIns="10000" wrap="square"/>
+                    <a:lstStyle/>
+                    <a:p>
+                      <a:pPr algn="l"/>
+                      <a:r>
+                        <a:rPr sz="1200">
+                          <a:solidFill>
+                            <a:srgbClr val="202020"/>
+                          </a:solidFill>
+                          <a:latin typeface="Microsoft YaHei"/>
+                        </a:rPr>
+                        <a:t>Phase 1</a:t>
+                      </a:r>
+                    </a:p>
+                  </a:txBody>
+                  <a:tcPr>
+                    <a:solidFill>
+                      <a:srgbClr val="FFFFFF"/>
+                    </a:solidFill>
+                  </a:tcPr>
+                </a:tc>
+                <a:tc>
+                  <a:txBody>
+                    <a:bodyPr lIns="40000" rIns="40000" tIns="10000" bIns="10000" wrap="square"/>
+                    <a:lstStyle/>
+                    <a:p>
+                      <a:pPr algn="l"/>
+                      <a:r>
+                        <a:rPr sz="1200">
+                          <a:solidFill>
+                            <a:srgbClr val="202020"/>
+                          </a:solidFill>
+                          <a:latin typeface="Microsoft YaHei"/>
+                        </a:rPr>
+                        <a:t>协议 + 服务端 + 单测</a:t>
+                      </a:r>
+                    </a:p>
+                  </a:txBody>
+                  <a:tcPr>
+                    <a:solidFill>
+                      <a:srgbClr val="FFFFFF"/>
+                    </a:solidFill>
+                  </a:tcPr>
+                </a:tc>
+                <a:tc>
+                  <a:txBody>
+                    <a:bodyPr lIns="40000" rIns="40000" tIns="10000" bIns="10000" wrap="square"/>
+                    <a:lstStyle/>
+                    <a:p>
+                      <a:pPr algn="l"/>
+                      <a:r>
+                        <a:rPr sz="1200">
+                          <a:solidFill>
+                            <a:srgbClr val="202020"/>
+                          </a:solidFill>
+                          <a:latin typeface="Microsoft YaHei"/>
+                        </a:rPr>
+                        <a:t>底层稳了再动客户端</a:t>
+                      </a:r>
+                    </a:p>
+                  </a:txBody>
+                  <a:tcPr>
+                    <a:solidFill>
+                      <a:srgbClr val="FFFFFF"/>
+                    </a:solidFill>
+                  </a:tcPr>
+                </a:tc>
+              </a:tr>
+              <a:tr h="502920">
+                <a:tc>
+                  <a:txBody>
+                    <a:bodyPr lIns="40000" rIns="40000" tIns="10000" bIns="10000" wrap="square"/>
+                    <a:lstStyle/>
+                    <a:p>
+                      <a:pPr algn="l"/>
+                      <a:r>
+                        <a:rPr sz="1200">
+                          <a:solidFill>
+                            <a:srgbClr val="202020"/>
+                          </a:solidFill>
+                          <a:latin typeface="Microsoft YaHei"/>
+                        </a:rPr>
+                        <a:t>Phase 2</a:t>
+                      </a:r>
+                    </a:p>
+                  </a:txBody>
+                  <a:tcPr>
+                    <a:solidFill>
+                      <a:srgbClr val="F0F4FF"/>
+                    </a:solidFill>
+                  </a:tcPr>
+                </a:tc>
+                <a:tc>
+                  <a:txBody>
+                    <a:bodyPr lIns="40000" rIns="40000" tIns="10000" bIns="10000" wrap="square"/>
+                    <a:lstStyle/>
+                    <a:p>
+                      <a:pPr algn="l"/>
+                      <a:r>
+                        <a:rPr sz="1200">
+                          <a:solidFill>
+                            <a:srgbClr val="202020"/>
+                          </a:solidFill>
+                          <a:latin typeface="Microsoft YaHei"/>
+                        </a:rPr>
+                        <a:t>主客户端 (Android)</a:t>
+                      </a:r>
+                    </a:p>
+                  </a:txBody>
+                  <a:tcPr>
+                    <a:solidFill>
+                      <a:srgbClr val="F0F4FF"/>
+                    </a:solidFill>
+                  </a:tcPr>
+                </a:tc>
+                <a:tc>
+                  <a:txBody>
+                    <a:bodyPr lIns="40000" rIns="40000" tIns="10000" bIns="10000" wrap="square"/>
+                    <a:lstStyle/>
+                    <a:p>
+                      <a:pPr algn="l"/>
+                      <a:r>
+                        <a:rPr sz="1200">
+                          <a:solidFill>
+                            <a:srgbClr val="202020"/>
+                          </a:solidFill>
+                          <a:latin typeface="Microsoft YaHei"/>
+                        </a:rPr>
+                        <a:t>一份吃通验证 server</a:t>
+                      </a:r>
+                    </a:p>
+                  </a:txBody>
+                  <a:tcPr>
+                    <a:solidFill>
+                      <a:srgbClr val="F0F4FF"/>
+                    </a:solidFill>
+                  </a:tcPr>
+                </a:tc>
+              </a:tr>
+              <a:tr h="502920">
+                <a:tc>
+                  <a:txBody>
+                    <a:bodyPr lIns="40000" rIns="40000" tIns="10000" bIns="10000" wrap="square"/>
+                    <a:lstStyle/>
+                    <a:p>
+                      <a:pPr algn="l"/>
+                      <a:r>
+                        <a:rPr sz="1200">
+                          <a:solidFill>
+                            <a:srgbClr val="202020"/>
+                          </a:solidFill>
+                          <a:latin typeface="Microsoft YaHei"/>
+                        </a:rPr>
+                        <a:t>Phase 3</a:t>
+                      </a:r>
+                    </a:p>
+                  </a:txBody>
+                  <a:tcPr>
+                    <a:solidFill>
+                      <a:srgbClr val="FFFFFF"/>
+                    </a:solidFill>
+                  </a:tcPr>
+                </a:tc>
+                <a:tc>
+                  <a:txBody>
+                    <a:bodyPr lIns="40000" rIns="40000" tIns="10000" bIns="10000" wrap="square"/>
+                    <a:lstStyle/>
+                    <a:p>
+                      <a:pPr algn="l"/>
+                      <a:r>
+                        <a:rPr sz="1200">
+                          <a:solidFill>
+                            <a:srgbClr val="202020"/>
+                          </a:solidFill>
+                          <a:latin typeface="Microsoft YaHei"/>
+                        </a:rPr>
+                        <a:t>次客户端 (Web) + 跨端测</a:t>
+                      </a:r>
+                    </a:p>
+                  </a:txBody>
+                  <a:tcPr>
+                    <a:solidFill>
+                      <a:srgbClr val="FFFFFF"/>
+                    </a:solidFill>
+                  </a:tcPr>
+                </a:tc>
+                <a:tc>
+                  <a:txBody>
+                    <a:bodyPr lIns="40000" rIns="40000" tIns="10000" bIns="10000" wrap="square"/>
+                    <a:lstStyle/>
+                    <a:p>
+                      <a:pPr algn="l"/>
+                      <a:r>
+                        <a:rPr sz="1200">
+                          <a:solidFill>
+                            <a:srgbClr val="202020"/>
+                          </a:solidFill>
+                          <a:latin typeface="Microsoft YaHei"/>
+                        </a:rPr>
+                        <a:t>最后补齐</a:t>
+                      </a:r>
+                    </a:p>
+                  </a:txBody>
+                  <a:tcPr>
+                    <a:solidFill>
+                      <a:srgbClr val="FFFFFF"/>
+                    </a:solidFill>
+                  </a:tcPr>
+                </a:tc>
+              </a:tr>
+            </a:tbl>
+          </a:graphicData>
+        </a:graphic>
+      </p:graphicFrame>
+      <p:sp>
+        <p:nvSpPr>
+          <p:cNvPr id="6" name="TextBox 5"/>
+          <p:cNvSpPr txBox="1"/>
+          <p:nvPr/>
+        </p:nvSpPr>
+        <p:spPr>
+          <a:xfrm>
+            <a:off x="457200" y="3520440"/>
+            <a:ext cx="5669280" cy="914400"/>
+          </a:xfrm>
+          <a:prstGeom prst="rect">
+            <a:avLst/>
+          </a:prstGeom>
+          <a:noFill/>
+        </p:spPr>
+        <p:txBody>
+          <a:bodyPr wrap="square" lIns="0" rIns="0" tIns="0" bIns="0">
+            <a:spAutoFit/>
+          </a:bodyPr>
+          <a:lstStyle/>
+          <a:p>
+            <a:pPr algn="l"/>
+            <a:r>
+              <a:rPr sz="1200" b="0">
+                <a:solidFill>
+                  <a:srgbClr val="202020"/>
+                </a:solidFill>
+                <a:latin typeface="Microsoft YaHei"/>
+              </a:rPr>
+              <a:t>跨协议+服务端+双客户端&gt;200行 / &gt;5文件 → 必须拆 Phase
+每 Phase 内再按编译单元切（Android / Web 拆 commit）</a:t>
+            </a:r>
+          </a:p>
+        </p:txBody>
+      </p:sp>
+      <p:sp>
+        <p:nvSpPr>
+          <p:cNvPr id="7" name="TextBox 6"/>
+          <p:cNvSpPr txBox="1"/>
+          <p:nvPr/>
+        </p:nvSpPr>
+        <p:spPr>
+          <a:xfrm>
+            <a:off x="6400800" y="960120"/>
+            <a:ext cx="5486400" cy="365760"/>
+          </a:xfrm>
+          <a:prstGeom prst="rect">
+            <a:avLst/>
+          </a:prstGeom>
+          <a:noFill/>
+        </p:spPr>
+        <p:txBody>
+          <a:bodyPr wrap="square" lIns="0" rIns="0" tIns="0" bIns="0">
+            <a:spAutoFit/>
+          </a:bodyPr>
+          <a:lstStyle/>
+          <a:p>
+            <a:pPr algn="l"/>
+            <a:r>
+              <a:rPr sz="1600" b="1">
+                <a:solidFill>
+                  <a:srgbClr val="E53935"/>
+                </a:solidFill>
+                <a:latin typeface="Microsoft YaHei"/>
+              </a:rPr>
+              <a:t>⚠️  wasmJs 编译器的隐藏陷阱</a:t>
+            </a:r>
+          </a:p>
+        </p:txBody>
+      </p:sp>
+      <p:sp>
+        <p:nvSpPr>
+          <p:cNvPr id="8" name="Rectangle 7"/>
+          <p:cNvSpPr/>
+          <p:nvPr/>
+        </p:nvSpPr>
+        <p:spPr>
+          <a:xfrm>
+            <a:off x="6400800" y="1371600"/>
+            <a:ext cx="5486400" cy="1280160"/>
+          </a:xfrm>
+          <a:prstGeom prst="rect">
+            <a:avLst/>
+          </a:prstGeom>
+          <a:solidFill>
+            <a:srgbClr val="F4F4F4"/>
+          </a:solidFill>
+          <a:ln>
+            <a:solidFill>
+              <a:srgbClr val="D0D0D0"/>
+            </a:solidFill>
+          </a:ln>
+        </p:spPr>
+        <p:style>
+          <a:lnRef idx="1">
+            <a:schemeClr val="accent1"/>
+          </a:lnRef>
+          <a:fillRef idx="3">
+            <a:schemeClr val="accent1"/>
+          </a:fillRef>
+          <a:effectRef idx="2">
+            <a:schemeClr val="accent1"/>
+          </a:effectRef>
+          <a:fontRef idx="minor">
+            <a:schemeClr val="lt1"/>
+          </a:fontRef>
+        </p:style>
+        <p:txBody>
+          <a:bodyPr rtlCol="0" anchor="ctr" wrap="square" lIns="120000" rIns="120000" tIns="80000" bIns="80000"/>
+          <a:lstStyle/>
+          <a:p>
+            <a:pPr algn="ctr"/>
+            <a:r>
+              <a:rPr sz="1200">
+                <a:solidFill>
+                  <a:srgbClr val="202020"/>
+                </a:solidFill>
+                <a:latin typeface="Consolas"/>
+              </a:rPr>
+              <a:t>Backend Internal error:</a:t>
+            </a:r>
+          </a:p>
+          <a:p>
+            <a:r>
+              <a:rPr sz="1200">
+                <a:solidFill>
+                  <a:srgbClr val="202020"/>
+                </a:solidFill>
+                <a:latin typeface="Consolas"/>
+              </a:rPr>
+              <a:t>  Exception during psi2ir</a:t>
+            </a:r>
+          </a:p>
+          <a:p>
+            <a:r>
+              <a:rPr sz="1200">
+                <a:solidFill>
+                  <a:srgbClr val="202020"/>
+                </a:solidFill>
+                <a:latin typeface="Consolas"/>
+              </a:rPr>
+              <a:t>Caused by: NullPointerException</a:t>
+            </a:r>
+          </a:p>
+        </p:txBody>
+      </p:sp>
+      <p:sp>
+        <p:nvSpPr>
+          <p:cNvPr id="9" name="TextBox 8"/>
+          <p:cNvSpPr txBox="1"/>
+          <p:nvPr/>
+        </p:nvSpPr>
+        <p:spPr>
+          <a:xfrm>
+            <a:off x="6400800" y="2788920"/>
+            <a:ext cx="5486400" cy="2286000"/>
+          </a:xfrm>
+          <a:prstGeom prst="rect">
+            <a:avLst/>
+          </a:prstGeom>
+          <a:noFill/>
+        </p:spPr>
+        <p:txBody>
+          <a:bodyPr wrap="square" lIns="0" rIns="0" tIns="0" bIns="0">
+            <a:spAutoFit/>
+          </a:bodyPr>
+          <a:lstStyle/>
+          <a:p>
+            <a:pPr algn="l"/>
+            <a:r>
+              <a:rPr sz="1200" b="0">
+                <a:solidFill>
+                  <a:srgbClr val="202020"/>
+                </a:solidFill>
+                <a:latin typeface="Microsoft YaHei"/>
+              </a:rPr>
+              <a:t>根因：可空 lambda + Compose smart-cast；
+vm::method KFunction → (() -&gt; Unit)?
+修法：
+• 可空 lambda → local val 固化非空
+• 函数引用 → 显式 { vm.foo() } lambda
+沙箱拉不到 wasmJs 编译器；写完 Web UI 必须 push CI 才算</a:t>
+            </a:r>
+          </a:p>
+        </p:txBody>
+      </p:sp>
+      <p:sp>
+        <p:nvSpPr>
+          <p:cNvPr id="10" name="Rounded Rectangle 9"/>
+          <p:cNvSpPr/>
+          <p:nvPr/>
+        </p:nvSpPr>
+        <p:spPr>
+          <a:xfrm>
+            <a:off x="457200" y="4572000"/>
+            <a:ext cx="11247120" cy="1554480"/>
+          </a:xfrm>
+          <a:prstGeom prst="roundRect">
+            <a:avLst/>
+          </a:prstGeom>
+          <a:solidFill>
+            <a:srgbClr val="F0F4FF"/>
+          </a:solidFill>
+          <a:ln>
+            <a:solidFill>
+              <a:srgbClr val="1A73E8"/>
+            </a:solidFill>
+          </a:ln>
+        </p:spPr>
+        <p:style>
+          <a:lnRef idx="1">
+            <a:schemeClr val="accent1"/>
+          </a:lnRef>
+          <a:fillRef idx="3">
+            <a:schemeClr val="accent1"/>
+          </a:fillRef>
+          <a:effectRef idx="2">
+            <a:schemeClr val="accent1"/>
+          </a:effectRef>
+          <a:fontRef idx="minor">
+            <a:schemeClr val="lt1"/>
+          </a:fontRef>
+        </p:style>
+        <p:txBody>
+          <a:bodyPr rtlCol="0" anchor="ctr"/>
+          <a:lstStyle/>
+          <a:p>
+            <a:pPr algn="ctr"/>
+          </a:p>
+        </p:txBody>
+      </p:sp>
+      <p:sp>
+        <p:nvSpPr>
+          <p:cNvPr id="11" name="TextBox 10"/>
+          <p:cNvSpPr txBox="1"/>
+          <p:nvPr/>
+        </p:nvSpPr>
+        <p:spPr>
+          <a:xfrm>
+            <a:off x="731520" y="4709160"/>
+            <a:ext cx="10972800" cy="365760"/>
+          </a:xfrm>
+          <a:prstGeom prst="rect">
+            <a:avLst/>
+          </a:prstGeom>
+          <a:noFill/>
+        </p:spPr>
+        <p:txBody>
+          <a:bodyPr wrap="square" lIns="0" rIns="0" tIns="0" bIns="0">
+            <a:spAutoFit/>
+          </a:bodyPr>
+          <a:lstStyle/>
+          <a:p>
+            <a:pPr algn="l"/>
+            <a:r>
+              <a:rPr sz="1400" b="1">
+                <a:solidFill>
+                  <a:srgbClr val="1A73E8"/>
+                </a:solidFill>
+                <a:latin typeface="Microsoft YaHei"/>
+              </a:rPr>
+              <a:t>💡 实战教训：</a:t>
+            </a:r>
+          </a:p>
+        </p:txBody>
+      </p:sp>
+      <p:sp>
+        <p:nvSpPr>
+          <p:cNvPr id="12" name="TextBox 11"/>
+          <p:cNvSpPr txBox="1"/>
+          <p:nvPr/>
+        </p:nvSpPr>
+        <p:spPr>
+          <a:xfrm>
+            <a:off x="731520" y="5029200"/>
+            <a:ext cx="10972800" cy="1097280"/>
+          </a:xfrm>
+          <a:prstGeom prst="rect">
+            <a:avLst/>
+          </a:prstGeom>
+          <a:noFill/>
+        </p:spPr>
+        <p:txBody>
+          <a:bodyPr wrap="square" lIns="0" rIns="0" tIns="0" bIns="0">
+            <a:spAutoFit/>
+          </a:bodyPr>
+          <a:lstStyle/>
+          <a:p>
+            <a:pPr algn="l"/>
+            <a:r>
+              <a:rPr sz="1200" b="0">
+                <a:solidFill>
+                  <a:srgbClr val="202020"/>
+                </a:solidFill>
+                <a:latin typeface="Microsoft YaHei"/>
+              </a:rPr>
+              <a:t>•  jvmTest 过 ≠ wasmJs 过 —— Web UI 改完必须跑 CI 才算
+•  Phase 内还要按编译单元切，平台特定编译错误更早暴露
+•  CI 红时先看 e: 开头的硬错误行，忽略 ~50 行 w: 警告噪音</a:t>
+            </a:r>
+          </a:p>
+        </p:txBody>
+      </p:sp>
+      <p:sp>
+        <p:nvSpPr>
+          <p:cNvPr id="13" name="TextBox 12"/>
+          <p:cNvSpPr txBox="1"/>
+          <p:nvPr/>
+        </p:nvSpPr>
+        <p:spPr>
+          <a:xfrm>
+            <a:off x="10789920" y="6446520"/>
+            <a:ext cx="1188720" cy="274320"/>
+          </a:xfrm>
+          <a:prstGeom prst="rect">
+            <a:avLst/>
+          </a:prstGeom>
+          <a:noFill/>
+        </p:spPr>
+        <p:txBody>
+          <a:bodyPr wrap="square" lIns="0" rIns="0" tIns="0" bIns="0">
+            <a:spAutoFit/>
+          </a:bodyPr>
+          <a:lstStyle/>
+          <a:p>
+            <a:pPr algn="r"/>
+            <a:r>
+              <a:rPr sz="1000" b="0">
+                <a:solidFill>
+                  <a:srgbClr val="606060"/>
+                </a:solidFill>
+                <a:latin typeface="Microsoft YaHei"/>
+              </a:rPr>
+              <a:t>14 / 16</a:t>
+            </a:r>
+          </a:p>
+        </p:txBody>
+      </p:sp>
+    </p:spTree>
+  </p:cSld>
+  <p:clrMapOvr>
+    <a:masterClrMapping/>
+  </p:clrMapOvr>
+</p:sld>
+</file>
+
+<file path=ppt/slides/slide15.xml><?xml version="1.0" encoding="utf-8"?>
+<p:sld xmlns:a="http://schemas.openxmlformats.org/drawingml/2006/main" xmlns:p="http://schemas.openxmlformats.org/presentationml/2006/main" xmlns:r="http://schemas.openxmlformats.org/officeDocument/2006/relationships">
+  <p:cSld>
+    <p:spTree>
+      <p:nvGrpSpPr>
+        <p:cNvPr id="1" name=""/>
+        <p:cNvGrpSpPr/>
+        <p:nvPr/>
+      </p:nvGrpSpPr>
+      <p:grpSpPr/>
+      <p:sp>
+        <p:nvSpPr>
+          <p:cNvPr id="2" name="TextBox 1"/>
+          <p:cNvSpPr txBox="1"/>
+          <p:nvPr/>
+        </p:nvSpPr>
+        <p:spPr>
+          <a:xfrm>
+            <a:off x="457200" y="274320"/>
+            <a:ext cx="11247120" cy="457200"/>
+          </a:xfrm>
+          <a:prstGeom prst="rect">
+            <a:avLst/>
+          </a:prstGeom>
+          <a:noFill/>
+        </p:spPr>
+        <p:txBody>
+          <a:bodyPr wrap="square" lIns="0" rIns="0" tIns="0" bIns="0">
+            <a:spAutoFit/>
+          </a:bodyPr>
+          <a:lstStyle/>
+          <a:p>
+            <a:pPr algn="l"/>
+            <a:r>
+              <a:rPr sz="2400" b="1">
+                <a:solidFill>
+                  <a:srgbClr val="1A73E8"/>
+                </a:solidFill>
+                <a:latin typeface="Microsoft YaHei"/>
+              </a:rPr>
+              <a:t>八、harness 跨会话经验（2/3）</a:t>
+            </a:r>
+          </a:p>
+        </p:txBody>
+      </p:sp>
+      <p:sp>
+        <p:nvSpPr>
+          <p:cNvPr id="3" name="Rectangle 2"/>
+          <p:cNvSpPr/>
+          <p:nvPr/>
+        </p:nvSpPr>
+        <p:spPr>
+          <a:xfrm>
+            <a:off x="457200" y="777240"/>
+            <a:ext cx="11247120" cy="36576"/>
+          </a:xfrm>
+          <a:prstGeom prst="rect">
+            <a:avLst/>
+          </a:prstGeom>
+          <a:solidFill>
+            <a:srgbClr val="1A73E8"/>
+          </a:solidFill>
+          <a:ln>
+            <a:noFill/>
+          </a:ln>
+        </p:spPr>
+        <p:style>
+          <a:lnRef idx="1">
+            <a:schemeClr val="accent1"/>
+          </a:lnRef>
+          <a:fillRef idx="3">
+            <a:schemeClr val="accent1"/>
+          </a:fillRef>
+          <a:effectRef idx="2">
+            <a:schemeClr val="accent1"/>
+          </a:effectRef>
+          <a:fontRef idx="minor">
+            <a:schemeClr val="lt1"/>
+          </a:fontRef>
+        </p:style>
+        <p:txBody>
+          <a:bodyPr rtlCol="0" anchor="ctr"/>
+          <a:lstStyle/>
+          <a:p>
+            <a:pPr algn="ctr"/>
+          </a:p>
+        </p:txBody>
+      </p:sp>
+      <p:sp>
+        <p:nvSpPr>
+          <p:cNvPr id="4" name="TextBox 3"/>
+          <p:cNvSpPr txBox="1"/>
+          <p:nvPr/>
+        </p:nvSpPr>
+        <p:spPr>
+          <a:xfrm>
+            <a:off x="457200" y="960120"/>
+            <a:ext cx="11247120" cy="365760"/>
+          </a:xfrm>
+          <a:prstGeom prst="rect">
+            <a:avLst/>
+          </a:prstGeom>
+          <a:noFill/>
+        </p:spPr>
+        <p:txBody>
+          <a:bodyPr wrap="square" lIns="0" rIns="0" tIns="0" bIns="0">
+            <a:spAutoFit/>
+          </a:bodyPr>
+          <a:lstStyle/>
+          <a:p>
+            <a:pPr algn="l"/>
+            <a:r>
+              <a:rPr sz="1600" b="1">
+                <a:solidFill>
+                  <a:srgbClr val="1A73E8"/>
+                </a:solidFill>
+                <a:latin typeface="Microsoft YaHei"/>
+              </a:rPr>
+              <a:t>🔍 Codex bot 与 Claude /review-pr 盲区互补（PR #53 实证）</a:t>
+            </a:r>
+          </a:p>
+        </p:txBody>
+      </p:sp>
+      <p:graphicFrame>
+        <p:nvGraphicFramePr>
+          <p:cNvPr id="5" name="Table 4"/>
+          <p:cNvGraphicFramePr>
+            <a:graphicFrameLocks noGrp="1"/>
+          </p:cNvGraphicFramePr>
+          <p:nvPr/>
+        </p:nvGraphicFramePr>
+        <p:xfrm>
+          <a:off x="457200" y="1371600"/>
+          <a:ext cx="11247120" cy="1371600"/>
+        </p:xfrm>
+        <a:graphic>
+          <a:graphicData uri="http://schemas.openxmlformats.org/drawingml/2006/table">
+            <a:tbl>
+              <a:tblPr firstRow="1" bandRow="1">
+                <a:tableStyleId>{5C22544A-7EE6-4342-B048-85BDC9FD1C3A}</a:tableStyleId>
+              </a:tblPr>
+              <a:tblGrid>
+                <a:gridCol w="2286000"/>
+                <a:gridCol w="5760720"/>
+                <a:gridCol w="3200400"/>
+              </a:tblGrid>
+              <a:tr h="457200">
+                <a:tc>
+                  <a:txBody>
+                    <a:bodyPr lIns="40000" rIns="40000" tIns="15000" bIns="15000"/>
+                    <a:lstStyle/>
+                    <a:p>
+                      <a:pPr algn="ctr"/>
+                      <a:r>
+                        <a:rPr sz="1200" b="1">
+                          <a:solidFill>
+                            <a:srgbClr val="FFFFFF"/>
+                          </a:solidFill>
+                          <a:latin typeface="Microsoft YaHei"/>
+                        </a:rPr>
+                        <a:t>Reviewer</a:t>
+                      </a:r>
+                    </a:p>
+                  </a:txBody>
+                  <a:tcPr>
+                    <a:solidFill>
+                      <a:srgbClr val="1A73E8"/>
+                    </a:solidFill>
+                  </a:tcPr>
+                </a:tc>
+                <a:tc>
+                  <a:txBody>
+                    <a:bodyPr lIns="40000" rIns="40000" tIns="15000" bIns="15000"/>
+                    <a:lstStyle/>
+                    <a:p>
+                      <a:pPr algn="ctr"/>
+                      <a:r>
+                        <a:rPr sz="1200" b="1">
+                          <a:solidFill>
+                            <a:srgbClr val="FFFFFF"/>
+                          </a:solidFill>
+                          <a:latin typeface="Microsoft YaHei"/>
+                        </a:rPr>
+                        <a:t>找到</a:t>
+                      </a:r>
+                    </a:p>
+                  </a:txBody>
+                  <a:tcPr>
+                    <a:solidFill>
+                      <a:srgbClr val="1A73E8"/>
+                    </a:solidFill>
+                  </a:tcPr>
+                </a:tc>
+                <a:tc>
+                  <a:txBody>
+                    <a:bodyPr lIns="40000" rIns="40000" tIns="15000" bIns="15000"/>
+                    <a:lstStyle/>
+                    <a:p>
+                      <a:pPr algn="ctr"/>
+                      <a:r>
+                        <a:rPr sz="1200" b="1">
+                          <a:solidFill>
+                            <a:srgbClr val="FFFFFF"/>
+                          </a:solidFill>
+                          <a:latin typeface="Microsoft YaHei"/>
+                        </a:rPr>
+                        <a:t>漏掉</a:t>
+                      </a:r>
+                    </a:p>
+                  </a:txBody>
+                  <a:tcPr>
+                    <a:solidFill>
+                      <a:srgbClr val="1A73E8"/>
+                    </a:solidFill>
+                  </a:tcPr>
+                </a:tc>
+              </a:tr>
+              <a:tr h="457200">
+                <a:tc>
+                  <a:txBody>
+                    <a:bodyPr lIns="40000" rIns="40000" tIns="10000" bIns="10000" wrap="square"/>
+                    <a:lstStyle/>
+                    <a:p>
+                      <a:pPr algn="l"/>
+                      <a:r>
+                        <a:rPr sz="1200">
+                          <a:solidFill>
+                            <a:srgbClr val="202020"/>
+                          </a:solidFill>
+                          <a:latin typeface="Microsoft YaHei"/>
+                        </a:rPr>
+                        <a:t>Claude /review-pr</a:t>
+                      </a:r>
+                    </a:p>
+                  </a:txBody>
+                  <a:tcPr>
+                    <a:solidFill>
+                      <a:srgbClr val="FFFFFF"/>
+                    </a:solidFill>
+                  </a:tcPr>
+                </a:tc>
+                <a:tc>
+                  <a:txBody>
+                    <a:bodyPr lIns="40000" rIns="40000" tIns="10000" bIns="10000" wrap="square"/>
+                    <a:lstStyle/>
+                    <a:p>
+                      <a:pPr algn="l"/>
+                      <a:r>
+                        <a:rPr sz="1200">
+                          <a:solidFill>
+                            <a:srgbClr val="202020"/>
+                          </a:solidFill>
+                          <a:latin typeface="Microsoft YaHei"/>
+                        </a:rPr>
+                        <a:t>docs 误写「随机起手」+ 引用不存在的函数（**跨文件契约**）</a:t>
+                      </a:r>
+                    </a:p>
+                  </a:txBody>
+                  <a:tcPr>
+                    <a:solidFill>
+                      <a:srgbClr val="FFFFFF"/>
+                    </a:solidFill>
+                  </a:tcPr>
+                </a:tc>
+                <a:tc>
+                  <a:txBody>
+                    <a:bodyPr lIns="40000" rIns="40000" tIns="10000" bIns="10000" wrap="square"/>
+                    <a:lstStyle/>
+                    <a:p>
+                      <a:pPr algn="l"/>
+                      <a:r>
+                        <a:rPr sz="1200">
+                          <a:solidFill>
+                            <a:srgbClr val="202020"/>
+                          </a:solidFill>
+                          <a:latin typeface="Microsoft YaHei"/>
+                        </a:rPr>
+                        <a:t>delay() 后 race</a:t>
+                      </a:r>
+                    </a:p>
+                  </a:txBody>
+                  <a:tcPr>
+                    <a:solidFill>
+                      <a:srgbClr val="FFFFFF"/>
+                    </a:solidFill>
+                  </a:tcPr>
+                </a:tc>
+              </a:tr>
+              <a:tr h="457200">
+                <a:tc>
+                  <a:txBody>
+                    <a:bodyPr lIns="40000" rIns="40000" tIns="10000" bIns="10000" wrap="square"/>
+                    <a:lstStyle/>
+                    <a:p>
+                      <a:pPr algn="l"/>
+                      <a:r>
+                        <a:rPr sz="1200">
+                          <a:solidFill>
+                            <a:srgbClr val="202020"/>
+                          </a:solidFill>
+                          <a:latin typeface="Microsoft YaHei"/>
+                        </a:rPr>
+                        <a:t>Codex bot</a:t>
+                      </a:r>
+                    </a:p>
+                  </a:txBody>
+                  <a:tcPr>
+                    <a:solidFill>
+                      <a:srgbClr val="F0F4FF"/>
+                    </a:solidFill>
+                  </a:tcPr>
+                </a:tc>
+                <a:tc>
+                  <a:txBody>
+                    <a:bodyPr lIns="40000" rIns="40000" tIns="10000" bIns="10000" wrap="square"/>
+                    <a:lstStyle/>
+                    <a:p>
+                      <a:pPr algn="l"/>
+                      <a:r>
+                        <a:rPr sz="1200">
+                          <a:solidFill>
+                            <a:srgbClr val="202020"/>
+                          </a:solidFill>
+                          <a:latin typeface="Microsoft YaHei"/>
+                        </a:rPr>
+                        <a:t>delay() 后没重检 isAISubstitute 的 race（**语句级边界**）</a:t>
+                      </a:r>
+                    </a:p>
+                  </a:txBody>
+                  <a:tcPr>
+                    <a:solidFill>
+                      <a:srgbClr val="F0F4FF"/>
+                    </a:solidFill>
+                  </a:tcPr>
+                </a:tc>
+                <a:tc>
+                  <a:txBody>
+                    <a:bodyPr lIns="40000" rIns="40000" tIns="10000" bIns="10000" wrap="square"/>
+                    <a:lstStyle/>
+                    <a:p>
+                      <a:pPr algn="l"/>
+                      <a:r>
+                        <a:rPr sz="1200">
+                          <a:solidFill>
+                            <a:srgbClr val="202020"/>
+                          </a:solidFill>
+                          <a:latin typeface="Microsoft YaHei"/>
+                        </a:rPr>
+                        <a:t>文档与代码语义对齐</a:t>
+                      </a:r>
+                    </a:p>
+                  </a:txBody>
+                  <a:tcPr>
+                    <a:solidFill>
+                      <a:srgbClr val="F0F4FF"/>
+                    </a:solidFill>
+                  </a:tcPr>
+                </a:tc>
+              </a:tr>
+            </a:tbl>
+          </a:graphicData>
+        </a:graphic>
+      </p:graphicFrame>
+      <p:sp>
+        <p:nvSpPr>
+          <p:cNvPr id="6" name="Rounded Rectangle 5"/>
+          <p:cNvSpPr/>
+          <p:nvPr/>
+        </p:nvSpPr>
+        <p:spPr>
+          <a:xfrm>
+            <a:off x="457200" y="2880360"/>
+            <a:ext cx="11247120" cy="777240"/>
+          </a:xfrm>
+          <a:prstGeom prst="roundRect">
+            <a:avLst/>
+          </a:prstGeom>
+          <a:solidFill>
+            <a:srgbClr val="F0F4FF"/>
+          </a:solidFill>
+          <a:ln>
+            <a:solidFill>
+              <a:srgbClr val="1A73E8"/>
+            </a:solidFill>
+          </a:ln>
+        </p:spPr>
+        <p:style>
+          <a:lnRef idx="1">
+            <a:schemeClr val="accent1"/>
+          </a:lnRef>
+          <a:fillRef idx="3">
+            <a:schemeClr val="accent1"/>
+          </a:fillRef>
+          <a:effectRef idx="2">
+            <a:schemeClr val="accent1"/>
+          </a:effectRef>
+          <a:fontRef idx="minor">
+            <a:schemeClr val="lt1"/>
+          </a:fontRef>
+        </p:style>
+        <p:txBody>
+          <a:bodyPr rtlCol="0" anchor="ctr"/>
+          <a:lstStyle/>
+          <a:p>
+            <a:pPr algn="ctr"/>
+          </a:p>
+        </p:txBody>
+      </p:sp>
+      <p:sp>
+        <p:nvSpPr>
+          <p:cNvPr id="7" name="TextBox 6"/>
+          <p:cNvSpPr txBox="1"/>
+          <p:nvPr/>
+        </p:nvSpPr>
+        <p:spPr>
+          <a:xfrm>
+            <a:off x="731520" y="3017520"/>
+            <a:ext cx="10972800" cy="548640"/>
+          </a:xfrm>
+          <a:prstGeom prst="rect">
+            <a:avLst/>
+          </a:prstGeom>
+          <a:noFill/>
+        </p:spPr>
+        <p:txBody>
+          <a:bodyPr wrap="square" lIns="0" rIns="0" tIns="0" bIns="0">
+            <a:spAutoFit/>
+          </a:bodyPr>
+          <a:lstStyle/>
+          <a:p>
+            <a:pPr algn="l"/>
+            <a:r>
+              <a:rPr sz="1400" b="1">
+                <a:solidFill>
+                  <a:srgbClr val="202020"/>
+                </a:solidFill>
+                <a:latin typeface="Microsoft YaHei"/>
+              </a:rPr>
+              <a:t>盲区不重叠 → 单独跑一个至少漏一类问题。Codex + Claude 必须都跑。</a:t>
+            </a:r>
+          </a:p>
+        </p:txBody>
+      </p:sp>
+      <p:sp>
+        <p:nvSpPr>
+          <p:cNvPr id="8" name="TextBox 7"/>
+          <p:cNvSpPr txBox="1"/>
+          <p:nvPr/>
+        </p:nvSpPr>
+        <p:spPr>
+          <a:xfrm>
+            <a:off x="457200" y="3840480"/>
+            <a:ext cx="11247120" cy="365760"/>
+          </a:xfrm>
+          <a:prstGeom prst="rect">
+            <a:avLst/>
+          </a:prstGeom>
+          <a:noFill/>
+        </p:spPr>
+        <p:txBody>
+          <a:bodyPr wrap="square" lIns="0" rIns="0" tIns="0" bIns="0">
+            <a:spAutoFit/>
+          </a:bodyPr>
+          <a:lstStyle/>
+          <a:p>
+            <a:pPr algn="l"/>
+            <a:r>
+              <a:rPr sz="1600" b="1">
+                <a:solidFill>
+                  <a:srgbClr val="E53935"/>
+                </a:solidFill>
+                <a:latin typeface="Microsoft YaHei"/>
+              </a:rPr>
+              <a:t>⏰ delay() 后状态过期反请（regressions #11）</a:t>
+            </a:r>
+          </a:p>
+        </p:txBody>
+      </p:sp>
+      <p:sp>
+        <p:nvSpPr>
+          <p:cNvPr id="9" name="Rectangle 8"/>
+          <p:cNvSpPr/>
+          <p:nvPr/>
+        </p:nvSpPr>
+        <p:spPr>
+          <a:xfrm>
+            <a:off x="457200" y="4206240"/>
+            <a:ext cx="11247120" cy="1280160"/>
+          </a:xfrm>
+          <a:prstGeom prst="rect">
+            <a:avLst/>
+          </a:prstGeom>
+          <a:solidFill>
+            <a:srgbClr val="F4F4F4"/>
+          </a:solidFill>
+          <a:ln>
+            <a:solidFill>
+              <a:srgbClr val="D0D0D0"/>
+            </a:solidFill>
+          </a:ln>
+        </p:spPr>
+        <p:style>
+          <a:lnRef idx="1">
+            <a:schemeClr val="accent1"/>
+          </a:lnRef>
+          <a:fillRef idx="3">
+            <a:schemeClr val="accent1"/>
+          </a:fillRef>
+          <a:effectRef idx="2">
+            <a:schemeClr val="accent1"/>
+          </a:effectRef>
+          <a:fontRef idx="minor">
+            <a:schemeClr val="lt1"/>
+          </a:fontRef>
+        </p:style>
+        <p:txBody>
+          <a:bodyPr rtlCol="0" anchor="ctr" wrap="square" lIns="120000" rIns="120000" tIns="80000" bIns="80000"/>
+          <a:lstStyle/>
+          <a:p>
+            <a:pPr algn="ctr"/>
+            <a:r>
+              <a:rPr sz="1200">
+                <a:solidFill>
+                  <a:srgbClr val="202020"/>
+                </a:solidFill>
+                <a:latin typeface="Consolas"/>
+              </a:rPr>
+              <a:t>delay(effectiveAiDelayMs(...))     // 玩家此时取消了托管</a:t>
+            </a:r>
+          </a:p>
+          <a:p>
+            <a:r>
+              <a:rPr sz="1200">
+                <a:solidFill>
+                  <a:srgbClr val="202020"/>
+                </a:solidFill>
+                <a:latin typeface="Consolas"/>
+              </a:rPr>
+              <a:t>mutexFor(room).withLock {</a:t>
+            </a:r>
+          </a:p>
+          <a:p>
+            <a:r>
+              <a:rPr sz="1200">
+                <a:solidFill>
+                  <a:srgbClr val="202020"/>
+                </a:solidFill>
+                <a:latin typeface="Consolas"/>
+              </a:rPr>
+              <a:t>    if (state.currentPlayerIndex != playerIndex) return  // 只检查了这一项</a:t>
+            </a:r>
+          </a:p>
+          <a:p>
+            <a:r>
+              <a:rPr sz="1200">
+                <a:solidFill>
+                  <a:srgbClr val="202020"/>
+                </a:solidFill>
+                <a:latin typeface="Consolas"/>
+              </a:rPr>
+              <a:t>    decideAIAction(...)             // isAISubstitute 已变 → 不该再代打</a:t>
+            </a:r>
+          </a:p>
+          <a:p>
+            <a:r>
+              <a:rPr sz="1200">
+                <a:solidFill>
+                  <a:srgbClr val="202020"/>
+                </a:solidFill>
+                <a:latin typeface="Consolas"/>
+              </a:rPr>
+              <a:t>}</a:t>
+            </a:r>
+          </a:p>
+        </p:txBody>
+      </p:sp>
+      <p:sp>
+        <p:nvSpPr>
+          <p:cNvPr id="10" name="TextBox 9"/>
+          <p:cNvSpPr txBox="1"/>
+          <p:nvPr/>
+        </p:nvSpPr>
+        <p:spPr>
+          <a:xfrm>
+            <a:off x="457200" y="5577840"/>
+            <a:ext cx="11247120" cy="640080"/>
+          </a:xfrm>
+          <a:prstGeom prst="rect">
+            <a:avLst/>
+          </a:prstGeom>
+          <a:noFill/>
+        </p:spPr>
+        <p:txBody>
+          <a:bodyPr wrap="square" lIns="0" rIns="0" tIns="0" bIns="0">
+            <a:spAutoFit/>
+          </a:bodyPr>
+          <a:lstStyle/>
+          <a:p>
+            <a:pPr algn="l"/>
+            <a:r>
+              <a:rPr sz="1200" b="0">
+                <a:solidFill>
+                  <a:srgbClr val="202020"/>
+                </a:solidFill>
+                <a:latin typeface="Microsoft YaHei"/>
+              </a:rPr>
+              <a:t>审查清单：醒来后必须重检「延迟前所有依赖项」，不只检查最显眼的那个
+修法：抽 internal fun shouldYieldToHumanPlayer(...) 谓词 + 同 commit 加测</a:t>
+            </a:r>
+          </a:p>
+        </p:txBody>
+      </p:sp>
+      <p:sp>
+        <p:nvSpPr>
+          <p:cNvPr id="11" name="TextBox 10"/>
+          <p:cNvSpPr txBox="1"/>
+          <p:nvPr/>
+        </p:nvSpPr>
+        <p:spPr>
+          <a:xfrm>
+            <a:off x="10789920" y="6446520"/>
+            <a:ext cx="1188720" cy="274320"/>
+          </a:xfrm>
+          <a:prstGeom prst="rect">
+            <a:avLst/>
+          </a:prstGeom>
+          <a:noFill/>
+        </p:spPr>
+        <p:txBody>
+          <a:bodyPr wrap="square" lIns="0" rIns="0" tIns="0" bIns="0">
+            <a:spAutoFit/>
+          </a:bodyPr>
+          <a:lstStyle/>
+          <a:p>
+            <a:pPr algn="r"/>
+            <a:r>
+              <a:rPr sz="1000" b="0">
+                <a:solidFill>
+                  <a:srgbClr val="606060"/>
+                </a:solidFill>
+                <a:latin typeface="Microsoft YaHei"/>
+              </a:rPr>
+              <a:t>15 / 16</a:t>
+            </a:r>
+          </a:p>
+        </p:txBody>
+      </p:sp>
+    </p:spTree>
+  </p:cSld>
+  <p:clrMapOvr>
+    <a:masterClrMapping/>
+  </p:clrMapOvr>
+</p:sld>
+</file>
+
+<file path=ppt/slides/slide16.xml><?xml version="1.0" encoding="utf-8"?>
+<p:sld xmlns:a="http://schemas.openxmlformats.org/drawingml/2006/main" xmlns:p="http://schemas.openxmlformats.org/presentationml/2006/main" xmlns:r="http://schemas.openxmlformats.org/officeDocument/2006/relationships">
+  <p:cSld>
+    <p:spTree>
+      <p:nvGrpSpPr>
+        <p:cNvPr id="1" name=""/>
+        <p:cNvGrpSpPr/>
+        <p:nvPr/>
+      </p:nvGrpSpPr>
+      <p:grpSpPr/>
+      <p:sp>
+        <p:nvSpPr>
+          <p:cNvPr id="2" name="TextBox 1"/>
+          <p:cNvSpPr txBox="1"/>
+          <p:nvPr/>
+        </p:nvSpPr>
+        <p:spPr>
+          <a:xfrm>
+            <a:off x="457200" y="274320"/>
+            <a:ext cx="11247120" cy="457200"/>
+          </a:xfrm>
+          <a:prstGeom prst="rect">
+            <a:avLst/>
+          </a:prstGeom>
+          <a:noFill/>
+        </p:spPr>
+        <p:txBody>
+          <a:bodyPr wrap="square" lIns="0" rIns="0" tIns="0" bIns="0">
+            <a:spAutoFit/>
+          </a:bodyPr>
+          <a:lstStyle/>
+          <a:p>
+            <a:pPr algn="l"/>
+            <a:r>
+              <a:rPr sz="2400" b="1">
+                <a:solidFill>
+                  <a:srgbClr val="1A73E8"/>
+                </a:solidFill>
+                <a:latin typeface="Microsoft YaHei"/>
+              </a:rPr>
+              <a:t>八、harness 跨会话经验（3/3）</a:t>
+            </a:r>
+          </a:p>
+        </p:txBody>
+      </p:sp>
+      <p:sp>
+        <p:nvSpPr>
+          <p:cNvPr id="3" name="Rectangle 2"/>
+          <p:cNvSpPr/>
+          <p:nvPr/>
+        </p:nvSpPr>
+        <p:spPr>
+          <a:xfrm>
+            <a:off x="457200" y="777240"/>
+            <a:ext cx="11247120" cy="36576"/>
+          </a:xfrm>
+          <a:prstGeom prst="rect">
+            <a:avLst/>
+          </a:prstGeom>
+          <a:solidFill>
+            <a:srgbClr val="1A73E8"/>
+          </a:solidFill>
+          <a:ln>
+            <a:noFill/>
+          </a:ln>
+        </p:spPr>
+        <p:style>
+          <a:lnRef idx="1">
+            <a:schemeClr val="accent1"/>
+          </a:lnRef>
+          <a:fillRef idx="3">
+            <a:schemeClr val="accent1"/>
+          </a:fillRef>
+          <a:effectRef idx="2">
+            <a:schemeClr val="accent1"/>
+          </a:effectRef>
+          <a:fontRef idx="minor">
+            <a:schemeClr val="lt1"/>
+          </a:fontRef>
+        </p:style>
+        <p:txBody>
+          <a:bodyPr rtlCol="0" anchor="ctr"/>
+          <a:lstStyle/>
+          <a:p>
+            <a:pPr algn="ctr"/>
+          </a:p>
+        </p:txBody>
+      </p:sp>
+      <p:sp>
+        <p:nvSpPr>
+          <p:cNvPr id="4" name="TextBox 3"/>
+          <p:cNvSpPr txBox="1"/>
+          <p:nvPr/>
+        </p:nvSpPr>
+        <p:spPr>
+          <a:xfrm>
+            <a:off x="457200" y="960120"/>
+            <a:ext cx="5669280" cy="365760"/>
+          </a:xfrm>
+          <a:prstGeom prst="rect">
+            <a:avLst/>
+          </a:prstGeom>
+          <a:noFill/>
+        </p:spPr>
+        <p:txBody>
+          <a:bodyPr wrap="square" lIns="0" rIns="0" tIns="0" bIns="0">
+            <a:spAutoFit/>
+          </a:bodyPr>
+          <a:lstStyle/>
+          <a:p>
+            <a:pPr algn="l"/>
+            <a:r>
+              <a:rPr sz="1600" b="1">
+                <a:solidFill>
+                  <a:srgbClr val="2E7D32"/>
+                </a:solidFill>
+                <a:latin typeface="Microsoft YaHei"/>
+              </a:rPr>
+              <a:t>✅ 同 commit *Test.kt 配对</a:t>
+            </a:r>
+          </a:p>
+        </p:txBody>
+      </p:sp>
+      <p:sp>
+        <p:nvSpPr>
+          <p:cNvPr id="5" name="TextBox 4"/>
+          <p:cNvSpPr txBox="1"/>
+          <p:nvPr/>
+        </p:nvSpPr>
+        <p:spPr>
+          <a:xfrm>
+            <a:off x="457200" y="1371600"/>
+            <a:ext cx="5669280" cy="914400"/>
+          </a:xfrm>
+          <a:prstGeom prst="rect">
+            <a:avLst/>
+          </a:prstGeom>
+          <a:noFill/>
+        </p:spPr>
+        <p:txBody>
+          <a:bodyPr wrap="square" lIns="0" rIns="0" tIns="0" bIns="0">
+            <a:spAutoFit/>
+          </a:bodyPr>
+          <a:lstStyle/>
+          <a:p>
+            <a:pPr algn="l"/>
+            <a:r>
+              <a:rPr sz="1200" b="0">
+                <a:solidFill>
+                  <a:srgbClr val="202020"/>
+                </a:solidFill>
+                <a:latin typeface="Microsoft YaHei"/>
+              </a:rPr>
+              <a:t>PR #53 6 commit，每改关键路径都同 commit 附测。
+tdd-gate 一次没误报、一次没漏。
+hook 弹「TDD 提醒」时不必立刻另开 commit 写测——
+保证最终单 commit 同时含两份即可。</a:t>
+            </a:r>
+          </a:p>
+        </p:txBody>
+      </p:sp>
+      <p:sp>
+        <p:nvSpPr>
+          <p:cNvPr id="6" name="TextBox 5"/>
+          <p:cNvSpPr txBox="1"/>
+          <p:nvPr/>
+        </p:nvSpPr>
+        <p:spPr>
+          <a:xfrm>
+            <a:off x="457200" y="3246120"/>
+            <a:ext cx="5669280" cy="365760"/>
+          </a:xfrm>
+          <a:prstGeom prst="rect">
+            <a:avLst/>
+          </a:prstGeom>
+          <a:noFill/>
+        </p:spPr>
+        <p:txBody>
+          <a:bodyPr wrap="square" lIns="0" rIns="0" tIns="0" bIns="0">
+            <a:spAutoFit/>
+          </a:bodyPr>
+          <a:lstStyle/>
+          <a:p>
+            <a:pPr algn="l"/>
+            <a:r>
+              <a:rPr sz="1600" b="1">
+                <a:solidFill>
+                  <a:srgbClr val="F57C00"/>
+                </a:solidFill>
+                <a:latin typeface="Microsoft YaHei"/>
+              </a:rPr>
+              <a:t>🔀 PR 流转：分支 vs PR 错位</a:t>
+            </a:r>
+          </a:p>
+        </p:txBody>
+      </p:sp>
+      <p:sp>
+        <p:nvSpPr>
+          <p:cNvPr id="7" name="TextBox 6"/>
+          <p:cNvSpPr txBox="1"/>
+          <p:nvPr/>
+        </p:nvSpPr>
+        <p:spPr>
+          <a:xfrm>
+            <a:off x="457200" y="3657600"/>
+            <a:ext cx="5669280" cy="1463040"/>
+          </a:xfrm>
+          <a:prstGeom prst="rect">
+            <a:avLst/>
+          </a:prstGeom>
+          <a:noFill/>
+        </p:spPr>
+        <p:txBody>
+          <a:bodyPr wrap="square" lIns="0" rIns="0" tIns="0" bIns="0">
+            <a:spAutoFit/>
+          </a:bodyPr>
+          <a:lstStyle/>
+          <a:p>
+            <a:pPr algn="l"/>
+            <a:r>
+              <a:rPr sz="1200" b="0">
+                <a:solidFill>
+                  <a:srgbClr val="202020"/>
+                </a:solidFill>
+                <a:latin typeface="Microsoft YaHei"/>
+              </a:rPr>
+              <a:t>PR #52 合并后本会话同分支又 push 了 5 commit——但 PR #52 已 closed，
+push 不会自动出 PR。直到用户问 "PR 呢？" 才意识到需要新分支 + PR #53。
+原则：一个分支 = 一个 PR。PR merge 后下一组改动开新分支。</a:t>
+            </a:r>
+          </a:p>
+        </p:txBody>
+      </p:sp>
+      <p:sp>
+        <p:nvSpPr>
+          <p:cNvPr id="8" name="TextBox 7"/>
+          <p:cNvSpPr txBox="1"/>
+          <p:nvPr/>
+        </p:nvSpPr>
+        <p:spPr>
+          <a:xfrm>
+            <a:off x="6400800" y="960120"/>
+            <a:ext cx="5486400" cy="365760"/>
+          </a:xfrm>
+          <a:prstGeom prst="rect">
+            <a:avLst/>
+          </a:prstGeom>
+          <a:noFill/>
+        </p:spPr>
+        <p:txBody>
+          <a:bodyPr wrap="square" lIns="0" rIns="0" tIns="0" bIns="0">
+            <a:spAutoFit/>
+          </a:bodyPr>
+          <a:lstStyle/>
+          <a:p>
+            <a:pPr algn="l"/>
+            <a:r>
+              <a:rPr sz="1600" b="1">
+                <a:solidFill>
+                  <a:srgbClr val="1A73E8"/>
+                </a:solidFill>
+                <a:latin typeface="Microsoft YaHei"/>
+              </a:rPr>
+              <a:t>📚 文档单一真相 + 自动同步</a:t>
+            </a:r>
+          </a:p>
+        </p:txBody>
+      </p:sp>
+      <p:sp>
+        <p:nvSpPr>
+          <p:cNvPr id="9" name="TextBox 8"/>
+          <p:cNvSpPr txBox="1"/>
+          <p:nvPr/>
+        </p:nvSpPr>
+        <p:spPr>
+          <a:xfrm>
+            <a:off x="6400800" y="1371600"/>
+            <a:ext cx="5486400" cy="1463040"/>
+          </a:xfrm>
+          <a:prstGeom prst="rect">
+            <a:avLst/>
+          </a:prstGeom>
+          <a:noFill/>
+        </p:spPr>
+        <p:txBody>
+          <a:bodyPr wrap="square" lIns="0" rIns="0" tIns="0" bIns="0">
+            <a:spAutoFit/>
+          </a:bodyPr>
+          <a:lstStyle/>
+          <a:p>
+            <a:pPr algn="l"/>
+            <a:r>
+              <a:rPr sz="1200" b="0">
+                <a:solidFill>
+                  <a:srgbClr val="202020"/>
+                </a:solidFill>
+                <a:latin typeface="Microsoft YaHei"/>
+              </a:rPr>
+              <a:t>pr-reviewer 抓到 game_rules.md 误写「随机起手」+
+引用 randomFirstPlayer 但代码无此符号。
+沉淀：新文档自称「权威」前必须 grep 验证所有
+anchor 函数名实际存在。</a:t>
+            </a:r>
+          </a:p>
+        </p:txBody>
+      </p:sp>
+      <p:sp>
+        <p:nvSpPr>
+          <p:cNvPr id="10" name="TextBox 9"/>
+          <p:cNvSpPr txBox="1"/>
+          <p:nvPr/>
+        </p:nvSpPr>
+        <p:spPr>
+          <a:xfrm>
+            <a:off x="6400800" y="3246120"/>
+            <a:ext cx="5486400" cy="365760"/>
+          </a:xfrm>
+          <a:prstGeom prst="rect">
+            <a:avLst/>
+          </a:prstGeom>
+          <a:noFill/>
+        </p:spPr>
+        <p:txBody>
+          <a:bodyPr wrap="square" lIns="0" rIns="0" tIns="0" bIns="0">
+            <a:spAutoFit/>
+          </a:bodyPr>
+          <a:lstStyle/>
+          <a:p>
+            <a:pPr algn="l"/>
+            <a:r>
+              <a:rPr sz="1600" b="1">
+                <a:solidFill>
+                  <a:srgbClr val="1A73E8"/>
+                </a:solidFill>
+                <a:latin typeface="Microsoft YaHei"/>
+              </a:rPr>
+              <a:t>🎚️  设计取舍：slider vs 3 档预设</a:t>
+            </a:r>
+          </a:p>
+        </p:txBody>
+      </p:sp>
+      <p:sp>
+        <p:nvSpPr>
+          <p:cNvPr id="11" name="TextBox 10"/>
+          <p:cNvSpPr txBox="1"/>
+          <p:nvPr/>
+        </p:nvSpPr>
+        <p:spPr>
+          <a:xfrm>
+            <a:off x="6400800" y="3657600"/>
+            <a:ext cx="5486400" cy="1645920"/>
+          </a:xfrm>
+          <a:prstGeom prst="rect">
+            <a:avLst/>
+          </a:prstGeom>
+          <a:noFill/>
+        </p:spPr>
+        <p:txBody>
+          <a:bodyPr wrap="square" lIns="0" rIns="0" tIns="0" bIns="0">
+            <a:spAutoFit/>
+          </a:bodyPr>
+          <a:lstStyle/>
+          <a:p>
+            <a:pPr algn="l"/>
+            <a:r>
+              <a:rPr sz="1200" b="0">
+                <a:solidFill>
+                  <a:srgbClr val="202020"/>
+                </a:solidFill>
+                <a:latin typeface="Microsoft YaHei"/>
+              </a:rPr>
+              <a:t>AI 速度最初考虑 slider（任意 50-2000ms 连续值），
+最终选 3 档预设（feature_spec G36-G38）。
+原则：当特性「看似 slider 更灵活」时，先问
+「用户真需要连续值么？」——多数情况 3 档够用，
+且压缩了边界情况测试矩阵。</a:t>
+            </a:r>
+          </a:p>
+        </p:txBody>
+      </p:sp>
+      <p:sp>
+        <p:nvSpPr>
+          <p:cNvPr id="12" name="Rounded Rectangle 11"/>
+          <p:cNvSpPr/>
+          <p:nvPr/>
+        </p:nvSpPr>
+        <p:spPr>
+          <a:xfrm>
+            <a:off x="457200" y="5440680"/>
+            <a:ext cx="11247120" cy="731520"/>
+          </a:xfrm>
+          <a:prstGeom prst="roundRect">
+            <a:avLst/>
+          </a:prstGeom>
+          <a:solidFill>
+            <a:srgbClr val="F0F4FF"/>
+          </a:solidFill>
+          <a:ln>
+            <a:solidFill>
+              <a:srgbClr val="1A73E8"/>
+            </a:solidFill>
+          </a:ln>
+        </p:spPr>
+        <p:style>
+          <a:lnRef idx="1">
+            <a:schemeClr val="accent1"/>
+          </a:lnRef>
+          <a:fillRef idx="3">
+            <a:schemeClr val="accent1"/>
+          </a:fillRef>
+          <a:effectRef idx="2">
+            <a:schemeClr val="accent1"/>
+          </a:effectRef>
+          <a:fontRef idx="minor">
+            <a:schemeClr val="lt1"/>
+          </a:fontRef>
+        </p:style>
+        <p:txBody>
+          <a:bodyPr rtlCol="0" anchor="ctr"/>
+          <a:lstStyle/>
+          <a:p>
+            <a:pPr algn="ctr"/>
+          </a:p>
+        </p:txBody>
+      </p:sp>
+      <p:sp>
+        <p:nvSpPr>
+          <p:cNvPr id="13" name="TextBox 12"/>
+          <p:cNvSpPr txBox="1"/>
+          <p:nvPr/>
+        </p:nvSpPr>
+        <p:spPr>
+          <a:xfrm>
+            <a:off x="731520" y="5577840"/>
+            <a:ext cx="10972800" cy="548640"/>
+          </a:xfrm>
+          <a:prstGeom prst="rect">
+            <a:avLst/>
+          </a:prstGeom>
+          <a:noFill/>
+        </p:spPr>
+        <p:txBody>
+          <a:bodyPr wrap="square" lIns="0" rIns="0" tIns="0" bIns="0">
+            <a:spAutoFit/>
+          </a:bodyPr>
+          <a:lstStyle/>
+          <a:p>
+            <a:pPr algn="l"/>
+            <a:r>
+              <a:rPr sz="1400" b="1">
+                <a:solidFill>
+                  <a:srgbClr val="1A73E8"/>
+                </a:solidFill>
+                <a:latin typeface="Microsoft YaHei"/>
+              </a:rPr>
+              <a:t>💎 跨会话经验的核心：harness（hook / playbook / regression DB）让教训跨 session 沉淀，而不是每次新人新 AI 都从头踩一遍坑。</a:t>
+            </a:r>
+          </a:p>
+        </p:txBody>
+      </p:sp>
+      <p:sp>
+        <p:nvSpPr>
+          <p:cNvPr id="14" name="TextBox 13"/>
+          <p:cNvSpPr txBox="1"/>
+          <p:nvPr/>
+        </p:nvSpPr>
+        <p:spPr>
+          <a:xfrm>
+            <a:off x="10789920" y="6446520"/>
+            <a:ext cx="1188720" cy="274320"/>
+          </a:xfrm>
+          <a:prstGeom prst="rect">
+            <a:avLst/>
+          </a:prstGeom>
+          <a:noFill/>
+        </p:spPr>
+        <p:txBody>
+          <a:bodyPr wrap="square" lIns="0" rIns="0" tIns="0" bIns="0">
+            <a:spAutoFit/>
+          </a:bodyPr>
+          <a:lstStyle/>
+          <a:p>
+            <a:pPr algn="r"/>
+            <a:r>
+              <a:rPr sz="1000" b="0">
+                <a:solidFill>
+                  <a:srgbClr val="606060"/>
+                </a:solidFill>
+                <a:latin typeface="Microsoft YaHei"/>
+              </a:rPr>
+              <a:t>16 / 16</a:t>
             </a:r>
           </a:p>
         </p:txBody>
@@ -7840,7 +9782,7 @@
                 </a:solidFill>
                 <a:latin typeface="Microsoft YaHei"/>
               </a:rPr>
-              <a:t>2 / 13</a:t>
+              <a:t>2 / 16</a:t>
             </a:r>
           </a:p>
         </p:txBody>
@@ -8886,7 +10828,7 @@
                 </a:solidFill>
                 <a:latin typeface="Microsoft YaHei"/>
               </a:rPr>
-              <a:t>3 / 13</a:t>
+              <a:t>3 / 16</a:t>
             </a:r>
           </a:p>
         </p:txBody>
@@ -9821,7 +11763,7 @@
                 </a:solidFill>
                 <a:latin typeface="Microsoft YaHei"/>
               </a:rPr>
-              <a:t>4 / 13</a:t>
+              <a:t>4 / 16</a:t>
             </a:r>
           </a:p>
         </p:txBody>
@@ -10711,7 +12653,7 @@
                 </a:solidFill>
                 <a:latin typeface="Microsoft YaHei"/>
               </a:rPr>
-              <a:t>5 / 13</a:t>
+              <a:t>5 / 16</a:t>
             </a:r>
           </a:p>
         </p:txBody>
@@ -11751,7 +13693,7 @@
                 </a:solidFill>
                 <a:latin typeface="Microsoft YaHei"/>
               </a:rPr>
-              <a:t>6 / 13</a:t>
+              <a:t>6 / 16</a:t>
             </a:r>
           </a:p>
         </p:txBody>
@@ -13092,7 +15034,7 @@
                 </a:solidFill>
                 <a:latin typeface="Microsoft YaHei"/>
               </a:rPr>
-              <a:t>7 / 13</a:t>
+              <a:t>7 / 16</a:t>
             </a:r>
           </a:p>
         </p:txBody>
@@ -14245,7 +16187,7 @@
                 </a:solidFill>
                 <a:latin typeface="Microsoft YaHei"/>
               </a:rPr>
-              <a:t>8 / 13</a:t>
+              <a:t>8 / 16</a:t>
             </a:r>
           </a:p>
         </p:txBody>
@@ -15335,7 +17277,7 @@
                 </a:solidFill>
                 <a:latin typeface="Microsoft YaHei"/>
               </a:rPr>
-              <a:t>9 / 13</a:t>
+              <a:t>9 / 16</a:t>
             </a:r>
           </a:p>
         </p:txBody>

--- a/docs/dev_summary.pptx
+++ b/docs/dev_summary.pptx
@@ -18,6 +18,9 @@
     <p:sldId id="266" r:id="rId17"/>
     <p:sldId id="267" r:id="rId18"/>
     <p:sldId id="268" r:id="rId19"/>
+    <p:sldId id="269" r:id="rId20"/>
+    <p:sldId id="270" r:id="rId21"/>
+    <p:sldId id="271" r:id="rId22"/>
   </p:sldIdLst>
   <p:sldSz cx="12191695" cy="6858000" type="screen4x3"/>
   <p:notesSz cx="6858000" cy="9144000"/>
@@ -4383,7 +4386,7 @@
                 </a:solidFill>
                 <a:latin typeface="Microsoft YaHei"/>
               </a:rPr>
-              <a:t>10 / 13</a:t>
+              <a:t>10 / 16</a:t>
             </a:r>
           </a:p>
         </p:txBody>
@@ -5223,7 +5226,7 @@
                 </a:solidFill>
                 <a:latin typeface="Microsoft YaHei"/>
               </a:rPr>
-              <a:t>11 / 13</a:t>
+              <a:t>11 / 16</a:t>
             </a:r>
           </a:p>
         </p:txBody>
@@ -5276,7 +5279,7 @@
                 </a:solidFill>
                 <a:latin typeface="Microsoft YaHei"/>
               </a:rPr>
-              <a:t>七、关键技术修复（3 处核心）</a:t>
+              <a:t>七、关键技术修复（6 处典型）</a:t>
             </a:r>
           </a:p>
         </p:txBody>
@@ -5333,7 +5336,7 @@
         <p:spPr>
           <a:xfrm>
             <a:off x="457200" y="960120"/>
-            <a:ext cx="11247120" cy="365760"/>
+            <a:ext cx="5669280" cy="365760"/>
           </a:xfrm>
           <a:prstGeom prst="rect">
             <a:avLst/>
@@ -5348,12 +5351,47 @@
           <a:p>
             <a:pPr algn="l"/>
             <a:r>
-              <a:rPr sz="1400" b="1">
+              <a:rPr sz="1600" b="1">
                 <a:solidFill>
                   <a:srgbClr val="1A73E8"/>
                 </a:solidFill>
                 <a:latin typeface="Microsoft YaHei"/>
               </a:rPr>
+              <a:t>🎮 游戏逻辑层</a:t>
+            </a:r>
+          </a:p>
+        </p:txBody>
+      </p:sp>
+      <p:sp>
+        <p:nvSpPr>
+          <p:cNvPr id="5" name="TextBox 4"/>
+          <p:cNvSpPr txBox="1"/>
+          <p:nvPr/>
+        </p:nvSpPr>
+        <p:spPr>
+          <a:xfrm>
+            <a:off x="457200" y="1371600"/>
+            <a:ext cx="5669280" cy="320040"/>
+          </a:xfrm>
+          <a:prstGeom prst="rect">
+            <a:avLst/>
+          </a:prstGeom>
+          <a:noFill/>
+        </p:spPr>
+        <p:txBody>
+          <a:bodyPr wrap="square" lIns="0" rIns="0" tIns="0" bIns="0">
+            <a:spAutoFit/>
+          </a:bodyPr>
+          <a:lstStyle/>
+          <a:p>
+            <a:pPr algn="l"/>
+            <a:r>
+              <a:rPr sz="1200" b="1">
+                <a:solidFill>
+                  <a:srgbClr val="202020"/>
+                </a:solidFill>
+                <a:latin typeface="Microsoft YaHei"/>
+              </a:rPr>
               <a:t>1️⃣ 游戏卡死 — 四层防御</a:t>
             </a:r>
           </a:p>
@@ -5361,14 +5399,14 @@
       </p:sp>
       <p:sp>
         <p:nvSpPr>
-          <p:cNvPr id="5" name="Rectangle 4"/>
+          <p:cNvPr id="6" name="Rectangle 5"/>
           <p:cNvSpPr/>
           <p:nvPr/>
         </p:nvSpPr>
         <p:spPr>
           <a:xfrm>
-            <a:off x="457200" y="1371600"/>
-            <a:ext cx="11247120" cy="1554480"/>
+            <a:off x="457200" y="1691640"/>
+            <a:ext cx="5669280" cy="1097280"/>
           </a:xfrm>
           <a:prstGeom prst="rect">
             <a:avLst/>
@@ -5402,60 +5440,60 @@
           <a:p>
             <a:pPr algn="ctr"/>
             <a:r>
-              <a:rPr sz="1200">
+              <a:rPr sz="1000">
                 <a:solidFill>
                   <a:srgbClr val="202020"/>
                 </a:solidFill>
                 <a:latin typeface="Consolas"/>
               </a:rPr>
-              <a:t>[层1] canBeat 炸弹比较错误：大张数应直接胜（修复前要求同张数）</a:t>
-            </a:r>
-          </a:p>
-          <a:p>
-            <a:r>
-              <a:rPr sz="1200">
+              <a:t>L1 canBeat 炸弹大张数胜</a:t>
+            </a:r>
+          </a:p>
+          <a:p>
+            <a:r>
+              <a:rPr sz="1000">
                 <a:solidFill>
                   <a:srgbClr val="202020"/>
                 </a:solidFill>
                 <a:latin typeface="Consolas"/>
               </a:rPr>
-              <a:t>[层2] AI 失败无回退：增加三级回退（首选 → 过牌 → 最小单张）</a:t>
-            </a:r>
-          </a:p>
-          <a:p>
-            <a:r>
-              <a:rPr sz="1200">
+              <a:t>L2 AI 三级回退</a:t>
+            </a:r>
+          </a:p>
+          <a:p>
+            <a:r>
+              <a:rPr sz="1000">
                 <a:solidFill>
                   <a:srgbClr val="202020"/>
                 </a:solidFill>
                 <a:latin typeface="Consolas"/>
               </a:rPr>
-              <a:t>[层3] 多协程无锁并发写 state.hands：每房间一把 Mutex（改在锁内/广播在锁外）</a:t>
-            </a:r>
-          </a:p>
-          <a:p>
-            <a:r>
-              <a:rPr sz="1200">
+              <a:t>L3 每房间 Mutex</a:t>
+            </a:r>
+          </a:p>
+          <a:p>
+            <a:r>
+              <a:rPr sz="1000">
                 <a:solidFill>
                   <a:srgbClr val="202020"/>
                 </a:solidFill>
                 <a:latin typeface="Consolas"/>
               </a:rPr>
-              <a:t>[层4] 三级回退仍失败：broadcastForceAdvance 强制推进兜底</a:t>
-            </a:r>
-          </a:p>
-        </p:txBody>
-      </p:sp>
-      <p:sp>
-        <p:nvSpPr>
-          <p:cNvPr id="6" name="TextBox 5"/>
+              <a:t>L4 broadcastForceAdvance 兜底</a:t>
+            </a:r>
+          </a:p>
+        </p:txBody>
+      </p:sp>
+      <p:sp>
+        <p:nvSpPr>
+          <p:cNvPr id="7" name="TextBox 6"/>
           <p:cNvSpPr txBox="1"/>
           <p:nvPr/>
         </p:nvSpPr>
         <p:spPr>
           <a:xfrm>
-            <a:off x="457200" y="3017520"/>
-            <a:ext cx="11247120" cy="365760"/>
+            <a:off x="457200" y="2880360"/>
+            <a:ext cx="5669280" cy="320040"/>
           </a:xfrm>
           <a:prstGeom prst="rect">
             <a:avLst/>
@@ -5470,9 +5508,9 @@
           <a:p>
             <a:pPr algn="l"/>
             <a:r>
-              <a:rPr sz="1400" b="1">
-                <a:solidFill>
-                  <a:srgbClr val="1A73E8"/>
+              <a:rPr sz="1200" b="1">
+                <a:solidFill>
+                  <a:srgbClr val="202020"/>
                 </a:solidFill>
                 <a:latin typeface="Microsoft YaHei"/>
               </a:rPr>
@@ -5483,14 +5521,14 @@
       </p:sp>
       <p:sp>
         <p:nvSpPr>
-          <p:cNvPr id="7" name="Rectangle 6"/>
+          <p:cNvPr id="8" name="Rectangle 7"/>
           <p:cNvSpPr/>
           <p:nvPr/>
         </p:nvSpPr>
         <p:spPr>
           <a:xfrm>
-            <a:off x="457200" y="3429000"/>
-            <a:ext cx="11247120" cy="1280160"/>
+            <a:off x="457200" y="3200400"/>
+            <a:ext cx="5669280" cy="777240"/>
           </a:xfrm>
           <a:prstGeom prst="rect">
             <a:avLst/>
@@ -5524,49 +5562,38 @@
           <a:p>
             <a:pPr algn="ctr"/>
             <a:r>
-              <a:rPr sz="1200">
+              <a:rPr sz="1000">
                 <a:solidFill>
                   <a:srgbClr val="202020"/>
                 </a:solidFill>
                 <a:latin typeface="Consolas"/>
               </a:rPr>
-              <a:t>❌ 修复前：newWebSocket() 后立即 send(Reconnect)，ws 仍在 CONNECTING → 静默丢弃</a:t>
-            </a:r>
-          </a:p>
-          <a:p>
-            <a:r>
-              <a:rPr sz="1200">
+              <a:t>❌ newWebSocket() 后立即 send → 静默丢弃</a:t>
+            </a:r>
+          </a:p>
+          <a:p>
+            <a:r>
+              <a:rPr sz="1000">
                 <a:solidFill>
                   <a:srgbClr val="202020"/>
                 </a:solidFill>
                 <a:latin typeface="Consolas"/>
               </a:rPr>
-              <a:t>✅ 修复后：在 onOpen 回调内 send，确保 ws 已 OPEN</a:t>
-            </a:r>
-          </a:p>
-          <a:p>
-            <a:r>
-              <a:rPr sz="1200">
-                <a:solidFill>
-                  <a:srgbClr val="202020"/>
-                </a:solidFill>
-                <a:latin typeface="Consolas"/>
-              </a:rPr>
-              <a:t>教训：「创建连接」≠「连接已建立」，异步 API 必须在回调中操作</a:t>
-            </a:r>
-          </a:p>
-        </p:txBody>
-      </p:sp>
-      <p:sp>
-        <p:nvSpPr>
-          <p:cNvPr id="8" name="TextBox 7"/>
+              <a:t>✅ 在 onOpen 回调内 send，确保 ws OPEN</a:t>
+            </a:r>
+          </a:p>
+        </p:txBody>
+      </p:sp>
+      <p:sp>
+        <p:nvSpPr>
+          <p:cNvPr id="9" name="TextBox 8"/>
           <p:cNvSpPr txBox="1"/>
           <p:nvPr/>
         </p:nvSpPr>
         <p:spPr>
           <a:xfrm>
-            <a:off x="457200" y="4800600"/>
-            <a:ext cx="11247120" cy="365760"/>
+            <a:off x="457200" y="4069080"/>
+            <a:ext cx="5669280" cy="320040"/>
           </a:xfrm>
           <a:prstGeom prst="rect">
             <a:avLst/>
@@ -5581,9 +5608,9 @@
           <a:p>
             <a:pPr algn="l"/>
             <a:r>
-              <a:rPr sz="1400" b="1">
-                <a:solidFill>
-                  <a:srgbClr val="1A73E8"/>
+              <a:rPr sz="1200" b="1">
+                <a:solidFill>
+                  <a:srgbClr val="202020"/>
                 </a:solidFill>
                 <a:latin typeface="Microsoft YaHei"/>
               </a:rPr>
@@ -5594,14 +5621,14 @@
       </p:sp>
       <p:sp>
         <p:nvSpPr>
-          <p:cNvPr id="9" name="Rectangle 8"/>
+          <p:cNvPr id="10" name="Rectangle 9"/>
           <p:cNvSpPr/>
           <p:nvPr/>
         </p:nvSpPr>
         <p:spPr>
           <a:xfrm>
-            <a:off x="457200" y="5212080"/>
-            <a:ext cx="11247120" cy="1371600"/>
+            <a:off x="457200" y="4389120"/>
+            <a:ext cx="5669280" cy="1005840"/>
           </a:xfrm>
           <a:prstGeom prst="rect">
             <a:avLst/>
@@ -5635,60 +5662,49 @@
           <a:p>
             <a:pPr algn="ctr"/>
             <a:r>
-              <a:rPr sz="1200">
+              <a:rPr sz="1000">
                 <a:solidFill>
                   <a:srgbClr val="202020"/>
                 </a:solidFill>
                 <a:latin typeface="Consolas"/>
               </a:rPr>
-              <a:t>根因：collectedScore 硬编码为 0；服务端漏算「输方未走完已收分」</a:t>
-            </a:r>
-          </a:p>
-          <a:p>
-            <a:r>
-              <a:rPr sz="1200">
+              <a:t>playerScores 实时追踪每人已收</a:t>
+            </a:r>
+          </a:p>
+          <a:p>
+            <a:r>
+              <a:rPr sz="1000">
                 <a:solidFill>
                   <a:srgbClr val="202020"/>
                 </a:solidFill>
                 <a:latin typeface="Consolas"/>
               </a:rPr>
-              <a:t>统一公式：赢方 = 赢方所有已收 + 输方未走完(已收 + 手牌分)；输方 = 输方已走完已收</a:t>
-            </a:r>
-          </a:p>
-          <a:p>
-            <a:r>
-              <a:rPr sz="1200">
+              <a:t>赢方 = 赢方已收 + 输方未走完(已收+手牌)</a:t>
+            </a:r>
+          </a:p>
+          <a:p>
+            <a:r>
+              <a:rPr sz="1000">
                 <a:solidFill>
                   <a:srgbClr val="202020"/>
                 </a:solidFill>
                 <a:latin typeface="Consolas"/>
               </a:rPr>
-              <a:t>新增 state.playerScores: MutableMap&lt;Int,Int&gt; 实时追踪每人已收分</a:t>
-            </a:r>
-          </a:p>
-          <a:p>
-            <a:r>
-              <a:rPr sz="1200">
-                <a:solidFill>
-                  <a:srgbClr val="202020"/>
-                </a:solidFill>
-                <a:latin typeface="Consolas"/>
-              </a:rPr>
-              <a:t>✓ 15 个验证用例全部通过（含提前结算、速度流、极端场景）</a:t>
-            </a:r>
-          </a:p>
-        </p:txBody>
-      </p:sp>
-      <p:sp>
-        <p:nvSpPr>
-          <p:cNvPr id="10" name="TextBox 9"/>
+              <a:t>✓ 15 个验证用例全部通过</a:t>
+            </a:r>
+          </a:p>
+        </p:txBody>
+      </p:sp>
+      <p:sp>
+        <p:nvSpPr>
+          <p:cNvPr id="11" name="TextBox 10"/>
           <p:cNvSpPr txBox="1"/>
           <p:nvPr/>
         </p:nvSpPr>
         <p:spPr>
           <a:xfrm>
-            <a:off x="10789920" y="6446520"/>
-            <a:ext cx="1188720" cy="274320"/>
+            <a:off x="6400800" y="960120"/>
+            <a:ext cx="5486400" cy="365760"/>
           </a:xfrm>
           <a:prstGeom prst="rect">
             <a:avLst/>
@@ -5701,6 +5717,478 @@
           </a:bodyPr>
           <a:lstStyle/>
           <a:p>
+            <a:pPr algn="l"/>
+            <a:r>
+              <a:rPr sz="1600" b="1">
+                <a:solidFill>
+                  <a:srgbClr val="F57C00"/>
+                </a:solidFill>
+                <a:latin typeface="Microsoft YaHei"/>
+              </a:rPr>
+              <a:t>🚀 部署 / 平台层</a:t>
+            </a:r>
+          </a:p>
+        </p:txBody>
+      </p:sp>
+      <p:sp>
+        <p:nvSpPr>
+          <p:cNvPr id="12" name="TextBox 11"/>
+          <p:cNvSpPr txBox="1"/>
+          <p:nvPr/>
+        </p:nvSpPr>
+        <p:spPr>
+          <a:xfrm>
+            <a:off x="6400800" y="1371600"/>
+            <a:ext cx="5486400" cy="320040"/>
+          </a:xfrm>
+          <a:prstGeom prst="rect">
+            <a:avLst/>
+          </a:prstGeom>
+          <a:noFill/>
+        </p:spPr>
+        <p:txBody>
+          <a:bodyPr wrap="square" lIns="0" rIns="0" tIns="0" bIns="0">
+            <a:spAutoFit/>
+          </a:bodyPr>
+          <a:lstStyle/>
+          <a:p>
+            <a:pPr algn="l"/>
+            <a:r>
+              <a:rPr sz="1200" b="1">
+                <a:solidFill>
+                  <a:srgbClr val="202020"/>
+                </a:solidFill>
+                <a:latin typeface="Microsoft YaHei"/>
+              </a:rPr>
+              <a:t>4️⃣ Web 中文豆腐块（CJK）</a:t>
+            </a:r>
+          </a:p>
+        </p:txBody>
+      </p:sp>
+      <p:sp>
+        <p:nvSpPr>
+          <p:cNvPr id="13" name="Rectangle 12"/>
+          <p:cNvSpPr/>
+          <p:nvPr/>
+        </p:nvSpPr>
+        <p:spPr>
+          <a:xfrm>
+            <a:off x="6400800" y="1691640"/>
+            <a:ext cx="5486400" cy="1097280"/>
+          </a:xfrm>
+          <a:prstGeom prst="rect">
+            <a:avLst/>
+          </a:prstGeom>
+          <a:solidFill>
+            <a:srgbClr val="F4F4F4"/>
+          </a:solidFill>
+          <a:ln>
+            <a:solidFill>
+              <a:srgbClr val="D0D0D0"/>
+            </a:solidFill>
+          </a:ln>
+        </p:spPr>
+        <p:style>
+          <a:lnRef idx="1">
+            <a:schemeClr val="accent1"/>
+          </a:lnRef>
+          <a:fillRef idx="3">
+            <a:schemeClr val="accent1"/>
+          </a:fillRef>
+          <a:effectRef idx="2">
+            <a:schemeClr val="accent1"/>
+          </a:effectRef>
+          <a:fontRef idx="minor">
+            <a:schemeClr val="lt1"/>
+          </a:fontRef>
+        </p:style>
+        <p:txBody>
+          <a:bodyPr rtlCol="0" anchor="ctr" wrap="square" lIns="120000" rIns="120000" tIns="80000" bIns="80000"/>
+          <a:lstStyle/>
+          <a:p>
+            <a:pPr algn="ctr"/>
+            <a:r>
+              <a:rPr sz="1000">
+                <a:solidFill>
+                  <a:srgbClr val="202020"/>
+                </a:solidFill>
+                <a:latin typeface="Consolas"/>
+              </a:rPr>
+              <a:t>根因：浏览器无系统中文字体</a:t>
+            </a:r>
+          </a:p>
+          <a:p>
+            <a:r>
+              <a:rPr sz="1000">
+                <a:solidFill>
+                  <a:srgbClr val="202020"/>
+                </a:solidFill>
+                <a:latin typeface="Consolas"/>
+              </a:rPr>
+              <a:t>方案：打包 ~3MB GB2312 子集字体</a:t>
+            </a:r>
+          </a:p>
+          <a:p>
+            <a:r>
+              <a:rPr sz="1000">
+                <a:solidFill>
+                  <a:srgbClr val="202020"/>
+                </a:solidFill>
+                <a:latin typeface="Consolas"/>
+              </a:rPr>
+              <a:t>教训：跨端要测真实终端环境</a:t>
+            </a:r>
+          </a:p>
+        </p:txBody>
+      </p:sp>
+      <p:sp>
+        <p:nvSpPr>
+          <p:cNvPr id="14" name="TextBox 13"/>
+          <p:cNvSpPr txBox="1"/>
+          <p:nvPr/>
+        </p:nvSpPr>
+        <p:spPr>
+          <a:xfrm>
+            <a:off x="6400800" y="2880360"/>
+            <a:ext cx="5486400" cy="320040"/>
+          </a:xfrm>
+          <a:prstGeom prst="rect">
+            <a:avLst/>
+          </a:prstGeom>
+          <a:noFill/>
+        </p:spPr>
+        <p:txBody>
+          <a:bodyPr wrap="square" lIns="0" rIns="0" tIns="0" bIns="0">
+            <a:spAutoFit/>
+          </a:bodyPr>
+          <a:lstStyle/>
+          <a:p>
+            <a:pPr algn="l"/>
+            <a:r>
+              <a:rPr sz="1200" b="1">
+                <a:solidFill>
+                  <a:srgbClr val="202020"/>
+                </a:solidFill>
+                <a:latin typeface="Microsoft YaHei"/>
+              </a:rPr>
+              <a:t>5️⃣ 双层防火墙 — 部署对称陷阱</a:t>
+            </a:r>
+          </a:p>
+        </p:txBody>
+      </p:sp>
+      <p:sp>
+        <p:nvSpPr>
+          <p:cNvPr id="15" name="Rectangle 14"/>
+          <p:cNvSpPr/>
+          <p:nvPr/>
+        </p:nvSpPr>
+        <p:spPr>
+          <a:xfrm>
+            <a:off x="6400800" y="3200400"/>
+            <a:ext cx="5486400" cy="777240"/>
+          </a:xfrm>
+          <a:prstGeom prst="rect">
+            <a:avLst/>
+          </a:prstGeom>
+          <a:solidFill>
+            <a:srgbClr val="F4F4F4"/>
+          </a:solidFill>
+          <a:ln>
+            <a:solidFill>
+              <a:srgbClr val="D0D0D0"/>
+            </a:solidFill>
+          </a:ln>
+        </p:spPr>
+        <p:style>
+          <a:lnRef idx="1">
+            <a:schemeClr val="accent1"/>
+          </a:lnRef>
+          <a:fillRef idx="3">
+            <a:schemeClr val="accent1"/>
+          </a:fillRef>
+          <a:effectRef idx="2">
+            <a:schemeClr val="accent1"/>
+          </a:effectRef>
+          <a:fontRef idx="minor">
+            <a:schemeClr val="lt1"/>
+          </a:fontRef>
+        </p:style>
+        <p:txBody>
+          <a:bodyPr rtlCol="0" anchor="ctr" wrap="square" lIns="120000" rIns="120000" tIns="80000" bIns="80000"/>
+          <a:lstStyle/>
+          <a:p>
+            <a:pPr algn="ctr"/>
+            <a:r>
+              <a:rPr sz="1000">
+                <a:solidFill>
+                  <a:srgbClr val="202020"/>
+                </a:solidFill>
+                <a:latin typeface="Consolas"/>
+              </a:rPr>
+              <a:t>ufw 开了 ≠ 公网通：腾讯云安全组也要开</a:t>
+            </a:r>
+          </a:p>
+          <a:p>
+            <a:r>
+              <a:rPr sz="1000">
+                <a:solidFill>
+                  <a:srgbClr val="202020"/>
+                </a:solidFill>
+                <a:latin typeface="Consolas"/>
+              </a:rPr>
+              <a:t>教训：私有云常有"两层防火墙"，必须都查</a:t>
+            </a:r>
+          </a:p>
+        </p:txBody>
+      </p:sp>
+      <p:sp>
+        <p:nvSpPr>
+          <p:cNvPr id="16" name="TextBox 15"/>
+          <p:cNvSpPr txBox="1"/>
+          <p:nvPr/>
+        </p:nvSpPr>
+        <p:spPr>
+          <a:xfrm>
+            <a:off x="6400800" y="4069080"/>
+            <a:ext cx="5486400" cy="320040"/>
+          </a:xfrm>
+          <a:prstGeom prst="rect">
+            <a:avLst/>
+          </a:prstGeom>
+          <a:noFill/>
+        </p:spPr>
+        <p:txBody>
+          <a:bodyPr wrap="square" lIns="0" rIns="0" tIns="0" bIns="0">
+            <a:spAutoFit/>
+          </a:bodyPr>
+          <a:lstStyle/>
+          <a:p>
+            <a:pPr algn="l"/>
+            <a:r>
+              <a:rPr sz="1200" b="1">
+                <a:solidFill>
+                  <a:srgbClr val="202020"/>
+                </a:solidFill>
+                <a:latin typeface="Microsoft YaHei"/>
+              </a:rPr>
+              <a:t>6️⃣ Android URL 漂移 — 拓扑变更盲区</a:t>
+            </a:r>
+          </a:p>
+        </p:txBody>
+      </p:sp>
+      <p:sp>
+        <p:nvSpPr>
+          <p:cNvPr id="17" name="Rectangle 16"/>
+          <p:cNvSpPr/>
+          <p:nvPr/>
+        </p:nvSpPr>
+        <p:spPr>
+          <a:xfrm>
+            <a:off x="6400800" y="4389120"/>
+            <a:ext cx="5486400" cy="1005840"/>
+          </a:xfrm>
+          <a:prstGeom prst="rect">
+            <a:avLst/>
+          </a:prstGeom>
+          <a:solidFill>
+            <a:srgbClr val="F4F4F4"/>
+          </a:solidFill>
+          <a:ln>
+            <a:solidFill>
+              <a:srgbClr val="D0D0D0"/>
+            </a:solidFill>
+          </a:ln>
+        </p:spPr>
+        <p:style>
+          <a:lnRef idx="1">
+            <a:schemeClr val="accent1"/>
+          </a:lnRef>
+          <a:fillRef idx="3">
+            <a:schemeClr val="accent1"/>
+          </a:fillRef>
+          <a:effectRef idx="2">
+            <a:schemeClr val="accent1"/>
+          </a:effectRef>
+          <a:fontRef idx="minor">
+            <a:schemeClr val="lt1"/>
+          </a:fontRef>
+        </p:style>
+        <p:txBody>
+          <a:bodyPr rtlCol="0" anchor="ctr" wrap="square" lIns="120000" rIns="120000" tIns="80000" bIns="80000"/>
+          <a:lstStyle/>
+          <a:p>
+            <a:pPr algn="ctr"/>
+            <a:r>
+              <a:rPr sz="1000">
+                <a:solidFill>
+                  <a:srgbClr val="202020"/>
+                </a:solidFill>
+                <a:latin typeface="Consolas"/>
+              </a:rPr>
+              <a:t>PR #41 改 Caddy 反代后，Web 改了 URL</a:t>
+            </a:r>
+          </a:p>
+          <a:p>
+            <a:r>
+              <a:rPr sz="1000">
+                <a:solidFill>
+                  <a:srgbClr val="202020"/>
+                </a:solidFill>
+                <a:latin typeface="Consolas"/>
+              </a:rPr>
+              <a:t>但 Android 硬编码 :8080 没改 → 完全连不上</a:t>
+            </a:r>
+          </a:p>
+          <a:p>
+            <a:r>
+              <a:rPr sz="1000">
+                <a:solidFill>
+                  <a:srgbClr val="202020"/>
+                </a:solidFill>
+                <a:latin typeface="Consolas"/>
+              </a:rPr>
+              <a:t>教训：拓扑变更必须 grep 所有客户端 URL</a:t>
+            </a:r>
+          </a:p>
+        </p:txBody>
+      </p:sp>
+      <p:sp>
+        <p:nvSpPr>
+          <p:cNvPr id="18" name="Rounded Rectangle 17"/>
+          <p:cNvSpPr/>
+          <p:nvPr/>
+        </p:nvSpPr>
+        <p:spPr>
+          <a:xfrm>
+            <a:off x="457200" y="5532120"/>
+            <a:ext cx="11430000" cy="914400"/>
+          </a:xfrm>
+          <a:prstGeom prst="roundRect">
+            <a:avLst/>
+          </a:prstGeom>
+          <a:solidFill>
+            <a:srgbClr val="F0F4FF"/>
+          </a:solidFill>
+          <a:ln>
+            <a:solidFill>
+              <a:srgbClr val="1A73E8"/>
+            </a:solidFill>
+          </a:ln>
+        </p:spPr>
+        <p:style>
+          <a:lnRef idx="1">
+            <a:schemeClr val="accent1"/>
+          </a:lnRef>
+          <a:fillRef idx="3">
+            <a:schemeClr val="accent1"/>
+          </a:fillRef>
+          <a:effectRef idx="2">
+            <a:schemeClr val="accent1"/>
+          </a:effectRef>
+          <a:fontRef idx="minor">
+            <a:schemeClr val="lt1"/>
+          </a:fontRef>
+        </p:style>
+        <p:txBody>
+          <a:bodyPr rtlCol="0" anchor="ctr"/>
+          <a:lstStyle/>
+          <a:p>
+            <a:pPr algn="ctr"/>
+          </a:p>
+        </p:txBody>
+      </p:sp>
+      <p:sp>
+        <p:nvSpPr>
+          <p:cNvPr id="19" name="TextBox 18"/>
+          <p:cNvSpPr txBox="1"/>
+          <p:nvPr/>
+        </p:nvSpPr>
+        <p:spPr>
+          <a:xfrm>
+            <a:off x="731520" y="5669280"/>
+            <a:ext cx="10972800" cy="365760"/>
+          </a:xfrm>
+          <a:prstGeom prst="rect">
+            <a:avLst/>
+          </a:prstGeom>
+          <a:noFill/>
+        </p:spPr>
+        <p:txBody>
+          <a:bodyPr wrap="square" lIns="0" rIns="0" tIns="0" bIns="0">
+            <a:spAutoFit/>
+          </a:bodyPr>
+          <a:lstStyle/>
+          <a:p>
+            <a:pPr algn="l"/>
+            <a:r>
+              <a:rPr sz="1400" b="1">
+                <a:solidFill>
+                  <a:srgbClr val="1A73E8"/>
+                </a:solidFill>
+                <a:latin typeface="Microsoft YaHei"/>
+              </a:rPr>
+              <a:t>💡 共同规律：游戏逻辑层错在「假设」，部署层错在「跨端 / 跨拓扑同步」</a:t>
+            </a:r>
+          </a:p>
+        </p:txBody>
+      </p:sp>
+      <p:sp>
+        <p:nvSpPr>
+          <p:cNvPr id="20" name="TextBox 19"/>
+          <p:cNvSpPr txBox="1"/>
+          <p:nvPr/>
+        </p:nvSpPr>
+        <p:spPr>
+          <a:xfrm>
+            <a:off x="731520" y="6035040"/>
+            <a:ext cx="10972800" cy="365760"/>
+          </a:xfrm>
+          <a:prstGeom prst="rect">
+            <a:avLst/>
+          </a:prstGeom>
+          <a:noFill/>
+        </p:spPr>
+        <p:txBody>
+          <a:bodyPr wrap="square" lIns="0" rIns="0" tIns="0" bIns="0">
+            <a:spAutoFit/>
+          </a:bodyPr>
+          <a:lstStyle/>
+          <a:p>
+            <a:pPr algn="l"/>
+            <a:r>
+              <a:rPr sz="1200" b="0">
+                <a:solidFill>
+                  <a:srgbClr val="202020"/>
+                </a:solidFill>
+                <a:latin typeface="Microsoft YaHei"/>
+              </a:rPr>
+              <a:t>防御：(1) 关键路径强制 TDD；(2) 跨端共享 KMP 模块；(3) 拓扑变更 grep 所有 client 配置</a:t>
+            </a:r>
+          </a:p>
+        </p:txBody>
+      </p:sp>
+      <p:sp>
+        <p:nvSpPr>
+          <p:cNvPr id="21" name="TextBox 20"/>
+          <p:cNvSpPr txBox="1"/>
+          <p:nvPr/>
+        </p:nvSpPr>
+        <p:spPr>
+          <a:xfrm>
+            <a:off x="10789920" y="6446520"/>
+            <a:ext cx="1188720" cy="274320"/>
+          </a:xfrm>
+          <a:prstGeom prst="rect">
+            <a:avLst/>
+          </a:prstGeom>
+          <a:noFill/>
+        </p:spPr>
+        <p:txBody>
+          <a:bodyPr wrap="square" lIns="0" rIns="0" tIns="0" bIns="0">
+            <a:spAutoFit/>
+          </a:bodyPr>
+          <a:lstStyle/>
+          <a:p>
             <a:pPr algn="r"/>
             <a:r>
               <a:rPr sz="1000" b="0">
@@ -5709,7 +6197,7 @@
                 </a:solidFill>
                 <a:latin typeface="Microsoft YaHei"/>
               </a:rPr>
-              <a:t>12 / 13</a:t>
+              <a:t>12 / 16</a:t>
             </a:r>
           </a:p>
         </p:txBody>
@@ -5853,8 +6341,8 @@
         </p:nvSpPr>
         <p:spPr>
           <a:xfrm>
-            <a:off x="548640" y="1417320"/>
-            <a:ext cx="5669280" cy="365760"/>
+            <a:off x="548640" y="1371600"/>
+            <a:ext cx="5669280" cy="320040"/>
           </a:xfrm>
           <a:prstGeom prst="rect">
             <a:avLst/>
@@ -5875,7 +6363,7 @@
                 </a:solidFill>
                 <a:latin typeface="Microsoft YaHei"/>
               </a:rPr>
-              <a:t>1. 「修了又坏」的根因：只修表层，没往深挖</a:t>
+              <a:t>1. 「修了又坏」的根因：只修表层，没往深挖（需要分层根因审查）</a:t>
             </a:r>
           </a:p>
         </p:txBody>
@@ -5888,8 +6376,8 @@
         </p:nvSpPr>
         <p:spPr>
           <a:xfrm>
-            <a:off x="548640" y="1874519"/>
-            <a:ext cx="5669280" cy="365760"/>
+            <a:off x="548640" y="1737360"/>
+            <a:ext cx="5669280" cy="320040"/>
           </a:xfrm>
           <a:prstGeom prst="rect">
             <a:avLst/>
@@ -5910,7 +6398,7 @@
                 </a:solidFill>
                 <a:latin typeface="Microsoft YaHei"/>
               </a:rPr>
-              <a:t>2. 单机/联网共享逻辑必须保持一致</a:t>
+              <a:t>2. 跨端共享逻辑必须用 KMP 强制（已实现 :shared 模块）</a:t>
             </a:r>
           </a:p>
         </p:txBody>
@@ -5923,8 +6411,8 @@
         </p:nvSpPr>
         <p:spPr>
           <a:xfrm>
-            <a:off x="548640" y="2331720"/>
-            <a:ext cx="5669280" cy="365760"/>
+            <a:off x="548640" y="2103120"/>
+            <a:ext cx="5669280" cy="320040"/>
           </a:xfrm>
           <a:prstGeom prst="rect">
             <a:avLst/>
@@ -5945,7 +6433,7 @@
                 </a:solidFill>
                 <a:latin typeface="Microsoft YaHei"/>
               </a:rPr>
-              <a:t>3. AI 静态扫描 + 人工真机验证不可互相替代</a:t>
+              <a:t>3. AI 静态扫描 + 人工真机 + Codex bot 不可互相替代（4 视角全跑）</a:t>
             </a:r>
           </a:p>
         </p:txBody>
@@ -5958,8 +6446,8 @@
         </p:nvSpPr>
         <p:spPr>
           <a:xfrm>
-            <a:off x="548640" y="2788920"/>
-            <a:ext cx="5669280" cy="365760"/>
+            <a:off x="548640" y="2468879"/>
+            <a:ext cx="5669280" cy="320040"/>
           </a:xfrm>
           <a:prstGeom prst="rect">
             <a:avLst/>
@@ -5980,7 +6468,7 @@
                 </a:solidFill>
                 <a:latin typeface="Microsoft YaHei"/>
               </a:rPr>
-              <a:t>4. 协议与环境问题必须人工打通</a:t>
+              <a:t>4. 协议 / 环境 / 部署拓扑变更必须人工打通（grep 所有客户端）</a:t>
             </a:r>
           </a:p>
         </p:txBody>
@@ -5993,8 +6481,8 @@
         </p:nvSpPr>
         <p:spPr>
           <a:xfrm>
-            <a:off x="6400800" y="960120"/>
-            <a:ext cx="5486400" cy="365760"/>
+            <a:off x="548640" y="2834639"/>
+            <a:ext cx="5669280" cy="320040"/>
           </a:xfrm>
           <a:prstGeom prst="rect">
             <a:avLst/>
@@ -6009,20 +6497,90 @@
           <a:p>
             <a:pPr algn="l"/>
             <a:r>
+              <a:rPr sz="1200" b="0">
+                <a:solidFill>
+                  <a:srgbClr val="202020"/>
+                </a:solidFill>
+                <a:latin typeface="Microsoft YaHei"/>
+              </a:rPr>
+              <a:t>5. 大特性 Phase 分段提交（协议 → 主客户端 → 次客户端）</a:t>
+            </a:r>
+          </a:p>
+        </p:txBody>
+      </p:sp>
+      <p:sp>
+        <p:nvSpPr>
+          <p:cNvPr id="10" name="TextBox 9"/>
+          <p:cNvSpPr txBox="1"/>
+          <p:nvPr/>
+        </p:nvSpPr>
+        <p:spPr>
+          <a:xfrm>
+            <a:off x="548640" y="3200399"/>
+            <a:ext cx="5669280" cy="320040"/>
+          </a:xfrm>
+          <a:prstGeom prst="rect">
+            <a:avLst/>
+          </a:prstGeom>
+          <a:noFill/>
+        </p:spPr>
+        <p:txBody>
+          <a:bodyPr wrap="square" lIns="0" rIns="0" tIns="0" bIns="0">
+            <a:spAutoFit/>
+          </a:bodyPr>
+          <a:lstStyle/>
+          <a:p>
+            <a:pPr algn="l"/>
+            <a:r>
+              <a:rPr sz="1200" b="0">
+                <a:solidFill>
+                  <a:srgbClr val="202020"/>
+                </a:solidFill>
+                <a:latin typeface="Microsoft YaHei"/>
+              </a:rPr>
+              <a:t>6. delay() 之后必须重检所有依赖项，不只 currentPlayerIndex</a:t>
+            </a:r>
+          </a:p>
+        </p:txBody>
+      </p:sp>
+      <p:sp>
+        <p:nvSpPr>
+          <p:cNvPr id="11" name="TextBox 10"/>
+          <p:cNvSpPr txBox="1"/>
+          <p:nvPr/>
+        </p:nvSpPr>
+        <p:spPr>
+          <a:xfrm>
+            <a:off x="6400800" y="960120"/>
+            <a:ext cx="5486400" cy="365760"/>
+          </a:xfrm>
+          <a:prstGeom prst="rect">
+            <a:avLst/>
+          </a:prstGeom>
+          <a:noFill/>
+        </p:spPr>
+        <p:txBody>
+          <a:bodyPr wrap="square" lIns="0" rIns="0" tIns="0" bIns="0">
+            <a:spAutoFit/>
+          </a:bodyPr>
+          <a:lstStyle/>
+          <a:p>
+            <a:pPr algn="l"/>
+            <a:r>
               <a:rPr sz="1600" b="1">
                 <a:solidFill>
                   <a:srgbClr val="1A73E8"/>
                 </a:solidFill>
                 <a:latin typeface="Microsoft YaHei"/>
               </a:rPr>
-              <a:t>🚀 后续建议行动</a:t>
+              <a:t>🚀 后续建议行动（已部分落地）</a:t>
             </a:r>
           </a:p>
         </p:txBody>
       </p:sp>
       <p:graphicFrame>
         <p:nvGraphicFramePr>
-          <p:cNvPr id="10" name="Table 9"/>
+          <p:cNvPr id="12" name="Table 11"/>
           <p:cNvGraphicFramePr>
             <a:graphicFrameLocks noGrp="1"/>
           </p:cNvGraphicFramePr>
@@ -6030,7 +6588,7 @@
         </p:nvGraphicFramePr>
         <p:xfrm>
           <a:off x="6400800" y="1371600"/>
-          <a:ext cx="5486400" cy="2286000"/>
+          <a:ext cx="5486400" cy="2377440"/>
         </p:xfrm>
         <a:graphic>
           <a:graphicData uri="http://schemas.openxmlformats.org/drawingml/2006/table">
@@ -6039,10 +6597,10 @@
                 <a:tableStyleId>{5C22544A-7EE6-4342-B048-85BDC9FD1C3A}</a:tableStyleId>
               </a:tblPr>
               <a:tblGrid>
-                <a:gridCol w="1097280"/>
-                <a:gridCol w="4389120"/>
+                <a:gridCol w="1371600"/>
+                <a:gridCol w="4114800"/>
               </a:tblGrid>
-              <a:tr h="381000">
+              <a:tr h="339634">
                 <a:tc>
                   <a:txBody>
                     <a:bodyPr lIns="40000" rIns="40000" tIns="15000" bIns="15000"/>
@@ -6056,7 +6614,7 @@
                           </a:solidFill>
                           <a:latin typeface="Microsoft YaHei"/>
                         </a:rPr>
-                        <a:t>优先级</a:t>
+                        <a:t>状态</a:t>
                       </a:r>
                     </a:p>
                   </a:txBody>
@@ -6090,21 +6648,21 @@
                   </a:tcPr>
                 </a:tc>
               </a:tr>
-              <a:tr h="381000">
-                <a:tc>
-                  <a:txBody>
-                    <a:bodyPr lIns="40000" rIns="40000" tIns="10000" bIns="10000" wrap="square"/>
-                    <a:lstStyle/>
-                    <a:p>
-                      <a:pPr algn="l"/>
-                      <a:r>
-                        <a:rPr sz="1200">
-                          <a:solidFill>
-                            <a:srgbClr val="202020"/>
-                          </a:solidFill>
-                          <a:latin typeface="Microsoft YaHei"/>
-                        </a:rPr>
-                        <a:t>P0</a:t>
+              <a:tr h="339634">
+                <a:tc>
+                  <a:txBody>
+                    <a:bodyPr lIns="40000" rIns="40000" tIns="10000" bIns="10000" wrap="square"/>
+                    <a:lstStyle/>
+                    <a:p>
+                      <a:pPr algn="l"/>
+                      <a:r>
+                        <a:rPr sz="1200">
+                          <a:solidFill>
+                            <a:srgbClr val="202020"/>
+                          </a:solidFill>
+                          <a:latin typeface="Microsoft YaHei"/>
+                        </a:rPr>
+                        <a:t>✅ 已实现</a:t>
                       </a:r>
                     </a:p>
                   </a:txBody>
@@ -6127,7 +6685,7 @@
                           </a:solidFill>
                           <a:latin typeface="Microsoft YaHei"/>
                         </a:rPr>
-                        <a:t>自动化集成测试（炸弹/结算/重连）</a:t>
+                        <a:t>:shared KMP 共享模块（PR #35）</a:t>
                       </a:r>
                     </a:p>
                   </a:txBody>
@@ -6138,21 +6696,21 @@
                   </a:tcPr>
                 </a:tc>
               </a:tr>
-              <a:tr h="381000">
-                <a:tc>
-                  <a:txBody>
-                    <a:bodyPr lIns="40000" rIns="40000" tIns="10000" bIns="10000" wrap="square"/>
-                    <a:lstStyle/>
-                    <a:p>
-                      <a:pPr algn="l"/>
-                      <a:r>
-                        <a:rPr sz="1200">
-                          <a:solidFill>
-                            <a:srgbClr val="202020"/>
-                          </a:solidFill>
-                          <a:latin typeface="Microsoft YaHei"/>
-                        </a:rPr>
-                        <a:t>P0</a:t>
+              <a:tr h="339634">
+                <a:tc>
+                  <a:txBody>
+                    <a:bodyPr lIns="40000" rIns="40000" tIns="10000" bIns="10000" wrap="square"/>
+                    <a:lstStyle/>
+                    <a:p>
+                      <a:pPr algn="l"/>
+                      <a:r>
+                        <a:rPr sz="1200">
+                          <a:solidFill>
+                            <a:srgbClr val="202020"/>
+                          </a:solidFill>
+                          <a:latin typeface="Microsoft YaHei"/>
+                        </a:rPr>
+                        <a:t>✅ 已实现</a:t>
                       </a:r>
                     </a:p>
                   </a:txBody>
@@ -6175,7 +6733,7 @@
                           </a:solidFill>
                           <a:latin typeface="Microsoft YaHei"/>
                         </a:rPr>
-                        <a:t>共享规则层（KMP 模块）</a:t>
+                        <a:t>PROTOCOL_VERSION + 握手（PR-H3）</a:t>
                       </a:r>
                     </a:p>
                   </a:txBody>
@@ -6186,21 +6744,21 @@
                   </a:tcPr>
                 </a:tc>
               </a:tr>
-              <a:tr h="381000">
-                <a:tc>
-                  <a:txBody>
-                    <a:bodyPr lIns="40000" rIns="40000" tIns="10000" bIns="10000" wrap="square"/>
-                    <a:lstStyle/>
-                    <a:p>
-                      <a:pPr algn="l"/>
-                      <a:r>
-                        <a:rPr sz="1200">
-                          <a:solidFill>
-                            <a:srgbClr val="202020"/>
-                          </a:solidFill>
-                          <a:latin typeface="Microsoft YaHei"/>
-                        </a:rPr>
-                        <a:t>P1</a:t>
+              <a:tr h="339634">
+                <a:tc>
+                  <a:txBody>
+                    <a:bodyPr lIns="40000" rIns="40000" tIns="10000" bIns="10000" wrap="square"/>
+                    <a:lstStyle/>
+                    <a:p>
+                      <a:pPr algn="l"/>
+                      <a:r>
+                        <a:rPr sz="1200">
+                          <a:solidFill>
+                            <a:srgbClr val="202020"/>
+                          </a:solidFill>
+                          <a:latin typeface="Microsoft YaHei"/>
+                        </a:rPr>
+                        <a:t>✅ 已实现</a:t>
                       </a:r>
                     </a:p>
                   </a:txBody>
@@ -6223,7 +6781,7 @@
                           </a:solidFill>
                           <a:latin typeface="Microsoft YaHei"/>
                         </a:rPr>
-                        <a:t>force-advance 监控告警</a:t>
+                        <a:t>harness L0-L4（hooks/playbook/regression）</a:t>
                       </a:r>
                     </a:p>
                   </a:txBody>
@@ -6234,21 +6792,21 @@
                   </a:tcPr>
                 </a:tc>
               </a:tr>
-              <a:tr h="381000">
-                <a:tc>
-                  <a:txBody>
-                    <a:bodyPr lIns="40000" rIns="40000" tIns="10000" bIns="10000" wrap="square"/>
-                    <a:lstStyle/>
-                    <a:p>
-                      <a:pPr algn="l"/>
-                      <a:r>
-                        <a:rPr sz="1200">
-                          <a:solidFill>
-                            <a:srgbClr val="202020"/>
-                          </a:solidFill>
-                          <a:latin typeface="Microsoft YaHei"/>
-                        </a:rPr>
-                        <a:t>P2</a:t>
+              <a:tr h="339634">
+                <a:tc>
+                  <a:txBody>
+                    <a:bodyPr lIns="40000" rIns="40000" tIns="10000" bIns="10000" wrap="square"/>
+                    <a:lstStyle/>
+                    <a:p>
+                      <a:pPr algn="l"/>
+                      <a:r>
+                        <a:rPr sz="1200">
+                          <a:solidFill>
+                            <a:srgbClr val="202020"/>
+                          </a:solidFill>
+                          <a:latin typeface="Microsoft YaHei"/>
+                        </a:rPr>
+                        <a:t>✅ 已实现</a:t>
                       </a:r>
                     </a:p>
                   </a:txBody>
@@ -6271,7 +6829,7 @@
                           </a:solidFill>
                           <a:latin typeface="Microsoft YaHei"/>
                         </a:rPr>
-                        <a:t>弱网回归测试</a:t>
+                        <a:t>tdd-gate CI 硬关（PR-H2）</a:t>
                       </a:r>
                     </a:p>
                   </a:txBody>
@@ -6282,21 +6840,21 @@
                   </a:tcPr>
                 </a:tc>
               </a:tr>
-              <a:tr h="381000">
-                <a:tc>
-                  <a:txBody>
-                    <a:bodyPr lIns="40000" rIns="40000" tIns="10000" bIns="10000" wrap="square"/>
-                    <a:lstStyle/>
-                    <a:p>
-                      <a:pPr algn="l"/>
-                      <a:r>
-                        <a:rPr sz="1200">
-                          <a:solidFill>
-                            <a:srgbClr val="202020"/>
-                          </a:solidFill>
-                          <a:latin typeface="Microsoft YaHei"/>
-                        </a:rPr>
-                        <a:t>P2</a:t>
+              <a:tr h="339634">
+                <a:tc>
+                  <a:txBody>
+                    <a:bodyPr lIns="40000" rIns="40000" tIns="10000" bIns="10000" wrap="square"/>
+                    <a:lstStyle/>
+                    <a:p>
+                      <a:pPr algn="l"/>
+                      <a:r>
+                        <a:rPr sz="1200">
+                          <a:solidFill>
+                            <a:srgbClr val="202020"/>
+                          </a:solidFill>
+                          <a:latin typeface="Microsoft YaHei"/>
+                        </a:rPr>
+                        <a:t>✅ 已实现</a:t>
                       </a:r>
                     </a:p>
                   </a:txBody>
@@ -6319,13 +6877,61 @@
                           </a:solidFill>
                           <a:latin typeface="Microsoft YaHei"/>
                         </a:rPr>
-                        <a:t>协议版本号兼容检查</a:t>
+                        <a:t>pr-reviewer subagent（PR-H5）</a:t>
                       </a:r>
                     </a:p>
                   </a:txBody>
                   <a:tcPr>
                     <a:solidFill>
                       <a:srgbClr val="FFFFFF"/>
+                    </a:solidFill>
+                  </a:tcPr>
+                </a:tc>
+              </a:tr>
+              <a:tr h="339636">
+                <a:tc>
+                  <a:txBody>
+                    <a:bodyPr lIns="40000" rIns="40000" tIns="10000" bIns="10000" wrap="square"/>
+                    <a:lstStyle/>
+                    <a:p>
+                      <a:pPr algn="l"/>
+                      <a:r>
+                        <a:rPr sz="1200">
+                          <a:solidFill>
+                            <a:srgbClr val="202020"/>
+                          </a:solidFill>
+                          <a:latin typeface="Microsoft YaHei"/>
+                        </a:rPr>
+                        <a:t>⚪ 待规划</a:t>
+                      </a:r>
+                    </a:p>
+                  </a:txBody>
+                  <a:tcPr>
+                    <a:solidFill>
+                      <a:srgbClr val="F0F4FF"/>
+                    </a:solidFill>
+                  </a:tcPr>
+                </a:tc>
+                <a:tc>
+                  <a:txBody>
+                    <a:bodyPr lIns="40000" rIns="40000" tIns="10000" bIns="10000" wrap="square"/>
+                    <a:lstStyle/>
+                    <a:p>
+                      <a:pPr algn="l"/>
+                      <a:r>
+                        <a:rPr sz="1200">
+                          <a:solidFill>
+                            <a:srgbClr val="202020"/>
+                          </a:solidFill>
+                          <a:latin typeface="Microsoft YaHei"/>
+                        </a:rPr>
+                        <a:t>force-advance 监控告警 / 弱网 e2e</a:t>
+                      </a:r>
+                    </a:p>
+                  </a:txBody>
+                  <a:tcPr>
+                    <a:solidFill>
+                      <a:srgbClr val="F0F4FF"/>
                     </a:solidFill>
                   </a:tcPr>
                 </a:tc>
@@ -6336,14 +6942,14 @@
       </p:graphicFrame>
       <p:sp>
         <p:nvSpPr>
-          <p:cNvPr id="11" name="Rounded Rectangle 10"/>
+          <p:cNvPr id="13" name="Rounded Rectangle 12"/>
           <p:cNvSpPr/>
           <p:nvPr/>
         </p:nvSpPr>
         <p:spPr>
           <a:xfrm>
-            <a:off x="457200" y="3840480"/>
-            <a:ext cx="11338560" cy="2286000"/>
+            <a:off x="457200" y="4023360"/>
+            <a:ext cx="11338560" cy="2103120"/>
           </a:xfrm>
           <a:prstGeom prst="roundRect">
             <a:avLst/>
@@ -6381,13 +6987,13 @@
       </p:sp>
       <p:sp>
         <p:nvSpPr>
-          <p:cNvPr id="12" name="TextBox 11"/>
+          <p:cNvPr id="14" name="TextBox 13"/>
           <p:cNvSpPr txBox="1"/>
           <p:nvPr/>
         </p:nvSpPr>
         <p:spPr>
           <a:xfrm>
-            <a:off x="731520" y="4023360"/>
+            <a:off x="731520" y="4160520"/>
             <a:ext cx="10972800" cy="457200"/>
           </a:xfrm>
           <a:prstGeom prst="rect">
@@ -6409,20 +7015,20 @@
                 </a:solidFill>
                 <a:latin typeface="Microsoft YaHei"/>
               </a:rPr>
-              <a:t>🏆 本次交付成果</a:t>
-            </a:r>
-          </a:p>
-        </p:txBody>
-      </p:sp>
-      <p:sp>
-        <p:nvSpPr>
-          <p:cNvPr id="13" name="TextBox 12"/>
+              <a:t>🏆 全程交付成果</a:t>
+            </a:r>
+          </a:p>
+        </p:txBody>
+      </p:sp>
+      <p:sp>
+        <p:nvSpPr>
+          <p:cNvPr id="15" name="TextBox 14"/>
           <p:cNvSpPr txBox="1"/>
           <p:nvPr/>
         </p:nvSpPr>
         <p:spPr>
           <a:xfrm>
-            <a:off x="731520" y="4526280"/>
+            <a:off x="731520" y="4617720"/>
             <a:ext cx="10972800" cy="365760"/>
           </a:xfrm>
           <a:prstGeom prst="rect">
@@ -6444,20 +7050,20 @@
                 </a:solidFill>
                 <a:latin typeface="Microsoft YaHei"/>
               </a:rPr>
-              <a:t>·  全程 33 PR / 123 commit  ·  修复约 67 个问题  ·  本次深度调试 8 commit / 重写 700 行</a:t>
-            </a:r>
-          </a:p>
-        </p:txBody>
-      </p:sp>
-      <p:sp>
-        <p:nvSpPr>
-          <p:cNvPr id="14" name="TextBox 13"/>
+              <a:t>·  全程 54 PR / ~170 commit  ·  约 4 个月  ·  发现 ~128 个问题</a:t>
+            </a:r>
+          </a:p>
+        </p:txBody>
+      </p:sp>
+      <p:sp>
+        <p:nvSpPr>
+          <p:cNvPr id="16" name="TextBox 15"/>
           <p:cNvSpPr txBox="1"/>
           <p:nvPr/>
         </p:nvSpPr>
         <p:spPr>
           <a:xfrm>
-            <a:off x="731520" y="4937760"/>
+            <a:off x="731520" y="4983480"/>
             <a:ext cx="10972800" cy="365760"/>
           </a:xfrm>
           <a:prstGeom prst="rect">
@@ -6473,27 +7079,27 @@
           <a:p>
             <a:pPr algn="l"/>
             <a:r>
-              <a:rPr sz="1200" b="1">
-                <a:solidFill>
-                  <a:srgbClr val="2E7D32"/>
+              <a:rPr sz="1200" b="0">
+                <a:solidFill>
+                  <a:srgbClr val="202020"/>
                 </a:solidFill>
                 <a:latin typeface="Microsoft YaHei"/>
               </a:rPr>
-              <a:t>·  游戏永不卡死 ✓  ·  重连无缝恢复 ✓  ·  两端结算一致 ✓</a:t>
-            </a:r>
-          </a:p>
-        </p:txBody>
-      </p:sp>
-      <p:sp>
-        <p:nvSpPr>
-          <p:cNvPr id="15" name="TextBox 14"/>
+              <a:t>·  Android + Web 双端  ·  KMP 共享模块（编译期保证一致）  ·  Caddy 自托管自动部署</a:t>
+            </a:r>
+          </a:p>
+        </p:txBody>
+      </p:sp>
+      <p:sp>
+        <p:nvSpPr>
+          <p:cNvPr id="17" name="TextBox 16"/>
           <p:cNvSpPr txBox="1"/>
           <p:nvPr/>
         </p:nvSpPr>
         <p:spPr>
           <a:xfrm>
-            <a:off x="731520" y="5440680"/>
-            <a:ext cx="10972800" cy="457200"/>
+            <a:off x="731520" y="5349240"/>
+            <a:ext cx="10972800" cy="365760"/>
           </a:xfrm>
           <a:prstGeom prst="rect">
             <a:avLst/>
@@ -6508,27 +7114,27 @@
           <a:p>
             <a:pPr algn="l"/>
             <a:r>
-              <a:rPr sz="1400" b="1">
-                <a:solidFill>
-                  <a:srgbClr val="1A73E8"/>
+              <a:rPr sz="1200" b="1">
+                <a:solidFill>
+                  <a:srgbClr val="2E7D32"/>
                 </a:solidFill>
                 <a:latin typeface="Microsoft YaHei"/>
               </a:rPr>
-              <a:t>💡 核心结论：AI 静态全量审查 + 人工动态真机验证 = 互补提速 10 倍</a:t>
-            </a:r>
-          </a:p>
-        </p:txBody>
-      </p:sp>
-      <p:sp>
-        <p:nvSpPr>
-          <p:cNvPr id="16" name="TextBox 15"/>
+              <a:t>·  游戏永不卡死 ✓  ·  重连无缝恢复 ✓  ·  两端结算一致 ✓  ·  PROTOCOL_VERSION = 3 ✓</a:t>
+            </a:r>
+          </a:p>
+        </p:txBody>
+      </p:sp>
+      <p:sp>
+        <p:nvSpPr>
+          <p:cNvPr id="18" name="TextBox 17"/>
           <p:cNvSpPr txBox="1"/>
           <p:nvPr/>
         </p:nvSpPr>
         <p:spPr>
           <a:xfrm>
-            <a:off x="457200" y="6263640"/>
-            <a:ext cx="11247120" cy="365760"/>
+            <a:off x="731520" y="5760720"/>
+            <a:ext cx="10972800" cy="365760"/>
           </a:xfrm>
           <a:prstGeom prst="rect">
             <a:avLst/>
@@ -6541,29 +7147,29 @@
           </a:bodyPr>
           <a:lstStyle/>
           <a:p>
-            <a:pPr algn="ctr"/>
+            <a:pPr algn="l"/>
             <a:r>
               <a:rPr sz="1400" b="1">
                 <a:solidFill>
-                  <a:srgbClr val="606060"/>
+                  <a:srgbClr val="1A73E8"/>
                 </a:solidFill>
                 <a:latin typeface="Microsoft YaHei"/>
               </a:rPr>
-              <a:t>谢谢  ·  问题 &amp; 讨论</a:t>
-            </a:r>
-          </a:p>
-        </p:txBody>
-      </p:sp>
-      <p:sp>
-        <p:nvSpPr>
-          <p:cNvPr id="17" name="TextBox 16"/>
+              <a:t>💡 核心结论：4 视角覆盖率 + harness 跨会话沉淀 = 教训不浪费</a:t>
+            </a:r>
+          </a:p>
+        </p:txBody>
+      </p:sp>
+      <p:sp>
+        <p:nvSpPr>
+          <p:cNvPr id="19" name="TextBox 18"/>
           <p:cNvSpPr txBox="1"/>
           <p:nvPr/>
         </p:nvSpPr>
         <p:spPr>
           <a:xfrm>
-            <a:off x="10789920" y="6446520"/>
-            <a:ext cx="1188720" cy="274320"/>
+            <a:off x="457200" y="6263640"/>
+            <a:ext cx="11247120" cy="365760"/>
           </a:xfrm>
           <a:prstGeom prst="rect">
             <a:avLst/>
@@ -6576,6 +7182,41 @@
           </a:bodyPr>
           <a:lstStyle/>
           <a:p>
+            <a:pPr algn="ctr"/>
+            <a:r>
+              <a:rPr sz="1400" b="1">
+                <a:solidFill>
+                  <a:srgbClr val="606060"/>
+                </a:solidFill>
+                <a:latin typeface="Microsoft YaHei"/>
+              </a:rPr>
+              <a:t>谢谢  ·  问题 &amp; 讨论</a:t>
+            </a:r>
+          </a:p>
+        </p:txBody>
+      </p:sp>
+      <p:sp>
+        <p:nvSpPr>
+          <p:cNvPr id="20" name="TextBox 19"/>
+          <p:cNvSpPr txBox="1"/>
+          <p:nvPr/>
+        </p:nvSpPr>
+        <p:spPr>
+          <a:xfrm>
+            <a:off x="10789920" y="6446520"/>
+            <a:ext cx="1188720" cy="274320"/>
+          </a:xfrm>
+          <a:prstGeom prst="rect">
+            <a:avLst/>
+          </a:prstGeom>
+          <a:noFill/>
+        </p:spPr>
+        <p:txBody>
+          <a:bodyPr wrap="square" lIns="0" rIns="0" tIns="0" bIns="0">
+            <a:spAutoFit/>
+          </a:bodyPr>
+          <a:lstStyle/>
+          <a:p>
             <a:pPr algn="r"/>
             <a:r>
               <a:rPr sz="1000" b="0">
@@ -6584,7 +7225,2418 @@
                 </a:solidFill>
                 <a:latin typeface="Microsoft YaHei"/>
               </a:rPr>
-              <a:t>13 / 13</a:t>
+              <a:t>13 / 16</a:t>
+            </a:r>
+          </a:p>
+        </p:txBody>
+      </p:sp>
+    </p:spTree>
+  </p:cSld>
+  <p:clrMapOvr>
+    <a:masterClrMapping/>
+  </p:clrMapOvr>
+</p:sld>
+</file>
+
+<file path=ppt/slides/slide14.xml><?xml version="1.0" encoding="utf-8"?>
+<p:sld xmlns:a="http://schemas.openxmlformats.org/drawingml/2006/main" xmlns:p="http://schemas.openxmlformats.org/presentationml/2006/main" xmlns:r="http://schemas.openxmlformats.org/officeDocument/2006/relationships">
+  <p:cSld>
+    <p:spTree>
+      <p:nvGrpSpPr>
+        <p:cNvPr id="1" name=""/>
+        <p:cNvGrpSpPr/>
+        <p:nvPr/>
+      </p:nvGrpSpPr>
+      <p:grpSpPr/>
+      <p:sp>
+        <p:nvSpPr>
+          <p:cNvPr id="2" name="TextBox 1"/>
+          <p:cNvSpPr txBox="1"/>
+          <p:nvPr/>
+        </p:nvSpPr>
+        <p:spPr>
+          <a:xfrm>
+            <a:off x="457200" y="274320"/>
+            <a:ext cx="11247120" cy="457200"/>
+          </a:xfrm>
+          <a:prstGeom prst="rect">
+            <a:avLst/>
+          </a:prstGeom>
+          <a:noFill/>
+        </p:spPr>
+        <p:txBody>
+          <a:bodyPr wrap="square" lIns="0" rIns="0" tIns="0" bIns="0">
+            <a:spAutoFit/>
+          </a:bodyPr>
+          <a:lstStyle/>
+          <a:p>
+            <a:pPr algn="l"/>
+            <a:r>
+              <a:rPr sz="2400" b="1">
+                <a:solidFill>
+                  <a:srgbClr val="1A73E8"/>
+                </a:solidFill>
+                <a:latin typeface="Microsoft YaHei"/>
+              </a:rPr>
+              <a:t>九、harness 跨会话经验（1/3）</a:t>
+            </a:r>
+          </a:p>
+        </p:txBody>
+      </p:sp>
+      <p:sp>
+        <p:nvSpPr>
+          <p:cNvPr id="3" name="Rectangle 2"/>
+          <p:cNvSpPr/>
+          <p:nvPr/>
+        </p:nvSpPr>
+        <p:spPr>
+          <a:xfrm>
+            <a:off x="457200" y="777240"/>
+            <a:ext cx="11247120" cy="36576"/>
+          </a:xfrm>
+          <a:prstGeom prst="rect">
+            <a:avLst/>
+          </a:prstGeom>
+          <a:solidFill>
+            <a:srgbClr val="1A73E8"/>
+          </a:solidFill>
+          <a:ln>
+            <a:noFill/>
+          </a:ln>
+        </p:spPr>
+        <p:style>
+          <a:lnRef idx="1">
+            <a:schemeClr val="accent1"/>
+          </a:lnRef>
+          <a:fillRef idx="3">
+            <a:schemeClr val="accent1"/>
+          </a:fillRef>
+          <a:effectRef idx="2">
+            <a:schemeClr val="accent1"/>
+          </a:effectRef>
+          <a:fontRef idx="minor">
+            <a:schemeClr val="lt1"/>
+          </a:fontRef>
+        </p:style>
+        <p:txBody>
+          <a:bodyPr rtlCol="0" anchor="ctr"/>
+          <a:lstStyle/>
+          <a:p>
+            <a:pPr algn="ctr"/>
+          </a:p>
+        </p:txBody>
+      </p:sp>
+      <p:sp>
+        <p:nvSpPr>
+          <p:cNvPr id="4" name="TextBox 3"/>
+          <p:cNvSpPr txBox="1"/>
+          <p:nvPr/>
+        </p:nvSpPr>
+        <p:spPr>
+          <a:xfrm>
+            <a:off x="457200" y="960120"/>
+            <a:ext cx="5669280" cy="365760"/>
+          </a:xfrm>
+          <a:prstGeom prst="rect">
+            <a:avLst/>
+          </a:prstGeom>
+          <a:noFill/>
+        </p:spPr>
+        <p:txBody>
+          <a:bodyPr wrap="square" lIns="0" rIns="0" tIns="0" bIns="0">
+            <a:spAutoFit/>
+          </a:bodyPr>
+          <a:lstStyle/>
+          <a:p>
+            <a:pPr algn="l"/>
+            <a:r>
+              <a:rPr sz="1600" b="1">
+                <a:solidFill>
+                  <a:srgbClr val="1A73E8"/>
+                </a:solidFill>
+                <a:latin typeface="Microsoft YaHei"/>
+              </a:rPr>
+              <a:t>📦 大特性的 Phase 分段提交</a:t>
+            </a:r>
+          </a:p>
+        </p:txBody>
+      </p:sp>
+      <p:graphicFrame>
+        <p:nvGraphicFramePr>
+          <p:cNvPr id="5" name="Table 4"/>
+          <p:cNvGraphicFramePr>
+            <a:graphicFrameLocks noGrp="1"/>
+          </p:cNvGraphicFramePr>
+          <p:nvPr/>
+        </p:nvGraphicFramePr>
+        <p:xfrm>
+          <a:off x="457200" y="1371600"/>
+          <a:ext cx="5669280" cy="1828800"/>
+        </p:xfrm>
+        <a:graphic>
+          <a:graphicData uri="http://schemas.openxmlformats.org/drawingml/2006/table">
+            <a:tbl>
+              <a:tblPr firstRow="1" bandRow="1">
+                <a:tableStyleId>{5C22544A-7EE6-4342-B048-85BDC9FD1C3A}</a:tableStyleId>
+              </a:tblPr>
+              <a:tblGrid>
+                <a:gridCol w="914400"/>
+                <a:gridCol w="2377440"/>
+                <a:gridCol w="2377440"/>
+              </a:tblGrid>
+              <a:tr h="457200">
+                <a:tc>
+                  <a:txBody>
+                    <a:bodyPr lIns="40000" rIns="40000" tIns="15000" bIns="15000"/>
+                    <a:lstStyle/>
+                    <a:p>
+                      <a:pPr algn="ctr"/>
+                      <a:r>
+                        <a:rPr sz="1200" b="1">
+                          <a:solidFill>
+                            <a:srgbClr val="FFFFFF"/>
+                          </a:solidFill>
+                          <a:latin typeface="Microsoft YaHei"/>
+                        </a:rPr>
+                        <a:t>Phase</a:t>
+                      </a:r>
+                    </a:p>
+                  </a:txBody>
+                  <a:tcPr>
+                    <a:solidFill>
+                      <a:srgbClr val="1A73E8"/>
+                    </a:solidFill>
+                  </a:tcPr>
+                </a:tc>
+                <a:tc>
+                  <a:txBody>
+                    <a:bodyPr lIns="40000" rIns="40000" tIns="15000" bIns="15000"/>
+                    <a:lstStyle/>
+                    <a:p>
+                      <a:pPr algn="ctr"/>
+                      <a:r>
+                        <a:rPr sz="1200" b="1">
+                          <a:solidFill>
+                            <a:srgbClr val="FFFFFF"/>
+                          </a:solidFill>
+                          <a:latin typeface="Microsoft YaHei"/>
+                        </a:rPr>
+                        <a:t>内容</a:t>
+                      </a:r>
+                    </a:p>
+                  </a:txBody>
+                  <a:tcPr>
+                    <a:solidFill>
+                      <a:srgbClr val="1A73E8"/>
+                    </a:solidFill>
+                  </a:tcPr>
+                </a:tc>
+                <a:tc>
+                  <a:txBody>
+                    <a:bodyPr lIns="40000" rIns="40000" tIns="15000" bIns="15000"/>
+                    <a:lstStyle/>
+                    <a:p>
+                      <a:pPr algn="ctr"/>
+                      <a:r>
+                        <a:rPr sz="1200" b="1">
+                          <a:solidFill>
+                            <a:srgbClr val="FFFFFF"/>
+                          </a:solidFill>
+                          <a:latin typeface="Microsoft YaHei"/>
+                        </a:rPr>
+                        <a:t>价值</a:t>
+                      </a:r>
+                    </a:p>
+                  </a:txBody>
+                  <a:tcPr>
+                    <a:solidFill>
+                      <a:srgbClr val="1A73E8"/>
+                    </a:solidFill>
+                  </a:tcPr>
+                </a:tc>
+              </a:tr>
+              <a:tr h="457200">
+                <a:tc>
+                  <a:txBody>
+                    <a:bodyPr lIns="40000" rIns="40000" tIns="10000" bIns="10000" wrap="square"/>
+                    <a:lstStyle/>
+                    <a:p>
+                      <a:pPr algn="l"/>
+                      <a:r>
+                        <a:rPr sz="1200">
+                          <a:solidFill>
+                            <a:srgbClr val="202020"/>
+                          </a:solidFill>
+                          <a:latin typeface="Microsoft YaHei"/>
+                        </a:rPr>
+                        <a:t>Phase 1</a:t>
+                      </a:r>
+                    </a:p>
+                  </a:txBody>
+                  <a:tcPr>
+                    <a:solidFill>
+                      <a:srgbClr val="FFFFFF"/>
+                    </a:solidFill>
+                  </a:tcPr>
+                </a:tc>
+                <a:tc>
+                  <a:txBody>
+                    <a:bodyPr lIns="40000" rIns="40000" tIns="10000" bIns="10000" wrap="square"/>
+                    <a:lstStyle/>
+                    <a:p>
+                      <a:pPr algn="l"/>
+                      <a:r>
+                        <a:rPr sz="1200">
+                          <a:solidFill>
+                            <a:srgbClr val="202020"/>
+                          </a:solidFill>
+                          <a:latin typeface="Microsoft YaHei"/>
+                        </a:rPr>
+                        <a:t>协议 + 服务端 + 单测</a:t>
+                      </a:r>
+                    </a:p>
+                  </a:txBody>
+                  <a:tcPr>
+                    <a:solidFill>
+                      <a:srgbClr val="FFFFFF"/>
+                    </a:solidFill>
+                  </a:tcPr>
+                </a:tc>
+                <a:tc>
+                  <a:txBody>
+                    <a:bodyPr lIns="40000" rIns="40000" tIns="10000" bIns="10000" wrap="square"/>
+                    <a:lstStyle/>
+                    <a:p>
+                      <a:pPr algn="l"/>
+                      <a:r>
+                        <a:rPr sz="1200">
+                          <a:solidFill>
+                            <a:srgbClr val="202020"/>
+                          </a:solidFill>
+                          <a:latin typeface="Microsoft YaHei"/>
+                        </a:rPr>
+                        <a:t>底层稳了再动客户端</a:t>
+                      </a:r>
+                    </a:p>
+                  </a:txBody>
+                  <a:tcPr>
+                    <a:solidFill>
+                      <a:srgbClr val="FFFFFF"/>
+                    </a:solidFill>
+                  </a:tcPr>
+                </a:tc>
+              </a:tr>
+              <a:tr h="457200">
+                <a:tc>
+                  <a:txBody>
+                    <a:bodyPr lIns="40000" rIns="40000" tIns="10000" bIns="10000" wrap="square"/>
+                    <a:lstStyle/>
+                    <a:p>
+                      <a:pPr algn="l"/>
+                      <a:r>
+                        <a:rPr sz="1200">
+                          <a:solidFill>
+                            <a:srgbClr val="202020"/>
+                          </a:solidFill>
+                          <a:latin typeface="Microsoft YaHei"/>
+                        </a:rPr>
+                        <a:t>Phase 2</a:t>
+                      </a:r>
+                    </a:p>
+                  </a:txBody>
+                  <a:tcPr>
+                    <a:solidFill>
+                      <a:srgbClr val="F0F4FF"/>
+                    </a:solidFill>
+                  </a:tcPr>
+                </a:tc>
+                <a:tc>
+                  <a:txBody>
+                    <a:bodyPr lIns="40000" rIns="40000" tIns="10000" bIns="10000" wrap="square"/>
+                    <a:lstStyle/>
+                    <a:p>
+                      <a:pPr algn="l"/>
+                      <a:r>
+                        <a:rPr sz="1200">
+                          <a:solidFill>
+                            <a:srgbClr val="202020"/>
+                          </a:solidFill>
+                          <a:latin typeface="Microsoft YaHei"/>
+                        </a:rPr>
+                        <a:t>主客户端 (Android)</a:t>
+                      </a:r>
+                    </a:p>
+                  </a:txBody>
+                  <a:tcPr>
+                    <a:solidFill>
+                      <a:srgbClr val="F0F4FF"/>
+                    </a:solidFill>
+                  </a:tcPr>
+                </a:tc>
+                <a:tc>
+                  <a:txBody>
+                    <a:bodyPr lIns="40000" rIns="40000" tIns="10000" bIns="10000" wrap="square"/>
+                    <a:lstStyle/>
+                    <a:p>
+                      <a:pPr algn="l"/>
+                      <a:r>
+                        <a:rPr sz="1200">
+                          <a:solidFill>
+                            <a:srgbClr val="202020"/>
+                          </a:solidFill>
+                          <a:latin typeface="Microsoft YaHei"/>
+                        </a:rPr>
+                        <a:t>一份吃通验证 server</a:t>
+                      </a:r>
+                    </a:p>
+                  </a:txBody>
+                  <a:tcPr>
+                    <a:solidFill>
+                      <a:srgbClr val="F0F4FF"/>
+                    </a:solidFill>
+                  </a:tcPr>
+                </a:tc>
+              </a:tr>
+              <a:tr h="457200">
+                <a:tc>
+                  <a:txBody>
+                    <a:bodyPr lIns="40000" rIns="40000" tIns="10000" bIns="10000" wrap="square"/>
+                    <a:lstStyle/>
+                    <a:p>
+                      <a:pPr algn="l"/>
+                      <a:r>
+                        <a:rPr sz="1200">
+                          <a:solidFill>
+                            <a:srgbClr val="202020"/>
+                          </a:solidFill>
+                          <a:latin typeface="Microsoft YaHei"/>
+                        </a:rPr>
+                        <a:t>Phase 3</a:t>
+                      </a:r>
+                    </a:p>
+                  </a:txBody>
+                  <a:tcPr>
+                    <a:solidFill>
+                      <a:srgbClr val="FFFFFF"/>
+                    </a:solidFill>
+                  </a:tcPr>
+                </a:tc>
+                <a:tc>
+                  <a:txBody>
+                    <a:bodyPr lIns="40000" rIns="40000" tIns="10000" bIns="10000" wrap="square"/>
+                    <a:lstStyle/>
+                    <a:p>
+                      <a:pPr algn="l"/>
+                      <a:r>
+                        <a:rPr sz="1200">
+                          <a:solidFill>
+                            <a:srgbClr val="202020"/>
+                          </a:solidFill>
+                          <a:latin typeface="Microsoft YaHei"/>
+                        </a:rPr>
+                        <a:t>次客户端 (Web) + 跨端测</a:t>
+                      </a:r>
+                    </a:p>
+                  </a:txBody>
+                  <a:tcPr>
+                    <a:solidFill>
+                      <a:srgbClr val="FFFFFF"/>
+                    </a:solidFill>
+                  </a:tcPr>
+                </a:tc>
+                <a:tc>
+                  <a:txBody>
+                    <a:bodyPr lIns="40000" rIns="40000" tIns="10000" bIns="10000" wrap="square"/>
+                    <a:lstStyle/>
+                    <a:p>
+                      <a:pPr algn="l"/>
+                      <a:r>
+                        <a:rPr sz="1200">
+                          <a:solidFill>
+                            <a:srgbClr val="202020"/>
+                          </a:solidFill>
+                          <a:latin typeface="Microsoft YaHei"/>
+                        </a:rPr>
+                        <a:t>最后补齐</a:t>
+                      </a:r>
+                    </a:p>
+                  </a:txBody>
+                  <a:tcPr>
+                    <a:solidFill>
+                      <a:srgbClr val="FFFFFF"/>
+                    </a:solidFill>
+                  </a:tcPr>
+                </a:tc>
+              </a:tr>
+            </a:tbl>
+          </a:graphicData>
+        </a:graphic>
+      </p:graphicFrame>
+      <p:sp>
+        <p:nvSpPr>
+          <p:cNvPr id="6" name="TextBox 5"/>
+          <p:cNvSpPr txBox="1"/>
+          <p:nvPr/>
+        </p:nvSpPr>
+        <p:spPr>
+          <a:xfrm>
+            <a:off x="457200" y="3337560"/>
+            <a:ext cx="5669280" cy="1097280"/>
+          </a:xfrm>
+          <a:prstGeom prst="rect">
+            <a:avLst/>
+          </a:prstGeom>
+          <a:noFill/>
+        </p:spPr>
+        <p:txBody>
+          <a:bodyPr wrap="square" lIns="0" rIns="0" tIns="0" bIns="0">
+            <a:spAutoFit/>
+          </a:bodyPr>
+          <a:lstStyle/>
+          <a:p>
+            <a:pPr algn="l"/>
+            <a:r>
+              <a:rPr sz="1200" b="0">
+                <a:solidFill>
+                  <a:srgbClr val="202020"/>
+                </a:solidFill>
+                <a:latin typeface="Microsoft YaHei"/>
+              </a:rPr>
+              <a:t>适用：跨协议 + 服务端 + 双客户端 &gt; 200 行 / &gt; 5 文件
+每 Phase 内还按编译单元切（Android / Web 拆 commit）
+PR #53 G34-G38（5 特性, ~700 行）3 phase 实战验证</a:t>
+            </a:r>
+          </a:p>
+        </p:txBody>
+      </p:sp>
+      <p:sp>
+        <p:nvSpPr>
+          <p:cNvPr id="7" name="TextBox 6"/>
+          <p:cNvSpPr txBox="1"/>
+          <p:nvPr/>
+        </p:nvSpPr>
+        <p:spPr>
+          <a:xfrm>
+            <a:off x="6400800" y="960120"/>
+            <a:ext cx="5486400" cy="365760"/>
+          </a:xfrm>
+          <a:prstGeom prst="rect">
+            <a:avLst/>
+          </a:prstGeom>
+          <a:noFill/>
+        </p:spPr>
+        <p:txBody>
+          <a:bodyPr wrap="square" lIns="0" rIns="0" tIns="0" bIns="0">
+            <a:spAutoFit/>
+          </a:bodyPr>
+          <a:lstStyle/>
+          <a:p>
+            <a:pPr algn="l"/>
+            <a:r>
+              <a:rPr sz="1600" b="1">
+                <a:solidFill>
+                  <a:srgbClr val="E53935"/>
+                </a:solidFill>
+                <a:latin typeface="Microsoft YaHei"/>
+              </a:rPr>
+              <a:t>⚠️  wasmJs 编译器隐藏陷阱</a:t>
+            </a:r>
+          </a:p>
+        </p:txBody>
+      </p:sp>
+      <p:sp>
+        <p:nvSpPr>
+          <p:cNvPr id="8" name="Rectangle 7"/>
+          <p:cNvSpPr/>
+          <p:nvPr/>
+        </p:nvSpPr>
+        <p:spPr>
+          <a:xfrm>
+            <a:off x="6400800" y="1371600"/>
+            <a:ext cx="5486400" cy="1280160"/>
+          </a:xfrm>
+          <a:prstGeom prst="rect">
+            <a:avLst/>
+          </a:prstGeom>
+          <a:solidFill>
+            <a:srgbClr val="F4F4F4"/>
+          </a:solidFill>
+          <a:ln>
+            <a:solidFill>
+              <a:srgbClr val="D0D0D0"/>
+            </a:solidFill>
+          </a:ln>
+        </p:spPr>
+        <p:style>
+          <a:lnRef idx="1">
+            <a:schemeClr val="accent1"/>
+          </a:lnRef>
+          <a:fillRef idx="3">
+            <a:schemeClr val="accent1"/>
+          </a:fillRef>
+          <a:effectRef idx="2">
+            <a:schemeClr val="accent1"/>
+          </a:effectRef>
+          <a:fontRef idx="minor">
+            <a:schemeClr val="lt1"/>
+          </a:fontRef>
+        </p:style>
+        <p:txBody>
+          <a:bodyPr rtlCol="0" anchor="ctr" wrap="square" lIns="120000" rIns="120000" tIns="80000" bIns="80000"/>
+          <a:lstStyle/>
+          <a:p>
+            <a:pPr algn="ctr"/>
+            <a:r>
+              <a:rPr sz="1200">
+                <a:solidFill>
+                  <a:srgbClr val="202020"/>
+                </a:solidFill>
+                <a:latin typeface="Consolas"/>
+              </a:rPr>
+              <a:t>Backend Internal error:</a:t>
+            </a:r>
+          </a:p>
+          <a:p>
+            <a:r>
+              <a:rPr sz="1200">
+                <a:solidFill>
+                  <a:srgbClr val="202020"/>
+                </a:solidFill>
+                <a:latin typeface="Consolas"/>
+              </a:rPr>
+              <a:t>  Exception during psi2ir</a:t>
+            </a:r>
+          </a:p>
+          <a:p>
+            <a:r>
+              <a:rPr sz="1200">
+                <a:solidFill>
+                  <a:srgbClr val="202020"/>
+                </a:solidFill>
+                <a:latin typeface="Consolas"/>
+              </a:rPr>
+              <a:t>Caused by: NullPointerException</a:t>
+            </a:r>
+          </a:p>
+        </p:txBody>
+      </p:sp>
+      <p:sp>
+        <p:nvSpPr>
+          <p:cNvPr id="9" name="TextBox 8"/>
+          <p:cNvSpPr txBox="1"/>
+          <p:nvPr/>
+        </p:nvSpPr>
+        <p:spPr>
+          <a:xfrm>
+            <a:off x="6400800" y="2788920"/>
+            <a:ext cx="5486400" cy="2103120"/>
+          </a:xfrm>
+          <a:prstGeom prst="rect">
+            <a:avLst/>
+          </a:prstGeom>
+          <a:noFill/>
+        </p:spPr>
+        <p:txBody>
+          <a:bodyPr wrap="square" lIns="0" rIns="0" tIns="0" bIns="0">
+            <a:spAutoFit/>
+          </a:bodyPr>
+          <a:lstStyle/>
+          <a:p>
+            <a:pPr algn="l"/>
+            <a:r>
+              <a:rPr sz="1200" b="0">
+                <a:solidFill>
+                  <a:srgbClr val="202020"/>
+                </a:solidFill>
+                <a:latin typeface="Microsoft YaHei"/>
+              </a:rPr>
+              <a:t>根因：可空 lambda + Compose smart-cast；
+vm::method KFunction → (() -&gt; Unit)? 自动转换
+修法：
+• 可空 lambda → local val 固化非空
+• 函数引用 → 显式 { vm.foo() } lambda
+沙箱拉不到 wasmJs 编译器；写完 Web UI 必须 push CI</a:t>
+            </a:r>
+          </a:p>
+        </p:txBody>
+      </p:sp>
+      <p:sp>
+        <p:nvSpPr>
+          <p:cNvPr id="10" name="Rounded Rectangle 9"/>
+          <p:cNvSpPr/>
+          <p:nvPr/>
+        </p:nvSpPr>
+        <p:spPr>
+          <a:xfrm>
+            <a:off x="457200" y="4572000"/>
+            <a:ext cx="11247120" cy="1554480"/>
+          </a:xfrm>
+          <a:prstGeom prst="roundRect">
+            <a:avLst/>
+          </a:prstGeom>
+          <a:solidFill>
+            <a:srgbClr val="F0F4FF"/>
+          </a:solidFill>
+          <a:ln>
+            <a:solidFill>
+              <a:srgbClr val="1A73E8"/>
+            </a:solidFill>
+          </a:ln>
+        </p:spPr>
+        <p:style>
+          <a:lnRef idx="1">
+            <a:schemeClr val="accent1"/>
+          </a:lnRef>
+          <a:fillRef idx="3">
+            <a:schemeClr val="accent1"/>
+          </a:fillRef>
+          <a:effectRef idx="2">
+            <a:schemeClr val="accent1"/>
+          </a:effectRef>
+          <a:fontRef idx="minor">
+            <a:schemeClr val="lt1"/>
+          </a:fontRef>
+        </p:style>
+        <p:txBody>
+          <a:bodyPr rtlCol="0" anchor="ctr"/>
+          <a:lstStyle/>
+          <a:p>
+            <a:pPr algn="ctr"/>
+          </a:p>
+        </p:txBody>
+      </p:sp>
+      <p:sp>
+        <p:nvSpPr>
+          <p:cNvPr id="11" name="TextBox 10"/>
+          <p:cNvSpPr txBox="1"/>
+          <p:nvPr/>
+        </p:nvSpPr>
+        <p:spPr>
+          <a:xfrm>
+            <a:off x="731520" y="4709160"/>
+            <a:ext cx="10972800" cy="365760"/>
+          </a:xfrm>
+          <a:prstGeom prst="rect">
+            <a:avLst/>
+          </a:prstGeom>
+          <a:noFill/>
+        </p:spPr>
+        <p:txBody>
+          <a:bodyPr wrap="square" lIns="0" rIns="0" tIns="0" bIns="0">
+            <a:spAutoFit/>
+          </a:bodyPr>
+          <a:lstStyle/>
+          <a:p>
+            <a:pPr algn="l"/>
+            <a:r>
+              <a:rPr sz="1400" b="1">
+                <a:solidFill>
+                  <a:srgbClr val="1A73E8"/>
+                </a:solidFill>
+                <a:latin typeface="Microsoft YaHei"/>
+              </a:rPr>
+              <a:t>💡 实战教训：</a:t>
+            </a:r>
+          </a:p>
+        </p:txBody>
+      </p:sp>
+      <p:sp>
+        <p:nvSpPr>
+          <p:cNvPr id="12" name="TextBox 11"/>
+          <p:cNvSpPr txBox="1"/>
+          <p:nvPr/>
+        </p:nvSpPr>
+        <p:spPr>
+          <a:xfrm>
+            <a:off x="731520" y="5029200"/>
+            <a:ext cx="10972800" cy="1097280"/>
+          </a:xfrm>
+          <a:prstGeom prst="rect">
+            <a:avLst/>
+          </a:prstGeom>
+          <a:noFill/>
+        </p:spPr>
+        <p:txBody>
+          <a:bodyPr wrap="square" lIns="0" rIns="0" tIns="0" bIns="0">
+            <a:spAutoFit/>
+          </a:bodyPr>
+          <a:lstStyle/>
+          <a:p>
+            <a:pPr algn="l"/>
+            <a:r>
+              <a:rPr sz="1200" b="0">
+                <a:solidFill>
+                  <a:srgbClr val="202020"/>
+                </a:solidFill>
+                <a:latin typeface="Microsoft YaHei"/>
+              </a:rPr>
+              <a:t>•  jvmTest 过 ≠ wasmJs 过 —— Web UI 改完必须跑 CI 才算
+•  Phase 内还要按编译单元切，平台特定编译错误更早暴露
+•  CI 红时先看 e: 开头的硬错误行，忽略 ~50 行 w: 警告噪音</a:t>
+            </a:r>
+          </a:p>
+        </p:txBody>
+      </p:sp>
+      <p:sp>
+        <p:nvSpPr>
+          <p:cNvPr id="13" name="TextBox 12"/>
+          <p:cNvSpPr txBox="1"/>
+          <p:nvPr/>
+        </p:nvSpPr>
+        <p:spPr>
+          <a:xfrm>
+            <a:off x="10789920" y="6446520"/>
+            <a:ext cx="1188720" cy="274320"/>
+          </a:xfrm>
+          <a:prstGeom prst="rect">
+            <a:avLst/>
+          </a:prstGeom>
+          <a:noFill/>
+        </p:spPr>
+        <p:txBody>
+          <a:bodyPr wrap="square" lIns="0" rIns="0" tIns="0" bIns="0">
+            <a:spAutoFit/>
+          </a:bodyPr>
+          <a:lstStyle/>
+          <a:p>
+            <a:pPr algn="r"/>
+            <a:r>
+              <a:rPr sz="1000" b="0">
+                <a:solidFill>
+                  <a:srgbClr val="606060"/>
+                </a:solidFill>
+                <a:latin typeface="Microsoft YaHei"/>
+              </a:rPr>
+              <a:t>14 / 16</a:t>
+            </a:r>
+          </a:p>
+        </p:txBody>
+      </p:sp>
+    </p:spTree>
+  </p:cSld>
+  <p:clrMapOvr>
+    <a:masterClrMapping/>
+  </p:clrMapOvr>
+</p:sld>
+</file>
+
+<file path=ppt/slides/slide15.xml><?xml version="1.0" encoding="utf-8"?>
+<p:sld xmlns:a="http://schemas.openxmlformats.org/drawingml/2006/main" xmlns:p="http://schemas.openxmlformats.org/presentationml/2006/main" xmlns:r="http://schemas.openxmlformats.org/officeDocument/2006/relationships">
+  <p:cSld>
+    <p:spTree>
+      <p:nvGrpSpPr>
+        <p:cNvPr id="1" name=""/>
+        <p:cNvGrpSpPr/>
+        <p:nvPr/>
+      </p:nvGrpSpPr>
+      <p:grpSpPr/>
+      <p:sp>
+        <p:nvSpPr>
+          <p:cNvPr id="2" name="TextBox 1"/>
+          <p:cNvSpPr txBox="1"/>
+          <p:nvPr/>
+        </p:nvSpPr>
+        <p:spPr>
+          <a:xfrm>
+            <a:off x="457200" y="274320"/>
+            <a:ext cx="11247120" cy="457200"/>
+          </a:xfrm>
+          <a:prstGeom prst="rect">
+            <a:avLst/>
+          </a:prstGeom>
+          <a:noFill/>
+        </p:spPr>
+        <p:txBody>
+          <a:bodyPr wrap="square" lIns="0" rIns="0" tIns="0" bIns="0">
+            <a:spAutoFit/>
+          </a:bodyPr>
+          <a:lstStyle/>
+          <a:p>
+            <a:pPr algn="l"/>
+            <a:r>
+              <a:rPr sz="2400" b="1">
+                <a:solidFill>
+                  <a:srgbClr val="1A73E8"/>
+                </a:solidFill>
+                <a:latin typeface="Microsoft YaHei"/>
+              </a:rPr>
+              <a:t>九、harness 跨会话经验（2/3）</a:t>
+            </a:r>
+          </a:p>
+        </p:txBody>
+      </p:sp>
+      <p:sp>
+        <p:nvSpPr>
+          <p:cNvPr id="3" name="Rectangle 2"/>
+          <p:cNvSpPr/>
+          <p:nvPr/>
+        </p:nvSpPr>
+        <p:spPr>
+          <a:xfrm>
+            <a:off x="457200" y="777240"/>
+            <a:ext cx="11247120" cy="36576"/>
+          </a:xfrm>
+          <a:prstGeom prst="rect">
+            <a:avLst/>
+          </a:prstGeom>
+          <a:solidFill>
+            <a:srgbClr val="1A73E8"/>
+          </a:solidFill>
+          <a:ln>
+            <a:noFill/>
+          </a:ln>
+        </p:spPr>
+        <p:style>
+          <a:lnRef idx="1">
+            <a:schemeClr val="accent1"/>
+          </a:lnRef>
+          <a:fillRef idx="3">
+            <a:schemeClr val="accent1"/>
+          </a:fillRef>
+          <a:effectRef idx="2">
+            <a:schemeClr val="accent1"/>
+          </a:effectRef>
+          <a:fontRef idx="minor">
+            <a:schemeClr val="lt1"/>
+          </a:fontRef>
+        </p:style>
+        <p:txBody>
+          <a:bodyPr rtlCol="0" anchor="ctr"/>
+          <a:lstStyle/>
+          <a:p>
+            <a:pPr algn="ctr"/>
+          </a:p>
+        </p:txBody>
+      </p:sp>
+      <p:sp>
+        <p:nvSpPr>
+          <p:cNvPr id="4" name="TextBox 3"/>
+          <p:cNvSpPr txBox="1"/>
+          <p:nvPr/>
+        </p:nvSpPr>
+        <p:spPr>
+          <a:xfrm>
+            <a:off x="457200" y="960120"/>
+            <a:ext cx="11247120" cy="365760"/>
+          </a:xfrm>
+          <a:prstGeom prst="rect">
+            <a:avLst/>
+          </a:prstGeom>
+          <a:noFill/>
+        </p:spPr>
+        <p:txBody>
+          <a:bodyPr wrap="square" lIns="0" rIns="0" tIns="0" bIns="0">
+            <a:spAutoFit/>
+          </a:bodyPr>
+          <a:lstStyle/>
+          <a:p>
+            <a:pPr algn="l"/>
+            <a:r>
+              <a:rPr sz="1600" b="1">
+                <a:solidFill>
+                  <a:srgbClr val="1A73E8"/>
+                </a:solidFill>
+                <a:latin typeface="Microsoft YaHei"/>
+              </a:rPr>
+              <a:t>🔍 Codex bot 与 Claude /review-pr 盲区互补（PR #53 实证）</a:t>
+            </a:r>
+          </a:p>
+        </p:txBody>
+      </p:sp>
+      <p:graphicFrame>
+        <p:nvGraphicFramePr>
+          <p:cNvPr id="5" name="Table 4"/>
+          <p:cNvGraphicFramePr>
+            <a:graphicFrameLocks noGrp="1"/>
+          </p:cNvGraphicFramePr>
+          <p:nvPr/>
+        </p:nvGraphicFramePr>
+        <p:xfrm>
+          <a:off x="457200" y="1371600"/>
+          <a:ext cx="11247120" cy="1371600"/>
+        </p:xfrm>
+        <a:graphic>
+          <a:graphicData uri="http://schemas.openxmlformats.org/drawingml/2006/table">
+            <a:tbl>
+              <a:tblPr firstRow="1" bandRow="1">
+                <a:tableStyleId>{5C22544A-7EE6-4342-B048-85BDC9FD1C3A}</a:tableStyleId>
+              </a:tblPr>
+              <a:tblGrid>
+                <a:gridCol w="2286000"/>
+                <a:gridCol w="5760720"/>
+                <a:gridCol w="3200400"/>
+              </a:tblGrid>
+              <a:tr h="457200">
+                <a:tc>
+                  <a:txBody>
+                    <a:bodyPr lIns="40000" rIns="40000" tIns="15000" bIns="15000"/>
+                    <a:lstStyle/>
+                    <a:p>
+                      <a:pPr algn="ctr"/>
+                      <a:r>
+                        <a:rPr sz="1200" b="1">
+                          <a:solidFill>
+                            <a:srgbClr val="FFFFFF"/>
+                          </a:solidFill>
+                          <a:latin typeface="Microsoft YaHei"/>
+                        </a:rPr>
+                        <a:t>Reviewer</a:t>
+                      </a:r>
+                    </a:p>
+                  </a:txBody>
+                  <a:tcPr>
+                    <a:solidFill>
+                      <a:srgbClr val="1A73E8"/>
+                    </a:solidFill>
+                  </a:tcPr>
+                </a:tc>
+                <a:tc>
+                  <a:txBody>
+                    <a:bodyPr lIns="40000" rIns="40000" tIns="15000" bIns="15000"/>
+                    <a:lstStyle/>
+                    <a:p>
+                      <a:pPr algn="ctr"/>
+                      <a:r>
+                        <a:rPr sz="1200" b="1">
+                          <a:solidFill>
+                            <a:srgbClr val="FFFFFF"/>
+                          </a:solidFill>
+                          <a:latin typeface="Microsoft YaHei"/>
+                        </a:rPr>
+                        <a:t>找到</a:t>
+                      </a:r>
+                    </a:p>
+                  </a:txBody>
+                  <a:tcPr>
+                    <a:solidFill>
+                      <a:srgbClr val="1A73E8"/>
+                    </a:solidFill>
+                  </a:tcPr>
+                </a:tc>
+                <a:tc>
+                  <a:txBody>
+                    <a:bodyPr lIns="40000" rIns="40000" tIns="15000" bIns="15000"/>
+                    <a:lstStyle/>
+                    <a:p>
+                      <a:pPr algn="ctr"/>
+                      <a:r>
+                        <a:rPr sz="1200" b="1">
+                          <a:solidFill>
+                            <a:srgbClr val="FFFFFF"/>
+                          </a:solidFill>
+                          <a:latin typeface="Microsoft YaHei"/>
+                        </a:rPr>
+                        <a:t>漏掉</a:t>
+                      </a:r>
+                    </a:p>
+                  </a:txBody>
+                  <a:tcPr>
+                    <a:solidFill>
+                      <a:srgbClr val="1A73E8"/>
+                    </a:solidFill>
+                  </a:tcPr>
+                </a:tc>
+              </a:tr>
+              <a:tr h="457200">
+                <a:tc>
+                  <a:txBody>
+                    <a:bodyPr lIns="40000" rIns="40000" tIns="10000" bIns="10000" wrap="square"/>
+                    <a:lstStyle/>
+                    <a:p>
+                      <a:pPr algn="l"/>
+                      <a:r>
+                        <a:rPr sz="1200">
+                          <a:solidFill>
+                            <a:srgbClr val="202020"/>
+                          </a:solidFill>
+                          <a:latin typeface="Microsoft YaHei"/>
+                        </a:rPr>
+                        <a:t>Claude /review-pr</a:t>
+                      </a:r>
+                    </a:p>
+                  </a:txBody>
+                  <a:tcPr>
+                    <a:solidFill>
+                      <a:srgbClr val="FFFFFF"/>
+                    </a:solidFill>
+                  </a:tcPr>
+                </a:tc>
+                <a:tc>
+                  <a:txBody>
+                    <a:bodyPr lIns="40000" rIns="40000" tIns="10000" bIns="10000" wrap="square"/>
+                    <a:lstStyle/>
+                    <a:p>
+                      <a:pPr algn="l"/>
+                      <a:r>
+                        <a:rPr sz="1200">
+                          <a:solidFill>
+                            <a:srgbClr val="202020"/>
+                          </a:solidFill>
+                          <a:latin typeface="Microsoft YaHei"/>
+                        </a:rPr>
+                        <a:t>docs 误写 + 引用不存在函数（**跨文件契约**）</a:t>
+                      </a:r>
+                    </a:p>
+                  </a:txBody>
+                  <a:tcPr>
+                    <a:solidFill>
+                      <a:srgbClr val="FFFFFF"/>
+                    </a:solidFill>
+                  </a:tcPr>
+                </a:tc>
+                <a:tc>
+                  <a:txBody>
+                    <a:bodyPr lIns="40000" rIns="40000" tIns="10000" bIns="10000" wrap="square"/>
+                    <a:lstStyle/>
+                    <a:p>
+                      <a:pPr algn="l"/>
+                      <a:r>
+                        <a:rPr sz="1200">
+                          <a:solidFill>
+                            <a:srgbClr val="202020"/>
+                          </a:solidFill>
+                          <a:latin typeface="Microsoft YaHei"/>
+                        </a:rPr>
+                        <a:t>delay() 后 race</a:t>
+                      </a:r>
+                    </a:p>
+                  </a:txBody>
+                  <a:tcPr>
+                    <a:solidFill>
+                      <a:srgbClr val="FFFFFF"/>
+                    </a:solidFill>
+                  </a:tcPr>
+                </a:tc>
+              </a:tr>
+              <a:tr h="457200">
+                <a:tc>
+                  <a:txBody>
+                    <a:bodyPr lIns="40000" rIns="40000" tIns="10000" bIns="10000" wrap="square"/>
+                    <a:lstStyle/>
+                    <a:p>
+                      <a:pPr algn="l"/>
+                      <a:r>
+                        <a:rPr sz="1200">
+                          <a:solidFill>
+                            <a:srgbClr val="202020"/>
+                          </a:solidFill>
+                          <a:latin typeface="Microsoft YaHei"/>
+                        </a:rPr>
+                        <a:t>Codex bot</a:t>
+                      </a:r>
+                    </a:p>
+                  </a:txBody>
+                  <a:tcPr>
+                    <a:solidFill>
+                      <a:srgbClr val="F0F4FF"/>
+                    </a:solidFill>
+                  </a:tcPr>
+                </a:tc>
+                <a:tc>
+                  <a:txBody>
+                    <a:bodyPr lIns="40000" rIns="40000" tIns="10000" bIns="10000" wrap="square"/>
+                    <a:lstStyle/>
+                    <a:p>
+                      <a:pPr algn="l"/>
+                      <a:r>
+                        <a:rPr sz="1200">
+                          <a:solidFill>
+                            <a:srgbClr val="202020"/>
+                          </a:solidFill>
+                          <a:latin typeface="Microsoft YaHei"/>
+                        </a:rPr>
+                        <a:t>delay() 后没重检 isAISubstitute 的 race（**语句级边界**）</a:t>
+                      </a:r>
+                    </a:p>
+                  </a:txBody>
+                  <a:tcPr>
+                    <a:solidFill>
+                      <a:srgbClr val="F0F4FF"/>
+                    </a:solidFill>
+                  </a:tcPr>
+                </a:tc>
+                <a:tc>
+                  <a:txBody>
+                    <a:bodyPr lIns="40000" rIns="40000" tIns="10000" bIns="10000" wrap="square"/>
+                    <a:lstStyle/>
+                    <a:p>
+                      <a:pPr algn="l"/>
+                      <a:r>
+                        <a:rPr sz="1200">
+                          <a:solidFill>
+                            <a:srgbClr val="202020"/>
+                          </a:solidFill>
+                          <a:latin typeface="Microsoft YaHei"/>
+                        </a:rPr>
+                        <a:t>文档与代码语义对齐</a:t>
+                      </a:r>
+                    </a:p>
+                  </a:txBody>
+                  <a:tcPr>
+                    <a:solidFill>
+                      <a:srgbClr val="F0F4FF"/>
+                    </a:solidFill>
+                  </a:tcPr>
+                </a:tc>
+              </a:tr>
+            </a:tbl>
+          </a:graphicData>
+        </a:graphic>
+      </p:graphicFrame>
+      <p:sp>
+        <p:nvSpPr>
+          <p:cNvPr id="6" name="Rounded Rectangle 5"/>
+          <p:cNvSpPr/>
+          <p:nvPr/>
+        </p:nvSpPr>
+        <p:spPr>
+          <a:xfrm>
+            <a:off x="457200" y="2880360"/>
+            <a:ext cx="11247120" cy="777240"/>
+          </a:xfrm>
+          <a:prstGeom prst="roundRect">
+            <a:avLst/>
+          </a:prstGeom>
+          <a:solidFill>
+            <a:srgbClr val="F0F4FF"/>
+          </a:solidFill>
+          <a:ln>
+            <a:solidFill>
+              <a:srgbClr val="1A73E8"/>
+            </a:solidFill>
+          </a:ln>
+        </p:spPr>
+        <p:style>
+          <a:lnRef idx="1">
+            <a:schemeClr val="accent1"/>
+          </a:lnRef>
+          <a:fillRef idx="3">
+            <a:schemeClr val="accent1"/>
+          </a:fillRef>
+          <a:effectRef idx="2">
+            <a:schemeClr val="accent1"/>
+          </a:effectRef>
+          <a:fontRef idx="minor">
+            <a:schemeClr val="lt1"/>
+          </a:fontRef>
+        </p:style>
+        <p:txBody>
+          <a:bodyPr rtlCol="0" anchor="ctr"/>
+          <a:lstStyle/>
+          <a:p>
+            <a:pPr algn="ctr"/>
+          </a:p>
+        </p:txBody>
+      </p:sp>
+      <p:sp>
+        <p:nvSpPr>
+          <p:cNvPr id="7" name="TextBox 6"/>
+          <p:cNvSpPr txBox="1"/>
+          <p:nvPr/>
+        </p:nvSpPr>
+        <p:spPr>
+          <a:xfrm>
+            <a:off x="731520" y="3017520"/>
+            <a:ext cx="10972800" cy="548640"/>
+          </a:xfrm>
+          <a:prstGeom prst="rect">
+            <a:avLst/>
+          </a:prstGeom>
+          <a:noFill/>
+        </p:spPr>
+        <p:txBody>
+          <a:bodyPr wrap="square" lIns="0" rIns="0" tIns="0" bIns="0">
+            <a:spAutoFit/>
+          </a:bodyPr>
+          <a:lstStyle/>
+          <a:p>
+            <a:pPr algn="l"/>
+            <a:r>
+              <a:rPr sz="1400" b="1">
+                <a:solidFill>
+                  <a:srgbClr val="202020"/>
+                </a:solidFill>
+                <a:latin typeface="Microsoft YaHei"/>
+              </a:rPr>
+              <a:t>盲区不重叠 → 单独跑一个至少漏一类问题。Codex + Claude 必须都跑。</a:t>
+            </a:r>
+          </a:p>
+        </p:txBody>
+      </p:sp>
+      <p:sp>
+        <p:nvSpPr>
+          <p:cNvPr id="8" name="TextBox 7"/>
+          <p:cNvSpPr txBox="1"/>
+          <p:nvPr/>
+        </p:nvSpPr>
+        <p:spPr>
+          <a:xfrm>
+            <a:off x="457200" y="3840480"/>
+            <a:ext cx="11247120" cy="365760"/>
+          </a:xfrm>
+          <a:prstGeom prst="rect">
+            <a:avLst/>
+          </a:prstGeom>
+          <a:noFill/>
+        </p:spPr>
+        <p:txBody>
+          <a:bodyPr wrap="square" lIns="0" rIns="0" tIns="0" bIns="0">
+            <a:spAutoFit/>
+          </a:bodyPr>
+          <a:lstStyle/>
+          <a:p>
+            <a:pPr algn="l"/>
+            <a:r>
+              <a:rPr sz="1600" b="1">
+                <a:solidFill>
+                  <a:srgbClr val="E53935"/>
+                </a:solidFill>
+                <a:latin typeface="Microsoft YaHei"/>
+              </a:rPr>
+              <a:t>⏰ delay() 后状态过期 — race 反请（regressions #11）</a:t>
+            </a:r>
+          </a:p>
+        </p:txBody>
+      </p:sp>
+      <p:sp>
+        <p:nvSpPr>
+          <p:cNvPr id="9" name="Rectangle 8"/>
+          <p:cNvSpPr/>
+          <p:nvPr/>
+        </p:nvSpPr>
+        <p:spPr>
+          <a:xfrm>
+            <a:off x="457200" y="4206240"/>
+            <a:ext cx="11247120" cy="1280160"/>
+          </a:xfrm>
+          <a:prstGeom prst="rect">
+            <a:avLst/>
+          </a:prstGeom>
+          <a:solidFill>
+            <a:srgbClr val="F4F4F4"/>
+          </a:solidFill>
+          <a:ln>
+            <a:solidFill>
+              <a:srgbClr val="D0D0D0"/>
+            </a:solidFill>
+          </a:ln>
+        </p:spPr>
+        <p:style>
+          <a:lnRef idx="1">
+            <a:schemeClr val="accent1"/>
+          </a:lnRef>
+          <a:fillRef idx="3">
+            <a:schemeClr val="accent1"/>
+          </a:fillRef>
+          <a:effectRef idx="2">
+            <a:schemeClr val="accent1"/>
+          </a:effectRef>
+          <a:fontRef idx="minor">
+            <a:schemeClr val="lt1"/>
+          </a:fontRef>
+        </p:style>
+        <p:txBody>
+          <a:bodyPr rtlCol="0" anchor="ctr" wrap="square" lIns="120000" rIns="120000" tIns="80000" bIns="80000"/>
+          <a:lstStyle/>
+          <a:p>
+            <a:pPr algn="ctr"/>
+            <a:r>
+              <a:rPr sz="1200">
+                <a:solidFill>
+                  <a:srgbClr val="202020"/>
+                </a:solidFill>
+                <a:latin typeface="Consolas"/>
+              </a:rPr>
+              <a:t>delay(effectiveAiDelayMs(...))     // 玩家此时取消了托管</a:t>
+            </a:r>
+          </a:p>
+          <a:p>
+            <a:r>
+              <a:rPr sz="1200">
+                <a:solidFill>
+                  <a:srgbClr val="202020"/>
+                </a:solidFill>
+                <a:latin typeface="Consolas"/>
+              </a:rPr>
+              <a:t>mutexFor(room).withLock {</a:t>
+            </a:r>
+          </a:p>
+          <a:p>
+            <a:r>
+              <a:rPr sz="1200">
+                <a:solidFill>
+                  <a:srgbClr val="202020"/>
+                </a:solidFill>
+                <a:latin typeface="Consolas"/>
+              </a:rPr>
+              <a:t>    if (state.currentPlayerIndex != playerIndex) return  // 只检查了这一项</a:t>
+            </a:r>
+          </a:p>
+          <a:p>
+            <a:r>
+              <a:rPr sz="1200">
+                <a:solidFill>
+                  <a:srgbClr val="202020"/>
+                </a:solidFill>
+                <a:latin typeface="Consolas"/>
+              </a:rPr>
+              <a:t>    decideAIAction(...)             // isAISubstitute 已变 → 不该再代打</a:t>
+            </a:r>
+          </a:p>
+          <a:p>
+            <a:r>
+              <a:rPr sz="1200">
+                <a:solidFill>
+                  <a:srgbClr val="202020"/>
+                </a:solidFill>
+                <a:latin typeface="Consolas"/>
+              </a:rPr>
+              <a:t>}</a:t>
+            </a:r>
+          </a:p>
+        </p:txBody>
+      </p:sp>
+      <p:sp>
+        <p:nvSpPr>
+          <p:cNvPr id="10" name="TextBox 9"/>
+          <p:cNvSpPr txBox="1"/>
+          <p:nvPr/>
+        </p:nvSpPr>
+        <p:spPr>
+          <a:xfrm>
+            <a:off x="457200" y="5577840"/>
+            <a:ext cx="11247120" cy="640080"/>
+          </a:xfrm>
+          <a:prstGeom prst="rect">
+            <a:avLst/>
+          </a:prstGeom>
+          <a:noFill/>
+        </p:spPr>
+        <p:txBody>
+          <a:bodyPr wrap="square" lIns="0" rIns="0" tIns="0" bIns="0">
+            <a:spAutoFit/>
+          </a:bodyPr>
+          <a:lstStyle/>
+          <a:p>
+            <a:pPr algn="l"/>
+            <a:r>
+              <a:rPr sz="1200" b="0">
+                <a:solidFill>
+                  <a:srgbClr val="202020"/>
+                </a:solidFill>
+                <a:latin typeface="Microsoft YaHei"/>
+              </a:rPr>
+              <a:t>审查清单：醒来后必须重检「延迟前所有依赖项」，不只检查最显眼的那个
+修法：抽 internal fun shouldYieldToHumanPlayer(...) 谓词 + 同 commit 加测</a:t>
+            </a:r>
+          </a:p>
+        </p:txBody>
+      </p:sp>
+      <p:sp>
+        <p:nvSpPr>
+          <p:cNvPr id="11" name="TextBox 10"/>
+          <p:cNvSpPr txBox="1"/>
+          <p:nvPr/>
+        </p:nvSpPr>
+        <p:spPr>
+          <a:xfrm>
+            <a:off x="10789920" y="6446520"/>
+            <a:ext cx="1188720" cy="274320"/>
+          </a:xfrm>
+          <a:prstGeom prst="rect">
+            <a:avLst/>
+          </a:prstGeom>
+          <a:noFill/>
+        </p:spPr>
+        <p:txBody>
+          <a:bodyPr wrap="square" lIns="0" rIns="0" tIns="0" bIns="0">
+            <a:spAutoFit/>
+          </a:bodyPr>
+          <a:lstStyle/>
+          <a:p>
+            <a:pPr algn="r"/>
+            <a:r>
+              <a:rPr sz="1000" b="0">
+                <a:solidFill>
+                  <a:srgbClr val="606060"/>
+                </a:solidFill>
+                <a:latin typeface="Microsoft YaHei"/>
+              </a:rPr>
+              <a:t>15 / 16</a:t>
+            </a:r>
+          </a:p>
+        </p:txBody>
+      </p:sp>
+    </p:spTree>
+  </p:cSld>
+  <p:clrMapOvr>
+    <a:masterClrMapping/>
+  </p:clrMapOvr>
+</p:sld>
+</file>
+
+<file path=ppt/slides/slide16.xml><?xml version="1.0" encoding="utf-8"?>
+<p:sld xmlns:a="http://schemas.openxmlformats.org/drawingml/2006/main" xmlns:p="http://schemas.openxmlformats.org/presentationml/2006/main" xmlns:r="http://schemas.openxmlformats.org/officeDocument/2006/relationships">
+  <p:cSld>
+    <p:spTree>
+      <p:nvGrpSpPr>
+        <p:cNvPr id="1" name=""/>
+        <p:cNvGrpSpPr/>
+        <p:nvPr/>
+      </p:nvGrpSpPr>
+      <p:grpSpPr/>
+      <p:sp>
+        <p:nvSpPr>
+          <p:cNvPr id="2" name="TextBox 1"/>
+          <p:cNvSpPr txBox="1"/>
+          <p:nvPr/>
+        </p:nvSpPr>
+        <p:spPr>
+          <a:xfrm>
+            <a:off x="457200" y="274320"/>
+            <a:ext cx="11247120" cy="457200"/>
+          </a:xfrm>
+          <a:prstGeom prst="rect">
+            <a:avLst/>
+          </a:prstGeom>
+          <a:noFill/>
+        </p:spPr>
+        <p:txBody>
+          <a:bodyPr wrap="square" lIns="0" rIns="0" tIns="0" bIns="0">
+            <a:spAutoFit/>
+          </a:bodyPr>
+          <a:lstStyle/>
+          <a:p>
+            <a:pPr algn="l"/>
+            <a:r>
+              <a:rPr sz="2400" b="1">
+                <a:solidFill>
+                  <a:srgbClr val="1A73E8"/>
+                </a:solidFill>
+                <a:latin typeface="Microsoft YaHei"/>
+              </a:rPr>
+              <a:t>九、harness 跨会话经验（3/3）— L0–L4 体系</a:t>
+            </a:r>
+          </a:p>
+        </p:txBody>
+      </p:sp>
+      <p:sp>
+        <p:nvSpPr>
+          <p:cNvPr id="3" name="Rectangle 2"/>
+          <p:cNvSpPr/>
+          <p:nvPr/>
+        </p:nvSpPr>
+        <p:spPr>
+          <a:xfrm>
+            <a:off x="457200" y="777240"/>
+            <a:ext cx="11247120" cy="36576"/>
+          </a:xfrm>
+          <a:prstGeom prst="rect">
+            <a:avLst/>
+          </a:prstGeom>
+          <a:solidFill>
+            <a:srgbClr val="1A73E8"/>
+          </a:solidFill>
+          <a:ln>
+            <a:noFill/>
+          </a:ln>
+        </p:spPr>
+        <p:style>
+          <a:lnRef idx="1">
+            <a:schemeClr val="accent1"/>
+          </a:lnRef>
+          <a:fillRef idx="3">
+            <a:schemeClr val="accent1"/>
+          </a:fillRef>
+          <a:effectRef idx="2">
+            <a:schemeClr val="accent1"/>
+          </a:effectRef>
+          <a:fontRef idx="minor">
+            <a:schemeClr val="lt1"/>
+          </a:fontRef>
+        </p:style>
+        <p:txBody>
+          <a:bodyPr rtlCol="0" anchor="ctr"/>
+          <a:lstStyle/>
+          <a:p>
+            <a:pPr algn="ctr"/>
+          </a:p>
+        </p:txBody>
+      </p:sp>
+      <p:sp>
+        <p:nvSpPr>
+          <p:cNvPr id="4" name="TextBox 3"/>
+          <p:cNvSpPr txBox="1"/>
+          <p:nvPr/>
+        </p:nvSpPr>
+        <p:spPr>
+          <a:xfrm>
+            <a:off x="457200" y="960120"/>
+            <a:ext cx="11247120" cy="365760"/>
+          </a:xfrm>
+          <a:prstGeom prst="rect">
+            <a:avLst/>
+          </a:prstGeom>
+          <a:noFill/>
+        </p:spPr>
+        <p:txBody>
+          <a:bodyPr wrap="square" lIns="0" rIns="0" tIns="0" bIns="0">
+            <a:spAutoFit/>
+          </a:bodyPr>
+          <a:lstStyle/>
+          <a:p>
+            <a:pPr algn="l"/>
+            <a:r>
+              <a:rPr sz="1600" b="1">
+                <a:solidFill>
+                  <a:srgbClr val="1A73E8"/>
+                </a:solidFill>
+                <a:latin typeface="Microsoft YaHei"/>
+              </a:rPr>
+              <a:t>🏗️  Harness 5 层防御体系（PR-H1..H5 + #35 web 重构 实战搭建）</a:t>
+            </a:r>
+          </a:p>
+        </p:txBody>
+      </p:sp>
+      <p:graphicFrame>
+        <p:nvGraphicFramePr>
+          <p:cNvPr id="5" name="Table 4"/>
+          <p:cNvGraphicFramePr>
+            <a:graphicFrameLocks noGrp="1"/>
+          </p:cNvGraphicFramePr>
+          <p:nvPr/>
+        </p:nvGraphicFramePr>
+        <p:xfrm>
+          <a:off x="457200" y="1371600"/>
+          <a:ext cx="11247120" cy="2377440"/>
+        </p:xfrm>
+        <a:graphic>
+          <a:graphicData uri="http://schemas.openxmlformats.org/drawingml/2006/table">
+            <a:tbl>
+              <a:tblPr firstRow="1" bandRow="1">
+                <a:tableStyleId>{5C22544A-7EE6-4342-B048-85BDC9FD1C3A}</a:tableStyleId>
+              </a:tblPr>
+              <a:tblGrid>
+                <a:gridCol w="640080"/>
+                <a:gridCol w="2286000"/>
+                <a:gridCol w="8321040"/>
+              </a:tblGrid>
+              <a:tr h="396240">
+                <a:tc>
+                  <a:txBody>
+                    <a:bodyPr lIns="40000" rIns="40000" tIns="15000" bIns="15000"/>
+                    <a:lstStyle/>
+                    <a:p>
+                      <a:pPr algn="ctr"/>
+                      <a:r>
+                        <a:rPr sz="1200" b="1">
+                          <a:solidFill>
+                            <a:srgbClr val="FFFFFF"/>
+                          </a:solidFill>
+                          <a:latin typeface="Microsoft YaHei"/>
+                        </a:rPr>
+                        <a:t>层</a:t>
+                      </a:r>
+                    </a:p>
+                  </a:txBody>
+                  <a:tcPr>
+                    <a:solidFill>
+                      <a:srgbClr val="1A73E8"/>
+                    </a:solidFill>
+                  </a:tcPr>
+                </a:tc>
+                <a:tc>
+                  <a:txBody>
+                    <a:bodyPr lIns="40000" rIns="40000" tIns="15000" bIns="15000"/>
+                    <a:lstStyle/>
+                    <a:p>
+                      <a:pPr algn="ctr"/>
+                      <a:r>
+                        <a:rPr sz="1200" b="1">
+                          <a:solidFill>
+                            <a:srgbClr val="FFFFFF"/>
+                          </a:solidFill>
+                          <a:latin typeface="Microsoft YaHei"/>
+                        </a:rPr>
+                        <a:t>工具</a:t>
+                      </a:r>
+                    </a:p>
+                  </a:txBody>
+                  <a:tcPr>
+                    <a:solidFill>
+                      <a:srgbClr val="1A73E8"/>
+                    </a:solidFill>
+                  </a:tcPr>
+                </a:tc>
+                <a:tc>
+                  <a:txBody>
+                    <a:bodyPr lIns="40000" rIns="40000" tIns="15000" bIns="15000"/>
+                    <a:lstStyle/>
+                    <a:p>
+                      <a:pPr algn="ctr"/>
+                      <a:r>
+                        <a:rPr sz="1200" b="1">
+                          <a:solidFill>
+                            <a:srgbClr val="FFFFFF"/>
+                          </a:solidFill>
+                          <a:latin typeface="Microsoft YaHei"/>
+                        </a:rPr>
+                        <a:t>说明</a:t>
+                      </a:r>
+                    </a:p>
+                  </a:txBody>
+                  <a:tcPr>
+                    <a:solidFill>
+                      <a:srgbClr val="1A73E8"/>
+                    </a:solidFill>
+                  </a:tcPr>
+                </a:tc>
+              </a:tr>
+              <a:tr h="396240">
+                <a:tc>
+                  <a:txBody>
+                    <a:bodyPr lIns="40000" rIns="40000" tIns="10000" bIns="10000" wrap="square"/>
+                    <a:lstStyle/>
+                    <a:p>
+                      <a:pPr algn="l"/>
+                      <a:r>
+                        <a:rPr sz="1200">
+                          <a:solidFill>
+                            <a:srgbClr val="202020"/>
+                          </a:solidFill>
+                          <a:latin typeface="Microsoft YaHei"/>
+                        </a:rPr>
+                        <a:t>L0</a:t>
+                      </a:r>
+                    </a:p>
+                  </a:txBody>
+                  <a:tcPr>
+                    <a:solidFill>
+                      <a:srgbClr val="FFFFFF"/>
+                    </a:solidFill>
+                  </a:tcPr>
+                </a:tc>
+                <a:tc>
+                  <a:txBody>
+                    <a:bodyPr lIns="40000" rIns="40000" tIns="10000" bIns="10000" wrap="square"/>
+                    <a:lstStyle/>
+                    <a:p>
+                      <a:pPr algn="l"/>
+                      <a:r>
+                        <a:rPr sz="1200">
+                          <a:solidFill>
+                            <a:srgbClr val="202020"/>
+                          </a:solidFill>
+                          <a:latin typeface="Microsoft YaHei"/>
+                        </a:rPr>
+                        <a:t>Settings / hooks</a:t>
+                      </a:r>
+                    </a:p>
+                  </a:txBody>
+                  <a:tcPr>
+                    <a:solidFill>
+                      <a:srgbClr val="FFFFFF"/>
+                    </a:solidFill>
+                  </a:tcPr>
+                </a:tc>
+                <a:tc>
+                  <a:txBody>
+                    <a:bodyPr lIns="40000" rIns="40000" tIns="10000" bIns="10000" wrap="square"/>
+                    <a:lstStyle/>
+                    <a:p>
+                      <a:pPr algn="l"/>
+                      <a:r>
+                        <a:rPr sz="1200">
+                          <a:solidFill>
+                            <a:srgbClr val="202020"/>
+                          </a:solidFill>
+                          <a:latin typeface="Microsoft YaHei"/>
+                        </a:rPr>
+                        <a:t>PostToolUse 注入「关键路径 TDD 提醒」+ push 后自动 review-check</a:t>
+                      </a:r>
+                    </a:p>
+                  </a:txBody>
+                  <a:tcPr>
+                    <a:solidFill>
+                      <a:srgbClr val="FFFFFF"/>
+                    </a:solidFill>
+                  </a:tcPr>
+                </a:tc>
+              </a:tr>
+              <a:tr h="396240">
+                <a:tc>
+                  <a:txBody>
+                    <a:bodyPr lIns="40000" rIns="40000" tIns="10000" bIns="10000" wrap="square"/>
+                    <a:lstStyle/>
+                    <a:p>
+                      <a:pPr algn="l"/>
+                      <a:r>
+                        <a:rPr sz="1200">
+                          <a:solidFill>
+                            <a:srgbClr val="202020"/>
+                          </a:solidFill>
+                          <a:latin typeface="Microsoft YaHei"/>
+                        </a:rPr>
+                        <a:t>L1</a:t>
+                      </a:r>
+                    </a:p>
+                  </a:txBody>
+                  <a:tcPr>
+                    <a:solidFill>
+                      <a:srgbClr val="F0F4FF"/>
+                    </a:solidFill>
+                  </a:tcPr>
+                </a:tc>
+                <a:tc>
+                  <a:txBody>
+                    <a:bodyPr lIns="40000" rIns="40000" tIns="10000" bIns="10000" wrap="square"/>
+                    <a:lstStyle/>
+                    <a:p>
+                      <a:pPr algn="l"/>
+                      <a:r>
+                        <a:rPr sz="1200">
+                          <a:solidFill>
+                            <a:srgbClr val="202020"/>
+                          </a:solidFill>
+                          <a:latin typeface="Microsoft YaHei"/>
+                        </a:rPr>
+                        <a:t>Slash commands</a:t>
+                      </a:r>
+                    </a:p>
+                  </a:txBody>
+                  <a:tcPr>
+                    <a:solidFill>
+                      <a:srgbClr val="F0F4FF"/>
+                    </a:solidFill>
+                  </a:tcPr>
+                </a:tc>
+                <a:tc>
+                  <a:txBody>
+                    <a:bodyPr lIns="40000" rIns="40000" tIns="10000" bIns="10000" wrap="square"/>
+                    <a:lstStyle/>
+                    <a:p>
+                      <a:pPr algn="l"/>
+                      <a:r>
+                        <a:rPr sz="1200">
+                          <a:solidFill>
+                            <a:srgbClr val="202020"/>
+                          </a:solidFill>
+                          <a:latin typeface="Microsoft YaHei"/>
+                        </a:rPr>
+                        <a:t>/test-fast · /pre-commit-scan · /ship-check · /review-pr</a:t>
+                      </a:r>
+                    </a:p>
+                  </a:txBody>
+                  <a:tcPr>
+                    <a:solidFill>
+                      <a:srgbClr val="F0F4FF"/>
+                    </a:solidFill>
+                  </a:tcPr>
+                </a:tc>
+              </a:tr>
+              <a:tr h="396240">
+                <a:tc>
+                  <a:txBody>
+                    <a:bodyPr lIns="40000" rIns="40000" tIns="10000" bIns="10000" wrap="square"/>
+                    <a:lstStyle/>
+                    <a:p>
+                      <a:pPr algn="l"/>
+                      <a:r>
+                        <a:rPr sz="1200">
+                          <a:solidFill>
+                            <a:srgbClr val="202020"/>
+                          </a:solidFill>
+                          <a:latin typeface="Microsoft YaHei"/>
+                        </a:rPr>
+                        <a:t>L2</a:t>
+                      </a:r>
+                    </a:p>
+                  </a:txBody>
+                  <a:tcPr>
+                    <a:solidFill>
+                      <a:srgbClr val="FFFFFF"/>
+                    </a:solidFill>
+                  </a:tcPr>
+                </a:tc>
+                <a:tc>
+                  <a:txBody>
+                    <a:bodyPr lIns="40000" rIns="40000" tIns="10000" bIns="10000" wrap="square"/>
+                    <a:lstStyle/>
+                    <a:p>
+                      <a:pPr algn="l"/>
+                      <a:r>
+                        <a:rPr sz="1200">
+                          <a:solidFill>
+                            <a:srgbClr val="202020"/>
+                          </a:solidFill>
+                          <a:latin typeface="Microsoft YaHei"/>
+                        </a:rPr>
+                        <a:t>Subagents</a:t>
+                      </a:r>
+                    </a:p>
+                  </a:txBody>
+                  <a:tcPr>
+                    <a:solidFill>
+                      <a:srgbClr val="FFFFFF"/>
+                    </a:solidFill>
+                  </a:tcPr>
+                </a:tc>
+                <a:tc>
+                  <a:txBody>
+                    <a:bodyPr lIns="40000" rIns="40000" tIns="10000" bIns="10000" wrap="square"/>
+                    <a:lstStyle/>
+                    <a:p>
+                      <a:pPr algn="l"/>
+                      <a:r>
+                        <a:rPr sz="1200">
+                          <a:solidFill>
+                            <a:srgbClr val="202020"/>
+                          </a:solidFill>
+                          <a:latin typeface="Microsoft YaHei"/>
+                        </a:rPr>
+                        <a:t>pr-reviewer (Opus) · protocol-syncer · tdd-scaffolder</a:t>
+                      </a:r>
+                    </a:p>
+                  </a:txBody>
+                  <a:tcPr>
+                    <a:solidFill>
+                      <a:srgbClr val="FFFFFF"/>
+                    </a:solidFill>
+                  </a:tcPr>
+                </a:tc>
+              </a:tr>
+              <a:tr h="396240">
+                <a:tc>
+                  <a:txBody>
+                    <a:bodyPr lIns="40000" rIns="40000" tIns="10000" bIns="10000" wrap="square"/>
+                    <a:lstStyle/>
+                    <a:p>
+                      <a:pPr algn="l"/>
+                      <a:r>
+                        <a:rPr sz="1200">
+                          <a:solidFill>
+                            <a:srgbClr val="202020"/>
+                          </a:solidFill>
+                          <a:latin typeface="Microsoft YaHei"/>
+                        </a:rPr>
+                        <a:t>L3</a:t>
+                      </a:r>
+                    </a:p>
+                  </a:txBody>
+                  <a:tcPr>
+                    <a:solidFill>
+                      <a:srgbClr val="F0F4FF"/>
+                    </a:solidFill>
+                  </a:tcPr>
+                </a:tc>
+                <a:tc>
+                  <a:txBody>
+                    <a:bodyPr lIns="40000" rIns="40000" tIns="10000" bIns="10000" wrap="square"/>
+                    <a:lstStyle/>
+                    <a:p>
+                      <a:pPr algn="l"/>
+                      <a:r>
+                        <a:rPr sz="1200">
+                          <a:solidFill>
+                            <a:srgbClr val="202020"/>
+                          </a:solidFill>
+                          <a:latin typeface="Microsoft YaHei"/>
+                        </a:rPr>
+                        <a:t>CI gates</a:t>
+                      </a:r>
+                    </a:p>
+                  </a:txBody>
+                  <a:tcPr>
+                    <a:solidFill>
+                      <a:srgbClr val="F0F4FF"/>
+                    </a:solidFill>
+                  </a:tcPr>
+                </a:tc>
+                <a:tc>
+                  <a:txBody>
+                    <a:bodyPr lIns="40000" rIns="40000" tIns="10000" bIns="10000" wrap="square"/>
+                    <a:lstStyle/>
+                    <a:p>
+                      <a:pPr algn="l"/>
+                      <a:r>
+                        <a:rPr sz="1200">
+                          <a:solidFill>
+                            <a:srgbClr val="202020"/>
+                          </a:solidFill>
+                          <a:latin typeface="Microsoft YaHei"/>
+                        </a:rPr>
+                        <a:t>tdd-gate（关键路径必同改 *Test.kt）+ build + detekt</a:t>
+                      </a:r>
+                    </a:p>
+                  </a:txBody>
+                  <a:tcPr>
+                    <a:solidFill>
+                      <a:srgbClr val="F0F4FF"/>
+                    </a:solidFill>
+                  </a:tcPr>
+                </a:tc>
+              </a:tr>
+              <a:tr h="396240">
+                <a:tc>
+                  <a:txBody>
+                    <a:bodyPr lIns="40000" rIns="40000" tIns="10000" bIns="10000" wrap="square"/>
+                    <a:lstStyle/>
+                    <a:p>
+                      <a:pPr algn="l"/>
+                      <a:r>
+                        <a:rPr sz="1200">
+                          <a:solidFill>
+                            <a:srgbClr val="202020"/>
+                          </a:solidFill>
+                          <a:latin typeface="Microsoft YaHei"/>
+                        </a:rPr>
+                        <a:t>L4</a:t>
+                      </a:r>
+                    </a:p>
+                  </a:txBody>
+                  <a:tcPr>
+                    <a:solidFill>
+                      <a:srgbClr val="FFFFFF"/>
+                    </a:solidFill>
+                  </a:tcPr>
+                </a:tc>
+                <a:tc>
+                  <a:txBody>
+                    <a:bodyPr lIns="40000" rIns="40000" tIns="10000" bIns="10000" wrap="square"/>
+                    <a:lstStyle/>
+                    <a:p>
+                      <a:pPr algn="l"/>
+                      <a:r>
+                        <a:rPr sz="1200">
+                          <a:solidFill>
+                            <a:srgbClr val="202020"/>
+                          </a:solidFill>
+                          <a:latin typeface="Microsoft YaHei"/>
+                        </a:rPr>
+                        <a:t>Documentation</a:t>
+                      </a:r>
+                    </a:p>
+                  </a:txBody>
+                  <a:tcPr>
+                    <a:solidFill>
+                      <a:srgbClr val="FFFFFF"/>
+                    </a:solidFill>
+                  </a:tcPr>
+                </a:tc>
+                <a:tc>
+                  <a:txBody>
+                    <a:bodyPr lIns="40000" rIns="40000" tIns="10000" bIns="10000" wrap="square"/>
+                    <a:lstStyle/>
+                    <a:p>
+                      <a:pPr algn="l"/>
+                      <a:r>
+                        <a:rPr sz="1200">
+                          <a:solidFill>
+                            <a:srgbClr val="202020"/>
+                          </a:solidFill>
+                          <a:latin typeface="Microsoft YaHei"/>
+                        </a:rPr>
+                        <a:t>playbook（feature/bug/CI 失败/对抗审查）+ regressions DB</a:t>
+                      </a:r>
+                    </a:p>
+                  </a:txBody>
+                  <a:tcPr>
+                    <a:solidFill>
+                      <a:srgbClr val="FFFFFF"/>
+                    </a:solidFill>
+                  </a:tcPr>
+                </a:tc>
+              </a:tr>
+            </a:tbl>
+          </a:graphicData>
+        </a:graphic>
+      </p:graphicFrame>
+      <p:sp>
+        <p:nvSpPr>
+          <p:cNvPr id="6" name="TextBox 5"/>
+          <p:cNvSpPr txBox="1"/>
+          <p:nvPr/>
+        </p:nvSpPr>
+        <p:spPr>
+          <a:xfrm>
+            <a:off x="457200" y="3931920"/>
+            <a:ext cx="11247120" cy="365760"/>
+          </a:xfrm>
+          <a:prstGeom prst="rect">
+            <a:avLst/>
+          </a:prstGeom>
+          <a:noFill/>
+        </p:spPr>
+        <p:txBody>
+          <a:bodyPr wrap="square" lIns="0" rIns="0" tIns="0" bIns="0">
+            <a:spAutoFit/>
+          </a:bodyPr>
+          <a:lstStyle/>
+          <a:p>
+            <a:pPr algn="l"/>
+            <a:r>
+              <a:rPr sz="1600" b="1">
+                <a:solidFill>
+                  <a:srgbClr val="2E7D32"/>
+                </a:solidFill>
+                <a:latin typeface="Microsoft YaHei"/>
+              </a:rPr>
+              <a:t>🎯 跨会话经验的核心原则</a:t>
+            </a:r>
+          </a:p>
+        </p:txBody>
+      </p:sp>
+      <p:graphicFrame>
+        <p:nvGraphicFramePr>
+          <p:cNvPr id="7" name="Table 6"/>
+          <p:cNvGraphicFramePr>
+            <a:graphicFrameLocks noGrp="1"/>
+          </p:cNvGraphicFramePr>
+          <p:nvPr/>
+        </p:nvGraphicFramePr>
+        <p:xfrm>
+          <a:off x="457200" y="4297680"/>
+          <a:ext cx="11247120" cy="1828800"/>
+        </p:xfrm>
+        <a:graphic>
+          <a:graphicData uri="http://schemas.openxmlformats.org/drawingml/2006/table">
+            <a:tbl>
+              <a:tblPr firstRow="1" bandRow="1">
+                <a:tableStyleId>{5C22544A-7EE6-4342-B048-85BDC9FD1C3A}</a:tableStyleId>
+              </a:tblPr>
+              <a:tblGrid>
+                <a:gridCol w="2743200"/>
+                <a:gridCol w="8503920"/>
+              </a:tblGrid>
+              <a:tr h="365760">
+                <a:tc>
+                  <a:txBody>
+                    <a:bodyPr lIns="40000" rIns="40000" tIns="15000" bIns="15000"/>
+                    <a:lstStyle/>
+                    <a:p>
+                      <a:pPr algn="ctr"/>
+                      <a:r>
+                        <a:rPr sz="1200" b="1">
+                          <a:solidFill>
+                            <a:srgbClr val="FFFFFF"/>
+                          </a:solidFill>
+                          <a:latin typeface="Microsoft YaHei"/>
+                        </a:rPr>
+                        <a:t>经验</a:t>
+                      </a:r>
+                    </a:p>
+                  </a:txBody>
+                  <a:tcPr>
+                    <a:solidFill>
+                      <a:srgbClr val="1A73E8"/>
+                    </a:solidFill>
+                  </a:tcPr>
+                </a:tc>
+                <a:tc>
+                  <a:txBody>
+                    <a:bodyPr lIns="40000" rIns="40000" tIns="15000" bIns="15000"/>
+                    <a:lstStyle/>
+                    <a:p>
+                      <a:pPr algn="ctr"/>
+                      <a:r>
+                        <a:rPr sz="1200" b="1">
+                          <a:solidFill>
+                            <a:srgbClr val="FFFFFF"/>
+                          </a:solidFill>
+                          <a:latin typeface="Microsoft YaHei"/>
+                        </a:rPr>
+                        <a:t>说明</a:t>
+                      </a:r>
+                    </a:p>
+                  </a:txBody>
+                  <a:tcPr>
+                    <a:solidFill>
+                      <a:srgbClr val="1A73E8"/>
+                    </a:solidFill>
+                  </a:tcPr>
+                </a:tc>
+              </a:tr>
+              <a:tr h="365760">
+                <a:tc>
+                  <a:txBody>
+                    <a:bodyPr lIns="40000" rIns="40000" tIns="10000" bIns="10000" wrap="square"/>
+                    <a:lstStyle/>
+                    <a:p>
+                      <a:pPr algn="l"/>
+                      <a:r>
+                        <a:rPr sz="1200">
+                          <a:solidFill>
+                            <a:srgbClr val="202020"/>
+                          </a:solidFill>
+                          <a:latin typeface="Microsoft YaHei"/>
+                        </a:rPr>
+                        <a:t>同 commit *Test.kt 配对</a:t>
+                      </a:r>
+                    </a:p>
+                  </a:txBody>
+                  <a:tcPr>
+                    <a:solidFill>
+                      <a:srgbClr val="FFFFFF"/>
+                    </a:solidFill>
+                  </a:tcPr>
+                </a:tc>
+                <a:tc>
+                  <a:txBody>
+                    <a:bodyPr lIns="40000" rIns="40000" tIns="10000" bIns="10000" wrap="square"/>
+                    <a:lstStyle/>
+                    <a:p>
+                      <a:pPr algn="l"/>
+                      <a:r>
+                        <a:rPr sz="1200">
+                          <a:solidFill>
+                            <a:srgbClr val="202020"/>
+                          </a:solidFill>
+                          <a:latin typeface="Microsoft YaHei"/>
+                        </a:rPr>
+                        <a:t>tdd-gate 一次没误报、一次没漏；hook 弹"TDD 提醒"时不必另开 commit</a:t>
+                      </a:r>
+                    </a:p>
+                  </a:txBody>
+                  <a:tcPr>
+                    <a:solidFill>
+                      <a:srgbClr val="FFFFFF"/>
+                    </a:solidFill>
+                  </a:tcPr>
+                </a:tc>
+              </a:tr>
+              <a:tr h="365760">
+                <a:tc>
+                  <a:txBody>
+                    <a:bodyPr lIns="40000" rIns="40000" tIns="10000" bIns="10000" wrap="square"/>
+                    <a:lstStyle/>
+                    <a:p>
+                      <a:pPr algn="l"/>
+                      <a:r>
+                        <a:rPr sz="1200">
+                          <a:solidFill>
+                            <a:srgbClr val="202020"/>
+                          </a:solidFill>
+                          <a:latin typeface="Microsoft YaHei"/>
+                        </a:rPr>
+                        <a:t>分支 vs PR 一一对应</a:t>
+                      </a:r>
+                    </a:p>
+                  </a:txBody>
+                  <a:tcPr>
+                    <a:solidFill>
+                      <a:srgbClr val="F0F4FF"/>
+                    </a:solidFill>
+                  </a:tcPr>
+                </a:tc>
+                <a:tc>
+                  <a:txBody>
+                    <a:bodyPr lIns="40000" rIns="40000" tIns="10000" bIns="10000" wrap="square"/>
+                    <a:lstStyle/>
+                    <a:p>
+                      <a:pPr algn="l"/>
+                      <a:r>
+                        <a:rPr sz="1200">
+                          <a:solidFill>
+                            <a:srgbClr val="202020"/>
+                          </a:solidFill>
+                          <a:latin typeface="Microsoft YaHei"/>
+                        </a:rPr>
+                        <a:t>PR merge 后开新分支；老分支再 push 不会自动出 PR（PR #52→#53 实战）</a:t>
+                      </a:r>
+                    </a:p>
+                  </a:txBody>
+                  <a:tcPr>
+                    <a:solidFill>
+                      <a:srgbClr val="F0F4FF"/>
+                    </a:solidFill>
+                  </a:tcPr>
+                </a:tc>
+              </a:tr>
+              <a:tr h="365760">
+                <a:tc>
+                  <a:txBody>
+                    <a:bodyPr lIns="40000" rIns="40000" tIns="10000" bIns="10000" wrap="square"/>
+                    <a:lstStyle/>
+                    <a:p>
+                      <a:pPr algn="l"/>
+                      <a:r>
+                        <a:rPr sz="1200">
+                          <a:solidFill>
+                            <a:srgbClr val="202020"/>
+                          </a:solidFill>
+                          <a:latin typeface="Microsoft YaHei"/>
+                        </a:rPr>
+                        <a:t>文档单一真相 grep 验证</a:t>
+                      </a:r>
+                    </a:p>
+                  </a:txBody>
+                  <a:tcPr>
+                    <a:solidFill>
+                      <a:srgbClr val="FFFFFF"/>
+                    </a:solidFill>
+                  </a:tcPr>
+                </a:tc>
+                <a:tc>
+                  <a:txBody>
+                    <a:bodyPr lIns="40000" rIns="40000" tIns="10000" bIns="10000" wrap="square"/>
+                    <a:lstStyle/>
+                    <a:p>
+                      <a:pPr algn="l"/>
+                      <a:r>
+                        <a:rPr sz="1200">
+                          <a:solidFill>
+                            <a:srgbClr val="202020"/>
+                          </a:solidFill>
+                          <a:latin typeface="Microsoft YaHei"/>
+                        </a:rPr>
+                        <a:t>新 doc 自称"权威"前必 grep 验证 anchor 函数名实际存在</a:t>
+                      </a:r>
+                    </a:p>
+                  </a:txBody>
+                  <a:tcPr>
+                    <a:solidFill>
+                      <a:srgbClr val="FFFFFF"/>
+                    </a:solidFill>
+                  </a:tcPr>
+                </a:tc>
+              </a:tr>
+              <a:tr h="365760">
+                <a:tc>
+                  <a:txBody>
+                    <a:bodyPr lIns="40000" rIns="40000" tIns="10000" bIns="10000" wrap="square"/>
+                    <a:lstStyle/>
+                    <a:p>
+                      <a:pPr algn="l"/>
+                      <a:r>
+                        <a:rPr sz="1200">
+                          <a:solidFill>
+                            <a:srgbClr val="202020"/>
+                          </a:solidFill>
+                          <a:latin typeface="Microsoft YaHei"/>
+                        </a:rPr>
+                        <a:t>速度档位用 3 档预设</a:t>
+                      </a:r>
+                    </a:p>
+                  </a:txBody>
+                  <a:tcPr>
+                    <a:solidFill>
+                      <a:srgbClr val="F0F4FF"/>
+                    </a:solidFill>
+                  </a:tcPr>
+                </a:tc>
+                <a:tc>
+                  <a:txBody>
+                    <a:bodyPr lIns="40000" rIns="40000" tIns="10000" bIns="10000" wrap="square"/>
+                    <a:lstStyle/>
+                    <a:p>
+                      <a:pPr algn="l"/>
+                      <a:r>
+                        <a:rPr sz="1200">
+                          <a:solidFill>
+                            <a:srgbClr val="202020"/>
+                          </a:solidFill>
+                          <a:latin typeface="Microsoft YaHei"/>
+                        </a:rPr>
+                        <a:t>slider 看似灵活；实际多数场景 3 档够用 + 测试矩阵更小</a:t>
+                      </a:r>
+                    </a:p>
+                  </a:txBody>
+                  <a:tcPr>
+                    <a:solidFill>
+                      <a:srgbClr val="F0F4FF"/>
+                    </a:solidFill>
+                  </a:tcPr>
+                </a:tc>
+              </a:tr>
+            </a:tbl>
+          </a:graphicData>
+        </a:graphic>
+      </p:graphicFrame>
+      <p:sp>
+        <p:nvSpPr>
+          <p:cNvPr id="8" name="Rounded Rectangle 7"/>
+          <p:cNvSpPr/>
+          <p:nvPr/>
+        </p:nvSpPr>
+        <p:spPr>
+          <a:xfrm>
+            <a:off x="457200" y="6263640"/>
+            <a:ext cx="11247120" cy="502920"/>
+          </a:xfrm>
+          <a:prstGeom prst="roundRect">
+            <a:avLst/>
+          </a:prstGeom>
+          <a:solidFill>
+            <a:srgbClr val="1A73E8"/>
+          </a:solidFill>
+          <a:ln>
+            <a:solidFill>
+              <a:srgbClr val="1A73E8"/>
+            </a:solidFill>
+          </a:ln>
+        </p:spPr>
+        <p:style>
+          <a:lnRef idx="1">
+            <a:schemeClr val="accent1"/>
+          </a:lnRef>
+          <a:fillRef idx="3">
+            <a:schemeClr val="accent1"/>
+          </a:fillRef>
+          <a:effectRef idx="2">
+            <a:schemeClr val="accent1"/>
+          </a:effectRef>
+          <a:fontRef idx="minor">
+            <a:schemeClr val="lt1"/>
+          </a:fontRef>
+        </p:style>
+        <p:txBody>
+          <a:bodyPr rtlCol="0" anchor="ctr" wrap="square" lIns="150000" rIns="150000"/>
+          <a:lstStyle/>
+          <a:p>
+            <a:pPr algn="ctr"/>
+            <a:r>
+              <a:rPr sz="1400" b="1">
+                <a:solidFill>
+                  <a:srgbClr val="FFFFFF"/>
+                </a:solidFill>
+                <a:latin typeface="Microsoft YaHei"/>
+              </a:rPr>
+              <a:t>💎 核心：harness 让教训跨 session 沉淀，新人 / 新 AI 不需要每次从头踩坑</a:t>
+            </a:r>
+          </a:p>
+        </p:txBody>
+      </p:sp>
+      <p:sp>
+        <p:nvSpPr>
+          <p:cNvPr id="9" name="TextBox 8"/>
+          <p:cNvSpPr txBox="1"/>
+          <p:nvPr/>
+        </p:nvSpPr>
+        <p:spPr>
+          <a:xfrm>
+            <a:off x="10789920" y="6446520"/>
+            <a:ext cx="1188720" cy="274320"/>
+          </a:xfrm>
+          <a:prstGeom prst="rect">
+            <a:avLst/>
+          </a:prstGeom>
+          <a:noFill/>
+        </p:spPr>
+        <p:txBody>
+          <a:bodyPr wrap="square" lIns="0" rIns="0" tIns="0" bIns="0">
+            <a:spAutoFit/>
+          </a:bodyPr>
+          <a:lstStyle/>
+          <a:p>
+            <a:pPr algn="r"/>
+            <a:r>
+              <a:rPr sz="1000" b="0">
+                <a:solidFill>
+                  <a:srgbClr val="606060"/>
+                </a:solidFill>
+                <a:latin typeface="Microsoft YaHei"/>
+              </a:rPr>
+              <a:t>16 / 16</a:t>
             </a:r>
           </a:p>
         </p:txBody>
@@ -6715,7 +9767,7 @@
                 </a:solidFill>
                 <a:latin typeface="Microsoft YaHei"/>
               </a:rPr>
-              <a:t>沟通牌：4 副牌 216 张，6 人 3v3 卡牌游戏（单机 + 联网对抗）</a:t>
+              <a:t>沟通牌：4 副牌 216 张，6 人 3v3 卡牌游戏（单机 + 联网 + Web 三模式）</a:t>
             </a:r>
           </a:p>
         </p:txBody>
@@ -6765,7 +9817,7 @@
         </p:nvGraphicFramePr>
         <p:xfrm>
           <a:off x="457200" y="1828800"/>
-          <a:ext cx="5486400" cy="1737360"/>
+          <a:ext cx="5486400" cy="2103120"/>
         </p:xfrm>
         <a:graphic>
           <a:graphicData uri="http://schemas.openxmlformats.org/drawingml/2006/table">
@@ -6774,10 +9826,10 @@
                 <a:tableStyleId>{5C22544A-7EE6-4342-B048-85BDC9FD1C3A}</a:tableStyleId>
               </a:tblPr>
               <a:tblGrid>
-                <a:gridCol w="1188720"/>
-                <a:gridCol w="4297680"/>
+                <a:gridCol w="1371600"/>
+                <a:gridCol w="4114800"/>
               </a:tblGrid>
-              <a:tr h="347472">
+              <a:tr h="350520">
                 <a:tc>
                   <a:txBody>
                     <a:bodyPr lIns="40000" rIns="40000" tIns="15000" bIns="15000"/>
@@ -6825,21 +9877,21 @@
                   </a:tcPr>
                 </a:tc>
               </a:tr>
-              <a:tr h="347472">
-                <a:tc>
-                  <a:txBody>
-                    <a:bodyPr lIns="40000" rIns="40000" tIns="10000" bIns="10000" wrap="square"/>
-                    <a:lstStyle/>
-                    <a:p>
-                      <a:pPr algn="l"/>
-                      <a:r>
-                        <a:rPr sz="1200">
-                          <a:solidFill>
-                            <a:srgbClr val="202020"/>
-                          </a:solidFill>
-                          <a:latin typeface="Microsoft YaHei"/>
-                        </a:rPr>
-                        <a:t>客户端</a:t>
+              <a:tr h="350520">
+                <a:tc>
+                  <a:txBody>
+                    <a:bodyPr lIns="40000" rIns="40000" tIns="10000" bIns="10000" wrap="square"/>
+                    <a:lstStyle/>
+                    <a:p>
+                      <a:pPr algn="l"/>
+                      <a:r>
+                        <a:rPr sz="1200">
+                          <a:solidFill>
+                            <a:srgbClr val="202020"/>
+                          </a:solidFill>
+                          <a:latin typeface="Microsoft YaHei"/>
+                        </a:rPr>
+                        <a:t>共享逻辑</a:t>
                       </a:r>
                     </a:p>
                   </a:txBody>
@@ -6862,7 +9914,7 @@
                           </a:solidFill>
                           <a:latin typeface="Microsoft YaHei"/>
                         </a:rPr>
-                        <a:t>Kotlin + Coroutines + OkHttp + XML 布局</a:t>
+                        <a:t>Kotlin Multiplatform (android+jvm+wasmJs)</a:t>
                       </a:r>
                     </a:p>
                   </a:txBody>
@@ -6873,7 +9925,103 @@
                   </a:tcPr>
                 </a:tc>
               </a:tr>
-              <a:tr h="347472">
+              <a:tr h="350520">
+                <a:tc>
+                  <a:txBody>
+                    <a:bodyPr lIns="40000" rIns="40000" tIns="10000" bIns="10000" wrap="square"/>
+                    <a:lstStyle/>
+                    <a:p>
+                      <a:pPr algn="l"/>
+                      <a:r>
+                        <a:rPr sz="1200">
+                          <a:solidFill>
+                            <a:srgbClr val="202020"/>
+                          </a:solidFill>
+                          <a:latin typeface="Microsoft YaHei"/>
+                        </a:rPr>
+                        <a:t>Android</a:t>
+                      </a:r>
+                    </a:p>
+                  </a:txBody>
+                  <a:tcPr>
+                    <a:solidFill>
+                      <a:srgbClr val="F0F4FF"/>
+                    </a:solidFill>
+                  </a:tcPr>
+                </a:tc>
+                <a:tc>
+                  <a:txBody>
+                    <a:bodyPr lIns="40000" rIns="40000" tIns="10000" bIns="10000" wrap="square"/>
+                    <a:lstStyle/>
+                    <a:p>
+                      <a:pPr algn="l"/>
+                      <a:r>
+                        <a:rPr sz="1200">
+                          <a:solidFill>
+                            <a:srgbClr val="202020"/>
+                          </a:solidFill>
+                          <a:latin typeface="Microsoft YaHei"/>
+                        </a:rPr>
+                        <a:t>Kotlin + Coroutines + Flow + OkHttp + XML</a:t>
+                      </a:r>
+                    </a:p>
+                  </a:txBody>
+                  <a:tcPr>
+                    <a:solidFill>
+                      <a:srgbClr val="F0F4FF"/>
+                    </a:solidFill>
+                  </a:tcPr>
+                </a:tc>
+              </a:tr>
+              <a:tr h="350520">
+                <a:tc>
+                  <a:txBody>
+                    <a:bodyPr lIns="40000" rIns="40000" tIns="10000" bIns="10000" wrap="square"/>
+                    <a:lstStyle/>
+                    <a:p>
+                      <a:pPr algn="l"/>
+                      <a:r>
+                        <a:rPr sz="1200">
+                          <a:solidFill>
+                            <a:srgbClr val="202020"/>
+                          </a:solidFill>
+                          <a:latin typeface="Microsoft YaHei"/>
+                        </a:rPr>
+                        <a:t>Web</a:t>
+                      </a:r>
+                    </a:p>
+                  </a:txBody>
+                  <a:tcPr>
+                    <a:solidFill>
+                      <a:srgbClr val="FFFFFF"/>
+                    </a:solidFill>
+                  </a:tcPr>
+                </a:tc>
+                <a:tc>
+                  <a:txBody>
+                    <a:bodyPr lIns="40000" rIns="40000" tIns="10000" bIns="10000" wrap="square"/>
+                    <a:lstStyle/>
+                    <a:p>
+                      <a:pPr algn="l"/>
+                      <a:r>
+                        <a:rPr sz="1200">
+                          <a:solidFill>
+                            <a:srgbClr val="202020"/>
+                          </a:solidFill>
+                          <a:latin typeface="Microsoft YaHei"/>
+                        </a:rPr>
+                        <a:t>Compose Multiplatform 1.6.10 / Wasm-JS</a:t>
+                      </a:r>
+                    </a:p>
+                  </a:txBody>
+                  <a:tcPr>
+                    <a:solidFill>
+                      <a:srgbClr val="FFFFFF"/>
+                    </a:solidFill>
+                  </a:tcPr>
+                </a:tc>
+              </a:tr>
+              <a:tr h="350520">
                 <a:tc>
                   <a:txBody>
                     <a:bodyPr lIns="40000" rIns="40000" tIns="10000" bIns="10000" wrap="square"/>
@@ -6910,7 +10058,7 @@
                           </a:solidFill>
                           <a:latin typeface="Microsoft YaHei"/>
                         </a:rPr>
-                        <a:t>Ktor + Netty + WebSockets</a:t>
+                        <a:t>Ktor 2.3.6 + Netty + :shared 依赖</a:t>
                       </a:r>
                     </a:p>
                   </a:txBody>
@@ -6921,21 +10069,21 @@
                   </a:tcPr>
                 </a:tc>
               </a:tr>
-              <a:tr h="347472">
-                <a:tc>
-                  <a:txBody>
-                    <a:bodyPr lIns="40000" rIns="40000" tIns="10000" bIns="10000" wrap="square"/>
-                    <a:lstStyle/>
-                    <a:p>
-                      <a:pPr algn="l"/>
-                      <a:r>
-                        <a:rPr sz="1200">
-                          <a:solidFill>
-                            <a:srgbClr val="202020"/>
-                          </a:solidFill>
-                          <a:latin typeface="Microsoft YaHei"/>
-                        </a:rPr>
-                        <a:t>序列化</a:t>
+              <a:tr h="350520">
+                <a:tc>
+                  <a:txBody>
+                    <a:bodyPr lIns="40000" rIns="40000" tIns="10000" bIns="10000" wrap="square"/>
+                    <a:lstStyle/>
+                    <a:p>
+                      <a:pPr algn="l"/>
+                      <a:r>
+                        <a:rPr sz="1200">
+                          <a:solidFill>
+                            <a:srgbClr val="202020"/>
+                          </a:solidFill>
+                          <a:latin typeface="Microsoft YaHei"/>
+                        </a:rPr>
+                        <a:t>反代部署</a:t>
                       </a:r>
                     </a:p>
                   </a:txBody>
@@ -6958,61 +10106,13 @@
                           </a:solidFill>
                           <a:latin typeface="Microsoft YaHei"/>
                         </a:rPr>
-                        <a:t>kotlinx.serialization (JSON)</a:t>
+                        <a:t>Caddy 80/443 → :8080 + systemd auto-deploy</a:t>
                       </a:r>
                     </a:p>
                   </a:txBody>
                   <a:tcPr>
                     <a:solidFill>
                       <a:srgbClr val="FFFFFF"/>
-                    </a:solidFill>
-                  </a:tcPr>
-                </a:tc>
-              </a:tr>
-              <a:tr h="347472">
-                <a:tc>
-                  <a:txBody>
-                    <a:bodyPr lIns="40000" rIns="40000" tIns="10000" bIns="10000" wrap="square"/>
-                    <a:lstStyle/>
-                    <a:p>
-                      <a:pPr algn="l"/>
-                      <a:r>
-                        <a:rPr sz="1200">
-                          <a:solidFill>
-                            <a:srgbClr val="202020"/>
-                          </a:solidFill>
-                          <a:latin typeface="Microsoft YaHei"/>
-                        </a:rPr>
-                        <a:t>构建</a:t>
-                      </a:r>
-                    </a:p>
-                  </a:txBody>
-                  <a:tcPr>
-                    <a:solidFill>
-                      <a:srgbClr val="F0F4FF"/>
-                    </a:solidFill>
-                  </a:tcPr>
-                </a:tc>
-                <a:tc>
-                  <a:txBody>
-                    <a:bodyPr lIns="40000" rIns="40000" tIns="10000" bIns="10000" wrap="square"/>
-                    <a:lstStyle/>
-                    <a:p>
-                      <a:pPr algn="l"/>
-                      <a:r>
-                        <a:rPr sz="1200">
-                          <a:solidFill>
-                            <a:srgbClr val="202020"/>
-                          </a:solidFill>
-                          <a:latin typeface="Microsoft YaHei"/>
-                        </a:rPr>
-                        <a:t>AGP 8.5 / Gradle 8.14 + 8.4</a:t>
-                      </a:r>
-                    </a:p>
-                  </a:txBody>
-                  <a:tcPr>
-                    <a:solidFill>
-                      <a:srgbClr val="F0F4FF"/>
                     </a:solidFill>
                   </a:tcPr>
                 </a:tc>
@@ -7051,7 +10151,7 @@
                 </a:solidFill>
                 <a:latin typeface="Microsoft YaHei"/>
               </a:rPr>
-              <a:t>代码规模  ·  90 文件 / ~14,865 行</a:t>
+              <a:t>代码规模 (PR #54 后)  ·  约 19,250 行</a:t>
             </a:r>
           </a:p>
         </p:txBody>
@@ -7066,7 +10166,7 @@
         </p:nvGraphicFramePr>
         <p:xfrm>
           <a:off x="6400800" y="1828800"/>
-          <a:ext cx="5486400" cy="1737360"/>
+          <a:ext cx="5486400" cy="2103120"/>
         </p:xfrm>
         <a:graphic>
           <a:graphicData uri="http://schemas.openxmlformats.org/drawingml/2006/table">
@@ -7075,10 +10175,10 @@
                 <a:tableStyleId>{5C22544A-7EE6-4342-B048-85BDC9FD1C3A}</a:tableStyleId>
               </a:tblPr>
               <a:tblGrid>
-                <a:gridCol w="2011680"/>
-                <a:gridCol w="3474720"/>
+                <a:gridCol w="2194560"/>
+                <a:gridCol w="3291840"/>
               </a:tblGrid>
-              <a:tr h="347472">
+              <a:tr h="350520">
                 <a:tc>
                   <a:txBody>
                     <a:bodyPr lIns="40000" rIns="40000" tIns="15000" bIns="15000"/>
@@ -7126,21 +10226,21 @@
                   </a:tcPr>
                 </a:tc>
               </a:tr>
-              <a:tr h="347472">
-                <a:tc>
-                  <a:txBody>
-                    <a:bodyPr lIns="40000" rIns="40000" tIns="10000" bIns="10000" wrap="square"/>
-                    <a:lstStyle/>
-                    <a:p>
-                      <a:pPr algn="l"/>
-                      <a:r>
-                        <a:rPr sz="1200">
-                          <a:solidFill>
-                            <a:srgbClr val="202020"/>
-                          </a:solidFill>
-                          <a:latin typeface="Microsoft YaHei"/>
-                        </a:rPr>
-                        <a:t>客户端 Kotlin</a:t>
+              <a:tr h="350520">
+                <a:tc>
+                  <a:txBody>
+                    <a:bodyPr lIns="40000" rIns="40000" tIns="10000" bIns="10000" wrap="square"/>
+                    <a:lstStyle/>
+                    <a:p>
+                      <a:pPr algn="l"/>
+                      <a:r>
+                        <a:rPr sz="1200">
+                          <a:solidFill>
+                            <a:srgbClr val="202020"/>
+                          </a:solidFill>
+                          <a:latin typeface="Microsoft YaHei"/>
+                        </a:rPr>
+                        <a:t>:apps:android (UI+网络)</a:t>
                       </a:r>
                     </a:p>
                   </a:txBody>
@@ -7163,7 +10263,7 @@
                           </a:solidFill>
                           <a:latin typeface="Microsoft YaHei"/>
                         </a:rPr>
-                        <a:t>28 文件 · 8,909 行</a:t>
+                        <a:t>19 文件 · ~6,300 行</a:t>
                       </a:r>
                     </a:p>
                   </a:txBody>
@@ -7174,21 +10274,21 @@
                   </a:tcPr>
                 </a:tc>
               </a:tr>
-              <a:tr h="347472">
-                <a:tc>
-                  <a:txBody>
-                    <a:bodyPr lIns="40000" rIns="40000" tIns="10000" bIns="10000" wrap="square"/>
-                    <a:lstStyle/>
-                    <a:p>
-                      <a:pPr algn="l"/>
-                      <a:r>
-                        <a:rPr sz="1200">
-                          <a:solidFill>
-                            <a:srgbClr val="202020"/>
-                          </a:solidFill>
-                          <a:latin typeface="Microsoft YaHei"/>
-                        </a:rPr>
-                        <a:t>客户端 XML 布局</a:t>
+              <a:tr h="350520">
+                <a:tc>
+                  <a:txBody>
+                    <a:bodyPr lIns="40000" rIns="40000" tIns="10000" bIns="10000" wrap="square"/>
+                    <a:lstStyle/>
+                    <a:p>
+                      <a:pPr algn="l"/>
+                      <a:r>
+                        <a:rPr sz="1200">
+                          <a:solidFill>
+                            <a:srgbClr val="202020"/>
+                          </a:solidFill>
+                          <a:latin typeface="Microsoft YaHei"/>
+                        </a:rPr>
+                        <a:t>:apps:web (Compose MP)</a:t>
                       </a:r>
                     </a:p>
                   </a:txBody>
@@ -7211,7 +10311,7 @@
                           </a:solidFill>
                           <a:latin typeface="Microsoft YaHei"/>
                         </a:rPr>
-                        <a:t>56 文件 · 3,279 行</a:t>
+                        <a:t>23 文件 · ~3,470 行</a:t>
                       </a:r>
                     </a:p>
                   </a:txBody>
@@ -7222,21 +10322,21 @@
                   </a:tcPr>
                 </a:tc>
               </a:tr>
-              <a:tr h="347472">
-                <a:tc>
-                  <a:txBody>
-                    <a:bodyPr lIns="40000" rIns="40000" tIns="10000" bIns="10000" wrap="square"/>
-                    <a:lstStyle/>
-                    <a:p>
-                      <a:pPr algn="l"/>
-                      <a:r>
-                        <a:rPr sz="1200">
-                          <a:solidFill>
-                            <a:srgbClr val="202020"/>
-                          </a:solidFill>
-                          <a:latin typeface="Microsoft YaHei"/>
-                        </a:rPr>
-                        <a:t>服务端 Kotlin</a:t>
+              <a:tr h="350520">
+                <a:tc>
+                  <a:txBody>
+                    <a:bodyPr lIns="40000" rIns="40000" tIns="10000" bIns="10000" wrap="square"/>
+                    <a:lstStyle/>
+                    <a:p>
+                      <a:pPr algn="l"/>
+                      <a:r>
+                        <a:rPr sz="1200">
+                          <a:solidFill>
+                            <a:srgbClr val="202020"/>
+                          </a:solidFill>
+                          <a:latin typeface="Microsoft YaHei"/>
+                        </a:rPr>
+                        <a:t>:shared (KMP commonMain)</a:t>
                       </a:r>
                     </a:p>
                   </a:txBody>
@@ -7259,7 +10359,7 @@
                           </a:solidFill>
                           <a:latin typeface="Microsoft YaHei"/>
                         </a:rPr>
-                        <a:t>5 文件 · 2,161 行</a:t>
+                        <a:t>9 文件 · ~2,670 行</a:t>
                       </a:r>
                     </a:p>
                   </a:txBody>
@@ -7270,21 +10370,21 @@
                   </a:tcPr>
                 </a:tc>
               </a:tr>
-              <a:tr h="347472">
-                <a:tc>
-                  <a:txBody>
-                    <a:bodyPr lIns="40000" rIns="40000" tIns="10000" bIns="10000" wrap="square"/>
-                    <a:lstStyle/>
-                    <a:p>
-                      <a:pPr algn="l"/>
-                      <a:r>
-                        <a:rPr sz="1200">
-                          <a:solidFill>
-                            <a:srgbClr val="202020"/>
-                          </a:solidFill>
-                          <a:latin typeface="Microsoft YaHei"/>
-                        </a:rPr>
-                        <a:t>测试</a:t>
+              <a:tr h="350520">
+                <a:tc>
+                  <a:txBody>
+                    <a:bodyPr lIns="40000" rIns="40000" tIns="10000" bIns="10000" wrap="square"/>
+                    <a:lstStyle/>
+                    <a:p>
+                      <a:pPr algn="l"/>
+                      <a:r>
+                        <a:rPr sz="1200">
+                          <a:solidFill>
+                            <a:srgbClr val="202020"/>
+                          </a:solidFill>
+                          <a:latin typeface="Microsoft YaHei"/>
+                        </a:rPr>
+                        <a:t>:server (Ktor)</a:t>
                       </a:r>
                     </a:p>
                   </a:txBody>
@@ -7307,13 +10407,61 @@
                           </a:solidFill>
                           <a:latin typeface="Microsoft YaHei"/>
                         </a:rPr>
-                        <a:t>1 文件 · 516 行</a:t>
+                        <a:t>4 文件 · ~1,960 行</a:t>
                       </a:r>
                     </a:p>
                   </a:txBody>
                   <a:tcPr>
                     <a:solidFill>
                       <a:srgbClr val="F0F4FF"/>
+                    </a:solidFill>
+                  </a:tcPr>
+                </a:tc>
+              </a:tr>
+              <a:tr h="350520">
+                <a:tc>
+                  <a:txBody>
+                    <a:bodyPr lIns="40000" rIns="40000" tIns="10000" bIns="10000" wrap="square"/>
+                    <a:lstStyle/>
+                    <a:p>
+                      <a:pPr algn="l"/>
+                      <a:r>
+                        <a:rPr sz="1200">
+                          <a:solidFill>
+                            <a:srgbClr val="202020"/>
+                          </a:solidFill>
+                          <a:latin typeface="Microsoft YaHei"/>
+                        </a:rPr>
+                        <a:t>测试 + Android XML</a:t>
+                      </a:r>
+                    </a:p>
+                  </a:txBody>
+                  <a:tcPr>
+                    <a:solidFill>
+                      <a:srgbClr val="FFFFFF"/>
+                    </a:solidFill>
+                  </a:tcPr>
+                </a:tc>
+                <a:tc>
+                  <a:txBody>
+                    <a:bodyPr lIns="40000" rIns="40000" tIns="10000" bIns="10000" wrap="square"/>
+                    <a:lstStyle/>
+                    <a:p>
+                      <a:pPr algn="l"/>
+                      <a:r>
+                        <a:rPr sz="1200">
+                          <a:solidFill>
+                            <a:srgbClr val="202020"/>
+                          </a:solidFill>
+                          <a:latin typeface="Microsoft YaHei"/>
+                        </a:rPr>
+                        <a:t>24 文件 · ~4,850 行</a:t>
+                      </a:r>
+                    </a:p>
+                  </a:txBody>
+                  <a:tcPr>
+                    <a:solidFill>
+                      <a:srgbClr val="FFFFFF"/>
                     </a:solidFill>
                   </a:tcPr>
                 </a:tc>
@@ -7330,7 +10478,7 @@
         </p:nvSpPr>
         <p:spPr>
           <a:xfrm>
-            <a:off x="457200" y="3749039"/>
+            <a:off x="457200" y="4069080"/>
             <a:ext cx="11247120" cy="365760"/>
           </a:xfrm>
           <a:prstGeom prst="rect">
@@ -7352,7 +10500,7 @@
                 </a:solidFill>
                 <a:latin typeface="Microsoft YaHei"/>
               </a:rPr>
-              <a:t>5 阶段时间线  ·  33 PR  ·  123 commit  ·  3 个月</a:t>
+              <a:t>12 阶段时间线  ·  54 PR  ·  ~170 commit  ·  约 4 个月</a:t>
             </a:r>
           </a:p>
         </p:txBody>
@@ -7366,8 +10514,8 @@
           <p:nvPr/>
         </p:nvGraphicFramePr>
         <p:xfrm>
-          <a:off x="457200" y="4206240"/>
-          <a:ext cx="11247120" cy="2194560"/>
+          <a:off x="457200" y="4480560"/>
+          <a:ext cx="11247120" cy="1828800"/>
         </p:xfrm>
         <a:graphic>
           <a:graphicData uri="http://schemas.openxmlformats.org/drawingml/2006/table">
@@ -7380,7 +10528,7 @@
                 <a:gridCol w="3657600"/>
                 <a:gridCol w="5760720"/>
               </a:tblGrid>
-              <a:tr h="365760">
+              <a:tr h="203200">
                 <a:tc>
                   <a:txBody>
                     <a:bodyPr lIns="40000" rIns="40000" tIns="15000" bIns="15000"/>
@@ -7451,7 +10599,7 @@
                   </a:tcPr>
                 </a:tc>
               </a:tr>
-              <a:tr h="365760">
+              <a:tr h="203200">
                 <a:tc>
                   <a:txBody>
                     <a:bodyPr lIns="40000" rIns="40000" tIns="10000" bIns="10000" wrap="square"/>
@@ -7488,7 +10636,7 @@
                           </a:solidFill>
                           <a:latin typeface="Microsoft YaHei"/>
                         </a:rPr>
-                        <a:t>单机游戏开发 (PRs #1–14)</a:t>
+                        <a:t>单机游戏 (#1–14)</a:t>
                       </a:r>
                     </a:p>
                   </a:txBody>
@@ -7522,7 +10670,7 @@
                   </a:tcPr>
                 </a:tc>
               </a:tr>
-              <a:tr h="365760">
+              <a:tr h="203200">
                 <a:tc>
                   <a:txBody>
                     <a:bodyPr lIns="40000" rIns="40000" tIns="10000" bIns="10000" wrap="square"/>
@@ -7559,7 +10707,7 @@
                           </a:solidFill>
                           <a:latin typeface="Microsoft YaHei"/>
                         </a:rPr>
-                        <a:t>联网模式首次完整实现 (#16)</a:t>
+                        <a:t>联网首版 (#16)</a:t>
                       </a:r>
                     </a:p>
                   </a:txBody>
@@ -7582,7 +10730,7 @@
                           </a:solidFill>
                           <a:latin typeface="Microsoft YaHei"/>
                         </a:rPr>
-                        <a:t>服务端 + 网络层 + 联网UI · 一次性 6,529 行</a:t>
+                        <a:t>服务端 + 网络层 · 一次性 6,529 行</a:t>
                       </a:r>
                     </a:p>
                   </a:txBody>
@@ -7593,21 +10741,21 @@
                   </a:tcPr>
                 </a:tc>
               </a:tr>
-              <a:tr h="365760">
-                <a:tc>
-                  <a:txBody>
-                    <a:bodyPr lIns="40000" rIns="40000" tIns="10000" bIns="10000" wrap="square"/>
-                    <a:lstStyle/>
-                    <a:p>
-                      <a:pPr algn="l"/>
-                      <a:r>
-                        <a:rPr sz="1200">
-                          <a:solidFill>
-                            <a:srgbClr val="202020"/>
-                          </a:solidFill>
-                          <a:latin typeface="Microsoft YaHei"/>
-                        </a:rPr>
-                        <a:t>2026-05-01</a:t>
+              <a:tr h="203200">
+                <a:tc>
+                  <a:txBody>
+                    <a:bodyPr lIns="40000" rIns="40000" tIns="10000" bIns="10000" wrap="square"/>
+                    <a:lstStyle/>
+                    <a:p>
+                      <a:pPr algn="l"/>
+                      <a:r>
+                        <a:rPr sz="1200">
+                          <a:solidFill>
+                            <a:srgbClr val="202020"/>
+                          </a:solidFill>
+                          <a:latin typeface="Microsoft YaHei"/>
+                        </a:rPr>
+                        <a:t>2026-05-01~03</a:t>
                       </a:r>
                     </a:p>
                   </a:txBody>
@@ -7630,7 +10778,7 @@
                           </a:solidFill>
                           <a:latin typeface="Microsoft YaHei"/>
                         </a:rPr>
-                        <a:t>构建与编译修复 (#17–21)</a:t>
+                        <a:t>部署 (#17–31)</a:t>
                       </a:r>
                     </a:p>
                   </a:txBody>
@@ -7653,7 +10801,7 @@
                           </a:solidFill>
                           <a:latin typeface="Microsoft YaHei"/>
                         </a:rPr>
-                        <a:t>CI 失败 / Gradle 缺失 / 编译错误</a:t>
+                        <a:t>CI/Gradle/cleartext/503/Lobby UI</a:t>
                       </a:r>
                     </a:p>
                   </a:txBody>
@@ -7664,21 +10812,21 @@
                   </a:tcPr>
                 </a:tc>
               </a:tr>
-              <a:tr h="365760">
-                <a:tc>
-                  <a:txBody>
-                    <a:bodyPr lIns="40000" rIns="40000" tIns="10000" bIns="10000" wrap="square"/>
-                    <a:lstStyle/>
-                    <a:p>
-                      <a:pPr algn="l"/>
-                      <a:r>
-                        <a:rPr sz="1200">
-                          <a:solidFill>
-                            <a:srgbClr val="202020"/>
-                          </a:solidFill>
-                          <a:latin typeface="Microsoft YaHei"/>
-                        </a:rPr>
-                        <a:t>2026-05-03</a:t>
+              <a:tr h="203200">
+                <a:tc>
+                  <a:txBody>
+                    <a:bodyPr lIns="40000" rIns="40000" tIns="10000" bIns="10000" wrap="square"/>
+                    <a:lstStyle/>
+                    <a:p>
+                      <a:pPr algn="l"/>
+                      <a:r>
+                        <a:rPr sz="1200">
+                          <a:solidFill>
+                            <a:srgbClr val="202020"/>
+                          </a:solidFill>
+                          <a:latin typeface="Microsoft YaHei"/>
+                        </a:rPr>
+                        <a:t>2026-05-07</a:t>
                       </a:r>
                     </a:p>
                   </a:txBody>
@@ -7701,7 +10849,7 @@
                           </a:solidFill>
                           <a:latin typeface="Microsoft YaHei"/>
                         </a:rPr>
-                        <a:t>部署与连通性修复 (#22–31)</a:t>
+                        <a:t>深度修复 (#34)</a:t>
                       </a:r>
                     </a:p>
                   </a:txBody>
@@ -7724,7 +10872,7 @@
                           </a:solidFill>
                           <a:latin typeface="Microsoft YaHei"/>
                         </a:rPr>
-                        <a:t>服务器URL / cleartext / 503 / Lobby UI</a:t>
+                        <a:t>AI 全量审查×4轮 / 8 commit / ~50 Bug</a:t>
                       </a:r>
                     </a:p>
                   </a:txBody>
@@ -7735,21 +10883,21 @@
                   </a:tcPr>
                 </a:tc>
               </a:tr>
-              <a:tr h="365760">
-                <a:tc>
-                  <a:txBody>
-                    <a:bodyPr lIns="40000" rIns="40000" tIns="10000" bIns="10000" wrap="square"/>
-                    <a:lstStyle/>
-                    <a:p>
-                      <a:pPr algn="l"/>
-                      <a:r>
-                        <a:rPr sz="1200">
-                          <a:solidFill>
-                            <a:srgbClr val="202020"/>
-                          </a:solidFill>
-                          <a:latin typeface="Microsoft YaHei"/>
-                        </a:rPr>
-                        <a:t>2026-05-04~07</a:t>
+              <a:tr h="203200">
+                <a:tc>
+                  <a:txBody>
+                    <a:bodyPr lIns="40000" rIns="40000" tIns="10000" bIns="10000" wrap="square"/>
+                    <a:lstStyle/>
+                    <a:p>
+                      <a:pPr algn="l"/>
+                      <a:r>
+                        <a:rPr sz="1200">
+                          <a:solidFill>
+                            <a:srgbClr val="202020"/>
+                          </a:solidFill>
+                          <a:latin typeface="Microsoft YaHei"/>
+                        </a:rPr>
+                        <a:t>2026-05-08</a:t>
                       </a:r>
                     </a:p>
                   </a:txBody>
@@ -7772,7 +10920,7 @@
                           </a:solidFill>
                           <a:latin typeface="Microsoft YaHei"/>
                         </a:rPr>
-                        <a:t>游戏逻辑深度修复 (#32–33+)</a:t>
+                        <a:t>KMP 重构 + Web (#35)</a:t>
                       </a:r>
                     </a:p>
                   </a:txBody>
@@ -7795,13 +10943,226 @@
                           </a:solidFill>
                           <a:latin typeface="Microsoft YaHei"/>
                         </a:rPr>
-                        <a:t>AI 全量审查×4轮 / 8 commit / 50+ Bug</a:t>
+                        <a:t>抽 :shared / Compose MP wasmJs</a:t>
                       </a:r>
                     </a:p>
                   </a:txBody>
                   <a:tcPr>
                     <a:solidFill>
                       <a:srgbClr val="FFFFFF"/>
+                    </a:solidFill>
+                  </a:tcPr>
+                </a:tc>
+              </a:tr>
+              <a:tr h="203200">
+                <a:tc>
+                  <a:txBody>
+                    <a:bodyPr lIns="40000" rIns="40000" tIns="10000" bIns="10000" wrap="square"/>
+                    <a:lstStyle/>
+                    <a:p>
+                      <a:pPr algn="l"/>
+                      <a:r>
+                        <a:rPr sz="1200">
+                          <a:solidFill>
+                            <a:srgbClr val="202020"/>
+                          </a:solidFill>
+                          <a:latin typeface="Microsoft YaHei"/>
+                        </a:rPr>
+                        <a:t>2026-05-08</a:t>
+                      </a:r>
+                    </a:p>
+                  </a:txBody>
+                  <a:tcPr>
+                    <a:solidFill>
+                      <a:srgbClr val="F0F4FF"/>
+                    </a:solidFill>
+                  </a:tcPr>
+                </a:tc>
+                <a:tc>
+                  <a:txBody>
+                    <a:bodyPr lIns="40000" rIns="40000" tIns="10000" bIns="10000" wrap="square"/>
+                    <a:lstStyle/>
+                    <a:p>
+                      <a:pPr algn="l"/>
+                      <a:r>
+                        <a:rPr sz="1200">
+                          <a:solidFill>
+                            <a:srgbClr val="202020"/>
+                          </a:solidFill>
+                          <a:latin typeface="Microsoft YaHei"/>
+                        </a:rPr>
+                        <a:t>Harness H1–H5 (#36–43)</a:t>
+                      </a:r>
+                    </a:p>
+                  </a:txBody>
+                  <a:tcPr>
+                    <a:solidFill>
+                      <a:srgbClr val="F0F4FF"/>
+                    </a:solidFill>
+                  </a:tcPr>
+                </a:tc>
+                <a:tc>
+                  <a:txBody>
+                    <a:bodyPr lIns="40000" rIns="40000" tIns="10000" bIns="10000" wrap="square"/>
+                    <a:lstStyle/>
+                    <a:p>
+                      <a:pPr algn="l"/>
+                      <a:r>
+                        <a:rPr sz="1200">
+                          <a:solidFill>
+                            <a:srgbClr val="202020"/>
+                          </a:solidFill>
+                          <a:latin typeface="Microsoft YaHei"/>
+                        </a:rPr>
+                        <a:t>hooks / TDD-gate / pr-reviewer</a:t>
+                      </a:r>
+                    </a:p>
+                  </a:txBody>
+                  <a:tcPr>
+                    <a:solidFill>
+                      <a:srgbClr val="F0F4FF"/>
+                    </a:solidFill>
+                  </a:tcPr>
+                </a:tc>
+              </a:tr>
+              <a:tr h="203200">
+                <a:tc>
+                  <a:txBody>
+                    <a:bodyPr lIns="40000" rIns="40000" tIns="10000" bIns="10000" wrap="square"/>
+                    <a:lstStyle/>
+                    <a:p>
+                      <a:pPr algn="l"/>
+                      <a:r>
+                        <a:rPr sz="1200">
+                          <a:solidFill>
+                            <a:srgbClr val="202020"/>
+                          </a:solidFill>
+                          <a:latin typeface="Microsoft YaHei"/>
+                        </a:rPr>
+                        <a:t>2026-05-09</a:t>
+                      </a:r>
+                    </a:p>
+                  </a:txBody>
+                  <a:tcPr>
+                    <a:solidFill>
+                      <a:srgbClr val="FFFFFF"/>
+                    </a:solidFill>
+                  </a:tcPr>
+                </a:tc>
+                <a:tc>
+                  <a:txBody>
+                    <a:bodyPr lIns="40000" rIns="40000" tIns="10000" bIns="10000" wrap="square"/>
+                    <a:lstStyle/>
+                    <a:p>
+                      <a:pPr algn="l"/>
+                      <a:r>
+                        <a:rPr sz="1200">
+                          <a:solidFill>
+                            <a:srgbClr val="202020"/>
+                          </a:solidFill>
+                          <a:latin typeface="Microsoft YaHei"/>
+                        </a:rPr>
+                        <a:t>Web UI 4 阶段 (#47–50)</a:t>
+                      </a:r>
+                    </a:p>
+                  </a:txBody>
+                  <a:tcPr>
+                    <a:solidFill>
+                      <a:srgbClr val="FFFFFF"/>
+                    </a:solidFill>
+                  </a:tcPr>
+                </a:tc>
+                <a:tc>
+                  <a:txBody>
+                    <a:bodyPr lIns="40000" rIns="40000" tIns="10000" bIns="10000" wrap="square"/>
+                    <a:lstStyle/>
+                    <a:p>
+                      <a:pPr algn="l"/>
+                      <a:r>
+                        <a:rPr sz="1200">
+                          <a:solidFill>
+                            <a:srgbClr val="202020"/>
+                          </a:solidFill>
+                          <a:latin typeface="Microsoft YaHei"/>
+                        </a:rPr>
+                        <a:t>菜单/响应式/视觉/Android 同等</a:t>
+                      </a:r>
+                    </a:p>
+                  </a:txBody>
+                  <a:tcPr>
+                    <a:solidFill>
+                      <a:srgbClr val="FFFFFF"/>
+                    </a:solidFill>
+                  </a:tcPr>
+                </a:tc>
+              </a:tr>
+              <a:tr h="203200">
+                <a:tc>
+                  <a:txBody>
+                    <a:bodyPr lIns="40000" rIns="40000" tIns="10000" bIns="10000" wrap="square"/>
+                    <a:lstStyle/>
+                    <a:p>
+                      <a:pPr algn="l"/>
+                      <a:r>
+                        <a:rPr sz="1200">
+                          <a:solidFill>
+                            <a:srgbClr val="202020"/>
+                          </a:solidFill>
+                          <a:latin typeface="Microsoft YaHei"/>
+                        </a:rPr>
+                        <a:t>2026-05-10</a:t>
+                      </a:r>
+                    </a:p>
+                  </a:txBody>
+                  <a:tcPr>
+                    <a:solidFill>
+                      <a:srgbClr val="F0F4FF"/>
+                    </a:solidFill>
+                  </a:tcPr>
+                </a:tc>
+                <a:tc>
+                  <a:txBody>
+                    <a:bodyPr lIns="40000" rIns="40000" tIns="10000" bIns="10000" wrap="square"/>
+                    <a:lstStyle/>
+                    <a:p>
+                      <a:pPr algn="l"/>
+                      <a:r>
+                        <a:rPr sz="1200">
+                          <a:solidFill>
+                            <a:srgbClr val="202020"/>
+                          </a:solidFill>
+                          <a:latin typeface="Microsoft YaHei"/>
+                        </a:rPr>
+                        <a:t>AI 接管 + 单机修复 (#51–54)</a:t>
+                      </a:r>
+                    </a:p>
+                  </a:txBody>
+                  <a:tcPr>
+                    <a:solidFill>
+                      <a:srgbClr val="F0F4FF"/>
+                    </a:solidFill>
+                  </a:tcPr>
+                </a:tc>
+                <a:tc>
+                  <a:txBody>
+                    <a:bodyPr lIns="40000" rIns="40000" tIns="10000" bIns="10000" wrap="square"/>
+                    <a:lstStyle/>
+                    <a:p>
+                      <a:pPr algn="l"/>
+                      <a:r>
+                        <a:rPr sz="1200">
+                          <a:solidFill>
+                            <a:srgbClr val="202020"/>
+                          </a:solidFill>
+                          <a:latin typeface="Microsoft YaHei"/>
+                        </a:rPr>
+                        <a:t>G34-G38 · PROTOCOL_VERSION 3</a:t>
+                      </a:r>
+                    </a:p>
+                  </a:txBody>
+                  <a:tcPr>
+                    <a:solidFill>
+                      <a:srgbClr val="F0F4FF"/>
                     </a:solidFill>
                   </a:tcPr>
                 </a:tc>
@@ -7840,7 +11201,7 @@
                 </a:solidFill>
                 <a:latin typeface="Microsoft YaHei"/>
               </a:rPr>
-              <a:t>2 / 13</a:t>
+              <a:t>2 / 16</a:t>
             </a:r>
           </a:p>
         </p:txBody>
@@ -7893,7 +11254,7 @@
                 </a:solidFill>
                 <a:latin typeface="Microsoft YaHei"/>
               </a:rPr>
-              <a:t>二、架构设计：双模式共生</a:t>
+              <a:t>二、架构设计：多端共享 + 服务端权威</a:t>
             </a:r>
           </a:p>
         </p:txBody>
@@ -7950,7 +11311,7 @@
         <p:spPr>
           <a:xfrm>
             <a:off x="457200" y="960120"/>
-            <a:ext cx="5486400" cy="4754880"/>
+            <a:ext cx="5760720" cy="4937760"/>
           </a:xfrm>
           <a:prstGeom prst="rect">
             <a:avLst/>
@@ -7984,266 +11345,310 @@
           <a:p>
             <a:pPr algn="ctr"/>
             <a:r>
-              <a:rPr sz="1200">
+              <a:rPr sz="1000">
                 <a:solidFill>
                   <a:srgbClr val="202020"/>
                 </a:solidFill>
                 <a:latin typeface="Consolas"/>
               </a:rPr>
-              <a:t>┌──────────────────────────────────────┐</a:t>
-            </a:r>
-          </a:p>
-          <a:p>
-            <a:r>
-              <a:rPr sz="1200">
+              <a:t>┌────────────────────────┐  ┌─────────────────┐</a:t>
+            </a:r>
+          </a:p>
+          <a:p>
+            <a:r>
+              <a:rPr sz="1000">
                 <a:solidFill>
                   <a:srgbClr val="202020"/>
                 </a:solidFill>
                 <a:latin typeface="Consolas"/>
               </a:rPr>
-              <a:t>│  Android 客户端                      │</a:t>
-            </a:r>
-          </a:p>
-          <a:p>
-            <a:r>
-              <a:rPr sz="1200">
+              <a:t>│ :apps:android (XML)    │  │ :apps:web (Wasm)│</a:t>
+            </a:r>
+          </a:p>
+          <a:p>
+            <a:r>
+              <a:rPr sz="1000">
                 <a:solidFill>
                   <a:srgbClr val="202020"/>
                 </a:solidFill>
                 <a:latin typeface="Consolas"/>
               </a:rPr>
-              <a:t>│   GameActivity (单机)                │</a:t>
-            </a:r>
-          </a:p>
-          <a:p>
-            <a:r>
-              <a:rPr sz="1200">
+              <a:t>│ GameActivity / Online- │  │ Compose MP UI   │</a:t>
+            </a:r>
+          </a:p>
+          <a:p>
+            <a:r>
+              <a:rPr sz="1000">
                 <a:solidFill>
                   <a:srgbClr val="202020"/>
                 </a:solidFill>
                 <a:latin typeface="Consolas"/>
               </a:rPr>
-              <a:t>│   OnlineGameActivity (联网)          │</a:t>
-            </a:r>
-          </a:p>
-          <a:p>
-            <a:r>
-              <a:rPr sz="1200">
+              <a:t>│ MultiplayerGameEngine  │  │ AppViewModel    │</a:t>
+            </a:r>
+          </a:p>
+          <a:p>
+            <a:r>
+              <a:rPr sz="1000">
                 <a:solidFill>
                   <a:srgbClr val="202020"/>
                 </a:solidFill>
                 <a:latin typeface="Consolas"/>
               </a:rPr>
-              <a:t>│                                      │</a:t>
-            </a:r>
-          </a:p>
-          <a:p>
-            <a:r>
-              <a:rPr sz="1200">
+              <a:t>└──────────┬─────────────┘  └────────┬────────┘</a:t>
+            </a:r>
+          </a:p>
+          <a:p>
+            <a:r>
+              <a:rPr sz="1000">
                 <a:solidFill>
                   <a:srgbClr val="202020"/>
                 </a:solidFill>
                 <a:latin typeface="Consolas"/>
               </a:rPr>
-              <a:t>│   engine/  CardRules                 │</a:t>
-            </a:r>
-          </a:p>
-          <a:p>
-            <a:r>
-              <a:rPr sz="1200">
+              <a:t>           │ depends on              │</a:t>
+            </a:r>
+          </a:p>
+          <a:p>
+            <a:r>
+              <a:rPr sz="1000">
                 <a:solidFill>
                   <a:srgbClr val="202020"/>
                 </a:solidFill>
                 <a:latin typeface="Consolas"/>
               </a:rPr>
-              <a:t>│            SettlementCalculator      │</a:t>
-            </a:r>
-          </a:p>
-          <a:p>
-            <a:r>
-              <a:rPr sz="1200">
+              <a:t>           ▼                         ▼</a:t>
+            </a:r>
+          </a:p>
+          <a:p>
+            <a:r>
+              <a:rPr sz="1000">
                 <a:solidFill>
                   <a:srgbClr val="202020"/>
                 </a:solidFill>
                 <a:latin typeface="Consolas"/>
               </a:rPr>
-              <a:t>│            GameEngine /              │</a:t>
-            </a:r>
-          </a:p>
-          <a:p>
-            <a:r>
-              <a:rPr sz="1200">
+              <a:t>        ┌──────────────────────────────┐</a:t>
+            </a:r>
+          </a:p>
+          <a:p>
+            <a:r>
+              <a:rPr sz="1000">
                 <a:solidFill>
                   <a:srgbClr val="202020"/>
                 </a:solidFill>
                 <a:latin typeface="Consolas"/>
               </a:rPr>
-              <a:t>│            MultiplayerGameEngine     │</a:t>
-            </a:r>
-          </a:p>
-          <a:p>
-            <a:r>
-              <a:rPr sz="1200">
+              <a:t>        │  :shared (KMP commonMain)    │</a:t>
+            </a:r>
+          </a:p>
+          <a:p>
+            <a:r>
+              <a:rPr sz="1000">
                 <a:solidFill>
                   <a:srgbClr val="202020"/>
                 </a:solidFill>
                 <a:latin typeface="Consolas"/>
               </a:rPr>
-              <a:t>│                                      │</a:t>
-            </a:r>
-          </a:p>
-          <a:p>
-            <a:r>
-              <a:rPr sz="1200">
+              <a:t>        │  Card · Deck · Player        │</a:t>
+            </a:r>
+          </a:p>
+          <a:p>
+            <a:r>
+              <a:rPr sz="1000">
                 <a:solidFill>
                   <a:srgbClr val="202020"/>
                 </a:solidFill>
                 <a:latin typeface="Consolas"/>
               </a:rPr>
-              <a:t>│   network/ NetworkManager            │</a:t>
-            </a:r>
-          </a:p>
-          <a:p>
-            <a:r>
-              <a:rPr sz="1200">
+              <a:t>        │  CardRules · Settlement      │</a:t>
+            </a:r>
+          </a:p>
+          <a:p>
+            <a:r>
+              <a:rPr sz="1000">
                 <a:solidFill>
                   <a:srgbClr val="202020"/>
                 </a:solidFill>
                 <a:latin typeface="Consolas"/>
               </a:rPr>
-              <a:t>│            RoomManager               │</a:t>
-            </a:r>
-          </a:p>
-          <a:p>
-            <a:r>
-              <a:rPr sz="1200">
+              <a:t>        │  GameEngine · AIPlayer       │</a:t>
+            </a:r>
+          </a:p>
+          <a:p>
+            <a:r>
+              <a:rPr sz="1000">
                 <a:solidFill>
                   <a:srgbClr val="202020"/>
                 </a:solidFill>
                 <a:latin typeface="Consolas"/>
               </a:rPr>
-              <a:t>│            GameSyncManager           │</a:t>
-            </a:r>
-          </a:p>
-          <a:p>
-            <a:r>
-              <a:rPr sz="1200">
+              <a:t>        │  GameMessage (DTO + sealed)  │</a:t>
+            </a:r>
+          </a:p>
+          <a:p>
+            <a:r>
+              <a:rPr sz="1000">
                 <a:solidFill>
                   <a:srgbClr val="202020"/>
                 </a:solidFill>
                 <a:latin typeface="Consolas"/>
               </a:rPr>
-              <a:t>└──────────────────────────────────────┘</a:t>
-            </a:r>
-          </a:p>
-          <a:p>
-            <a:r>
-              <a:rPr sz="1200">
+              <a:t>        │  + commonTest (40+ 用例)     │</a:t>
+            </a:r>
+          </a:p>
+          <a:p>
+            <a:r>
+              <a:rPr sz="1000">
                 <a:solidFill>
                   <a:srgbClr val="202020"/>
                 </a:solidFill>
                 <a:latin typeface="Consolas"/>
               </a:rPr>
-              <a:t>              ▲ WebSocket /game (JSON)</a:t>
-            </a:r>
-          </a:p>
-          <a:p>
-            <a:r>
-              <a:rPr sz="1200">
+              <a:t>        └────────────┬─────────────────┘</a:t>
+            </a:r>
+          </a:p>
+          <a:p>
+            <a:r>
+              <a:rPr sz="1000">
                 <a:solidFill>
                   <a:srgbClr val="202020"/>
                 </a:solidFill>
                 <a:latin typeface="Consolas"/>
               </a:rPr>
-              <a:t>              ▼</a:t>
-            </a:r>
-          </a:p>
-          <a:p>
-            <a:r>
-              <a:rPr sz="1200">
+              <a:t>                     │</a:t>
+            </a:r>
+          </a:p>
+          <a:p>
+            <a:r>
+              <a:rPr sz="1000">
                 <a:solidFill>
                   <a:srgbClr val="202020"/>
                 </a:solidFill>
                 <a:latin typeface="Consolas"/>
               </a:rPr>
-              <a:t>┌──────────────────────────────────────┐</a:t>
-            </a:r>
-          </a:p>
-          <a:p>
-            <a:r>
-              <a:rPr sz="1200">
+              <a:t>                     ▼</a:t>
+            </a:r>
+          </a:p>
+          <a:p>
+            <a:r>
+              <a:rPr sz="1000">
                 <a:solidFill>
                   <a:srgbClr val="202020"/>
                 </a:solidFill>
                 <a:latin typeface="Consolas"/>
               </a:rPr>
-              <a:t>│  服务端 (Ktor + Netty)               │</a:t>
-            </a:r>
-          </a:p>
-          <a:p>
-            <a:r>
-              <a:rPr sz="1200">
+              <a:t>        ┌──────────────────────────────┐</a:t>
+            </a:r>
+          </a:p>
+          <a:p>
+            <a:r>
+              <a:rPr sz="1000">
                 <a:solidFill>
                   <a:srgbClr val="202020"/>
                 </a:solidFill>
                 <a:latin typeface="Consolas"/>
               </a:rPr>
-              <a:t>│   ServerRoomManager  房间/AI填充     │</a:t>
-            </a:r>
-          </a:p>
-          <a:p>
-            <a:r>
-              <a:rPr sz="1200">
+              <a:t>        │  :server (Ktor + Netty)      │</a:t>
+            </a:r>
+          </a:p>
+          <a:p>
+            <a:r>
+              <a:rPr sz="1000">
                 <a:solidFill>
                   <a:srgbClr val="202020"/>
                 </a:solidFill>
                 <a:latin typeface="Consolas"/>
               </a:rPr>
-              <a:t>│   ServerGameManager  权威状态        │</a:t>
-            </a:r>
-          </a:p>
-          <a:p>
-            <a:r>
-              <a:rPr sz="1200">
+              <a:t>        │  ServerRoomManager           │</a:t>
+            </a:r>
+          </a:p>
+          <a:p>
+            <a:r>
+              <a:rPr sz="1000">
                 <a:solidFill>
                   <a:srgbClr val="202020"/>
                 </a:solidFill>
                 <a:latin typeface="Consolas"/>
               </a:rPr>
-              <a:t>│     · 每房间 Mutex                   │</a:t>
-            </a:r>
-          </a:p>
-          <a:p>
-            <a:r>
-              <a:rPr sz="1200">
+              <a:t>        │  ServerGameManager           │</a:t>
+            </a:r>
+          </a:p>
+          <a:p>
+            <a:r>
+              <a:rPr sz="1000">
                 <a:solidFill>
                   <a:srgbClr val="202020"/>
                 </a:solidFill>
                 <a:latin typeface="Consolas"/>
               </a:rPr>
-              <a:t>│     · 三级 AI 回退 + 兜底推进        │</a:t>
-            </a:r>
-          </a:p>
-          <a:p>
-            <a:r>
-              <a:rPr sz="1200">
+              <a:t>        │   · 每房间 Mutex             │</a:t>
+            </a:r>
+          </a:p>
+          <a:p>
+            <a:r>
+              <a:rPr sz="1000">
                 <a:solidFill>
                   <a:srgbClr val="202020"/>
                 </a:solidFill>
                 <a:latin typeface="Consolas"/>
               </a:rPr>
-              <a:t>│     · 30s 回合超时                   │</a:t>
-            </a:r>
-          </a:p>
-          <a:p>
-            <a:r>
-              <a:rPr sz="1200">
+              <a:t>        │   · 三级 AI 回退 + 兜底推进  │</a:t>
+            </a:r>
+          </a:p>
+          <a:p>
+            <a:r>
+              <a:rPr sz="1000">
                 <a:solidFill>
                   <a:srgbClr val="202020"/>
                 </a:solidFill>
                 <a:latin typeface="Consolas"/>
               </a:rPr>
-              <a:t>└──────────────────────────────────────┘</a:t>
+              <a:t>        │   · 30s 回合超时             │</a:t>
+            </a:r>
+          </a:p>
+          <a:p>
+            <a:r>
+              <a:rPr sz="1000">
+                <a:solidFill>
+                  <a:srgbClr val="202020"/>
+                </a:solidFill>
+                <a:latin typeface="Consolas"/>
+              </a:rPr>
+              <a:t>        └────────────┬─────────────────┘</a:t>
+            </a:r>
+          </a:p>
+          <a:p>
+            <a:r>
+              <a:rPr sz="1000">
+                <a:solidFill>
+                  <a:srgbClr val="202020"/>
+                </a:solidFill>
+                <a:latin typeface="Consolas"/>
+              </a:rPr>
+              <a:t>                     │ WebSocket /game (JSON + classDiscriminator)</a:t>
+            </a:r>
+          </a:p>
+          <a:p>
+            <a:r>
+              <a:rPr sz="1000">
+                <a:solidFill>
+                  <a:srgbClr val="202020"/>
+                </a:solidFill>
+                <a:latin typeface="Consolas"/>
+              </a:rPr>
+              <a:t>                     ▼</a:t>
+            </a:r>
+          </a:p>
+          <a:p>
+            <a:r>
+              <a:rPr sz="1000">
+                <a:solidFill>
+                  <a:srgbClr val="202020"/>
+                </a:solidFill>
+                <a:latin typeface="Consolas"/>
+              </a:rPr>
+              <a:t>        Caddy 80/443 → 127.0.0.1:8080</a:t>
             </a:r>
           </a:p>
         </p:txBody>
@@ -8256,8 +11661,8 @@
         </p:nvSpPr>
         <p:spPr>
           <a:xfrm>
-            <a:off x="6217920" y="960120"/>
-            <a:ext cx="5669280" cy="365760"/>
+            <a:off x="6400800" y="960120"/>
+            <a:ext cx="5486400" cy="365760"/>
           </a:xfrm>
           <a:prstGeom prst="rect">
             <a:avLst/>
@@ -8292,8 +11697,8 @@
           <p:nvPr/>
         </p:nvGraphicFramePr>
         <p:xfrm>
-          <a:off x="6217920" y="1371600"/>
-          <a:ext cx="5669280" cy="2103120"/>
+          <a:off x="6400800" y="1371600"/>
+          <a:ext cx="5486400" cy="2560320"/>
         </p:xfrm>
         <a:graphic>
           <a:graphicData uri="http://schemas.openxmlformats.org/drawingml/2006/table">
@@ -8303,9 +11708,9 @@
               </a:tblPr>
               <a:tblGrid>
                 <a:gridCol w="1371600"/>
-                <a:gridCol w="4297680"/>
+                <a:gridCol w="4114800"/>
               </a:tblGrid>
-              <a:tr h="420624">
+              <a:tr h="365760">
                 <a:tc>
                   <a:txBody>
                     <a:bodyPr lIns="40000" rIns="40000" tIns="15000" bIns="15000"/>
@@ -8353,7 +11758,7 @@
                   </a:tcPr>
                 </a:tc>
               </a:tr>
-              <a:tr h="420624">
+              <a:tr h="365760">
                 <a:tc>
                   <a:txBody>
                     <a:bodyPr lIns="40000" rIns="40000" tIns="10000" bIns="10000" wrap="square"/>
@@ -8401,7 +11806,7 @@
                   </a:tcPr>
                 </a:tc>
               </a:tr>
-              <a:tr h="420624">
+              <a:tr h="365760">
                 <a:tc>
                   <a:txBody>
                     <a:bodyPr lIns="40000" rIns="40000" tIns="10000" bIns="10000" wrap="square"/>
@@ -8449,7 +11854,7 @@
                   </a:tcPr>
                 </a:tc>
               </a:tr>
-              <a:tr h="420624">
+              <a:tr h="365760">
                 <a:tc>
                   <a:txBody>
                     <a:bodyPr lIns="40000" rIns="40000" tIns="10000" bIns="10000" wrap="square"/>
@@ -8497,7 +11902,7 @@
                   </a:tcPr>
                 </a:tc>
               </a:tr>
-              <a:tr h="420624">
+              <a:tr h="365760">
                 <a:tc>
                   <a:txBody>
                     <a:bodyPr lIns="40000" rIns="40000" tIns="10000" bIns="10000" wrap="square"/>
@@ -8535,6 +11940,102 @@
                           <a:latin typeface="Microsoft YaHei"/>
                         </a:rPr>
                         <a:t>isAISubstitute 标记，不删玩家槽</a:t>
+                      </a:r>
+                    </a:p>
+                  </a:txBody>
+                  <a:tcPr>
+                    <a:solidFill>
+                      <a:srgbClr val="F0F4FF"/>
+                    </a:solidFill>
+                  </a:tcPr>
+                </a:tc>
+              </a:tr>
+              <a:tr h="365760">
+                <a:tc>
+                  <a:txBody>
+                    <a:bodyPr lIns="40000" rIns="40000" tIns="10000" bIns="10000" wrap="square"/>
+                    <a:lstStyle/>
+                    <a:p>
+                      <a:pPr algn="l"/>
+                      <a:r>
+                        <a:rPr sz="1200">
+                          <a:solidFill>
+                            <a:srgbClr val="202020"/>
+                          </a:solidFill>
+                          <a:latin typeface="Microsoft YaHei"/>
+                        </a:rPr>
+                        <a:t>共享逻辑</a:t>
+                      </a:r>
+                    </a:p>
+                  </a:txBody>
+                  <a:tcPr>
+                    <a:solidFill>
+                      <a:srgbClr val="FFFFFF"/>
+                    </a:solidFill>
+                  </a:tcPr>
+                </a:tc>
+                <a:tc>
+                  <a:txBody>
+                    <a:bodyPr lIns="40000" rIns="40000" tIns="10000" bIns="10000" wrap="square"/>
+                    <a:lstStyle/>
+                    <a:p>
+                      <a:pPr algn="l"/>
+                      <a:r>
+                        <a:rPr sz="1200">
+                          <a:solidFill>
+                            <a:srgbClr val="202020"/>
+                          </a:solidFill>
+                          <a:latin typeface="Microsoft YaHei"/>
+                        </a:rPr>
+                        <a:t>:shared KMP（编译期保证一致）</a:t>
+                      </a:r>
+                    </a:p>
+                  </a:txBody>
+                  <a:tcPr>
+                    <a:solidFill>
+                      <a:srgbClr val="FFFFFF"/>
+                    </a:solidFill>
+                  </a:tcPr>
+                </a:tc>
+              </a:tr>
+              <a:tr h="365760">
+                <a:tc>
+                  <a:txBody>
+                    <a:bodyPr lIns="40000" rIns="40000" tIns="10000" bIns="10000" wrap="square"/>
+                    <a:lstStyle/>
+                    <a:p>
+                      <a:pPr algn="l"/>
+                      <a:r>
+                        <a:rPr sz="1200">
+                          <a:solidFill>
+                            <a:srgbClr val="202020"/>
+                          </a:solidFill>
+                          <a:latin typeface="Microsoft YaHei"/>
+                        </a:rPr>
+                        <a:t>协议版本</a:t>
+                      </a:r>
+                    </a:p>
+                  </a:txBody>
+                  <a:tcPr>
+                    <a:solidFill>
+                      <a:srgbClr val="F0F4FF"/>
+                    </a:solidFill>
+                  </a:tcPr>
+                </a:tc>
+                <a:tc>
+                  <a:txBody>
+                    <a:bodyPr lIns="40000" rIns="40000" tIns="10000" bIns="10000" wrap="square"/>
+                    <a:lstStyle/>
+                    <a:p>
+                      <a:pPr algn="l"/>
+                      <a:r>
+                        <a:rPr sz="1200">
+                          <a:solidFill>
+                            <a:srgbClr val="202020"/>
+                          </a:solidFill>
+                          <a:latin typeface="Microsoft YaHei"/>
+                        </a:rPr>
+                        <a:t>PROTOCOL_VERSION=3 · 握手时拒老客户端</a:t>
                       </a:r>
                     </a:p>
                   </a:txBody>
@@ -8557,8 +12058,8 @@
         </p:nvSpPr>
         <p:spPr>
           <a:xfrm>
-            <a:off x="6217920" y="3657600"/>
-            <a:ext cx="5669280" cy="365760"/>
+            <a:off x="6400800" y="4114800"/>
+            <a:ext cx="5486400" cy="365760"/>
           </a:xfrm>
           <a:prstGeom prst="rect">
             <a:avLst/>
@@ -8575,11 +12076,11 @@
             <a:r>
               <a:rPr sz="1600" b="1">
                 <a:solidFill>
-                  <a:srgbClr val="E53935"/>
+                  <a:srgbClr val="2E7D32"/>
                 </a:solidFill>
                 <a:latin typeface="Microsoft YaHei"/>
               </a:rPr>
-              <a:t>架构遗憾（后期成本）</a:t>
+              <a:t>架构演进：从遗憾到修复</a:t>
             </a:r>
           </a:p>
         </p:txBody>
@@ -8593,8 +12094,8 @@
           <p:nvPr/>
         </p:nvGraphicFramePr>
         <p:xfrm>
-          <a:off x="6217920" y="4069080"/>
-          <a:ext cx="5669280" cy="1554480"/>
+          <a:off x="6400800" y="4526280"/>
+          <a:ext cx="5486400" cy="1371600"/>
         </p:xfrm>
         <a:graphic>
           <a:graphicData uri="http://schemas.openxmlformats.org/drawingml/2006/table">
@@ -8603,10 +12104,10 @@
                 <a:tableStyleId>{5C22544A-7EE6-4342-B048-85BDC9FD1C3A}</a:tableStyleId>
               </a:tblPr>
               <a:tblGrid>
-                <a:gridCol w="2286000"/>
-                <a:gridCol w="3383280"/>
+                <a:gridCol w="1828800"/>
+                <a:gridCol w="3657600"/>
               </a:tblGrid>
-              <a:tr h="388620">
+              <a:tr h="342900">
                 <a:tc>
                   <a:txBody>
                     <a:bodyPr lIns="40000" rIns="40000" tIns="15000" bIns="15000"/>
@@ -8626,7 +12127,7 @@
                   </a:txBody>
                   <a:tcPr>
                     <a:solidFill>
-                      <a:srgbClr val="E53935"/>
+                      <a:srgbClr val="2E7D32"/>
                     </a:solidFill>
                   </a:tcPr>
                 </a:tc>
@@ -8643,32 +12144,32 @@
                           </a:solidFill>
                           <a:latin typeface="Microsoft YaHei"/>
                         </a:rPr>
-                        <a:t>影响</a:t>
-                      </a:r>
-                    </a:p>
-                  </a:txBody>
-                  <a:tcPr>
-                    <a:solidFill>
-                      <a:srgbClr val="E53935"/>
+                        <a:t>状态</a:t>
+                      </a:r>
+                    </a:p>
+                  </a:txBody>
+                  <a:tcPr>
+                    <a:solidFill>
+                      <a:srgbClr val="2E7D32"/>
                     </a:solidFill>
                   </a:tcPr>
                 </a:tc>
               </a:tr>
-              <a:tr h="388620">
-                <a:tc>
-                  <a:txBody>
-                    <a:bodyPr lIns="40000" rIns="40000" tIns="10000" bIns="10000" wrap="square"/>
-                    <a:lstStyle/>
-                    <a:p>
-                      <a:pPr algn="l"/>
-                      <a:r>
-                        <a:rPr sz="1200">
-                          <a:solidFill>
-                            <a:srgbClr val="202020"/>
-                          </a:solidFill>
-                          <a:latin typeface="Microsoft YaHei"/>
-                        </a:rPr>
-                        <a:t>未提取 KMP 共享规则</a:t>
+              <a:tr h="342900">
+                <a:tc>
+                  <a:txBody>
+                    <a:bodyPr lIns="40000" rIns="40000" tIns="10000" bIns="10000" wrap="square"/>
+                    <a:lstStyle/>
+                    <a:p>
+                      <a:pPr algn="l"/>
+                      <a:r>
+                        <a:rPr sz="1200">
+                          <a:solidFill>
+                            <a:srgbClr val="202020"/>
+                          </a:solidFill>
+                          <a:latin typeface="Microsoft YaHei"/>
+                        </a:rPr>
+                        <a:t>KMP 共享模块</a:t>
                       </a:r>
                     </a:p>
                   </a:txBody>
@@ -8691,7 +12192,7 @@
                           </a:solidFill>
                           <a:latin typeface="Microsoft YaHei"/>
                         </a:rPr>
-                        <a:t>导致两端 3 处不一致</a:t>
+                        <a:t>✅ PR #35 + H3：编译期唯一份</a:t>
                       </a:r>
                     </a:p>
                   </a:txBody>
@@ -8702,21 +12203,21 @@
                   </a:tcPr>
                 </a:tc>
               </a:tr>
-              <a:tr h="388620">
-                <a:tc>
-                  <a:txBody>
-                    <a:bodyPr lIns="40000" rIns="40000" tIns="10000" bIns="10000" wrap="square"/>
-                    <a:lstStyle/>
-                    <a:p>
-                      <a:pPr algn="l"/>
-                      <a:r>
-                        <a:rPr sz="1200">
-                          <a:solidFill>
-                            <a:srgbClr val="202020"/>
-                          </a:solidFill>
-                          <a:latin typeface="Microsoft YaHei"/>
-                        </a:rPr>
-                        <a:t>无协议版本号</a:t>
+              <a:tr h="342900">
+                <a:tc>
+                  <a:txBody>
+                    <a:bodyPr lIns="40000" rIns="40000" tIns="10000" bIns="10000" wrap="square"/>
+                    <a:lstStyle/>
+                    <a:p>
+                      <a:pPr algn="l"/>
+                      <a:r>
+                        <a:rPr sz="1200">
+                          <a:solidFill>
+                            <a:srgbClr val="202020"/>
+                          </a:solidFill>
+                          <a:latin typeface="Microsoft YaHei"/>
+                        </a:rPr>
+                        <a:t>协议版本号</a:t>
                       </a:r>
                     </a:p>
                   </a:txBody>
@@ -8739,7 +12240,7 @@
                           </a:solidFill>
                           <a:latin typeface="Microsoft YaHei"/>
                         </a:rPr>
-                        <a:t>演进时无强制兼容检查</a:t>
+                        <a:t>✅ PR-H3：PROTOCOL_VERSION + 握手</a:t>
                       </a:r>
                     </a:p>
                   </a:txBody>
@@ -8750,21 +12251,21 @@
                   </a:tcPr>
                 </a:tc>
               </a:tr>
-              <a:tr h="388620">
-                <a:tc>
-                  <a:txBody>
-                    <a:bodyPr lIns="40000" rIns="40000" tIns="10000" bIns="10000" wrap="square"/>
-                    <a:lstStyle/>
-                    <a:p>
-                      <a:pPr algn="l"/>
-                      <a:r>
-                        <a:rPr sz="1200">
-                          <a:solidFill>
-                            <a:srgbClr val="202020"/>
-                          </a:solidFill>
-                          <a:latin typeface="Microsoft YaHei"/>
-                        </a:rPr>
-                        <a:t>无事件溯源</a:t>
+              <a:tr h="342900">
+                <a:tc>
+                  <a:txBody>
+                    <a:bodyPr lIns="40000" rIns="40000" tIns="10000" bIns="10000" wrap="square"/>
+                    <a:lstStyle/>
+                    <a:p>
+                      <a:pPr algn="l"/>
+                      <a:r>
+                        <a:rPr sz="1200">
+                          <a:solidFill>
+                            <a:srgbClr val="202020"/>
+                          </a:solidFill>
+                          <a:latin typeface="Microsoft YaHei"/>
+                        </a:rPr>
+                        <a:t>事件溯源</a:t>
                       </a:r>
                     </a:p>
                   </a:txBody>
@@ -8787,7 +12288,7 @@
                           </a:solidFill>
                           <a:latin typeface="Microsoft YaHei"/>
                         </a:rPr>
-                        <a:t>历史行为无法追溯，调试难</a:t>
+                        <a:t>⚪ 未规划，全量同步够用</a:t>
                       </a:r>
                     </a:p>
                   </a:txBody>
@@ -8810,8 +12311,8 @@
         </p:nvSpPr>
         <p:spPr>
           <a:xfrm>
-            <a:off x="457200" y="5852160"/>
-            <a:ext cx="11430000" cy="548640"/>
+            <a:off x="457200" y="6035040"/>
+            <a:ext cx="11430000" cy="502920"/>
           </a:xfrm>
           <a:prstGeom prst="roundRect">
             <a:avLst/>
@@ -8886,7 +12387,7 @@
                 </a:solidFill>
                 <a:latin typeface="Microsoft YaHei"/>
               </a:rPr>
-              <a:t>3 / 13</a:t>
+              <a:t>3 / 16</a:t>
             </a:r>
           </a:p>
         </p:txBody>
@@ -8995,8 +12496,8 @@
         </p:nvSpPr>
         <p:spPr>
           <a:xfrm>
-            <a:off x="457200" y="1188720"/>
-            <a:ext cx="3657600" cy="2286000"/>
+            <a:off x="457200" y="1005840"/>
+            <a:ext cx="2743200" cy="2377440"/>
           </a:xfrm>
           <a:prstGeom prst="roundRect">
             <a:avLst/>
@@ -9038,8 +12539,8 @@
         </p:nvSpPr>
         <p:spPr>
           <a:xfrm>
-            <a:off x="457200" y="1325880"/>
-            <a:ext cx="3657600" cy="365760"/>
+            <a:off x="457200" y="1097280"/>
+            <a:ext cx="2743200" cy="365760"/>
           </a:xfrm>
           <a:prstGeom prst="rect">
             <a:avLst/>
@@ -9054,7 +12555,7 @@
           <a:p>
             <a:pPr algn="ctr"/>
             <a:r>
-              <a:rPr sz="1400" b="1">
+              <a:rPr sz="1200" b="1">
                 <a:solidFill>
                   <a:srgbClr val="FFFFFF"/>
                 </a:solidFill>
@@ -9073,8 +12574,8 @@
         </p:nvSpPr>
         <p:spPr>
           <a:xfrm>
-            <a:off x="457200" y="1737360"/>
-            <a:ext cx="3657600" cy="822960"/>
+            <a:off x="457200" y="1508760"/>
+            <a:ext cx="2743200" cy="777240"/>
           </a:xfrm>
           <a:prstGeom prst="rect">
             <a:avLst/>
@@ -9089,13 +12590,13 @@
           <a:p>
             <a:pPr algn="ctr"/>
             <a:r>
-              <a:rPr sz="4000" b="1">
+              <a:rPr sz="3600" b="1">
                 <a:solidFill>
                   <a:srgbClr val="FFFFFF"/>
                 </a:solidFill>
                 <a:latin typeface="Microsoft YaHei"/>
               </a:rPr>
-              <a:t>~30 个</a:t>
+              <a:t>~35</a:t>
             </a:r>
           </a:p>
         </p:txBody>
@@ -9108,8 +12609,8 @@
         </p:nvSpPr>
         <p:spPr>
           <a:xfrm>
-            <a:off x="457200" y="2697480"/>
-            <a:ext cx="3657600" cy="320040"/>
+            <a:off x="457200" y="2331720"/>
+            <a:ext cx="2743200" cy="274320"/>
           </a:xfrm>
           <a:prstGeom prst="rect">
             <a:avLst/>
@@ -9130,7 +12631,7 @@
                 </a:solidFill>
                 <a:latin typeface="Microsoft YaHei"/>
               </a:rPr>
-              <a:t>UI 体验 · 部署环境 · 运行时崩溃</a:t>
+              <a:t>27%</a:t>
             </a:r>
           </a:p>
         </p:txBody>
@@ -9143,8 +12644,8 @@
         </p:nvSpPr>
         <p:spPr>
           <a:xfrm>
-            <a:off x="457200" y="3063239"/>
-            <a:ext cx="3657600" cy="320040"/>
+            <a:off x="457200" y="2651760"/>
+            <a:ext cx="2743200" cy="365760"/>
           </a:xfrm>
           <a:prstGeom prst="rect">
             <a:avLst/>
@@ -9165,21 +12666,56 @@
                 </a:solidFill>
                 <a:latin typeface="Microsoft YaHei"/>
               </a:rPr>
-              <a:t/>
-            </a:r>
-          </a:p>
-        </p:txBody>
-      </p:sp>
-      <p:sp>
-        <p:nvSpPr>
-          <p:cNvPr id="9" name="Rounded Rectangle 8"/>
+              <a:t>UI 体验 · 部署环境 · 运行时崩溃</a:t>
+            </a:r>
+          </a:p>
+        </p:txBody>
+      </p:sp>
+      <p:sp>
+        <p:nvSpPr>
+          <p:cNvPr id="9" name="TextBox 8"/>
+          <p:cNvSpPr txBox="1"/>
+          <p:nvPr/>
+        </p:nvSpPr>
+        <p:spPr>
+          <a:xfrm>
+            <a:off x="457200" y="3017520"/>
+            <a:ext cx="2743200" cy="274320"/>
+          </a:xfrm>
+          <a:prstGeom prst="rect">
+            <a:avLst/>
+          </a:prstGeom>
+          <a:noFill/>
+        </p:spPr>
+        <p:txBody>
+          <a:bodyPr wrap="square" lIns="0" rIns="0" tIns="0" bIns="0">
+            <a:spAutoFit/>
+          </a:bodyPr>
+          <a:lstStyle/>
+          <a:p>
+            <a:pPr algn="ctr"/>
+            <a:r>
+              <a:rPr sz="900" b="0">
+                <a:solidFill>
+                  <a:srgbClr val="FFFFFF"/>
+                </a:solidFill>
+                <a:latin typeface="Microsoft YaHei"/>
+              </a:rPr>
+              <a:t>真机发现</a:t>
+            </a:r>
+          </a:p>
+        </p:txBody>
+      </p:sp>
+      <p:sp>
+        <p:nvSpPr>
+          <p:cNvPr id="10" name="Rounded Rectangle 9"/>
           <p:cNvSpPr/>
           <p:nvPr/>
         </p:nvSpPr>
         <p:spPr>
           <a:xfrm>
-            <a:off x="4297680" y="1188720"/>
-            <a:ext cx="3657600" cy="2286000"/>
+            <a:off x="3383280" y="1005840"/>
+            <a:ext cx="2743200" cy="2377440"/>
           </a:xfrm>
           <a:prstGeom prst="roundRect">
             <a:avLst/>
@@ -9215,14 +12751,14 @@
       </p:sp>
       <p:sp>
         <p:nvSpPr>
-          <p:cNvPr id="10" name="TextBox 9"/>
+          <p:cNvPr id="11" name="TextBox 10"/>
           <p:cNvSpPr txBox="1"/>
           <p:nvPr/>
         </p:nvSpPr>
         <p:spPr>
           <a:xfrm>
-            <a:off x="4297680" y="1325880"/>
-            <a:ext cx="3657600" cy="365760"/>
+            <a:off x="3383280" y="1097280"/>
+            <a:ext cx="2743200" cy="365760"/>
           </a:xfrm>
           <a:prstGeom prst="rect">
             <a:avLst/>
@@ -9237,27 +12773,27 @@
           <a:p>
             <a:pPr algn="ctr"/>
             <a:r>
-              <a:rPr sz="1400" b="1">
+              <a:rPr sz="1200" b="1">
                 <a:solidFill>
                   <a:srgbClr val="FFFFFF"/>
                 </a:solidFill>
                 <a:latin typeface="Microsoft YaHei"/>
               </a:rPr>
-              <a:t>🔵 AI #1：Claude Code</a:t>
-            </a:r>
-          </a:p>
-        </p:txBody>
-      </p:sp>
-      <p:sp>
-        <p:nvSpPr>
-          <p:cNvPr id="11" name="TextBox 10"/>
+              <a:t>🔵 Claude Code 主会话</a:t>
+            </a:r>
+          </a:p>
+        </p:txBody>
+      </p:sp>
+      <p:sp>
+        <p:nvSpPr>
+          <p:cNvPr id="12" name="TextBox 11"/>
           <p:cNvSpPr txBox="1"/>
           <p:nvPr/>
         </p:nvSpPr>
         <p:spPr>
           <a:xfrm>
-            <a:off x="4297680" y="1737360"/>
-            <a:ext cx="3657600" cy="822960"/>
+            <a:off x="3383280" y="1508760"/>
+            <a:ext cx="2743200" cy="777240"/>
           </a:xfrm>
           <a:prstGeom prst="rect">
             <a:avLst/>
@@ -9272,27 +12808,27 @@
           <a:p>
             <a:pPr algn="ctr"/>
             <a:r>
-              <a:rPr sz="4000" b="1">
+              <a:rPr sz="3600" b="1">
                 <a:solidFill>
                   <a:srgbClr val="FFFFFF"/>
                 </a:solidFill>
                 <a:latin typeface="Microsoft YaHei"/>
               </a:rPr>
-              <a:t>~35 个</a:t>
-            </a:r>
-          </a:p>
-        </p:txBody>
-      </p:sp>
-      <p:sp>
-        <p:nvSpPr>
-          <p:cNvPr id="12" name="TextBox 11"/>
+              <a:t>~55</a:t>
+            </a:r>
+          </a:p>
+        </p:txBody>
+      </p:sp>
+      <p:sp>
+        <p:nvSpPr>
+          <p:cNvPr id="13" name="TextBox 12"/>
           <p:cNvSpPr txBox="1"/>
           <p:nvPr/>
         </p:nvSpPr>
         <p:spPr>
           <a:xfrm>
-            <a:off x="4297680" y="2697480"/>
-            <a:ext cx="3657600" cy="320040"/>
+            <a:off x="3383280" y="2331720"/>
+            <a:ext cx="2743200" cy="274320"/>
           </a:xfrm>
           <a:prstGeom prst="rect">
             <a:avLst/>
@@ -9313,21 +12849,21 @@
                 </a:solidFill>
                 <a:latin typeface="Microsoft YaHei"/>
               </a:rPr>
-              <a:t>全量扫描 · 跨文件链路 · 并发陷阱</a:t>
-            </a:r>
-          </a:p>
-        </p:txBody>
-      </p:sp>
-      <p:sp>
-        <p:nvSpPr>
-          <p:cNvPr id="13" name="TextBox 12"/>
+              <a:t>43%</a:t>
+            </a:r>
+          </a:p>
+        </p:txBody>
+      </p:sp>
+      <p:sp>
+        <p:nvSpPr>
+          <p:cNvPr id="14" name="TextBox 13"/>
           <p:cNvSpPr txBox="1"/>
           <p:nvPr/>
         </p:nvSpPr>
         <p:spPr>
           <a:xfrm>
-            <a:off x="4297680" y="3063239"/>
-            <a:ext cx="3657600" cy="320040"/>
+            <a:off x="3383280" y="2651760"/>
+            <a:ext cx="2743200" cy="365760"/>
           </a:xfrm>
           <a:prstGeom prst="rect">
             <a:avLst/>
@@ -9348,27 +12884,62 @@
                 </a:solidFill>
                 <a:latin typeface="Microsoft YaHei"/>
               </a:rPr>
-              <a:t>claude-opus-4-7 / sonnet-4-6</a:t>
-            </a:r>
-          </a:p>
-        </p:txBody>
-      </p:sp>
-      <p:sp>
-        <p:nvSpPr>
-          <p:cNvPr id="14" name="Rounded Rectangle 13"/>
+              <a:t>全量扫描 · 跨文件链路 · 并发陷阱</a:t>
+            </a:r>
+          </a:p>
+        </p:txBody>
+      </p:sp>
+      <p:sp>
+        <p:nvSpPr>
+          <p:cNvPr id="15" name="TextBox 14"/>
+          <p:cNvSpPr txBox="1"/>
+          <p:nvPr/>
+        </p:nvSpPr>
+        <p:spPr>
+          <a:xfrm>
+            <a:off x="3383280" y="3017520"/>
+            <a:ext cx="2743200" cy="274320"/>
+          </a:xfrm>
+          <a:prstGeom prst="rect">
+            <a:avLst/>
+          </a:prstGeom>
+          <a:noFill/>
+        </p:spPr>
+        <p:txBody>
+          <a:bodyPr wrap="square" lIns="0" rIns="0" tIns="0" bIns="0">
+            <a:spAutoFit/>
+          </a:bodyPr>
+          <a:lstStyle/>
+          <a:p>
+            <a:pPr algn="ctr"/>
+            <a:r>
+              <a:rPr sz="900" b="0">
+                <a:solidFill>
+                  <a:srgbClr val="FFFFFF"/>
+                </a:solidFill>
+                <a:latin typeface="Microsoft YaHei"/>
+              </a:rPr>
+              <a:t>opus-4-7 / sonnet-4-6</a:t>
+            </a:r>
+          </a:p>
+        </p:txBody>
+      </p:sp>
+      <p:sp>
+        <p:nvSpPr>
+          <p:cNvPr id="16" name="Rounded Rectangle 15"/>
           <p:cNvSpPr/>
           <p:nvPr/>
         </p:nvSpPr>
         <p:spPr>
           <a:xfrm>
-            <a:off x="8138160" y="1188720"/>
-            <a:ext cx="3657600" cy="2286000"/>
+            <a:off x="6309360" y="1005840"/>
+            <a:ext cx="2743200" cy="2377440"/>
           </a:xfrm>
           <a:prstGeom prst="roundRect">
             <a:avLst/>
           </a:prstGeom>
           <a:solidFill>
-            <a:srgbClr val="F57C00"/>
+            <a:srgbClr val="2E7D32"/>
           </a:solidFill>
           <a:ln>
             <a:noFill/>
@@ -9398,14 +12969,14 @@
       </p:sp>
       <p:sp>
         <p:nvSpPr>
-          <p:cNvPr id="15" name="TextBox 14"/>
+          <p:cNvPr id="17" name="TextBox 16"/>
           <p:cNvSpPr txBox="1"/>
           <p:nvPr/>
         </p:nvSpPr>
         <p:spPr>
           <a:xfrm>
-            <a:off x="8138160" y="1325880"/>
-            <a:ext cx="3657600" cy="365760"/>
+            <a:off x="6309360" y="1097280"/>
+            <a:ext cx="2743200" cy="365760"/>
           </a:xfrm>
           <a:prstGeom prst="rect">
             <a:avLst/>
@@ -9420,27 +12991,27 @@
           <a:p>
             <a:pPr algn="ctr"/>
             <a:r>
-              <a:rPr sz="1400" b="1">
+              <a:rPr sz="1200" b="1">
                 <a:solidFill>
                   <a:srgbClr val="FFFFFF"/>
                 </a:solidFill>
                 <a:latin typeface="Microsoft YaHei"/>
               </a:rPr>
-              <a:t>🟡 AI #2：ChatGPT Codex</a:t>
-            </a:r>
-          </a:p>
-        </p:txBody>
-      </p:sp>
-      <p:sp>
-        <p:nvSpPr>
-          <p:cNvPr id="16" name="TextBox 15"/>
+              <a:t>🟢 Claude pr-reviewer</a:t>
+            </a:r>
+          </a:p>
+        </p:txBody>
+      </p:sp>
+      <p:sp>
+        <p:nvSpPr>
+          <p:cNvPr id="18" name="TextBox 17"/>
           <p:cNvSpPr txBox="1"/>
           <p:nvPr/>
         </p:nvSpPr>
         <p:spPr>
           <a:xfrm>
-            <a:off x="8138160" y="1737360"/>
-            <a:ext cx="3657600" cy="822960"/>
+            <a:off x="6309360" y="1508760"/>
+            <a:ext cx="2743200" cy="777240"/>
           </a:xfrm>
           <a:prstGeom prst="rect">
             <a:avLst/>
@@ -9455,27 +13026,27 @@
           <a:p>
             <a:pPr algn="ctr"/>
             <a:r>
-              <a:rPr sz="4000" b="1">
+              <a:rPr sz="3600" b="1">
                 <a:solidFill>
                   <a:srgbClr val="FFFFFF"/>
                 </a:solidFill>
                 <a:latin typeface="Microsoft YaHei"/>
               </a:rPr>
-              <a:t>3 个</a:t>
-            </a:r>
-          </a:p>
-        </p:txBody>
-      </p:sp>
-      <p:sp>
-        <p:nvSpPr>
-          <p:cNvPr id="17" name="TextBox 16"/>
+              <a:t>~15</a:t>
+            </a:r>
+          </a:p>
+        </p:txBody>
+      </p:sp>
+      <p:sp>
+        <p:nvSpPr>
+          <p:cNvPr id="19" name="TextBox 18"/>
           <p:cNvSpPr txBox="1"/>
           <p:nvPr/>
         </p:nvSpPr>
         <p:spPr>
           <a:xfrm>
-            <a:off x="8138160" y="2697480"/>
-            <a:ext cx="3657600" cy="320040"/>
+            <a:off x="6309360" y="2331720"/>
+            <a:ext cx="2743200" cy="274320"/>
           </a:xfrm>
           <a:prstGeom prst="rect">
             <a:avLst/>
@@ -9496,21 +13067,21 @@
                 </a:solidFill>
                 <a:latin typeface="Microsoft YaHei"/>
               </a:rPr>
-              <a:t>PR 自动审查 · 细粒度风险点</a:t>
-            </a:r>
-          </a:p>
-        </p:txBody>
-      </p:sp>
-      <p:sp>
-        <p:nvSpPr>
-          <p:cNvPr id="18" name="TextBox 17"/>
+              <a:t>12%</a:t>
+            </a:r>
+          </a:p>
+        </p:txBody>
+      </p:sp>
+      <p:sp>
+        <p:nvSpPr>
+          <p:cNvPr id="20" name="TextBox 19"/>
           <p:cNvSpPr txBox="1"/>
           <p:nvPr/>
         </p:nvSpPr>
         <p:spPr>
           <a:xfrm>
-            <a:off x="8138160" y="3063239"/>
-            <a:ext cx="3657600" cy="320040"/>
+            <a:off x="6309360" y="2651760"/>
+            <a:ext cx="2743200" cy="365760"/>
           </a:xfrm>
           <a:prstGeom prst="rect">
             <a:avLst/>
@@ -9531,32 +13102,65 @@
                 </a:solidFill>
                 <a:latin typeface="Microsoft YaHei"/>
               </a:rPr>
-              <a:t>chatgpt-codex-connector[bot]</a:t>
-            </a:r>
-          </a:p>
-        </p:txBody>
-      </p:sp>
-      <p:sp>
-        <p:nvSpPr>
-          <p:cNvPr id="19" name="Rounded Rectangle 18"/>
+              <a:t>独立 context · 功能完整 · 协议契约</a:t>
+            </a:r>
+          </a:p>
+        </p:txBody>
+      </p:sp>
+      <p:sp>
+        <p:nvSpPr>
+          <p:cNvPr id="21" name="TextBox 20"/>
+          <p:cNvSpPr txBox="1"/>
+          <p:nvPr/>
+        </p:nvSpPr>
+        <p:spPr>
+          <a:xfrm>
+            <a:off x="6309360" y="3017520"/>
+            <a:ext cx="2743200" cy="274320"/>
+          </a:xfrm>
+          <a:prstGeom prst="rect">
+            <a:avLst/>
+          </a:prstGeom>
+          <a:noFill/>
+        </p:spPr>
+        <p:txBody>
+          <a:bodyPr wrap="square" lIns="0" rIns="0" tIns="0" bIns="0">
+            <a:spAutoFit/>
+          </a:bodyPr>
+          <a:lstStyle/>
+          <a:p>
+            <a:pPr algn="ctr"/>
+            <a:r>
+              <a:rPr sz="900" b="0">
+                <a:solidFill>
+                  <a:srgbClr val="FFFFFF"/>
+                </a:solidFill>
+                <a:latin typeface="Microsoft YaHei"/>
+              </a:rPr>
+              <a:t>PR-H5 后引入</a:t>
+            </a:r>
+          </a:p>
+        </p:txBody>
+      </p:sp>
+      <p:sp>
+        <p:nvSpPr>
+          <p:cNvPr id="22" name="Rounded Rectangle 21"/>
           <p:cNvSpPr/>
           <p:nvPr/>
         </p:nvSpPr>
         <p:spPr>
           <a:xfrm>
-            <a:off x="457200" y="3749039"/>
-            <a:ext cx="11338560" cy="2606040"/>
+            <a:off x="9235440" y="1005840"/>
+            <a:ext cx="2743200" cy="2377440"/>
           </a:xfrm>
           <a:prstGeom prst="roundRect">
             <a:avLst/>
           </a:prstGeom>
           <a:solidFill>
-            <a:srgbClr val="F0F4FF"/>
+            <a:srgbClr val="F57C00"/>
           </a:solidFill>
           <a:ln>
-            <a:solidFill>
-              <a:srgbClr val="1A73E8"/>
-            </a:solidFill>
+            <a:noFill/>
           </a:ln>
         </p:spPr>
         <p:style>
@@ -9583,14 +13187,14 @@
       </p:sp>
       <p:sp>
         <p:nvSpPr>
-          <p:cNvPr id="20" name="TextBox 19"/>
+          <p:cNvPr id="23" name="TextBox 22"/>
           <p:cNvSpPr txBox="1"/>
           <p:nvPr/>
         </p:nvSpPr>
         <p:spPr>
           <a:xfrm>
-            <a:off x="731520" y="3931920"/>
-            <a:ext cx="10972800" cy="457200"/>
+            <a:off x="9235440" y="1097280"/>
+            <a:ext cx="2743200" cy="365760"/>
           </a:xfrm>
           <a:prstGeom prst="rect">
             <a:avLst/>
@@ -9603,29 +13207,29 @@
           </a:bodyPr>
           <a:lstStyle/>
           <a:p>
-            <a:pPr algn="l"/>
-            <a:r>
-              <a:rPr sz="1600" b="1">
-                <a:solidFill>
-                  <a:srgbClr val="1A73E8"/>
+            <a:pPr algn="ctr"/>
+            <a:r>
+              <a:rPr sz="1200" b="1">
+                <a:solidFill>
+                  <a:srgbClr val="FFFFFF"/>
                 </a:solidFill>
                 <a:latin typeface="Microsoft YaHei"/>
               </a:rPr>
-              <a:t>💡 核心发现</a:t>
-            </a:r>
-          </a:p>
-        </p:txBody>
-      </p:sp>
-      <p:sp>
-        <p:nvSpPr>
-          <p:cNvPr id="21" name="TextBox 20"/>
+              <a:t>🟡 ChatGPT Codex Bot</a:t>
+            </a:r>
+          </a:p>
+        </p:txBody>
+      </p:sp>
+      <p:sp>
+        <p:nvSpPr>
+          <p:cNvPr id="24" name="TextBox 23"/>
           <p:cNvSpPr txBox="1"/>
           <p:nvPr/>
         </p:nvSpPr>
         <p:spPr>
           <a:xfrm>
-            <a:off x="731520" y="4434840"/>
-            <a:ext cx="10972800" cy="457200"/>
+            <a:off x="9235440" y="1508760"/>
+            <a:ext cx="2743200" cy="777240"/>
           </a:xfrm>
           <a:prstGeom prst="rect">
             <a:avLst/>
@@ -9638,29 +13242,29 @@
           </a:bodyPr>
           <a:lstStyle/>
           <a:p>
-            <a:pPr algn="l"/>
-            <a:r>
-              <a:rPr sz="1400" b="1">
-                <a:solidFill>
-                  <a:srgbClr val="202020"/>
+            <a:pPr algn="ctr"/>
+            <a:r>
+              <a:rPr sz="3600" b="1">
+                <a:solidFill>
+                  <a:srgbClr val="FFFFFF"/>
                 </a:solidFill>
                 <a:latin typeface="Microsoft YaHei"/>
               </a:rPr>
-              <a:t>人工看见「症状」 · Claude 挖「根因」 · Codex 找「细节风险」 — 三者几乎不重叠</a:t>
-            </a:r>
-          </a:p>
-        </p:txBody>
-      </p:sp>
-      <p:sp>
-        <p:nvSpPr>
-          <p:cNvPr id="22" name="TextBox 21"/>
+              <a:t>~13</a:t>
+            </a:r>
+          </a:p>
+        </p:txBody>
+      </p:sp>
+      <p:sp>
+        <p:nvSpPr>
+          <p:cNvPr id="25" name="TextBox 24"/>
           <p:cNvSpPr txBox="1"/>
           <p:nvPr/>
         </p:nvSpPr>
         <p:spPr>
           <a:xfrm>
-            <a:off x="731520" y="4892040"/>
-            <a:ext cx="10972800" cy="457200"/>
+            <a:off x="9235440" y="2331720"/>
+            <a:ext cx="2743200" cy="274320"/>
           </a:xfrm>
           <a:prstGeom prst="rect">
             <a:avLst/>
@@ -9673,29 +13277,29 @@
           </a:bodyPr>
           <a:lstStyle/>
           <a:p>
-            <a:pPr algn="l"/>
+            <a:pPr algn="ctr"/>
             <a:r>
               <a:rPr sz="1200" b="0">
                 <a:solidFill>
-                  <a:srgbClr val="202020"/>
+                  <a:srgbClr val="FFFFFF"/>
                 </a:solidFill>
                 <a:latin typeface="Microsoft YaHei"/>
               </a:rPr>
-              <a:t>·  人工：截图 / 真机崩溃 / 部署环境问题</a:t>
-            </a:r>
-          </a:p>
-        </p:txBody>
-      </p:sp>
-      <p:sp>
-        <p:nvSpPr>
-          <p:cNvPr id="23" name="TextBox 22"/>
+              <a:t>10%</a:t>
+            </a:r>
+          </a:p>
+        </p:txBody>
+      </p:sp>
+      <p:sp>
+        <p:nvSpPr>
+          <p:cNvPr id="26" name="TextBox 25"/>
           <p:cNvSpPr txBox="1"/>
           <p:nvPr/>
         </p:nvSpPr>
         <p:spPr>
           <a:xfrm>
-            <a:off x="731520" y="5212080"/>
-            <a:ext cx="10972800" cy="457200"/>
+            <a:off x="9235440" y="2651760"/>
+            <a:ext cx="2743200" cy="365760"/>
           </a:xfrm>
           <a:prstGeom prst="rect">
             <a:avLst/>
@@ -9708,29 +13312,29 @@
           </a:bodyPr>
           <a:lstStyle/>
           <a:p>
-            <a:pPr algn="l"/>
-            <a:r>
-              <a:rPr sz="1200" b="0">
-                <a:solidFill>
-                  <a:srgbClr val="202020"/>
+            <a:pPr algn="ctr"/>
+            <a:r>
+              <a:rPr sz="1000" b="0">
+                <a:solidFill>
+                  <a:srgbClr val="FFFFFF"/>
                 </a:solidFill>
                 <a:latin typeface="Microsoft YaHei"/>
               </a:rPr>
-              <a:t>·  Claude Code Agent：跨文件链路 / 并发陷阱 / 协议一致性</a:t>
-            </a:r>
-          </a:p>
-        </p:txBody>
-      </p:sp>
-      <p:sp>
-        <p:nvSpPr>
-          <p:cNvPr id="24" name="TextBox 23"/>
+              <a:t>语句级边界 · entropy · UI 文案</a:t>
+            </a:r>
+          </a:p>
+        </p:txBody>
+      </p:sp>
+      <p:sp>
+        <p:nvSpPr>
+          <p:cNvPr id="27" name="TextBox 26"/>
           <p:cNvSpPr txBox="1"/>
           <p:nvPr/>
         </p:nvSpPr>
         <p:spPr>
           <a:xfrm>
-            <a:off x="731520" y="5532120"/>
-            <a:ext cx="10972800" cy="457200"/>
+            <a:off x="9235440" y="3017520"/>
+            <a:ext cx="2743200" cy="274320"/>
           </a:xfrm>
           <a:prstGeom prst="rect">
             <a:avLst/>
@@ -9743,28 +13347,73 @@
           </a:bodyPr>
           <a:lstStyle/>
           <a:p>
-            <a:pPr algn="l"/>
-            <a:r>
-              <a:rPr sz="1200" b="0">
-                <a:solidFill>
-                  <a:srgbClr val="202020"/>
+            <a:pPr algn="ctr"/>
+            <a:r>
+              <a:rPr sz="900" b="0">
+                <a:solidFill>
+                  <a:srgbClr val="FFFFFF"/>
                 </a:solidFill>
                 <a:latin typeface="Microsoft YaHei"/>
               </a:rPr>
-              <a:t>·  ChatGPT Codex Bot：UUID 截断 / loading 卡死 / UI/服务端不一致</a:t>
-            </a:r>
-          </a:p>
-        </p:txBody>
-      </p:sp>
-      <p:sp>
-        <p:nvSpPr>
-          <p:cNvPr id="25" name="TextBox 24"/>
+              <a:t>chatgpt-codex-connector</a:t>
+            </a:r>
+          </a:p>
+        </p:txBody>
+      </p:sp>
+      <p:sp>
+        <p:nvSpPr>
+          <p:cNvPr id="28" name="Rounded Rectangle 27"/>
+          <p:cNvSpPr/>
+          <p:nvPr/>
+        </p:nvSpPr>
+        <p:spPr>
+          <a:xfrm>
+            <a:off x="457200" y="3657600"/>
+            <a:ext cx="11338560" cy="2743200"/>
+          </a:xfrm>
+          <a:prstGeom prst="roundRect">
+            <a:avLst/>
+          </a:prstGeom>
+          <a:solidFill>
+            <a:srgbClr val="F0F4FF"/>
+          </a:solidFill>
+          <a:ln>
+            <a:solidFill>
+              <a:srgbClr val="1A73E8"/>
+            </a:solidFill>
+          </a:ln>
+        </p:spPr>
+        <p:style>
+          <a:lnRef idx="1">
+            <a:schemeClr val="accent1"/>
+          </a:lnRef>
+          <a:fillRef idx="3">
+            <a:schemeClr val="accent1"/>
+          </a:fillRef>
+          <a:effectRef idx="2">
+            <a:schemeClr val="accent1"/>
+          </a:effectRef>
+          <a:fontRef idx="minor">
+            <a:schemeClr val="lt1"/>
+          </a:fontRef>
+        </p:style>
+        <p:txBody>
+          <a:bodyPr rtlCol="0" anchor="ctr"/>
+          <a:lstStyle/>
+          <a:p>
+            <a:pPr algn="ctr"/>
+          </a:p>
+        </p:txBody>
+      </p:sp>
+      <p:sp>
+        <p:nvSpPr>
+          <p:cNvPr id="29" name="TextBox 28"/>
           <p:cNvSpPr txBox="1"/>
           <p:nvPr/>
         </p:nvSpPr>
         <p:spPr>
           <a:xfrm>
-            <a:off x="731520" y="5897880"/>
+            <a:off x="731520" y="3794760"/>
             <a:ext cx="10972800" cy="457200"/>
           </a:xfrm>
           <a:prstGeom prst="rect">
@@ -9780,27 +13429,27 @@
           <a:p>
             <a:pPr algn="l"/>
             <a:r>
-              <a:rPr sz="1200" b="1">
+              <a:rPr sz="1600" b="1">
                 <a:solidFill>
                   <a:srgbClr val="1A73E8"/>
                 </a:solidFill>
                 <a:latin typeface="Microsoft YaHei"/>
               </a:rPr>
-              <a:t>→  多 AI 交叉审查比单一审查更可靠</a:t>
-            </a:r>
-          </a:p>
-        </p:txBody>
-      </p:sp>
-      <p:sp>
-        <p:nvSpPr>
-          <p:cNvPr id="26" name="TextBox 25"/>
+              <a:t>💡 核心发现：4 种视角几乎不重叠 → 总计 ~128 个问题</a:t>
+            </a:r>
+          </a:p>
+        </p:txBody>
+      </p:sp>
+      <p:sp>
+        <p:nvSpPr>
+          <p:cNvPr id="30" name="TextBox 29"/>
           <p:cNvSpPr txBox="1"/>
           <p:nvPr/>
         </p:nvSpPr>
         <p:spPr>
           <a:xfrm>
-            <a:off x="10789920" y="6446520"/>
-            <a:ext cx="1188720" cy="274320"/>
+            <a:off x="731520" y="4343400"/>
+            <a:ext cx="10972800" cy="365760"/>
           </a:xfrm>
           <a:prstGeom prst="rect">
             <a:avLst/>
@@ -9813,6 +13462,181 @@
           </a:bodyPr>
           <a:lstStyle/>
           <a:p>
+            <a:pPr algn="l"/>
+            <a:r>
+              <a:rPr sz="1200" b="0">
+                <a:solidFill>
+                  <a:srgbClr val="202020"/>
+                </a:solidFill>
+                <a:latin typeface="Microsoft YaHei"/>
+              </a:rPr>
+              <a:t>·  人工：截图 / 真机崩溃 / 部署环境（动态运行时问题）</a:t>
+            </a:r>
+          </a:p>
+        </p:txBody>
+      </p:sp>
+      <p:sp>
+        <p:nvSpPr>
+          <p:cNvPr id="31" name="TextBox 30"/>
+          <p:cNvSpPr txBox="1"/>
+          <p:nvPr/>
+        </p:nvSpPr>
+        <p:spPr>
+          <a:xfrm>
+            <a:off x="731520" y="4709160"/>
+            <a:ext cx="10972800" cy="365760"/>
+          </a:xfrm>
+          <a:prstGeom prst="rect">
+            <a:avLst/>
+          </a:prstGeom>
+          <a:noFill/>
+        </p:spPr>
+        <p:txBody>
+          <a:bodyPr wrap="square" lIns="0" rIns="0" tIns="0" bIns="0">
+            <a:spAutoFit/>
+          </a:bodyPr>
+          <a:lstStyle/>
+          <a:p>
+            <a:pPr algn="l"/>
+            <a:r>
+              <a:rPr sz="1200" b="0">
+                <a:solidFill>
+                  <a:srgbClr val="202020"/>
+                </a:solidFill>
+                <a:latin typeface="Microsoft YaHei"/>
+              </a:rPr>
+              <a:t>·  Claude 主会话：跨文件链路 / 并发陷阱 / 工具链兼容（静态全量扫描）</a:t>
+            </a:r>
+          </a:p>
+        </p:txBody>
+      </p:sp>
+      <p:sp>
+        <p:nvSpPr>
+          <p:cNvPr id="32" name="TextBox 31"/>
+          <p:cNvSpPr txBox="1"/>
+          <p:nvPr/>
+        </p:nvSpPr>
+        <p:spPr>
+          <a:xfrm>
+            <a:off x="731520" y="5074920"/>
+            <a:ext cx="10972800" cy="365760"/>
+          </a:xfrm>
+          <a:prstGeom prst="rect">
+            <a:avLst/>
+          </a:prstGeom>
+          <a:noFill/>
+        </p:spPr>
+        <p:txBody>
+          <a:bodyPr wrap="square" lIns="0" rIns="0" tIns="0" bIns="0">
+            <a:spAutoFit/>
+          </a:bodyPr>
+          <a:lstStyle/>
+          <a:p>
+            <a:pPr algn="l"/>
+            <a:r>
+              <a:rPr sz="1200" b="0">
+                <a:solidFill>
+                  <a:srgbClr val="202020"/>
+                </a:solidFill>
+                <a:latin typeface="Microsoft YaHei"/>
+              </a:rPr>
+              <a:t>·  Claude pr-reviewer：独立 context · 功能完整性 · 跨文件契约（PR #53 P1 #1：fabricated symbol）</a:t>
+            </a:r>
+          </a:p>
+        </p:txBody>
+      </p:sp>
+      <p:sp>
+        <p:nvSpPr>
+          <p:cNvPr id="33" name="TextBox 32"/>
+          <p:cNvSpPr txBox="1"/>
+          <p:nvPr/>
+        </p:nvSpPr>
+        <p:spPr>
+          <a:xfrm>
+            <a:off x="731520" y="5440680"/>
+            <a:ext cx="10972800" cy="365760"/>
+          </a:xfrm>
+          <a:prstGeom prst="rect">
+            <a:avLst/>
+          </a:prstGeom>
+          <a:noFill/>
+        </p:spPr>
+        <p:txBody>
+          <a:bodyPr wrap="square" lIns="0" rIns="0" tIns="0" bIns="0">
+            <a:spAutoFit/>
+          </a:bodyPr>
+          <a:lstStyle/>
+          <a:p>
+            <a:pPr algn="l"/>
+            <a:r>
+              <a:rPr sz="1200" b="0">
+                <a:solidFill>
+                  <a:srgbClr val="202020"/>
+                </a:solidFill>
+                <a:latin typeface="Microsoft YaHei"/>
+              </a:rPr>
+              <a:t>·  Codex bot：UUID 截断 / loading 卡死 / processAITurn race（语句级边界）</a:t>
+            </a:r>
+          </a:p>
+        </p:txBody>
+      </p:sp>
+      <p:sp>
+        <p:nvSpPr>
+          <p:cNvPr id="34" name="TextBox 33"/>
+          <p:cNvSpPr txBox="1"/>
+          <p:nvPr/>
+        </p:nvSpPr>
+        <p:spPr>
+          <a:xfrm>
+            <a:off x="731520" y="5897880"/>
+            <a:ext cx="10972800" cy="365760"/>
+          </a:xfrm>
+          <a:prstGeom prst="rect">
+            <a:avLst/>
+          </a:prstGeom>
+          <a:noFill/>
+        </p:spPr>
+        <p:txBody>
+          <a:bodyPr wrap="square" lIns="0" rIns="0" tIns="0" bIns="0">
+            <a:spAutoFit/>
+          </a:bodyPr>
+          <a:lstStyle/>
+          <a:p>
+            <a:pPr algn="l"/>
+            <a:r>
+              <a:rPr sz="1400" b="1">
+                <a:solidFill>
+                  <a:srgbClr val="1A73E8"/>
+                </a:solidFill>
+                <a:latin typeface="Microsoft YaHei"/>
+              </a:rPr>
+              <a:t>→  4 视角缺一不可：盲区互补，单独跑一个至少漏一类问题</a:t>
+            </a:r>
+          </a:p>
+        </p:txBody>
+      </p:sp>
+      <p:sp>
+        <p:nvSpPr>
+          <p:cNvPr id="35" name="TextBox 34"/>
+          <p:cNvSpPr txBox="1"/>
+          <p:nvPr/>
+        </p:nvSpPr>
+        <p:spPr>
+          <a:xfrm>
+            <a:off x="10789920" y="6446520"/>
+            <a:ext cx="1188720" cy="274320"/>
+          </a:xfrm>
+          <a:prstGeom prst="rect">
+            <a:avLst/>
+          </a:prstGeom>
+          <a:noFill/>
+        </p:spPr>
+        <p:txBody>
+          <a:bodyPr wrap="square" lIns="0" rIns="0" tIns="0" bIns="0">
+            <a:spAutoFit/>
+          </a:bodyPr>
+          <a:lstStyle/>
+          <a:p>
             <a:pPr algn="r"/>
             <a:r>
               <a:rPr sz="1000" b="0">
@@ -9821,7 +13645,7 @@
                 </a:solidFill>
                 <a:latin typeface="Microsoft YaHei"/>
               </a:rPr>
-              <a:t>4 / 13</a:t>
+              <a:t>4 / 16</a:t>
             </a:r>
           </a:p>
         </p:txBody>
@@ -10711,7 +14535,7 @@
                 </a:solidFill>
                 <a:latin typeface="Microsoft YaHei"/>
               </a:rPr>
-              <a:t>5 / 13</a:t>
+              <a:t>5 / 16</a:t>
             </a:r>
           </a:p>
         </p:txBody>
@@ -11751,7 +15575,7 @@
                 </a:solidFill>
                 <a:latin typeface="Microsoft YaHei"/>
               </a:rPr>
-              <a:t>6 / 13</a:t>
+              <a:t>6 / 16</a:t>
             </a:r>
           </a:p>
         </p:txBody>
@@ -13092,7 +16916,7 @@
                 </a:solidFill>
                 <a:latin typeface="Microsoft YaHei"/>
               </a:rPr>
-              <a:t>7 / 13</a:t>
+              <a:t>7 / 16</a:t>
             </a:r>
           </a:p>
         </p:txBody>
@@ -14245,7 +18069,7 @@
                 </a:solidFill>
                 <a:latin typeface="Microsoft YaHei"/>
               </a:rPr>
-              <a:t>8 / 13</a:t>
+              <a:t>8 / 16</a:t>
             </a:r>
           </a:p>
         </p:txBody>
@@ -15335,7 +19159,7 @@
                 </a:solidFill>
                 <a:latin typeface="Microsoft YaHei"/>
               </a:rPr>
-              <a:t>9 / 13</a:t>
+              <a:t>9 / 16</a:t>
             </a:r>
           </a:p>
         </p:txBody>

--- a/docs/dev_summary.pptx
+++ b/docs/dev_summary.pptx
@@ -7050,7 +7050,7 @@
                 </a:solidFill>
                 <a:latin typeface="Microsoft YaHei"/>
               </a:rPr>
-              <a:t>·  全程 54 PR / ~170 commit  ·  约 4 个月  ·  发现 ~128 个问题</a:t>
+              <a:t>·  全程 54 PR / ~170 commit  ·  跨 4 个月（有效开发 18 天）  ·  发现 ~128 个问题</a:t>
             </a:r>
           </a:p>
         </p:txBody>
@@ -10500,7 +10500,7 @@
                 </a:solidFill>
                 <a:latin typeface="Microsoft YaHei"/>
               </a:rPr>
-              <a:t>12 阶段时间线  ·  54 PR  ·  ~170 commit  ·  约 4 个月</a:t>
+              <a:t>12 阶段时间线  ·  54 PR  ·  ~170 commit  ·  跨 4 个月  ·  有效开发 18 天</a:t>
             </a:r>
           </a:p>
         </p:txBody>
@@ -10524,9 +10524,9 @@
                 <a:tableStyleId>{5C22544A-7EE6-4342-B048-85BDC9FD1C3A}</a:tableStyleId>
               </a:tblPr>
               <a:tblGrid>
-                <a:gridCol w="1828800"/>
-                <a:gridCol w="3657600"/>
-                <a:gridCol w="5760720"/>
+                <a:gridCol w="2377440"/>
+                <a:gridCol w="3383280"/>
+                <a:gridCol w="5486400"/>
               </a:tblGrid>
               <a:tr h="203200">
                 <a:tc>
@@ -10613,7 +10613,7 @@
                           </a:solidFill>
                           <a:latin typeface="Microsoft YaHei"/>
                         </a:rPr>
-                        <a:t>2026-02</a:t>
+                        <a:t>2026-02-02 / 07~12 / 24</a:t>
                       </a:r>
                     </a:p>
                   </a:txBody>

--- a/docs/dev_summary.pptx
+++ b/docs/dev_summary.pptx
@@ -3246,7 +3246,7 @@
                 </a:solidFill>
                 <a:latin typeface="Microsoft YaHei"/>
               </a:rPr>
-              <a:t>沟通牌  ×  Claude Code  ×  约 3 个月实践</a:t>
+              <a:t>沟通牌  ×  Claude Code  ×  54 PR · 有效开发 18 天</a:t>
             </a:r>
           </a:p>
         </p:txBody>
@@ -7050,7 +7050,7 @@
                 </a:solidFill>
                 <a:latin typeface="Microsoft YaHei"/>
               </a:rPr>
-              <a:t>·  全程 54 PR / ~170 commit  ·  跨 4 个月（有效开发 18 天）  ·  发现 ~128 个问题</a:t>
+              <a:t>·  全程 54 PR / ~170 commit  ·  有效开发 18 天  ·  发现 ~128 个问题</a:t>
             </a:r>
           </a:p>
         </p:txBody>
@@ -10500,7 +10500,7 @@
                 </a:solidFill>
                 <a:latin typeface="Microsoft YaHei"/>
               </a:rPr>
-              <a:t>12 阶段时间线  ·  54 PR  ·  ~170 commit  ·  跨 4 个月  ·  有效开发 18 天</a:t>
+              <a:t>12 阶段时间线  ·  54 PR  ·  ~170 commit  ·  有效开发 18 天</a:t>
             </a:r>
           </a:p>
         </p:txBody>

--- a/docs/dev_summary.pptx
+++ b/docs/dev_summary.pptx
@@ -3118,7 +3118,7 @@
             <a:avLst/>
           </a:prstGeom>
           <a:solidFill>
-            <a:srgbClr val="1A73E8"/>
+            <a:srgbClr val="C7000B"/>
           </a:solidFill>
           <a:ln>
             <a:noFill/>
@@ -3207,7 +3207,7 @@
             <a:r>
               <a:rPr sz="4400" b="1">
                 <a:solidFill>
-                  <a:srgbClr val="1A73E8"/>
+                  <a:srgbClr val="C7000B"/>
                 </a:solidFill>
                 <a:latin typeface="Microsoft YaHei"/>
               </a:rPr>
@@ -3277,7 +3277,7 @@
             <a:r>
               <a:rPr sz="1400" b="1">
                 <a:solidFill>
-                  <a:srgbClr val="1A73E8"/>
+                  <a:srgbClr val="C7000B"/>
                 </a:solidFill>
                 <a:latin typeface="Microsoft YaHei"/>
               </a:rPr>
@@ -3470,7 +3470,7 @@
             <a:r>
               <a:rPr sz="2400" b="1">
                 <a:solidFill>
-                  <a:srgbClr val="1A73E8"/>
+                  <a:srgbClr val="C7000B"/>
                 </a:solidFill>
                 <a:latin typeface="Microsoft YaHei"/>
               </a:rPr>
@@ -3494,7 +3494,7 @@
             <a:avLst/>
           </a:prstGeom>
           <a:solidFill>
-            <a:srgbClr val="1A73E8"/>
+            <a:srgbClr val="C7000B"/>
           </a:solidFill>
           <a:ln>
             <a:noFill/>
@@ -3548,7 +3548,7 @@
             <a:r>
               <a:rPr sz="1400" b="1">
                 <a:solidFill>
-                  <a:srgbClr val="1A73E8"/>
+                  <a:srgbClr val="C7000B"/>
                 </a:solidFill>
                 <a:latin typeface="Microsoft YaHei"/>
               </a:rPr>
@@ -3600,7 +3600,7 @@
                   </a:txBody>
                   <a:tcPr>
                     <a:solidFill>
-                      <a:srgbClr val="1A73E8"/>
+                      <a:srgbClr val="C7000B"/>
                     </a:solidFill>
                   </a:tcPr>
                 </a:tc>
@@ -3623,7 +3623,7 @@
                   </a:txBody>
                   <a:tcPr>
                     <a:solidFill>
-                      <a:srgbClr val="1A73E8"/>
+                      <a:srgbClr val="C7000B"/>
                     </a:solidFill>
                   </a:tcPr>
                 </a:tc>
@@ -3646,7 +3646,7 @@
                   </a:txBody>
                   <a:tcPr>
                     <a:solidFill>
-                      <a:srgbClr val="1A73E8"/>
+                      <a:srgbClr val="C7000B"/>
                     </a:solidFill>
                   </a:tcPr>
                 </a:tc>
@@ -3742,7 +3742,7 @@
                   </a:txBody>
                   <a:tcPr>
                     <a:solidFill>
-                      <a:srgbClr val="F0F4FF"/>
+                      <a:srgbClr val="FFF1F2"/>
                     </a:solidFill>
                   </a:tcPr>
                 </a:tc>
@@ -3765,7 +3765,7 @@
                   </a:txBody>
                   <a:tcPr>
                     <a:solidFill>
-                      <a:srgbClr val="F0F4FF"/>
+                      <a:srgbClr val="FFF1F2"/>
                     </a:solidFill>
                   </a:tcPr>
                 </a:tc>
@@ -3788,7 +3788,7 @@
                   </a:txBody>
                   <a:tcPr>
                     <a:solidFill>
-                      <a:srgbClr val="F0F4FF"/>
+                      <a:srgbClr val="FFF1F2"/>
                     </a:solidFill>
                   </a:tcPr>
                 </a:tc>
@@ -3894,7 +3894,7 @@
             <a:r>
               <a:rPr sz="1400" b="1">
                 <a:solidFill>
-                  <a:srgbClr val="1A73E8"/>
+                  <a:srgbClr val="C7000B"/>
                 </a:solidFill>
                 <a:latin typeface="Microsoft YaHei"/>
               </a:rPr>
@@ -3946,7 +3946,7 @@
                   </a:txBody>
                   <a:tcPr>
                     <a:solidFill>
-                      <a:srgbClr val="1A73E8"/>
+                      <a:srgbClr val="C7000B"/>
                     </a:solidFill>
                   </a:tcPr>
                 </a:tc>
@@ -3969,7 +3969,7 @@
                   </a:txBody>
                   <a:tcPr>
                     <a:solidFill>
-                      <a:srgbClr val="1A73E8"/>
+                      <a:srgbClr val="C7000B"/>
                     </a:solidFill>
                   </a:tcPr>
                 </a:tc>
@@ -3992,7 +3992,7 @@
                   </a:txBody>
                   <a:tcPr>
                     <a:solidFill>
-                      <a:srgbClr val="1A73E8"/>
+                      <a:srgbClr val="C7000B"/>
                     </a:solidFill>
                   </a:tcPr>
                 </a:tc>
@@ -4088,7 +4088,7 @@
                   </a:txBody>
                   <a:tcPr>
                     <a:solidFill>
-                      <a:srgbClr val="F0F4FF"/>
+                      <a:srgbClr val="FFF1F2"/>
                     </a:solidFill>
                   </a:tcPr>
                 </a:tc>
@@ -4111,7 +4111,7 @@
                   </a:txBody>
                   <a:tcPr>
                     <a:solidFill>
-                      <a:srgbClr val="F0F4FF"/>
+                      <a:srgbClr val="FFF1F2"/>
                     </a:solidFill>
                   </a:tcPr>
                 </a:tc>
@@ -4134,7 +4134,7 @@
                   </a:txBody>
                   <a:tcPr>
                     <a:solidFill>
-                      <a:srgbClr val="F0F4FF"/>
+                      <a:srgbClr val="FFF1F2"/>
                     </a:solidFill>
                   </a:tcPr>
                 </a:tc>
@@ -4230,7 +4230,7 @@
                   </a:txBody>
                   <a:tcPr>
                     <a:solidFill>
-                      <a:srgbClr val="F0F4FF"/>
+                      <a:srgbClr val="FFF1F2"/>
                     </a:solidFill>
                   </a:tcPr>
                 </a:tc>
@@ -4253,7 +4253,7 @@
                   </a:txBody>
                   <a:tcPr>
                     <a:solidFill>
-                      <a:srgbClr val="F0F4FF"/>
+                      <a:srgbClr val="FFF1F2"/>
                     </a:solidFill>
                   </a:tcPr>
                 </a:tc>
@@ -4276,7 +4276,7 @@
                   </a:txBody>
                   <a:tcPr>
                     <a:solidFill>
-                      <a:srgbClr val="F0F4FF"/>
+                      <a:srgbClr val="FFF1F2"/>
                     </a:solidFill>
                   </a:tcPr>
                 </a:tc>
@@ -4435,7 +4435,7 @@
             <a:r>
               <a:rPr sz="2400" b="1">
                 <a:solidFill>
-                  <a:srgbClr val="1A73E8"/>
+                  <a:srgbClr val="C7000B"/>
                 </a:solidFill>
                 <a:latin typeface="Microsoft YaHei"/>
               </a:rPr>
@@ -4459,7 +4459,7 @@
             <a:avLst/>
           </a:prstGeom>
           <a:solidFill>
-            <a:srgbClr val="1A73E8"/>
+            <a:srgbClr val="C7000B"/>
           </a:solidFill>
           <a:ln>
             <a:noFill/>
@@ -4618,7 +4618,7 @@
             <a:r>
               <a:rPr sz="1400" b="1">
                 <a:solidFill>
-                  <a:srgbClr val="1A73E8"/>
+                  <a:srgbClr val="C7000B"/>
                 </a:solidFill>
                 <a:latin typeface="Microsoft YaHei"/>
               </a:rPr>
@@ -4670,7 +4670,7 @@
                   </a:txBody>
                   <a:tcPr>
                     <a:solidFill>
-                      <a:srgbClr val="1A73E8"/>
+                      <a:srgbClr val="C7000B"/>
                     </a:solidFill>
                   </a:tcPr>
                 </a:tc>
@@ -4693,7 +4693,7 @@
                   </a:txBody>
                   <a:tcPr>
                     <a:solidFill>
-                      <a:srgbClr val="1A73E8"/>
+                      <a:srgbClr val="C7000B"/>
                     </a:solidFill>
                   </a:tcPr>
                 </a:tc>
@@ -4716,7 +4716,7 @@
                   </a:txBody>
                   <a:tcPr>
                     <a:solidFill>
-                      <a:srgbClr val="1A73E8"/>
+                      <a:srgbClr val="C7000B"/>
                     </a:solidFill>
                   </a:tcPr>
                 </a:tc>
@@ -4812,7 +4812,7 @@
                   </a:txBody>
                   <a:tcPr>
                     <a:solidFill>
-                      <a:srgbClr val="F0F4FF"/>
+                      <a:srgbClr val="FFF1F2"/>
                     </a:solidFill>
                   </a:tcPr>
                 </a:tc>
@@ -4835,7 +4835,7 @@
                   </a:txBody>
                   <a:tcPr>
                     <a:solidFill>
-                      <a:srgbClr val="F0F4FF"/>
+                      <a:srgbClr val="FFF1F2"/>
                     </a:solidFill>
                   </a:tcPr>
                 </a:tc>
@@ -4858,7 +4858,7 @@
                   </a:txBody>
                   <a:tcPr>
                     <a:solidFill>
-                      <a:srgbClr val="F0F4FF"/>
+                      <a:srgbClr val="FFF1F2"/>
                     </a:solidFill>
                   </a:tcPr>
                 </a:tc>
@@ -4954,7 +4954,7 @@
                   </a:txBody>
                   <a:tcPr>
                     <a:solidFill>
-                      <a:srgbClr val="F0F4FF"/>
+                      <a:srgbClr val="FFF1F2"/>
                     </a:solidFill>
                   </a:tcPr>
                 </a:tc>
@@ -4977,7 +4977,7 @@
                   </a:txBody>
                   <a:tcPr>
                     <a:solidFill>
-                      <a:srgbClr val="F0F4FF"/>
+                      <a:srgbClr val="FFF1F2"/>
                     </a:solidFill>
                   </a:tcPr>
                 </a:tc>
@@ -5000,7 +5000,7 @@
                   </a:txBody>
                   <a:tcPr>
                     <a:solidFill>
-                      <a:srgbClr val="F0F4FF"/>
+                      <a:srgbClr val="FFF1F2"/>
                     </a:solidFill>
                   </a:tcPr>
                 </a:tc>
@@ -5157,11 +5157,11 @@
             <a:avLst/>
           </a:prstGeom>
           <a:solidFill>
-            <a:srgbClr val="F0F4FF"/>
+            <a:srgbClr val="FFF1F2"/>
           </a:solidFill>
           <a:ln>
             <a:solidFill>
-              <a:srgbClr val="1A73E8"/>
+              <a:srgbClr val="C7000B"/>
             </a:solidFill>
           </a:ln>
         </p:spPr>
@@ -5187,7 +5187,7 @@
             <a:r>
               <a:rPr sz="1000" b="1">
                 <a:solidFill>
-                  <a:srgbClr val="1A73E8"/>
+                  <a:srgbClr val="C7000B"/>
                 </a:solidFill>
                 <a:latin typeface="Microsoft YaHei"/>
               </a:rPr>
@@ -5275,7 +5275,7 @@
             <a:r>
               <a:rPr sz="2400" b="1">
                 <a:solidFill>
-                  <a:srgbClr val="1A73E8"/>
+                  <a:srgbClr val="C7000B"/>
                 </a:solidFill>
                 <a:latin typeface="Microsoft YaHei"/>
               </a:rPr>
@@ -5299,7 +5299,7 @@
             <a:avLst/>
           </a:prstGeom>
           <a:solidFill>
-            <a:srgbClr val="1A73E8"/>
+            <a:srgbClr val="C7000B"/>
           </a:solidFill>
           <a:ln>
             <a:noFill/>
@@ -5353,7 +5353,7 @@
             <a:r>
               <a:rPr sz="1600" b="1">
                 <a:solidFill>
-                  <a:srgbClr val="1A73E8"/>
+                  <a:srgbClr val="C7000B"/>
                 </a:solidFill>
                 <a:latin typeface="Microsoft YaHei"/>
               </a:rPr>
@@ -6067,11 +6067,11 @@
             <a:avLst/>
           </a:prstGeom>
           <a:solidFill>
-            <a:srgbClr val="F0F4FF"/>
+            <a:srgbClr val="FFF1F2"/>
           </a:solidFill>
           <a:ln>
             <a:solidFill>
-              <a:srgbClr val="1A73E8"/>
+              <a:srgbClr val="C7000B"/>
             </a:solidFill>
           </a:ln>
         </p:spPr>
@@ -6123,7 +6123,7 @@
             <a:r>
               <a:rPr sz="1400" b="1">
                 <a:solidFill>
-                  <a:srgbClr val="1A73E8"/>
+                  <a:srgbClr val="C7000B"/>
                 </a:solidFill>
                 <a:latin typeface="Microsoft YaHei"/>
               </a:rPr>
@@ -6246,7 +6246,7 @@
             <a:r>
               <a:rPr sz="2400" b="1">
                 <a:solidFill>
-                  <a:srgbClr val="1A73E8"/>
+                  <a:srgbClr val="C7000B"/>
                 </a:solidFill>
                 <a:latin typeface="Microsoft YaHei"/>
               </a:rPr>
@@ -6270,7 +6270,7 @@
             <a:avLst/>
           </a:prstGeom>
           <a:solidFill>
-            <a:srgbClr val="1A73E8"/>
+            <a:srgbClr val="C7000B"/>
           </a:solidFill>
           <a:ln>
             <a:noFill/>
@@ -6324,7 +6324,7 @@
             <a:r>
               <a:rPr sz="1600" b="1">
                 <a:solidFill>
-                  <a:srgbClr val="1A73E8"/>
+                  <a:srgbClr val="C7000B"/>
                 </a:solidFill>
                 <a:latin typeface="Microsoft YaHei"/>
               </a:rPr>
@@ -6569,7 +6569,7 @@
             <a:r>
               <a:rPr sz="1600" b="1">
                 <a:solidFill>
-                  <a:srgbClr val="1A73E8"/>
+                  <a:srgbClr val="C7000B"/>
                 </a:solidFill>
                 <a:latin typeface="Microsoft YaHei"/>
               </a:rPr>
@@ -6620,7 +6620,7 @@
                   </a:txBody>
                   <a:tcPr>
                     <a:solidFill>
-                      <a:srgbClr val="1A73E8"/>
+                      <a:srgbClr val="C7000B"/>
                     </a:solidFill>
                   </a:tcPr>
                 </a:tc>
@@ -6643,7 +6643,7 @@
                   </a:txBody>
                   <a:tcPr>
                     <a:solidFill>
-                      <a:srgbClr val="1A73E8"/>
+                      <a:srgbClr val="C7000B"/>
                     </a:solidFill>
                   </a:tcPr>
                 </a:tc>
@@ -6716,7 +6716,7 @@
                   </a:txBody>
                   <a:tcPr>
                     <a:solidFill>
-                      <a:srgbClr val="F0F4FF"/>
+                      <a:srgbClr val="FFF1F2"/>
                     </a:solidFill>
                   </a:tcPr>
                 </a:tc>
@@ -6739,7 +6739,7 @@
                   </a:txBody>
                   <a:tcPr>
                     <a:solidFill>
-                      <a:srgbClr val="F0F4FF"/>
+                      <a:srgbClr val="FFF1F2"/>
                     </a:solidFill>
                   </a:tcPr>
                 </a:tc>
@@ -6812,7 +6812,7 @@
                   </a:txBody>
                   <a:tcPr>
                     <a:solidFill>
-                      <a:srgbClr val="F0F4FF"/>
+                      <a:srgbClr val="FFF1F2"/>
                     </a:solidFill>
                   </a:tcPr>
                 </a:tc>
@@ -6835,7 +6835,7 @@
                   </a:txBody>
                   <a:tcPr>
                     <a:solidFill>
-                      <a:srgbClr val="F0F4FF"/>
+                      <a:srgbClr val="FFF1F2"/>
                     </a:solidFill>
                   </a:tcPr>
                 </a:tc>
@@ -6908,7 +6908,7 @@
                   </a:txBody>
                   <a:tcPr>
                     <a:solidFill>
-                      <a:srgbClr val="F0F4FF"/>
+                      <a:srgbClr val="FFF1F2"/>
                     </a:solidFill>
                   </a:tcPr>
                 </a:tc>
@@ -6931,7 +6931,7 @@
                   </a:txBody>
                   <a:tcPr>
                     <a:solidFill>
-                      <a:srgbClr val="F0F4FF"/>
+                      <a:srgbClr val="FFF1F2"/>
                     </a:solidFill>
                   </a:tcPr>
                 </a:tc>
@@ -6955,11 +6955,11 @@
             <a:avLst/>
           </a:prstGeom>
           <a:solidFill>
-            <a:srgbClr val="F0F4FF"/>
+            <a:srgbClr val="FFF1F2"/>
           </a:solidFill>
           <a:ln>
             <a:solidFill>
-              <a:srgbClr val="1A73E8"/>
+              <a:srgbClr val="C7000B"/>
             </a:solidFill>
           </a:ln>
         </p:spPr>
@@ -7011,7 +7011,7 @@
             <a:r>
               <a:rPr sz="1600" b="1">
                 <a:solidFill>
-                  <a:srgbClr val="1A73E8"/>
+                  <a:srgbClr val="C7000B"/>
                 </a:solidFill>
                 <a:latin typeface="Microsoft YaHei"/>
               </a:rPr>
@@ -7151,7 +7151,7 @@
             <a:r>
               <a:rPr sz="1400" b="1">
                 <a:solidFill>
-                  <a:srgbClr val="1A73E8"/>
+                  <a:srgbClr val="C7000B"/>
                 </a:solidFill>
                 <a:latin typeface="Microsoft YaHei"/>
               </a:rPr>
@@ -7274,7 +7274,7 @@
             <a:r>
               <a:rPr sz="2400" b="1">
                 <a:solidFill>
-                  <a:srgbClr val="1A73E8"/>
+                  <a:srgbClr val="C7000B"/>
                 </a:solidFill>
                 <a:latin typeface="Microsoft YaHei"/>
               </a:rPr>
@@ -7298,7 +7298,7 @@
             <a:avLst/>
           </a:prstGeom>
           <a:solidFill>
-            <a:srgbClr val="1A73E8"/>
+            <a:srgbClr val="C7000B"/>
           </a:solidFill>
           <a:ln>
             <a:noFill/>
@@ -7352,7 +7352,7 @@
             <a:r>
               <a:rPr sz="1600" b="1">
                 <a:solidFill>
-                  <a:srgbClr val="1A73E8"/>
+                  <a:srgbClr val="C7000B"/>
                 </a:solidFill>
                 <a:latin typeface="Microsoft YaHei"/>
               </a:rPr>
@@ -7404,7 +7404,7 @@
                   </a:txBody>
                   <a:tcPr>
                     <a:solidFill>
-                      <a:srgbClr val="1A73E8"/>
+                      <a:srgbClr val="C7000B"/>
                     </a:solidFill>
                   </a:tcPr>
                 </a:tc>
@@ -7427,7 +7427,7 @@
                   </a:txBody>
                   <a:tcPr>
                     <a:solidFill>
-                      <a:srgbClr val="1A73E8"/>
+                      <a:srgbClr val="C7000B"/>
                     </a:solidFill>
                   </a:tcPr>
                 </a:tc>
@@ -7450,7 +7450,7 @@
                   </a:txBody>
                   <a:tcPr>
                     <a:solidFill>
-                      <a:srgbClr val="1A73E8"/>
+                      <a:srgbClr val="C7000B"/>
                     </a:solidFill>
                   </a:tcPr>
                 </a:tc>
@@ -7546,7 +7546,7 @@
                   </a:txBody>
                   <a:tcPr>
                     <a:solidFill>
-                      <a:srgbClr val="F0F4FF"/>
+                      <a:srgbClr val="FFF1F2"/>
                     </a:solidFill>
                   </a:tcPr>
                 </a:tc>
@@ -7569,7 +7569,7 @@
                   </a:txBody>
                   <a:tcPr>
                     <a:solidFill>
-                      <a:srgbClr val="F0F4FF"/>
+                      <a:srgbClr val="FFF1F2"/>
                     </a:solidFill>
                   </a:tcPr>
                 </a:tc>
@@ -7592,7 +7592,7 @@
                   </a:txBody>
                   <a:tcPr>
                     <a:solidFill>
-                      <a:srgbClr val="F0F4FF"/>
+                      <a:srgbClr val="FFF1F2"/>
                     </a:solidFill>
                   </a:tcPr>
                 </a:tc>
@@ -7875,11 +7875,11 @@
             <a:avLst/>
           </a:prstGeom>
           <a:solidFill>
-            <a:srgbClr val="F0F4FF"/>
+            <a:srgbClr val="FFF1F2"/>
           </a:solidFill>
           <a:ln>
             <a:solidFill>
-              <a:srgbClr val="1A73E8"/>
+              <a:srgbClr val="C7000B"/>
             </a:solidFill>
           </a:ln>
         </p:spPr>
@@ -7931,7 +7931,7 @@
             <a:r>
               <a:rPr sz="1400" b="1">
                 <a:solidFill>
-                  <a:srgbClr val="1A73E8"/>
+                  <a:srgbClr val="C7000B"/>
                 </a:solidFill>
                 <a:latin typeface="Microsoft YaHei"/>
               </a:rPr>
@@ -8056,7 +8056,7 @@
             <a:r>
               <a:rPr sz="2400" b="1">
                 <a:solidFill>
-                  <a:srgbClr val="1A73E8"/>
+                  <a:srgbClr val="C7000B"/>
                 </a:solidFill>
                 <a:latin typeface="Microsoft YaHei"/>
               </a:rPr>
@@ -8080,7 +8080,7 @@
             <a:avLst/>
           </a:prstGeom>
           <a:solidFill>
-            <a:srgbClr val="1A73E8"/>
+            <a:srgbClr val="C7000B"/>
           </a:solidFill>
           <a:ln>
             <a:noFill/>
@@ -8134,7 +8134,7 @@
             <a:r>
               <a:rPr sz="1600" b="1">
                 <a:solidFill>
-                  <a:srgbClr val="1A73E8"/>
+                  <a:srgbClr val="C7000B"/>
                 </a:solidFill>
                 <a:latin typeface="Microsoft YaHei"/>
               </a:rPr>
@@ -8186,7 +8186,7 @@
                   </a:txBody>
                   <a:tcPr>
                     <a:solidFill>
-                      <a:srgbClr val="1A73E8"/>
+                      <a:srgbClr val="C7000B"/>
                     </a:solidFill>
                   </a:tcPr>
                 </a:tc>
@@ -8209,7 +8209,7 @@
                   </a:txBody>
                   <a:tcPr>
                     <a:solidFill>
-                      <a:srgbClr val="1A73E8"/>
+                      <a:srgbClr val="C7000B"/>
                     </a:solidFill>
                   </a:tcPr>
                 </a:tc>
@@ -8232,7 +8232,7 @@
                   </a:txBody>
                   <a:tcPr>
                     <a:solidFill>
-                      <a:srgbClr val="1A73E8"/>
+                      <a:srgbClr val="C7000B"/>
                     </a:solidFill>
                   </a:tcPr>
                 </a:tc>
@@ -8328,7 +8328,7 @@
                   </a:txBody>
                   <a:tcPr>
                     <a:solidFill>
-                      <a:srgbClr val="F0F4FF"/>
+                      <a:srgbClr val="FFF1F2"/>
                     </a:solidFill>
                   </a:tcPr>
                 </a:tc>
@@ -8351,7 +8351,7 @@
                   </a:txBody>
                   <a:tcPr>
                     <a:solidFill>
-                      <a:srgbClr val="F0F4FF"/>
+                      <a:srgbClr val="FFF1F2"/>
                     </a:solidFill>
                   </a:tcPr>
                 </a:tc>
@@ -8374,7 +8374,7 @@
                   </a:txBody>
                   <a:tcPr>
                     <a:solidFill>
-                      <a:srgbClr val="F0F4FF"/>
+                      <a:srgbClr val="FFF1F2"/>
                     </a:solidFill>
                   </a:tcPr>
                 </a:tc>
@@ -8398,11 +8398,11 @@
             <a:avLst/>
           </a:prstGeom>
           <a:solidFill>
-            <a:srgbClr val="F0F4FF"/>
+            <a:srgbClr val="FFF1F2"/>
           </a:solidFill>
           <a:ln>
             <a:solidFill>
-              <a:srgbClr val="1A73E8"/>
+              <a:srgbClr val="C7000B"/>
             </a:solidFill>
           </a:ln>
         </p:spPr>
@@ -8711,7 +8711,7 @@
             <a:r>
               <a:rPr sz="2400" b="1">
                 <a:solidFill>
-                  <a:srgbClr val="1A73E8"/>
+                  <a:srgbClr val="C7000B"/>
                 </a:solidFill>
                 <a:latin typeface="Microsoft YaHei"/>
               </a:rPr>
@@ -8735,7 +8735,7 @@
             <a:avLst/>
           </a:prstGeom>
           <a:solidFill>
-            <a:srgbClr val="1A73E8"/>
+            <a:srgbClr val="C7000B"/>
           </a:solidFill>
           <a:ln>
             <a:noFill/>
@@ -8789,7 +8789,7 @@
             <a:r>
               <a:rPr sz="1600" b="1">
                 <a:solidFill>
-                  <a:srgbClr val="1A73E8"/>
+                  <a:srgbClr val="C7000B"/>
                 </a:solidFill>
                 <a:latin typeface="Microsoft YaHei"/>
               </a:rPr>
@@ -8841,7 +8841,7 @@
                   </a:txBody>
                   <a:tcPr>
                     <a:solidFill>
-                      <a:srgbClr val="1A73E8"/>
+                      <a:srgbClr val="C7000B"/>
                     </a:solidFill>
                   </a:tcPr>
                 </a:tc>
@@ -8864,7 +8864,7 @@
                   </a:txBody>
                   <a:tcPr>
                     <a:solidFill>
-                      <a:srgbClr val="1A73E8"/>
+                      <a:srgbClr val="C7000B"/>
                     </a:solidFill>
                   </a:tcPr>
                 </a:tc>
@@ -8887,7 +8887,7 @@
                   </a:txBody>
                   <a:tcPr>
                     <a:solidFill>
-                      <a:srgbClr val="1A73E8"/>
+                      <a:srgbClr val="C7000B"/>
                     </a:solidFill>
                   </a:tcPr>
                 </a:tc>
@@ -8983,7 +8983,7 @@
                   </a:txBody>
                   <a:tcPr>
                     <a:solidFill>
-                      <a:srgbClr val="F0F4FF"/>
+                      <a:srgbClr val="FFF1F2"/>
                     </a:solidFill>
                   </a:tcPr>
                 </a:tc>
@@ -9006,7 +9006,7 @@
                   </a:txBody>
                   <a:tcPr>
                     <a:solidFill>
-                      <a:srgbClr val="F0F4FF"/>
+                      <a:srgbClr val="FFF1F2"/>
                     </a:solidFill>
                   </a:tcPr>
                 </a:tc>
@@ -9029,7 +9029,7 @@
                   </a:txBody>
                   <a:tcPr>
                     <a:solidFill>
-                      <a:srgbClr val="F0F4FF"/>
+                      <a:srgbClr val="FFF1F2"/>
                     </a:solidFill>
                   </a:tcPr>
                 </a:tc>
@@ -9125,7 +9125,7 @@
                   </a:txBody>
                   <a:tcPr>
                     <a:solidFill>
-                      <a:srgbClr val="F0F4FF"/>
+                      <a:srgbClr val="FFF1F2"/>
                     </a:solidFill>
                   </a:tcPr>
                 </a:tc>
@@ -9148,7 +9148,7 @@
                   </a:txBody>
                   <a:tcPr>
                     <a:solidFill>
-                      <a:srgbClr val="F0F4FF"/>
+                      <a:srgbClr val="FFF1F2"/>
                     </a:solidFill>
                   </a:tcPr>
                 </a:tc>
@@ -9171,7 +9171,7 @@
                   </a:txBody>
                   <a:tcPr>
                     <a:solidFill>
-                      <a:srgbClr val="F0F4FF"/>
+                      <a:srgbClr val="FFF1F2"/>
                     </a:solidFill>
                   </a:tcPr>
                 </a:tc>
@@ -9328,7 +9328,7 @@
                   </a:txBody>
                   <a:tcPr>
                     <a:solidFill>
-                      <a:srgbClr val="1A73E8"/>
+                      <a:srgbClr val="C7000B"/>
                     </a:solidFill>
                   </a:tcPr>
                 </a:tc>
@@ -9351,7 +9351,7 @@
                   </a:txBody>
                   <a:tcPr>
                     <a:solidFill>
-                      <a:srgbClr val="1A73E8"/>
+                      <a:srgbClr val="C7000B"/>
                     </a:solidFill>
                   </a:tcPr>
                 </a:tc>
@@ -9424,7 +9424,7 @@
                   </a:txBody>
                   <a:tcPr>
                     <a:solidFill>
-                      <a:srgbClr val="F0F4FF"/>
+                      <a:srgbClr val="FFF1F2"/>
                     </a:solidFill>
                   </a:tcPr>
                 </a:tc>
@@ -9447,7 +9447,7 @@
                   </a:txBody>
                   <a:tcPr>
                     <a:solidFill>
-                      <a:srgbClr val="F0F4FF"/>
+                      <a:srgbClr val="FFF1F2"/>
                     </a:solidFill>
                   </a:tcPr>
                 </a:tc>
@@ -9520,7 +9520,7 @@
                   </a:txBody>
                   <a:tcPr>
                     <a:solidFill>
-                      <a:srgbClr val="F0F4FF"/>
+                      <a:srgbClr val="FFF1F2"/>
                     </a:solidFill>
                   </a:tcPr>
                 </a:tc>
@@ -9543,7 +9543,7 @@
                   </a:txBody>
                   <a:tcPr>
                     <a:solidFill>
-                      <a:srgbClr val="F0F4FF"/>
+                      <a:srgbClr val="FFF1F2"/>
                     </a:solidFill>
                   </a:tcPr>
                 </a:tc>
@@ -9567,11 +9567,11 @@
             <a:avLst/>
           </a:prstGeom>
           <a:solidFill>
-            <a:srgbClr val="1A73E8"/>
+            <a:srgbClr val="C7000B"/>
           </a:solidFill>
           <a:ln>
             <a:solidFill>
-              <a:srgbClr val="1A73E8"/>
+              <a:srgbClr val="C7000B"/>
             </a:solidFill>
           </a:ln>
         </p:spPr>
@@ -9685,7 +9685,7 @@
             <a:r>
               <a:rPr sz="2400" b="1">
                 <a:solidFill>
-                  <a:srgbClr val="1A73E8"/>
+                  <a:srgbClr val="C7000B"/>
                 </a:solidFill>
                 <a:latin typeface="Microsoft YaHei"/>
               </a:rPr>
@@ -9709,7 +9709,7 @@
             <a:avLst/>
           </a:prstGeom>
           <a:solidFill>
-            <a:srgbClr val="1A73E8"/>
+            <a:srgbClr val="C7000B"/>
           </a:solidFill>
           <a:ln>
             <a:noFill/>
@@ -9798,7 +9798,7 @@
             <a:r>
               <a:rPr sz="1600" b="1">
                 <a:solidFill>
-                  <a:srgbClr val="1A73E8"/>
+                  <a:srgbClr val="C7000B"/>
                 </a:solidFill>
                 <a:latin typeface="Microsoft YaHei"/>
               </a:rPr>
@@ -9849,7 +9849,7 @@
                   </a:txBody>
                   <a:tcPr>
                     <a:solidFill>
-                      <a:srgbClr val="1A73E8"/>
+                      <a:srgbClr val="C7000B"/>
                     </a:solidFill>
                   </a:tcPr>
                 </a:tc>
@@ -9872,7 +9872,7 @@
                   </a:txBody>
                   <a:tcPr>
                     <a:solidFill>
-                      <a:srgbClr val="1A73E8"/>
+                      <a:srgbClr val="C7000B"/>
                     </a:solidFill>
                   </a:tcPr>
                 </a:tc>
@@ -9945,7 +9945,7 @@
                   </a:txBody>
                   <a:tcPr>
                     <a:solidFill>
-                      <a:srgbClr val="F0F4FF"/>
+                      <a:srgbClr val="FFF1F2"/>
                     </a:solidFill>
                   </a:tcPr>
                 </a:tc>
@@ -9968,7 +9968,7 @@
                   </a:txBody>
                   <a:tcPr>
                     <a:solidFill>
-                      <a:srgbClr val="F0F4FF"/>
+                      <a:srgbClr val="FFF1F2"/>
                     </a:solidFill>
                   </a:tcPr>
                 </a:tc>
@@ -10041,7 +10041,7 @@
                   </a:txBody>
                   <a:tcPr>
                     <a:solidFill>
-                      <a:srgbClr val="F0F4FF"/>
+                      <a:srgbClr val="FFF1F2"/>
                     </a:solidFill>
                   </a:tcPr>
                 </a:tc>
@@ -10064,7 +10064,7 @@
                   </a:txBody>
                   <a:tcPr>
                     <a:solidFill>
-                      <a:srgbClr val="F0F4FF"/>
+                      <a:srgbClr val="FFF1F2"/>
                     </a:solidFill>
                   </a:tcPr>
                 </a:tc>
@@ -10147,7 +10147,7 @@
             <a:r>
               <a:rPr sz="1600" b="1">
                 <a:solidFill>
-                  <a:srgbClr val="1A73E8"/>
+                  <a:srgbClr val="C7000B"/>
                 </a:solidFill>
                 <a:latin typeface="Microsoft YaHei"/>
               </a:rPr>
@@ -10198,7 +10198,7 @@
                   </a:txBody>
                   <a:tcPr>
                     <a:solidFill>
-                      <a:srgbClr val="1A73E8"/>
+                      <a:srgbClr val="C7000B"/>
                     </a:solidFill>
                   </a:tcPr>
                 </a:tc>
@@ -10221,7 +10221,7 @@
                   </a:txBody>
                   <a:tcPr>
                     <a:solidFill>
-                      <a:srgbClr val="1A73E8"/>
+                      <a:srgbClr val="C7000B"/>
                     </a:solidFill>
                   </a:tcPr>
                 </a:tc>
@@ -10294,7 +10294,7 @@
                   </a:txBody>
                   <a:tcPr>
                     <a:solidFill>
-                      <a:srgbClr val="F0F4FF"/>
+                      <a:srgbClr val="FFF1F2"/>
                     </a:solidFill>
                   </a:tcPr>
                 </a:tc>
@@ -10317,7 +10317,7 @@
                   </a:txBody>
                   <a:tcPr>
                     <a:solidFill>
-                      <a:srgbClr val="F0F4FF"/>
+                      <a:srgbClr val="FFF1F2"/>
                     </a:solidFill>
                   </a:tcPr>
                 </a:tc>
@@ -10390,7 +10390,7 @@
                   </a:txBody>
                   <a:tcPr>
                     <a:solidFill>
-                      <a:srgbClr val="F0F4FF"/>
+                      <a:srgbClr val="FFF1F2"/>
                     </a:solidFill>
                   </a:tcPr>
                 </a:tc>
@@ -10413,7 +10413,7 @@
                   </a:txBody>
                   <a:tcPr>
                     <a:solidFill>
-                      <a:srgbClr val="F0F4FF"/>
+                      <a:srgbClr val="FFF1F2"/>
                     </a:solidFill>
                   </a:tcPr>
                 </a:tc>
@@ -10496,7 +10496,7 @@
             <a:r>
               <a:rPr sz="1600" b="1">
                 <a:solidFill>
-                  <a:srgbClr val="1A73E8"/>
+                  <a:srgbClr val="C7000B"/>
                 </a:solidFill>
                 <a:latin typeface="Microsoft YaHei"/>
               </a:rPr>
@@ -10548,7 +10548,7 @@
                   </a:txBody>
                   <a:tcPr>
                     <a:solidFill>
-                      <a:srgbClr val="1A73E8"/>
+                      <a:srgbClr val="C7000B"/>
                     </a:solidFill>
                   </a:tcPr>
                 </a:tc>
@@ -10571,7 +10571,7 @@
                   </a:txBody>
                   <a:tcPr>
                     <a:solidFill>
-                      <a:srgbClr val="1A73E8"/>
+                      <a:srgbClr val="C7000B"/>
                     </a:solidFill>
                   </a:tcPr>
                 </a:tc>
@@ -10594,7 +10594,7 @@
                   </a:txBody>
                   <a:tcPr>
                     <a:solidFill>
-                      <a:srgbClr val="1A73E8"/>
+                      <a:srgbClr val="C7000B"/>
                     </a:solidFill>
                   </a:tcPr>
                 </a:tc>
@@ -10690,7 +10690,7 @@
                   </a:txBody>
                   <a:tcPr>
                     <a:solidFill>
-                      <a:srgbClr val="F0F4FF"/>
+                      <a:srgbClr val="FFF1F2"/>
                     </a:solidFill>
                   </a:tcPr>
                 </a:tc>
@@ -10713,7 +10713,7 @@
                   </a:txBody>
                   <a:tcPr>
                     <a:solidFill>
-                      <a:srgbClr val="F0F4FF"/>
+                      <a:srgbClr val="FFF1F2"/>
                     </a:solidFill>
                   </a:tcPr>
                 </a:tc>
@@ -10736,7 +10736,7 @@
                   </a:txBody>
                   <a:tcPr>
                     <a:solidFill>
-                      <a:srgbClr val="F0F4FF"/>
+                      <a:srgbClr val="FFF1F2"/>
                     </a:solidFill>
                   </a:tcPr>
                 </a:tc>
@@ -10832,7 +10832,7 @@
                   </a:txBody>
                   <a:tcPr>
                     <a:solidFill>
-                      <a:srgbClr val="F0F4FF"/>
+                      <a:srgbClr val="FFF1F2"/>
                     </a:solidFill>
                   </a:tcPr>
                 </a:tc>
@@ -10855,7 +10855,7 @@
                   </a:txBody>
                   <a:tcPr>
                     <a:solidFill>
-                      <a:srgbClr val="F0F4FF"/>
+                      <a:srgbClr val="FFF1F2"/>
                     </a:solidFill>
                   </a:tcPr>
                 </a:tc>
@@ -10878,7 +10878,7 @@
                   </a:txBody>
                   <a:tcPr>
                     <a:solidFill>
-                      <a:srgbClr val="F0F4FF"/>
+                      <a:srgbClr val="FFF1F2"/>
                     </a:solidFill>
                   </a:tcPr>
                 </a:tc>
@@ -10974,7 +10974,7 @@
                   </a:txBody>
                   <a:tcPr>
                     <a:solidFill>
-                      <a:srgbClr val="F0F4FF"/>
+                      <a:srgbClr val="FFF1F2"/>
                     </a:solidFill>
                   </a:tcPr>
                 </a:tc>
@@ -10997,7 +10997,7 @@
                   </a:txBody>
                   <a:tcPr>
                     <a:solidFill>
-                      <a:srgbClr val="F0F4FF"/>
+                      <a:srgbClr val="FFF1F2"/>
                     </a:solidFill>
                   </a:tcPr>
                 </a:tc>
@@ -11020,7 +11020,7 @@
                   </a:txBody>
                   <a:tcPr>
                     <a:solidFill>
-                      <a:srgbClr val="F0F4FF"/>
+                      <a:srgbClr val="FFF1F2"/>
                     </a:solidFill>
                   </a:tcPr>
                 </a:tc>
@@ -11116,7 +11116,7 @@
                   </a:txBody>
                   <a:tcPr>
                     <a:solidFill>
-                      <a:srgbClr val="F0F4FF"/>
+                      <a:srgbClr val="FFF1F2"/>
                     </a:solidFill>
                   </a:tcPr>
                 </a:tc>
@@ -11139,7 +11139,7 @@
                   </a:txBody>
                   <a:tcPr>
                     <a:solidFill>
-                      <a:srgbClr val="F0F4FF"/>
+                      <a:srgbClr val="FFF1F2"/>
                     </a:solidFill>
                   </a:tcPr>
                 </a:tc>
@@ -11162,7 +11162,7 @@
                   </a:txBody>
                   <a:tcPr>
                     <a:solidFill>
-                      <a:srgbClr val="F0F4FF"/>
+                      <a:srgbClr val="FFF1F2"/>
                     </a:solidFill>
                   </a:tcPr>
                 </a:tc>
@@ -11250,7 +11250,7 @@
             <a:r>
               <a:rPr sz="2400" b="1">
                 <a:solidFill>
-                  <a:srgbClr val="1A73E8"/>
+                  <a:srgbClr val="C7000B"/>
                 </a:solidFill>
                 <a:latin typeface="Microsoft YaHei"/>
               </a:rPr>
@@ -11274,7 +11274,7 @@
             <a:avLst/>
           </a:prstGeom>
           <a:solidFill>
-            <a:srgbClr val="1A73E8"/>
+            <a:srgbClr val="C7000B"/>
           </a:solidFill>
           <a:ln>
             <a:noFill/>
@@ -11679,7 +11679,7 @@
             <a:r>
               <a:rPr sz="1600" b="1">
                 <a:solidFill>
-                  <a:srgbClr val="1A73E8"/>
+                  <a:srgbClr val="C7000B"/>
                 </a:solidFill>
                 <a:latin typeface="Microsoft YaHei"/>
               </a:rPr>
@@ -11730,7 +11730,7 @@
                   </a:txBody>
                   <a:tcPr>
                     <a:solidFill>
-                      <a:srgbClr val="1A73E8"/>
+                      <a:srgbClr val="C7000B"/>
                     </a:solidFill>
                   </a:tcPr>
                 </a:tc>
@@ -11753,7 +11753,7 @@
                   </a:txBody>
                   <a:tcPr>
                     <a:solidFill>
-                      <a:srgbClr val="1A73E8"/>
+                      <a:srgbClr val="C7000B"/>
                     </a:solidFill>
                   </a:tcPr>
                 </a:tc>
@@ -11826,7 +11826,7 @@
                   </a:txBody>
                   <a:tcPr>
                     <a:solidFill>
-                      <a:srgbClr val="F0F4FF"/>
+                      <a:srgbClr val="FFF1F2"/>
                     </a:solidFill>
                   </a:tcPr>
                 </a:tc>
@@ -11849,7 +11849,7 @@
                   </a:txBody>
                   <a:tcPr>
                     <a:solidFill>
-                      <a:srgbClr val="F0F4FF"/>
+                      <a:srgbClr val="FFF1F2"/>
                     </a:solidFill>
                   </a:tcPr>
                 </a:tc>
@@ -11922,7 +11922,7 @@
                   </a:txBody>
                   <a:tcPr>
                     <a:solidFill>
-                      <a:srgbClr val="F0F4FF"/>
+                      <a:srgbClr val="FFF1F2"/>
                     </a:solidFill>
                   </a:tcPr>
                 </a:tc>
@@ -11945,7 +11945,7 @@
                   </a:txBody>
                   <a:tcPr>
                     <a:solidFill>
-                      <a:srgbClr val="F0F4FF"/>
+                      <a:srgbClr val="FFF1F2"/>
                     </a:solidFill>
                   </a:tcPr>
                 </a:tc>
@@ -12018,7 +12018,7 @@
                   </a:txBody>
                   <a:tcPr>
                     <a:solidFill>
-                      <a:srgbClr val="F0F4FF"/>
+                      <a:srgbClr val="FFF1F2"/>
                     </a:solidFill>
                   </a:tcPr>
                 </a:tc>
@@ -12041,7 +12041,7 @@
                   </a:txBody>
                   <a:tcPr>
                     <a:solidFill>
-                      <a:srgbClr val="F0F4FF"/>
+                      <a:srgbClr val="FFF1F2"/>
                     </a:solidFill>
                   </a:tcPr>
                 </a:tc>
@@ -12223,7 +12223,7 @@
                   </a:txBody>
                   <a:tcPr>
                     <a:solidFill>
-                      <a:srgbClr val="F0F4FF"/>
+                      <a:srgbClr val="FFF1F2"/>
                     </a:solidFill>
                   </a:tcPr>
                 </a:tc>
@@ -12246,7 +12246,7 @@
                   </a:txBody>
                   <a:tcPr>
                     <a:solidFill>
-                      <a:srgbClr val="F0F4FF"/>
+                      <a:srgbClr val="FFF1F2"/>
                     </a:solidFill>
                   </a:tcPr>
                 </a:tc>
@@ -12318,11 +12318,11 @@
             <a:avLst/>
           </a:prstGeom>
           <a:solidFill>
-            <a:srgbClr val="1A73E8"/>
+            <a:srgbClr val="C7000B"/>
           </a:solidFill>
           <a:ln>
             <a:solidFill>
-              <a:srgbClr val="1A73E8"/>
+              <a:srgbClr val="C7000B"/>
             </a:solidFill>
           </a:ln>
         </p:spPr>
@@ -12436,7 +12436,7 @@
             <a:r>
               <a:rPr sz="2400" b="1">
                 <a:solidFill>
-                  <a:srgbClr val="1A73E8"/>
+                  <a:srgbClr val="C7000B"/>
                 </a:solidFill>
                 <a:latin typeface="Microsoft YaHei"/>
               </a:rPr>
@@ -12460,7 +12460,7 @@
             <a:avLst/>
           </a:prstGeom>
           <a:solidFill>
-            <a:srgbClr val="1A73E8"/>
+            <a:srgbClr val="C7000B"/>
           </a:solidFill>
           <a:ln>
             <a:noFill/>
@@ -12721,7 +12721,7 @@
             <a:avLst/>
           </a:prstGeom>
           <a:solidFill>
-            <a:srgbClr val="1A73E8"/>
+            <a:srgbClr val="C7000B"/>
           </a:solidFill>
           <a:ln>
             <a:noFill/>
@@ -13375,11 +13375,11 @@
             <a:avLst/>
           </a:prstGeom>
           <a:solidFill>
-            <a:srgbClr val="F0F4FF"/>
+            <a:srgbClr val="FFF1F2"/>
           </a:solidFill>
           <a:ln>
             <a:solidFill>
-              <a:srgbClr val="1A73E8"/>
+              <a:srgbClr val="C7000B"/>
             </a:solidFill>
           </a:ln>
         </p:spPr>
@@ -13431,7 +13431,7 @@
             <a:r>
               <a:rPr sz="1600" b="1">
                 <a:solidFill>
-                  <a:srgbClr val="1A73E8"/>
+                  <a:srgbClr val="C7000B"/>
                 </a:solidFill>
                 <a:latin typeface="Microsoft YaHei"/>
               </a:rPr>
@@ -13606,7 +13606,7 @@
             <a:r>
               <a:rPr sz="1400" b="1">
                 <a:solidFill>
-                  <a:srgbClr val="1A73E8"/>
+                  <a:srgbClr val="C7000B"/>
                 </a:solidFill>
                 <a:latin typeface="Microsoft YaHei"/>
               </a:rPr>
@@ -13694,7 +13694,7 @@
             <a:r>
               <a:rPr sz="2400" b="1">
                 <a:solidFill>
-                  <a:srgbClr val="1A73E8"/>
+                  <a:srgbClr val="C7000B"/>
                 </a:solidFill>
                 <a:latin typeface="Microsoft YaHei"/>
               </a:rPr>
@@ -13718,7 +13718,7 @@
             <a:avLst/>
           </a:prstGeom>
           <a:solidFill>
-            <a:srgbClr val="1A73E8"/>
+            <a:srgbClr val="C7000B"/>
           </a:solidFill>
           <a:ln>
             <a:noFill/>
@@ -13772,7 +13772,7 @@
             <a:r>
               <a:rPr sz="1400" b="1">
                 <a:solidFill>
-                  <a:srgbClr val="1A73E8"/>
+                  <a:srgbClr val="C7000B"/>
                 </a:solidFill>
                 <a:latin typeface="Microsoft YaHei"/>
               </a:rPr>
@@ -13823,7 +13823,7 @@
                   </a:txBody>
                   <a:tcPr>
                     <a:solidFill>
-                      <a:srgbClr val="1A73E8"/>
+                      <a:srgbClr val="C7000B"/>
                     </a:solidFill>
                   </a:tcPr>
                 </a:tc>
@@ -13846,7 +13846,7 @@
                   </a:txBody>
                   <a:tcPr>
                     <a:solidFill>
-                      <a:srgbClr val="1A73E8"/>
+                      <a:srgbClr val="C7000B"/>
                     </a:solidFill>
                   </a:tcPr>
                 </a:tc>
@@ -13919,7 +13919,7 @@
                   </a:txBody>
                   <a:tcPr>
                     <a:solidFill>
-                      <a:srgbClr val="F0F4FF"/>
+                      <a:srgbClr val="FFF1F2"/>
                     </a:solidFill>
                   </a:tcPr>
                 </a:tc>
@@ -13942,7 +13942,7 @@
                   </a:txBody>
                   <a:tcPr>
                     <a:solidFill>
-                      <a:srgbClr val="F0F4FF"/>
+                      <a:srgbClr val="FFF1F2"/>
                     </a:solidFill>
                   </a:tcPr>
                 </a:tc>
@@ -14025,7 +14025,7 @@
             <a:r>
               <a:rPr sz="1400" b="1">
                 <a:solidFill>
-                  <a:srgbClr val="1A73E8"/>
+                  <a:srgbClr val="C7000B"/>
                 </a:solidFill>
                 <a:latin typeface="Microsoft YaHei"/>
               </a:rPr>
@@ -14076,7 +14076,7 @@
                   </a:txBody>
                   <a:tcPr>
                     <a:solidFill>
-                      <a:srgbClr val="1A73E8"/>
+                      <a:srgbClr val="C7000B"/>
                     </a:solidFill>
                   </a:tcPr>
                 </a:tc>
@@ -14099,7 +14099,7 @@
                   </a:txBody>
                   <a:tcPr>
                     <a:solidFill>
-                      <a:srgbClr val="1A73E8"/>
+                      <a:srgbClr val="C7000B"/>
                     </a:solidFill>
                   </a:tcPr>
                 </a:tc>
@@ -14172,7 +14172,7 @@
                   </a:txBody>
                   <a:tcPr>
                     <a:solidFill>
-                      <a:srgbClr val="F0F4FF"/>
+                      <a:srgbClr val="FFF1F2"/>
                     </a:solidFill>
                   </a:tcPr>
                 </a:tc>
@@ -14195,7 +14195,7 @@
                   </a:txBody>
                   <a:tcPr>
                     <a:solidFill>
-                      <a:srgbClr val="F0F4FF"/>
+                      <a:srgbClr val="FFF1F2"/>
                     </a:solidFill>
                   </a:tcPr>
                 </a:tc>
@@ -14329,7 +14329,7 @@
                   </a:txBody>
                   <a:tcPr>
                     <a:solidFill>
-                      <a:srgbClr val="1A73E8"/>
+                      <a:srgbClr val="C7000B"/>
                     </a:solidFill>
                   </a:tcPr>
                 </a:tc>
@@ -14352,7 +14352,7 @@
                   </a:txBody>
                   <a:tcPr>
                     <a:solidFill>
-                      <a:srgbClr val="1A73E8"/>
+                      <a:srgbClr val="C7000B"/>
                     </a:solidFill>
                   </a:tcPr>
                 </a:tc>
@@ -14425,7 +14425,7 @@
                   </a:txBody>
                   <a:tcPr>
                     <a:solidFill>
-                      <a:srgbClr val="F0F4FF"/>
+                      <a:srgbClr val="FFF1F2"/>
                     </a:solidFill>
                   </a:tcPr>
                 </a:tc>
@@ -14448,7 +14448,7 @@
                   </a:txBody>
                   <a:tcPr>
                     <a:solidFill>
-                      <a:srgbClr val="F0F4FF"/>
+                      <a:srgbClr val="FFF1F2"/>
                     </a:solidFill>
                   </a:tcPr>
                 </a:tc>
@@ -14584,7 +14584,7 @@
             <a:r>
               <a:rPr sz="2400" b="1">
                 <a:solidFill>
-                  <a:srgbClr val="1A73E8"/>
+                  <a:srgbClr val="C7000B"/>
                 </a:solidFill>
                 <a:latin typeface="Microsoft YaHei"/>
               </a:rPr>
@@ -14608,7 +14608,7 @@
             <a:avLst/>
           </a:prstGeom>
           <a:solidFill>
-            <a:srgbClr val="1A73E8"/>
+            <a:srgbClr val="C7000B"/>
           </a:solidFill>
           <a:ln>
             <a:noFill/>
@@ -14662,7 +14662,7 @@
             <a:r>
               <a:rPr sz="1400" b="1">
                 <a:solidFill>
-                  <a:srgbClr val="1A73E8"/>
+                  <a:srgbClr val="C7000B"/>
                 </a:solidFill>
                 <a:latin typeface="Microsoft YaHei"/>
               </a:rPr>
@@ -14748,7 +14748,7 @@
                   </a:txBody>
                   <a:tcPr>
                     <a:solidFill>
-                      <a:srgbClr val="1A73E8"/>
+                      <a:srgbClr val="C7000B"/>
                     </a:solidFill>
                   </a:tcPr>
                 </a:tc>
@@ -14771,7 +14771,7 @@
                   </a:txBody>
                   <a:tcPr>
                     <a:solidFill>
-                      <a:srgbClr val="1A73E8"/>
+                      <a:srgbClr val="C7000B"/>
                     </a:solidFill>
                   </a:tcPr>
                 </a:tc>
@@ -14844,7 +14844,7 @@
                   </a:txBody>
                   <a:tcPr>
                     <a:solidFill>
-                      <a:srgbClr val="F0F4FF"/>
+                      <a:srgbClr val="FFF1F2"/>
                     </a:solidFill>
                   </a:tcPr>
                 </a:tc>
@@ -14867,7 +14867,7 @@
                   </a:txBody>
                   <a:tcPr>
                     <a:solidFill>
-                      <a:srgbClr val="F0F4FF"/>
+                      <a:srgbClr val="FFF1F2"/>
                     </a:solidFill>
                   </a:tcPr>
                 </a:tc>
@@ -15273,7 +15273,7 @@
                   </a:txBody>
                   <a:tcPr>
                     <a:solidFill>
-                      <a:srgbClr val="F0F4FF"/>
+                      <a:srgbClr val="FFF1F2"/>
                     </a:solidFill>
                   </a:tcPr>
                 </a:tc>
@@ -15296,7 +15296,7 @@
                   </a:txBody>
                   <a:tcPr>
                     <a:solidFill>
-                      <a:srgbClr val="F0F4FF"/>
+                      <a:srgbClr val="FFF1F2"/>
                     </a:solidFill>
                   </a:tcPr>
                 </a:tc>
@@ -15319,7 +15319,7 @@
                   </a:txBody>
                   <a:tcPr>
                     <a:solidFill>
-                      <a:srgbClr val="F0F4FF"/>
+                      <a:srgbClr val="FFF1F2"/>
                     </a:solidFill>
                   </a:tcPr>
                 </a:tc>
@@ -15342,7 +15342,7 @@
                   </a:txBody>
                   <a:tcPr>
                     <a:solidFill>
-                      <a:srgbClr val="F0F4FF"/>
+                      <a:srgbClr val="FFF1F2"/>
                     </a:solidFill>
                   </a:tcPr>
                 </a:tc>
@@ -15365,7 +15365,7 @@
                   </a:txBody>
                   <a:tcPr>
                     <a:solidFill>
-                      <a:srgbClr val="F0F4FF"/>
+                      <a:srgbClr val="FFF1F2"/>
                     </a:solidFill>
                   </a:tcPr>
                 </a:tc>
@@ -15506,11 +15506,11 @@
             <a:avLst/>
           </a:prstGeom>
           <a:solidFill>
-            <a:srgbClr val="F0F4FF"/>
+            <a:srgbClr val="FFF1F2"/>
           </a:solidFill>
           <a:ln>
             <a:solidFill>
-              <a:srgbClr val="1A73E8"/>
+              <a:srgbClr val="C7000B"/>
             </a:solidFill>
           </a:ln>
         </p:spPr>
@@ -15536,7 +15536,7 @@
             <a:r>
               <a:rPr sz="1200" b="1">
                 <a:solidFill>
-                  <a:srgbClr val="1A73E8"/>
+                  <a:srgbClr val="C7000B"/>
                 </a:solidFill>
                 <a:latin typeface="Microsoft YaHei"/>
               </a:rPr>
@@ -15624,7 +15624,7 @@
             <a:r>
               <a:rPr sz="2400" b="1">
                 <a:solidFill>
-                  <a:srgbClr val="1A73E8"/>
+                  <a:srgbClr val="C7000B"/>
                 </a:solidFill>
                 <a:latin typeface="Microsoft YaHei"/>
               </a:rPr>
@@ -15648,7 +15648,7 @@
             <a:avLst/>
           </a:prstGeom>
           <a:solidFill>
-            <a:srgbClr val="1A73E8"/>
+            <a:srgbClr val="C7000B"/>
           </a:solidFill>
           <a:ln>
             <a:noFill/>
@@ -15702,7 +15702,7 @@
             <a:r>
               <a:rPr sz="1600" b="1">
                 <a:solidFill>
-                  <a:srgbClr val="1A73E8"/>
+                  <a:srgbClr val="C7000B"/>
                 </a:solidFill>
                 <a:latin typeface="Microsoft YaHei"/>
               </a:rPr>
@@ -15947,7 +15947,7 @@
             <a:r>
               <a:rPr sz="1400" b="1">
                 <a:solidFill>
-                  <a:srgbClr val="1A73E8"/>
+                  <a:srgbClr val="C7000B"/>
                 </a:solidFill>
                 <a:latin typeface="Microsoft YaHei"/>
               </a:rPr>
@@ -16017,7 +16017,7 @@
             <a:r>
               <a:rPr sz="1200" b="0">
                 <a:solidFill>
-                  <a:srgbClr val="1A73E8"/>
+                  <a:srgbClr val="C7000B"/>
                 </a:solidFill>
                 <a:latin typeface="Microsoft YaHei"/>
               </a:rPr>
@@ -16052,7 +16052,7 @@
             <a:r>
               <a:rPr sz="1400" b="1">
                 <a:solidFill>
-                  <a:srgbClr val="1A73E8"/>
+                  <a:srgbClr val="C7000B"/>
                 </a:solidFill>
                 <a:latin typeface="Microsoft YaHei"/>
               </a:rPr>
@@ -16122,7 +16122,7 @@
             <a:r>
               <a:rPr sz="1200" b="0">
                 <a:solidFill>
-                  <a:srgbClr val="1A73E8"/>
+                  <a:srgbClr val="C7000B"/>
                 </a:solidFill>
                 <a:latin typeface="Microsoft YaHei"/>
               </a:rPr>
@@ -16157,7 +16157,7 @@
             <a:r>
               <a:rPr sz="1600" b="1">
                 <a:solidFill>
-                  <a:srgbClr val="1A73E8"/>
+                  <a:srgbClr val="C7000B"/>
                 </a:solidFill>
                 <a:latin typeface="Microsoft YaHei"/>
               </a:rPr>
@@ -16209,7 +16209,7 @@
                   </a:txBody>
                   <a:tcPr>
                     <a:solidFill>
-                      <a:srgbClr val="1A73E8"/>
+                      <a:srgbClr val="C7000B"/>
                     </a:solidFill>
                   </a:tcPr>
                 </a:tc>
@@ -16232,7 +16232,7 @@
                   </a:txBody>
                   <a:tcPr>
                     <a:solidFill>
-                      <a:srgbClr val="1A73E8"/>
+                      <a:srgbClr val="C7000B"/>
                     </a:solidFill>
                   </a:tcPr>
                 </a:tc>
@@ -16255,7 +16255,7 @@
                   </a:txBody>
                   <a:tcPr>
                     <a:solidFill>
-                      <a:srgbClr val="1A73E8"/>
+                      <a:srgbClr val="C7000B"/>
                     </a:solidFill>
                   </a:tcPr>
                 </a:tc>
@@ -16351,7 +16351,7 @@
                   </a:txBody>
                   <a:tcPr>
                     <a:solidFill>
-                      <a:srgbClr val="F0F4FF"/>
+                      <a:srgbClr val="FFF1F2"/>
                     </a:solidFill>
                   </a:tcPr>
                 </a:tc>
@@ -16374,7 +16374,7 @@
                   </a:txBody>
                   <a:tcPr>
                     <a:solidFill>
-                      <a:srgbClr val="F0F4FF"/>
+                      <a:srgbClr val="FFF1F2"/>
                     </a:solidFill>
                   </a:tcPr>
                 </a:tc>
@@ -16397,7 +16397,7 @@
                   </a:txBody>
                   <a:tcPr>
                     <a:solidFill>
-                      <a:srgbClr val="F0F4FF"/>
+                      <a:srgbClr val="FFF1F2"/>
                     </a:solidFill>
                   </a:tcPr>
                 </a:tc>
@@ -16493,7 +16493,7 @@
                   </a:txBody>
                   <a:tcPr>
                     <a:solidFill>
-                      <a:srgbClr val="F0F4FF"/>
+                      <a:srgbClr val="FFF1F2"/>
                     </a:solidFill>
                   </a:tcPr>
                 </a:tc>
@@ -16516,7 +16516,7 @@
                   </a:txBody>
                   <a:tcPr>
                     <a:solidFill>
-                      <a:srgbClr val="F0F4FF"/>
+                      <a:srgbClr val="FFF1F2"/>
                     </a:solidFill>
                   </a:tcPr>
                 </a:tc>
@@ -16539,7 +16539,7 @@
                   </a:txBody>
                   <a:tcPr>
                     <a:solidFill>
-                      <a:srgbClr val="F0F4FF"/>
+                      <a:srgbClr val="FFF1F2"/>
                     </a:solidFill>
                   </a:tcPr>
                 </a:tc>
@@ -16635,7 +16635,7 @@
                   </a:txBody>
                   <a:tcPr>
                     <a:solidFill>
-                      <a:srgbClr val="F0F4FF"/>
+                      <a:srgbClr val="FFF1F2"/>
                     </a:solidFill>
                   </a:tcPr>
                 </a:tc>
@@ -16658,7 +16658,7 @@
                   </a:txBody>
                   <a:tcPr>
                     <a:solidFill>
-                      <a:srgbClr val="F0F4FF"/>
+                      <a:srgbClr val="FFF1F2"/>
                     </a:solidFill>
                   </a:tcPr>
                 </a:tc>
@@ -16681,7 +16681,7 @@
                   </a:txBody>
                   <a:tcPr>
                     <a:solidFill>
-                      <a:srgbClr val="F0F4FF"/>
+                      <a:srgbClr val="FFF1F2"/>
                     </a:solidFill>
                   </a:tcPr>
                 </a:tc>
@@ -16777,7 +16777,7 @@
                   </a:txBody>
                   <a:tcPr>
                     <a:solidFill>
-                      <a:srgbClr val="F0F4FF"/>
+                      <a:srgbClr val="FFF1F2"/>
                     </a:solidFill>
                   </a:tcPr>
                 </a:tc>
@@ -16800,7 +16800,7 @@
                   </a:txBody>
                   <a:tcPr>
                     <a:solidFill>
-                      <a:srgbClr val="F0F4FF"/>
+                      <a:srgbClr val="FFF1F2"/>
                     </a:solidFill>
                   </a:tcPr>
                 </a:tc>
@@ -16823,7 +16823,7 @@
                   </a:txBody>
                   <a:tcPr>
                     <a:solidFill>
-                      <a:srgbClr val="F0F4FF"/>
+                      <a:srgbClr val="FFF1F2"/>
                     </a:solidFill>
                   </a:tcPr>
                 </a:tc>
@@ -16847,11 +16847,11 @@
             <a:avLst/>
           </a:prstGeom>
           <a:solidFill>
-            <a:srgbClr val="F0F4FF"/>
+            <a:srgbClr val="FFF1F2"/>
           </a:solidFill>
           <a:ln>
             <a:solidFill>
-              <a:srgbClr val="1A73E8"/>
+              <a:srgbClr val="C7000B"/>
             </a:solidFill>
           </a:ln>
         </p:spPr>
@@ -16877,7 +16877,7 @@
             <a:r>
               <a:rPr sz="1400" b="1">
                 <a:solidFill>
-                  <a:srgbClr val="1A73E8"/>
+                  <a:srgbClr val="C7000B"/>
                 </a:solidFill>
                 <a:latin typeface="Microsoft YaHei"/>
               </a:rPr>
@@ -16965,7 +16965,7 @@
             <a:r>
               <a:rPr sz="2400" b="1">
                 <a:solidFill>
-                  <a:srgbClr val="1A73E8"/>
+                  <a:srgbClr val="C7000B"/>
                 </a:solidFill>
                 <a:latin typeface="Microsoft YaHei"/>
               </a:rPr>
@@ -16989,7 +16989,7 @@
             <a:avLst/>
           </a:prstGeom>
           <a:solidFill>
-            <a:srgbClr val="1A73E8"/>
+            <a:srgbClr val="C7000B"/>
           </a:solidFill>
           <a:ln>
             <a:noFill/>
@@ -17540,7 +17540,7 @@
                   </a:txBody>
                   <a:tcPr>
                     <a:solidFill>
-                      <a:srgbClr val="F0F4FF"/>
+                      <a:srgbClr val="FFF1F2"/>
                     </a:solidFill>
                   </a:tcPr>
                 </a:tc>
@@ -17563,7 +17563,7 @@
                   </a:txBody>
                   <a:tcPr>
                     <a:solidFill>
-                      <a:srgbClr val="F0F4FF"/>
+                      <a:srgbClr val="FFF1F2"/>
                     </a:solidFill>
                   </a:tcPr>
                 </a:tc>
@@ -17636,7 +17636,7 @@
                   </a:txBody>
                   <a:tcPr>
                     <a:solidFill>
-                      <a:srgbClr val="F0F4FF"/>
+                      <a:srgbClr val="FFF1F2"/>
                     </a:solidFill>
                   </a:tcPr>
                 </a:tc>
@@ -17659,7 +17659,7 @@
                   </a:txBody>
                   <a:tcPr>
                     <a:solidFill>
-                      <a:srgbClr val="F0F4FF"/>
+                      <a:srgbClr val="FFF1F2"/>
                     </a:solidFill>
                   </a:tcPr>
                 </a:tc>
@@ -17694,7 +17694,7 @@
             <a:r>
               <a:rPr sz="1400" b="1">
                 <a:solidFill>
-                  <a:srgbClr val="1A73E8"/>
+                  <a:srgbClr val="C7000B"/>
                 </a:solidFill>
                 <a:latin typeface="Microsoft YaHei"/>
               </a:rPr>
@@ -17745,7 +17745,7 @@
                   </a:txBody>
                   <a:tcPr>
                     <a:solidFill>
-                      <a:srgbClr val="1A73E8"/>
+                      <a:srgbClr val="C7000B"/>
                     </a:solidFill>
                   </a:tcPr>
                 </a:tc>
@@ -17768,7 +17768,7 @@
                   </a:txBody>
                   <a:tcPr>
                     <a:solidFill>
-                      <a:srgbClr val="1A73E8"/>
+                      <a:srgbClr val="C7000B"/>
                     </a:solidFill>
                   </a:tcPr>
                 </a:tc>
@@ -17841,7 +17841,7 @@
                   </a:txBody>
                   <a:tcPr>
                     <a:solidFill>
-                      <a:srgbClr val="F0F4FF"/>
+                      <a:srgbClr val="FFF1F2"/>
                     </a:solidFill>
                   </a:tcPr>
                 </a:tc>
@@ -17864,7 +17864,7 @@
                   </a:txBody>
                   <a:tcPr>
                     <a:solidFill>
-                      <a:srgbClr val="F0F4FF"/>
+                      <a:srgbClr val="FFF1F2"/>
                     </a:solidFill>
                   </a:tcPr>
                 </a:tc>
@@ -17937,7 +17937,7 @@
                   </a:txBody>
                   <a:tcPr>
                     <a:solidFill>
-                      <a:srgbClr val="F0F4FF"/>
+                      <a:srgbClr val="FFF1F2"/>
                     </a:solidFill>
                   </a:tcPr>
                 </a:tc>
@@ -17960,7 +17960,7 @@
                   </a:txBody>
                   <a:tcPr>
                     <a:solidFill>
-                      <a:srgbClr val="F0F4FF"/>
+                      <a:srgbClr val="FFF1F2"/>
                     </a:solidFill>
                   </a:tcPr>
                 </a:tc>
@@ -17995,7 +17995,7 @@
             <a:r>
               <a:rPr sz="1400" b="1">
                 <a:solidFill>
-                  <a:srgbClr val="1A73E8"/>
+                  <a:srgbClr val="C7000B"/>
                 </a:solidFill>
                 <a:latin typeface="Microsoft YaHei"/>
               </a:rPr>
@@ -18118,7 +18118,7 @@
             <a:r>
               <a:rPr sz="2400" b="1">
                 <a:solidFill>
-                  <a:srgbClr val="1A73E8"/>
+                  <a:srgbClr val="C7000B"/>
                 </a:solidFill>
                 <a:latin typeface="Microsoft YaHei"/>
               </a:rPr>
@@ -18142,7 +18142,7 @@
             <a:avLst/>
           </a:prstGeom>
           <a:solidFill>
-            <a:srgbClr val="1A73E8"/>
+            <a:srgbClr val="C7000B"/>
           </a:solidFill>
           <a:ln>
             <a:noFill/>
@@ -18196,7 +18196,7 @@
             <a:r>
               <a:rPr sz="1400" b="1">
                 <a:solidFill>
-                  <a:srgbClr val="1A73E8"/>
+                  <a:srgbClr val="C7000B"/>
                 </a:solidFill>
                 <a:latin typeface="Microsoft YaHei"/>
               </a:rPr>
@@ -18248,7 +18248,7 @@
                   </a:txBody>
                   <a:tcPr>
                     <a:solidFill>
-                      <a:srgbClr val="1A73E8"/>
+                      <a:srgbClr val="C7000B"/>
                     </a:solidFill>
                   </a:tcPr>
                 </a:tc>
@@ -18271,7 +18271,7 @@
                   </a:txBody>
                   <a:tcPr>
                     <a:solidFill>
-                      <a:srgbClr val="1A73E8"/>
+                      <a:srgbClr val="C7000B"/>
                     </a:solidFill>
                   </a:tcPr>
                 </a:tc>
@@ -18294,7 +18294,7 @@
                   </a:txBody>
                   <a:tcPr>
                     <a:solidFill>
-                      <a:srgbClr val="1A73E8"/>
+                      <a:srgbClr val="C7000B"/>
                     </a:solidFill>
                   </a:tcPr>
                 </a:tc>
@@ -18390,7 +18390,7 @@
                   </a:txBody>
                   <a:tcPr>
                     <a:solidFill>
-                      <a:srgbClr val="F0F4FF"/>
+                      <a:srgbClr val="FFF1F2"/>
                     </a:solidFill>
                   </a:tcPr>
                 </a:tc>
@@ -18413,7 +18413,7 @@
                   </a:txBody>
                   <a:tcPr>
                     <a:solidFill>
-                      <a:srgbClr val="F0F4FF"/>
+                      <a:srgbClr val="FFF1F2"/>
                     </a:solidFill>
                   </a:tcPr>
                 </a:tc>
@@ -18436,7 +18436,7 @@
                   </a:txBody>
                   <a:tcPr>
                     <a:solidFill>
-                      <a:srgbClr val="F0F4FF"/>
+                      <a:srgbClr val="FFF1F2"/>
                     </a:solidFill>
                   </a:tcPr>
                 </a:tc>
@@ -18532,7 +18532,7 @@
                   </a:txBody>
                   <a:tcPr>
                     <a:solidFill>
-                      <a:srgbClr val="F0F4FF"/>
+                      <a:srgbClr val="FFF1F2"/>
                     </a:solidFill>
                   </a:tcPr>
                 </a:tc>
@@ -18555,7 +18555,7 @@
                   </a:txBody>
                   <a:tcPr>
                     <a:solidFill>
-                      <a:srgbClr val="F0F4FF"/>
+                      <a:srgbClr val="FFF1F2"/>
                     </a:solidFill>
                   </a:tcPr>
                 </a:tc>
@@ -18578,7 +18578,7 @@
                   </a:txBody>
                   <a:tcPr>
                     <a:solidFill>
-                      <a:srgbClr val="F0F4FF"/>
+                      <a:srgbClr val="FFF1F2"/>
                     </a:solidFill>
                   </a:tcPr>
                 </a:tc>
@@ -18878,7 +18878,7 @@
                   </a:txBody>
                   <a:tcPr>
                     <a:solidFill>
-                      <a:srgbClr val="F0F4FF"/>
+                      <a:srgbClr val="FFF1F2"/>
                     </a:solidFill>
                   </a:tcPr>
                 </a:tc>
@@ -18901,7 +18901,7 @@
                   </a:txBody>
                   <a:tcPr>
                     <a:solidFill>
-                      <a:srgbClr val="F0F4FF"/>
+                      <a:srgbClr val="FFF1F2"/>
                     </a:solidFill>
                   </a:tcPr>
                 </a:tc>
@@ -18924,7 +18924,7 @@
                   </a:txBody>
                   <a:tcPr>
                     <a:solidFill>
-                      <a:srgbClr val="F0F4FF"/>
+                      <a:srgbClr val="FFF1F2"/>
                     </a:solidFill>
                   </a:tcPr>
                 </a:tc>
@@ -19020,7 +19020,7 @@
                   </a:txBody>
                   <a:tcPr>
                     <a:solidFill>
-                      <a:srgbClr val="F0F4FF"/>
+                      <a:srgbClr val="FFF1F2"/>
                     </a:solidFill>
                   </a:tcPr>
                 </a:tc>
@@ -19043,7 +19043,7 @@
                   </a:txBody>
                   <a:tcPr>
                     <a:solidFill>
-                      <a:srgbClr val="F0F4FF"/>
+                      <a:srgbClr val="FFF1F2"/>
                     </a:solidFill>
                   </a:tcPr>
                 </a:tc>
@@ -19066,7 +19066,7 @@
                   </a:txBody>
                   <a:tcPr>
                     <a:solidFill>
-                      <a:srgbClr val="F0F4FF"/>
+                      <a:srgbClr val="FFF1F2"/>
                     </a:solidFill>
                   </a:tcPr>
                 </a:tc>
@@ -19090,11 +19090,11 @@
             <a:avLst/>
           </a:prstGeom>
           <a:solidFill>
-            <a:srgbClr val="F0F4FF"/>
+            <a:srgbClr val="FFF1F2"/>
           </a:solidFill>
           <a:ln>
             <a:solidFill>
-              <a:srgbClr val="1A73E8"/>
+              <a:srgbClr val="C7000B"/>
             </a:solidFill>
           </a:ln>
         </p:spPr>
@@ -19120,7 +19120,7 @@
             <a:r>
               <a:rPr sz="1200" b="1">
                 <a:solidFill>
-                  <a:srgbClr val="1A73E8"/>
+                  <a:srgbClr val="C7000B"/>
                 </a:solidFill>
                 <a:latin typeface="Microsoft YaHei"/>
               </a:rPr>

--- a/docs/dev_summary.pptx
+++ b/docs/dev_summary.pptx
@@ -3590,7 +3590,7 @@
                       <a:r>
                         <a:rPr sz="1200" b="1">
                           <a:solidFill>
-                            <a:srgbClr val="FFFFFF"/>
+                            <a:srgbClr val="202020"/>
                           </a:solidFill>
                           <a:latin typeface="Microsoft YaHei"/>
                         </a:rPr>
@@ -3600,7 +3600,7 @@
                   </a:txBody>
                   <a:tcPr>
                     <a:solidFill>
-                      <a:srgbClr val="C7000B"/>
+                      <a:srgbClr val="F5F5F5"/>
                     </a:solidFill>
                   </a:tcPr>
                 </a:tc>
@@ -3613,7 +3613,7 @@
                       <a:r>
                         <a:rPr sz="1200" b="1">
                           <a:solidFill>
-                            <a:srgbClr val="FFFFFF"/>
+                            <a:srgbClr val="202020"/>
                           </a:solidFill>
                           <a:latin typeface="Microsoft YaHei"/>
                         </a:rPr>
@@ -3623,7 +3623,7 @@
                   </a:txBody>
                   <a:tcPr>
                     <a:solidFill>
-                      <a:srgbClr val="C7000B"/>
+                      <a:srgbClr val="F5F5F5"/>
                     </a:solidFill>
                   </a:tcPr>
                 </a:tc>
@@ -3636,7 +3636,7 @@
                       <a:r>
                         <a:rPr sz="1200" b="1">
                           <a:solidFill>
-                            <a:srgbClr val="FFFFFF"/>
+                            <a:srgbClr val="202020"/>
                           </a:solidFill>
                           <a:latin typeface="Microsoft YaHei"/>
                         </a:rPr>
@@ -3646,7 +3646,7 @@
                   </a:txBody>
                   <a:tcPr>
                     <a:solidFill>
-                      <a:srgbClr val="C7000B"/>
+                      <a:srgbClr val="F5F5F5"/>
                     </a:solidFill>
                   </a:tcPr>
                 </a:tc>
@@ -3936,7 +3936,7 @@
                       <a:r>
                         <a:rPr sz="1200" b="1">
                           <a:solidFill>
-                            <a:srgbClr val="FFFFFF"/>
+                            <a:srgbClr val="202020"/>
                           </a:solidFill>
                           <a:latin typeface="Microsoft YaHei"/>
                         </a:rPr>
@@ -3946,7 +3946,7 @@
                   </a:txBody>
                   <a:tcPr>
                     <a:solidFill>
-                      <a:srgbClr val="C7000B"/>
+                      <a:srgbClr val="F5F5F5"/>
                     </a:solidFill>
                   </a:tcPr>
                 </a:tc>
@@ -3959,7 +3959,7 @@
                       <a:r>
                         <a:rPr sz="1200" b="1">
                           <a:solidFill>
-                            <a:srgbClr val="FFFFFF"/>
+                            <a:srgbClr val="202020"/>
                           </a:solidFill>
                           <a:latin typeface="Microsoft YaHei"/>
                         </a:rPr>
@@ -3969,7 +3969,7 @@
                   </a:txBody>
                   <a:tcPr>
                     <a:solidFill>
-                      <a:srgbClr val="C7000B"/>
+                      <a:srgbClr val="F5F5F5"/>
                     </a:solidFill>
                   </a:tcPr>
                 </a:tc>
@@ -3982,7 +3982,7 @@
                       <a:r>
                         <a:rPr sz="1200" b="1">
                           <a:solidFill>
-                            <a:srgbClr val="FFFFFF"/>
+                            <a:srgbClr val="202020"/>
                           </a:solidFill>
                           <a:latin typeface="Microsoft YaHei"/>
                         </a:rPr>
@@ -3992,7 +3992,7 @@
                   </a:txBody>
                   <a:tcPr>
                     <a:solidFill>
-                      <a:srgbClr val="C7000B"/>
+                      <a:srgbClr val="F5F5F5"/>
                     </a:solidFill>
                   </a:tcPr>
                 </a:tc>
@@ -4660,7 +4660,7 @@
                       <a:r>
                         <a:rPr sz="1200" b="1">
                           <a:solidFill>
-                            <a:srgbClr val="FFFFFF"/>
+                            <a:srgbClr val="202020"/>
                           </a:solidFill>
                           <a:latin typeface="Microsoft YaHei"/>
                         </a:rPr>
@@ -4670,7 +4670,7 @@
                   </a:txBody>
                   <a:tcPr>
                     <a:solidFill>
-                      <a:srgbClr val="C7000B"/>
+                      <a:srgbClr val="F5F5F5"/>
                     </a:solidFill>
                   </a:tcPr>
                 </a:tc>
@@ -4683,7 +4683,7 @@
                       <a:r>
                         <a:rPr sz="1200" b="1">
                           <a:solidFill>
-                            <a:srgbClr val="FFFFFF"/>
+                            <a:srgbClr val="202020"/>
                           </a:solidFill>
                           <a:latin typeface="Microsoft YaHei"/>
                         </a:rPr>
@@ -4693,7 +4693,7 @@
                   </a:txBody>
                   <a:tcPr>
                     <a:solidFill>
-                      <a:srgbClr val="C7000B"/>
+                      <a:srgbClr val="F5F5F5"/>
                     </a:solidFill>
                   </a:tcPr>
                 </a:tc>
@@ -4706,7 +4706,7 @@
                       <a:r>
                         <a:rPr sz="1200" b="1">
                           <a:solidFill>
-                            <a:srgbClr val="FFFFFF"/>
+                            <a:srgbClr val="202020"/>
                           </a:solidFill>
                           <a:latin typeface="Microsoft YaHei"/>
                         </a:rPr>
@@ -4716,7 +4716,7 @@
                   </a:txBody>
                   <a:tcPr>
                     <a:solidFill>
-                      <a:srgbClr val="C7000B"/>
+                      <a:srgbClr val="F5F5F5"/>
                     </a:solidFill>
                   </a:tcPr>
                 </a:tc>
@@ -6610,7 +6610,7 @@
                       <a:r>
                         <a:rPr sz="1200" b="1">
                           <a:solidFill>
-                            <a:srgbClr val="FFFFFF"/>
+                            <a:srgbClr val="202020"/>
                           </a:solidFill>
                           <a:latin typeface="Microsoft YaHei"/>
                         </a:rPr>
@@ -6620,7 +6620,7 @@
                   </a:txBody>
                   <a:tcPr>
                     <a:solidFill>
-                      <a:srgbClr val="C7000B"/>
+                      <a:srgbClr val="F5F5F5"/>
                     </a:solidFill>
                   </a:tcPr>
                 </a:tc>
@@ -6633,7 +6633,7 @@
                       <a:r>
                         <a:rPr sz="1200" b="1">
                           <a:solidFill>
-                            <a:srgbClr val="FFFFFF"/>
+                            <a:srgbClr val="202020"/>
                           </a:solidFill>
                           <a:latin typeface="Microsoft YaHei"/>
                         </a:rPr>
@@ -6643,7 +6643,7 @@
                   </a:txBody>
                   <a:tcPr>
                     <a:solidFill>
-                      <a:srgbClr val="C7000B"/>
+                      <a:srgbClr val="F5F5F5"/>
                     </a:solidFill>
                   </a:tcPr>
                 </a:tc>
@@ -7394,7 +7394,7 @@
                       <a:r>
                         <a:rPr sz="1200" b="1">
                           <a:solidFill>
-                            <a:srgbClr val="FFFFFF"/>
+                            <a:srgbClr val="202020"/>
                           </a:solidFill>
                           <a:latin typeface="Microsoft YaHei"/>
                         </a:rPr>
@@ -7404,7 +7404,7 @@
                   </a:txBody>
                   <a:tcPr>
                     <a:solidFill>
-                      <a:srgbClr val="C7000B"/>
+                      <a:srgbClr val="F5F5F5"/>
                     </a:solidFill>
                   </a:tcPr>
                 </a:tc>
@@ -7417,7 +7417,7 @@
                       <a:r>
                         <a:rPr sz="1200" b="1">
                           <a:solidFill>
-                            <a:srgbClr val="FFFFFF"/>
+                            <a:srgbClr val="202020"/>
                           </a:solidFill>
                           <a:latin typeface="Microsoft YaHei"/>
                         </a:rPr>
@@ -7427,7 +7427,7 @@
                   </a:txBody>
                   <a:tcPr>
                     <a:solidFill>
-                      <a:srgbClr val="C7000B"/>
+                      <a:srgbClr val="F5F5F5"/>
                     </a:solidFill>
                   </a:tcPr>
                 </a:tc>
@@ -7440,7 +7440,7 @@
                       <a:r>
                         <a:rPr sz="1200" b="1">
                           <a:solidFill>
-                            <a:srgbClr val="FFFFFF"/>
+                            <a:srgbClr val="202020"/>
                           </a:solidFill>
                           <a:latin typeface="Microsoft YaHei"/>
                         </a:rPr>
@@ -7450,7 +7450,7 @@
                   </a:txBody>
                   <a:tcPr>
                     <a:solidFill>
-                      <a:srgbClr val="C7000B"/>
+                      <a:srgbClr val="F5F5F5"/>
                     </a:solidFill>
                   </a:tcPr>
                 </a:tc>
@@ -8176,7 +8176,7 @@
                       <a:r>
                         <a:rPr sz="1200" b="1">
                           <a:solidFill>
-                            <a:srgbClr val="FFFFFF"/>
+                            <a:srgbClr val="202020"/>
                           </a:solidFill>
                           <a:latin typeface="Microsoft YaHei"/>
                         </a:rPr>
@@ -8186,7 +8186,7 @@
                   </a:txBody>
                   <a:tcPr>
                     <a:solidFill>
-                      <a:srgbClr val="C7000B"/>
+                      <a:srgbClr val="F5F5F5"/>
                     </a:solidFill>
                   </a:tcPr>
                 </a:tc>
@@ -8199,7 +8199,7 @@
                       <a:r>
                         <a:rPr sz="1200" b="1">
                           <a:solidFill>
-                            <a:srgbClr val="FFFFFF"/>
+                            <a:srgbClr val="202020"/>
                           </a:solidFill>
                           <a:latin typeface="Microsoft YaHei"/>
                         </a:rPr>
@@ -8209,7 +8209,7 @@
                   </a:txBody>
                   <a:tcPr>
                     <a:solidFill>
-                      <a:srgbClr val="C7000B"/>
+                      <a:srgbClr val="F5F5F5"/>
                     </a:solidFill>
                   </a:tcPr>
                 </a:tc>
@@ -8222,7 +8222,7 @@
                       <a:r>
                         <a:rPr sz="1200" b="1">
                           <a:solidFill>
-                            <a:srgbClr val="FFFFFF"/>
+                            <a:srgbClr val="202020"/>
                           </a:solidFill>
                           <a:latin typeface="Microsoft YaHei"/>
                         </a:rPr>
@@ -8232,7 +8232,7 @@
                   </a:txBody>
                   <a:tcPr>
                     <a:solidFill>
-                      <a:srgbClr val="C7000B"/>
+                      <a:srgbClr val="F5F5F5"/>
                     </a:solidFill>
                   </a:tcPr>
                 </a:tc>
@@ -8798,17 +8798,76 @@
           </a:p>
         </p:txBody>
       </p:sp>
+      <p:pic>
+        <p:nvPicPr>
+          <p:cNvPr id="5" name="Picture 4" descr="image.png"/>
+          <p:cNvPicPr>
+            <a:picLocks noChangeAspect="1"/>
+          </p:cNvPicPr>
+          <p:nvPr/>
+        </p:nvPicPr>
+        <p:blipFill>
+          <a:blip r:embed="rId2"/>
+          <a:stretch>
+            <a:fillRect/>
+          </a:stretch>
+        </p:blipFill>
+        <p:spPr>
+          <a:xfrm>
+            <a:off x="365760" y="1371600"/>
+            <a:ext cx="6035040" cy="3153308"/>
+          </a:xfrm>
+          <a:prstGeom prst="rect">
+            <a:avLst/>
+          </a:prstGeom>
+        </p:spPr>
+      </p:pic>
+      <p:sp>
+        <p:nvSpPr>
+          <p:cNvPr id="6" name="TextBox 5"/>
+          <p:cNvSpPr txBox="1"/>
+          <p:nvPr/>
+        </p:nvSpPr>
+        <p:spPr>
+          <a:xfrm>
+            <a:off x="6583680" y="960120"/>
+            <a:ext cx="5486400" cy="365760"/>
+          </a:xfrm>
+          <a:prstGeom prst="rect">
+            <a:avLst/>
+          </a:prstGeom>
+          <a:noFill/>
+        </p:spPr>
+        <p:txBody>
+          <a:bodyPr wrap="square" lIns="0" rIns="0" tIns="0" bIns="0">
+            <a:spAutoFit/>
+          </a:bodyPr>
+          <a:lstStyle/>
+          <a:p>
+            <a:pPr algn="l"/>
+            <a:r>
+              <a:rPr sz="1600" b="1">
+                <a:solidFill>
+                  <a:srgbClr val="2E7D32"/>
+                </a:solidFill>
+                <a:latin typeface="Microsoft YaHei"/>
+              </a:rPr>
+              <a:t>🎯 跨会话经验的核心原则</a:t>
+            </a:r>
+          </a:p>
+        </p:txBody>
+      </p:sp>
       <p:graphicFrame>
         <p:nvGraphicFramePr>
-          <p:cNvPr id="5" name="Table 4"/>
+          <p:cNvPr id="7" name="Table 6"/>
           <p:cNvGraphicFramePr>
             <a:graphicFrameLocks noGrp="1"/>
           </p:cNvGraphicFramePr>
           <p:nvPr/>
         </p:nvGraphicFramePr>
         <p:xfrm>
-          <a:off x="457200" y="1371600"/>
-          <a:ext cx="11247120" cy="2377440"/>
+          <a:off x="6583680" y="1371600"/>
+          <a:ext cx="5394960" cy="4206240"/>
         </p:xfrm>
         <a:graphic>
           <a:graphicData uri="http://schemas.openxmlformats.org/drawingml/2006/table">
@@ -8817,11 +8876,10 @@
                 <a:tableStyleId>{5C22544A-7EE6-4342-B048-85BDC9FD1C3A}</a:tableStyleId>
               </a:tblPr>
               <a:tblGrid>
-                <a:gridCol w="640080"/>
-                <a:gridCol w="2286000"/>
-                <a:gridCol w="8321040"/>
+                <a:gridCol w="1828800"/>
+                <a:gridCol w="3566160"/>
               </a:tblGrid>
-              <a:tr h="396240">
+              <a:tr h="841248">
                 <a:tc>
                   <a:txBody>
                     <a:bodyPr lIns="40000" rIns="40000" tIns="15000" bIns="15000"/>
@@ -8831,17 +8889,17 @@
                       <a:r>
                         <a:rPr sz="1200" b="1">
                           <a:solidFill>
-                            <a:srgbClr val="FFFFFF"/>
-                          </a:solidFill>
-                          <a:latin typeface="Microsoft YaHei"/>
-                        </a:rPr>
-                        <a:t>层</a:t>
-                      </a:r>
-                    </a:p>
-                  </a:txBody>
-                  <a:tcPr>
-                    <a:solidFill>
-                      <a:srgbClr val="C7000B"/>
+                            <a:srgbClr val="202020"/>
+                          </a:solidFill>
+                          <a:latin typeface="Microsoft YaHei"/>
+                        </a:rPr>
+                        <a:t>经验</a:t>
+                      </a:r>
+                    </a:p>
+                  </a:txBody>
+                  <a:tcPr>
+                    <a:solidFill>
+                      <a:srgbClr val="F5F5F5"/>
                     </a:solidFill>
                   </a:tcPr>
                 </a:tc>
@@ -8854,30 +8912,7 @@
                       <a:r>
                         <a:rPr sz="1200" b="1">
                           <a:solidFill>
-                            <a:srgbClr val="FFFFFF"/>
-                          </a:solidFill>
-                          <a:latin typeface="Microsoft YaHei"/>
-                        </a:rPr>
-                        <a:t>工具</a:t>
-                      </a:r>
-                    </a:p>
-                  </a:txBody>
-                  <a:tcPr>
-                    <a:solidFill>
-                      <a:srgbClr val="C7000B"/>
-                    </a:solidFill>
-                  </a:tcPr>
-                </a:tc>
-                <a:tc>
-                  <a:txBody>
-                    <a:bodyPr lIns="40000" rIns="40000" tIns="15000" bIns="15000"/>
-                    <a:lstStyle/>
-                    <a:p>
-                      <a:pPr algn="ctr"/>
-                      <a:r>
-                        <a:rPr sz="1200" b="1">
-                          <a:solidFill>
-                            <a:srgbClr val="FFFFFF"/>
+                            <a:srgbClr val="202020"/>
                           </a:solidFill>
                           <a:latin typeface="Microsoft YaHei"/>
                         </a:rPr>
@@ -8887,26 +8922,26 @@
                   </a:txBody>
                   <a:tcPr>
                     <a:solidFill>
-                      <a:srgbClr val="C7000B"/>
+                      <a:srgbClr val="F5F5F5"/>
                     </a:solidFill>
                   </a:tcPr>
                 </a:tc>
               </a:tr>
-              <a:tr h="396240">
-                <a:tc>
-                  <a:txBody>
-                    <a:bodyPr lIns="40000" rIns="40000" tIns="10000" bIns="10000" wrap="square"/>
-                    <a:lstStyle/>
-                    <a:p>
-                      <a:pPr algn="l"/>
-                      <a:r>
-                        <a:rPr sz="1200">
-                          <a:solidFill>
-                            <a:srgbClr val="202020"/>
-                          </a:solidFill>
-                          <a:latin typeface="Microsoft YaHei"/>
-                        </a:rPr>
-                        <a:t>L0</a:t>
+              <a:tr h="841248">
+                <a:tc>
+                  <a:txBody>
+                    <a:bodyPr lIns="40000" rIns="40000" tIns="10000" bIns="10000" wrap="square"/>
+                    <a:lstStyle/>
+                    <a:p>
+                      <a:pPr algn="l"/>
+                      <a:r>
+                        <a:rPr sz="1200">
+                          <a:solidFill>
+                            <a:srgbClr val="202020"/>
+                          </a:solidFill>
+                          <a:latin typeface="Microsoft YaHei"/>
+                        </a:rPr>
+                        <a:t>同 commit *Test.kt 配对</a:t>
                       </a:r>
                     </a:p>
                   </a:txBody>
@@ -8929,7 +8964,7 @@
                           </a:solidFill>
                           <a:latin typeface="Microsoft YaHei"/>
                         </a:rPr>
-                        <a:t>Settings / hooks</a:t>
+                        <a:t>tdd-gate 一次没误报、一次没漏；hook 弹"TDD 提醒"时不必另开 commit</a:t>
                       </a:r>
                     </a:p>
                   </a:txBody>
@@ -8939,20 +8974,70 @@
                     </a:solidFill>
                   </a:tcPr>
                 </a:tc>
-                <a:tc>
-                  <a:txBody>
-                    <a:bodyPr lIns="40000" rIns="40000" tIns="10000" bIns="10000" wrap="square"/>
-                    <a:lstStyle/>
-                    <a:p>
-                      <a:pPr algn="l"/>
-                      <a:r>
-                        <a:rPr sz="1200">
-                          <a:solidFill>
-                            <a:srgbClr val="202020"/>
-                          </a:solidFill>
-                          <a:latin typeface="Microsoft YaHei"/>
-                        </a:rPr>
-                        <a:t>PostToolUse 注入「关键路径 TDD 提醒」+ push 后自动 review-check</a:t>
+              </a:tr>
+              <a:tr h="841248">
+                <a:tc>
+                  <a:txBody>
+                    <a:bodyPr lIns="40000" rIns="40000" tIns="10000" bIns="10000" wrap="square"/>
+                    <a:lstStyle/>
+                    <a:p>
+                      <a:pPr algn="l"/>
+                      <a:r>
+                        <a:rPr sz="1200">
+                          <a:solidFill>
+                            <a:srgbClr val="202020"/>
+                          </a:solidFill>
+                          <a:latin typeface="Microsoft YaHei"/>
+                        </a:rPr>
+                        <a:t>分支 vs PR 一一对应</a:t>
+                      </a:r>
+                    </a:p>
+                  </a:txBody>
+                  <a:tcPr>
+                    <a:solidFill>
+                      <a:srgbClr val="FFF1F2"/>
+                    </a:solidFill>
+                  </a:tcPr>
+                </a:tc>
+                <a:tc>
+                  <a:txBody>
+                    <a:bodyPr lIns="40000" rIns="40000" tIns="10000" bIns="10000" wrap="square"/>
+                    <a:lstStyle/>
+                    <a:p>
+                      <a:pPr algn="l"/>
+                      <a:r>
+                        <a:rPr sz="1200">
+                          <a:solidFill>
+                            <a:srgbClr val="202020"/>
+                          </a:solidFill>
+                          <a:latin typeface="Microsoft YaHei"/>
+                        </a:rPr>
+                        <a:t>PR merge 后开新分支；老分支再 push 不会自动出 PR（PR #52→#53 实战）</a:t>
+                      </a:r>
+                    </a:p>
+                  </a:txBody>
+                  <a:tcPr>
+                    <a:solidFill>
+                      <a:srgbClr val="FFF1F2"/>
+                    </a:solidFill>
+                  </a:tcPr>
+                </a:tc>
+              </a:tr>
+              <a:tr h="841248">
+                <a:tc>
+                  <a:txBody>
+                    <a:bodyPr lIns="40000" rIns="40000" tIns="10000" bIns="10000" wrap="square"/>
+                    <a:lstStyle/>
+                    <a:p>
+                      <a:pPr algn="l"/>
+                      <a:r>
+                        <a:rPr sz="1200">
+                          <a:solidFill>
+                            <a:srgbClr val="202020"/>
+                          </a:solidFill>
+                          <a:latin typeface="Microsoft YaHei"/>
+                        </a:rPr>
+                        <a:t>文档单一真相 grep 验证</a:t>
                       </a:r>
                     </a:p>
                   </a:txBody>
@@ -8962,545 +9047,31 @@
                     </a:solidFill>
                   </a:tcPr>
                 </a:tc>
+                <a:tc>
+                  <a:txBody>
+                    <a:bodyPr lIns="40000" rIns="40000" tIns="10000" bIns="10000" wrap="square"/>
+                    <a:lstStyle/>
+                    <a:p>
+                      <a:pPr algn="l"/>
+                      <a:r>
+                        <a:rPr sz="1200">
+                          <a:solidFill>
+                            <a:srgbClr val="202020"/>
+                          </a:solidFill>
+                          <a:latin typeface="Microsoft YaHei"/>
+                        </a:rPr>
+                        <a:t>新 doc 自称"权威"前必 grep 验证 anchor 函数名实际存在</a:t>
+                      </a:r>
+                    </a:p>
+                  </a:txBody>
+                  <a:tcPr>
+                    <a:solidFill>
+                      <a:srgbClr val="FFFFFF"/>
+                    </a:solidFill>
+                  </a:tcPr>
+                </a:tc>
               </a:tr>
-              <a:tr h="396240">
-                <a:tc>
-                  <a:txBody>
-                    <a:bodyPr lIns="40000" rIns="40000" tIns="10000" bIns="10000" wrap="square"/>
-                    <a:lstStyle/>
-                    <a:p>
-                      <a:pPr algn="l"/>
-                      <a:r>
-                        <a:rPr sz="1200">
-                          <a:solidFill>
-                            <a:srgbClr val="202020"/>
-                          </a:solidFill>
-                          <a:latin typeface="Microsoft YaHei"/>
-                        </a:rPr>
-                        <a:t>L1</a:t>
-                      </a:r>
-                    </a:p>
-                  </a:txBody>
-                  <a:tcPr>
-                    <a:solidFill>
-                      <a:srgbClr val="FFF1F2"/>
-                    </a:solidFill>
-                  </a:tcPr>
-                </a:tc>
-                <a:tc>
-                  <a:txBody>
-                    <a:bodyPr lIns="40000" rIns="40000" tIns="10000" bIns="10000" wrap="square"/>
-                    <a:lstStyle/>
-                    <a:p>
-                      <a:pPr algn="l"/>
-                      <a:r>
-                        <a:rPr sz="1200">
-                          <a:solidFill>
-                            <a:srgbClr val="202020"/>
-                          </a:solidFill>
-                          <a:latin typeface="Microsoft YaHei"/>
-                        </a:rPr>
-                        <a:t>Slash commands</a:t>
-                      </a:r>
-                    </a:p>
-                  </a:txBody>
-                  <a:tcPr>
-                    <a:solidFill>
-                      <a:srgbClr val="FFF1F2"/>
-                    </a:solidFill>
-                  </a:tcPr>
-                </a:tc>
-                <a:tc>
-                  <a:txBody>
-                    <a:bodyPr lIns="40000" rIns="40000" tIns="10000" bIns="10000" wrap="square"/>
-                    <a:lstStyle/>
-                    <a:p>
-                      <a:pPr algn="l"/>
-                      <a:r>
-                        <a:rPr sz="1200">
-                          <a:solidFill>
-                            <a:srgbClr val="202020"/>
-                          </a:solidFill>
-                          <a:latin typeface="Microsoft YaHei"/>
-                        </a:rPr>
-                        <a:t>/test-fast · /pre-commit-scan · /ship-check · /review-pr</a:t>
-                      </a:r>
-                    </a:p>
-                  </a:txBody>
-                  <a:tcPr>
-                    <a:solidFill>
-                      <a:srgbClr val="FFF1F2"/>
-                    </a:solidFill>
-                  </a:tcPr>
-                </a:tc>
-              </a:tr>
-              <a:tr h="396240">
-                <a:tc>
-                  <a:txBody>
-                    <a:bodyPr lIns="40000" rIns="40000" tIns="10000" bIns="10000" wrap="square"/>
-                    <a:lstStyle/>
-                    <a:p>
-                      <a:pPr algn="l"/>
-                      <a:r>
-                        <a:rPr sz="1200">
-                          <a:solidFill>
-                            <a:srgbClr val="202020"/>
-                          </a:solidFill>
-                          <a:latin typeface="Microsoft YaHei"/>
-                        </a:rPr>
-                        <a:t>L2</a:t>
-                      </a:r>
-                    </a:p>
-                  </a:txBody>
-                  <a:tcPr>
-                    <a:solidFill>
-                      <a:srgbClr val="FFFFFF"/>
-                    </a:solidFill>
-                  </a:tcPr>
-                </a:tc>
-                <a:tc>
-                  <a:txBody>
-                    <a:bodyPr lIns="40000" rIns="40000" tIns="10000" bIns="10000" wrap="square"/>
-                    <a:lstStyle/>
-                    <a:p>
-                      <a:pPr algn="l"/>
-                      <a:r>
-                        <a:rPr sz="1200">
-                          <a:solidFill>
-                            <a:srgbClr val="202020"/>
-                          </a:solidFill>
-                          <a:latin typeface="Microsoft YaHei"/>
-                        </a:rPr>
-                        <a:t>Subagents</a:t>
-                      </a:r>
-                    </a:p>
-                  </a:txBody>
-                  <a:tcPr>
-                    <a:solidFill>
-                      <a:srgbClr val="FFFFFF"/>
-                    </a:solidFill>
-                  </a:tcPr>
-                </a:tc>
-                <a:tc>
-                  <a:txBody>
-                    <a:bodyPr lIns="40000" rIns="40000" tIns="10000" bIns="10000" wrap="square"/>
-                    <a:lstStyle/>
-                    <a:p>
-                      <a:pPr algn="l"/>
-                      <a:r>
-                        <a:rPr sz="1200">
-                          <a:solidFill>
-                            <a:srgbClr val="202020"/>
-                          </a:solidFill>
-                          <a:latin typeface="Microsoft YaHei"/>
-                        </a:rPr>
-                        <a:t>pr-reviewer (Opus) · protocol-syncer · tdd-scaffolder</a:t>
-                      </a:r>
-                    </a:p>
-                  </a:txBody>
-                  <a:tcPr>
-                    <a:solidFill>
-                      <a:srgbClr val="FFFFFF"/>
-                    </a:solidFill>
-                  </a:tcPr>
-                </a:tc>
-              </a:tr>
-              <a:tr h="396240">
-                <a:tc>
-                  <a:txBody>
-                    <a:bodyPr lIns="40000" rIns="40000" tIns="10000" bIns="10000" wrap="square"/>
-                    <a:lstStyle/>
-                    <a:p>
-                      <a:pPr algn="l"/>
-                      <a:r>
-                        <a:rPr sz="1200">
-                          <a:solidFill>
-                            <a:srgbClr val="202020"/>
-                          </a:solidFill>
-                          <a:latin typeface="Microsoft YaHei"/>
-                        </a:rPr>
-                        <a:t>L3</a:t>
-                      </a:r>
-                    </a:p>
-                  </a:txBody>
-                  <a:tcPr>
-                    <a:solidFill>
-                      <a:srgbClr val="FFF1F2"/>
-                    </a:solidFill>
-                  </a:tcPr>
-                </a:tc>
-                <a:tc>
-                  <a:txBody>
-                    <a:bodyPr lIns="40000" rIns="40000" tIns="10000" bIns="10000" wrap="square"/>
-                    <a:lstStyle/>
-                    <a:p>
-                      <a:pPr algn="l"/>
-                      <a:r>
-                        <a:rPr sz="1200">
-                          <a:solidFill>
-                            <a:srgbClr val="202020"/>
-                          </a:solidFill>
-                          <a:latin typeface="Microsoft YaHei"/>
-                        </a:rPr>
-                        <a:t>CI gates</a:t>
-                      </a:r>
-                    </a:p>
-                  </a:txBody>
-                  <a:tcPr>
-                    <a:solidFill>
-                      <a:srgbClr val="FFF1F2"/>
-                    </a:solidFill>
-                  </a:tcPr>
-                </a:tc>
-                <a:tc>
-                  <a:txBody>
-                    <a:bodyPr lIns="40000" rIns="40000" tIns="10000" bIns="10000" wrap="square"/>
-                    <a:lstStyle/>
-                    <a:p>
-                      <a:pPr algn="l"/>
-                      <a:r>
-                        <a:rPr sz="1200">
-                          <a:solidFill>
-                            <a:srgbClr val="202020"/>
-                          </a:solidFill>
-                          <a:latin typeface="Microsoft YaHei"/>
-                        </a:rPr>
-                        <a:t>tdd-gate（关键路径必同改 *Test.kt）+ build + detekt</a:t>
-                      </a:r>
-                    </a:p>
-                  </a:txBody>
-                  <a:tcPr>
-                    <a:solidFill>
-                      <a:srgbClr val="FFF1F2"/>
-                    </a:solidFill>
-                  </a:tcPr>
-                </a:tc>
-              </a:tr>
-              <a:tr h="396240">
-                <a:tc>
-                  <a:txBody>
-                    <a:bodyPr lIns="40000" rIns="40000" tIns="10000" bIns="10000" wrap="square"/>
-                    <a:lstStyle/>
-                    <a:p>
-                      <a:pPr algn="l"/>
-                      <a:r>
-                        <a:rPr sz="1200">
-                          <a:solidFill>
-                            <a:srgbClr val="202020"/>
-                          </a:solidFill>
-                          <a:latin typeface="Microsoft YaHei"/>
-                        </a:rPr>
-                        <a:t>L4</a:t>
-                      </a:r>
-                    </a:p>
-                  </a:txBody>
-                  <a:tcPr>
-                    <a:solidFill>
-                      <a:srgbClr val="FFFFFF"/>
-                    </a:solidFill>
-                  </a:tcPr>
-                </a:tc>
-                <a:tc>
-                  <a:txBody>
-                    <a:bodyPr lIns="40000" rIns="40000" tIns="10000" bIns="10000" wrap="square"/>
-                    <a:lstStyle/>
-                    <a:p>
-                      <a:pPr algn="l"/>
-                      <a:r>
-                        <a:rPr sz="1200">
-                          <a:solidFill>
-                            <a:srgbClr val="202020"/>
-                          </a:solidFill>
-                          <a:latin typeface="Microsoft YaHei"/>
-                        </a:rPr>
-                        <a:t>Documentation</a:t>
-                      </a:r>
-                    </a:p>
-                  </a:txBody>
-                  <a:tcPr>
-                    <a:solidFill>
-                      <a:srgbClr val="FFFFFF"/>
-                    </a:solidFill>
-                  </a:tcPr>
-                </a:tc>
-                <a:tc>
-                  <a:txBody>
-                    <a:bodyPr lIns="40000" rIns="40000" tIns="10000" bIns="10000" wrap="square"/>
-                    <a:lstStyle/>
-                    <a:p>
-                      <a:pPr algn="l"/>
-                      <a:r>
-                        <a:rPr sz="1200">
-                          <a:solidFill>
-                            <a:srgbClr val="202020"/>
-                          </a:solidFill>
-                          <a:latin typeface="Microsoft YaHei"/>
-                        </a:rPr>
-                        <a:t>playbook（feature/bug/CI 失败/对抗审查）+ regressions DB</a:t>
-                      </a:r>
-                    </a:p>
-                  </a:txBody>
-                  <a:tcPr>
-                    <a:solidFill>
-                      <a:srgbClr val="FFFFFF"/>
-                    </a:solidFill>
-                  </a:tcPr>
-                </a:tc>
-              </a:tr>
-            </a:tbl>
-          </a:graphicData>
-        </a:graphic>
-      </p:graphicFrame>
-      <p:sp>
-        <p:nvSpPr>
-          <p:cNvPr id="6" name="TextBox 5"/>
-          <p:cNvSpPr txBox="1"/>
-          <p:nvPr/>
-        </p:nvSpPr>
-        <p:spPr>
-          <a:xfrm>
-            <a:off x="457200" y="3931920"/>
-            <a:ext cx="11247120" cy="365760"/>
-          </a:xfrm>
-          <a:prstGeom prst="rect">
-            <a:avLst/>
-          </a:prstGeom>
-          <a:noFill/>
-        </p:spPr>
-        <p:txBody>
-          <a:bodyPr wrap="square" lIns="0" rIns="0" tIns="0" bIns="0">
-            <a:spAutoFit/>
-          </a:bodyPr>
-          <a:lstStyle/>
-          <a:p>
-            <a:pPr algn="l"/>
-            <a:r>
-              <a:rPr sz="1600" b="1">
-                <a:solidFill>
-                  <a:srgbClr val="2E7D32"/>
-                </a:solidFill>
-                <a:latin typeface="Microsoft YaHei"/>
-              </a:rPr>
-              <a:t>🎯 跨会话经验的核心原则</a:t>
-            </a:r>
-          </a:p>
-        </p:txBody>
-      </p:sp>
-      <p:graphicFrame>
-        <p:nvGraphicFramePr>
-          <p:cNvPr id="7" name="Table 6"/>
-          <p:cNvGraphicFramePr>
-            <a:graphicFrameLocks noGrp="1"/>
-          </p:cNvGraphicFramePr>
-          <p:nvPr/>
-        </p:nvGraphicFramePr>
-        <p:xfrm>
-          <a:off x="457200" y="4297680"/>
-          <a:ext cx="11247120" cy="1828800"/>
-        </p:xfrm>
-        <a:graphic>
-          <a:graphicData uri="http://schemas.openxmlformats.org/drawingml/2006/table">
-            <a:tbl>
-              <a:tblPr firstRow="1" bandRow="1">
-                <a:tableStyleId>{5C22544A-7EE6-4342-B048-85BDC9FD1C3A}</a:tableStyleId>
-              </a:tblPr>
-              <a:tblGrid>
-                <a:gridCol w="2743200"/>
-                <a:gridCol w="8503920"/>
-              </a:tblGrid>
-              <a:tr h="365760">
-                <a:tc>
-                  <a:txBody>
-                    <a:bodyPr lIns="40000" rIns="40000" tIns="15000" bIns="15000"/>
-                    <a:lstStyle/>
-                    <a:p>
-                      <a:pPr algn="ctr"/>
-                      <a:r>
-                        <a:rPr sz="1200" b="1">
-                          <a:solidFill>
-                            <a:srgbClr val="FFFFFF"/>
-                          </a:solidFill>
-                          <a:latin typeface="Microsoft YaHei"/>
-                        </a:rPr>
-                        <a:t>经验</a:t>
-                      </a:r>
-                    </a:p>
-                  </a:txBody>
-                  <a:tcPr>
-                    <a:solidFill>
-                      <a:srgbClr val="C7000B"/>
-                    </a:solidFill>
-                  </a:tcPr>
-                </a:tc>
-                <a:tc>
-                  <a:txBody>
-                    <a:bodyPr lIns="40000" rIns="40000" tIns="15000" bIns="15000"/>
-                    <a:lstStyle/>
-                    <a:p>
-                      <a:pPr algn="ctr"/>
-                      <a:r>
-                        <a:rPr sz="1200" b="1">
-                          <a:solidFill>
-                            <a:srgbClr val="FFFFFF"/>
-                          </a:solidFill>
-                          <a:latin typeface="Microsoft YaHei"/>
-                        </a:rPr>
-                        <a:t>说明</a:t>
-                      </a:r>
-                    </a:p>
-                  </a:txBody>
-                  <a:tcPr>
-                    <a:solidFill>
-                      <a:srgbClr val="C7000B"/>
-                    </a:solidFill>
-                  </a:tcPr>
-                </a:tc>
-              </a:tr>
-              <a:tr h="365760">
-                <a:tc>
-                  <a:txBody>
-                    <a:bodyPr lIns="40000" rIns="40000" tIns="10000" bIns="10000" wrap="square"/>
-                    <a:lstStyle/>
-                    <a:p>
-                      <a:pPr algn="l"/>
-                      <a:r>
-                        <a:rPr sz="1200">
-                          <a:solidFill>
-                            <a:srgbClr val="202020"/>
-                          </a:solidFill>
-                          <a:latin typeface="Microsoft YaHei"/>
-                        </a:rPr>
-                        <a:t>同 commit *Test.kt 配对</a:t>
-                      </a:r>
-                    </a:p>
-                  </a:txBody>
-                  <a:tcPr>
-                    <a:solidFill>
-                      <a:srgbClr val="FFFFFF"/>
-                    </a:solidFill>
-                  </a:tcPr>
-                </a:tc>
-                <a:tc>
-                  <a:txBody>
-                    <a:bodyPr lIns="40000" rIns="40000" tIns="10000" bIns="10000" wrap="square"/>
-                    <a:lstStyle/>
-                    <a:p>
-                      <a:pPr algn="l"/>
-                      <a:r>
-                        <a:rPr sz="1200">
-                          <a:solidFill>
-                            <a:srgbClr val="202020"/>
-                          </a:solidFill>
-                          <a:latin typeface="Microsoft YaHei"/>
-                        </a:rPr>
-                        <a:t>tdd-gate 一次没误报、一次没漏；hook 弹"TDD 提醒"时不必另开 commit</a:t>
-                      </a:r>
-                    </a:p>
-                  </a:txBody>
-                  <a:tcPr>
-                    <a:solidFill>
-                      <a:srgbClr val="FFFFFF"/>
-                    </a:solidFill>
-                  </a:tcPr>
-                </a:tc>
-              </a:tr>
-              <a:tr h="365760">
-                <a:tc>
-                  <a:txBody>
-                    <a:bodyPr lIns="40000" rIns="40000" tIns="10000" bIns="10000" wrap="square"/>
-                    <a:lstStyle/>
-                    <a:p>
-                      <a:pPr algn="l"/>
-                      <a:r>
-                        <a:rPr sz="1200">
-                          <a:solidFill>
-                            <a:srgbClr val="202020"/>
-                          </a:solidFill>
-                          <a:latin typeface="Microsoft YaHei"/>
-                        </a:rPr>
-                        <a:t>分支 vs PR 一一对应</a:t>
-                      </a:r>
-                    </a:p>
-                  </a:txBody>
-                  <a:tcPr>
-                    <a:solidFill>
-                      <a:srgbClr val="FFF1F2"/>
-                    </a:solidFill>
-                  </a:tcPr>
-                </a:tc>
-                <a:tc>
-                  <a:txBody>
-                    <a:bodyPr lIns="40000" rIns="40000" tIns="10000" bIns="10000" wrap="square"/>
-                    <a:lstStyle/>
-                    <a:p>
-                      <a:pPr algn="l"/>
-                      <a:r>
-                        <a:rPr sz="1200">
-                          <a:solidFill>
-                            <a:srgbClr val="202020"/>
-                          </a:solidFill>
-                          <a:latin typeface="Microsoft YaHei"/>
-                        </a:rPr>
-                        <a:t>PR merge 后开新分支；老分支再 push 不会自动出 PR（PR #52→#53 实战）</a:t>
-                      </a:r>
-                    </a:p>
-                  </a:txBody>
-                  <a:tcPr>
-                    <a:solidFill>
-                      <a:srgbClr val="FFF1F2"/>
-                    </a:solidFill>
-                  </a:tcPr>
-                </a:tc>
-              </a:tr>
-              <a:tr h="365760">
-                <a:tc>
-                  <a:txBody>
-                    <a:bodyPr lIns="40000" rIns="40000" tIns="10000" bIns="10000" wrap="square"/>
-                    <a:lstStyle/>
-                    <a:p>
-                      <a:pPr algn="l"/>
-                      <a:r>
-                        <a:rPr sz="1200">
-                          <a:solidFill>
-                            <a:srgbClr val="202020"/>
-                          </a:solidFill>
-                          <a:latin typeface="Microsoft YaHei"/>
-                        </a:rPr>
-                        <a:t>文档单一真相 grep 验证</a:t>
-                      </a:r>
-                    </a:p>
-                  </a:txBody>
-                  <a:tcPr>
-                    <a:solidFill>
-                      <a:srgbClr val="FFFFFF"/>
-                    </a:solidFill>
-                  </a:tcPr>
-                </a:tc>
-                <a:tc>
-                  <a:txBody>
-                    <a:bodyPr lIns="40000" rIns="40000" tIns="10000" bIns="10000" wrap="square"/>
-                    <a:lstStyle/>
-                    <a:p>
-                      <a:pPr algn="l"/>
-                      <a:r>
-                        <a:rPr sz="1200">
-                          <a:solidFill>
-                            <a:srgbClr val="202020"/>
-                          </a:solidFill>
-                          <a:latin typeface="Microsoft YaHei"/>
-                        </a:rPr>
-                        <a:t>新 doc 自称"权威"前必 grep 验证 anchor 函数名实际存在</a:t>
-                      </a:r>
-                    </a:p>
-                  </a:txBody>
-                  <a:tcPr>
-                    <a:solidFill>
-                      <a:srgbClr val="FFFFFF"/>
-                    </a:solidFill>
-                  </a:tcPr>
-                </a:tc>
-              </a:tr>
-              <a:tr h="365760">
+              <a:tr h="841248">
                 <a:tc>
                   <a:txBody>
                     <a:bodyPr lIns="40000" rIns="40000" tIns="10000" bIns="10000" wrap="square"/>
@@ -9839,7 +9410,7 @@
                       <a:r>
                         <a:rPr sz="1200" b="1">
                           <a:solidFill>
-                            <a:srgbClr val="FFFFFF"/>
+                            <a:srgbClr val="202020"/>
                           </a:solidFill>
                           <a:latin typeface="Microsoft YaHei"/>
                         </a:rPr>
@@ -9849,7 +9420,7 @@
                   </a:txBody>
                   <a:tcPr>
                     <a:solidFill>
-                      <a:srgbClr val="C7000B"/>
+                      <a:srgbClr val="F5F5F5"/>
                     </a:solidFill>
                   </a:tcPr>
                 </a:tc>
@@ -9862,7 +9433,7 @@
                       <a:r>
                         <a:rPr sz="1200" b="1">
                           <a:solidFill>
-                            <a:srgbClr val="FFFFFF"/>
+                            <a:srgbClr val="202020"/>
                           </a:solidFill>
                           <a:latin typeface="Microsoft YaHei"/>
                         </a:rPr>
@@ -9872,7 +9443,7 @@
                   </a:txBody>
                   <a:tcPr>
                     <a:solidFill>
-                      <a:srgbClr val="C7000B"/>
+                      <a:srgbClr val="F5F5F5"/>
                     </a:solidFill>
                   </a:tcPr>
                 </a:tc>
@@ -10188,7 +9759,7 @@
                       <a:r>
                         <a:rPr sz="1200" b="1">
                           <a:solidFill>
-                            <a:srgbClr val="FFFFFF"/>
+                            <a:srgbClr val="202020"/>
                           </a:solidFill>
                           <a:latin typeface="Microsoft YaHei"/>
                         </a:rPr>
@@ -10198,7 +9769,7 @@
                   </a:txBody>
                   <a:tcPr>
                     <a:solidFill>
-                      <a:srgbClr val="C7000B"/>
+                      <a:srgbClr val="F5F5F5"/>
                     </a:solidFill>
                   </a:tcPr>
                 </a:tc>
@@ -10211,7 +9782,7 @@
                       <a:r>
                         <a:rPr sz="1200" b="1">
                           <a:solidFill>
-                            <a:srgbClr val="FFFFFF"/>
+                            <a:srgbClr val="202020"/>
                           </a:solidFill>
                           <a:latin typeface="Microsoft YaHei"/>
                         </a:rPr>
@@ -10221,7 +9792,7 @@
                   </a:txBody>
                   <a:tcPr>
                     <a:solidFill>
-                      <a:srgbClr val="C7000B"/>
+                      <a:srgbClr val="F5F5F5"/>
                     </a:solidFill>
                   </a:tcPr>
                 </a:tc>
@@ -10538,7 +10109,7 @@
                       <a:r>
                         <a:rPr sz="1200" b="1">
                           <a:solidFill>
-                            <a:srgbClr val="FFFFFF"/>
+                            <a:srgbClr val="202020"/>
                           </a:solidFill>
                           <a:latin typeface="Microsoft YaHei"/>
                         </a:rPr>
@@ -10548,7 +10119,7 @@
                   </a:txBody>
                   <a:tcPr>
                     <a:solidFill>
-                      <a:srgbClr val="C7000B"/>
+                      <a:srgbClr val="F5F5F5"/>
                     </a:solidFill>
                   </a:tcPr>
                 </a:tc>
@@ -10561,7 +10132,7 @@
                       <a:r>
                         <a:rPr sz="1200" b="1">
                           <a:solidFill>
-                            <a:srgbClr val="FFFFFF"/>
+                            <a:srgbClr val="202020"/>
                           </a:solidFill>
                           <a:latin typeface="Microsoft YaHei"/>
                         </a:rPr>
@@ -10571,7 +10142,7 @@
                   </a:txBody>
                   <a:tcPr>
                     <a:solidFill>
-                      <a:srgbClr val="C7000B"/>
+                      <a:srgbClr val="F5F5F5"/>
                     </a:solidFill>
                   </a:tcPr>
                 </a:tc>
@@ -10584,7 +10155,7 @@
                       <a:r>
                         <a:rPr sz="1200" b="1">
                           <a:solidFill>
-                            <a:srgbClr val="FFFFFF"/>
+                            <a:srgbClr val="202020"/>
                           </a:solidFill>
                           <a:latin typeface="Microsoft YaHei"/>
                         </a:rPr>
@@ -10594,7 +10165,7 @@
                   </a:txBody>
                   <a:tcPr>
                     <a:solidFill>
-                      <a:srgbClr val="C7000B"/>
+                      <a:srgbClr val="F5F5F5"/>
                     </a:solidFill>
                   </a:tcPr>
                 </a:tc>
@@ -11302,357 +10873,30 @@
           </a:p>
         </p:txBody>
       </p:sp>
-      <p:sp>
-        <p:nvSpPr>
-          <p:cNvPr id="4" name="Rectangle 3"/>
-          <p:cNvSpPr/>
-          <p:nvPr/>
-        </p:nvSpPr>
-        <p:spPr>
-          <a:xfrm>
-            <a:off x="457200" y="960120"/>
-            <a:ext cx="5760720" cy="4937760"/>
+      <p:pic>
+        <p:nvPicPr>
+          <p:cNvPr id="4" name="Picture 3" descr="image.png"/>
+          <p:cNvPicPr>
+            <a:picLocks noChangeAspect="1"/>
+          </p:cNvPicPr>
+          <p:nvPr/>
+        </p:nvPicPr>
+        <p:blipFill>
+          <a:blip r:embed="rId2"/>
+          <a:stretch>
+            <a:fillRect/>
+          </a:stretch>
+        </p:blipFill>
+        <p:spPr>
+          <a:xfrm>
+            <a:off x="365760" y="914400"/>
+            <a:ext cx="5943600" cy="4005986"/>
           </a:xfrm>
           <a:prstGeom prst="rect">
             <a:avLst/>
           </a:prstGeom>
-          <a:solidFill>
-            <a:srgbClr val="F4F4F4"/>
-          </a:solidFill>
-          <a:ln>
-            <a:solidFill>
-              <a:srgbClr val="D0D0D0"/>
-            </a:solidFill>
-          </a:ln>
-        </p:spPr>
-        <p:style>
-          <a:lnRef idx="1">
-            <a:schemeClr val="accent1"/>
-          </a:lnRef>
-          <a:fillRef idx="3">
-            <a:schemeClr val="accent1"/>
-          </a:fillRef>
-          <a:effectRef idx="2">
-            <a:schemeClr val="accent1"/>
-          </a:effectRef>
-          <a:fontRef idx="minor">
-            <a:schemeClr val="lt1"/>
-          </a:fontRef>
-        </p:style>
-        <p:txBody>
-          <a:bodyPr rtlCol="0" anchor="ctr" wrap="square" lIns="120000" rIns="120000" tIns="80000" bIns="80000"/>
-          <a:lstStyle/>
-          <a:p>
-            <a:pPr algn="ctr"/>
-            <a:r>
-              <a:rPr sz="1000">
-                <a:solidFill>
-                  <a:srgbClr val="202020"/>
-                </a:solidFill>
-                <a:latin typeface="Consolas"/>
-              </a:rPr>
-              <a:t>┌────────────────────────┐  ┌─────────────────┐</a:t>
-            </a:r>
-          </a:p>
-          <a:p>
-            <a:r>
-              <a:rPr sz="1000">
-                <a:solidFill>
-                  <a:srgbClr val="202020"/>
-                </a:solidFill>
-                <a:latin typeface="Consolas"/>
-              </a:rPr>
-              <a:t>│ :apps:android (XML)    │  │ :apps:web (Wasm)│</a:t>
-            </a:r>
-          </a:p>
-          <a:p>
-            <a:r>
-              <a:rPr sz="1000">
-                <a:solidFill>
-                  <a:srgbClr val="202020"/>
-                </a:solidFill>
-                <a:latin typeface="Consolas"/>
-              </a:rPr>
-              <a:t>│ GameActivity / Online- │  │ Compose MP UI   │</a:t>
-            </a:r>
-          </a:p>
-          <a:p>
-            <a:r>
-              <a:rPr sz="1000">
-                <a:solidFill>
-                  <a:srgbClr val="202020"/>
-                </a:solidFill>
-                <a:latin typeface="Consolas"/>
-              </a:rPr>
-              <a:t>│ MultiplayerGameEngine  │  │ AppViewModel    │</a:t>
-            </a:r>
-          </a:p>
-          <a:p>
-            <a:r>
-              <a:rPr sz="1000">
-                <a:solidFill>
-                  <a:srgbClr val="202020"/>
-                </a:solidFill>
-                <a:latin typeface="Consolas"/>
-              </a:rPr>
-              <a:t>└──────────┬─────────────┘  └────────┬────────┘</a:t>
-            </a:r>
-          </a:p>
-          <a:p>
-            <a:r>
-              <a:rPr sz="1000">
-                <a:solidFill>
-                  <a:srgbClr val="202020"/>
-                </a:solidFill>
-                <a:latin typeface="Consolas"/>
-              </a:rPr>
-              <a:t>           │ depends on              │</a:t>
-            </a:r>
-          </a:p>
-          <a:p>
-            <a:r>
-              <a:rPr sz="1000">
-                <a:solidFill>
-                  <a:srgbClr val="202020"/>
-                </a:solidFill>
-                <a:latin typeface="Consolas"/>
-              </a:rPr>
-              <a:t>           ▼                         ▼</a:t>
-            </a:r>
-          </a:p>
-          <a:p>
-            <a:r>
-              <a:rPr sz="1000">
-                <a:solidFill>
-                  <a:srgbClr val="202020"/>
-                </a:solidFill>
-                <a:latin typeface="Consolas"/>
-              </a:rPr>
-              <a:t>        ┌──────────────────────────────┐</a:t>
-            </a:r>
-          </a:p>
-          <a:p>
-            <a:r>
-              <a:rPr sz="1000">
-                <a:solidFill>
-                  <a:srgbClr val="202020"/>
-                </a:solidFill>
-                <a:latin typeface="Consolas"/>
-              </a:rPr>
-              <a:t>        │  :shared (KMP commonMain)    │</a:t>
-            </a:r>
-          </a:p>
-          <a:p>
-            <a:r>
-              <a:rPr sz="1000">
-                <a:solidFill>
-                  <a:srgbClr val="202020"/>
-                </a:solidFill>
-                <a:latin typeface="Consolas"/>
-              </a:rPr>
-              <a:t>        │  Card · Deck · Player        │</a:t>
-            </a:r>
-          </a:p>
-          <a:p>
-            <a:r>
-              <a:rPr sz="1000">
-                <a:solidFill>
-                  <a:srgbClr val="202020"/>
-                </a:solidFill>
-                <a:latin typeface="Consolas"/>
-              </a:rPr>
-              <a:t>        │  CardRules · Settlement      │</a:t>
-            </a:r>
-          </a:p>
-          <a:p>
-            <a:r>
-              <a:rPr sz="1000">
-                <a:solidFill>
-                  <a:srgbClr val="202020"/>
-                </a:solidFill>
-                <a:latin typeface="Consolas"/>
-              </a:rPr>
-              <a:t>        │  GameEngine · AIPlayer       │</a:t>
-            </a:r>
-          </a:p>
-          <a:p>
-            <a:r>
-              <a:rPr sz="1000">
-                <a:solidFill>
-                  <a:srgbClr val="202020"/>
-                </a:solidFill>
-                <a:latin typeface="Consolas"/>
-              </a:rPr>
-              <a:t>        │  GameMessage (DTO + sealed)  │</a:t>
-            </a:r>
-          </a:p>
-          <a:p>
-            <a:r>
-              <a:rPr sz="1000">
-                <a:solidFill>
-                  <a:srgbClr val="202020"/>
-                </a:solidFill>
-                <a:latin typeface="Consolas"/>
-              </a:rPr>
-              <a:t>        │  + commonTest (40+ 用例)     │</a:t>
-            </a:r>
-          </a:p>
-          <a:p>
-            <a:r>
-              <a:rPr sz="1000">
-                <a:solidFill>
-                  <a:srgbClr val="202020"/>
-                </a:solidFill>
-                <a:latin typeface="Consolas"/>
-              </a:rPr>
-              <a:t>        └────────────┬─────────────────┘</a:t>
-            </a:r>
-          </a:p>
-          <a:p>
-            <a:r>
-              <a:rPr sz="1000">
-                <a:solidFill>
-                  <a:srgbClr val="202020"/>
-                </a:solidFill>
-                <a:latin typeface="Consolas"/>
-              </a:rPr>
-              <a:t>                     │</a:t>
-            </a:r>
-          </a:p>
-          <a:p>
-            <a:r>
-              <a:rPr sz="1000">
-                <a:solidFill>
-                  <a:srgbClr val="202020"/>
-                </a:solidFill>
-                <a:latin typeface="Consolas"/>
-              </a:rPr>
-              <a:t>                     ▼</a:t>
-            </a:r>
-          </a:p>
-          <a:p>
-            <a:r>
-              <a:rPr sz="1000">
-                <a:solidFill>
-                  <a:srgbClr val="202020"/>
-                </a:solidFill>
-                <a:latin typeface="Consolas"/>
-              </a:rPr>
-              <a:t>        ┌──────────────────────────────┐</a:t>
-            </a:r>
-          </a:p>
-          <a:p>
-            <a:r>
-              <a:rPr sz="1000">
-                <a:solidFill>
-                  <a:srgbClr val="202020"/>
-                </a:solidFill>
-                <a:latin typeface="Consolas"/>
-              </a:rPr>
-              <a:t>        │  :server (Ktor + Netty)      │</a:t>
-            </a:r>
-          </a:p>
-          <a:p>
-            <a:r>
-              <a:rPr sz="1000">
-                <a:solidFill>
-                  <a:srgbClr val="202020"/>
-                </a:solidFill>
-                <a:latin typeface="Consolas"/>
-              </a:rPr>
-              <a:t>        │  ServerRoomManager           │</a:t>
-            </a:r>
-          </a:p>
-          <a:p>
-            <a:r>
-              <a:rPr sz="1000">
-                <a:solidFill>
-                  <a:srgbClr val="202020"/>
-                </a:solidFill>
-                <a:latin typeface="Consolas"/>
-              </a:rPr>
-              <a:t>        │  ServerGameManager           │</a:t>
-            </a:r>
-          </a:p>
-          <a:p>
-            <a:r>
-              <a:rPr sz="1000">
-                <a:solidFill>
-                  <a:srgbClr val="202020"/>
-                </a:solidFill>
-                <a:latin typeface="Consolas"/>
-              </a:rPr>
-              <a:t>        │   · 每房间 Mutex             │</a:t>
-            </a:r>
-          </a:p>
-          <a:p>
-            <a:r>
-              <a:rPr sz="1000">
-                <a:solidFill>
-                  <a:srgbClr val="202020"/>
-                </a:solidFill>
-                <a:latin typeface="Consolas"/>
-              </a:rPr>
-              <a:t>        │   · 三级 AI 回退 + 兜底推进  │</a:t>
-            </a:r>
-          </a:p>
-          <a:p>
-            <a:r>
-              <a:rPr sz="1000">
-                <a:solidFill>
-                  <a:srgbClr val="202020"/>
-                </a:solidFill>
-                <a:latin typeface="Consolas"/>
-              </a:rPr>
-              <a:t>        │   · 30s 回合超时             │</a:t>
-            </a:r>
-          </a:p>
-          <a:p>
-            <a:r>
-              <a:rPr sz="1000">
-                <a:solidFill>
-                  <a:srgbClr val="202020"/>
-                </a:solidFill>
-                <a:latin typeface="Consolas"/>
-              </a:rPr>
-              <a:t>        └────────────┬─────────────────┘</a:t>
-            </a:r>
-          </a:p>
-          <a:p>
-            <a:r>
-              <a:rPr sz="1000">
-                <a:solidFill>
-                  <a:srgbClr val="202020"/>
-                </a:solidFill>
-                <a:latin typeface="Consolas"/>
-              </a:rPr>
-              <a:t>                     │ WebSocket /game (JSON + classDiscriminator)</a:t>
-            </a:r>
-          </a:p>
-          <a:p>
-            <a:r>
-              <a:rPr sz="1000">
-                <a:solidFill>
-                  <a:srgbClr val="202020"/>
-                </a:solidFill>
-                <a:latin typeface="Consolas"/>
-              </a:rPr>
-              <a:t>                     ▼</a:t>
-            </a:r>
-          </a:p>
-          <a:p>
-            <a:r>
-              <a:rPr sz="1000">
-                <a:solidFill>
-                  <a:srgbClr val="202020"/>
-                </a:solidFill>
-                <a:latin typeface="Consolas"/>
-              </a:rPr>
-              <a:t>        Caddy 80/443 → 127.0.0.1:8080</a:t>
-            </a:r>
-          </a:p>
-        </p:txBody>
-      </p:sp>
+        </p:spPr>
+      </p:pic>
       <p:sp>
         <p:nvSpPr>
           <p:cNvPr id="5" name="TextBox 4"/>
@@ -11720,7 +10964,7 @@
                       <a:r>
                         <a:rPr sz="1200" b="1">
                           <a:solidFill>
-                            <a:srgbClr val="FFFFFF"/>
+                            <a:srgbClr val="202020"/>
                           </a:solidFill>
                           <a:latin typeface="Microsoft YaHei"/>
                         </a:rPr>
@@ -11730,7 +10974,7 @@
                   </a:txBody>
                   <a:tcPr>
                     <a:solidFill>
-                      <a:srgbClr val="C7000B"/>
+                      <a:srgbClr val="F5F5F5"/>
                     </a:solidFill>
                   </a:tcPr>
                 </a:tc>
@@ -11743,7 +10987,7 @@
                       <a:r>
                         <a:rPr sz="1200" b="1">
                           <a:solidFill>
-                            <a:srgbClr val="FFFFFF"/>
+                            <a:srgbClr val="202020"/>
                           </a:solidFill>
                           <a:latin typeface="Microsoft YaHei"/>
                         </a:rPr>
@@ -11753,7 +10997,7 @@
                   </a:txBody>
                   <a:tcPr>
                     <a:solidFill>
-                      <a:srgbClr val="C7000B"/>
+                      <a:srgbClr val="F5F5F5"/>
                     </a:solidFill>
                   </a:tcPr>
                 </a:tc>
@@ -12117,7 +11361,7 @@
                       <a:r>
                         <a:rPr sz="1200" b="1">
                           <a:solidFill>
-                            <a:srgbClr val="FFFFFF"/>
+                            <a:srgbClr val="202020"/>
                           </a:solidFill>
                           <a:latin typeface="Microsoft YaHei"/>
                         </a:rPr>
@@ -12127,7 +11371,7 @@
                   </a:txBody>
                   <a:tcPr>
                     <a:solidFill>
-                      <a:srgbClr val="2E7D32"/>
+                      <a:srgbClr val="F5F5F5"/>
                     </a:solidFill>
                   </a:tcPr>
                 </a:tc>
@@ -12140,7 +11384,7 @@
                       <a:r>
                         <a:rPr sz="1200" b="1">
                           <a:solidFill>
-                            <a:srgbClr val="FFFFFF"/>
+                            <a:srgbClr val="202020"/>
                           </a:solidFill>
                           <a:latin typeface="Microsoft YaHei"/>
                         </a:rPr>
@@ -12150,7 +11394,7 @@
                   </a:txBody>
                   <a:tcPr>
                     <a:solidFill>
-                      <a:srgbClr val="2E7D32"/>
+                      <a:srgbClr val="F5F5F5"/>
                     </a:solidFill>
                   </a:tcPr>
                 </a:tc>
@@ -13813,7 +13057,7 @@
                       <a:r>
                         <a:rPr sz="1200" b="1">
                           <a:solidFill>
-                            <a:srgbClr val="FFFFFF"/>
+                            <a:srgbClr val="202020"/>
                           </a:solidFill>
                           <a:latin typeface="Microsoft YaHei"/>
                         </a:rPr>
@@ -13823,7 +13067,7 @@
                   </a:txBody>
                   <a:tcPr>
                     <a:solidFill>
-                      <a:srgbClr val="C7000B"/>
+                      <a:srgbClr val="F5F5F5"/>
                     </a:solidFill>
                   </a:tcPr>
                 </a:tc>
@@ -13836,7 +13080,7 @@
                       <a:r>
                         <a:rPr sz="1200" b="1">
                           <a:solidFill>
-                            <a:srgbClr val="FFFFFF"/>
+                            <a:srgbClr val="202020"/>
                           </a:solidFill>
                           <a:latin typeface="Microsoft YaHei"/>
                         </a:rPr>
@@ -13846,7 +13090,7 @@
                   </a:txBody>
                   <a:tcPr>
                     <a:solidFill>
-                      <a:srgbClr val="C7000B"/>
+                      <a:srgbClr val="F5F5F5"/>
                     </a:solidFill>
                   </a:tcPr>
                 </a:tc>
@@ -14066,7 +13310,7 @@
                       <a:r>
                         <a:rPr sz="1200" b="1">
                           <a:solidFill>
-                            <a:srgbClr val="FFFFFF"/>
+                            <a:srgbClr val="202020"/>
                           </a:solidFill>
                           <a:latin typeface="Microsoft YaHei"/>
                         </a:rPr>
@@ -14076,7 +13320,7 @@
                   </a:txBody>
                   <a:tcPr>
                     <a:solidFill>
-                      <a:srgbClr val="C7000B"/>
+                      <a:srgbClr val="F5F5F5"/>
                     </a:solidFill>
                   </a:tcPr>
                 </a:tc>
@@ -14089,7 +13333,7 @@
                       <a:r>
                         <a:rPr sz="1200" b="1">
                           <a:solidFill>
-                            <a:srgbClr val="FFFFFF"/>
+                            <a:srgbClr val="202020"/>
                           </a:solidFill>
                           <a:latin typeface="Microsoft YaHei"/>
                         </a:rPr>
@@ -14099,7 +13343,7 @@
                   </a:txBody>
                   <a:tcPr>
                     <a:solidFill>
-                      <a:srgbClr val="C7000B"/>
+                      <a:srgbClr val="F5F5F5"/>
                     </a:solidFill>
                   </a:tcPr>
                 </a:tc>
@@ -14319,7 +13563,7 @@
                       <a:r>
                         <a:rPr sz="1200" b="1">
                           <a:solidFill>
-                            <a:srgbClr val="FFFFFF"/>
+                            <a:srgbClr val="202020"/>
                           </a:solidFill>
                           <a:latin typeface="Microsoft YaHei"/>
                         </a:rPr>
@@ -14329,7 +13573,7 @@
                   </a:txBody>
                   <a:tcPr>
                     <a:solidFill>
-                      <a:srgbClr val="C7000B"/>
+                      <a:srgbClr val="F5F5F5"/>
                     </a:solidFill>
                   </a:tcPr>
                 </a:tc>
@@ -14342,7 +13586,7 @@
                       <a:r>
                         <a:rPr sz="1200" b="1">
                           <a:solidFill>
-                            <a:srgbClr val="FFFFFF"/>
+                            <a:srgbClr val="202020"/>
                           </a:solidFill>
                           <a:latin typeface="Microsoft YaHei"/>
                         </a:rPr>
@@ -14352,7 +13596,7 @@
                   </a:txBody>
                   <a:tcPr>
                     <a:solidFill>
-                      <a:srgbClr val="C7000B"/>
+                      <a:srgbClr val="F5F5F5"/>
                     </a:solidFill>
                   </a:tcPr>
                 </a:tc>
@@ -14738,7 +13982,7 @@
                       <a:r>
                         <a:rPr sz="1200" b="1">
                           <a:solidFill>
-                            <a:srgbClr val="FFFFFF"/>
+                            <a:srgbClr val="202020"/>
                           </a:solidFill>
                           <a:latin typeface="Microsoft YaHei"/>
                         </a:rPr>
@@ -14748,7 +13992,7 @@
                   </a:txBody>
                   <a:tcPr>
                     <a:solidFill>
-                      <a:srgbClr val="C7000B"/>
+                      <a:srgbClr val="F5F5F5"/>
                     </a:solidFill>
                   </a:tcPr>
                 </a:tc>
@@ -14761,7 +14005,7 @@
                       <a:r>
                         <a:rPr sz="1200" b="1">
                           <a:solidFill>
-                            <a:srgbClr val="FFFFFF"/>
+                            <a:srgbClr val="202020"/>
                           </a:solidFill>
                           <a:latin typeface="Microsoft YaHei"/>
                         </a:rPr>
@@ -14771,7 +14015,7 @@
                   </a:txBody>
                   <a:tcPr>
                     <a:solidFill>
-                      <a:srgbClr val="C7000B"/>
+                      <a:srgbClr val="F5F5F5"/>
                     </a:solidFill>
                   </a:tcPr>
                 </a:tc>
@@ -15029,7 +14273,7 @@
                       <a:r>
                         <a:rPr sz="1200" b="1">
                           <a:solidFill>
-                            <a:srgbClr val="FFFFFF"/>
+                            <a:srgbClr val="202020"/>
                           </a:solidFill>
                           <a:latin typeface="Microsoft YaHei"/>
                         </a:rPr>
@@ -15039,7 +14283,7 @@
                   </a:txBody>
                   <a:tcPr>
                     <a:solidFill>
-                      <a:srgbClr val="F57C00"/>
+                      <a:srgbClr val="F5F5F5"/>
                     </a:solidFill>
                   </a:tcPr>
                 </a:tc>
@@ -15052,7 +14296,7 @@
                       <a:r>
                         <a:rPr sz="1200" b="1">
                           <a:solidFill>
-                            <a:srgbClr val="FFFFFF"/>
+                            <a:srgbClr val="202020"/>
                           </a:solidFill>
                           <a:latin typeface="Microsoft YaHei"/>
                         </a:rPr>
@@ -15062,7 +14306,7 @@
                   </a:txBody>
                   <a:tcPr>
                     <a:solidFill>
-                      <a:srgbClr val="F57C00"/>
+                      <a:srgbClr val="F5F5F5"/>
                     </a:solidFill>
                   </a:tcPr>
                 </a:tc>
@@ -15075,7 +14319,7 @@
                       <a:r>
                         <a:rPr sz="1200" b="1">
                           <a:solidFill>
-                            <a:srgbClr val="FFFFFF"/>
+                            <a:srgbClr val="202020"/>
                           </a:solidFill>
                           <a:latin typeface="Microsoft YaHei"/>
                         </a:rPr>
@@ -15085,7 +14329,7 @@
                   </a:txBody>
                   <a:tcPr>
                     <a:solidFill>
-                      <a:srgbClr val="F57C00"/>
+                      <a:srgbClr val="F5F5F5"/>
                     </a:solidFill>
                   </a:tcPr>
                 </a:tc>
@@ -15098,7 +14342,7 @@
                       <a:r>
                         <a:rPr sz="1200" b="1">
                           <a:solidFill>
-                            <a:srgbClr val="FFFFFF"/>
+                            <a:srgbClr val="202020"/>
                           </a:solidFill>
                           <a:latin typeface="Microsoft YaHei"/>
                         </a:rPr>
@@ -15108,7 +14352,7 @@
                   </a:txBody>
                   <a:tcPr>
                     <a:solidFill>
-                      <a:srgbClr val="F57C00"/>
+                      <a:srgbClr val="F5F5F5"/>
                     </a:solidFill>
                   </a:tcPr>
                 </a:tc>
@@ -15121,7 +14365,7 @@
                       <a:r>
                         <a:rPr sz="1200" b="1">
                           <a:solidFill>
-                            <a:srgbClr val="FFFFFF"/>
+                            <a:srgbClr val="202020"/>
                           </a:solidFill>
                           <a:latin typeface="Microsoft YaHei"/>
                         </a:rPr>
@@ -15131,7 +14375,7 @@
                   </a:txBody>
                   <a:tcPr>
                     <a:solidFill>
-                      <a:srgbClr val="F57C00"/>
+                      <a:srgbClr val="F5F5F5"/>
                     </a:solidFill>
                   </a:tcPr>
                 </a:tc>
@@ -15711,16 +14955,40 @@
           </a:p>
         </p:txBody>
       </p:sp>
-      <p:sp>
-        <p:nvSpPr>
-          <p:cNvPr id="5" name="TextBox 4"/>
+      <p:pic>
+        <p:nvPicPr>
+          <p:cNvPr id="5" name="Picture 4" descr="image.png"/>
+          <p:cNvPicPr>
+            <a:picLocks noChangeAspect="1"/>
+          </p:cNvPicPr>
+          <p:nvPr/>
+        </p:nvPicPr>
+        <p:blipFill>
+          <a:blip r:embed="rId2"/>
+          <a:stretch>
+            <a:fillRect/>
+          </a:stretch>
+        </p:blipFill>
+        <p:spPr>
+          <a:xfrm>
+            <a:off x="365760" y="1371600"/>
+            <a:ext cx="6035040" cy="2468331"/>
+          </a:xfrm>
+          <a:prstGeom prst="rect">
+            <a:avLst/>
+          </a:prstGeom>
+        </p:spPr>
+      </p:pic>
+      <p:sp>
+        <p:nvSpPr>
+          <p:cNvPr id="6" name="TextBox 5"/>
           <p:cNvSpPr txBox="1"/>
           <p:nvPr/>
         </p:nvSpPr>
         <p:spPr>
           <a:xfrm>
-            <a:off x="457200" y="1417320"/>
-            <a:ext cx="457200" cy="365760"/>
+            <a:off x="6583680" y="960120"/>
+            <a:ext cx="5486400" cy="365760"/>
           </a:xfrm>
           <a:prstGeom prst="rect">
             <a:avLst/>
@@ -15735,426 +15003,6 @@
           <a:p>
             <a:pPr algn="l"/>
             <a:r>
-              <a:rPr sz="1400" b="1">
-                <a:solidFill>
-                  <a:srgbClr val="606060"/>
-                </a:solidFill>
-                <a:latin typeface="Microsoft YaHei"/>
-              </a:rPr>
-              <a:t>L1</a:t>
-            </a:r>
-          </a:p>
-        </p:txBody>
-      </p:sp>
-      <p:sp>
-        <p:nvSpPr>
-          <p:cNvPr id="6" name="TextBox 5"/>
-          <p:cNvSpPr txBox="1"/>
-          <p:nvPr/>
-        </p:nvSpPr>
-        <p:spPr>
-          <a:xfrm>
-            <a:off x="1005840" y="1417320"/>
-            <a:ext cx="5029200" cy="365760"/>
-          </a:xfrm>
-          <a:prstGeom prst="rect">
-            <a:avLst/>
-          </a:prstGeom>
-          <a:noFill/>
-        </p:spPr>
-        <p:txBody>
-          <a:bodyPr wrap="square" lIns="0" rIns="0" tIns="0" bIns="0">
-            <a:spAutoFit/>
-          </a:bodyPr>
-          <a:lstStyle/>
-          <a:p>
-            <a:pPr algn="l"/>
-            <a:r>
-              <a:rPr sz="1400" b="1">
-                <a:solidFill>
-                  <a:srgbClr val="202020"/>
-                </a:solidFill>
-                <a:latin typeface="Microsoft YaHei"/>
-              </a:rPr>
-              <a:t>AI 执行人工指令</a:t>
-            </a:r>
-          </a:p>
-        </p:txBody>
-      </p:sp>
-      <p:sp>
-        <p:nvSpPr>
-          <p:cNvPr id="7" name="TextBox 6"/>
-          <p:cNvSpPr txBox="1"/>
-          <p:nvPr/>
-        </p:nvSpPr>
-        <p:spPr>
-          <a:xfrm>
-            <a:off x="1005840" y="1783080"/>
-            <a:ext cx="5029200" cy="365760"/>
-          </a:xfrm>
-          <a:prstGeom prst="rect">
-            <a:avLst/>
-          </a:prstGeom>
-          <a:noFill/>
-        </p:spPr>
-        <p:txBody>
-          <a:bodyPr wrap="square" lIns="0" rIns="0" tIns="0" bIns="0">
-            <a:spAutoFit/>
-          </a:bodyPr>
-          <a:lstStyle/>
-          <a:p>
-            <a:pPr algn="l"/>
-            <a:r>
-              <a:rPr sz="1200" b="0">
-                <a:solidFill>
-                  <a:srgbClr val="606060"/>
-                </a:solidFill>
-                <a:latin typeface="Microsoft YaHei"/>
-              </a:rPr>
-              <a:t>传统：人主导，瓶颈</a:t>
-            </a:r>
-          </a:p>
-        </p:txBody>
-      </p:sp>
-      <p:sp>
-        <p:nvSpPr>
-          <p:cNvPr id="8" name="TextBox 7"/>
-          <p:cNvSpPr txBox="1"/>
-          <p:nvPr/>
-        </p:nvSpPr>
-        <p:spPr>
-          <a:xfrm>
-            <a:off x="457200" y="2286000"/>
-            <a:ext cx="457200" cy="365760"/>
-          </a:xfrm>
-          <a:prstGeom prst="rect">
-            <a:avLst/>
-          </a:prstGeom>
-          <a:noFill/>
-        </p:spPr>
-        <p:txBody>
-          <a:bodyPr wrap="square" lIns="0" rIns="0" tIns="0" bIns="0">
-            <a:spAutoFit/>
-          </a:bodyPr>
-          <a:lstStyle/>
-          <a:p>
-            <a:pPr algn="l"/>
-            <a:r>
-              <a:rPr sz="1400" b="1">
-                <a:solidFill>
-                  <a:srgbClr val="202020"/>
-                </a:solidFill>
-                <a:latin typeface="Microsoft YaHei"/>
-              </a:rPr>
-              <a:t>L2</a:t>
-            </a:r>
-          </a:p>
-        </p:txBody>
-      </p:sp>
-      <p:sp>
-        <p:nvSpPr>
-          <p:cNvPr id="9" name="TextBox 8"/>
-          <p:cNvSpPr txBox="1"/>
-          <p:nvPr/>
-        </p:nvSpPr>
-        <p:spPr>
-          <a:xfrm>
-            <a:off x="1005840" y="2286000"/>
-            <a:ext cx="5029200" cy="365760"/>
-          </a:xfrm>
-          <a:prstGeom prst="rect">
-            <a:avLst/>
-          </a:prstGeom>
-          <a:noFill/>
-        </p:spPr>
-        <p:txBody>
-          <a:bodyPr wrap="square" lIns="0" rIns="0" tIns="0" bIns="0">
-            <a:spAutoFit/>
-          </a:bodyPr>
-          <a:lstStyle/>
-          <a:p>
-            <a:pPr algn="l"/>
-            <a:r>
-              <a:rPr sz="1400" b="1">
-                <a:solidFill>
-                  <a:srgbClr val="202020"/>
-                </a:solidFill>
-                <a:latin typeface="Microsoft YaHei"/>
-              </a:rPr>
-              <a:t>AI 提建议，人工决策</a:t>
-            </a:r>
-          </a:p>
-        </p:txBody>
-      </p:sp>
-      <p:sp>
-        <p:nvSpPr>
-          <p:cNvPr id="10" name="TextBox 9"/>
-          <p:cNvSpPr txBox="1"/>
-          <p:nvPr/>
-        </p:nvSpPr>
-        <p:spPr>
-          <a:xfrm>
-            <a:off x="1005840" y="2651760"/>
-            <a:ext cx="5029200" cy="365760"/>
-          </a:xfrm>
-          <a:prstGeom prst="rect">
-            <a:avLst/>
-          </a:prstGeom>
-          <a:noFill/>
-        </p:spPr>
-        <p:txBody>
-          <a:bodyPr wrap="square" lIns="0" rIns="0" tIns="0" bIns="0">
-            <a:spAutoFit/>
-          </a:bodyPr>
-          <a:lstStyle/>
-          <a:p>
-            <a:pPr algn="l"/>
-            <a:r>
-              <a:rPr sz="1200" b="0">
-                <a:solidFill>
-                  <a:srgbClr val="202020"/>
-                </a:solidFill>
-                <a:latin typeface="Microsoft YaHei"/>
-              </a:rPr>
-              <a:t>审稿模式</a:t>
-            </a:r>
-          </a:p>
-        </p:txBody>
-      </p:sp>
-      <p:sp>
-        <p:nvSpPr>
-          <p:cNvPr id="11" name="TextBox 10"/>
-          <p:cNvSpPr txBox="1"/>
-          <p:nvPr/>
-        </p:nvSpPr>
-        <p:spPr>
-          <a:xfrm>
-            <a:off x="457200" y="3154680"/>
-            <a:ext cx="457200" cy="365760"/>
-          </a:xfrm>
-          <a:prstGeom prst="rect">
-            <a:avLst/>
-          </a:prstGeom>
-          <a:noFill/>
-        </p:spPr>
-        <p:txBody>
-          <a:bodyPr wrap="square" lIns="0" rIns="0" tIns="0" bIns="0">
-            <a:spAutoFit/>
-          </a:bodyPr>
-          <a:lstStyle/>
-          <a:p>
-            <a:pPr algn="l"/>
-            <a:r>
-              <a:rPr sz="1400" b="1">
-                <a:solidFill>
-                  <a:srgbClr val="C7000B"/>
-                </a:solidFill>
-                <a:latin typeface="Microsoft YaHei"/>
-              </a:rPr>
-              <a:t>L3</a:t>
-            </a:r>
-          </a:p>
-        </p:txBody>
-      </p:sp>
-      <p:sp>
-        <p:nvSpPr>
-          <p:cNvPr id="12" name="TextBox 11"/>
-          <p:cNvSpPr txBox="1"/>
-          <p:nvPr/>
-        </p:nvSpPr>
-        <p:spPr>
-          <a:xfrm>
-            <a:off x="1005840" y="3154680"/>
-            <a:ext cx="5029200" cy="365760"/>
-          </a:xfrm>
-          <a:prstGeom prst="rect">
-            <a:avLst/>
-          </a:prstGeom>
-          <a:noFill/>
-        </p:spPr>
-        <p:txBody>
-          <a:bodyPr wrap="square" lIns="0" rIns="0" tIns="0" bIns="0">
-            <a:spAutoFit/>
-          </a:bodyPr>
-          <a:lstStyle/>
-          <a:p>
-            <a:pPr algn="l"/>
-            <a:r>
-              <a:rPr sz="1400" b="1">
-                <a:solidFill>
-                  <a:srgbClr val="202020"/>
-                </a:solidFill>
-                <a:latin typeface="Microsoft YaHei"/>
-              </a:rPr>
-              <a:t>人工反馈现象，AI 自主排查</a:t>
-            </a:r>
-          </a:p>
-        </p:txBody>
-      </p:sp>
-      <p:sp>
-        <p:nvSpPr>
-          <p:cNvPr id="13" name="TextBox 12"/>
-          <p:cNvSpPr txBox="1"/>
-          <p:nvPr/>
-        </p:nvSpPr>
-        <p:spPr>
-          <a:xfrm>
-            <a:off x="1005840" y="3520440"/>
-            <a:ext cx="5029200" cy="365760"/>
-          </a:xfrm>
-          <a:prstGeom prst="rect">
-            <a:avLst/>
-          </a:prstGeom>
-          <a:noFill/>
-        </p:spPr>
-        <p:txBody>
-          <a:bodyPr wrap="square" lIns="0" rIns="0" tIns="0" bIns="0">
-            <a:spAutoFit/>
-          </a:bodyPr>
-          <a:lstStyle/>
-          <a:p>
-            <a:pPr algn="l"/>
-            <a:r>
-              <a:rPr sz="1200" b="0">
-                <a:solidFill>
-                  <a:srgbClr val="C7000B"/>
-                </a:solidFill>
-                <a:latin typeface="Microsoft YaHei"/>
-              </a:rPr>
-              <a:t>本项目大量使用 ★</a:t>
-            </a:r>
-          </a:p>
-        </p:txBody>
-      </p:sp>
-      <p:sp>
-        <p:nvSpPr>
-          <p:cNvPr id="14" name="TextBox 13"/>
-          <p:cNvSpPr txBox="1"/>
-          <p:nvPr/>
-        </p:nvSpPr>
-        <p:spPr>
-          <a:xfrm>
-            <a:off x="457200" y="4023360"/>
-            <a:ext cx="457200" cy="365760"/>
-          </a:xfrm>
-          <a:prstGeom prst="rect">
-            <a:avLst/>
-          </a:prstGeom>
-          <a:noFill/>
-        </p:spPr>
-        <p:txBody>
-          <a:bodyPr wrap="square" lIns="0" rIns="0" tIns="0" bIns="0">
-            <a:spAutoFit/>
-          </a:bodyPr>
-          <a:lstStyle/>
-          <a:p>
-            <a:pPr algn="l"/>
-            <a:r>
-              <a:rPr sz="1400" b="1">
-                <a:solidFill>
-                  <a:srgbClr val="C7000B"/>
-                </a:solidFill>
-                <a:latin typeface="Microsoft YaHei"/>
-              </a:rPr>
-              <a:t>L4</a:t>
-            </a:r>
-          </a:p>
-        </p:txBody>
-      </p:sp>
-      <p:sp>
-        <p:nvSpPr>
-          <p:cNvPr id="15" name="TextBox 14"/>
-          <p:cNvSpPr txBox="1"/>
-          <p:nvPr/>
-        </p:nvSpPr>
-        <p:spPr>
-          <a:xfrm>
-            <a:off x="1005840" y="4023360"/>
-            <a:ext cx="5029200" cy="365760"/>
-          </a:xfrm>
-          <a:prstGeom prst="rect">
-            <a:avLst/>
-          </a:prstGeom>
-          <a:noFill/>
-        </p:spPr>
-        <p:txBody>
-          <a:bodyPr wrap="square" lIns="0" rIns="0" tIns="0" bIns="0">
-            <a:spAutoFit/>
-          </a:bodyPr>
-          <a:lstStyle/>
-          <a:p>
-            <a:pPr algn="l"/>
-            <a:r>
-              <a:rPr sz="1400" b="1">
-                <a:solidFill>
-                  <a:srgbClr val="202020"/>
-                </a:solidFill>
-                <a:latin typeface="Microsoft YaHei"/>
-              </a:rPr>
-              <a:t>AI 主动审查，人工验证</a:t>
-            </a:r>
-          </a:p>
-        </p:txBody>
-      </p:sp>
-      <p:sp>
-        <p:nvSpPr>
-          <p:cNvPr id="16" name="TextBox 15"/>
-          <p:cNvSpPr txBox="1"/>
-          <p:nvPr/>
-        </p:nvSpPr>
-        <p:spPr>
-          <a:xfrm>
-            <a:off x="1005840" y="4389120"/>
-            <a:ext cx="5029200" cy="365760"/>
-          </a:xfrm>
-          <a:prstGeom prst="rect">
-            <a:avLst/>
-          </a:prstGeom>
-          <a:noFill/>
-        </p:spPr>
-        <p:txBody>
-          <a:bodyPr wrap="square" lIns="0" rIns="0" tIns="0" bIns="0">
-            <a:spAutoFit/>
-          </a:bodyPr>
-          <a:lstStyle/>
-          <a:p>
-            <a:pPr algn="l"/>
-            <a:r>
-              <a:rPr sz="1200" b="0">
-                <a:solidFill>
-                  <a:srgbClr val="C7000B"/>
-                </a:solidFill>
-                <a:latin typeface="Microsoft YaHei"/>
-              </a:rPr>
-              <a:t>本项目最高效模式 ★★</a:t>
-            </a:r>
-          </a:p>
-        </p:txBody>
-      </p:sp>
-      <p:sp>
-        <p:nvSpPr>
-          <p:cNvPr id="17" name="TextBox 16"/>
-          <p:cNvSpPr txBox="1"/>
-          <p:nvPr/>
-        </p:nvSpPr>
-        <p:spPr>
-          <a:xfrm>
-            <a:off x="6583680" y="960120"/>
-            <a:ext cx="5486400" cy="365760"/>
-          </a:xfrm>
-          <a:prstGeom prst="rect">
-            <a:avLst/>
-          </a:prstGeom>
-          <a:noFill/>
-        </p:spPr>
-        <p:txBody>
-          <a:bodyPr wrap="square" lIns="0" rIns="0" tIns="0" bIns="0">
-            <a:spAutoFit/>
-          </a:bodyPr>
-          <a:lstStyle/>
-          <a:p>
-            <a:pPr algn="l"/>
-            <a:r>
               <a:rPr sz="1600" b="1">
                 <a:solidFill>
                   <a:srgbClr val="C7000B"/>
@@ -16168,7 +15016,7 @@
       </p:sp>
       <p:graphicFrame>
         <p:nvGraphicFramePr>
-          <p:cNvPr id="18" name="Table 17"/>
+          <p:cNvPr id="7" name="Table 6"/>
           <p:cNvGraphicFramePr>
             <a:graphicFrameLocks noGrp="1"/>
           </p:cNvGraphicFramePr>
@@ -16199,7 +15047,7 @@
                       <a:r>
                         <a:rPr sz="1200" b="1">
                           <a:solidFill>
-                            <a:srgbClr val="FFFFFF"/>
+                            <a:srgbClr val="202020"/>
                           </a:solidFill>
                           <a:latin typeface="Microsoft YaHei"/>
                         </a:rPr>
@@ -16209,7 +15057,7 @@
                   </a:txBody>
                   <a:tcPr>
                     <a:solidFill>
-                      <a:srgbClr val="C7000B"/>
+                      <a:srgbClr val="F5F5F5"/>
                     </a:solidFill>
                   </a:tcPr>
                 </a:tc>
@@ -16222,7 +15070,7 @@
                       <a:r>
                         <a:rPr sz="1200" b="1">
                           <a:solidFill>
-                            <a:srgbClr val="FFFFFF"/>
+                            <a:srgbClr val="202020"/>
                           </a:solidFill>
                           <a:latin typeface="Microsoft YaHei"/>
                         </a:rPr>
@@ -16232,7 +15080,7 @@
                   </a:txBody>
                   <a:tcPr>
                     <a:solidFill>
-                      <a:srgbClr val="C7000B"/>
+                      <a:srgbClr val="F5F5F5"/>
                     </a:solidFill>
                   </a:tcPr>
                 </a:tc>
@@ -16245,7 +15093,7 @@
                       <a:r>
                         <a:rPr sz="1200" b="1">
                           <a:solidFill>
-                            <a:srgbClr val="FFFFFF"/>
+                            <a:srgbClr val="202020"/>
                           </a:solidFill>
                           <a:latin typeface="Microsoft YaHei"/>
                         </a:rPr>
@@ -16255,7 +15103,7 @@
                   </a:txBody>
                   <a:tcPr>
                     <a:solidFill>
-                      <a:srgbClr val="C7000B"/>
+                      <a:srgbClr val="F5F5F5"/>
                     </a:solidFill>
                   </a:tcPr>
                 </a:tc>
@@ -16834,7 +15682,7 @@
       </p:graphicFrame>
       <p:sp>
         <p:nvSpPr>
-          <p:cNvPr id="19" name="Rounded Rectangle 18"/>
+          <p:cNvPr id="8" name="Rounded Rectangle 7"/>
           <p:cNvSpPr/>
           <p:nvPr/>
         </p:nvSpPr>
@@ -16888,7 +15736,7 @@
       </p:sp>
       <p:sp>
         <p:nvSpPr>
-          <p:cNvPr id="20" name="TextBox 19"/>
+          <p:cNvPr id="9" name="TextBox 8"/>
           <p:cNvSpPr txBox="1"/>
           <p:nvPr/>
         </p:nvSpPr>
@@ -17434,7 +16282,7 @@
                       <a:r>
                         <a:rPr sz="1200" b="1">
                           <a:solidFill>
-                            <a:srgbClr val="FFFFFF"/>
+                            <a:srgbClr val="202020"/>
                           </a:solidFill>
                           <a:latin typeface="Microsoft YaHei"/>
                         </a:rPr>
@@ -17444,7 +16292,7 @@
                   </a:txBody>
                   <a:tcPr>
                     <a:solidFill>
-                      <a:srgbClr val="E53935"/>
+                      <a:srgbClr val="F5F5F5"/>
                     </a:solidFill>
                   </a:tcPr>
                 </a:tc>
@@ -17457,7 +16305,7 @@
                       <a:r>
                         <a:rPr sz="1200" b="1">
                           <a:solidFill>
-                            <a:srgbClr val="FFFFFF"/>
+                            <a:srgbClr val="202020"/>
                           </a:solidFill>
                           <a:latin typeface="Microsoft YaHei"/>
                         </a:rPr>
@@ -17467,7 +16315,7 @@
                   </a:txBody>
                   <a:tcPr>
                     <a:solidFill>
-                      <a:srgbClr val="E53935"/>
+                      <a:srgbClr val="F5F5F5"/>
                     </a:solidFill>
                   </a:tcPr>
                 </a:tc>
@@ -17735,7 +16583,7 @@
                       <a:r>
                         <a:rPr sz="1200" b="1">
                           <a:solidFill>
-                            <a:srgbClr val="FFFFFF"/>
+                            <a:srgbClr val="202020"/>
                           </a:solidFill>
                           <a:latin typeface="Microsoft YaHei"/>
                         </a:rPr>
@@ -17745,7 +16593,7 @@
                   </a:txBody>
                   <a:tcPr>
                     <a:solidFill>
-                      <a:srgbClr val="C7000B"/>
+                      <a:srgbClr val="F5F5F5"/>
                     </a:solidFill>
                   </a:tcPr>
                 </a:tc>
@@ -17758,7 +16606,7 @@
                       <a:r>
                         <a:rPr sz="1200" b="1">
                           <a:solidFill>
-                            <a:srgbClr val="FFFFFF"/>
+                            <a:srgbClr val="202020"/>
                           </a:solidFill>
                           <a:latin typeface="Microsoft YaHei"/>
                         </a:rPr>
@@ -17768,7 +16616,7 @@
                   </a:txBody>
                   <a:tcPr>
                     <a:solidFill>
-                      <a:srgbClr val="C7000B"/>
+                      <a:srgbClr val="F5F5F5"/>
                     </a:solidFill>
                   </a:tcPr>
                 </a:tc>
@@ -18238,7 +17086,7 @@
                       <a:r>
                         <a:rPr sz="1200" b="1">
                           <a:solidFill>
-                            <a:srgbClr val="FFFFFF"/>
+                            <a:srgbClr val="202020"/>
                           </a:solidFill>
                           <a:latin typeface="Microsoft YaHei"/>
                         </a:rPr>
@@ -18248,7 +17096,7 @@
                   </a:txBody>
                   <a:tcPr>
                     <a:solidFill>
-                      <a:srgbClr val="C7000B"/>
+                      <a:srgbClr val="F5F5F5"/>
                     </a:solidFill>
                   </a:tcPr>
                 </a:tc>
@@ -18261,7 +17109,7 @@
                       <a:r>
                         <a:rPr sz="1200" b="1">
                           <a:solidFill>
-                            <a:srgbClr val="FFFFFF"/>
+                            <a:srgbClr val="202020"/>
                           </a:solidFill>
                           <a:latin typeface="Microsoft YaHei"/>
                         </a:rPr>
@@ -18271,7 +17119,7 @@
                   </a:txBody>
                   <a:tcPr>
                     <a:solidFill>
-                      <a:srgbClr val="C7000B"/>
+                      <a:srgbClr val="F5F5F5"/>
                     </a:solidFill>
                   </a:tcPr>
                 </a:tc>
@@ -18284,7 +17132,7 @@
                       <a:r>
                         <a:rPr sz="1200" b="1">
                           <a:solidFill>
-                            <a:srgbClr val="FFFFFF"/>
+                            <a:srgbClr val="202020"/>
                           </a:solidFill>
                           <a:latin typeface="Microsoft YaHei"/>
                         </a:rPr>
@@ -18294,7 +17142,7 @@
                   </a:txBody>
                   <a:tcPr>
                     <a:solidFill>
-                      <a:srgbClr val="C7000B"/>
+                      <a:srgbClr val="F5F5F5"/>
                     </a:solidFill>
                   </a:tcPr>
                 </a:tc>
@@ -18726,7 +17574,7 @@
                       <a:r>
                         <a:rPr sz="1200" b="1">
                           <a:solidFill>
-                            <a:srgbClr val="FFFFFF"/>
+                            <a:srgbClr val="202020"/>
                           </a:solidFill>
                           <a:latin typeface="Microsoft YaHei"/>
                         </a:rPr>
@@ -18736,7 +17584,7 @@
                   </a:txBody>
                   <a:tcPr>
                     <a:solidFill>
-                      <a:srgbClr val="F57C00"/>
+                      <a:srgbClr val="F5F5F5"/>
                     </a:solidFill>
                   </a:tcPr>
                 </a:tc>
@@ -18749,7 +17597,7 @@
                       <a:r>
                         <a:rPr sz="1200" b="1">
                           <a:solidFill>
-                            <a:srgbClr val="FFFFFF"/>
+                            <a:srgbClr val="202020"/>
                           </a:solidFill>
                           <a:latin typeface="Microsoft YaHei"/>
                         </a:rPr>
@@ -18759,7 +17607,7 @@
                   </a:txBody>
                   <a:tcPr>
                     <a:solidFill>
-                      <a:srgbClr val="F57C00"/>
+                      <a:srgbClr val="F5F5F5"/>
                     </a:solidFill>
                   </a:tcPr>
                 </a:tc>
@@ -18772,7 +17620,7 @@
                       <a:r>
                         <a:rPr sz="1200" b="1">
                           <a:solidFill>
-                            <a:srgbClr val="FFFFFF"/>
+                            <a:srgbClr val="202020"/>
                           </a:solidFill>
                           <a:latin typeface="Microsoft YaHei"/>
                         </a:rPr>
@@ -18782,7 +17630,7 @@
                   </a:txBody>
                   <a:tcPr>
                     <a:solidFill>
-                      <a:srgbClr val="F57C00"/>
+                      <a:srgbClr val="F5F5F5"/>
                     </a:solidFill>
                   </a:tcPr>
                 </a:tc>

--- a/docs/dev_summary.pptx
+++ b/docs/dev_summary.pptx
@@ -8798,33 +8798,409 @@
           </a:p>
         </p:txBody>
       </p:sp>
-      <p:pic>
-        <p:nvPicPr>
-          <p:cNvPr id="5" name="Picture 4" descr="image.png"/>
-          <p:cNvPicPr>
-            <a:picLocks noChangeAspect="1"/>
-          </p:cNvPicPr>
-          <p:nvPr/>
-        </p:nvPicPr>
-        <p:blipFill>
-          <a:blip r:embed="rId2"/>
-          <a:stretch>
-            <a:fillRect/>
-          </a:stretch>
-        </p:blipFill>
-        <p:spPr>
-          <a:xfrm>
-            <a:off x="365760" y="1371600"/>
-            <a:ext cx="6035040" cy="3153308"/>
-          </a:xfrm>
-          <a:prstGeom prst="rect">
-            <a:avLst/>
-          </a:prstGeom>
-        </p:spPr>
-      </p:pic>
-      <p:sp>
-        <p:nvSpPr>
-          <p:cNvPr id="6" name="TextBox 5"/>
+      <p:sp>
+        <p:nvSpPr>
+          <p:cNvPr id="5" name="Rounded Rectangle 4"/>
+          <p:cNvSpPr/>
+          <p:nvPr/>
+        </p:nvSpPr>
+        <p:spPr>
+          <a:xfrm>
+            <a:off x="365760" y="1417320"/>
+            <a:ext cx="6035040" cy="713232"/>
+          </a:xfrm>
+          <a:prstGeom prst="roundRect">
+            <a:avLst>
+              <a:gd name="adj" fmla="val 6000"/>
+            </a:avLst>
+          </a:prstGeom>
+          <a:solidFill>
+            <a:srgbClr val="FEE2E2"/>
+          </a:solidFill>
+          <a:ln w="19050">
+            <a:solidFill>
+              <a:srgbClr val="DC2626"/>
+            </a:solidFill>
+          </a:ln>
+        </p:spPr>
+        <p:style>
+          <a:lnRef idx="1">
+            <a:schemeClr val="accent1"/>
+          </a:lnRef>
+          <a:fillRef idx="3">
+            <a:schemeClr val="accent1"/>
+          </a:fillRef>
+          <a:effectRef idx="2">
+            <a:schemeClr val="accent1"/>
+          </a:effectRef>
+          <a:fontRef idx="minor">
+            <a:schemeClr val="lt1"/>
+          </a:fontRef>
+        </p:style>
+        <p:txBody>
+          <a:bodyPr rtlCol="0" anchor="ctr" wrap="square" lIns="110000" rIns="110000" tIns="70000" bIns="70000"/>
+          <a:lstStyle/>
+          <a:p>
+            <a:pPr algn="l"/>
+            <a:r>
+              <a:rPr sz="1200" b="1">
+                <a:solidFill>
+                  <a:srgbClr val="DC2626"/>
+                </a:solidFill>
+                <a:latin typeface="Microsoft YaHei"/>
+              </a:rPr>
+              <a:t>L0  记忆层</a:t>
+            </a:r>
+          </a:p>
+          <a:p>
+            <a:pPr algn="l"/>
+            <a:r>
+              <a:rPr sz="900" b="0">
+                <a:solidFill>
+                  <a:srgbClr val="202020"/>
+                </a:solidFill>
+                <a:latin typeface="Microsoft YaHei"/>
+              </a:rPr>
+              <a:t>CLAUDE.md（主索引）+ docs/regressions.md（Bug 冷藏库）</a:t>
+            </a:r>
+          </a:p>
+          <a:p>
+            <a:pPr algn="l"/>
+            <a:r>
+              <a:rPr sz="900" b="0">
+                <a:solidFill>
+                  <a:srgbClr val="202020"/>
+                </a:solidFill>
+                <a:latin typeface="Microsoft YaHei"/>
+              </a:rPr>
+              <a:t>+ docs/playbooks/{feature-development, bug-triage, ci-failure-triage}.md</a:t>
+            </a:r>
+          </a:p>
+        </p:txBody>
+      </p:sp>
+      <p:sp>
+        <p:nvSpPr>
+          <p:cNvPr id="6" name="Rounded Rectangle 5"/>
+          <p:cNvSpPr/>
+          <p:nvPr/>
+        </p:nvSpPr>
+        <p:spPr>
+          <a:xfrm>
+            <a:off x="365760" y="2203704"/>
+            <a:ext cx="6035040" cy="713232"/>
+          </a:xfrm>
+          <a:prstGeom prst="roundRect">
+            <a:avLst>
+              <a:gd name="adj" fmla="val 6000"/>
+            </a:avLst>
+          </a:prstGeom>
+          <a:solidFill>
+            <a:srgbClr val="FED7AA"/>
+          </a:solidFill>
+          <a:ln w="19050">
+            <a:solidFill>
+              <a:srgbClr val="EA580C"/>
+            </a:solidFill>
+          </a:ln>
+        </p:spPr>
+        <p:style>
+          <a:lnRef idx="1">
+            <a:schemeClr val="accent1"/>
+          </a:lnRef>
+          <a:fillRef idx="3">
+            <a:schemeClr val="accent1"/>
+          </a:fillRef>
+          <a:effectRef idx="2">
+            <a:schemeClr val="accent1"/>
+          </a:effectRef>
+          <a:fontRef idx="minor">
+            <a:schemeClr val="lt1"/>
+          </a:fontRef>
+        </p:style>
+        <p:txBody>
+          <a:bodyPr rtlCol="0" anchor="ctr" wrap="square" lIns="110000" rIns="110000" tIns="70000" bIns="70000"/>
+          <a:lstStyle/>
+          <a:p>
+            <a:pPr algn="l"/>
+            <a:r>
+              <a:rPr sz="1200" b="1">
+                <a:solidFill>
+                  <a:srgbClr val="EA580C"/>
+                </a:solidFill>
+                <a:latin typeface="Microsoft YaHei"/>
+              </a:rPr>
+              <a:t>L1  权限 &amp; 钩子层</a:t>
+            </a:r>
+          </a:p>
+          <a:p>
+            <a:pPr algn="l"/>
+            <a:r>
+              <a:rPr sz="900" b="0">
+                <a:solidFill>
+                  <a:srgbClr val="202020"/>
+                </a:solidFill>
+                <a:latin typeface="Microsoft YaHei"/>
+              </a:rPr>
+              <a:t>.claude/settings.json + .claude/hooks/{SessionStart,PostToolUse,UserPromptSubmit}.sh</a:t>
+            </a:r>
+          </a:p>
+          <a:p>
+            <a:pPr algn="l"/>
+            <a:r>
+              <a:rPr sz="900" b="0">
+                <a:solidFill>
+                  <a:srgbClr val="202020"/>
+                </a:solidFill>
+                <a:latin typeface="Microsoft YaHei"/>
+              </a:rPr>
+              <a:t>+ .githooks/{pre-push, commit-msg}</a:t>
+            </a:r>
+          </a:p>
+        </p:txBody>
+      </p:sp>
+      <p:sp>
+        <p:nvSpPr>
+          <p:cNvPr id="7" name="Rounded Rectangle 6"/>
+          <p:cNvSpPr/>
+          <p:nvPr/>
+        </p:nvSpPr>
+        <p:spPr>
+          <a:xfrm>
+            <a:off x="365760" y="2990088"/>
+            <a:ext cx="6035040" cy="713232"/>
+          </a:xfrm>
+          <a:prstGeom prst="roundRect">
+            <a:avLst>
+              <a:gd name="adj" fmla="val 6000"/>
+            </a:avLst>
+          </a:prstGeom>
+          <a:solidFill>
+            <a:srgbClr val="FEF3C7"/>
+          </a:solidFill>
+          <a:ln w="19050">
+            <a:solidFill>
+              <a:srgbClr val="A16207"/>
+            </a:solidFill>
+          </a:ln>
+        </p:spPr>
+        <p:style>
+          <a:lnRef idx="1">
+            <a:schemeClr val="accent1"/>
+          </a:lnRef>
+          <a:fillRef idx="3">
+            <a:schemeClr val="accent1"/>
+          </a:fillRef>
+          <a:effectRef idx="2">
+            <a:schemeClr val="accent1"/>
+          </a:effectRef>
+          <a:fontRef idx="minor">
+            <a:schemeClr val="lt1"/>
+          </a:fontRef>
+        </p:style>
+        <p:txBody>
+          <a:bodyPr rtlCol="0" anchor="ctr" wrap="square" lIns="110000" rIns="110000" tIns="70000" bIns="70000"/>
+          <a:lstStyle/>
+          <a:p>
+            <a:pPr algn="l"/>
+            <a:r>
+              <a:rPr sz="1200" b="1">
+                <a:solidFill>
+                  <a:srgbClr val="A16207"/>
+                </a:solidFill>
+                <a:latin typeface="Microsoft YaHei"/>
+              </a:rPr>
+              <a:t>L2  命令 &amp; 子代理</a:t>
+            </a:r>
+          </a:p>
+          <a:p>
+            <a:pPr algn="l"/>
+            <a:r>
+              <a:rPr sz="900" b="0">
+                <a:solidFill>
+                  <a:srgbClr val="202020"/>
+                </a:solidFill>
+                <a:latin typeface="Microsoft YaHei"/>
+              </a:rPr>
+              <a:t>.claude/commands/{test-fast, ship-check, pre-commit-scan, trace-bug, review-pr}.md</a:t>
+            </a:r>
+          </a:p>
+          <a:p>
+            <a:pPr algn="l"/>
+            <a:r>
+              <a:rPr sz="900" b="0">
+                <a:solidFill>
+                  <a:srgbClr val="202020"/>
+                </a:solidFill>
+                <a:latin typeface="Microsoft YaHei"/>
+              </a:rPr>
+              <a:t>+ .claude/agents/{protocol-syncer, tdd-scaffolder, pr-reviewer}.md</a:t>
+            </a:r>
+          </a:p>
+        </p:txBody>
+      </p:sp>
+      <p:sp>
+        <p:nvSpPr>
+          <p:cNvPr id="8" name="Rounded Rectangle 7"/>
+          <p:cNvSpPr/>
+          <p:nvPr/>
+        </p:nvSpPr>
+        <p:spPr>
+          <a:xfrm>
+            <a:off x="365760" y="3776472"/>
+            <a:ext cx="6035040" cy="713232"/>
+          </a:xfrm>
+          <a:prstGeom prst="roundRect">
+            <a:avLst>
+              <a:gd name="adj" fmla="val 6000"/>
+            </a:avLst>
+          </a:prstGeom>
+          <a:solidFill>
+            <a:srgbClr val="BBF7D0"/>
+          </a:solidFill>
+          <a:ln w="19050">
+            <a:solidFill>
+              <a:srgbClr val="16A34A"/>
+            </a:solidFill>
+          </a:ln>
+        </p:spPr>
+        <p:style>
+          <a:lnRef idx="1">
+            <a:schemeClr val="accent1"/>
+          </a:lnRef>
+          <a:fillRef idx="3">
+            <a:schemeClr val="accent1"/>
+          </a:fillRef>
+          <a:effectRef idx="2">
+            <a:schemeClr val="accent1"/>
+          </a:effectRef>
+          <a:fontRef idx="minor">
+            <a:schemeClr val="lt1"/>
+          </a:fontRef>
+        </p:style>
+        <p:txBody>
+          <a:bodyPr rtlCol="0" anchor="ctr" wrap="square" lIns="110000" rIns="110000" tIns="70000" bIns="70000"/>
+          <a:lstStyle/>
+          <a:p>
+            <a:pPr algn="l"/>
+            <a:r>
+              <a:rPr sz="1200" b="1">
+                <a:solidFill>
+                  <a:srgbClr val="16A34A"/>
+                </a:solidFill>
+                <a:latin typeface="Microsoft YaHei"/>
+              </a:rPr>
+              <a:t>L3  TDD 强制层</a:t>
+            </a:r>
+          </a:p>
+          <a:p>
+            <a:pPr algn="l"/>
+            <a:r>
+              <a:rPr sz="900" b="0">
+                <a:solidFill>
+                  <a:srgbClr val="202020"/>
+                </a:solidFill>
+                <a:latin typeface="Microsoft YaHei"/>
+              </a:rPr>
+              <a:t>CardRulesTest（~30）+ ServerGameManagerTest（~25）</a:t>
+            </a:r>
+          </a:p>
+          <a:p>
+            <a:pPr algn="l"/>
+            <a:r>
+              <a:rPr sz="900" b="0">
+                <a:solidFill>
+                  <a:srgbClr val="202020"/>
+                </a:solidFill>
+                <a:latin typeface="Microsoft YaHei"/>
+              </a:rPr>
+              <a:t>+ GameMessageSerializationTest（协议 round-trip）+ CI tdd-gate job</a:t>
+            </a:r>
+          </a:p>
+        </p:txBody>
+      </p:sp>
+      <p:sp>
+        <p:nvSpPr>
+          <p:cNvPr id="9" name="Rounded Rectangle 8"/>
+          <p:cNvSpPr/>
+          <p:nvPr/>
+        </p:nvSpPr>
+        <p:spPr>
+          <a:xfrm>
+            <a:off x="365760" y="4562856"/>
+            <a:ext cx="6035040" cy="713232"/>
+          </a:xfrm>
+          <a:prstGeom prst="roundRect">
+            <a:avLst>
+              <a:gd name="adj" fmla="val 6000"/>
+            </a:avLst>
+          </a:prstGeom>
+          <a:solidFill>
+            <a:srgbClr val="BFDBFE"/>
+          </a:solidFill>
+          <a:ln w="19050">
+            <a:solidFill>
+              <a:srgbClr val="2563EB"/>
+            </a:solidFill>
+          </a:ln>
+        </p:spPr>
+        <p:style>
+          <a:lnRef idx="1">
+            <a:schemeClr val="accent1"/>
+          </a:lnRef>
+          <a:fillRef idx="3">
+            <a:schemeClr val="accent1"/>
+          </a:fillRef>
+          <a:effectRef idx="2">
+            <a:schemeClr val="accent1"/>
+          </a:effectRef>
+          <a:fontRef idx="minor">
+            <a:schemeClr val="lt1"/>
+          </a:fontRef>
+        </p:style>
+        <p:txBody>
+          <a:bodyPr rtlCol="0" anchor="ctr" wrap="square" lIns="110000" rIns="110000" tIns="70000" bIns="70000"/>
+          <a:lstStyle/>
+          <a:p>
+            <a:pPr algn="l"/>
+            <a:r>
+              <a:rPr sz="1200" b="1">
+                <a:solidFill>
+                  <a:srgbClr val="2563EB"/>
+                </a:solidFill>
+                <a:latin typeface="Microsoft YaHei"/>
+              </a:rPr>
+              <a:t>L4  跨 vendor 审查</a:t>
+            </a:r>
+          </a:p>
+          <a:p>
+            <a:pPr algn="l"/>
+            <a:r>
+              <a:rPr sz="900" b="0">
+                <a:solidFill>
+                  <a:srgbClr val="202020"/>
+                </a:solidFill>
+                <a:latin typeface="Microsoft YaHei"/>
+              </a:rPr>
+              <a:t>Codex bot（自动每 PR）+ pr-reviewer subagent（Opus 4.7 独立 context）</a:t>
+            </a:r>
+          </a:p>
+          <a:p>
+            <a:pPr algn="l"/>
+            <a:r>
+              <a:rPr sz="900" b="0">
+                <a:solidFill>
+                  <a:srgbClr val="202020"/>
+                </a:solidFill>
+                <a:latin typeface="Microsoft YaHei"/>
+              </a:rPr>
+              <a:t>+ 季度第二 vendor + 真机最后一关；4 关 PR 流程</a:t>
+            </a:r>
+          </a:p>
+        </p:txBody>
+      </p:sp>
+      <p:sp>
+        <p:nvSpPr>
+          <p:cNvPr id="10" name="TextBox 9"/>
           <p:cNvSpPr txBox="1"/>
           <p:nvPr/>
         </p:nvSpPr>
@@ -8859,7 +9235,7 @@
       </p:sp>
       <p:graphicFrame>
         <p:nvGraphicFramePr>
-          <p:cNvPr id="7" name="Table 6"/>
+          <p:cNvPr id="11" name="Table 10"/>
           <p:cNvGraphicFramePr>
             <a:graphicFrameLocks noGrp="1"/>
           </p:cNvGraphicFramePr>
@@ -9125,7 +9501,7 @@
       </p:graphicFrame>
       <p:sp>
         <p:nvSpPr>
-          <p:cNvPr id="8" name="Rounded Rectangle 7"/>
+          <p:cNvPr id="12" name="Rounded Rectangle 11"/>
           <p:cNvSpPr/>
           <p:nvPr/>
         </p:nvSpPr>
@@ -9179,7 +9555,7 @@
       </p:sp>
       <p:sp>
         <p:nvSpPr>
-          <p:cNvPr id="9" name="TextBox 8"/>
+          <p:cNvPr id="13" name="TextBox 12"/>
           <p:cNvSpPr txBox="1"/>
           <p:nvPr/>
         </p:nvSpPr>
@@ -10873,40 +11249,632 @@
           </a:p>
         </p:txBody>
       </p:sp>
-      <p:pic>
-        <p:nvPicPr>
-          <p:cNvPr id="4" name="Picture 3" descr="image.png"/>
-          <p:cNvPicPr>
-            <a:picLocks noChangeAspect="1"/>
-          </p:cNvPicPr>
-          <p:nvPr/>
-        </p:nvPicPr>
-        <p:blipFill>
-          <a:blip r:embed="rId2"/>
-          <a:stretch>
-            <a:fillRect/>
-          </a:stretch>
-        </p:blipFill>
-        <p:spPr>
-          <a:xfrm>
-            <a:off x="365760" y="914400"/>
-            <a:ext cx="5943600" cy="4005986"/>
-          </a:xfrm>
-          <a:prstGeom prst="rect">
+      <p:sp>
+        <p:nvSpPr>
+          <p:cNvPr id="4" name="Rounded Rectangle 3"/>
+          <p:cNvSpPr/>
+          <p:nvPr/>
+        </p:nvSpPr>
+        <p:spPr>
+          <a:xfrm>
+            <a:off x="274320" y="960120"/>
+            <a:ext cx="2948939" cy="868680"/>
+          </a:xfrm>
+          <a:prstGeom prst="roundRect">
+            <a:avLst>
+              <a:gd name="adj" fmla="val 6000"/>
+            </a:avLst>
+          </a:prstGeom>
+          <a:solidFill>
+            <a:srgbClr val="DCFCE7"/>
+          </a:solidFill>
+          <a:ln w="19050">
+            <a:solidFill>
+              <a:srgbClr val="16A34A"/>
+            </a:solidFill>
+          </a:ln>
+        </p:spPr>
+        <p:style>
+          <a:lnRef idx="1">
+            <a:schemeClr val="accent1"/>
+          </a:lnRef>
+          <a:fillRef idx="3">
+            <a:schemeClr val="accent1"/>
+          </a:fillRef>
+          <a:effectRef idx="2">
+            <a:schemeClr val="accent1"/>
+          </a:effectRef>
+          <a:fontRef idx="minor">
+            <a:schemeClr val="lt1"/>
+          </a:fontRef>
+        </p:style>
+        <p:txBody>
+          <a:bodyPr rtlCol="0" anchor="ctr" wrap="square" lIns="110000" rIns="110000" tIns="70000" bIns="70000"/>
+          <a:lstStyle/>
+          <a:p>
+            <a:pPr algn="l"/>
+            <a:r>
+              <a:rPr sz="1100" b="1">
+                <a:solidFill>
+                  <a:srgbClr val="16A34A"/>
+                </a:solidFill>
+                <a:latin typeface="Microsoft YaHei"/>
+              </a:rPr>
+              <a:t>:apps:android（Android 客户端，XML 布局）</a:t>
+            </a:r>
+          </a:p>
+          <a:p>
+            <a:pPr algn="l"/>
+            <a:r>
+              <a:rPr sz="900" b="0">
+                <a:solidFill>
+                  <a:srgbClr val="202020"/>
+                </a:solidFill>
+                <a:latin typeface="Microsoft YaHei"/>
+              </a:rPr>
+              <a:t>ui/ → GameActivity（单机）/ OnlineGameActivity（联网）</a:t>
+            </a:r>
+          </a:p>
+          <a:p>
+            <a:pPr algn="l"/>
+            <a:r>
+              <a:rPr sz="900" b="0">
+                <a:solidFill>
+                  <a:srgbClr val="202020"/>
+                </a:solidFill>
+                <a:latin typeface="Microsoft YaHei"/>
+              </a:rPr>
+              <a:t>network/ → NetworkManager / RoomManager / GameSyncManager</a:t>
+            </a:r>
+          </a:p>
+          <a:p>
+            <a:pPr algn="l"/>
+            <a:r>
+              <a:rPr sz="900" b="0">
+                <a:solidFill>
+                  <a:srgbClr val="202020"/>
+                </a:solidFill>
+                <a:latin typeface="Microsoft YaHei"/>
+              </a:rPr>
+              <a:t>engine/ → MultiplayerGameEngine（桥接 :shared GameEngine）</a:t>
+            </a:r>
+          </a:p>
+        </p:txBody>
+      </p:sp>
+      <p:sp>
+        <p:nvSpPr>
+          <p:cNvPr id="5" name="Rounded Rectangle 4"/>
+          <p:cNvSpPr/>
+          <p:nvPr/>
+        </p:nvSpPr>
+        <p:spPr>
+          <a:xfrm>
+            <a:off x="3360419" y="960120"/>
+            <a:ext cx="2948939" cy="868680"/>
+          </a:xfrm>
+          <a:prstGeom prst="roundRect">
+            <a:avLst>
+              <a:gd name="adj" fmla="val 6000"/>
+            </a:avLst>
+          </a:prstGeom>
+          <a:solidFill>
+            <a:srgbClr val="DBEAFE"/>
+          </a:solidFill>
+          <a:ln w="19050">
+            <a:solidFill>
+              <a:srgbClr val="2563EB"/>
+            </a:solidFill>
+          </a:ln>
+        </p:spPr>
+        <p:style>
+          <a:lnRef idx="1">
+            <a:schemeClr val="accent1"/>
+          </a:lnRef>
+          <a:fillRef idx="3">
+            <a:schemeClr val="accent1"/>
+          </a:fillRef>
+          <a:effectRef idx="2">
+            <a:schemeClr val="accent1"/>
+          </a:effectRef>
+          <a:fontRef idx="minor">
+            <a:schemeClr val="lt1"/>
+          </a:fontRef>
+        </p:style>
+        <p:txBody>
+          <a:bodyPr rtlCol="0" anchor="ctr" wrap="square" lIns="110000" rIns="110000" tIns="70000" bIns="70000"/>
+          <a:lstStyle/>
+          <a:p>
+            <a:pPr algn="l"/>
+            <a:r>
+              <a:rPr sz="1100" b="1">
+                <a:solidFill>
+                  <a:srgbClr val="2563EB"/>
+                </a:solidFill>
+                <a:latin typeface="Microsoft YaHei"/>
+              </a:rPr>
+              <a:t>:apps:web（Compose Multiplatform / wasmJs）</a:t>
+            </a:r>
+          </a:p>
+          <a:p>
+            <a:pPr algn="l"/>
+            <a:r>
+              <a:rPr sz="900" b="0">
+                <a:solidFill>
+                  <a:srgbClr val="202020"/>
+                </a:solidFill>
+                <a:latin typeface="Microsoft YaHei"/>
+              </a:rPr>
+              <a:t>AppViewModel → 统一状态机；Screen.{Home/Lobby/Room/Game/Settlement}</a:t>
+            </a:r>
+          </a:p>
+          <a:p>
+            <a:pPr algn="l"/>
+            <a:r>
+              <a:rPr sz="900" b="0">
+                <a:solidFill>
+                  <a:srgbClr val="202020"/>
+                </a:solidFill>
+                <a:latin typeface="Microsoft YaHei"/>
+              </a:rPr>
+              <a:t>SinglePlayerEngine → 包装 :shared GameEngine</a:t>
+            </a:r>
+          </a:p>
+          <a:p>
+            <a:pPr algn="l"/>
+            <a:r>
+              <a:rPr sz="900" b="0">
+                <a:solidFill>
+                  <a:srgbClr val="202020"/>
+                </a:solidFill>
+                <a:latin typeface="Microsoft YaHei"/>
+              </a:rPr>
+              <a:t>net/ → 浏览器原生 WebSocket（@JsFun）；NetworkClient 与 Android 同职</a:t>
+            </a:r>
+          </a:p>
+        </p:txBody>
+      </p:sp>
+      <p:sp>
+        <p:nvSpPr>
+          <p:cNvPr id="6" name="Rounded Rectangle 5"/>
+          <p:cNvSpPr/>
+          <p:nvPr/>
+        </p:nvSpPr>
+        <p:spPr>
+          <a:xfrm>
+            <a:off x="685800" y="1965960"/>
+            <a:ext cx="5212079" cy="1097280"/>
+          </a:xfrm>
+          <a:prstGeom prst="roundRect">
+            <a:avLst>
+              <a:gd name="adj" fmla="val 6000"/>
+            </a:avLst>
+          </a:prstGeom>
+          <a:solidFill>
+            <a:srgbClr val="FEF3C7"/>
+          </a:solidFill>
+          <a:ln w="19050">
+            <a:solidFill>
+              <a:srgbClr val="D97706"/>
+            </a:solidFill>
+          </a:ln>
+        </p:spPr>
+        <p:style>
+          <a:lnRef idx="1">
+            <a:schemeClr val="accent1"/>
+          </a:lnRef>
+          <a:fillRef idx="3">
+            <a:schemeClr val="accent1"/>
+          </a:fillRef>
+          <a:effectRef idx="2">
+            <a:schemeClr val="accent1"/>
+          </a:effectRef>
+          <a:fontRef idx="minor">
+            <a:schemeClr val="lt1"/>
+          </a:fontRef>
+        </p:style>
+        <p:txBody>
+          <a:bodyPr rtlCol="0" anchor="ctr" wrap="square" lIns="110000" rIns="110000" tIns="70000" bIns="70000"/>
+          <a:lstStyle/>
+          <a:p>
+            <a:pPr algn="l"/>
+            <a:r>
+              <a:rPr sz="1100" b="1">
+                <a:solidFill>
+                  <a:srgbClr val="D97706"/>
+                </a:solidFill>
+                <a:latin typeface="Microsoft YaHei"/>
+              </a:rPr>
+              <a:t>:shared（KMP：android + jvm + wasmJs）</a:t>
+            </a:r>
+          </a:p>
+          <a:p>
+            <a:pPr algn="l"/>
+            <a:r>
+              <a:rPr sz="900" b="0">
+                <a:solidFill>
+                  <a:srgbClr val="202020"/>
+                </a:solidFill>
+                <a:latin typeface="Microsoft YaHei"/>
+              </a:rPr>
+              <a:t>model/   Card · Deck · Player</a:t>
+            </a:r>
+          </a:p>
+          <a:p>
+            <a:pPr algn="l"/>
+            <a:r>
+              <a:rPr sz="900" b="0">
+                <a:solidFill>
+                  <a:srgbClr val="202020"/>
+                </a:solidFill>
+                <a:latin typeface="Microsoft YaHei"/>
+              </a:rPr>
+              <a:t>engine/  CardRules · SettlementCalculator · GameEngine</a:t>
+            </a:r>
+          </a:p>
+          <a:p>
+            <a:pPr algn="l"/>
+            <a:r>
+              <a:rPr sz="900" b="0">
+                <a:solidFill>
+                  <a:srgbClr val="202020"/>
+                </a:solidFill>
+                <a:latin typeface="Microsoft YaHei"/>
+              </a:rPr>
+              <a:t>ai/      AIPlayer</a:t>
+            </a:r>
+          </a:p>
+          <a:p>
+            <a:pPr algn="l"/>
+            <a:r>
+              <a:rPr sz="900" b="0">
+                <a:solidFill>
+                  <a:srgbClr val="202020"/>
+                </a:solidFill>
+                <a:latin typeface="Microsoft YaHei"/>
+              </a:rPr>
+              <a:t>network/ GameMessage（所有 sealed class + SerializedXxx DTO）</a:t>
+            </a:r>
+          </a:p>
+          <a:p>
+            <a:pPr algn="l"/>
+            <a:r>
+              <a:rPr sz="900" b="0">
+                <a:solidFill>
+                  <a:srgbClr val="202020"/>
+                </a:solidFill>
+                <a:latin typeface="Microsoft YaHei"/>
+              </a:rPr>
+              <a:t>commonTest/ CardRulesTest · SettlementCalculatorTest · GameMessageSerializationTest</a:t>
+            </a:r>
+          </a:p>
+        </p:txBody>
+      </p:sp>
+      <p:sp>
+        <p:nvSpPr>
+          <p:cNvPr id="7" name="Rounded Rectangle 6"/>
+          <p:cNvSpPr/>
+          <p:nvPr/>
+        </p:nvSpPr>
+        <p:spPr>
+          <a:xfrm>
+            <a:off x="685800" y="3246120"/>
+            <a:ext cx="5212079" cy="960120"/>
+          </a:xfrm>
+          <a:prstGeom prst="roundRect">
+            <a:avLst>
+              <a:gd name="adj" fmla="val 6000"/>
+            </a:avLst>
+          </a:prstGeom>
+          <a:solidFill>
+            <a:srgbClr val="FCE7F3"/>
+          </a:solidFill>
+          <a:ln w="19050">
+            <a:solidFill>
+              <a:srgbClr val="BE185D"/>
+            </a:solidFill>
+          </a:ln>
+        </p:spPr>
+        <p:style>
+          <a:lnRef idx="1">
+            <a:schemeClr val="accent1"/>
+          </a:lnRef>
+          <a:fillRef idx="3">
+            <a:schemeClr val="accent1"/>
+          </a:fillRef>
+          <a:effectRef idx="2">
+            <a:schemeClr val="accent1"/>
+          </a:effectRef>
+          <a:fontRef idx="minor">
+            <a:schemeClr val="lt1"/>
+          </a:fontRef>
+        </p:style>
+        <p:txBody>
+          <a:bodyPr rtlCol="0" anchor="ctr" wrap="square" lIns="110000" rIns="110000" tIns="70000" bIns="70000"/>
+          <a:lstStyle/>
+          <a:p>
+            <a:pPr algn="l"/>
+            <a:r>
+              <a:rPr sz="1100" b="1">
+                <a:solidFill>
+                  <a:srgbClr val="BE185D"/>
+                </a:solidFill>
+                <a:latin typeface="Microsoft YaHei"/>
+              </a:rPr>
+              <a:t>:server（Ktor + Netty，Gradle 子项目）</a:t>
+            </a:r>
+          </a:p>
+          <a:p>
+            <a:pPr algn="l"/>
+            <a:r>
+              <a:rPr sz="900" b="0">
+                <a:solidFill>
+                  <a:srgbClr val="202020"/>
+                </a:solidFill>
+                <a:latin typeface="Microsoft YaHei"/>
+              </a:rPr>
+              <a:t>Application.kt → ServerRoomManager（房间 / AI 填充）</a:t>
+            </a:r>
+          </a:p>
+          <a:p>
+            <a:pPr algn="l"/>
+            <a:r>
+              <a:rPr sz="900" b="0">
+                <a:solidFill>
+                  <a:srgbClr val="202020"/>
+                </a:solidFill>
+                <a:latin typeface="Microsoft YaHei"/>
+              </a:rPr>
+              <a:t>             └→ ServerGameManager（权威状态 / AI / 计时）</a:t>
+            </a:r>
+          </a:p>
+          <a:p>
+            <a:pPr algn="l"/>
+            <a:r>
+              <a:rPr sz="900" b="0">
+                <a:solidFill>
+                  <a:srgbClr val="202020"/>
+                </a:solidFill>
+                <a:latin typeface="Microsoft YaHei"/>
+              </a:rPr>
+              <a:t>• 每房间一把 Mutex 串行化所有状态修改</a:t>
+            </a:r>
+          </a:p>
+          <a:p>
+            <a:pPr algn="l"/>
+            <a:r>
+              <a:rPr sz="900" b="0">
+                <a:solidFill>
+                  <a:srgbClr val="202020"/>
+                </a:solidFill>
+                <a:latin typeface="Microsoft YaHei"/>
+              </a:rPr>
+              <a:t>• force-advance 兜底 + 三级 AI 回退 + 30s 超时</a:t>
+            </a:r>
+          </a:p>
+        </p:txBody>
+      </p:sp>
+      <p:sp>
+        <p:nvSpPr>
+          <p:cNvPr id="8" name="Rounded Rectangle 7"/>
+          <p:cNvSpPr/>
+          <p:nvPr/>
+        </p:nvSpPr>
+        <p:spPr>
+          <a:xfrm>
+            <a:off x="1632204" y="4389120"/>
+            <a:ext cx="3319272" cy="502920"/>
+          </a:xfrm>
+          <a:prstGeom prst="roundRect">
+            <a:avLst>
+              <a:gd name="adj" fmla="val 6000"/>
+            </a:avLst>
+          </a:prstGeom>
+          <a:solidFill>
+            <a:srgbClr val="FFFFFF"/>
+          </a:solidFill>
+          <a:ln w="12700">
+            <a:solidFill>
+              <a:srgbClr val="606060"/>
+            </a:solidFill>
+          </a:ln>
+        </p:spPr>
+        <p:style>
+          <a:lnRef idx="1">
+            <a:schemeClr val="accent1"/>
+          </a:lnRef>
+          <a:fillRef idx="3">
+            <a:schemeClr val="accent1"/>
+          </a:fillRef>
+          <a:effectRef idx="2">
+            <a:schemeClr val="accent1"/>
+          </a:effectRef>
+          <a:fontRef idx="minor">
+            <a:schemeClr val="lt1"/>
+          </a:fontRef>
+        </p:style>
+        <p:txBody>
+          <a:bodyPr rtlCol="0" anchor="ctr" wrap="square" lIns="110000" rIns="110000" tIns="70000" bIns="70000"/>
+          <a:lstStyle/>
+          <a:p>
+            <a:pPr algn="l"/>
+            <a:r>
+              <a:rPr sz="1000" b="1">
+                <a:solidFill>
+                  <a:srgbClr val="202020"/>
+                </a:solidFill>
+                <a:latin typeface="Microsoft YaHei"/>
+              </a:rPr>
+              <a:t>Caddy（80 / 443 TLS）→ 反代 127.0.0.1:8080</a:t>
+            </a:r>
+          </a:p>
+          <a:p>
+            <a:pPr algn="l"/>
+            <a:r>
+              <a:rPr sz="900" b="0">
+                <a:solidFill>
+                  <a:srgbClr val="606060"/>
+                </a:solidFill>
+                <a:latin typeface="Microsoft YaHei"/>
+              </a:rPr>
+              <a:t>公网 ws:// 或 wss:// /game</a:t>
+            </a:r>
+          </a:p>
+        </p:txBody>
+      </p:sp>
+      <p:cxnSp>
+        <p:nvCxnSpPr>
+          <p:cNvPr id="9" name="Connector 8"/>
+          <p:cNvCxnSpPr/>
+          <p:nvPr/>
+        </p:nvCxnSpPr>
+        <p:spPr>
+          <a:xfrm>
+            <a:off x="1896237" y="1828800"/>
+            <a:ext cx="353187" cy="137160"/>
+          </a:xfrm>
+          <a:prstGeom prst="line">
             <a:avLst/>
           </a:prstGeom>
-        </p:spPr>
-      </p:pic>
-      <p:sp>
-        <p:nvSpPr>
-          <p:cNvPr id="5" name="TextBox 4"/>
+          <a:ln w="19050">
+            <a:solidFill>
+              <a:srgbClr val="4B5563"/>
+            </a:solidFill>
+            <a:tailEnd type="triangle" w="med" len="med"/>
+          </a:ln>
+        </p:spPr>
+        <p:style>
+          <a:lnRef idx="2">
+            <a:schemeClr val="accent1"/>
+          </a:lnRef>
+          <a:fillRef idx="0">
+            <a:schemeClr val="accent1"/>
+          </a:fillRef>
+          <a:effectRef idx="1">
+            <a:schemeClr val="accent1"/>
+          </a:effectRef>
+          <a:fontRef idx="minor">
+            <a:schemeClr val="tx1"/>
+          </a:fontRef>
+        </p:style>
+      </p:cxnSp>
+      <p:cxnSp>
+        <p:nvCxnSpPr>
+          <p:cNvPr id="10" name="Connector 9"/>
+          <p:cNvCxnSpPr/>
+          <p:nvPr/>
+        </p:nvCxnSpPr>
+        <p:spPr>
+          <a:xfrm flipH="1">
+            <a:off x="4334255" y="1828800"/>
+            <a:ext cx="353187" cy="137160"/>
+          </a:xfrm>
+          <a:prstGeom prst="line">
+            <a:avLst/>
+          </a:prstGeom>
+          <a:ln w="19050">
+            <a:solidFill>
+              <a:srgbClr val="4B5563"/>
+            </a:solidFill>
+            <a:tailEnd type="triangle" w="med" len="med"/>
+          </a:ln>
+        </p:spPr>
+        <p:style>
+          <a:lnRef idx="2">
+            <a:schemeClr val="accent1"/>
+          </a:lnRef>
+          <a:fillRef idx="0">
+            <a:schemeClr val="accent1"/>
+          </a:fillRef>
+          <a:effectRef idx="1">
+            <a:schemeClr val="accent1"/>
+          </a:effectRef>
+          <a:fontRef idx="minor">
+            <a:schemeClr val="tx1"/>
+          </a:fontRef>
+        </p:style>
+      </p:cxnSp>
+      <p:cxnSp>
+        <p:nvCxnSpPr>
+          <p:cNvPr id="11" name="Connector 10"/>
+          <p:cNvCxnSpPr/>
+          <p:nvPr/>
+        </p:nvCxnSpPr>
+        <p:spPr>
+          <a:xfrm>
+            <a:off x="3291839" y="3063240"/>
+            <a:ext cx="0" cy="182880"/>
+          </a:xfrm>
+          <a:prstGeom prst="line">
+            <a:avLst/>
+          </a:prstGeom>
+          <a:ln w="19050">
+            <a:solidFill>
+              <a:srgbClr val="4B5563"/>
+            </a:solidFill>
+            <a:tailEnd type="triangle" w="med" len="med"/>
+          </a:ln>
+        </p:spPr>
+        <p:style>
+          <a:lnRef idx="2">
+            <a:schemeClr val="accent1"/>
+          </a:lnRef>
+          <a:fillRef idx="0">
+            <a:schemeClr val="accent1"/>
+          </a:fillRef>
+          <a:effectRef idx="1">
+            <a:schemeClr val="accent1"/>
+          </a:effectRef>
+          <a:fontRef idx="minor">
+            <a:schemeClr val="tx1"/>
+          </a:fontRef>
+        </p:style>
+      </p:cxnSp>
+      <p:cxnSp>
+        <p:nvCxnSpPr>
+          <p:cNvPr id="12" name="Connector 11"/>
+          <p:cNvCxnSpPr/>
+          <p:nvPr/>
+        </p:nvCxnSpPr>
+        <p:spPr>
+          <a:xfrm>
+            <a:off x="3291839" y="4206240"/>
+            <a:ext cx="0" cy="182880"/>
+          </a:xfrm>
+          <a:prstGeom prst="line">
+            <a:avLst/>
+          </a:prstGeom>
+          <a:ln w="19050">
+            <a:solidFill>
+              <a:srgbClr val="4B5563"/>
+            </a:solidFill>
+            <a:tailEnd type="triangle" w="med" len="med"/>
+          </a:ln>
+        </p:spPr>
+        <p:style>
+          <a:lnRef idx="2">
+            <a:schemeClr val="accent1"/>
+          </a:lnRef>
+          <a:fillRef idx="0">
+            <a:schemeClr val="accent1"/>
+          </a:fillRef>
+          <a:effectRef idx="1">
+            <a:schemeClr val="accent1"/>
+          </a:effectRef>
+          <a:fontRef idx="minor">
+            <a:schemeClr val="tx1"/>
+          </a:fontRef>
+        </p:style>
+      </p:cxnSp>
+      <p:sp>
+        <p:nvSpPr>
+          <p:cNvPr id="13" name="TextBox 12"/>
           <p:cNvSpPr txBox="1"/>
           <p:nvPr/>
         </p:nvSpPr>
         <p:spPr>
           <a:xfrm>
-            <a:off x="6400800" y="960120"/>
-            <a:ext cx="5486400" cy="365760"/>
+            <a:off x="320040" y="2423160"/>
+            <a:ext cx="640080" cy="164592"/>
           </a:xfrm>
           <a:prstGeom prst="rect">
             <a:avLst/>
@@ -10921,6 +11889,146 @@
           <a:p>
             <a:pPr algn="l"/>
             <a:r>
+              <a:rPr sz="800" b="0">
+                <a:solidFill>
+                  <a:srgbClr val="606060"/>
+                </a:solidFill>
+                <a:latin typeface="Microsoft YaHei"/>
+              </a:rPr>
+              <a:t>依赖 :shared</a:t>
+            </a:r>
+          </a:p>
+        </p:txBody>
+      </p:sp>
+      <p:sp>
+        <p:nvSpPr>
+          <p:cNvPr id="14" name="TextBox 13"/>
+          <p:cNvSpPr txBox="1"/>
+          <p:nvPr/>
+        </p:nvSpPr>
+        <p:spPr>
+          <a:xfrm>
+            <a:off x="5532120" y="2423160"/>
+            <a:ext cx="777240" cy="164592"/>
+          </a:xfrm>
+          <a:prstGeom prst="rect">
+            <a:avLst/>
+          </a:prstGeom>
+          <a:noFill/>
+        </p:spPr>
+        <p:txBody>
+          <a:bodyPr wrap="square" lIns="0" rIns="0" tIns="0" bIns="0">
+            <a:spAutoFit/>
+          </a:bodyPr>
+          <a:lstStyle/>
+          <a:p>
+            <a:pPr algn="l"/>
+            <a:r>
+              <a:rPr sz="800" b="0">
+                <a:solidFill>
+                  <a:srgbClr val="606060"/>
+                </a:solidFill>
+                <a:latin typeface="Microsoft YaHei"/>
+              </a:rPr>
+              <a:t>依赖 :shared</a:t>
+            </a:r>
+          </a:p>
+        </p:txBody>
+      </p:sp>
+      <p:sp>
+        <p:nvSpPr>
+          <p:cNvPr id="15" name="TextBox 14"/>
+          <p:cNvSpPr txBox="1"/>
+          <p:nvPr/>
+        </p:nvSpPr>
+        <p:spPr>
+          <a:xfrm>
+            <a:off x="3337559" y="3081528"/>
+            <a:ext cx="777240" cy="164592"/>
+          </a:xfrm>
+          <a:prstGeom prst="rect">
+            <a:avLst/>
+          </a:prstGeom>
+          <a:noFill/>
+        </p:spPr>
+        <p:txBody>
+          <a:bodyPr wrap="square" lIns="0" rIns="0" tIns="0" bIns="0">
+            <a:spAutoFit/>
+          </a:bodyPr>
+          <a:lstStyle/>
+          <a:p>
+            <a:pPr algn="l"/>
+            <a:r>
+              <a:rPr sz="800" b="0">
+                <a:solidFill>
+                  <a:srgbClr val="606060"/>
+                </a:solidFill>
+                <a:latin typeface="Microsoft YaHei"/>
+              </a:rPr>
+              <a:t>依赖 :shared</a:t>
+            </a:r>
+          </a:p>
+        </p:txBody>
+      </p:sp>
+      <p:sp>
+        <p:nvSpPr>
+          <p:cNvPr id="16" name="TextBox 15"/>
+          <p:cNvSpPr txBox="1"/>
+          <p:nvPr/>
+        </p:nvSpPr>
+        <p:spPr>
+          <a:xfrm>
+            <a:off x="3337559" y="4224528"/>
+            <a:ext cx="1280160" cy="164592"/>
+          </a:xfrm>
+          <a:prstGeom prst="rect">
+            <a:avLst/>
+          </a:prstGeom>
+          <a:noFill/>
+        </p:spPr>
+        <p:txBody>
+          <a:bodyPr wrap="square" lIns="0" rIns="0" tIns="0" bIns="0">
+            <a:spAutoFit/>
+          </a:bodyPr>
+          <a:lstStyle/>
+          <a:p>
+            <a:pPr algn="l"/>
+            <a:r>
+              <a:rPr sz="800" b="0">
+                <a:solidFill>
+                  <a:srgbClr val="606060"/>
+                </a:solidFill>
+                <a:latin typeface="Microsoft YaHei"/>
+              </a:rPr>
+              <a:t>WebSocket /game</a:t>
+            </a:r>
+          </a:p>
+        </p:txBody>
+      </p:sp>
+      <p:sp>
+        <p:nvSpPr>
+          <p:cNvPr id="17" name="TextBox 16"/>
+          <p:cNvSpPr txBox="1"/>
+          <p:nvPr/>
+        </p:nvSpPr>
+        <p:spPr>
+          <a:xfrm>
+            <a:off x="6400800" y="960120"/>
+            <a:ext cx="5486400" cy="365760"/>
+          </a:xfrm>
+          <a:prstGeom prst="rect">
+            <a:avLst/>
+          </a:prstGeom>
+          <a:noFill/>
+        </p:spPr>
+        <p:txBody>
+          <a:bodyPr wrap="square" lIns="0" rIns="0" tIns="0" bIns="0">
+            <a:spAutoFit/>
+          </a:bodyPr>
+          <a:lstStyle/>
+          <a:p>
+            <a:pPr algn="l"/>
+            <a:r>
               <a:rPr sz="1600" b="1">
                 <a:solidFill>
                   <a:srgbClr val="C7000B"/>
@@ -10934,7 +12042,7 @@
       </p:sp>
       <p:graphicFrame>
         <p:nvGraphicFramePr>
-          <p:cNvPr id="6" name="Table 5"/>
+          <p:cNvPr id="18" name="Table 17"/>
           <p:cNvGraphicFramePr>
             <a:graphicFrameLocks noGrp="1"/>
           </p:cNvGraphicFramePr>
@@ -11296,7 +12404,7 @@
       </p:graphicFrame>
       <p:sp>
         <p:nvSpPr>
-          <p:cNvPr id="7" name="TextBox 6"/>
+          <p:cNvPr id="19" name="TextBox 18"/>
           <p:cNvSpPr txBox="1"/>
           <p:nvPr/>
         </p:nvSpPr>
@@ -11331,7 +12439,7 @@
       </p:sp>
       <p:graphicFrame>
         <p:nvGraphicFramePr>
-          <p:cNvPr id="8" name="Table 7"/>
+          <p:cNvPr id="20" name="Table 19"/>
           <p:cNvGraphicFramePr>
             <a:graphicFrameLocks noGrp="1"/>
           </p:cNvGraphicFramePr>
@@ -11549,7 +12657,7 @@
       </p:graphicFrame>
       <p:sp>
         <p:nvSpPr>
-          <p:cNvPr id="9" name="Rounded Rectangle 8"/>
+          <p:cNvPr id="21" name="Rounded Rectangle 20"/>
           <p:cNvSpPr/>
           <p:nvPr/>
         </p:nvSpPr>
@@ -11603,7 +12711,7 @@
       </p:sp>
       <p:sp>
         <p:nvSpPr>
-          <p:cNvPr id="10" name="TextBox 9"/>
+          <p:cNvPr id="22" name="TextBox 21"/>
           <p:cNvSpPr txBox="1"/>
           <p:nvPr/>
         </p:nvSpPr>
@@ -14955,33 +16063,281 @@
           </a:p>
         </p:txBody>
       </p:sp>
-      <p:pic>
-        <p:nvPicPr>
-          <p:cNvPr id="5" name="Picture 4" descr="image.png"/>
-          <p:cNvPicPr>
-            <a:picLocks noChangeAspect="1"/>
-          </p:cNvPicPr>
-          <p:nvPr/>
-        </p:nvPicPr>
-        <p:blipFill>
-          <a:blip r:embed="rId2"/>
-          <a:stretch>
-            <a:fillRect/>
-          </a:stretch>
-        </p:blipFill>
-        <p:spPr>
-          <a:xfrm>
-            <a:off x="365760" y="1371600"/>
-            <a:ext cx="6035040" cy="2468331"/>
-          </a:xfrm>
-          <a:prstGeom prst="rect">
-            <a:avLst/>
-          </a:prstGeom>
-        </p:spPr>
-      </p:pic>
-      <p:sp>
-        <p:nvSpPr>
-          <p:cNvPr id="6" name="TextBox 5"/>
+      <p:sp>
+        <p:nvSpPr>
+          <p:cNvPr id="5" name="Rounded Rectangle 4"/>
+          <p:cNvSpPr/>
+          <p:nvPr/>
+        </p:nvSpPr>
+        <p:spPr>
+          <a:xfrm>
+            <a:off x="365760" y="1417320"/>
+            <a:ext cx="6035040" cy="713232"/>
+          </a:xfrm>
+          <a:prstGeom prst="roundRect">
+            <a:avLst>
+              <a:gd name="adj" fmla="val 6000"/>
+            </a:avLst>
+          </a:prstGeom>
+          <a:solidFill>
+            <a:srgbClr val="FEE2E2"/>
+          </a:solidFill>
+          <a:ln w="19050">
+            <a:solidFill>
+              <a:srgbClr val="DC2626"/>
+            </a:solidFill>
+          </a:ln>
+        </p:spPr>
+        <p:style>
+          <a:lnRef idx="1">
+            <a:schemeClr val="accent1"/>
+          </a:lnRef>
+          <a:fillRef idx="3">
+            <a:schemeClr val="accent1"/>
+          </a:fillRef>
+          <a:effectRef idx="2">
+            <a:schemeClr val="accent1"/>
+          </a:effectRef>
+          <a:fontRef idx="minor">
+            <a:schemeClr val="lt1"/>
+          </a:fontRef>
+        </p:style>
+        <p:txBody>
+          <a:bodyPr rtlCol="0" anchor="ctr" wrap="square" lIns="110000" rIns="110000" tIns="70000" bIns="70000"/>
+          <a:lstStyle/>
+          <a:p>
+            <a:pPr algn="l"/>
+            <a:r>
+              <a:rPr sz="1200" b="1">
+                <a:solidFill>
+                  <a:srgbClr val="DC2626"/>
+                </a:solidFill>
+                <a:latin typeface="Microsoft YaHei"/>
+              </a:rPr>
+              <a:t>Level 1　AI 执行人工指令</a:t>
+            </a:r>
+          </a:p>
+          <a:p>
+            <a:pPr algn="l"/>
+            <a:r>
+              <a:rPr sz="1000" b="0">
+                <a:solidFill>
+                  <a:srgbClr val="202020"/>
+                </a:solidFill>
+                <a:latin typeface="Microsoft YaHei"/>
+              </a:rPr>
+              <a:t>传统：人主导。人写完整指令 → AI 按指令完成 → 等待下一条。AI 沦为'会编程的工具'</a:t>
+            </a:r>
+          </a:p>
+        </p:txBody>
+      </p:sp>
+      <p:sp>
+        <p:nvSpPr>
+          <p:cNvPr id="6" name="Rounded Rectangle 5"/>
+          <p:cNvSpPr/>
+          <p:nvPr/>
+        </p:nvSpPr>
+        <p:spPr>
+          <a:xfrm>
+            <a:off x="365760" y="2203704"/>
+            <a:ext cx="6035040" cy="713232"/>
+          </a:xfrm>
+          <a:prstGeom prst="roundRect">
+            <a:avLst>
+              <a:gd name="adj" fmla="val 6000"/>
+            </a:avLst>
+          </a:prstGeom>
+          <a:solidFill>
+            <a:srgbClr val="FED7AA"/>
+          </a:solidFill>
+          <a:ln w="19050">
+            <a:solidFill>
+              <a:srgbClr val="EA580C"/>
+            </a:solidFill>
+          </a:ln>
+        </p:spPr>
+        <p:style>
+          <a:lnRef idx="1">
+            <a:schemeClr val="accent1"/>
+          </a:lnRef>
+          <a:fillRef idx="3">
+            <a:schemeClr val="accent1"/>
+          </a:fillRef>
+          <a:effectRef idx="2">
+            <a:schemeClr val="accent1"/>
+          </a:effectRef>
+          <a:fontRef idx="minor">
+            <a:schemeClr val="lt1"/>
+          </a:fontRef>
+        </p:style>
+        <p:txBody>
+          <a:bodyPr rtlCol="0" anchor="ctr" wrap="square" lIns="110000" rIns="110000" tIns="70000" bIns="70000"/>
+          <a:lstStyle/>
+          <a:p>
+            <a:pPr algn="l"/>
+            <a:r>
+              <a:rPr sz="1200" b="1">
+                <a:solidFill>
+                  <a:srgbClr val="EA580C"/>
+                </a:solidFill>
+                <a:latin typeface="Microsoft YaHei"/>
+              </a:rPr>
+              <a:t>Level 2　AI 提建议，人工决策</a:t>
+            </a:r>
+          </a:p>
+          <a:p>
+            <a:pPr algn="l"/>
+            <a:r>
+              <a:rPr sz="1000" b="0">
+                <a:solidFill>
+                  <a:srgbClr val="202020"/>
+                </a:solidFill>
+                <a:latin typeface="Microsoft YaHei"/>
+              </a:rPr>
+              <a:t>审稿：人审 AI。AI 完成后输出方案 + 备选 → 人工选择 / 调整 / 驳回</a:t>
+            </a:r>
+          </a:p>
+        </p:txBody>
+      </p:sp>
+      <p:sp>
+        <p:nvSpPr>
+          <p:cNvPr id="7" name="Rounded Rectangle 6"/>
+          <p:cNvSpPr/>
+          <p:nvPr/>
+        </p:nvSpPr>
+        <p:spPr>
+          <a:xfrm>
+            <a:off x="365760" y="2990088"/>
+            <a:ext cx="6035040" cy="713232"/>
+          </a:xfrm>
+          <a:prstGeom prst="roundRect">
+            <a:avLst>
+              <a:gd name="adj" fmla="val 6000"/>
+            </a:avLst>
+          </a:prstGeom>
+          <a:solidFill>
+            <a:srgbClr val="BBF7D0"/>
+          </a:solidFill>
+          <a:ln w="19050">
+            <a:solidFill>
+              <a:srgbClr val="16A34A"/>
+            </a:solidFill>
+          </a:ln>
+        </p:spPr>
+        <p:style>
+          <a:lnRef idx="1">
+            <a:schemeClr val="accent1"/>
+          </a:lnRef>
+          <a:fillRef idx="3">
+            <a:schemeClr val="accent1"/>
+          </a:fillRef>
+          <a:effectRef idx="2">
+            <a:schemeClr val="accent1"/>
+          </a:effectRef>
+          <a:fontRef idx="minor">
+            <a:schemeClr val="lt1"/>
+          </a:fontRef>
+        </p:style>
+        <p:txBody>
+          <a:bodyPr rtlCol="0" anchor="ctr" wrap="square" lIns="110000" rIns="110000" tIns="70000" bIns="70000"/>
+          <a:lstStyle/>
+          <a:p>
+            <a:pPr algn="l"/>
+            <a:r>
+              <a:rPr sz="1200" b="1">
+                <a:solidFill>
+                  <a:srgbClr val="16A34A"/>
+                </a:solidFill>
+                <a:latin typeface="Microsoft YaHei"/>
+              </a:rPr>
+              <a:t>Level 3　人工反馈现象，AI 自主排查 ← 本项目大量使用</a:t>
+            </a:r>
+          </a:p>
+          <a:p>
+            <a:pPr algn="l"/>
+            <a:r>
+              <a:rPr sz="1000" b="0">
+                <a:solidFill>
+                  <a:srgbClr val="202020"/>
+                </a:solidFill>
+                <a:latin typeface="Microsoft YaHei"/>
+              </a:rPr>
+              <a:t>人工：截图 + '还卡住' / '分数错了'  AI：看代码 + 推理 + 多轮自查 + 修复</a:t>
+            </a:r>
+          </a:p>
+        </p:txBody>
+      </p:sp>
+      <p:sp>
+        <p:nvSpPr>
+          <p:cNvPr id="8" name="Rounded Rectangle 7"/>
+          <p:cNvSpPr/>
+          <p:nvPr/>
+        </p:nvSpPr>
+        <p:spPr>
+          <a:xfrm>
+            <a:off x="365760" y="3776472"/>
+            <a:ext cx="6035040" cy="713232"/>
+          </a:xfrm>
+          <a:prstGeom prst="roundRect">
+            <a:avLst>
+              <a:gd name="adj" fmla="val 6000"/>
+            </a:avLst>
+          </a:prstGeom>
+          <a:solidFill>
+            <a:srgbClr val="BFDBFE"/>
+          </a:solidFill>
+          <a:ln w="19050">
+            <a:solidFill>
+              <a:srgbClr val="2563EB"/>
+            </a:solidFill>
+          </a:ln>
+        </p:spPr>
+        <p:style>
+          <a:lnRef idx="1">
+            <a:schemeClr val="accent1"/>
+          </a:lnRef>
+          <a:fillRef idx="3">
+            <a:schemeClr val="accent1"/>
+          </a:fillRef>
+          <a:effectRef idx="2">
+            <a:schemeClr val="accent1"/>
+          </a:effectRef>
+          <a:fontRef idx="minor">
+            <a:schemeClr val="lt1"/>
+          </a:fontRef>
+        </p:style>
+        <p:txBody>
+          <a:bodyPr rtlCol="0" anchor="ctr" wrap="square" lIns="110000" rIns="110000" tIns="70000" bIns="70000"/>
+          <a:lstStyle/>
+          <a:p>
+            <a:pPr algn="l"/>
+            <a:r>
+              <a:rPr sz="1200" b="1">
+                <a:solidFill>
+                  <a:srgbClr val="2563EB"/>
+                </a:solidFill>
+                <a:latin typeface="Microsoft YaHei"/>
+              </a:rPr>
+              <a:t>Level 4　AI 主动审查，人工验证 ← 最高效模式</a:t>
+            </a:r>
+          </a:p>
+          <a:p>
+            <a:pPr algn="l"/>
+            <a:r>
+              <a:rPr sz="1000" b="0">
+                <a:solidFill>
+                  <a:srgbClr val="202020"/>
+                </a:solidFill>
+                <a:latin typeface="Microsoft YaHei"/>
+              </a:rPr>
+              <a:t>人工：开放性指令（'自查自纠所有问题'）  AI：全量扫描 + 输出清单 + 修复  人工：真机验证</a:t>
+            </a:r>
+          </a:p>
+        </p:txBody>
+      </p:sp>
+      <p:sp>
+        <p:nvSpPr>
+          <p:cNvPr id="9" name="TextBox 8"/>
           <p:cNvSpPr txBox="1"/>
           <p:nvPr/>
         </p:nvSpPr>
@@ -15016,7 +16372,7 @@
       </p:sp>
       <p:graphicFrame>
         <p:nvGraphicFramePr>
-          <p:cNvPr id="7" name="Table 6"/>
+          <p:cNvPr id="10" name="Table 9"/>
           <p:cNvGraphicFramePr>
             <a:graphicFrameLocks noGrp="1"/>
           </p:cNvGraphicFramePr>
@@ -15682,7 +17038,7 @@
       </p:graphicFrame>
       <p:sp>
         <p:nvSpPr>
-          <p:cNvPr id="8" name="Rounded Rectangle 7"/>
+          <p:cNvPr id="11" name="Rounded Rectangle 10"/>
           <p:cNvSpPr/>
           <p:nvPr/>
         </p:nvSpPr>
@@ -15736,7 +17092,7 @@
       </p:sp>
       <p:sp>
         <p:nvSpPr>
-          <p:cNvPr id="9" name="TextBox 8"/>
+          <p:cNvPr id="12" name="TextBox 11"/>
           <p:cNvSpPr txBox="1"/>
           <p:nvPr/>
         </p:nvSpPr>

--- a/docs/dev_summary.pptx
+++ b/docs/dev_summary.pptx
@@ -3662,10 +3662,30 @@
                       </a:r>
                     </a:p>
                   </a:txBody>
-                  <a:tcPr>
+                  <a:tcPr anchor="ctr">
                     <a:solidFill>
                       <a:srgbClr val="F5F5F5"/>
                     </a:solidFill>
+                    <a:lnL w="6350" cap="flat" cmpd="sng" algn="ctr">
+                      <a:solidFill>
+                        <a:srgbClr val="BDBDBD"/>
+                      </a:solidFill>
+                    </a:lnL>
+                    <a:lnR w="6350" cap="flat" cmpd="sng" algn="ctr">
+                      <a:solidFill>
+                        <a:srgbClr val="BDBDBD"/>
+                      </a:solidFill>
+                    </a:lnR>
+                    <a:lnT w="6350" cap="flat" cmpd="sng" algn="ctr">
+                      <a:solidFill>
+                        <a:srgbClr val="BDBDBD"/>
+                      </a:solidFill>
+                    </a:lnT>
+                    <a:lnB w="6350" cap="flat" cmpd="sng" algn="ctr">
+                      <a:solidFill>
+                        <a:srgbClr val="BDBDBD"/>
+                      </a:solidFill>
+                    </a:lnB>
                   </a:tcPr>
                 </a:tc>
                 <a:tc>
@@ -3685,10 +3705,30 @@
                       </a:r>
                     </a:p>
                   </a:txBody>
-                  <a:tcPr>
+                  <a:tcPr anchor="ctr">
                     <a:solidFill>
                       <a:srgbClr val="F5F5F5"/>
                     </a:solidFill>
+                    <a:lnL w="6350" cap="flat" cmpd="sng" algn="ctr">
+                      <a:solidFill>
+                        <a:srgbClr val="BDBDBD"/>
+                      </a:solidFill>
+                    </a:lnL>
+                    <a:lnR w="6350" cap="flat" cmpd="sng" algn="ctr">
+                      <a:solidFill>
+                        <a:srgbClr val="BDBDBD"/>
+                      </a:solidFill>
+                    </a:lnR>
+                    <a:lnT w="6350" cap="flat" cmpd="sng" algn="ctr">
+                      <a:solidFill>
+                        <a:srgbClr val="BDBDBD"/>
+                      </a:solidFill>
+                    </a:lnT>
+                    <a:lnB w="6350" cap="flat" cmpd="sng" algn="ctr">
+                      <a:solidFill>
+                        <a:srgbClr val="BDBDBD"/>
+                      </a:solidFill>
+                    </a:lnB>
                   </a:tcPr>
                 </a:tc>
                 <a:tc>
@@ -3708,10 +3748,30 @@
                       </a:r>
                     </a:p>
                   </a:txBody>
-                  <a:tcPr>
+                  <a:tcPr anchor="ctr">
                     <a:solidFill>
                       <a:srgbClr val="F5F5F5"/>
                     </a:solidFill>
+                    <a:lnL w="6350" cap="flat" cmpd="sng" algn="ctr">
+                      <a:solidFill>
+                        <a:srgbClr val="BDBDBD"/>
+                      </a:solidFill>
+                    </a:lnL>
+                    <a:lnR w="6350" cap="flat" cmpd="sng" algn="ctr">
+                      <a:solidFill>
+                        <a:srgbClr val="BDBDBD"/>
+                      </a:solidFill>
+                    </a:lnR>
+                    <a:lnT w="6350" cap="flat" cmpd="sng" algn="ctr">
+                      <a:solidFill>
+                        <a:srgbClr val="BDBDBD"/>
+                      </a:solidFill>
+                    </a:lnT>
+                    <a:lnB w="6350" cap="flat" cmpd="sng" algn="ctr">
+                      <a:solidFill>
+                        <a:srgbClr val="BDBDBD"/>
+                      </a:solidFill>
+                    </a:lnB>
                   </a:tcPr>
                 </a:tc>
               </a:tr>
@@ -3733,10 +3793,30 @@
                       </a:r>
                     </a:p>
                   </a:txBody>
-                  <a:tcPr>
+                  <a:tcPr anchor="ctr">
                     <a:solidFill>
                       <a:srgbClr val="FFFFFF"/>
                     </a:solidFill>
+                    <a:lnL w="6350" cap="flat" cmpd="sng" algn="ctr">
+                      <a:solidFill>
+                        <a:srgbClr val="BDBDBD"/>
+                      </a:solidFill>
+                    </a:lnL>
+                    <a:lnR w="6350" cap="flat" cmpd="sng" algn="ctr">
+                      <a:solidFill>
+                        <a:srgbClr val="BDBDBD"/>
+                      </a:solidFill>
+                    </a:lnR>
+                    <a:lnT w="6350" cap="flat" cmpd="sng" algn="ctr">
+                      <a:solidFill>
+                        <a:srgbClr val="BDBDBD"/>
+                      </a:solidFill>
+                    </a:lnT>
+                    <a:lnB w="6350" cap="flat" cmpd="sng" algn="ctr">
+                      <a:solidFill>
+                        <a:srgbClr val="BDBDBD"/>
+                      </a:solidFill>
+                    </a:lnB>
                   </a:tcPr>
                 </a:tc>
                 <a:tc>
@@ -3756,10 +3836,30 @@
                       </a:r>
                     </a:p>
                   </a:txBody>
-                  <a:tcPr>
+                  <a:tcPr anchor="ctr">
                     <a:solidFill>
                       <a:srgbClr val="FFFFFF"/>
                     </a:solidFill>
+                    <a:lnL w="6350" cap="flat" cmpd="sng" algn="ctr">
+                      <a:solidFill>
+                        <a:srgbClr val="BDBDBD"/>
+                      </a:solidFill>
+                    </a:lnL>
+                    <a:lnR w="6350" cap="flat" cmpd="sng" algn="ctr">
+                      <a:solidFill>
+                        <a:srgbClr val="BDBDBD"/>
+                      </a:solidFill>
+                    </a:lnR>
+                    <a:lnT w="6350" cap="flat" cmpd="sng" algn="ctr">
+                      <a:solidFill>
+                        <a:srgbClr val="BDBDBD"/>
+                      </a:solidFill>
+                    </a:lnT>
+                    <a:lnB w="6350" cap="flat" cmpd="sng" algn="ctr">
+                      <a:solidFill>
+                        <a:srgbClr val="BDBDBD"/>
+                      </a:solidFill>
+                    </a:lnB>
                   </a:tcPr>
                 </a:tc>
                 <a:tc>
@@ -3779,10 +3879,30 @@
                       </a:r>
                     </a:p>
                   </a:txBody>
-                  <a:tcPr>
+                  <a:tcPr anchor="ctr">
                     <a:solidFill>
                       <a:srgbClr val="FFFFFF"/>
                     </a:solidFill>
+                    <a:lnL w="6350" cap="flat" cmpd="sng" algn="ctr">
+                      <a:solidFill>
+                        <a:srgbClr val="BDBDBD"/>
+                      </a:solidFill>
+                    </a:lnL>
+                    <a:lnR w="6350" cap="flat" cmpd="sng" algn="ctr">
+                      <a:solidFill>
+                        <a:srgbClr val="BDBDBD"/>
+                      </a:solidFill>
+                    </a:lnR>
+                    <a:lnT w="6350" cap="flat" cmpd="sng" algn="ctr">
+                      <a:solidFill>
+                        <a:srgbClr val="BDBDBD"/>
+                      </a:solidFill>
+                    </a:lnT>
+                    <a:lnB w="6350" cap="flat" cmpd="sng" algn="ctr">
+                      <a:solidFill>
+                        <a:srgbClr val="BDBDBD"/>
+                      </a:solidFill>
+                    </a:lnB>
                   </a:tcPr>
                 </a:tc>
               </a:tr>
@@ -3804,10 +3924,30 @@
                       </a:r>
                     </a:p>
                   </a:txBody>
-                  <a:tcPr>
-                    <a:solidFill>
-                      <a:srgbClr val="FFF1F2"/>
-                    </a:solidFill>
+                  <a:tcPr anchor="ctr">
+                    <a:solidFill>
+                      <a:srgbClr val="FFFFFF"/>
+                    </a:solidFill>
+                    <a:lnL w="6350" cap="flat" cmpd="sng" algn="ctr">
+                      <a:solidFill>
+                        <a:srgbClr val="BDBDBD"/>
+                      </a:solidFill>
+                    </a:lnL>
+                    <a:lnR w="6350" cap="flat" cmpd="sng" algn="ctr">
+                      <a:solidFill>
+                        <a:srgbClr val="BDBDBD"/>
+                      </a:solidFill>
+                    </a:lnR>
+                    <a:lnT w="6350" cap="flat" cmpd="sng" algn="ctr">
+                      <a:solidFill>
+                        <a:srgbClr val="BDBDBD"/>
+                      </a:solidFill>
+                    </a:lnT>
+                    <a:lnB w="6350" cap="flat" cmpd="sng" algn="ctr">
+                      <a:solidFill>
+                        <a:srgbClr val="BDBDBD"/>
+                      </a:solidFill>
+                    </a:lnB>
                   </a:tcPr>
                 </a:tc>
                 <a:tc>
@@ -3827,10 +3967,30 @@
                       </a:r>
                     </a:p>
                   </a:txBody>
-                  <a:tcPr>
-                    <a:solidFill>
-                      <a:srgbClr val="FFF1F2"/>
-                    </a:solidFill>
+                  <a:tcPr anchor="ctr">
+                    <a:solidFill>
+                      <a:srgbClr val="FFFFFF"/>
+                    </a:solidFill>
+                    <a:lnL w="6350" cap="flat" cmpd="sng" algn="ctr">
+                      <a:solidFill>
+                        <a:srgbClr val="BDBDBD"/>
+                      </a:solidFill>
+                    </a:lnL>
+                    <a:lnR w="6350" cap="flat" cmpd="sng" algn="ctr">
+                      <a:solidFill>
+                        <a:srgbClr val="BDBDBD"/>
+                      </a:solidFill>
+                    </a:lnR>
+                    <a:lnT w="6350" cap="flat" cmpd="sng" algn="ctr">
+                      <a:solidFill>
+                        <a:srgbClr val="BDBDBD"/>
+                      </a:solidFill>
+                    </a:lnT>
+                    <a:lnB w="6350" cap="flat" cmpd="sng" algn="ctr">
+                      <a:solidFill>
+                        <a:srgbClr val="BDBDBD"/>
+                      </a:solidFill>
+                    </a:lnB>
                   </a:tcPr>
                 </a:tc>
                 <a:tc>
@@ -3850,10 +4010,30 @@
                       </a:r>
                     </a:p>
                   </a:txBody>
-                  <a:tcPr>
-                    <a:solidFill>
-                      <a:srgbClr val="FFF1F2"/>
-                    </a:solidFill>
+                  <a:tcPr anchor="ctr">
+                    <a:solidFill>
+                      <a:srgbClr val="FFFFFF"/>
+                    </a:solidFill>
+                    <a:lnL w="6350" cap="flat" cmpd="sng" algn="ctr">
+                      <a:solidFill>
+                        <a:srgbClr val="BDBDBD"/>
+                      </a:solidFill>
+                    </a:lnL>
+                    <a:lnR w="6350" cap="flat" cmpd="sng" algn="ctr">
+                      <a:solidFill>
+                        <a:srgbClr val="BDBDBD"/>
+                      </a:solidFill>
+                    </a:lnR>
+                    <a:lnT w="6350" cap="flat" cmpd="sng" algn="ctr">
+                      <a:solidFill>
+                        <a:srgbClr val="BDBDBD"/>
+                      </a:solidFill>
+                    </a:lnT>
+                    <a:lnB w="6350" cap="flat" cmpd="sng" algn="ctr">
+                      <a:solidFill>
+                        <a:srgbClr val="BDBDBD"/>
+                      </a:solidFill>
+                    </a:lnB>
                   </a:tcPr>
                 </a:tc>
               </a:tr>
@@ -3875,10 +4055,30 @@
                       </a:r>
                     </a:p>
                   </a:txBody>
-                  <a:tcPr>
+                  <a:tcPr anchor="ctr">
                     <a:solidFill>
                       <a:srgbClr val="FFFFFF"/>
                     </a:solidFill>
+                    <a:lnL w="6350" cap="flat" cmpd="sng" algn="ctr">
+                      <a:solidFill>
+                        <a:srgbClr val="BDBDBD"/>
+                      </a:solidFill>
+                    </a:lnL>
+                    <a:lnR w="6350" cap="flat" cmpd="sng" algn="ctr">
+                      <a:solidFill>
+                        <a:srgbClr val="BDBDBD"/>
+                      </a:solidFill>
+                    </a:lnR>
+                    <a:lnT w="6350" cap="flat" cmpd="sng" algn="ctr">
+                      <a:solidFill>
+                        <a:srgbClr val="BDBDBD"/>
+                      </a:solidFill>
+                    </a:lnT>
+                    <a:lnB w="6350" cap="flat" cmpd="sng" algn="ctr">
+                      <a:solidFill>
+                        <a:srgbClr val="BDBDBD"/>
+                      </a:solidFill>
+                    </a:lnB>
                   </a:tcPr>
                 </a:tc>
                 <a:tc>
@@ -3898,10 +4098,30 @@
                       </a:r>
                     </a:p>
                   </a:txBody>
-                  <a:tcPr>
+                  <a:tcPr anchor="ctr">
                     <a:solidFill>
                       <a:srgbClr val="FFFFFF"/>
                     </a:solidFill>
+                    <a:lnL w="6350" cap="flat" cmpd="sng" algn="ctr">
+                      <a:solidFill>
+                        <a:srgbClr val="BDBDBD"/>
+                      </a:solidFill>
+                    </a:lnL>
+                    <a:lnR w="6350" cap="flat" cmpd="sng" algn="ctr">
+                      <a:solidFill>
+                        <a:srgbClr val="BDBDBD"/>
+                      </a:solidFill>
+                    </a:lnR>
+                    <a:lnT w="6350" cap="flat" cmpd="sng" algn="ctr">
+                      <a:solidFill>
+                        <a:srgbClr val="BDBDBD"/>
+                      </a:solidFill>
+                    </a:lnT>
+                    <a:lnB w="6350" cap="flat" cmpd="sng" algn="ctr">
+                      <a:solidFill>
+                        <a:srgbClr val="BDBDBD"/>
+                      </a:solidFill>
+                    </a:lnB>
                   </a:tcPr>
                 </a:tc>
                 <a:tc>
@@ -3921,10 +4141,30 @@
                       </a:r>
                     </a:p>
                   </a:txBody>
-                  <a:tcPr>
+                  <a:tcPr anchor="ctr">
                     <a:solidFill>
                       <a:srgbClr val="FFFFFF"/>
                     </a:solidFill>
+                    <a:lnL w="6350" cap="flat" cmpd="sng" algn="ctr">
+                      <a:solidFill>
+                        <a:srgbClr val="BDBDBD"/>
+                      </a:solidFill>
+                    </a:lnL>
+                    <a:lnR w="6350" cap="flat" cmpd="sng" algn="ctr">
+                      <a:solidFill>
+                        <a:srgbClr val="BDBDBD"/>
+                      </a:solidFill>
+                    </a:lnR>
+                    <a:lnT w="6350" cap="flat" cmpd="sng" algn="ctr">
+                      <a:solidFill>
+                        <a:srgbClr val="BDBDBD"/>
+                      </a:solidFill>
+                    </a:lnT>
+                    <a:lnB w="6350" cap="flat" cmpd="sng" algn="ctr">
+                      <a:solidFill>
+                        <a:srgbClr val="BDBDBD"/>
+                      </a:solidFill>
+                    </a:lnB>
                   </a:tcPr>
                 </a:tc>
               </a:tr>
@@ -4007,10 +4247,30 @@
                       </a:r>
                     </a:p>
                   </a:txBody>
-                  <a:tcPr>
+                  <a:tcPr anchor="ctr">
                     <a:solidFill>
                       <a:srgbClr val="F5F5F5"/>
                     </a:solidFill>
+                    <a:lnL w="6350" cap="flat" cmpd="sng" algn="ctr">
+                      <a:solidFill>
+                        <a:srgbClr val="BDBDBD"/>
+                      </a:solidFill>
+                    </a:lnL>
+                    <a:lnR w="6350" cap="flat" cmpd="sng" algn="ctr">
+                      <a:solidFill>
+                        <a:srgbClr val="BDBDBD"/>
+                      </a:solidFill>
+                    </a:lnR>
+                    <a:lnT w="6350" cap="flat" cmpd="sng" algn="ctr">
+                      <a:solidFill>
+                        <a:srgbClr val="BDBDBD"/>
+                      </a:solidFill>
+                    </a:lnT>
+                    <a:lnB w="6350" cap="flat" cmpd="sng" algn="ctr">
+                      <a:solidFill>
+                        <a:srgbClr val="BDBDBD"/>
+                      </a:solidFill>
+                    </a:lnB>
                   </a:tcPr>
                 </a:tc>
                 <a:tc>
@@ -4030,10 +4290,30 @@
                       </a:r>
                     </a:p>
                   </a:txBody>
-                  <a:tcPr>
+                  <a:tcPr anchor="ctr">
                     <a:solidFill>
                       <a:srgbClr val="F5F5F5"/>
                     </a:solidFill>
+                    <a:lnL w="6350" cap="flat" cmpd="sng" algn="ctr">
+                      <a:solidFill>
+                        <a:srgbClr val="BDBDBD"/>
+                      </a:solidFill>
+                    </a:lnL>
+                    <a:lnR w="6350" cap="flat" cmpd="sng" algn="ctr">
+                      <a:solidFill>
+                        <a:srgbClr val="BDBDBD"/>
+                      </a:solidFill>
+                    </a:lnR>
+                    <a:lnT w="6350" cap="flat" cmpd="sng" algn="ctr">
+                      <a:solidFill>
+                        <a:srgbClr val="BDBDBD"/>
+                      </a:solidFill>
+                    </a:lnT>
+                    <a:lnB w="6350" cap="flat" cmpd="sng" algn="ctr">
+                      <a:solidFill>
+                        <a:srgbClr val="BDBDBD"/>
+                      </a:solidFill>
+                    </a:lnB>
                   </a:tcPr>
                 </a:tc>
               </a:tr>
@@ -4055,10 +4335,30 @@
                       </a:r>
                     </a:p>
                   </a:txBody>
-                  <a:tcPr>
+                  <a:tcPr anchor="ctr">
                     <a:solidFill>
                       <a:srgbClr val="FFFFFF"/>
                     </a:solidFill>
+                    <a:lnL w="6350" cap="flat" cmpd="sng" algn="ctr">
+                      <a:solidFill>
+                        <a:srgbClr val="BDBDBD"/>
+                      </a:solidFill>
+                    </a:lnL>
+                    <a:lnR w="6350" cap="flat" cmpd="sng" algn="ctr">
+                      <a:solidFill>
+                        <a:srgbClr val="BDBDBD"/>
+                      </a:solidFill>
+                    </a:lnR>
+                    <a:lnT w="6350" cap="flat" cmpd="sng" algn="ctr">
+                      <a:solidFill>
+                        <a:srgbClr val="BDBDBD"/>
+                      </a:solidFill>
+                    </a:lnT>
+                    <a:lnB w="6350" cap="flat" cmpd="sng" algn="ctr">
+                      <a:solidFill>
+                        <a:srgbClr val="BDBDBD"/>
+                      </a:solidFill>
+                    </a:lnB>
                   </a:tcPr>
                 </a:tc>
                 <a:tc>
@@ -4078,10 +4378,30 @@
                       </a:r>
                     </a:p>
                   </a:txBody>
-                  <a:tcPr>
+                  <a:tcPr anchor="ctr">
                     <a:solidFill>
                       <a:srgbClr val="FFFFFF"/>
                     </a:solidFill>
+                    <a:lnL w="6350" cap="flat" cmpd="sng" algn="ctr">
+                      <a:solidFill>
+                        <a:srgbClr val="BDBDBD"/>
+                      </a:solidFill>
+                    </a:lnL>
+                    <a:lnR w="6350" cap="flat" cmpd="sng" algn="ctr">
+                      <a:solidFill>
+                        <a:srgbClr val="BDBDBD"/>
+                      </a:solidFill>
+                    </a:lnR>
+                    <a:lnT w="6350" cap="flat" cmpd="sng" algn="ctr">
+                      <a:solidFill>
+                        <a:srgbClr val="BDBDBD"/>
+                      </a:solidFill>
+                    </a:lnT>
+                    <a:lnB w="6350" cap="flat" cmpd="sng" algn="ctr">
+                      <a:solidFill>
+                        <a:srgbClr val="BDBDBD"/>
+                      </a:solidFill>
+                    </a:lnB>
                   </a:tcPr>
                 </a:tc>
               </a:tr>
@@ -4103,10 +4423,30 @@
                       </a:r>
                     </a:p>
                   </a:txBody>
-                  <a:tcPr>
-                    <a:solidFill>
-                      <a:srgbClr val="FFF1F2"/>
-                    </a:solidFill>
+                  <a:tcPr anchor="ctr">
+                    <a:solidFill>
+                      <a:srgbClr val="FFFFFF"/>
+                    </a:solidFill>
+                    <a:lnL w="6350" cap="flat" cmpd="sng" algn="ctr">
+                      <a:solidFill>
+                        <a:srgbClr val="BDBDBD"/>
+                      </a:solidFill>
+                    </a:lnL>
+                    <a:lnR w="6350" cap="flat" cmpd="sng" algn="ctr">
+                      <a:solidFill>
+                        <a:srgbClr val="BDBDBD"/>
+                      </a:solidFill>
+                    </a:lnR>
+                    <a:lnT w="6350" cap="flat" cmpd="sng" algn="ctr">
+                      <a:solidFill>
+                        <a:srgbClr val="BDBDBD"/>
+                      </a:solidFill>
+                    </a:lnT>
+                    <a:lnB w="6350" cap="flat" cmpd="sng" algn="ctr">
+                      <a:solidFill>
+                        <a:srgbClr val="BDBDBD"/>
+                      </a:solidFill>
+                    </a:lnB>
                   </a:tcPr>
                 </a:tc>
                 <a:tc>
@@ -4126,10 +4466,30 @@
                       </a:r>
                     </a:p>
                   </a:txBody>
-                  <a:tcPr>
-                    <a:solidFill>
-                      <a:srgbClr val="FFF1F2"/>
-                    </a:solidFill>
+                  <a:tcPr anchor="ctr">
+                    <a:solidFill>
+                      <a:srgbClr val="FFFFFF"/>
+                    </a:solidFill>
+                    <a:lnL w="6350" cap="flat" cmpd="sng" algn="ctr">
+                      <a:solidFill>
+                        <a:srgbClr val="BDBDBD"/>
+                      </a:solidFill>
+                    </a:lnL>
+                    <a:lnR w="6350" cap="flat" cmpd="sng" algn="ctr">
+                      <a:solidFill>
+                        <a:srgbClr val="BDBDBD"/>
+                      </a:solidFill>
+                    </a:lnR>
+                    <a:lnT w="6350" cap="flat" cmpd="sng" algn="ctr">
+                      <a:solidFill>
+                        <a:srgbClr val="BDBDBD"/>
+                      </a:solidFill>
+                    </a:lnT>
+                    <a:lnB w="6350" cap="flat" cmpd="sng" algn="ctr">
+                      <a:solidFill>
+                        <a:srgbClr val="BDBDBD"/>
+                      </a:solidFill>
+                    </a:lnB>
                   </a:tcPr>
                 </a:tc>
               </a:tr>
@@ -4151,10 +4511,30 @@
                       </a:r>
                     </a:p>
                   </a:txBody>
-                  <a:tcPr>
+                  <a:tcPr anchor="ctr">
                     <a:solidFill>
                       <a:srgbClr val="FFFFFF"/>
                     </a:solidFill>
+                    <a:lnL w="6350" cap="flat" cmpd="sng" algn="ctr">
+                      <a:solidFill>
+                        <a:srgbClr val="BDBDBD"/>
+                      </a:solidFill>
+                    </a:lnL>
+                    <a:lnR w="6350" cap="flat" cmpd="sng" algn="ctr">
+                      <a:solidFill>
+                        <a:srgbClr val="BDBDBD"/>
+                      </a:solidFill>
+                    </a:lnR>
+                    <a:lnT w="6350" cap="flat" cmpd="sng" algn="ctr">
+                      <a:solidFill>
+                        <a:srgbClr val="BDBDBD"/>
+                      </a:solidFill>
+                    </a:lnT>
+                    <a:lnB w="6350" cap="flat" cmpd="sng" algn="ctr">
+                      <a:solidFill>
+                        <a:srgbClr val="BDBDBD"/>
+                      </a:solidFill>
+                    </a:lnB>
                   </a:tcPr>
                 </a:tc>
                 <a:tc>
@@ -4174,10 +4554,30 @@
                       </a:r>
                     </a:p>
                   </a:txBody>
-                  <a:tcPr>
+                  <a:tcPr anchor="ctr">
                     <a:solidFill>
                       <a:srgbClr val="FFFFFF"/>
                     </a:solidFill>
+                    <a:lnL w="6350" cap="flat" cmpd="sng" algn="ctr">
+                      <a:solidFill>
+                        <a:srgbClr val="BDBDBD"/>
+                      </a:solidFill>
+                    </a:lnL>
+                    <a:lnR w="6350" cap="flat" cmpd="sng" algn="ctr">
+                      <a:solidFill>
+                        <a:srgbClr val="BDBDBD"/>
+                      </a:solidFill>
+                    </a:lnR>
+                    <a:lnT w="6350" cap="flat" cmpd="sng" algn="ctr">
+                      <a:solidFill>
+                        <a:srgbClr val="BDBDBD"/>
+                      </a:solidFill>
+                    </a:lnT>
+                    <a:lnB w="6350" cap="flat" cmpd="sng" algn="ctr">
+                      <a:solidFill>
+                        <a:srgbClr val="BDBDBD"/>
+                      </a:solidFill>
+                    </a:lnB>
                   </a:tcPr>
                 </a:tc>
               </a:tr>
@@ -4237,11 +4637,11 @@
             </a:avLst>
           </a:prstGeom>
           <a:solidFill>
-            <a:srgbClr val="FEE2E2"/>
+            <a:srgbClr val="FAFAFA"/>
           </a:solidFill>
           <a:ln w="19050">
             <a:solidFill>
-              <a:srgbClr val="DC2626"/>
+              <a:srgbClr val="BDBDBD"/>
             </a:solidFill>
           </a:ln>
         </p:spPr>
@@ -4267,7 +4667,7 @@
             <a:r>
               <a:rPr sz="1200" b="1">
                 <a:solidFill>
-                  <a:srgbClr val="DC2626"/>
+                  <a:srgbClr val="C7000B"/>
                 </a:solidFill>
                 <a:latin typeface="Microsoft YaHei"/>
               </a:rPr>
@@ -4317,11 +4717,11 @@
             </a:avLst>
           </a:prstGeom>
           <a:solidFill>
-            <a:srgbClr val="FED7AA"/>
+            <a:srgbClr val="FAFAFA"/>
           </a:solidFill>
           <a:ln w="19050">
             <a:solidFill>
-              <a:srgbClr val="EA580C"/>
+              <a:srgbClr val="BDBDBD"/>
             </a:solidFill>
           </a:ln>
         </p:spPr>
@@ -4347,7 +4747,7 @@
             <a:r>
               <a:rPr sz="1200" b="1">
                 <a:solidFill>
-                  <a:srgbClr val="EA580C"/>
+                  <a:srgbClr val="C7000B"/>
                 </a:solidFill>
                 <a:latin typeface="Microsoft YaHei"/>
               </a:rPr>
@@ -4397,11 +4797,11 @@
             </a:avLst>
           </a:prstGeom>
           <a:solidFill>
-            <a:srgbClr val="FEF3C7"/>
+            <a:srgbClr val="FAFAFA"/>
           </a:solidFill>
           <a:ln w="19050">
             <a:solidFill>
-              <a:srgbClr val="A16207"/>
+              <a:srgbClr val="BDBDBD"/>
             </a:solidFill>
           </a:ln>
         </p:spPr>
@@ -4427,7 +4827,7 @@
             <a:r>
               <a:rPr sz="1200" b="1">
                 <a:solidFill>
-                  <a:srgbClr val="A16207"/>
+                  <a:srgbClr val="C7000B"/>
                 </a:solidFill>
                 <a:latin typeface="Microsoft YaHei"/>
               </a:rPr>
@@ -4477,11 +4877,11 @@
             </a:avLst>
           </a:prstGeom>
           <a:solidFill>
-            <a:srgbClr val="BBF7D0"/>
+            <a:srgbClr val="FAFAFA"/>
           </a:solidFill>
           <a:ln w="19050">
             <a:solidFill>
-              <a:srgbClr val="16A34A"/>
+              <a:srgbClr val="BDBDBD"/>
             </a:solidFill>
           </a:ln>
         </p:spPr>
@@ -4507,7 +4907,7 @@
             <a:r>
               <a:rPr sz="1200" b="1">
                 <a:solidFill>
-                  <a:srgbClr val="16A34A"/>
+                  <a:srgbClr val="C7000B"/>
                 </a:solidFill>
                 <a:latin typeface="Microsoft YaHei"/>
               </a:rPr>
@@ -4557,11 +4957,11 @@
             </a:avLst>
           </a:prstGeom>
           <a:solidFill>
-            <a:srgbClr val="BFDBFE"/>
+            <a:srgbClr val="FAFAFA"/>
           </a:solidFill>
           <a:ln w="19050">
             <a:solidFill>
-              <a:srgbClr val="2563EB"/>
+              <a:srgbClr val="BDBDBD"/>
             </a:solidFill>
           </a:ln>
         </p:spPr>
@@ -4587,7 +4987,7 @@
             <a:r>
               <a:rPr sz="1200" b="1">
                 <a:solidFill>
-                  <a:srgbClr val="2563EB"/>
+                  <a:srgbClr val="C7000B"/>
                 </a:solidFill>
                 <a:latin typeface="Microsoft YaHei"/>
               </a:rPr>
@@ -4635,7 +5035,7 @@
             <a:avLst/>
           </a:prstGeom>
           <a:solidFill>
-            <a:srgbClr val="C7000B"/>
+            <a:srgbClr val="FAFAFA"/>
           </a:solidFill>
           <a:ln>
             <a:solidFill>
@@ -4665,7 +5065,7 @@
             <a:r>
               <a:rPr sz="1400" b="1">
                 <a:solidFill>
-                  <a:srgbClr val="FFFFFF"/>
+                  <a:srgbClr val="C7000B"/>
                 </a:solidFill>
                 <a:latin typeface="Microsoft YaHei"/>
               </a:rPr>
@@ -4915,10 +5315,30 @@
                       </a:r>
                     </a:p>
                   </a:txBody>
-                  <a:tcPr>
+                  <a:tcPr anchor="ctr">
                     <a:solidFill>
                       <a:srgbClr val="F5F5F5"/>
                     </a:solidFill>
+                    <a:lnL w="6350" cap="flat" cmpd="sng" algn="ctr">
+                      <a:solidFill>
+                        <a:srgbClr val="BDBDBD"/>
+                      </a:solidFill>
+                    </a:lnL>
+                    <a:lnR w="6350" cap="flat" cmpd="sng" algn="ctr">
+                      <a:solidFill>
+                        <a:srgbClr val="BDBDBD"/>
+                      </a:solidFill>
+                    </a:lnR>
+                    <a:lnT w="6350" cap="flat" cmpd="sng" algn="ctr">
+                      <a:solidFill>
+                        <a:srgbClr val="BDBDBD"/>
+                      </a:solidFill>
+                    </a:lnT>
+                    <a:lnB w="6350" cap="flat" cmpd="sng" algn="ctr">
+                      <a:solidFill>
+                        <a:srgbClr val="BDBDBD"/>
+                      </a:solidFill>
+                    </a:lnB>
                   </a:tcPr>
                 </a:tc>
                 <a:tc>
@@ -4938,10 +5358,30 @@
                       </a:r>
                     </a:p>
                   </a:txBody>
-                  <a:tcPr>
+                  <a:tcPr anchor="ctr">
                     <a:solidFill>
                       <a:srgbClr val="F5F5F5"/>
                     </a:solidFill>
+                    <a:lnL w="6350" cap="flat" cmpd="sng" algn="ctr">
+                      <a:solidFill>
+                        <a:srgbClr val="BDBDBD"/>
+                      </a:solidFill>
+                    </a:lnL>
+                    <a:lnR w="6350" cap="flat" cmpd="sng" algn="ctr">
+                      <a:solidFill>
+                        <a:srgbClr val="BDBDBD"/>
+                      </a:solidFill>
+                    </a:lnR>
+                    <a:lnT w="6350" cap="flat" cmpd="sng" algn="ctr">
+                      <a:solidFill>
+                        <a:srgbClr val="BDBDBD"/>
+                      </a:solidFill>
+                    </a:lnT>
+                    <a:lnB w="6350" cap="flat" cmpd="sng" algn="ctr">
+                      <a:solidFill>
+                        <a:srgbClr val="BDBDBD"/>
+                      </a:solidFill>
+                    </a:lnB>
                   </a:tcPr>
                 </a:tc>
               </a:tr>
@@ -4963,10 +5403,30 @@
                       </a:r>
                     </a:p>
                   </a:txBody>
-                  <a:tcPr>
+                  <a:tcPr anchor="ctr">
                     <a:solidFill>
                       <a:srgbClr val="FFFFFF"/>
                     </a:solidFill>
+                    <a:lnL w="6350" cap="flat" cmpd="sng" algn="ctr">
+                      <a:solidFill>
+                        <a:srgbClr val="BDBDBD"/>
+                      </a:solidFill>
+                    </a:lnL>
+                    <a:lnR w="6350" cap="flat" cmpd="sng" algn="ctr">
+                      <a:solidFill>
+                        <a:srgbClr val="BDBDBD"/>
+                      </a:solidFill>
+                    </a:lnR>
+                    <a:lnT w="6350" cap="flat" cmpd="sng" algn="ctr">
+                      <a:solidFill>
+                        <a:srgbClr val="BDBDBD"/>
+                      </a:solidFill>
+                    </a:lnT>
+                    <a:lnB w="6350" cap="flat" cmpd="sng" algn="ctr">
+                      <a:solidFill>
+                        <a:srgbClr val="BDBDBD"/>
+                      </a:solidFill>
+                    </a:lnB>
                   </a:tcPr>
                 </a:tc>
                 <a:tc>
@@ -4986,10 +5446,30 @@
                       </a:r>
                     </a:p>
                   </a:txBody>
-                  <a:tcPr>
+                  <a:tcPr anchor="ctr">
                     <a:solidFill>
                       <a:srgbClr val="FFFFFF"/>
                     </a:solidFill>
+                    <a:lnL w="6350" cap="flat" cmpd="sng" algn="ctr">
+                      <a:solidFill>
+                        <a:srgbClr val="BDBDBD"/>
+                      </a:solidFill>
+                    </a:lnL>
+                    <a:lnR w="6350" cap="flat" cmpd="sng" algn="ctr">
+                      <a:solidFill>
+                        <a:srgbClr val="BDBDBD"/>
+                      </a:solidFill>
+                    </a:lnR>
+                    <a:lnT w="6350" cap="flat" cmpd="sng" algn="ctr">
+                      <a:solidFill>
+                        <a:srgbClr val="BDBDBD"/>
+                      </a:solidFill>
+                    </a:lnT>
+                    <a:lnB w="6350" cap="flat" cmpd="sng" algn="ctr">
+                      <a:solidFill>
+                        <a:srgbClr val="BDBDBD"/>
+                      </a:solidFill>
+                    </a:lnB>
                   </a:tcPr>
                 </a:tc>
               </a:tr>
@@ -5011,10 +5491,30 @@
                       </a:r>
                     </a:p>
                   </a:txBody>
-                  <a:tcPr>
-                    <a:solidFill>
-                      <a:srgbClr val="FFF1F2"/>
-                    </a:solidFill>
+                  <a:tcPr anchor="ctr">
+                    <a:solidFill>
+                      <a:srgbClr val="FFFFFF"/>
+                    </a:solidFill>
+                    <a:lnL w="6350" cap="flat" cmpd="sng" algn="ctr">
+                      <a:solidFill>
+                        <a:srgbClr val="BDBDBD"/>
+                      </a:solidFill>
+                    </a:lnL>
+                    <a:lnR w="6350" cap="flat" cmpd="sng" algn="ctr">
+                      <a:solidFill>
+                        <a:srgbClr val="BDBDBD"/>
+                      </a:solidFill>
+                    </a:lnR>
+                    <a:lnT w="6350" cap="flat" cmpd="sng" algn="ctr">
+                      <a:solidFill>
+                        <a:srgbClr val="BDBDBD"/>
+                      </a:solidFill>
+                    </a:lnT>
+                    <a:lnB w="6350" cap="flat" cmpd="sng" algn="ctr">
+                      <a:solidFill>
+                        <a:srgbClr val="BDBDBD"/>
+                      </a:solidFill>
+                    </a:lnB>
                   </a:tcPr>
                 </a:tc>
                 <a:tc>
@@ -5034,10 +5534,30 @@
                       </a:r>
                     </a:p>
                   </a:txBody>
-                  <a:tcPr>
-                    <a:solidFill>
-                      <a:srgbClr val="FFF1F2"/>
-                    </a:solidFill>
+                  <a:tcPr anchor="ctr">
+                    <a:solidFill>
+                      <a:srgbClr val="FFFFFF"/>
+                    </a:solidFill>
+                    <a:lnL w="6350" cap="flat" cmpd="sng" algn="ctr">
+                      <a:solidFill>
+                        <a:srgbClr val="BDBDBD"/>
+                      </a:solidFill>
+                    </a:lnL>
+                    <a:lnR w="6350" cap="flat" cmpd="sng" algn="ctr">
+                      <a:solidFill>
+                        <a:srgbClr val="BDBDBD"/>
+                      </a:solidFill>
+                    </a:lnR>
+                    <a:lnT w="6350" cap="flat" cmpd="sng" algn="ctr">
+                      <a:solidFill>
+                        <a:srgbClr val="BDBDBD"/>
+                      </a:solidFill>
+                    </a:lnT>
+                    <a:lnB w="6350" cap="flat" cmpd="sng" algn="ctr">
+                      <a:solidFill>
+                        <a:srgbClr val="BDBDBD"/>
+                      </a:solidFill>
+                    </a:lnB>
                   </a:tcPr>
                 </a:tc>
               </a:tr>
@@ -5059,10 +5579,30 @@
                       </a:r>
                     </a:p>
                   </a:txBody>
-                  <a:tcPr>
+                  <a:tcPr anchor="ctr">
                     <a:solidFill>
                       <a:srgbClr val="FFFFFF"/>
                     </a:solidFill>
+                    <a:lnL w="6350" cap="flat" cmpd="sng" algn="ctr">
+                      <a:solidFill>
+                        <a:srgbClr val="BDBDBD"/>
+                      </a:solidFill>
+                    </a:lnL>
+                    <a:lnR w="6350" cap="flat" cmpd="sng" algn="ctr">
+                      <a:solidFill>
+                        <a:srgbClr val="BDBDBD"/>
+                      </a:solidFill>
+                    </a:lnR>
+                    <a:lnT w="6350" cap="flat" cmpd="sng" algn="ctr">
+                      <a:solidFill>
+                        <a:srgbClr val="BDBDBD"/>
+                      </a:solidFill>
+                    </a:lnT>
+                    <a:lnB w="6350" cap="flat" cmpd="sng" algn="ctr">
+                      <a:solidFill>
+                        <a:srgbClr val="BDBDBD"/>
+                      </a:solidFill>
+                    </a:lnB>
                   </a:tcPr>
                 </a:tc>
                 <a:tc>
@@ -5082,10 +5622,30 @@
                       </a:r>
                     </a:p>
                   </a:txBody>
-                  <a:tcPr>
+                  <a:tcPr anchor="ctr">
                     <a:solidFill>
                       <a:srgbClr val="FFFFFF"/>
                     </a:solidFill>
+                    <a:lnL w="6350" cap="flat" cmpd="sng" algn="ctr">
+                      <a:solidFill>
+                        <a:srgbClr val="BDBDBD"/>
+                      </a:solidFill>
+                    </a:lnL>
+                    <a:lnR w="6350" cap="flat" cmpd="sng" algn="ctr">
+                      <a:solidFill>
+                        <a:srgbClr val="BDBDBD"/>
+                      </a:solidFill>
+                    </a:lnR>
+                    <a:lnT w="6350" cap="flat" cmpd="sng" algn="ctr">
+                      <a:solidFill>
+                        <a:srgbClr val="BDBDBD"/>
+                      </a:solidFill>
+                    </a:lnT>
+                    <a:lnB w="6350" cap="flat" cmpd="sng" algn="ctr">
+                      <a:solidFill>
+                        <a:srgbClr val="BDBDBD"/>
+                      </a:solidFill>
+                    </a:lnB>
                   </a:tcPr>
                 </a:tc>
               </a:tr>
@@ -5107,10 +5667,30 @@
                       </a:r>
                     </a:p>
                   </a:txBody>
-                  <a:tcPr>
-                    <a:solidFill>
-                      <a:srgbClr val="FFF1F2"/>
-                    </a:solidFill>
+                  <a:tcPr anchor="ctr">
+                    <a:solidFill>
+                      <a:srgbClr val="FFFFFF"/>
+                    </a:solidFill>
+                    <a:lnL w="6350" cap="flat" cmpd="sng" algn="ctr">
+                      <a:solidFill>
+                        <a:srgbClr val="BDBDBD"/>
+                      </a:solidFill>
+                    </a:lnL>
+                    <a:lnR w="6350" cap="flat" cmpd="sng" algn="ctr">
+                      <a:solidFill>
+                        <a:srgbClr val="BDBDBD"/>
+                      </a:solidFill>
+                    </a:lnR>
+                    <a:lnT w="6350" cap="flat" cmpd="sng" algn="ctr">
+                      <a:solidFill>
+                        <a:srgbClr val="BDBDBD"/>
+                      </a:solidFill>
+                    </a:lnT>
+                    <a:lnB w="6350" cap="flat" cmpd="sng" algn="ctr">
+                      <a:solidFill>
+                        <a:srgbClr val="BDBDBD"/>
+                      </a:solidFill>
+                    </a:lnB>
                   </a:tcPr>
                 </a:tc>
                 <a:tc>
@@ -5130,10 +5710,30 @@
                       </a:r>
                     </a:p>
                   </a:txBody>
-                  <a:tcPr>
-                    <a:solidFill>
-                      <a:srgbClr val="FFF1F2"/>
-                    </a:solidFill>
+                  <a:tcPr anchor="ctr">
+                    <a:solidFill>
+                      <a:srgbClr val="FFFFFF"/>
+                    </a:solidFill>
+                    <a:lnL w="6350" cap="flat" cmpd="sng" algn="ctr">
+                      <a:solidFill>
+                        <a:srgbClr val="BDBDBD"/>
+                      </a:solidFill>
+                    </a:lnL>
+                    <a:lnR w="6350" cap="flat" cmpd="sng" algn="ctr">
+                      <a:solidFill>
+                        <a:srgbClr val="BDBDBD"/>
+                      </a:solidFill>
+                    </a:lnR>
+                    <a:lnT w="6350" cap="flat" cmpd="sng" algn="ctr">
+                      <a:solidFill>
+                        <a:srgbClr val="BDBDBD"/>
+                      </a:solidFill>
+                    </a:lnT>
+                    <a:lnB w="6350" cap="flat" cmpd="sng" algn="ctr">
+                      <a:solidFill>
+                        <a:srgbClr val="BDBDBD"/>
+                      </a:solidFill>
+                    </a:lnB>
                   </a:tcPr>
                 </a:tc>
               </a:tr>
@@ -5155,10 +5755,30 @@
                       </a:r>
                     </a:p>
                   </a:txBody>
-                  <a:tcPr>
+                  <a:tcPr anchor="ctr">
                     <a:solidFill>
                       <a:srgbClr val="FFFFFF"/>
                     </a:solidFill>
+                    <a:lnL w="6350" cap="flat" cmpd="sng" algn="ctr">
+                      <a:solidFill>
+                        <a:srgbClr val="BDBDBD"/>
+                      </a:solidFill>
+                    </a:lnL>
+                    <a:lnR w="6350" cap="flat" cmpd="sng" algn="ctr">
+                      <a:solidFill>
+                        <a:srgbClr val="BDBDBD"/>
+                      </a:solidFill>
+                    </a:lnR>
+                    <a:lnT w="6350" cap="flat" cmpd="sng" algn="ctr">
+                      <a:solidFill>
+                        <a:srgbClr val="BDBDBD"/>
+                      </a:solidFill>
+                    </a:lnT>
+                    <a:lnB w="6350" cap="flat" cmpd="sng" algn="ctr">
+                      <a:solidFill>
+                        <a:srgbClr val="BDBDBD"/>
+                      </a:solidFill>
+                    </a:lnB>
                   </a:tcPr>
                 </a:tc>
                 <a:tc>
@@ -5178,10 +5798,30 @@
                       </a:r>
                     </a:p>
                   </a:txBody>
-                  <a:tcPr>
+                  <a:tcPr anchor="ctr">
                     <a:solidFill>
                       <a:srgbClr val="FFFFFF"/>
                     </a:solidFill>
+                    <a:lnL w="6350" cap="flat" cmpd="sng" algn="ctr">
+                      <a:solidFill>
+                        <a:srgbClr val="BDBDBD"/>
+                      </a:solidFill>
+                    </a:lnL>
+                    <a:lnR w="6350" cap="flat" cmpd="sng" algn="ctr">
+                      <a:solidFill>
+                        <a:srgbClr val="BDBDBD"/>
+                      </a:solidFill>
+                    </a:lnR>
+                    <a:lnT w="6350" cap="flat" cmpd="sng" algn="ctr">
+                      <a:solidFill>
+                        <a:srgbClr val="BDBDBD"/>
+                      </a:solidFill>
+                    </a:lnT>
+                    <a:lnB w="6350" cap="flat" cmpd="sng" algn="ctr">
+                      <a:solidFill>
+                        <a:srgbClr val="BDBDBD"/>
+                      </a:solidFill>
+                    </a:lnB>
                   </a:tcPr>
                 </a:tc>
               </a:tr>
@@ -5264,10 +5904,30 @@
                       </a:r>
                     </a:p>
                   </a:txBody>
-                  <a:tcPr>
+                  <a:tcPr anchor="ctr">
                     <a:solidFill>
                       <a:srgbClr val="F5F5F5"/>
                     </a:solidFill>
+                    <a:lnL w="6350" cap="flat" cmpd="sng" algn="ctr">
+                      <a:solidFill>
+                        <a:srgbClr val="BDBDBD"/>
+                      </a:solidFill>
+                    </a:lnL>
+                    <a:lnR w="6350" cap="flat" cmpd="sng" algn="ctr">
+                      <a:solidFill>
+                        <a:srgbClr val="BDBDBD"/>
+                      </a:solidFill>
+                    </a:lnR>
+                    <a:lnT w="6350" cap="flat" cmpd="sng" algn="ctr">
+                      <a:solidFill>
+                        <a:srgbClr val="BDBDBD"/>
+                      </a:solidFill>
+                    </a:lnT>
+                    <a:lnB w="6350" cap="flat" cmpd="sng" algn="ctr">
+                      <a:solidFill>
+                        <a:srgbClr val="BDBDBD"/>
+                      </a:solidFill>
+                    </a:lnB>
                   </a:tcPr>
                 </a:tc>
                 <a:tc>
@@ -5287,10 +5947,30 @@
                       </a:r>
                     </a:p>
                   </a:txBody>
-                  <a:tcPr>
+                  <a:tcPr anchor="ctr">
                     <a:solidFill>
                       <a:srgbClr val="F5F5F5"/>
                     </a:solidFill>
+                    <a:lnL w="6350" cap="flat" cmpd="sng" algn="ctr">
+                      <a:solidFill>
+                        <a:srgbClr val="BDBDBD"/>
+                      </a:solidFill>
+                    </a:lnL>
+                    <a:lnR w="6350" cap="flat" cmpd="sng" algn="ctr">
+                      <a:solidFill>
+                        <a:srgbClr val="BDBDBD"/>
+                      </a:solidFill>
+                    </a:lnR>
+                    <a:lnT w="6350" cap="flat" cmpd="sng" algn="ctr">
+                      <a:solidFill>
+                        <a:srgbClr val="BDBDBD"/>
+                      </a:solidFill>
+                    </a:lnT>
+                    <a:lnB w="6350" cap="flat" cmpd="sng" algn="ctr">
+                      <a:solidFill>
+                        <a:srgbClr val="BDBDBD"/>
+                      </a:solidFill>
+                    </a:lnB>
                   </a:tcPr>
                 </a:tc>
               </a:tr>
@@ -5312,10 +5992,30 @@
                       </a:r>
                     </a:p>
                   </a:txBody>
-                  <a:tcPr>
+                  <a:tcPr anchor="ctr">
                     <a:solidFill>
                       <a:srgbClr val="FFFFFF"/>
                     </a:solidFill>
+                    <a:lnL w="6350" cap="flat" cmpd="sng" algn="ctr">
+                      <a:solidFill>
+                        <a:srgbClr val="BDBDBD"/>
+                      </a:solidFill>
+                    </a:lnL>
+                    <a:lnR w="6350" cap="flat" cmpd="sng" algn="ctr">
+                      <a:solidFill>
+                        <a:srgbClr val="BDBDBD"/>
+                      </a:solidFill>
+                    </a:lnR>
+                    <a:lnT w="6350" cap="flat" cmpd="sng" algn="ctr">
+                      <a:solidFill>
+                        <a:srgbClr val="BDBDBD"/>
+                      </a:solidFill>
+                    </a:lnT>
+                    <a:lnB w="6350" cap="flat" cmpd="sng" algn="ctr">
+                      <a:solidFill>
+                        <a:srgbClr val="BDBDBD"/>
+                      </a:solidFill>
+                    </a:lnB>
                   </a:tcPr>
                 </a:tc>
                 <a:tc>
@@ -5335,10 +6035,30 @@
                       </a:r>
                     </a:p>
                   </a:txBody>
-                  <a:tcPr>
+                  <a:tcPr anchor="ctr">
                     <a:solidFill>
                       <a:srgbClr val="FFFFFF"/>
                     </a:solidFill>
+                    <a:lnL w="6350" cap="flat" cmpd="sng" algn="ctr">
+                      <a:solidFill>
+                        <a:srgbClr val="BDBDBD"/>
+                      </a:solidFill>
+                    </a:lnL>
+                    <a:lnR w="6350" cap="flat" cmpd="sng" algn="ctr">
+                      <a:solidFill>
+                        <a:srgbClr val="BDBDBD"/>
+                      </a:solidFill>
+                    </a:lnR>
+                    <a:lnT w="6350" cap="flat" cmpd="sng" algn="ctr">
+                      <a:solidFill>
+                        <a:srgbClr val="BDBDBD"/>
+                      </a:solidFill>
+                    </a:lnT>
+                    <a:lnB w="6350" cap="flat" cmpd="sng" algn="ctr">
+                      <a:solidFill>
+                        <a:srgbClr val="BDBDBD"/>
+                      </a:solidFill>
+                    </a:lnB>
                   </a:tcPr>
                 </a:tc>
               </a:tr>
@@ -5360,10 +6080,30 @@
                       </a:r>
                     </a:p>
                   </a:txBody>
-                  <a:tcPr>
-                    <a:solidFill>
-                      <a:srgbClr val="FFF1F2"/>
-                    </a:solidFill>
+                  <a:tcPr anchor="ctr">
+                    <a:solidFill>
+                      <a:srgbClr val="FFFFFF"/>
+                    </a:solidFill>
+                    <a:lnL w="6350" cap="flat" cmpd="sng" algn="ctr">
+                      <a:solidFill>
+                        <a:srgbClr val="BDBDBD"/>
+                      </a:solidFill>
+                    </a:lnL>
+                    <a:lnR w="6350" cap="flat" cmpd="sng" algn="ctr">
+                      <a:solidFill>
+                        <a:srgbClr val="BDBDBD"/>
+                      </a:solidFill>
+                    </a:lnR>
+                    <a:lnT w="6350" cap="flat" cmpd="sng" algn="ctr">
+                      <a:solidFill>
+                        <a:srgbClr val="BDBDBD"/>
+                      </a:solidFill>
+                    </a:lnT>
+                    <a:lnB w="6350" cap="flat" cmpd="sng" algn="ctr">
+                      <a:solidFill>
+                        <a:srgbClr val="BDBDBD"/>
+                      </a:solidFill>
+                    </a:lnB>
                   </a:tcPr>
                 </a:tc>
                 <a:tc>
@@ -5383,10 +6123,30 @@
                       </a:r>
                     </a:p>
                   </a:txBody>
-                  <a:tcPr>
-                    <a:solidFill>
-                      <a:srgbClr val="FFF1F2"/>
-                    </a:solidFill>
+                  <a:tcPr anchor="ctr">
+                    <a:solidFill>
+                      <a:srgbClr val="FFFFFF"/>
+                    </a:solidFill>
+                    <a:lnL w="6350" cap="flat" cmpd="sng" algn="ctr">
+                      <a:solidFill>
+                        <a:srgbClr val="BDBDBD"/>
+                      </a:solidFill>
+                    </a:lnL>
+                    <a:lnR w="6350" cap="flat" cmpd="sng" algn="ctr">
+                      <a:solidFill>
+                        <a:srgbClr val="BDBDBD"/>
+                      </a:solidFill>
+                    </a:lnR>
+                    <a:lnT w="6350" cap="flat" cmpd="sng" algn="ctr">
+                      <a:solidFill>
+                        <a:srgbClr val="BDBDBD"/>
+                      </a:solidFill>
+                    </a:lnT>
+                    <a:lnB w="6350" cap="flat" cmpd="sng" algn="ctr">
+                      <a:solidFill>
+                        <a:srgbClr val="BDBDBD"/>
+                      </a:solidFill>
+                    </a:lnB>
                   </a:tcPr>
                 </a:tc>
               </a:tr>
@@ -5408,10 +6168,30 @@
                       </a:r>
                     </a:p>
                   </a:txBody>
-                  <a:tcPr>
+                  <a:tcPr anchor="ctr">
                     <a:solidFill>
                       <a:srgbClr val="FFFFFF"/>
                     </a:solidFill>
+                    <a:lnL w="6350" cap="flat" cmpd="sng" algn="ctr">
+                      <a:solidFill>
+                        <a:srgbClr val="BDBDBD"/>
+                      </a:solidFill>
+                    </a:lnL>
+                    <a:lnR w="6350" cap="flat" cmpd="sng" algn="ctr">
+                      <a:solidFill>
+                        <a:srgbClr val="BDBDBD"/>
+                      </a:solidFill>
+                    </a:lnR>
+                    <a:lnT w="6350" cap="flat" cmpd="sng" algn="ctr">
+                      <a:solidFill>
+                        <a:srgbClr val="BDBDBD"/>
+                      </a:solidFill>
+                    </a:lnT>
+                    <a:lnB w="6350" cap="flat" cmpd="sng" algn="ctr">
+                      <a:solidFill>
+                        <a:srgbClr val="BDBDBD"/>
+                      </a:solidFill>
+                    </a:lnB>
                   </a:tcPr>
                 </a:tc>
                 <a:tc>
@@ -5431,10 +6211,30 @@
                       </a:r>
                     </a:p>
                   </a:txBody>
-                  <a:tcPr>
+                  <a:tcPr anchor="ctr">
                     <a:solidFill>
                       <a:srgbClr val="FFFFFF"/>
                     </a:solidFill>
+                    <a:lnL w="6350" cap="flat" cmpd="sng" algn="ctr">
+                      <a:solidFill>
+                        <a:srgbClr val="BDBDBD"/>
+                      </a:solidFill>
+                    </a:lnL>
+                    <a:lnR w="6350" cap="flat" cmpd="sng" algn="ctr">
+                      <a:solidFill>
+                        <a:srgbClr val="BDBDBD"/>
+                      </a:solidFill>
+                    </a:lnR>
+                    <a:lnT w="6350" cap="flat" cmpd="sng" algn="ctr">
+                      <a:solidFill>
+                        <a:srgbClr val="BDBDBD"/>
+                      </a:solidFill>
+                    </a:lnT>
+                    <a:lnB w="6350" cap="flat" cmpd="sng" algn="ctr">
+                      <a:solidFill>
+                        <a:srgbClr val="BDBDBD"/>
+                      </a:solidFill>
+                    </a:lnB>
                   </a:tcPr>
                 </a:tc>
               </a:tr>
@@ -5456,10 +6256,30 @@
                       </a:r>
                     </a:p>
                   </a:txBody>
-                  <a:tcPr>
-                    <a:solidFill>
-                      <a:srgbClr val="FFF1F2"/>
-                    </a:solidFill>
+                  <a:tcPr anchor="ctr">
+                    <a:solidFill>
+                      <a:srgbClr val="FFFFFF"/>
+                    </a:solidFill>
+                    <a:lnL w="6350" cap="flat" cmpd="sng" algn="ctr">
+                      <a:solidFill>
+                        <a:srgbClr val="BDBDBD"/>
+                      </a:solidFill>
+                    </a:lnL>
+                    <a:lnR w="6350" cap="flat" cmpd="sng" algn="ctr">
+                      <a:solidFill>
+                        <a:srgbClr val="BDBDBD"/>
+                      </a:solidFill>
+                    </a:lnR>
+                    <a:lnT w="6350" cap="flat" cmpd="sng" algn="ctr">
+                      <a:solidFill>
+                        <a:srgbClr val="BDBDBD"/>
+                      </a:solidFill>
+                    </a:lnT>
+                    <a:lnB w="6350" cap="flat" cmpd="sng" algn="ctr">
+                      <a:solidFill>
+                        <a:srgbClr val="BDBDBD"/>
+                      </a:solidFill>
+                    </a:lnB>
                   </a:tcPr>
                 </a:tc>
                 <a:tc>
@@ -5479,10 +6299,30 @@
                       </a:r>
                     </a:p>
                   </a:txBody>
-                  <a:tcPr>
-                    <a:solidFill>
-                      <a:srgbClr val="FFF1F2"/>
-                    </a:solidFill>
+                  <a:tcPr anchor="ctr">
+                    <a:solidFill>
+                      <a:srgbClr val="FFFFFF"/>
+                    </a:solidFill>
+                    <a:lnL w="6350" cap="flat" cmpd="sng" algn="ctr">
+                      <a:solidFill>
+                        <a:srgbClr val="BDBDBD"/>
+                      </a:solidFill>
+                    </a:lnL>
+                    <a:lnR w="6350" cap="flat" cmpd="sng" algn="ctr">
+                      <a:solidFill>
+                        <a:srgbClr val="BDBDBD"/>
+                      </a:solidFill>
+                    </a:lnR>
+                    <a:lnT w="6350" cap="flat" cmpd="sng" algn="ctr">
+                      <a:solidFill>
+                        <a:srgbClr val="BDBDBD"/>
+                      </a:solidFill>
+                    </a:lnT>
+                    <a:lnB w="6350" cap="flat" cmpd="sng" algn="ctr">
+                      <a:solidFill>
+                        <a:srgbClr val="BDBDBD"/>
+                      </a:solidFill>
+                    </a:lnB>
                   </a:tcPr>
                 </a:tc>
               </a:tr>
@@ -5504,10 +6344,30 @@
                       </a:r>
                     </a:p>
                   </a:txBody>
-                  <a:tcPr>
+                  <a:tcPr anchor="ctr">
                     <a:solidFill>
                       <a:srgbClr val="FFFFFF"/>
                     </a:solidFill>
+                    <a:lnL w="6350" cap="flat" cmpd="sng" algn="ctr">
+                      <a:solidFill>
+                        <a:srgbClr val="BDBDBD"/>
+                      </a:solidFill>
+                    </a:lnL>
+                    <a:lnR w="6350" cap="flat" cmpd="sng" algn="ctr">
+                      <a:solidFill>
+                        <a:srgbClr val="BDBDBD"/>
+                      </a:solidFill>
+                    </a:lnR>
+                    <a:lnT w="6350" cap="flat" cmpd="sng" algn="ctr">
+                      <a:solidFill>
+                        <a:srgbClr val="BDBDBD"/>
+                      </a:solidFill>
+                    </a:lnT>
+                    <a:lnB w="6350" cap="flat" cmpd="sng" algn="ctr">
+                      <a:solidFill>
+                        <a:srgbClr val="BDBDBD"/>
+                      </a:solidFill>
+                    </a:lnB>
                   </a:tcPr>
                 </a:tc>
                 <a:tc>
@@ -5527,10 +6387,30 @@
                       </a:r>
                     </a:p>
                   </a:txBody>
-                  <a:tcPr>
+                  <a:tcPr anchor="ctr">
                     <a:solidFill>
                       <a:srgbClr val="FFFFFF"/>
                     </a:solidFill>
+                    <a:lnL w="6350" cap="flat" cmpd="sng" algn="ctr">
+                      <a:solidFill>
+                        <a:srgbClr val="BDBDBD"/>
+                      </a:solidFill>
+                    </a:lnL>
+                    <a:lnR w="6350" cap="flat" cmpd="sng" algn="ctr">
+                      <a:solidFill>
+                        <a:srgbClr val="BDBDBD"/>
+                      </a:solidFill>
+                    </a:lnR>
+                    <a:lnT w="6350" cap="flat" cmpd="sng" algn="ctr">
+                      <a:solidFill>
+                        <a:srgbClr val="BDBDBD"/>
+                      </a:solidFill>
+                    </a:lnT>
+                    <a:lnB w="6350" cap="flat" cmpd="sng" algn="ctr">
+                      <a:solidFill>
+                        <a:srgbClr val="BDBDBD"/>
+                      </a:solidFill>
+                    </a:lnB>
                   </a:tcPr>
                 </a:tc>
               </a:tr>
@@ -5614,10 +6494,30 @@
                       </a:r>
                     </a:p>
                   </a:txBody>
-                  <a:tcPr>
+                  <a:tcPr anchor="ctr">
                     <a:solidFill>
                       <a:srgbClr val="F5F5F5"/>
                     </a:solidFill>
+                    <a:lnL w="6350" cap="flat" cmpd="sng" algn="ctr">
+                      <a:solidFill>
+                        <a:srgbClr val="BDBDBD"/>
+                      </a:solidFill>
+                    </a:lnL>
+                    <a:lnR w="6350" cap="flat" cmpd="sng" algn="ctr">
+                      <a:solidFill>
+                        <a:srgbClr val="BDBDBD"/>
+                      </a:solidFill>
+                    </a:lnR>
+                    <a:lnT w="6350" cap="flat" cmpd="sng" algn="ctr">
+                      <a:solidFill>
+                        <a:srgbClr val="BDBDBD"/>
+                      </a:solidFill>
+                    </a:lnT>
+                    <a:lnB w="6350" cap="flat" cmpd="sng" algn="ctr">
+                      <a:solidFill>
+                        <a:srgbClr val="BDBDBD"/>
+                      </a:solidFill>
+                    </a:lnB>
                   </a:tcPr>
                 </a:tc>
                 <a:tc>
@@ -5637,10 +6537,30 @@
                       </a:r>
                     </a:p>
                   </a:txBody>
-                  <a:tcPr>
+                  <a:tcPr anchor="ctr">
                     <a:solidFill>
                       <a:srgbClr val="F5F5F5"/>
                     </a:solidFill>
+                    <a:lnL w="6350" cap="flat" cmpd="sng" algn="ctr">
+                      <a:solidFill>
+                        <a:srgbClr val="BDBDBD"/>
+                      </a:solidFill>
+                    </a:lnL>
+                    <a:lnR w="6350" cap="flat" cmpd="sng" algn="ctr">
+                      <a:solidFill>
+                        <a:srgbClr val="BDBDBD"/>
+                      </a:solidFill>
+                    </a:lnR>
+                    <a:lnT w="6350" cap="flat" cmpd="sng" algn="ctr">
+                      <a:solidFill>
+                        <a:srgbClr val="BDBDBD"/>
+                      </a:solidFill>
+                    </a:lnT>
+                    <a:lnB w="6350" cap="flat" cmpd="sng" algn="ctr">
+                      <a:solidFill>
+                        <a:srgbClr val="BDBDBD"/>
+                      </a:solidFill>
+                    </a:lnB>
                   </a:tcPr>
                 </a:tc>
                 <a:tc>
@@ -5660,10 +6580,30 @@
                       </a:r>
                     </a:p>
                   </a:txBody>
-                  <a:tcPr>
+                  <a:tcPr anchor="ctr">
                     <a:solidFill>
                       <a:srgbClr val="F5F5F5"/>
                     </a:solidFill>
+                    <a:lnL w="6350" cap="flat" cmpd="sng" algn="ctr">
+                      <a:solidFill>
+                        <a:srgbClr val="BDBDBD"/>
+                      </a:solidFill>
+                    </a:lnL>
+                    <a:lnR w="6350" cap="flat" cmpd="sng" algn="ctr">
+                      <a:solidFill>
+                        <a:srgbClr val="BDBDBD"/>
+                      </a:solidFill>
+                    </a:lnR>
+                    <a:lnT w="6350" cap="flat" cmpd="sng" algn="ctr">
+                      <a:solidFill>
+                        <a:srgbClr val="BDBDBD"/>
+                      </a:solidFill>
+                    </a:lnT>
+                    <a:lnB w="6350" cap="flat" cmpd="sng" algn="ctr">
+                      <a:solidFill>
+                        <a:srgbClr val="BDBDBD"/>
+                      </a:solidFill>
+                    </a:lnB>
                   </a:tcPr>
                 </a:tc>
               </a:tr>
@@ -5685,10 +6625,30 @@
                       </a:r>
                     </a:p>
                   </a:txBody>
-                  <a:tcPr>
+                  <a:tcPr anchor="ctr">
                     <a:solidFill>
                       <a:srgbClr val="FFFFFF"/>
                     </a:solidFill>
+                    <a:lnL w="6350" cap="flat" cmpd="sng" algn="ctr">
+                      <a:solidFill>
+                        <a:srgbClr val="BDBDBD"/>
+                      </a:solidFill>
+                    </a:lnL>
+                    <a:lnR w="6350" cap="flat" cmpd="sng" algn="ctr">
+                      <a:solidFill>
+                        <a:srgbClr val="BDBDBD"/>
+                      </a:solidFill>
+                    </a:lnR>
+                    <a:lnT w="6350" cap="flat" cmpd="sng" algn="ctr">
+                      <a:solidFill>
+                        <a:srgbClr val="BDBDBD"/>
+                      </a:solidFill>
+                    </a:lnT>
+                    <a:lnB w="6350" cap="flat" cmpd="sng" algn="ctr">
+                      <a:solidFill>
+                        <a:srgbClr val="BDBDBD"/>
+                      </a:solidFill>
+                    </a:lnB>
                   </a:tcPr>
                 </a:tc>
                 <a:tc>
@@ -5708,10 +6668,30 @@
                       </a:r>
                     </a:p>
                   </a:txBody>
-                  <a:tcPr>
+                  <a:tcPr anchor="ctr">
                     <a:solidFill>
                       <a:srgbClr val="FFFFFF"/>
                     </a:solidFill>
+                    <a:lnL w="6350" cap="flat" cmpd="sng" algn="ctr">
+                      <a:solidFill>
+                        <a:srgbClr val="BDBDBD"/>
+                      </a:solidFill>
+                    </a:lnL>
+                    <a:lnR w="6350" cap="flat" cmpd="sng" algn="ctr">
+                      <a:solidFill>
+                        <a:srgbClr val="BDBDBD"/>
+                      </a:solidFill>
+                    </a:lnR>
+                    <a:lnT w="6350" cap="flat" cmpd="sng" algn="ctr">
+                      <a:solidFill>
+                        <a:srgbClr val="BDBDBD"/>
+                      </a:solidFill>
+                    </a:lnT>
+                    <a:lnB w="6350" cap="flat" cmpd="sng" algn="ctr">
+                      <a:solidFill>
+                        <a:srgbClr val="BDBDBD"/>
+                      </a:solidFill>
+                    </a:lnB>
                   </a:tcPr>
                 </a:tc>
                 <a:tc>
@@ -5731,10 +6711,30 @@
                       </a:r>
                     </a:p>
                   </a:txBody>
-                  <a:tcPr>
+                  <a:tcPr anchor="ctr">
                     <a:solidFill>
                       <a:srgbClr val="FFFFFF"/>
                     </a:solidFill>
+                    <a:lnL w="6350" cap="flat" cmpd="sng" algn="ctr">
+                      <a:solidFill>
+                        <a:srgbClr val="BDBDBD"/>
+                      </a:solidFill>
+                    </a:lnL>
+                    <a:lnR w="6350" cap="flat" cmpd="sng" algn="ctr">
+                      <a:solidFill>
+                        <a:srgbClr val="BDBDBD"/>
+                      </a:solidFill>
+                    </a:lnR>
+                    <a:lnT w="6350" cap="flat" cmpd="sng" algn="ctr">
+                      <a:solidFill>
+                        <a:srgbClr val="BDBDBD"/>
+                      </a:solidFill>
+                    </a:lnT>
+                    <a:lnB w="6350" cap="flat" cmpd="sng" algn="ctr">
+                      <a:solidFill>
+                        <a:srgbClr val="BDBDBD"/>
+                      </a:solidFill>
+                    </a:lnB>
                   </a:tcPr>
                 </a:tc>
               </a:tr>
@@ -5756,10 +6756,30 @@
                       </a:r>
                     </a:p>
                   </a:txBody>
-                  <a:tcPr>
-                    <a:solidFill>
-                      <a:srgbClr val="FFF1F2"/>
-                    </a:solidFill>
+                  <a:tcPr anchor="ctr">
+                    <a:solidFill>
+                      <a:srgbClr val="FFFFFF"/>
+                    </a:solidFill>
+                    <a:lnL w="6350" cap="flat" cmpd="sng" algn="ctr">
+                      <a:solidFill>
+                        <a:srgbClr val="BDBDBD"/>
+                      </a:solidFill>
+                    </a:lnL>
+                    <a:lnR w="6350" cap="flat" cmpd="sng" algn="ctr">
+                      <a:solidFill>
+                        <a:srgbClr val="BDBDBD"/>
+                      </a:solidFill>
+                    </a:lnR>
+                    <a:lnT w="6350" cap="flat" cmpd="sng" algn="ctr">
+                      <a:solidFill>
+                        <a:srgbClr val="BDBDBD"/>
+                      </a:solidFill>
+                    </a:lnT>
+                    <a:lnB w="6350" cap="flat" cmpd="sng" algn="ctr">
+                      <a:solidFill>
+                        <a:srgbClr val="BDBDBD"/>
+                      </a:solidFill>
+                    </a:lnB>
                   </a:tcPr>
                 </a:tc>
                 <a:tc>
@@ -5779,10 +6799,30 @@
                       </a:r>
                     </a:p>
                   </a:txBody>
-                  <a:tcPr>
-                    <a:solidFill>
-                      <a:srgbClr val="FFF1F2"/>
-                    </a:solidFill>
+                  <a:tcPr anchor="ctr">
+                    <a:solidFill>
+                      <a:srgbClr val="FFFFFF"/>
+                    </a:solidFill>
+                    <a:lnL w="6350" cap="flat" cmpd="sng" algn="ctr">
+                      <a:solidFill>
+                        <a:srgbClr val="BDBDBD"/>
+                      </a:solidFill>
+                    </a:lnL>
+                    <a:lnR w="6350" cap="flat" cmpd="sng" algn="ctr">
+                      <a:solidFill>
+                        <a:srgbClr val="BDBDBD"/>
+                      </a:solidFill>
+                    </a:lnR>
+                    <a:lnT w="6350" cap="flat" cmpd="sng" algn="ctr">
+                      <a:solidFill>
+                        <a:srgbClr val="BDBDBD"/>
+                      </a:solidFill>
+                    </a:lnT>
+                    <a:lnB w="6350" cap="flat" cmpd="sng" algn="ctr">
+                      <a:solidFill>
+                        <a:srgbClr val="BDBDBD"/>
+                      </a:solidFill>
+                    </a:lnB>
                   </a:tcPr>
                 </a:tc>
                 <a:tc>
@@ -5802,10 +6842,30 @@
                       </a:r>
                     </a:p>
                   </a:txBody>
-                  <a:tcPr>
-                    <a:solidFill>
-                      <a:srgbClr val="FFF1F2"/>
-                    </a:solidFill>
+                  <a:tcPr anchor="ctr">
+                    <a:solidFill>
+                      <a:srgbClr val="FFFFFF"/>
+                    </a:solidFill>
+                    <a:lnL w="6350" cap="flat" cmpd="sng" algn="ctr">
+                      <a:solidFill>
+                        <a:srgbClr val="BDBDBD"/>
+                      </a:solidFill>
+                    </a:lnL>
+                    <a:lnR w="6350" cap="flat" cmpd="sng" algn="ctr">
+                      <a:solidFill>
+                        <a:srgbClr val="BDBDBD"/>
+                      </a:solidFill>
+                    </a:lnR>
+                    <a:lnT w="6350" cap="flat" cmpd="sng" algn="ctr">
+                      <a:solidFill>
+                        <a:srgbClr val="BDBDBD"/>
+                      </a:solidFill>
+                    </a:lnT>
+                    <a:lnB w="6350" cap="flat" cmpd="sng" algn="ctr">
+                      <a:solidFill>
+                        <a:srgbClr val="BDBDBD"/>
+                      </a:solidFill>
+                    </a:lnB>
                   </a:tcPr>
                 </a:tc>
               </a:tr>
@@ -5827,10 +6887,30 @@
                       </a:r>
                     </a:p>
                   </a:txBody>
-                  <a:tcPr>
+                  <a:tcPr anchor="ctr">
                     <a:solidFill>
                       <a:srgbClr val="FFFFFF"/>
                     </a:solidFill>
+                    <a:lnL w="6350" cap="flat" cmpd="sng" algn="ctr">
+                      <a:solidFill>
+                        <a:srgbClr val="BDBDBD"/>
+                      </a:solidFill>
+                    </a:lnL>
+                    <a:lnR w="6350" cap="flat" cmpd="sng" algn="ctr">
+                      <a:solidFill>
+                        <a:srgbClr val="BDBDBD"/>
+                      </a:solidFill>
+                    </a:lnR>
+                    <a:lnT w="6350" cap="flat" cmpd="sng" algn="ctr">
+                      <a:solidFill>
+                        <a:srgbClr val="BDBDBD"/>
+                      </a:solidFill>
+                    </a:lnT>
+                    <a:lnB w="6350" cap="flat" cmpd="sng" algn="ctr">
+                      <a:solidFill>
+                        <a:srgbClr val="BDBDBD"/>
+                      </a:solidFill>
+                    </a:lnB>
                   </a:tcPr>
                 </a:tc>
                 <a:tc>
@@ -5850,10 +6930,30 @@
                       </a:r>
                     </a:p>
                   </a:txBody>
-                  <a:tcPr>
+                  <a:tcPr anchor="ctr">
                     <a:solidFill>
                       <a:srgbClr val="FFFFFF"/>
                     </a:solidFill>
+                    <a:lnL w="6350" cap="flat" cmpd="sng" algn="ctr">
+                      <a:solidFill>
+                        <a:srgbClr val="BDBDBD"/>
+                      </a:solidFill>
+                    </a:lnL>
+                    <a:lnR w="6350" cap="flat" cmpd="sng" algn="ctr">
+                      <a:solidFill>
+                        <a:srgbClr val="BDBDBD"/>
+                      </a:solidFill>
+                    </a:lnR>
+                    <a:lnT w="6350" cap="flat" cmpd="sng" algn="ctr">
+                      <a:solidFill>
+                        <a:srgbClr val="BDBDBD"/>
+                      </a:solidFill>
+                    </a:lnT>
+                    <a:lnB w="6350" cap="flat" cmpd="sng" algn="ctr">
+                      <a:solidFill>
+                        <a:srgbClr val="BDBDBD"/>
+                      </a:solidFill>
+                    </a:lnB>
                   </a:tcPr>
                 </a:tc>
                 <a:tc>
@@ -5873,10 +6973,30 @@
                       </a:r>
                     </a:p>
                   </a:txBody>
-                  <a:tcPr>
+                  <a:tcPr anchor="ctr">
                     <a:solidFill>
                       <a:srgbClr val="FFFFFF"/>
                     </a:solidFill>
+                    <a:lnL w="6350" cap="flat" cmpd="sng" algn="ctr">
+                      <a:solidFill>
+                        <a:srgbClr val="BDBDBD"/>
+                      </a:solidFill>
+                    </a:lnL>
+                    <a:lnR w="6350" cap="flat" cmpd="sng" algn="ctr">
+                      <a:solidFill>
+                        <a:srgbClr val="BDBDBD"/>
+                      </a:solidFill>
+                    </a:lnR>
+                    <a:lnT w="6350" cap="flat" cmpd="sng" algn="ctr">
+                      <a:solidFill>
+                        <a:srgbClr val="BDBDBD"/>
+                      </a:solidFill>
+                    </a:lnT>
+                    <a:lnB w="6350" cap="flat" cmpd="sng" algn="ctr">
+                      <a:solidFill>
+                        <a:srgbClr val="BDBDBD"/>
+                      </a:solidFill>
+                    </a:lnB>
                   </a:tcPr>
                 </a:tc>
               </a:tr>
@@ -5898,10 +7018,30 @@
                       </a:r>
                     </a:p>
                   </a:txBody>
-                  <a:tcPr>
-                    <a:solidFill>
-                      <a:srgbClr val="FFF1F2"/>
-                    </a:solidFill>
+                  <a:tcPr anchor="ctr">
+                    <a:solidFill>
+                      <a:srgbClr val="FFFFFF"/>
+                    </a:solidFill>
+                    <a:lnL w="6350" cap="flat" cmpd="sng" algn="ctr">
+                      <a:solidFill>
+                        <a:srgbClr val="BDBDBD"/>
+                      </a:solidFill>
+                    </a:lnL>
+                    <a:lnR w="6350" cap="flat" cmpd="sng" algn="ctr">
+                      <a:solidFill>
+                        <a:srgbClr val="BDBDBD"/>
+                      </a:solidFill>
+                    </a:lnR>
+                    <a:lnT w="6350" cap="flat" cmpd="sng" algn="ctr">
+                      <a:solidFill>
+                        <a:srgbClr val="BDBDBD"/>
+                      </a:solidFill>
+                    </a:lnT>
+                    <a:lnB w="6350" cap="flat" cmpd="sng" algn="ctr">
+                      <a:solidFill>
+                        <a:srgbClr val="BDBDBD"/>
+                      </a:solidFill>
+                    </a:lnB>
                   </a:tcPr>
                 </a:tc>
                 <a:tc>
@@ -5921,10 +7061,30 @@
                       </a:r>
                     </a:p>
                   </a:txBody>
-                  <a:tcPr>
-                    <a:solidFill>
-                      <a:srgbClr val="FFF1F2"/>
-                    </a:solidFill>
+                  <a:tcPr anchor="ctr">
+                    <a:solidFill>
+                      <a:srgbClr val="FFFFFF"/>
+                    </a:solidFill>
+                    <a:lnL w="6350" cap="flat" cmpd="sng" algn="ctr">
+                      <a:solidFill>
+                        <a:srgbClr val="BDBDBD"/>
+                      </a:solidFill>
+                    </a:lnL>
+                    <a:lnR w="6350" cap="flat" cmpd="sng" algn="ctr">
+                      <a:solidFill>
+                        <a:srgbClr val="BDBDBD"/>
+                      </a:solidFill>
+                    </a:lnR>
+                    <a:lnT w="6350" cap="flat" cmpd="sng" algn="ctr">
+                      <a:solidFill>
+                        <a:srgbClr val="BDBDBD"/>
+                      </a:solidFill>
+                    </a:lnT>
+                    <a:lnB w="6350" cap="flat" cmpd="sng" algn="ctr">
+                      <a:solidFill>
+                        <a:srgbClr val="BDBDBD"/>
+                      </a:solidFill>
+                    </a:lnB>
                   </a:tcPr>
                 </a:tc>
                 <a:tc>
@@ -5944,10 +7104,30 @@
                       </a:r>
                     </a:p>
                   </a:txBody>
-                  <a:tcPr>
-                    <a:solidFill>
-                      <a:srgbClr val="FFF1F2"/>
-                    </a:solidFill>
+                  <a:tcPr anchor="ctr">
+                    <a:solidFill>
+                      <a:srgbClr val="FFFFFF"/>
+                    </a:solidFill>
+                    <a:lnL w="6350" cap="flat" cmpd="sng" algn="ctr">
+                      <a:solidFill>
+                        <a:srgbClr val="BDBDBD"/>
+                      </a:solidFill>
+                    </a:lnL>
+                    <a:lnR w="6350" cap="flat" cmpd="sng" algn="ctr">
+                      <a:solidFill>
+                        <a:srgbClr val="BDBDBD"/>
+                      </a:solidFill>
+                    </a:lnR>
+                    <a:lnT w="6350" cap="flat" cmpd="sng" algn="ctr">
+                      <a:solidFill>
+                        <a:srgbClr val="BDBDBD"/>
+                      </a:solidFill>
+                    </a:lnT>
+                    <a:lnB w="6350" cap="flat" cmpd="sng" algn="ctr">
+                      <a:solidFill>
+                        <a:srgbClr val="BDBDBD"/>
+                      </a:solidFill>
+                    </a:lnB>
                   </a:tcPr>
                 </a:tc>
               </a:tr>
@@ -5969,10 +7149,30 @@
                       </a:r>
                     </a:p>
                   </a:txBody>
-                  <a:tcPr>
+                  <a:tcPr anchor="ctr">
                     <a:solidFill>
                       <a:srgbClr val="FFFFFF"/>
                     </a:solidFill>
+                    <a:lnL w="6350" cap="flat" cmpd="sng" algn="ctr">
+                      <a:solidFill>
+                        <a:srgbClr val="BDBDBD"/>
+                      </a:solidFill>
+                    </a:lnL>
+                    <a:lnR w="6350" cap="flat" cmpd="sng" algn="ctr">
+                      <a:solidFill>
+                        <a:srgbClr val="BDBDBD"/>
+                      </a:solidFill>
+                    </a:lnR>
+                    <a:lnT w="6350" cap="flat" cmpd="sng" algn="ctr">
+                      <a:solidFill>
+                        <a:srgbClr val="BDBDBD"/>
+                      </a:solidFill>
+                    </a:lnT>
+                    <a:lnB w="6350" cap="flat" cmpd="sng" algn="ctr">
+                      <a:solidFill>
+                        <a:srgbClr val="BDBDBD"/>
+                      </a:solidFill>
+                    </a:lnB>
                   </a:tcPr>
                 </a:tc>
                 <a:tc>
@@ -5992,10 +7192,30 @@
                       </a:r>
                     </a:p>
                   </a:txBody>
-                  <a:tcPr>
+                  <a:tcPr anchor="ctr">
                     <a:solidFill>
                       <a:srgbClr val="FFFFFF"/>
                     </a:solidFill>
+                    <a:lnL w="6350" cap="flat" cmpd="sng" algn="ctr">
+                      <a:solidFill>
+                        <a:srgbClr val="BDBDBD"/>
+                      </a:solidFill>
+                    </a:lnL>
+                    <a:lnR w="6350" cap="flat" cmpd="sng" algn="ctr">
+                      <a:solidFill>
+                        <a:srgbClr val="BDBDBD"/>
+                      </a:solidFill>
+                    </a:lnR>
+                    <a:lnT w="6350" cap="flat" cmpd="sng" algn="ctr">
+                      <a:solidFill>
+                        <a:srgbClr val="BDBDBD"/>
+                      </a:solidFill>
+                    </a:lnT>
+                    <a:lnB w="6350" cap="flat" cmpd="sng" algn="ctr">
+                      <a:solidFill>
+                        <a:srgbClr val="BDBDBD"/>
+                      </a:solidFill>
+                    </a:lnB>
                   </a:tcPr>
                 </a:tc>
                 <a:tc>
@@ -6015,10 +7235,30 @@
                       </a:r>
                     </a:p>
                   </a:txBody>
-                  <a:tcPr>
+                  <a:tcPr anchor="ctr">
                     <a:solidFill>
                       <a:srgbClr val="FFFFFF"/>
                     </a:solidFill>
+                    <a:lnL w="6350" cap="flat" cmpd="sng" algn="ctr">
+                      <a:solidFill>
+                        <a:srgbClr val="BDBDBD"/>
+                      </a:solidFill>
+                    </a:lnL>
+                    <a:lnR w="6350" cap="flat" cmpd="sng" algn="ctr">
+                      <a:solidFill>
+                        <a:srgbClr val="BDBDBD"/>
+                      </a:solidFill>
+                    </a:lnR>
+                    <a:lnT w="6350" cap="flat" cmpd="sng" algn="ctr">
+                      <a:solidFill>
+                        <a:srgbClr val="BDBDBD"/>
+                      </a:solidFill>
+                    </a:lnT>
+                    <a:lnB w="6350" cap="flat" cmpd="sng" algn="ctr">
+                      <a:solidFill>
+                        <a:srgbClr val="BDBDBD"/>
+                      </a:solidFill>
+                    </a:lnB>
                   </a:tcPr>
                 </a:tc>
               </a:tr>
@@ -6040,10 +7280,30 @@
                       </a:r>
                     </a:p>
                   </a:txBody>
-                  <a:tcPr>
-                    <a:solidFill>
-                      <a:srgbClr val="FFF1F2"/>
-                    </a:solidFill>
+                  <a:tcPr anchor="ctr">
+                    <a:solidFill>
+                      <a:srgbClr val="FFFFFF"/>
+                    </a:solidFill>
+                    <a:lnL w="6350" cap="flat" cmpd="sng" algn="ctr">
+                      <a:solidFill>
+                        <a:srgbClr val="BDBDBD"/>
+                      </a:solidFill>
+                    </a:lnL>
+                    <a:lnR w="6350" cap="flat" cmpd="sng" algn="ctr">
+                      <a:solidFill>
+                        <a:srgbClr val="BDBDBD"/>
+                      </a:solidFill>
+                    </a:lnR>
+                    <a:lnT w="6350" cap="flat" cmpd="sng" algn="ctr">
+                      <a:solidFill>
+                        <a:srgbClr val="BDBDBD"/>
+                      </a:solidFill>
+                    </a:lnT>
+                    <a:lnB w="6350" cap="flat" cmpd="sng" algn="ctr">
+                      <a:solidFill>
+                        <a:srgbClr val="BDBDBD"/>
+                      </a:solidFill>
+                    </a:lnB>
                   </a:tcPr>
                 </a:tc>
                 <a:tc>
@@ -6063,10 +7323,30 @@
                       </a:r>
                     </a:p>
                   </a:txBody>
-                  <a:tcPr>
-                    <a:solidFill>
-                      <a:srgbClr val="FFF1F2"/>
-                    </a:solidFill>
+                  <a:tcPr anchor="ctr">
+                    <a:solidFill>
+                      <a:srgbClr val="FFFFFF"/>
+                    </a:solidFill>
+                    <a:lnL w="6350" cap="flat" cmpd="sng" algn="ctr">
+                      <a:solidFill>
+                        <a:srgbClr val="BDBDBD"/>
+                      </a:solidFill>
+                    </a:lnL>
+                    <a:lnR w="6350" cap="flat" cmpd="sng" algn="ctr">
+                      <a:solidFill>
+                        <a:srgbClr val="BDBDBD"/>
+                      </a:solidFill>
+                    </a:lnR>
+                    <a:lnT w="6350" cap="flat" cmpd="sng" algn="ctr">
+                      <a:solidFill>
+                        <a:srgbClr val="BDBDBD"/>
+                      </a:solidFill>
+                    </a:lnT>
+                    <a:lnB w="6350" cap="flat" cmpd="sng" algn="ctr">
+                      <a:solidFill>
+                        <a:srgbClr val="BDBDBD"/>
+                      </a:solidFill>
+                    </a:lnB>
                   </a:tcPr>
                 </a:tc>
                 <a:tc>
@@ -6086,10 +7366,30 @@
                       </a:r>
                     </a:p>
                   </a:txBody>
-                  <a:tcPr>
-                    <a:solidFill>
-                      <a:srgbClr val="FFF1F2"/>
-                    </a:solidFill>
+                  <a:tcPr anchor="ctr">
+                    <a:solidFill>
+                      <a:srgbClr val="FFFFFF"/>
+                    </a:solidFill>
+                    <a:lnL w="6350" cap="flat" cmpd="sng" algn="ctr">
+                      <a:solidFill>
+                        <a:srgbClr val="BDBDBD"/>
+                      </a:solidFill>
+                    </a:lnL>
+                    <a:lnR w="6350" cap="flat" cmpd="sng" algn="ctr">
+                      <a:solidFill>
+                        <a:srgbClr val="BDBDBD"/>
+                      </a:solidFill>
+                    </a:lnR>
+                    <a:lnT w="6350" cap="flat" cmpd="sng" algn="ctr">
+                      <a:solidFill>
+                        <a:srgbClr val="BDBDBD"/>
+                      </a:solidFill>
+                    </a:lnT>
+                    <a:lnB w="6350" cap="flat" cmpd="sng" algn="ctr">
+                      <a:solidFill>
+                        <a:srgbClr val="BDBDBD"/>
+                      </a:solidFill>
+                    </a:lnB>
                   </a:tcPr>
                 </a:tc>
               </a:tr>
@@ -6111,10 +7411,30 @@
                       </a:r>
                     </a:p>
                   </a:txBody>
-                  <a:tcPr>
+                  <a:tcPr anchor="ctr">
                     <a:solidFill>
                       <a:srgbClr val="FFFFFF"/>
                     </a:solidFill>
+                    <a:lnL w="6350" cap="flat" cmpd="sng" algn="ctr">
+                      <a:solidFill>
+                        <a:srgbClr val="BDBDBD"/>
+                      </a:solidFill>
+                    </a:lnL>
+                    <a:lnR w="6350" cap="flat" cmpd="sng" algn="ctr">
+                      <a:solidFill>
+                        <a:srgbClr val="BDBDBD"/>
+                      </a:solidFill>
+                    </a:lnR>
+                    <a:lnT w="6350" cap="flat" cmpd="sng" algn="ctr">
+                      <a:solidFill>
+                        <a:srgbClr val="BDBDBD"/>
+                      </a:solidFill>
+                    </a:lnT>
+                    <a:lnB w="6350" cap="flat" cmpd="sng" algn="ctr">
+                      <a:solidFill>
+                        <a:srgbClr val="BDBDBD"/>
+                      </a:solidFill>
+                    </a:lnB>
                   </a:tcPr>
                 </a:tc>
                 <a:tc>
@@ -6134,10 +7454,30 @@
                       </a:r>
                     </a:p>
                   </a:txBody>
-                  <a:tcPr>
+                  <a:tcPr anchor="ctr">
                     <a:solidFill>
                       <a:srgbClr val="FFFFFF"/>
                     </a:solidFill>
+                    <a:lnL w="6350" cap="flat" cmpd="sng" algn="ctr">
+                      <a:solidFill>
+                        <a:srgbClr val="BDBDBD"/>
+                      </a:solidFill>
+                    </a:lnL>
+                    <a:lnR w="6350" cap="flat" cmpd="sng" algn="ctr">
+                      <a:solidFill>
+                        <a:srgbClr val="BDBDBD"/>
+                      </a:solidFill>
+                    </a:lnR>
+                    <a:lnT w="6350" cap="flat" cmpd="sng" algn="ctr">
+                      <a:solidFill>
+                        <a:srgbClr val="BDBDBD"/>
+                      </a:solidFill>
+                    </a:lnT>
+                    <a:lnB w="6350" cap="flat" cmpd="sng" algn="ctr">
+                      <a:solidFill>
+                        <a:srgbClr val="BDBDBD"/>
+                      </a:solidFill>
+                    </a:lnB>
                   </a:tcPr>
                 </a:tc>
                 <a:tc>
@@ -6157,10 +7497,30 @@
                       </a:r>
                     </a:p>
                   </a:txBody>
-                  <a:tcPr>
+                  <a:tcPr anchor="ctr">
                     <a:solidFill>
                       <a:srgbClr val="FFFFFF"/>
                     </a:solidFill>
+                    <a:lnL w="6350" cap="flat" cmpd="sng" algn="ctr">
+                      <a:solidFill>
+                        <a:srgbClr val="BDBDBD"/>
+                      </a:solidFill>
+                    </a:lnL>
+                    <a:lnR w="6350" cap="flat" cmpd="sng" algn="ctr">
+                      <a:solidFill>
+                        <a:srgbClr val="BDBDBD"/>
+                      </a:solidFill>
+                    </a:lnR>
+                    <a:lnT w="6350" cap="flat" cmpd="sng" algn="ctr">
+                      <a:solidFill>
+                        <a:srgbClr val="BDBDBD"/>
+                      </a:solidFill>
+                    </a:lnT>
+                    <a:lnB w="6350" cap="flat" cmpd="sng" algn="ctr">
+                      <a:solidFill>
+                        <a:srgbClr val="BDBDBD"/>
+                      </a:solidFill>
+                    </a:lnB>
                   </a:tcPr>
                 </a:tc>
               </a:tr>
@@ -6182,10 +7542,30 @@
                       </a:r>
                     </a:p>
                   </a:txBody>
-                  <a:tcPr>
-                    <a:solidFill>
-                      <a:srgbClr val="FFF1F2"/>
-                    </a:solidFill>
+                  <a:tcPr anchor="ctr">
+                    <a:solidFill>
+                      <a:srgbClr val="FFFFFF"/>
+                    </a:solidFill>
+                    <a:lnL w="6350" cap="flat" cmpd="sng" algn="ctr">
+                      <a:solidFill>
+                        <a:srgbClr val="BDBDBD"/>
+                      </a:solidFill>
+                    </a:lnL>
+                    <a:lnR w="6350" cap="flat" cmpd="sng" algn="ctr">
+                      <a:solidFill>
+                        <a:srgbClr val="BDBDBD"/>
+                      </a:solidFill>
+                    </a:lnR>
+                    <a:lnT w="6350" cap="flat" cmpd="sng" algn="ctr">
+                      <a:solidFill>
+                        <a:srgbClr val="BDBDBD"/>
+                      </a:solidFill>
+                    </a:lnT>
+                    <a:lnB w="6350" cap="flat" cmpd="sng" algn="ctr">
+                      <a:solidFill>
+                        <a:srgbClr val="BDBDBD"/>
+                      </a:solidFill>
+                    </a:lnB>
                   </a:tcPr>
                 </a:tc>
                 <a:tc>
@@ -6205,10 +7585,30 @@
                       </a:r>
                     </a:p>
                   </a:txBody>
-                  <a:tcPr>
-                    <a:solidFill>
-                      <a:srgbClr val="FFF1F2"/>
-                    </a:solidFill>
+                  <a:tcPr anchor="ctr">
+                    <a:solidFill>
+                      <a:srgbClr val="FFFFFF"/>
+                    </a:solidFill>
+                    <a:lnL w="6350" cap="flat" cmpd="sng" algn="ctr">
+                      <a:solidFill>
+                        <a:srgbClr val="BDBDBD"/>
+                      </a:solidFill>
+                    </a:lnL>
+                    <a:lnR w="6350" cap="flat" cmpd="sng" algn="ctr">
+                      <a:solidFill>
+                        <a:srgbClr val="BDBDBD"/>
+                      </a:solidFill>
+                    </a:lnR>
+                    <a:lnT w="6350" cap="flat" cmpd="sng" algn="ctr">
+                      <a:solidFill>
+                        <a:srgbClr val="BDBDBD"/>
+                      </a:solidFill>
+                    </a:lnT>
+                    <a:lnB w="6350" cap="flat" cmpd="sng" algn="ctr">
+                      <a:solidFill>
+                        <a:srgbClr val="BDBDBD"/>
+                      </a:solidFill>
+                    </a:lnB>
                   </a:tcPr>
                 </a:tc>
                 <a:tc>
@@ -6228,10 +7628,30 @@
                       </a:r>
                     </a:p>
                   </a:txBody>
-                  <a:tcPr>
-                    <a:solidFill>
-                      <a:srgbClr val="FFF1F2"/>
-                    </a:solidFill>
+                  <a:tcPr anchor="ctr">
+                    <a:solidFill>
+                      <a:srgbClr val="FFFFFF"/>
+                    </a:solidFill>
+                    <a:lnL w="6350" cap="flat" cmpd="sng" algn="ctr">
+                      <a:solidFill>
+                        <a:srgbClr val="BDBDBD"/>
+                      </a:solidFill>
+                    </a:lnL>
+                    <a:lnR w="6350" cap="flat" cmpd="sng" algn="ctr">
+                      <a:solidFill>
+                        <a:srgbClr val="BDBDBD"/>
+                      </a:solidFill>
+                    </a:lnR>
+                    <a:lnT w="6350" cap="flat" cmpd="sng" algn="ctr">
+                      <a:solidFill>
+                        <a:srgbClr val="BDBDBD"/>
+                      </a:solidFill>
+                    </a:lnT>
+                    <a:lnB w="6350" cap="flat" cmpd="sng" algn="ctr">
+                      <a:solidFill>
+                        <a:srgbClr val="BDBDBD"/>
+                      </a:solidFill>
+                    </a:lnB>
                   </a:tcPr>
                 </a:tc>
               </a:tr>
@@ -6387,11 +7807,11 @@
             </a:avLst>
           </a:prstGeom>
           <a:solidFill>
-            <a:srgbClr val="DCFCE7"/>
+            <a:srgbClr val="FAFAFA"/>
           </a:solidFill>
           <a:ln w="19050">
             <a:solidFill>
-              <a:srgbClr val="16A34A"/>
+              <a:srgbClr val="BDBDBD"/>
             </a:solidFill>
           </a:ln>
         </p:spPr>
@@ -6417,7 +7837,7 @@
             <a:r>
               <a:rPr sz="1100" b="1">
                 <a:solidFill>
-                  <a:srgbClr val="16A34A"/>
+                  <a:srgbClr val="C7000B"/>
                 </a:solidFill>
                 <a:latin typeface="Microsoft YaHei"/>
               </a:rPr>
@@ -6479,11 +7899,11 @@
             </a:avLst>
           </a:prstGeom>
           <a:solidFill>
-            <a:srgbClr val="DBEAFE"/>
+            <a:srgbClr val="FAFAFA"/>
           </a:solidFill>
           <a:ln w="19050">
             <a:solidFill>
-              <a:srgbClr val="2563EB"/>
+              <a:srgbClr val="BDBDBD"/>
             </a:solidFill>
           </a:ln>
         </p:spPr>
@@ -6509,7 +7929,7 @@
             <a:r>
               <a:rPr sz="1100" b="1">
                 <a:solidFill>
-                  <a:srgbClr val="2563EB"/>
+                  <a:srgbClr val="C7000B"/>
                 </a:solidFill>
                 <a:latin typeface="Microsoft YaHei"/>
               </a:rPr>
@@ -6571,11 +7991,11 @@
             </a:avLst>
           </a:prstGeom>
           <a:solidFill>
-            <a:srgbClr val="FEF3C7"/>
+            <a:srgbClr val="FAFAFA"/>
           </a:solidFill>
           <a:ln w="19050">
             <a:solidFill>
-              <a:srgbClr val="D97706"/>
+              <a:srgbClr val="BDBDBD"/>
             </a:solidFill>
           </a:ln>
         </p:spPr>
@@ -6601,7 +8021,7 @@
             <a:r>
               <a:rPr sz="1100" b="1">
                 <a:solidFill>
-                  <a:srgbClr val="D97706"/>
+                  <a:srgbClr val="C7000B"/>
                 </a:solidFill>
                 <a:latin typeface="Microsoft YaHei"/>
               </a:rPr>
@@ -6687,11 +8107,11 @@
             </a:avLst>
           </a:prstGeom>
           <a:solidFill>
-            <a:srgbClr val="FCE7F3"/>
+            <a:srgbClr val="FAFAFA"/>
           </a:solidFill>
           <a:ln w="19050">
             <a:solidFill>
-              <a:srgbClr val="BE185D"/>
+              <a:srgbClr val="BDBDBD"/>
             </a:solidFill>
           </a:ln>
         </p:spPr>
@@ -6717,7 +8137,7 @@
             <a:r>
               <a:rPr sz="1100" b="1">
                 <a:solidFill>
-                  <a:srgbClr val="BE185D"/>
+                  <a:srgbClr val="C7000B"/>
                 </a:solidFill>
                 <a:latin typeface="Microsoft YaHei"/>
               </a:rPr>
@@ -7201,10 +8621,30 @@
                       </a:r>
                     </a:p>
                   </a:txBody>
-                  <a:tcPr>
+                  <a:tcPr anchor="ctr">
                     <a:solidFill>
                       <a:srgbClr val="F5F5F5"/>
                     </a:solidFill>
+                    <a:lnL w="6350" cap="flat" cmpd="sng" algn="ctr">
+                      <a:solidFill>
+                        <a:srgbClr val="BDBDBD"/>
+                      </a:solidFill>
+                    </a:lnL>
+                    <a:lnR w="6350" cap="flat" cmpd="sng" algn="ctr">
+                      <a:solidFill>
+                        <a:srgbClr val="BDBDBD"/>
+                      </a:solidFill>
+                    </a:lnR>
+                    <a:lnT w="6350" cap="flat" cmpd="sng" algn="ctr">
+                      <a:solidFill>
+                        <a:srgbClr val="BDBDBD"/>
+                      </a:solidFill>
+                    </a:lnT>
+                    <a:lnB w="6350" cap="flat" cmpd="sng" algn="ctr">
+                      <a:solidFill>
+                        <a:srgbClr val="BDBDBD"/>
+                      </a:solidFill>
+                    </a:lnB>
                   </a:tcPr>
                 </a:tc>
                 <a:tc>
@@ -7224,10 +8664,30 @@
                       </a:r>
                     </a:p>
                   </a:txBody>
-                  <a:tcPr>
+                  <a:tcPr anchor="ctr">
                     <a:solidFill>
                       <a:srgbClr val="F5F5F5"/>
                     </a:solidFill>
+                    <a:lnL w="6350" cap="flat" cmpd="sng" algn="ctr">
+                      <a:solidFill>
+                        <a:srgbClr val="BDBDBD"/>
+                      </a:solidFill>
+                    </a:lnL>
+                    <a:lnR w="6350" cap="flat" cmpd="sng" algn="ctr">
+                      <a:solidFill>
+                        <a:srgbClr val="BDBDBD"/>
+                      </a:solidFill>
+                    </a:lnR>
+                    <a:lnT w="6350" cap="flat" cmpd="sng" algn="ctr">
+                      <a:solidFill>
+                        <a:srgbClr val="BDBDBD"/>
+                      </a:solidFill>
+                    </a:lnT>
+                    <a:lnB w="6350" cap="flat" cmpd="sng" algn="ctr">
+                      <a:solidFill>
+                        <a:srgbClr val="BDBDBD"/>
+                      </a:solidFill>
+                    </a:lnB>
                   </a:tcPr>
                 </a:tc>
               </a:tr>
@@ -7249,10 +8709,30 @@
                       </a:r>
                     </a:p>
                   </a:txBody>
-                  <a:tcPr>
+                  <a:tcPr anchor="ctr">
                     <a:solidFill>
                       <a:srgbClr val="FFFFFF"/>
                     </a:solidFill>
+                    <a:lnL w="6350" cap="flat" cmpd="sng" algn="ctr">
+                      <a:solidFill>
+                        <a:srgbClr val="BDBDBD"/>
+                      </a:solidFill>
+                    </a:lnL>
+                    <a:lnR w="6350" cap="flat" cmpd="sng" algn="ctr">
+                      <a:solidFill>
+                        <a:srgbClr val="BDBDBD"/>
+                      </a:solidFill>
+                    </a:lnR>
+                    <a:lnT w="6350" cap="flat" cmpd="sng" algn="ctr">
+                      <a:solidFill>
+                        <a:srgbClr val="BDBDBD"/>
+                      </a:solidFill>
+                    </a:lnT>
+                    <a:lnB w="6350" cap="flat" cmpd="sng" algn="ctr">
+                      <a:solidFill>
+                        <a:srgbClr val="BDBDBD"/>
+                      </a:solidFill>
+                    </a:lnB>
                   </a:tcPr>
                 </a:tc>
                 <a:tc>
@@ -7272,10 +8752,30 @@
                       </a:r>
                     </a:p>
                   </a:txBody>
-                  <a:tcPr>
+                  <a:tcPr anchor="ctr">
                     <a:solidFill>
                       <a:srgbClr val="FFFFFF"/>
                     </a:solidFill>
+                    <a:lnL w="6350" cap="flat" cmpd="sng" algn="ctr">
+                      <a:solidFill>
+                        <a:srgbClr val="BDBDBD"/>
+                      </a:solidFill>
+                    </a:lnL>
+                    <a:lnR w="6350" cap="flat" cmpd="sng" algn="ctr">
+                      <a:solidFill>
+                        <a:srgbClr val="BDBDBD"/>
+                      </a:solidFill>
+                    </a:lnR>
+                    <a:lnT w="6350" cap="flat" cmpd="sng" algn="ctr">
+                      <a:solidFill>
+                        <a:srgbClr val="BDBDBD"/>
+                      </a:solidFill>
+                    </a:lnT>
+                    <a:lnB w="6350" cap="flat" cmpd="sng" algn="ctr">
+                      <a:solidFill>
+                        <a:srgbClr val="BDBDBD"/>
+                      </a:solidFill>
+                    </a:lnB>
                   </a:tcPr>
                 </a:tc>
               </a:tr>
@@ -7297,10 +8797,30 @@
                       </a:r>
                     </a:p>
                   </a:txBody>
-                  <a:tcPr>
-                    <a:solidFill>
-                      <a:srgbClr val="FFF1F2"/>
-                    </a:solidFill>
+                  <a:tcPr anchor="ctr">
+                    <a:solidFill>
+                      <a:srgbClr val="FFFFFF"/>
+                    </a:solidFill>
+                    <a:lnL w="6350" cap="flat" cmpd="sng" algn="ctr">
+                      <a:solidFill>
+                        <a:srgbClr val="BDBDBD"/>
+                      </a:solidFill>
+                    </a:lnL>
+                    <a:lnR w="6350" cap="flat" cmpd="sng" algn="ctr">
+                      <a:solidFill>
+                        <a:srgbClr val="BDBDBD"/>
+                      </a:solidFill>
+                    </a:lnR>
+                    <a:lnT w="6350" cap="flat" cmpd="sng" algn="ctr">
+                      <a:solidFill>
+                        <a:srgbClr val="BDBDBD"/>
+                      </a:solidFill>
+                    </a:lnT>
+                    <a:lnB w="6350" cap="flat" cmpd="sng" algn="ctr">
+                      <a:solidFill>
+                        <a:srgbClr val="BDBDBD"/>
+                      </a:solidFill>
+                    </a:lnB>
                   </a:tcPr>
                 </a:tc>
                 <a:tc>
@@ -7320,10 +8840,30 @@
                       </a:r>
                     </a:p>
                   </a:txBody>
-                  <a:tcPr>
-                    <a:solidFill>
-                      <a:srgbClr val="FFF1F2"/>
-                    </a:solidFill>
+                  <a:tcPr anchor="ctr">
+                    <a:solidFill>
+                      <a:srgbClr val="FFFFFF"/>
+                    </a:solidFill>
+                    <a:lnL w="6350" cap="flat" cmpd="sng" algn="ctr">
+                      <a:solidFill>
+                        <a:srgbClr val="BDBDBD"/>
+                      </a:solidFill>
+                    </a:lnL>
+                    <a:lnR w="6350" cap="flat" cmpd="sng" algn="ctr">
+                      <a:solidFill>
+                        <a:srgbClr val="BDBDBD"/>
+                      </a:solidFill>
+                    </a:lnR>
+                    <a:lnT w="6350" cap="flat" cmpd="sng" algn="ctr">
+                      <a:solidFill>
+                        <a:srgbClr val="BDBDBD"/>
+                      </a:solidFill>
+                    </a:lnT>
+                    <a:lnB w="6350" cap="flat" cmpd="sng" algn="ctr">
+                      <a:solidFill>
+                        <a:srgbClr val="BDBDBD"/>
+                      </a:solidFill>
+                    </a:lnB>
                   </a:tcPr>
                 </a:tc>
               </a:tr>
@@ -7345,10 +8885,30 @@
                       </a:r>
                     </a:p>
                   </a:txBody>
-                  <a:tcPr>
+                  <a:tcPr anchor="ctr">
                     <a:solidFill>
                       <a:srgbClr val="FFFFFF"/>
                     </a:solidFill>
+                    <a:lnL w="6350" cap="flat" cmpd="sng" algn="ctr">
+                      <a:solidFill>
+                        <a:srgbClr val="BDBDBD"/>
+                      </a:solidFill>
+                    </a:lnL>
+                    <a:lnR w="6350" cap="flat" cmpd="sng" algn="ctr">
+                      <a:solidFill>
+                        <a:srgbClr val="BDBDBD"/>
+                      </a:solidFill>
+                    </a:lnR>
+                    <a:lnT w="6350" cap="flat" cmpd="sng" algn="ctr">
+                      <a:solidFill>
+                        <a:srgbClr val="BDBDBD"/>
+                      </a:solidFill>
+                    </a:lnT>
+                    <a:lnB w="6350" cap="flat" cmpd="sng" algn="ctr">
+                      <a:solidFill>
+                        <a:srgbClr val="BDBDBD"/>
+                      </a:solidFill>
+                    </a:lnB>
                   </a:tcPr>
                 </a:tc>
                 <a:tc>
@@ -7368,10 +8928,30 @@
                       </a:r>
                     </a:p>
                   </a:txBody>
-                  <a:tcPr>
+                  <a:tcPr anchor="ctr">
                     <a:solidFill>
                       <a:srgbClr val="FFFFFF"/>
                     </a:solidFill>
+                    <a:lnL w="6350" cap="flat" cmpd="sng" algn="ctr">
+                      <a:solidFill>
+                        <a:srgbClr val="BDBDBD"/>
+                      </a:solidFill>
+                    </a:lnL>
+                    <a:lnR w="6350" cap="flat" cmpd="sng" algn="ctr">
+                      <a:solidFill>
+                        <a:srgbClr val="BDBDBD"/>
+                      </a:solidFill>
+                    </a:lnR>
+                    <a:lnT w="6350" cap="flat" cmpd="sng" algn="ctr">
+                      <a:solidFill>
+                        <a:srgbClr val="BDBDBD"/>
+                      </a:solidFill>
+                    </a:lnT>
+                    <a:lnB w="6350" cap="flat" cmpd="sng" algn="ctr">
+                      <a:solidFill>
+                        <a:srgbClr val="BDBDBD"/>
+                      </a:solidFill>
+                    </a:lnB>
                   </a:tcPr>
                 </a:tc>
               </a:tr>
@@ -7393,10 +8973,30 @@
                       </a:r>
                     </a:p>
                   </a:txBody>
-                  <a:tcPr>
-                    <a:solidFill>
-                      <a:srgbClr val="FFF1F2"/>
-                    </a:solidFill>
+                  <a:tcPr anchor="ctr">
+                    <a:solidFill>
+                      <a:srgbClr val="FFFFFF"/>
+                    </a:solidFill>
+                    <a:lnL w="6350" cap="flat" cmpd="sng" algn="ctr">
+                      <a:solidFill>
+                        <a:srgbClr val="BDBDBD"/>
+                      </a:solidFill>
+                    </a:lnL>
+                    <a:lnR w="6350" cap="flat" cmpd="sng" algn="ctr">
+                      <a:solidFill>
+                        <a:srgbClr val="BDBDBD"/>
+                      </a:solidFill>
+                    </a:lnR>
+                    <a:lnT w="6350" cap="flat" cmpd="sng" algn="ctr">
+                      <a:solidFill>
+                        <a:srgbClr val="BDBDBD"/>
+                      </a:solidFill>
+                    </a:lnT>
+                    <a:lnB w="6350" cap="flat" cmpd="sng" algn="ctr">
+                      <a:solidFill>
+                        <a:srgbClr val="BDBDBD"/>
+                      </a:solidFill>
+                    </a:lnB>
                   </a:tcPr>
                 </a:tc>
                 <a:tc>
@@ -7416,10 +9016,30 @@
                       </a:r>
                     </a:p>
                   </a:txBody>
-                  <a:tcPr>
-                    <a:solidFill>
-                      <a:srgbClr val="FFF1F2"/>
-                    </a:solidFill>
+                  <a:tcPr anchor="ctr">
+                    <a:solidFill>
+                      <a:srgbClr val="FFFFFF"/>
+                    </a:solidFill>
+                    <a:lnL w="6350" cap="flat" cmpd="sng" algn="ctr">
+                      <a:solidFill>
+                        <a:srgbClr val="BDBDBD"/>
+                      </a:solidFill>
+                    </a:lnL>
+                    <a:lnR w="6350" cap="flat" cmpd="sng" algn="ctr">
+                      <a:solidFill>
+                        <a:srgbClr val="BDBDBD"/>
+                      </a:solidFill>
+                    </a:lnR>
+                    <a:lnT w="6350" cap="flat" cmpd="sng" algn="ctr">
+                      <a:solidFill>
+                        <a:srgbClr val="BDBDBD"/>
+                      </a:solidFill>
+                    </a:lnT>
+                    <a:lnB w="6350" cap="flat" cmpd="sng" algn="ctr">
+                      <a:solidFill>
+                        <a:srgbClr val="BDBDBD"/>
+                      </a:solidFill>
+                    </a:lnB>
                   </a:tcPr>
                 </a:tc>
               </a:tr>
@@ -7441,10 +9061,30 @@
                       </a:r>
                     </a:p>
                   </a:txBody>
-                  <a:tcPr>
+                  <a:tcPr anchor="ctr">
                     <a:solidFill>
                       <a:srgbClr val="FFFFFF"/>
                     </a:solidFill>
+                    <a:lnL w="6350" cap="flat" cmpd="sng" algn="ctr">
+                      <a:solidFill>
+                        <a:srgbClr val="BDBDBD"/>
+                      </a:solidFill>
+                    </a:lnL>
+                    <a:lnR w="6350" cap="flat" cmpd="sng" algn="ctr">
+                      <a:solidFill>
+                        <a:srgbClr val="BDBDBD"/>
+                      </a:solidFill>
+                    </a:lnR>
+                    <a:lnT w="6350" cap="flat" cmpd="sng" algn="ctr">
+                      <a:solidFill>
+                        <a:srgbClr val="BDBDBD"/>
+                      </a:solidFill>
+                    </a:lnT>
+                    <a:lnB w="6350" cap="flat" cmpd="sng" algn="ctr">
+                      <a:solidFill>
+                        <a:srgbClr val="BDBDBD"/>
+                      </a:solidFill>
+                    </a:lnB>
                   </a:tcPr>
                 </a:tc>
                 <a:tc>
@@ -7464,10 +9104,30 @@
                       </a:r>
                     </a:p>
                   </a:txBody>
-                  <a:tcPr>
+                  <a:tcPr anchor="ctr">
                     <a:solidFill>
                       <a:srgbClr val="FFFFFF"/>
                     </a:solidFill>
+                    <a:lnL w="6350" cap="flat" cmpd="sng" algn="ctr">
+                      <a:solidFill>
+                        <a:srgbClr val="BDBDBD"/>
+                      </a:solidFill>
+                    </a:lnL>
+                    <a:lnR w="6350" cap="flat" cmpd="sng" algn="ctr">
+                      <a:solidFill>
+                        <a:srgbClr val="BDBDBD"/>
+                      </a:solidFill>
+                    </a:lnR>
+                    <a:lnT w="6350" cap="flat" cmpd="sng" algn="ctr">
+                      <a:solidFill>
+                        <a:srgbClr val="BDBDBD"/>
+                      </a:solidFill>
+                    </a:lnT>
+                    <a:lnB w="6350" cap="flat" cmpd="sng" algn="ctr">
+                      <a:solidFill>
+                        <a:srgbClr val="BDBDBD"/>
+                      </a:solidFill>
+                    </a:lnB>
                   </a:tcPr>
                 </a:tc>
               </a:tr>
@@ -7489,10 +9149,30 @@
                       </a:r>
                     </a:p>
                   </a:txBody>
-                  <a:tcPr>
-                    <a:solidFill>
-                      <a:srgbClr val="FFF1F2"/>
-                    </a:solidFill>
+                  <a:tcPr anchor="ctr">
+                    <a:solidFill>
+                      <a:srgbClr val="FFFFFF"/>
+                    </a:solidFill>
+                    <a:lnL w="6350" cap="flat" cmpd="sng" algn="ctr">
+                      <a:solidFill>
+                        <a:srgbClr val="BDBDBD"/>
+                      </a:solidFill>
+                    </a:lnL>
+                    <a:lnR w="6350" cap="flat" cmpd="sng" algn="ctr">
+                      <a:solidFill>
+                        <a:srgbClr val="BDBDBD"/>
+                      </a:solidFill>
+                    </a:lnR>
+                    <a:lnT w="6350" cap="flat" cmpd="sng" algn="ctr">
+                      <a:solidFill>
+                        <a:srgbClr val="BDBDBD"/>
+                      </a:solidFill>
+                    </a:lnT>
+                    <a:lnB w="6350" cap="flat" cmpd="sng" algn="ctr">
+                      <a:solidFill>
+                        <a:srgbClr val="BDBDBD"/>
+                      </a:solidFill>
+                    </a:lnB>
                   </a:tcPr>
                 </a:tc>
                 <a:tc>
@@ -7512,10 +9192,30 @@
                       </a:r>
                     </a:p>
                   </a:txBody>
-                  <a:tcPr>
-                    <a:solidFill>
-                      <a:srgbClr val="FFF1F2"/>
-                    </a:solidFill>
+                  <a:tcPr anchor="ctr">
+                    <a:solidFill>
+                      <a:srgbClr val="FFFFFF"/>
+                    </a:solidFill>
+                    <a:lnL w="6350" cap="flat" cmpd="sng" algn="ctr">
+                      <a:solidFill>
+                        <a:srgbClr val="BDBDBD"/>
+                      </a:solidFill>
+                    </a:lnL>
+                    <a:lnR w="6350" cap="flat" cmpd="sng" algn="ctr">
+                      <a:solidFill>
+                        <a:srgbClr val="BDBDBD"/>
+                      </a:solidFill>
+                    </a:lnR>
+                    <a:lnT w="6350" cap="flat" cmpd="sng" algn="ctr">
+                      <a:solidFill>
+                        <a:srgbClr val="BDBDBD"/>
+                      </a:solidFill>
+                    </a:lnT>
+                    <a:lnB w="6350" cap="flat" cmpd="sng" algn="ctr">
+                      <a:solidFill>
+                        <a:srgbClr val="BDBDBD"/>
+                      </a:solidFill>
+                    </a:lnB>
                   </a:tcPr>
                 </a:tc>
               </a:tr>
@@ -7549,7 +9249,7 @@
             <a:r>
               <a:rPr sz="1600" b="1">
                 <a:solidFill>
-                  <a:srgbClr val="2E7D32"/>
+                  <a:srgbClr val="202020"/>
                 </a:solidFill>
                 <a:latin typeface="Microsoft YaHei"/>
               </a:rPr>
@@ -7598,10 +9298,30 @@
                       </a:r>
                     </a:p>
                   </a:txBody>
-                  <a:tcPr>
+                  <a:tcPr anchor="ctr">
                     <a:solidFill>
                       <a:srgbClr val="F5F5F5"/>
                     </a:solidFill>
+                    <a:lnL w="6350" cap="flat" cmpd="sng" algn="ctr">
+                      <a:solidFill>
+                        <a:srgbClr val="BDBDBD"/>
+                      </a:solidFill>
+                    </a:lnL>
+                    <a:lnR w="6350" cap="flat" cmpd="sng" algn="ctr">
+                      <a:solidFill>
+                        <a:srgbClr val="BDBDBD"/>
+                      </a:solidFill>
+                    </a:lnR>
+                    <a:lnT w="6350" cap="flat" cmpd="sng" algn="ctr">
+                      <a:solidFill>
+                        <a:srgbClr val="BDBDBD"/>
+                      </a:solidFill>
+                    </a:lnT>
+                    <a:lnB w="6350" cap="flat" cmpd="sng" algn="ctr">
+                      <a:solidFill>
+                        <a:srgbClr val="BDBDBD"/>
+                      </a:solidFill>
+                    </a:lnB>
                   </a:tcPr>
                 </a:tc>
                 <a:tc>
@@ -7621,10 +9341,30 @@
                       </a:r>
                     </a:p>
                   </a:txBody>
-                  <a:tcPr>
+                  <a:tcPr anchor="ctr">
                     <a:solidFill>
                       <a:srgbClr val="F5F5F5"/>
                     </a:solidFill>
+                    <a:lnL w="6350" cap="flat" cmpd="sng" algn="ctr">
+                      <a:solidFill>
+                        <a:srgbClr val="BDBDBD"/>
+                      </a:solidFill>
+                    </a:lnL>
+                    <a:lnR w="6350" cap="flat" cmpd="sng" algn="ctr">
+                      <a:solidFill>
+                        <a:srgbClr val="BDBDBD"/>
+                      </a:solidFill>
+                    </a:lnR>
+                    <a:lnT w="6350" cap="flat" cmpd="sng" algn="ctr">
+                      <a:solidFill>
+                        <a:srgbClr val="BDBDBD"/>
+                      </a:solidFill>
+                    </a:lnT>
+                    <a:lnB w="6350" cap="flat" cmpd="sng" algn="ctr">
+                      <a:solidFill>
+                        <a:srgbClr val="BDBDBD"/>
+                      </a:solidFill>
+                    </a:lnB>
                   </a:tcPr>
                 </a:tc>
               </a:tr>
@@ -7646,10 +9386,30 @@
                       </a:r>
                     </a:p>
                   </a:txBody>
-                  <a:tcPr>
+                  <a:tcPr anchor="ctr">
                     <a:solidFill>
                       <a:srgbClr val="FFFFFF"/>
                     </a:solidFill>
+                    <a:lnL w="6350" cap="flat" cmpd="sng" algn="ctr">
+                      <a:solidFill>
+                        <a:srgbClr val="BDBDBD"/>
+                      </a:solidFill>
+                    </a:lnL>
+                    <a:lnR w="6350" cap="flat" cmpd="sng" algn="ctr">
+                      <a:solidFill>
+                        <a:srgbClr val="BDBDBD"/>
+                      </a:solidFill>
+                    </a:lnR>
+                    <a:lnT w="6350" cap="flat" cmpd="sng" algn="ctr">
+                      <a:solidFill>
+                        <a:srgbClr val="BDBDBD"/>
+                      </a:solidFill>
+                    </a:lnT>
+                    <a:lnB w="6350" cap="flat" cmpd="sng" algn="ctr">
+                      <a:solidFill>
+                        <a:srgbClr val="BDBDBD"/>
+                      </a:solidFill>
+                    </a:lnB>
                   </a:tcPr>
                 </a:tc>
                 <a:tc>
@@ -7669,10 +9429,30 @@
                       </a:r>
                     </a:p>
                   </a:txBody>
-                  <a:tcPr>
+                  <a:tcPr anchor="ctr">
                     <a:solidFill>
                       <a:srgbClr val="FFFFFF"/>
                     </a:solidFill>
+                    <a:lnL w="6350" cap="flat" cmpd="sng" algn="ctr">
+                      <a:solidFill>
+                        <a:srgbClr val="BDBDBD"/>
+                      </a:solidFill>
+                    </a:lnL>
+                    <a:lnR w="6350" cap="flat" cmpd="sng" algn="ctr">
+                      <a:solidFill>
+                        <a:srgbClr val="BDBDBD"/>
+                      </a:solidFill>
+                    </a:lnR>
+                    <a:lnT w="6350" cap="flat" cmpd="sng" algn="ctr">
+                      <a:solidFill>
+                        <a:srgbClr val="BDBDBD"/>
+                      </a:solidFill>
+                    </a:lnT>
+                    <a:lnB w="6350" cap="flat" cmpd="sng" algn="ctr">
+                      <a:solidFill>
+                        <a:srgbClr val="BDBDBD"/>
+                      </a:solidFill>
+                    </a:lnB>
                   </a:tcPr>
                 </a:tc>
               </a:tr>
@@ -7694,10 +9474,30 @@
                       </a:r>
                     </a:p>
                   </a:txBody>
-                  <a:tcPr>
-                    <a:solidFill>
-                      <a:srgbClr val="FFF1F2"/>
-                    </a:solidFill>
+                  <a:tcPr anchor="ctr">
+                    <a:solidFill>
+                      <a:srgbClr val="FFFFFF"/>
+                    </a:solidFill>
+                    <a:lnL w="6350" cap="flat" cmpd="sng" algn="ctr">
+                      <a:solidFill>
+                        <a:srgbClr val="BDBDBD"/>
+                      </a:solidFill>
+                    </a:lnL>
+                    <a:lnR w="6350" cap="flat" cmpd="sng" algn="ctr">
+                      <a:solidFill>
+                        <a:srgbClr val="BDBDBD"/>
+                      </a:solidFill>
+                    </a:lnR>
+                    <a:lnT w="6350" cap="flat" cmpd="sng" algn="ctr">
+                      <a:solidFill>
+                        <a:srgbClr val="BDBDBD"/>
+                      </a:solidFill>
+                    </a:lnT>
+                    <a:lnB w="6350" cap="flat" cmpd="sng" algn="ctr">
+                      <a:solidFill>
+                        <a:srgbClr val="BDBDBD"/>
+                      </a:solidFill>
+                    </a:lnB>
                   </a:tcPr>
                 </a:tc>
                 <a:tc>
@@ -7717,10 +9517,30 @@
                       </a:r>
                     </a:p>
                   </a:txBody>
-                  <a:tcPr>
-                    <a:solidFill>
-                      <a:srgbClr val="FFF1F2"/>
-                    </a:solidFill>
+                  <a:tcPr anchor="ctr">
+                    <a:solidFill>
+                      <a:srgbClr val="FFFFFF"/>
+                    </a:solidFill>
+                    <a:lnL w="6350" cap="flat" cmpd="sng" algn="ctr">
+                      <a:solidFill>
+                        <a:srgbClr val="BDBDBD"/>
+                      </a:solidFill>
+                    </a:lnL>
+                    <a:lnR w="6350" cap="flat" cmpd="sng" algn="ctr">
+                      <a:solidFill>
+                        <a:srgbClr val="BDBDBD"/>
+                      </a:solidFill>
+                    </a:lnR>
+                    <a:lnT w="6350" cap="flat" cmpd="sng" algn="ctr">
+                      <a:solidFill>
+                        <a:srgbClr val="BDBDBD"/>
+                      </a:solidFill>
+                    </a:lnT>
+                    <a:lnB w="6350" cap="flat" cmpd="sng" algn="ctr">
+                      <a:solidFill>
+                        <a:srgbClr val="BDBDBD"/>
+                      </a:solidFill>
+                    </a:lnB>
                   </a:tcPr>
                 </a:tc>
               </a:tr>
@@ -7742,10 +9562,30 @@
                       </a:r>
                     </a:p>
                   </a:txBody>
-                  <a:tcPr>
+                  <a:tcPr anchor="ctr">
                     <a:solidFill>
                       <a:srgbClr val="FFFFFF"/>
                     </a:solidFill>
+                    <a:lnL w="6350" cap="flat" cmpd="sng" algn="ctr">
+                      <a:solidFill>
+                        <a:srgbClr val="BDBDBD"/>
+                      </a:solidFill>
+                    </a:lnL>
+                    <a:lnR w="6350" cap="flat" cmpd="sng" algn="ctr">
+                      <a:solidFill>
+                        <a:srgbClr val="BDBDBD"/>
+                      </a:solidFill>
+                    </a:lnR>
+                    <a:lnT w="6350" cap="flat" cmpd="sng" algn="ctr">
+                      <a:solidFill>
+                        <a:srgbClr val="BDBDBD"/>
+                      </a:solidFill>
+                    </a:lnT>
+                    <a:lnB w="6350" cap="flat" cmpd="sng" algn="ctr">
+                      <a:solidFill>
+                        <a:srgbClr val="BDBDBD"/>
+                      </a:solidFill>
+                    </a:lnB>
                   </a:tcPr>
                 </a:tc>
                 <a:tc>
@@ -7765,10 +9605,30 @@
                       </a:r>
                     </a:p>
                   </a:txBody>
-                  <a:tcPr>
+                  <a:tcPr anchor="ctr">
                     <a:solidFill>
                       <a:srgbClr val="FFFFFF"/>
                     </a:solidFill>
+                    <a:lnL w="6350" cap="flat" cmpd="sng" algn="ctr">
+                      <a:solidFill>
+                        <a:srgbClr val="BDBDBD"/>
+                      </a:solidFill>
+                    </a:lnL>
+                    <a:lnR w="6350" cap="flat" cmpd="sng" algn="ctr">
+                      <a:solidFill>
+                        <a:srgbClr val="BDBDBD"/>
+                      </a:solidFill>
+                    </a:lnR>
+                    <a:lnT w="6350" cap="flat" cmpd="sng" algn="ctr">
+                      <a:solidFill>
+                        <a:srgbClr val="BDBDBD"/>
+                      </a:solidFill>
+                    </a:lnT>
+                    <a:lnB w="6350" cap="flat" cmpd="sng" algn="ctr">
+                      <a:solidFill>
+                        <a:srgbClr val="BDBDBD"/>
+                      </a:solidFill>
+                    </a:lnB>
                   </a:tcPr>
                 </a:tc>
               </a:tr>
@@ -7791,7 +9651,7 @@
             <a:avLst/>
           </a:prstGeom>
           <a:solidFill>
-            <a:srgbClr val="C7000B"/>
+            <a:srgbClr val="FAFAFA"/>
           </a:solidFill>
           <a:ln>
             <a:solidFill>
@@ -7821,7 +9681,7 @@
             <a:r>
               <a:rPr sz="1400" b="1">
                 <a:solidFill>
-                  <a:srgbClr val="FFFFFF"/>
+                  <a:srgbClr val="C7000B"/>
                 </a:solidFill>
                 <a:latin typeface="Microsoft YaHei"/>
               </a:rPr>
@@ -7976,10 +9836,12 @@
             <a:avLst/>
           </a:prstGeom>
           <a:solidFill>
-            <a:srgbClr val="E53935"/>
+            <a:srgbClr val="FAFAFA"/>
           </a:solidFill>
-          <a:ln>
-            <a:noFill/>
+          <a:ln w="6350">
+            <a:solidFill>
+              <a:srgbClr val="BDBDBD"/>
+            </a:solidFill>
           </a:ln>
         </p:spPr>
         <p:style>
@@ -8030,7 +9892,7 @@
             <a:r>
               <a:rPr sz="1100" b="1">
                 <a:solidFill>
-                  <a:srgbClr val="FFFFFF"/>
+                  <a:srgbClr val="202020"/>
                 </a:solidFill>
                 <a:latin typeface="Microsoft YaHei"/>
               </a:rPr>
@@ -8065,7 +9927,7 @@
             <a:r>
               <a:rPr sz="2200" b="1">
                 <a:solidFill>
-                  <a:srgbClr val="FFFFFF"/>
+                  <a:srgbClr val="C7000B"/>
                 </a:solidFill>
                 <a:latin typeface="Microsoft YaHei"/>
               </a:rPr>
@@ -8100,7 +9962,7 @@
             <a:r>
               <a:rPr sz="1000" b="0">
                 <a:solidFill>
-                  <a:srgbClr val="FFFFFF"/>
+                  <a:srgbClr val="606060"/>
                 </a:solidFill>
                 <a:latin typeface="Microsoft YaHei"/>
               </a:rPr>
@@ -8124,10 +9986,12 @@
             <a:avLst/>
           </a:prstGeom>
           <a:solidFill>
-            <a:srgbClr val="C7000B"/>
+            <a:srgbClr val="FAFAFA"/>
           </a:solidFill>
-          <a:ln>
-            <a:noFill/>
+          <a:ln w="6350">
+            <a:solidFill>
+              <a:srgbClr val="BDBDBD"/>
+            </a:solidFill>
           </a:ln>
         </p:spPr>
         <p:style>
@@ -8178,7 +10042,7 @@
             <a:r>
               <a:rPr sz="1100" b="1">
                 <a:solidFill>
-                  <a:srgbClr val="FFFFFF"/>
+                  <a:srgbClr val="202020"/>
                 </a:solidFill>
                 <a:latin typeface="Microsoft YaHei"/>
               </a:rPr>
@@ -8213,7 +10077,7 @@
             <a:r>
               <a:rPr sz="2200" b="1">
                 <a:solidFill>
-                  <a:srgbClr val="FFFFFF"/>
+                  <a:srgbClr val="C7000B"/>
                 </a:solidFill>
                 <a:latin typeface="Microsoft YaHei"/>
               </a:rPr>
@@ -8248,7 +10112,7 @@
             <a:r>
               <a:rPr sz="1000" b="0">
                 <a:solidFill>
-                  <a:srgbClr val="FFFFFF"/>
+                  <a:srgbClr val="606060"/>
                 </a:solidFill>
                 <a:latin typeface="Microsoft YaHei"/>
               </a:rPr>
@@ -8272,10 +10136,12 @@
             <a:avLst/>
           </a:prstGeom>
           <a:solidFill>
-            <a:srgbClr val="2E7D32"/>
+            <a:srgbClr val="FAFAFA"/>
           </a:solidFill>
-          <a:ln>
-            <a:noFill/>
+          <a:ln w="6350">
+            <a:solidFill>
+              <a:srgbClr val="BDBDBD"/>
+            </a:solidFill>
           </a:ln>
         </p:spPr>
         <p:style>
@@ -8326,7 +10192,7 @@
             <a:r>
               <a:rPr sz="1100" b="1">
                 <a:solidFill>
-                  <a:srgbClr val="FFFFFF"/>
+                  <a:srgbClr val="202020"/>
                 </a:solidFill>
                 <a:latin typeface="Microsoft YaHei"/>
               </a:rPr>
@@ -8361,7 +10227,7 @@
             <a:r>
               <a:rPr sz="2200" b="1">
                 <a:solidFill>
-                  <a:srgbClr val="FFFFFF"/>
+                  <a:srgbClr val="C7000B"/>
                 </a:solidFill>
                 <a:latin typeface="Microsoft YaHei"/>
               </a:rPr>
@@ -8396,7 +10262,7 @@
             <a:r>
               <a:rPr sz="1000" b="0">
                 <a:solidFill>
-                  <a:srgbClr val="FFFFFF"/>
+                  <a:srgbClr val="606060"/>
                 </a:solidFill>
                 <a:latin typeface="Microsoft YaHei"/>
               </a:rPr>
@@ -8420,10 +10286,12 @@
             <a:avLst/>
           </a:prstGeom>
           <a:solidFill>
-            <a:srgbClr val="F57C00"/>
+            <a:srgbClr val="FAFAFA"/>
           </a:solidFill>
-          <a:ln>
-            <a:noFill/>
+          <a:ln w="6350">
+            <a:solidFill>
+              <a:srgbClr val="BDBDBD"/>
+            </a:solidFill>
           </a:ln>
         </p:spPr>
         <p:style>
@@ -8474,7 +10342,7 @@
             <a:r>
               <a:rPr sz="1100" b="1">
                 <a:solidFill>
-                  <a:srgbClr val="FFFFFF"/>
+                  <a:srgbClr val="202020"/>
                 </a:solidFill>
                 <a:latin typeface="Microsoft YaHei"/>
               </a:rPr>
@@ -8509,7 +10377,7 @@
             <a:r>
               <a:rPr sz="2200" b="1">
                 <a:solidFill>
-                  <a:srgbClr val="FFFFFF"/>
+                  <a:srgbClr val="C7000B"/>
                 </a:solidFill>
                 <a:latin typeface="Microsoft YaHei"/>
               </a:rPr>
@@ -8544,7 +10412,7 @@
             <a:r>
               <a:rPr sz="1000" b="0">
                 <a:solidFill>
-                  <a:srgbClr val="FFFFFF"/>
+                  <a:srgbClr val="606060"/>
                 </a:solidFill>
                 <a:latin typeface="Microsoft YaHei"/>
               </a:rPr>
@@ -8579,7 +10447,7 @@
             <a:r>
               <a:rPr sz="1400" b="1">
                 <a:solidFill>
-                  <a:srgbClr val="E53935"/>
+                  <a:srgbClr val="C7000B"/>
                 </a:solidFill>
                 <a:latin typeface="Microsoft YaHei"/>
               </a:rPr>
@@ -8628,10 +10496,30 @@
                       </a:r>
                     </a:p>
                   </a:txBody>
-                  <a:tcPr>
+                  <a:tcPr anchor="ctr">
                     <a:solidFill>
                       <a:srgbClr val="F5F5F5"/>
                     </a:solidFill>
+                    <a:lnL w="6350" cap="flat" cmpd="sng" algn="ctr">
+                      <a:solidFill>
+                        <a:srgbClr val="BDBDBD"/>
+                      </a:solidFill>
+                    </a:lnL>
+                    <a:lnR w="6350" cap="flat" cmpd="sng" algn="ctr">
+                      <a:solidFill>
+                        <a:srgbClr val="BDBDBD"/>
+                      </a:solidFill>
+                    </a:lnR>
+                    <a:lnT w="6350" cap="flat" cmpd="sng" algn="ctr">
+                      <a:solidFill>
+                        <a:srgbClr val="BDBDBD"/>
+                      </a:solidFill>
+                    </a:lnT>
+                    <a:lnB w="6350" cap="flat" cmpd="sng" algn="ctr">
+                      <a:solidFill>
+                        <a:srgbClr val="BDBDBD"/>
+                      </a:solidFill>
+                    </a:lnB>
                   </a:tcPr>
                 </a:tc>
                 <a:tc>
@@ -8651,10 +10539,30 @@
                       </a:r>
                     </a:p>
                   </a:txBody>
-                  <a:tcPr>
+                  <a:tcPr anchor="ctr">
                     <a:solidFill>
                       <a:srgbClr val="F5F5F5"/>
                     </a:solidFill>
+                    <a:lnL w="6350" cap="flat" cmpd="sng" algn="ctr">
+                      <a:solidFill>
+                        <a:srgbClr val="BDBDBD"/>
+                      </a:solidFill>
+                    </a:lnL>
+                    <a:lnR w="6350" cap="flat" cmpd="sng" algn="ctr">
+                      <a:solidFill>
+                        <a:srgbClr val="BDBDBD"/>
+                      </a:solidFill>
+                    </a:lnR>
+                    <a:lnT w="6350" cap="flat" cmpd="sng" algn="ctr">
+                      <a:solidFill>
+                        <a:srgbClr val="BDBDBD"/>
+                      </a:solidFill>
+                    </a:lnT>
+                    <a:lnB w="6350" cap="flat" cmpd="sng" algn="ctr">
+                      <a:solidFill>
+                        <a:srgbClr val="BDBDBD"/>
+                      </a:solidFill>
+                    </a:lnB>
                   </a:tcPr>
                 </a:tc>
               </a:tr>
@@ -8676,10 +10584,30 @@
                       </a:r>
                     </a:p>
                   </a:txBody>
-                  <a:tcPr>
+                  <a:tcPr anchor="ctr">
                     <a:solidFill>
                       <a:srgbClr val="FFFFFF"/>
                     </a:solidFill>
+                    <a:lnL w="6350" cap="flat" cmpd="sng" algn="ctr">
+                      <a:solidFill>
+                        <a:srgbClr val="BDBDBD"/>
+                      </a:solidFill>
+                    </a:lnL>
+                    <a:lnR w="6350" cap="flat" cmpd="sng" algn="ctr">
+                      <a:solidFill>
+                        <a:srgbClr val="BDBDBD"/>
+                      </a:solidFill>
+                    </a:lnR>
+                    <a:lnT w="6350" cap="flat" cmpd="sng" algn="ctr">
+                      <a:solidFill>
+                        <a:srgbClr val="BDBDBD"/>
+                      </a:solidFill>
+                    </a:lnT>
+                    <a:lnB w="6350" cap="flat" cmpd="sng" algn="ctr">
+                      <a:solidFill>
+                        <a:srgbClr val="BDBDBD"/>
+                      </a:solidFill>
+                    </a:lnB>
                   </a:tcPr>
                 </a:tc>
                 <a:tc>
@@ -8699,10 +10627,30 @@
                       </a:r>
                     </a:p>
                   </a:txBody>
-                  <a:tcPr>
+                  <a:tcPr anchor="ctr">
                     <a:solidFill>
                       <a:srgbClr val="FFFFFF"/>
                     </a:solidFill>
+                    <a:lnL w="6350" cap="flat" cmpd="sng" algn="ctr">
+                      <a:solidFill>
+                        <a:srgbClr val="BDBDBD"/>
+                      </a:solidFill>
+                    </a:lnL>
+                    <a:lnR w="6350" cap="flat" cmpd="sng" algn="ctr">
+                      <a:solidFill>
+                        <a:srgbClr val="BDBDBD"/>
+                      </a:solidFill>
+                    </a:lnR>
+                    <a:lnT w="6350" cap="flat" cmpd="sng" algn="ctr">
+                      <a:solidFill>
+                        <a:srgbClr val="BDBDBD"/>
+                      </a:solidFill>
+                    </a:lnT>
+                    <a:lnB w="6350" cap="flat" cmpd="sng" algn="ctr">
+                      <a:solidFill>
+                        <a:srgbClr val="BDBDBD"/>
+                      </a:solidFill>
+                    </a:lnB>
                   </a:tcPr>
                 </a:tc>
               </a:tr>
@@ -8724,10 +10672,30 @@
                       </a:r>
                     </a:p>
                   </a:txBody>
-                  <a:tcPr>
-                    <a:solidFill>
-                      <a:srgbClr val="FFF1F2"/>
-                    </a:solidFill>
+                  <a:tcPr anchor="ctr">
+                    <a:solidFill>
+                      <a:srgbClr val="FFFFFF"/>
+                    </a:solidFill>
+                    <a:lnL w="6350" cap="flat" cmpd="sng" algn="ctr">
+                      <a:solidFill>
+                        <a:srgbClr val="BDBDBD"/>
+                      </a:solidFill>
+                    </a:lnL>
+                    <a:lnR w="6350" cap="flat" cmpd="sng" algn="ctr">
+                      <a:solidFill>
+                        <a:srgbClr val="BDBDBD"/>
+                      </a:solidFill>
+                    </a:lnR>
+                    <a:lnT w="6350" cap="flat" cmpd="sng" algn="ctr">
+                      <a:solidFill>
+                        <a:srgbClr val="BDBDBD"/>
+                      </a:solidFill>
+                    </a:lnT>
+                    <a:lnB w="6350" cap="flat" cmpd="sng" algn="ctr">
+                      <a:solidFill>
+                        <a:srgbClr val="BDBDBD"/>
+                      </a:solidFill>
+                    </a:lnB>
                   </a:tcPr>
                 </a:tc>
                 <a:tc>
@@ -8747,10 +10715,30 @@
                       </a:r>
                     </a:p>
                   </a:txBody>
-                  <a:tcPr>
-                    <a:solidFill>
-                      <a:srgbClr val="FFF1F2"/>
-                    </a:solidFill>
+                  <a:tcPr anchor="ctr">
+                    <a:solidFill>
+                      <a:srgbClr val="FFFFFF"/>
+                    </a:solidFill>
+                    <a:lnL w="6350" cap="flat" cmpd="sng" algn="ctr">
+                      <a:solidFill>
+                        <a:srgbClr val="BDBDBD"/>
+                      </a:solidFill>
+                    </a:lnL>
+                    <a:lnR w="6350" cap="flat" cmpd="sng" algn="ctr">
+                      <a:solidFill>
+                        <a:srgbClr val="BDBDBD"/>
+                      </a:solidFill>
+                    </a:lnR>
+                    <a:lnT w="6350" cap="flat" cmpd="sng" algn="ctr">
+                      <a:solidFill>
+                        <a:srgbClr val="BDBDBD"/>
+                      </a:solidFill>
+                    </a:lnT>
+                    <a:lnB w="6350" cap="flat" cmpd="sng" algn="ctr">
+                      <a:solidFill>
+                        <a:srgbClr val="BDBDBD"/>
+                      </a:solidFill>
+                    </a:lnB>
                   </a:tcPr>
                 </a:tc>
               </a:tr>
@@ -8772,10 +10760,30 @@
                       </a:r>
                     </a:p>
                   </a:txBody>
-                  <a:tcPr>
+                  <a:tcPr anchor="ctr">
                     <a:solidFill>
                       <a:srgbClr val="FFFFFF"/>
                     </a:solidFill>
+                    <a:lnL w="6350" cap="flat" cmpd="sng" algn="ctr">
+                      <a:solidFill>
+                        <a:srgbClr val="BDBDBD"/>
+                      </a:solidFill>
+                    </a:lnL>
+                    <a:lnR w="6350" cap="flat" cmpd="sng" algn="ctr">
+                      <a:solidFill>
+                        <a:srgbClr val="BDBDBD"/>
+                      </a:solidFill>
+                    </a:lnR>
+                    <a:lnT w="6350" cap="flat" cmpd="sng" algn="ctr">
+                      <a:solidFill>
+                        <a:srgbClr val="BDBDBD"/>
+                      </a:solidFill>
+                    </a:lnT>
+                    <a:lnB w="6350" cap="flat" cmpd="sng" algn="ctr">
+                      <a:solidFill>
+                        <a:srgbClr val="BDBDBD"/>
+                      </a:solidFill>
+                    </a:lnB>
                   </a:tcPr>
                 </a:tc>
                 <a:tc>
@@ -8795,10 +10803,30 @@
                       </a:r>
                     </a:p>
                   </a:txBody>
-                  <a:tcPr>
+                  <a:tcPr anchor="ctr">
                     <a:solidFill>
                       <a:srgbClr val="FFFFFF"/>
                     </a:solidFill>
+                    <a:lnL w="6350" cap="flat" cmpd="sng" algn="ctr">
+                      <a:solidFill>
+                        <a:srgbClr val="BDBDBD"/>
+                      </a:solidFill>
+                    </a:lnL>
+                    <a:lnR w="6350" cap="flat" cmpd="sng" algn="ctr">
+                      <a:solidFill>
+                        <a:srgbClr val="BDBDBD"/>
+                      </a:solidFill>
+                    </a:lnR>
+                    <a:lnT w="6350" cap="flat" cmpd="sng" algn="ctr">
+                      <a:solidFill>
+                        <a:srgbClr val="BDBDBD"/>
+                      </a:solidFill>
+                    </a:lnT>
+                    <a:lnB w="6350" cap="flat" cmpd="sng" algn="ctr">
+                      <a:solidFill>
+                        <a:srgbClr val="BDBDBD"/>
+                      </a:solidFill>
+                    </a:lnB>
                   </a:tcPr>
                 </a:tc>
               </a:tr>
@@ -8881,10 +10909,30 @@
                       </a:r>
                     </a:p>
                   </a:txBody>
-                  <a:tcPr>
+                  <a:tcPr anchor="ctr">
                     <a:solidFill>
                       <a:srgbClr val="F5F5F5"/>
                     </a:solidFill>
+                    <a:lnL w="6350" cap="flat" cmpd="sng" algn="ctr">
+                      <a:solidFill>
+                        <a:srgbClr val="BDBDBD"/>
+                      </a:solidFill>
+                    </a:lnL>
+                    <a:lnR w="6350" cap="flat" cmpd="sng" algn="ctr">
+                      <a:solidFill>
+                        <a:srgbClr val="BDBDBD"/>
+                      </a:solidFill>
+                    </a:lnR>
+                    <a:lnT w="6350" cap="flat" cmpd="sng" algn="ctr">
+                      <a:solidFill>
+                        <a:srgbClr val="BDBDBD"/>
+                      </a:solidFill>
+                    </a:lnT>
+                    <a:lnB w="6350" cap="flat" cmpd="sng" algn="ctr">
+                      <a:solidFill>
+                        <a:srgbClr val="BDBDBD"/>
+                      </a:solidFill>
+                    </a:lnB>
                   </a:tcPr>
                 </a:tc>
                 <a:tc>
@@ -8904,10 +10952,30 @@
                       </a:r>
                     </a:p>
                   </a:txBody>
-                  <a:tcPr>
+                  <a:tcPr anchor="ctr">
                     <a:solidFill>
                       <a:srgbClr val="F5F5F5"/>
                     </a:solidFill>
+                    <a:lnL w="6350" cap="flat" cmpd="sng" algn="ctr">
+                      <a:solidFill>
+                        <a:srgbClr val="BDBDBD"/>
+                      </a:solidFill>
+                    </a:lnL>
+                    <a:lnR w="6350" cap="flat" cmpd="sng" algn="ctr">
+                      <a:solidFill>
+                        <a:srgbClr val="BDBDBD"/>
+                      </a:solidFill>
+                    </a:lnR>
+                    <a:lnT w="6350" cap="flat" cmpd="sng" algn="ctr">
+                      <a:solidFill>
+                        <a:srgbClr val="BDBDBD"/>
+                      </a:solidFill>
+                    </a:lnT>
+                    <a:lnB w="6350" cap="flat" cmpd="sng" algn="ctr">
+                      <a:solidFill>
+                        <a:srgbClr val="BDBDBD"/>
+                      </a:solidFill>
+                    </a:lnB>
                   </a:tcPr>
                 </a:tc>
               </a:tr>
@@ -8929,10 +10997,30 @@
                       </a:r>
                     </a:p>
                   </a:txBody>
-                  <a:tcPr>
+                  <a:tcPr anchor="ctr">
                     <a:solidFill>
                       <a:srgbClr val="FFFFFF"/>
                     </a:solidFill>
+                    <a:lnL w="6350" cap="flat" cmpd="sng" algn="ctr">
+                      <a:solidFill>
+                        <a:srgbClr val="BDBDBD"/>
+                      </a:solidFill>
+                    </a:lnL>
+                    <a:lnR w="6350" cap="flat" cmpd="sng" algn="ctr">
+                      <a:solidFill>
+                        <a:srgbClr val="BDBDBD"/>
+                      </a:solidFill>
+                    </a:lnR>
+                    <a:lnT w="6350" cap="flat" cmpd="sng" algn="ctr">
+                      <a:solidFill>
+                        <a:srgbClr val="BDBDBD"/>
+                      </a:solidFill>
+                    </a:lnT>
+                    <a:lnB w="6350" cap="flat" cmpd="sng" algn="ctr">
+                      <a:solidFill>
+                        <a:srgbClr val="BDBDBD"/>
+                      </a:solidFill>
+                    </a:lnB>
                   </a:tcPr>
                 </a:tc>
                 <a:tc>
@@ -8952,10 +11040,30 @@
                       </a:r>
                     </a:p>
                   </a:txBody>
-                  <a:tcPr>
+                  <a:tcPr anchor="ctr">
                     <a:solidFill>
                       <a:srgbClr val="FFFFFF"/>
                     </a:solidFill>
+                    <a:lnL w="6350" cap="flat" cmpd="sng" algn="ctr">
+                      <a:solidFill>
+                        <a:srgbClr val="BDBDBD"/>
+                      </a:solidFill>
+                    </a:lnL>
+                    <a:lnR w="6350" cap="flat" cmpd="sng" algn="ctr">
+                      <a:solidFill>
+                        <a:srgbClr val="BDBDBD"/>
+                      </a:solidFill>
+                    </a:lnR>
+                    <a:lnT w="6350" cap="flat" cmpd="sng" algn="ctr">
+                      <a:solidFill>
+                        <a:srgbClr val="BDBDBD"/>
+                      </a:solidFill>
+                    </a:lnT>
+                    <a:lnB w="6350" cap="flat" cmpd="sng" algn="ctr">
+                      <a:solidFill>
+                        <a:srgbClr val="BDBDBD"/>
+                      </a:solidFill>
+                    </a:lnB>
                   </a:tcPr>
                 </a:tc>
               </a:tr>
@@ -8977,10 +11085,30 @@
                       </a:r>
                     </a:p>
                   </a:txBody>
-                  <a:tcPr>
-                    <a:solidFill>
-                      <a:srgbClr val="FFF1F2"/>
-                    </a:solidFill>
+                  <a:tcPr anchor="ctr">
+                    <a:solidFill>
+                      <a:srgbClr val="FFFFFF"/>
+                    </a:solidFill>
+                    <a:lnL w="6350" cap="flat" cmpd="sng" algn="ctr">
+                      <a:solidFill>
+                        <a:srgbClr val="BDBDBD"/>
+                      </a:solidFill>
+                    </a:lnL>
+                    <a:lnR w="6350" cap="flat" cmpd="sng" algn="ctr">
+                      <a:solidFill>
+                        <a:srgbClr val="BDBDBD"/>
+                      </a:solidFill>
+                    </a:lnR>
+                    <a:lnT w="6350" cap="flat" cmpd="sng" algn="ctr">
+                      <a:solidFill>
+                        <a:srgbClr val="BDBDBD"/>
+                      </a:solidFill>
+                    </a:lnT>
+                    <a:lnB w="6350" cap="flat" cmpd="sng" algn="ctr">
+                      <a:solidFill>
+                        <a:srgbClr val="BDBDBD"/>
+                      </a:solidFill>
+                    </a:lnB>
                   </a:tcPr>
                 </a:tc>
                 <a:tc>
@@ -9000,10 +11128,30 @@
                       </a:r>
                     </a:p>
                   </a:txBody>
-                  <a:tcPr>
-                    <a:solidFill>
-                      <a:srgbClr val="FFF1F2"/>
-                    </a:solidFill>
+                  <a:tcPr anchor="ctr">
+                    <a:solidFill>
+                      <a:srgbClr val="FFFFFF"/>
+                    </a:solidFill>
+                    <a:lnL w="6350" cap="flat" cmpd="sng" algn="ctr">
+                      <a:solidFill>
+                        <a:srgbClr val="BDBDBD"/>
+                      </a:solidFill>
+                    </a:lnL>
+                    <a:lnR w="6350" cap="flat" cmpd="sng" algn="ctr">
+                      <a:solidFill>
+                        <a:srgbClr val="BDBDBD"/>
+                      </a:solidFill>
+                    </a:lnR>
+                    <a:lnT w="6350" cap="flat" cmpd="sng" algn="ctr">
+                      <a:solidFill>
+                        <a:srgbClr val="BDBDBD"/>
+                      </a:solidFill>
+                    </a:lnT>
+                    <a:lnB w="6350" cap="flat" cmpd="sng" algn="ctr">
+                      <a:solidFill>
+                        <a:srgbClr val="BDBDBD"/>
+                      </a:solidFill>
+                    </a:lnB>
                   </a:tcPr>
                 </a:tc>
               </a:tr>
@@ -9025,10 +11173,30 @@
                       </a:r>
                     </a:p>
                   </a:txBody>
-                  <a:tcPr>
+                  <a:tcPr anchor="ctr">
                     <a:solidFill>
                       <a:srgbClr val="FFFFFF"/>
                     </a:solidFill>
+                    <a:lnL w="6350" cap="flat" cmpd="sng" algn="ctr">
+                      <a:solidFill>
+                        <a:srgbClr val="BDBDBD"/>
+                      </a:solidFill>
+                    </a:lnL>
+                    <a:lnR w="6350" cap="flat" cmpd="sng" algn="ctr">
+                      <a:solidFill>
+                        <a:srgbClr val="BDBDBD"/>
+                      </a:solidFill>
+                    </a:lnR>
+                    <a:lnT w="6350" cap="flat" cmpd="sng" algn="ctr">
+                      <a:solidFill>
+                        <a:srgbClr val="BDBDBD"/>
+                      </a:solidFill>
+                    </a:lnT>
+                    <a:lnB w="6350" cap="flat" cmpd="sng" algn="ctr">
+                      <a:solidFill>
+                        <a:srgbClr val="BDBDBD"/>
+                      </a:solidFill>
+                    </a:lnB>
                   </a:tcPr>
                 </a:tc>
                 <a:tc>
@@ -9048,10 +11216,30 @@
                       </a:r>
                     </a:p>
                   </a:txBody>
-                  <a:tcPr>
+                  <a:tcPr anchor="ctr">
                     <a:solidFill>
                       <a:srgbClr val="FFFFFF"/>
                     </a:solidFill>
+                    <a:lnL w="6350" cap="flat" cmpd="sng" algn="ctr">
+                      <a:solidFill>
+                        <a:srgbClr val="BDBDBD"/>
+                      </a:solidFill>
+                    </a:lnL>
+                    <a:lnR w="6350" cap="flat" cmpd="sng" algn="ctr">
+                      <a:solidFill>
+                        <a:srgbClr val="BDBDBD"/>
+                      </a:solidFill>
+                    </a:lnR>
+                    <a:lnT w="6350" cap="flat" cmpd="sng" algn="ctr">
+                      <a:solidFill>
+                        <a:srgbClr val="BDBDBD"/>
+                      </a:solidFill>
+                    </a:lnT>
+                    <a:lnB w="6350" cap="flat" cmpd="sng" algn="ctr">
+                      <a:solidFill>
+                        <a:srgbClr val="BDBDBD"/>
+                      </a:solidFill>
+                    </a:lnB>
                   </a:tcPr>
                 </a:tc>
               </a:tr>
@@ -9073,10 +11261,30 @@
                       </a:r>
                     </a:p>
                   </a:txBody>
-                  <a:tcPr>
-                    <a:solidFill>
-                      <a:srgbClr val="FFF1F2"/>
-                    </a:solidFill>
+                  <a:tcPr anchor="ctr">
+                    <a:solidFill>
+                      <a:srgbClr val="FFFFFF"/>
+                    </a:solidFill>
+                    <a:lnL w="6350" cap="flat" cmpd="sng" algn="ctr">
+                      <a:solidFill>
+                        <a:srgbClr val="BDBDBD"/>
+                      </a:solidFill>
+                    </a:lnL>
+                    <a:lnR w="6350" cap="flat" cmpd="sng" algn="ctr">
+                      <a:solidFill>
+                        <a:srgbClr val="BDBDBD"/>
+                      </a:solidFill>
+                    </a:lnR>
+                    <a:lnT w="6350" cap="flat" cmpd="sng" algn="ctr">
+                      <a:solidFill>
+                        <a:srgbClr val="BDBDBD"/>
+                      </a:solidFill>
+                    </a:lnT>
+                    <a:lnB w="6350" cap="flat" cmpd="sng" algn="ctr">
+                      <a:solidFill>
+                        <a:srgbClr val="BDBDBD"/>
+                      </a:solidFill>
+                    </a:lnB>
                   </a:tcPr>
                 </a:tc>
                 <a:tc>
@@ -9096,10 +11304,30 @@
                       </a:r>
                     </a:p>
                   </a:txBody>
-                  <a:tcPr>
-                    <a:solidFill>
-                      <a:srgbClr val="FFF1F2"/>
-                    </a:solidFill>
+                  <a:tcPr anchor="ctr">
+                    <a:solidFill>
+                      <a:srgbClr val="FFFFFF"/>
+                    </a:solidFill>
+                    <a:lnL w="6350" cap="flat" cmpd="sng" algn="ctr">
+                      <a:solidFill>
+                        <a:srgbClr val="BDBDBD"/>
+                      </a:solidFill>
+                    </a:lnL>
+                    <a:lnR w="6350" cap="flat" cmpd="sng" algn="ctr">
+                      <a:solidFill>
+                        <a:srgbClr val="BDBDBD"/>
+                      </a:solidFill>
+                    </a:lnR>
+                    <a:lnT w="6350" cap="flat" cmpd="sng" algn="ctr">
+                      <a:solidFill>
+                        <a:srgbClr val="BDBDBD"/>
+                      </a:solidFill>
+                    </a:lnT>
+                    <a:lnB w="6350" cap="flat" cmpd="sng" algn="ctr">
+                      <a:solidFill>
+                        <a:srgbClr val="BDBDBD"/>
+                      </a:solidFill>
+                    </a:lnB>
                   </a:tcPr>
                 </a:tc>
               </a:tr>
@@ -9122,7 +11350,7 @@
             <a:avLst/>
           </a:prstGeom>
           <a:solidFill>
-            <a:srgbClr val="FFF1F2"/>
+            <a:srgbClr val="FAFAFA"/>
           </a:solidFill>
           <a:ln>
             <a:solidFill>
@@ -9510,11 +11738,11 @@
             </a:avLst>
           </a:prstGeom>
           <a:solidFill>
-            <a:srgbClr val="FEE2E2"/>
+            <a:srgbClr val="FAFAFA"/>
           </a:solidFill>
           <a:ln w="19050">
             <a:solidFill>
-              <a:srgbClr val="DC2626"/>
+              <a:srgbClr val="BDBDBD"/>
             </a:solidFill>
           </a:ln>
         </p:spPr>
@@ -9540,7 +11768,7 @@
             <a:r>
               <a:rPr sz="1200" b="1">
                 <a:solidFill>
-                  <a:srgbClr val="DC2626"/>
+                  <a:srgbClr val="202020"/>
                 </a:solidFill>
                 <a:latin typeface="Microsoft YaHei"/>
               </a:rPr>
@@ -9578,11 +11806,11 @@
             </a:avLst>
           </a:prstGeom>
           <a:solidFill>
-            <a:srgbClr val="FED7AA"/>
+            <a:srgbClr val="FAFAFA"/>
           </a:solidFill>
           <a:ln w="19050">
             <a:solidFill>
-              <a:srgbClr val="EA580C"/>
+              <a:srgbClr val="BDBDBD"/>
             </a:solidFill>
           </a:ln>
         </p:spPr>
@@ -9608,7 +11836,7 @@
             <a:r>
               <a:rPr sz="1200" b="1">
                 <a:solidFill>
-                  <a:srgbClr val="EA580C"/>
+                  <a:srgbClr val="202020"/>
                 </a:solidFill>
                 <a:latin typeface="Microsoft YaHei"/>
               </a:rPr>
@@ -9646,11 +11874,11 @@
             </a:avLst>
           </a:prstGeom>
           <a:solidFill>
-            <a:srgbClr val="BBF7D0"/>
+            <a:srgbClr val="FAFAFA"/>
           </a:solidFill>
           <a:ln w="19050">
             <a:solidFill>
-              <a:srgbClr val="16A34A"/>
+              <a:srgbClr val="BDBDBD"/>
             </a:solidFill>
           </a:ln>
         </p:spPr>
@@ -9676,7 +11904,7 @@
             <a:r>
               <a:rPr sz="1200" b="1">
                 <a:solidFill>
-                  <a:srgbClr val="16A34A"/>
+                  <a:srgbClr val="C7000B"/>
                 </a:solidFill>
                 <a:latin typeface="Microsoft YaHei"/>
               </a:rPr>
@@ -9699,7 +11927,50 @@
       </p:sp>
       <p:sp>
         <p:nvSpPr>
-          <p:cNvPr id="8" name="Rounded Rectangle 7"/>
+          <p:cNvPr id="8" name="Rectangle 7"/>
+          <p:cNvSpPr/>
+          <p:nvPr/>
+        </p:nvSpPr>
+        <p:spPr>
+          <a:xfrm>
+            <a:off x="365760" y="2852928"/>
+            <a:ext cx="73152" cy="713232"/>
+          </a:xfrm>
+          <a:prstGeom prst="rect">
+            <a:avLst/>
+          </a:prstGeom>
+          <a:solidFill>
+            <a:srgbClr val="C7000B"/>
+          </a:solidFill>
+          <a:ln>
+            <a:noFill/>
+          </a:ln>
+        </p:spPr>
+        <p:style>
+          <a:lnRef idx="1">
+            <a:schemeClr val="accent1"/>
+          </a:lnRef>
+          <a:fillRef idx="3">
+            <a:schemeClr val="accent1"/>
+          </a:fillRef>
+          <a:effectRef idx="2">
+            <a:schemeClr val="accent1"/>
+          </a:effectRef>
+          <a:fontRef idx="minor">
+            <a:schemeClr val="lt1"/>
+          </a:fontRef>
+        </p:style>
+        <p:txBody>
+          <a:bodyPr rtlCol="0" anchor="ctr"/>
+          <a:lstStyle/>
+          <a:p>
+            <a:pPr algn="ctr"/>
+          </a:p>
+        </p:txBody>
+      </p:sp>
+      <p:sp>
+        <p:nvSpPr>
+          <p:cNvPr id="9" name="Rounded Rectangle 8"/>
           <p:cNvSpPr/>
           <p:nvPr/>
         </p:nvSpPr>
@@ -9714,11 +11985,11 @@
             </a:avLst>
           </a:prstGeom>
           <a:solidFill>
-            <a:srgbClr val="BFDBFE"/>
+            <a:srgbClr val="FAFAFA"/>
           </a:solidFill>
           <a:ln w="19050">
             <a:solidFill>
-              <a:srgbClr val="2563EB"/>
+              <a:srgbClr val="BDBDBD"/>
             </a:solidFill>
           </a:ln>
         </p:spPr>
@@ -9744,7 +12015,7 @@
             <a:r>
               <a:rPr sz="1200" b="1">
                 <a:solidFill>
-                  <a:srgbClr val="2563EB"/>
+                  <a:srgbClr val="C7000B"/>
                 </a:solidFill>
                 <a:latin typeface="Microsoft YaHei"/>
               </a:rPr>
@@ -9767,7 +12038,50 @@
       </p:sp>
       <p:sp>
         <p:nvSpPr>
-          <p:cNvPr id="9" name="TextBox 8"/>
+          <p:cNvPr id="10" name="Rectangle 9"/>
+          <p:cNvSpPr/>
+          <p:nvPr/>
+        </p:nvSpPr>
+        <p:spPr>
+          <a:xfrm>
+            <a:off x="365760" y="3639312"/>
+            <a:ext cx="73152" cy="713232"/>
+          </a:xfrm>
+          <a:prstGeom prst="rect">
+            <a:avLst/>
+          </a:prstGeom>
+          <a:solidFill>
+            <a:srgbClr val="C7000B"/>
+          </a:solidFill>
+          <a:ln>
+            <a:noFill/>
+          </a:ln>
+        </p:spPr>
+        <p:style>
+          <a:lnRef idx="1">
+            <a:schemeClr val="accent1"/>
+          </a:lnRef>
+          <a:fillRef idx="3">
+            <a:schemeClr val="accent1"/>
+          </a:fillRef>
+          <a:effectRef idx="2">
+            <a:schemeClr val="accent1"/>
+          </a:effectRef>
+          <a:fontRef idx="minor">
+            <a:schemeClr val="lt1"/>
+          </a:fontRef>
+        </p:style>
+        <p:txBody>
+          <a:bodyPr rtlCol="0" anchor="ctr"/>
+          <a:lstStyle/>
+          <a:p>
+            <a:pPr algn="ctr"/>
+          </a:p>
+        </p:txBody>
+      </p:sp>
+      <p:sp>
+        <p:nvSpPr>
+          <p:cNvPr id="11" name="TextBox 10"/>
           <p:cNvSpPr txBox="1"/>
           <p:nvPr/>
         </p:nvSpPr>
@@ -9802,7 +12116,7 @@
       </p:sp>
       <p:graphicFrame>
         <p:nvGraphicFramePr>
-          <p:cNvPr id="10" name="Table 9"/>
+          <p:cNvPr id="12" name="Table 11"/>
           <p:cNvGraphicFramePr>
             <a:graphicFrameLocks noGrp="1"/>
           </p:cNvGraphicFramePr>
@@ -9841,10 +12155,30 @@
                       </a:r>
                     </a:p>
                   </a:txBody>
-                  <a:tcPr>
+                  <a:tcPr anchor="ctr">
                     <a:solidFill>
                       <a:srgbClr val="F5F5F5"/>
                     </a:solidFill>
+                    <a:lnL w="6350" cap="flat" cmpd="sng" algn="ctr">
+                      <a:solidFill>
+                        <a:srgbClr val="BDBDBD"/>
+                      </a:solidFill>
+                    </a:lnL>
+                    <a:lnR w="6350" cap="flat" cmpd="sng" algn="ctr">
+                      <a:solidFill>
+                        <a:srgbClr val="BDBDBD"/>
+                      </a:solidFill>
+                    </a:lnR>
+                    <a:lnT w="6350" cap="flat" cmpd="sng" algn="ctr">
+                      <a:solidFill>
+                        <a:srgbClr val="BDBDBD"/>
+                      </a:solidFill>
+                    </a:lnT>
+                    <a:lnB w="6350" cap="flat" cmpd="sng" algn="ctr">
+                      <a:solidFill>
+                        <a:srgbClr val="BDBDBD"/>
+                      </a:solidFill>
+                    </a:lnB>
                   </a:tcPr>
                 </a:tc>
                 <a:tc>
@@ -9864,10 +12198,30 @@
                       </a:r>
                     </a:p>
                   </a:txBody>
-                  <a:tcPr>
+                  <a:tcPr anchor="ctr">
                     <a:solidFill>
                       <a:srgbClr val="F5F5F5"/>
                     </a:solidFill>
+                    <a:lnL w="6350" cap="flat" cmpd="sng" algn="ctr">
+                      <a:solidFill>
+                        <a:srgbClr val="BDBDBD"/>
+                      </a:solidFill>
+                    </a:lnL>
+                    <a:lnR w="6350" cap="flat" cmpd="sng" algn="ctr">
+                      <a:solidFill>
+                        <a:srgbClr val="BDBDBD"/>
+                      </a:solidFill>
+                    </a:lnR>
+                    <a:lnT w="6350" cap="flat" cmpd="sng" algn="ctr">
+                      <a:solidFill>
+                        <a:srgbClr val="BDBDBD"/>
+                      </a:solidFill>
+                    </a:lnT>
+                    <a:lnB w="6350" cap="flat" cmpd="sng" algn="ctr">
+                      <a:solidFill>
+                        <a:srgbClr val="BDBDBD"/>
+                      </a:solidFill>
+                    </a:lnB>
                   </a:tcPr>
                 </a:tc>
                 <a:tc>
@@ -9887,10 +12241,30 @@
                       </a:r>
                     </a:p>
                   </a:txBody>
-                  <a:tcPr>
+                  <a:tcPr anchor="ctr">
                     <a:solidFill>
                       <a:srgbClr val="F5F5F5"/>
                     </a:solidFill>
+                    <a:lnL w="6350" cap="flat" cmpd="sng" algn="ctr">
+                      <a:solidFill>
+                        <a:srgbClr val="BDBDBD"/>
+                      </a:solidFill>
+                    </a:lnL>
+                    <a:lnR w="6350" cap="flat" cmpd="sng" algn="ctr">
+                      <a:solidFill>
+                        <a:srgbClr val="BDBDBD"/>
+                      </a:solidFill>
+                    </a:lnR>
+                    <a:lnT w="6350" cap="flat" cmpd="sng" algn="ctr">
+                      <a:solidFill>
+                        <a:srgbClr val="BDBDBD"/>
+                      </a:solidFill>
+                    </a:lnT>
+                    <a:lnB w="6350" cap="flat" cmpd="sng" algn="ctr">
+                      <a:solidFill>
+                        <a:srgbClr val="BDBDBD"/>
+                      </a:solidFill>
+                    </a:lnB>
                   </a:tcPr>
                 </a:tc>
               </a:tr>
@@ -9912,10 +12286,30 @@
                       </a:r>
                     </a:p>
                   </a:txBody>
-                  <a:tcPr>
+                  <a:tcPr anchor="ctr">
                     <a:solidFill>
                       <a:srgbClr val="FFFFFF"/>
                     </a:solidFill>
+                    <a:lnL w="6350" cap="flat" cmpd="sng" algn="ctr">
+                      <a:solidFill>
+                        <a:srgbClr val="BDBDBD"/>
+                      </a:solidFill>
+                    </a:lnL>
+                    <a:lnR w="6350" cap="flat" cmpd="sng" algn="ctr">
+                      <a:solidFill>
+                        <a:srgbClr val="BDBDBD"/>
+                      </a:solidFill>
+                    </a:lnR>
+                    <a:lnT w="6350" cap="flat" cmpd="sng" algn="ctr">
+                      <a:solidFill>
+                        <a:srgbClr val="BDBDBD"/>
+                      </a:solidFill>
+                    </a:lnT>
+                    <a:lnB w="6350" cap="flat" cmpd="sng" algn="ctr">
+                      <a:solidFill>
+                        <a:srgbClr val="BDBDBD"/>
+                      </a:solidFill>
+                    </a:lnB>
                   </a:tcPr>
                 </a:tc>
                 <a:tc>
@@ -9935,10 +12329,30 @@
                       </a:r>
                     </a:p>
                   </a:txBody>
-                  <a:tcPr>
+                  <a:tcPr anchor="ctr">
                     <a:solidFill>
                       <a:srgbClr val="FFFFFF"/>
                     </a:solidFill>
+                    <a:lnL w="6350" cap="flat" cmpd="sng" algn="ctr">
+                      <a:solidFill>
+                        <a:srgbClr val="BDBDBD"/>
+                      </a:solidFill>
+                    </a:lnL>
+                    <a:lnR w="6350" cap="flat" cmpd="sng" algn="ctr">
+                      <a:solidFill>
+                        <a:srgbClr val="BDBDBD"/>
+                      </a:solidFill>
+                    </a:lnR>
+                    <a:lnT w="6350" cap="flat" cmpd="sng" algn="ctr">
+                      <a:solidFill>
+                        <a:srgbClr val="BDBDBD"/>
+                      </a:solidFill>
+                    </a:lnT>
+                    <a:lnB w="6350" cap="flat" cmpd="sng" algn="ctr">
+                      <a:solidFill>
+                        <a:srgbClr val="BDBDBD"/>
+                      </a:solidFill>
+                    </a:lnB>
                   </a:tcPr>
                 </a:tc>
                 <a:tc>
@@ -9958,10 +12372,30 @@
                       </a:r>
                     </a:p>
                   </a:txBody>
-                  <a:tcPr>
+                  <a:tcPr anchor="ctr">
                     <a:solidFill>
                       <a:srgbClr val="FFFFFF"/>
                     </a:solidFill>
+                    <a:lnL w="6350" cap="flat" cmpd="sng" algn="ctr">
+                      <a:solidFill>
+                        <a:srgbClr val="BDBDBD"/>
+                      </a:solidFill>
+                    </a:lnL>
+                    <a:lnR w="6350" cap="flat" cmpd="sng" algn="ctr">
+                      <a:solidFill>
+                        <a:srgbClr val="BDBDBD"/>
+                      </a:solidFill>
+                    </a:lnR>
+                    <a:lnT w="6350" cap="flat" cmpd="sng" algn="ctr">
+                      <a:solidFill>
+                        <a:srgbClr val="BDBDBD"/>
+                      </a:solidFill>
+                    </a:lnT>
+                    <a:lnB w="6350" cap="flat" cmpd="sng" algn="ctr">
+                      <a:solidFill>
+                        <a:srgbClr val="BDBDBD"/>
+                      </a:solidFill>
+                    </a:lnB>
                   </a:tcPr>
                 </a:tc>
               </a:tr>
@@ -9983,10 +12417,30 @@
                       </a:r>
                     </a:p>
                   </a:txBody>
-                  <a:tcPr>
-                    <a:solidFill>
-                      <a:srgbClr val="FFF1F2"/>
-                    </a:solidFill>
+                  <a:tcPr anchor="ctr">
+                    <a:solidFill>
+                      <a:srgbClr val="FFFFFF"/>
+                    </a:solidFill>
+                    <a:lnL w="6350" cap="flat" cmpd="sng" algn="ctr">
+                      <a:solidFill>
+                        <a:srgbClr val="BDBDBD"/>
+                      </a:solidFill>
+                    </a:lnL>
+                    <a:lnR w="6350" cap="flat" cmpd="sng" algn="ctr">
+                      <a:solidFill>
+                        <a:srgbClr val="BDBDBD"/>
+                      </a:solidFill>
+                    </a:lnR>
+                    <a:lnT w="6350" cap="flat" cmpd="sng" algn="ctr">
+                      <a:solidFill>
+                        <a:srgbClr val="BDBDBD"/>
+                      </a:solidFill>
+                    </a:lnT>
+                    <a:lnB w="6350" cap="flat" cmpd="sng" algn="ctr">
+                      <a:solidFill>
+                        <a:srgbClr val="BDBDBD"/>
+                      </a:solidFill>
+                    </a:lnB>
                   </a:tcPr>
                 </a:tc>
                 <a:tc>
@@ -10006,10 +12460,30 @@
                       </a:r>
                     </a:p>
                   </a:txBody>
-                  <a:tcPr>
-                    <a:solidFill>
-                      <a:srgbClr val="FFF1F2"/>
-                    </a:solidFill>
+                  <a:tcPr anchor="ctr">
+                    <a:solidFill>
+                      <a:srgbClr val="FFFFFF"/>
+                    </a:solidFill>
+                    <a:lnL w="6350" cap="flat" cmpd="sng" algn="ctr">
+                      <a:solidFill>
+                        <a:srgbClr val="BDBDBD"/>
+                      </a:solidFill>
+                    </a:lnL>
+                    <a:lnR w="6350" cap="flat" cmpd="sng" algn="ctr">
+                      <a:solidFill>
+                        <a:srgbClr val="BDBDBD"/>
+                      </a:solidFill>
+                    </a:lnR>
+                    <a:lnT w="6350" cap="flat" cmpd="sng" algn="ctr">
+                      <a:solidFill>
+                        <a:srgbClr val="BDBDBD"/>
+                      </a:solidFill>
+                    </a:lnT>
+                    <a:lnB w="6350" cap="flat" cmpd="sng" algn="ctr">
+                      <a:solidFill>
+                        <a:srgbClr val="BDBDBD"/>
+                      </a:solidFill>
+                    </a:lnB>
                   </a:tcPr>
                 </a:tc>
                 <a:tc>
@@ -10029,10 +12503,30 @@
                       </a:r>
                     </a:p>
                   </a:txBody>
-                  <a:tcPr>
-                    <a:solidFill>
-                      <a:srgbClr val="FFF1F2"/>
-                    </a:solidFill>
+                  <a:tcPr anchor="ctr">
+                    <a:solidFill>
+                      <a:srgbClr val="FFFFFF"/>
+                    </a:solidFill>
+                    <a:lnL w="6350" cap="flat" cmpd="sng" algn="ctr">
+                      <a:solidFill>
+                        <a:srgbClr val="BDBDBD"/>
+                      </a:solidFill>
+                    </a:lnL>
+                    <a:lnR w="6350" cap="flat" cmpd="sng" algn="ctr">
+                      <a:solidFill>
+                        <a:srgbClr val="BDBDBD"/>
+                      </a:solidFill>
+                    </a:lnR>
+                    <a:lnT w="6350" cap="flat" cmpd="sng" algn="ctr">
+                      <a:solidFill>
+                        <a:srgbClr val="BDBDBD"/>
+                      </a:solidFill>
+                    </a:lnT>
+                    <a:lnB w="6350" cap="flat" cmpd="sng" algn="ctr">
+                      <a:solidFill>
+                        <a:srgbClr val="BDBDBD"/>
+                      </a:solidFill>
+                    </a:lnB>
                   </a:tcPr>
                 </a:tc>
               </a:tr>
@@ -10054,10 +12548,30 @@
                       </a:r>
                     </a:p>
                   </a:txBody>
-                  <a:tcPr>
+                  <a:tcPr anchor="ctr">
                     <a:solidFill>
                       <a:srgbClr val="FFFFFF"/>
                     </a:solidFill>
+                    <a:lnL w="6350" cap="flat" cmpd="sng" algn="ctr">
+                      <a:solidFill>
+                        <a:srgbClr val="BDBDBD"/>
+                      </a:solidFill>
+                    </a:lnL>
+                    <a:lnR w="6350" cap="flat" cmpd="sng" algn="ctr">
+                      <a:solidFill>
+                        <a:srgbClr val="BDBDBD"/>
+                      </a:solidFill>
+                    </a:lnR>
+                    <a:lnT w="6350" cap="flat" cmpd="sng" algn="ctr">
+                      <a:solidFill>
+                        <a:srgbClr val="BDBDBD"/>
+                      </a:solidFill>
+                    </a:lnT>
+                    <a:lnB w="6350" cap="flat" cmpd="sng" algn="ctr">
+                      <a:solidFill>
+                        <a:srgbClr val="BDBDBD"/>
+                      </a:solidFill>
+                    </a:lnB>
                   </a:tcPr>
                 </a:tc>
                 <a:tc>
@@ -10077,10 +12591,30 @@
                       </a:r>
                     </a:p>
                   </a:txBody>
-                  <a:tcPr>
+                  <a:tcPr anchor="ctr">
                     <a:solidFill>
                       <a:srgbClr val="FFFFFF"/>
                     </a:solidFill>
+                    <a:lnL w="6350" cap="flat" cmpd="sng" algn="ctr">
+                      <a:solidFill>
+                        <a:srgbClr val="BDBDBD"/>
+                      </a:solidFill>
+                    </a:lnL>
+                    <a:lnR w="6350" cap="flat" cmpd="sng" algn="ctr">
+                      <a:solidFill>
+                        <a:srgbClr val="BDBDBD"/>
+                      </a:solidFill>
+                    </a:lnR>
+                    <a:lnT w="6350" cap="flat" cmpd="sng" algn="ctr">
+                      <a:solidFill>
+                        <a:srgbClr val="BDBDBD"/>
+                      </a:solidFill>
+                    </a:lnT>
+                    <a:lnB w="6350" cap="flat" cmpd="sng" algn="ctr">
+                      <a:solidFill>
+                        <a:srgbClr val="BDBDBD"/>
+                      </a:solidFill>
+                    </a:lnB>
                   </a:tcPr>
                 </a:tc>
                 <a:tc>
@@ -10100,10 +12634,30 @@
                       </a:r>
                     </a:p>
                   </a:txBody>
-                  <a:tcPr>
+                  <a:tcPr anchor="ctr">
                     <a:solidFill>
                       <a:srgbClr val="FFFFFF"/>
                     </a:solidFill>
+                    <a:lnL w="6350" cap="flat" cmpd="sng" algn="ctr">
+                      <a:solidFill>
+                        <a:srgbClr val="BDBDBD"/>
+                      </a:solidFill>
+                    </a:lnL>
+                    <a:lnR w="6350" cap="flat" cmpd="sng" algn="ctr">
+                      <a:solidFill>
+                        <a:srgbClr val="BDBDBD"/>
+                      </a:solidFill>
+                    </a:lnR>
+                    <a:lnT w="6350" cap="flat" cmpd="sng" algn="ctr">
+                      <a:solidFill>
+                        <a:srgbClr val="BDBDBD"/>
+                      </a:solidFill>
+                    </a:lnT>
+                    <a:lnB w="6350" cap="flat" cmpd="sng" algn="ctr">
+                      <a:solidFill>
+                        <a:srgbClr val="BDBDBD"/>
+                      </a:solidFill>
+                    </a:lnB>
                   </a:tcPr>
                 </a:tc>
               </a:tr>
@@ -10125,10 +12679,30 @@
                       </a:r>
                     </a:p>
                   </a:txBody>
-                  <a:tcPr>
-                    <a:solidFill>
-                      <a:srgbClr val="FFF1F2"/>
-                    </a:solidFill>
+                  <a:tcPr anchor="ctr">
+                    <a:solidFill>
+                      <a:srgbClr val="FFFFFF"/>
+                    </a:solidFill>
+                    <a:lnL w="6350" cap="flat" cmpd="sng" algn="ctr">
+                      <a:solidFill>
+                        <a:srgbClr val="BDBDBD"/>
+                      </a:solidFill>
+                    </a:lnL>
+                    <a:lnR w="6350" cap="flat" cmpd="sng" algn="ctr">
+                      <a:solidFill>
+                        <a:srgbClr val="BDBDBD"/>
+                      </a:solidFill>
+                    </a:lnR>
+                    <a:lnT w="6350" cap="flat" cmpd="sng" algn="ctr">
+                      <a:solidFill>
+                        <a:srgbClr val="BDBDBD"/>
+                      </a:solidFill>
+                    </a:lnT>
+                    <a:lnB w="6350" cap="flat" cmpd="sng" algn="ctr">
+                      <a:solidFill>
+                        <a:srgbClr val="BDBDBD"/>
+                      </a:solidFill>
+                    </a:lnB>
                   </a:tcPr>
                 </a:tc>
                 <a:tc>
@@ -10148,10 +12722,30 @@
                       </a:r>
                     </a:p>
                   </a:txBody>
-                  <a:tcPr>
-                    <a:solidFill>
-                      <a:srgbClr val="FFF1F2"/>
-                    </a:solidFill>
+                  <a:tcPr anchor="ctr">
+                    <a:solidFill>
+                      <a:srgbClr val="FFFFFF"/>
+                    </a:solidFill>
+                    <a:lnL w="6350" cap="flat" cmpd="sng" algn="ctr">
+                      <a:solidFill>
+                        <a:srgbClr val="BDBDBD"/>
+                      </a:solidFill>
+                    </a:lnL>
+                    <a:lnR w="6350" cap="flat" cmpd="sng" algn="ctr">
+                      <a:solidFill>
+                        <a:srgbClr val="BDBDBD"/>
+                      </a:solidFill>
+                    </a:lnR>
+                    <a:lnT w="6350" cap="flat" cmpd="sng" algn="ctr">
+                      <a:solidFill>
+                        <a:srgbClr val="BDBDBD"/>
+                      </a:solidFill>
+                    </a:lnT>
+                    <a:lnB w="6350" cap="flat" cmpd="sng" algn="ctr">
+                      <a:solidFill>
+                        <a:srgbClr val="BDBDBD"/>
+                      </a:solidFill>
+                    </a:lnB>
                   </a:tcPr>
                 </a:tc>
                 <a:tc>
@@ -10171,10 +12765,30 @@
                       </a:r>
                     </a:p>
                   </a:txBody>
-                  <a:tcPr>
-                    <a:solidFill>
-                      <a:srgbClr val="FFF1F2"/>
-                    </a:solidFill>
+                  <a:tcPr anchor="ctr">
+                    <a:solidFill>
+                      <a:srgbClr val="FFFFFF"/>
+                    </a:solidFill>
+                    <a:lnL w="6350" cap="flat" cmpd="sng" algn="ctr">
+                      <a:solidFill>
+                        <a:srgbClr val="BDBDBD"/>
+                      </a:solidFill>
+                    </a:lnL>
+                    <a:lnR w="6350" cap="flat" cmpd="sng" algn="ctr">
+                      <a:solidFill>
+                        <a:srgbClr val="BDBDBD"/>
+                      </a:solidFill>
+                    </a:lnR>
+                    <a:lnT w="6350" cap="flat" cmpd="sng" algn="ctr">
+                      <a:solidFill>
+                        <a:srgbClr val="BDBDBD"/>
+                      </a:solidFill>
+                    </a:lnT>
+                    <a:lnB w="6350" cap="flat" cmpd="sng" algn="ctr">
+                      <a:solidFill>
+                        <a:srgbClr val="BDBDBD"/>
+                      </a:solidFill>
+                    </a:lnB>
                   </a:tcPr>
                 </a:tc>
               </a:tr>
@@ -10196,10 +12810,30 @@
                       </a:r>
                     </a:p>
                   </a:txBody>
-                  <a:tcPr>
+                  <a:tcPr anchor="ctr">
                     <a:solidFill>
                       <a:srgbClr val="FFFFFF"/>
                     </a:solidFill>
+                    <a:lnL w="6350" cap="flat" cmpd="sng" algn="ctr">
+                      <a:solidFill>
+                        <a:srgbClr val="BDBDBD"/>
+                      </a:solidFill>
+                    </a:lnL>
+                    <a:lnR w="6350" cap="flat" cmpd="sng" algn="ctr">
+                      <a:solidFill>
+                        <a:srgbClr val="BDBDBD"/>
+                      </a:solidFill>
+                    </a:lnR>
+                    <a:lnT w="6350" cap="flat" cmpd="sng" algn="ctr">
+                      <a:solidFill>
+                        <a:srgbClr val="BDBDBD"/>
+                      </a:solidFill>
+                    </a:lnT>
+                    <a:lnB w="6350" cap="flat" cmpd="sng" algn="ctr">
+                      <a:solidFill>
+                        <a:srgbClr val="BDBDBD"/>
+                      </a:solidFill>
+                    </a:lnB>
                   </a:tcPr>
                 </a:tc>
                 <a:tc>
@@ -10219,10 +12853,30 @@
                       </a:r>
                     </a:p>
                   </a:txBody>
-                  <a:tcPr>
+                  <a:tcPr anchor="ctr">
                     <a:solidFill>
                       <a:srgbClr val="FFFFFF"/>
                     </a:solidFill>
+                    <a:lnL w="6350" cap="flat" cmpd="sng" algn="ctr">
+                      <a:solidFill>
+                        <a:srgbClr val="BDBDBD"/>
+                      </a:solidFill>
+                    </a:lnL>
+                    <a:lnR w="6350" cap="flat" cmpd="sng" algn="ctr">
+                      <a:solidFill>
+                        <a:srgbClr val="BDBDBD"/>
+                      </a:solidFill>
+                    </a:lnR>
+                    <a:lnT w="6350" cap="flat" cmpd="sng" algn="ctr">
+                      <a:solidFill>
+                        <a:srgbClr val="BDBDBD"/>
+                      </a:solidFill>
+                    </a:lnT>
+                    <a:lnB w="6350" cap="flat" cmpd="sng" algn="ctr">
+                      <a:solidFill>
+                        <a:srgbClr val="BDBDBD"/>
+                      </a:solidFill>
+                    </a:lnB>
                   </a:tcPr>
                 </a:tc>
                 <a:tc>
@@ -10242,10 +12896,30 @@
                       </a:r>
                     </a:p>
                   </a:txBody>
-                  <a:tcPr>
+                  <a:tcPr anchor="ctr">
                     <a:solidFill>
                       <a:srgbClr val="FFFFFF"/>
                     </a:solidFill>
+                    <a:lnL w="6350" cap="flat" cmpd="sng" algn="ctr">
+                      <a:solidFill>
+                        <a:srgbClr val="BDBDBD"/>
+                      </a:solidFill>
+                    </a:lnL>
+                    <a:lnR w="6350" cap="flat" cmpd="sng" algn="ctr">
+                      <a:solidFill>
+                        <a:srgbClr val="BDBDBD"/>
+                      </a:solidFill>
+                    </a:lnR>
+                    <a:lnT w="6350" cap="flat" cmpd="sng" algn="ctr">
+                      <a:solidFill>
+                        <a:srgbClr val="BDBDBD"/>
+                      </a:solidFill>
+                    </a:lnT>
+                    <a:lnB w="6350" cap="flat" cmpd="sng" algn="ctr">
+                      <a:solidFill>
+                        <a:srgbClr val="BDBDBD"/>
+                      </a:solidFill>
+                    </a:lnB>
                   </a:tcPr>
                 </a:tc>
               </a:tr>
@@ -10267,10 +12941,30 @@
                       </a:r>
                     </a:p>
                   </a:txBody>
-                  <a:tcPr>
-                    <a:solidFill>
-                      <a:srgbClr val="FFF1F2"/>
-                    </a:solidFill>
+                  <a:tcPr anchor="ctr">
+                    <a:solidFill>
+                      <a:srgbClr val="FFFFFF"/>
+                    </a:solidFill>
+                    <a:lnL w="6350" cap="flat" cmpd="sng" algn="ctr">
+                      <a:solidFill>
+                        <a:srgbClr val="BDBDBD"/>
+                      </a:solidFill>
+                    </a:lnL>
+                    <a:lnR w="6350" cap="flat" cmpd="sng" algn="ctr">
+                      <a:solidFill>
+                        <a:srgbClr val="BDBDBD"/>
+                      </a:solidFill>
+                    </a:lnR>
+                    <a:lnT w="6350" cap="flat" cmpd="sng" algn="ctr">
+                      <a:solidFill>
+                        <a:srgbClr val="BDBDBD"/>
+                      </a:solidFill>
+                    </a:lnT>
+                    <a:lnB w="6350" cap="flat" cmpd="sng" algn="ctr">
+                      <a:solidFill>
+                        <a:srgbClr val="BDBDBD"/>
+                      </a:solidFill>
+                    </a:lnB>
                   </a:tcPr>
                 </a:tc>
                 <a:tc>
@@ -10290,10 +12984,30 @@
                       </a:r>
                     </a:p>
                   </a:txBody>
-                  <a:tcPr>
-                    <a:solidFill>
-                      <a:srgbClr val="FFF1F2"/>
-                    </a:solidFill>
+                  <a:tcPr anchor="ctr">
+                    <a:solidFill>
+                      <a:srgbClr val="FFFFFF"/>
+                    </a:solidFill>
+                    <a:lnL w="6350" cap="flat" cmpd="sng" algn="ctr">
+                      <a:solidFill>
+                        <a:srgbClr val="BDBDBD"/>
+                      </a:solidFill>
+                    </a:lnL>
+                    <a:lnR w="6350" cap="flat" cmpd="sng" algn="ctr">
+                      <a:solidFill>
+                        <a:srgbClr val="BDBDBD"/>
+                      </a:solidFill>
+                    </a:lnR>
+                    <a:lnT w="6350" cap="flat" cmpd="sng" algn="ctr">
+                      <a:solidFill>
+                        <a:srgbClr val="BDBDBD"/>
+                      </a:solidFill>
+                    </a:lnT>
+                    <a:lnB w="6350" cap="flat" cmpd="sng" algn="ctr">
+                      <a:solidFill>
+                        <a:srgbClr val="BDBDBD"/>
+                      </a:solidFill>
+                    </a:lnB>
                   </a:tcPr>
                 </a:tc>
                 <a:tc>
@@ -10313,10 +13027,30 @@
                       </a:r>
                     </a:p>
                   </a:txBody>
-                  <a:tcPr>
-                    <a:solidFill>
-                      <a:srgbClr val="FFF1F2"/>
-                    </a:solidFill>
+                  <a:tcPr anchor="ctr">
+                    <a:solidFill>
+                      <a:srgbClr val="FFFFFF"/>
+                    </a:solidFill>
+                    <a:lnL w="6350" cap="flat" cmpd="sng" algn="ctr">
+                      <a:solidFill>
+                        <a:srgbClr val="BDBDBD"/>
+                      </a:solidFill>
+                    </a:lnL>
+                    <a:lnR w="6350" cap="flat" cmpd="sng" algn="ctr">
+                      <a:solidFill>
+                        <a:srgbClr val="BDBDBD"/>
+                      </a:solidFill>
+                    </a:lnR>
+                    <a:lnT w="6350" cap="flat" cmpd="sng" algn="ctr">
+                      <a:solidFill>
+                        <a:srgbClr val="BDBDBD"/>
+                      </a:solidFill>
+                    </a:lnT>
+                    <a:lnB w="6350" cap="flat" cmpd="sng" algn="ctr">
+                      <a:solidFill>
+                        <a:srgbClr val="BDBDBD"/>
+                      </a:solidFill>
+                    </a:lnB>
                   </a:tcPr>
                 </a:tc>
               </a:tr>
@@ -10338,10 +13072,30 @@
                       </a:r>
                     </a:p>
                   </a:txBody>
-                  <a:tcPr>
+                  <a:tcPr anchor="ctr">
                     <a:solidFill>
                       <a:srgbClr val="FFFFFF"/>
                     </a:solidFill>
+                    <a:lnL w="6350" cap="flat" cmpd="sng" algn="ctr">
+                      <a:solidFill>
+                        <a:srgbClr val="BDBDBD"/>
+                      </a:solidFill>
+                    </a:lnL>
+                    <a:lnR w="6350" cap="flat" cmpd="sng" algn="ctr">
+                      <a:solidFill>
+                        <a:srgbClr val="BDBDBD"/>
+                      </a:solidFill>
+                    </a:lnR>
+                    <a:lnT w="6350" cap="flat" cmpd="sng" algn="ctr">
+                      <a:solidFill>
+                        <a:srgbClr val="BDBDBD"/>
+                      </a:solidFill>
+                    </a:lnT>
+                    <a:lnB w="6350" cap="flat" cmpd="sng" algn="ctr">
+                      <a:solidFill>
+                        <a:srgbClr val="BDBDBD"/>
+                      </a:solidFill>
+                    </a:lnB>
                   </a:tcPr>
                 </a:tc>
                 <a:tc>
@@ -10361,10 +13115,30 @@
                       </a:r>
                     </a:p>
                   </a:txBody>
-                  <a:tcPr>
+                  <a:tcPr anchor="ctr">
                     <a:solidFill>
                       <a:srgbClr val="FFFFFF"/>
                     </a:solidFill>
+                    <a:lnL w="6350" cap="flat" cmpd="sng" algn="ctr">
+                      <a:solidFill>
+                        <a:srgbClr val="BDBDBD"/>
+                      </a:solidFill>
+                    </a:lnL>
+                    <a:lnR w="6350" cap="flat" cmpd="sng" algn="ctr">
+                      <a:solidFill>
+                        <a:srgbClr val="BDBDBD"/>
+                      </a:solidFill>
+                    </a:lnR>
+                    <a:lnT w="6350" cap="flat" cmpd="sng" algn="ctr">
+                      <a:solidFill>
+                        <a:srgbClr val="BDBDBD"/>
+                      </a:solidFill>
+                    </a:lnT>
+                    <a:lnB w="6350" cap="flat" cmpd="sng" algn="ctr">
+                      <a:solidFill>
+                        <a:srgbClr val="BDBDBD"/>
+                      </a:solidFill>
+                    </a:lnB>
                   </a:tcPr>
                 </a:tc>
                 <a:tc>
@@ -10384,10 +13158,30 @@
                       </a:r>
                     </a:p>
                   </a:txBody>
-                  <a:tcPr>
+                  <a:tcPr anchor="ctr">
                     <a:solidFill>
                       <a:srgbClr val="FFFFFF"/>
                     </a:solidFill>
+                    <a:lnL w="6350" cap="flat" cmpd="sng" algn="ctr">
+                      <a:solidFill>
+                        <a:srgbClr val="BDBDBD"/>
+                      </a:solidFill>
+                    </a:lnL>
+                    <a:lnR w="6350" cap="flat" cmpd="sng" algn="ctr">
+                      <a:solidFill>
+                        <a:srgbClr val="BDBDBD"/>
+                      </a:solidFill>
+                    </a:lnR>
+                    <a:lnT w="6350" cap="flat" cmpd="sng" algn="ctr">
+                      <a:solidFill>
+                        <a:srgbClr val="BDBDBD"/>
+                      </a:solidFill>
+                    </a:lnT>
+                    <a:lnB w="6350" cap="flat" cmpd="sng" algn="ctr">
+                      <a:solidFill>
+                        <a:srgbClr val="BDBDBD"/>
+                      </a:solidFill>
+                    </a:lnB>
                   </a:tcPr>
                 </a:tc>
               </a:tr>
@@ -10409,10 +13203,30 @@
                       </a:r>
                     </a:p>
                   </a:txBody>
-                  <a:tcPr>
-                    <a:solidFill>
-                      <a:srgbClr val="FFF1F2"/>
-                    </a:solidFill>
+                  <a:tcPr anchor="ctr">
+                    <a:solidFill>
+                      <a:srgbClr val="FFFFFF"/>
+                    </a:solidFill>
+                    <a:lnL w="6350" cap="flat" cmpd="sng" algn="ctr">
+                      <a:solidFill>
+                        <a:srgbClr val="BDBDBD"/>
+                      </a:solidFill>
+                    </a:lnL>
+                    <a:lnR w="6350" cap="flat" cmpd="sng" algn="ctr">
+                      <a:solidFill>
+                        <a:srgbClr val="BDBDBD"/>
+                      </a:solidFill>
+                    </a:lnR>
+                    <a:lnT w="6350" cap="flat" cmpd="sng" algn="ctr">
+                      <a:solidFill>
+                        <a:srgbClr val="BDBDBD"/>
+                      </a:solidFill>
+                    </a:lnT>
+                    <a:lnB w="6350" cap="flat" cmpd="sng" algn="ctr">
+                      <a:solidFill>
+                        <a:srgbClr val="BDBDBD"/>
+                      </a:solidFill>
+                    </a:lnB>
                   </a:tcPr>
                 </a:tc>
                 <a:tc>
@@ -10432,10 +13246,30 @@
                       </a:r>
                     </a:p>
                   </a:txBody>
-                  <a:tcPr>
-                    <a:solidFill>
-                      <a:srgbClr val="FFF1F2"/>
-                    </a:solidFill>
+                  <a:tcPr anchor="ctr">
+                    <a:solidFill>
+                      <a:srgbClr val="FFFFFF"/>
+                    </a:solidFill>
+                    <a:lnL w="6350" cap="flat" cmpd="sng" algn="ctr">
+                      <a:solidFill>
+                        <a:srgbClr val="BDBDBD"/>
+                      </a:solidFill>
+                    </a:lnL>
+                    <a:lnR w="6350" cap="flat" cmpd="sng" algn="ctr">
+                      <a:solidFill>
+                        <a:srgbClr val="BDBDBD"/>
+                      </a:solidFill>
+                    </a:lnR>
+                    <a:lnT w="6350" cap="flat" cmpd="sng" algn="ctr">
+                      <a:solidFill>
+                        <a:srgbClr val="BDBDBD"/>
+                      </a:solidFill>
+                    </a:lnT>
+                    <a:lnB w="6350" cap="flat" cmpd="sng" algn="ctr">
+                      <a:solidFill>
+                        <a:srgbClr val="BDBDBD"/>
+                      </a:solidFill>
+                    </a:lnB>
                   </a:tcPr>
                 </a:tc>
                 <a:tc>
@@ -10455,10 +13289,30 @@
                       </a:r>
                     </a:p>
                   </a:txBody>
-                  <a:tcPr>
-                    <a:solidFill>
-                      <a:srgbClr val="FFF1F2"/>
-                    </a:solidFill>
+                  <a:tcPr anchor="ctr">
+                    <a:solidFill>
+                      <a:srgbClr val="FFFFFF"/>
+                    </a:solidFill>
+                    <a:lnL w="6350" cap="flat" cmpd="sng" algn="ctr">
+                      <a:solidFill>
+                        <a:srgbClr val="BDBDBD"/>
+                      </a:solidFill>
+                    </a:lnL>
+                    <a:lnR w="6350" cap="flat" cmpd="sng" algn="ctr">
+                      <a:solidFill>
+                        <a:srgbClr val="BDBDBD"/>
+                      </a:solidFill>
+                    </a:lnR>
+                    <a:lnT w="6350" cap="flat" cmpd="sng" algn="ctr">
+                      <a:solidFill>
+                        <a:srgbClr val="BDBDBD"/>
+                      </a:solidFill>
+                    </a:lnT>
+                    <a:lnB w="6350" cap="flat" cmpd="sng" algn="ctr">
+                      <a:solidFill>
+                        <a:srgbClr val="BDBDBD"/>
+                      </a:solidFill>
+                    </a:lnB>
                   </a:tcPr>
                 </a:tc>
               </a:tr>
@@ -10468,7 +13322,7 @@
       </p:graphicFrame>
       <p:sp>
         <p:nvSpPr>
-          <p:cNvPr id="11" name="TextBox 10"/>
+          <p:cNvPr id="13" name="TextBox 12"/>
           <p:cNvSpPr txBox="1"/>
           <p:nvPr/>
         </p:nvSpPr>
@@ -10492,7 +13346,7 @@
             <a:r>
               <a:rPr sz="1400" b="1">
                 <a:solidFill>
-                  <a:srgbClr val="E53935"/>
+                  <a:srgbClr val="C7000B"/>
                 </a:solidFill>
                 <a:latin typeface="Microsoft YaHei"/>
               </a:rPr>
@@ -10503,7 +13357,7 @@
       </p:sp>
       <p:graphicFrame>
         <p:nvGraphicFramePr>
-          <p:cNvPr id="12" name="Table 11"/>
+          <p:cNvPr id="14" name="Table 13"/>
           <p:cNvGraphicFramePr>
             <a:graphicFrameLocks noGrp="1"/>
           </p:cNvGraphicFramePr>
@@ -10541,10 +13395,30 @@
                       </a:r>
                     </a:p>
                   </a:txBody>
-                  <a:tcPr>
+                  <a:tcPr anchor="ctr">
                     <a:solidFill>
                       <a:srgbClr val="F5F5F5"/>
                     </a:solidFill>
+                    <a:lnL w="6350" cap="flat" cmpd="sng" algn="ctr">
+                      <a:solidFill>
+                        <a:srgbClr val="BDBDBD"/>
+                      </a:solidFill>
+                    </a:lnL>
+                    <a:lnR w="6350" cap="flat" cmpd="sng" algn="ctr">
+                      <a:solidFill>
+                        <a:srgbClr val="BDBDBD"/>
+                      </a:solidFill>
+                    </a:lnR>
+                    <a:lnT w="6350" cap="flat" cmpd="sng" algn="ctr">
+                      <a:solidFill>
+                        <a:srgbClr val="BDBDBD"/>
+                      </a:solidFill>
+                    </a:lnT>
+                    <a:lnB w="6350" cap="flat" cmpd="sng" algn="ctr">
+                      <a:solidFill>
+                        <a:srgbClr val="BDBDBD"/>
+                      </a:solidFill>
+                    </a:lnB>
                   </a:tcPr>
                 </a:tc>
                 <a:tc>
@@ -10564,10 +13438,30 @@
                       </a:r>
                     </a:p>
                   </a:txBody>
-                  <a:tcPr>
+                  <a:tcPr anchor="ctr">
                     <a:solidFill>
                       <a:srgbClr val="F5F5F5"/>
                     </a:solidFill>
+                    <a:lnL w="6350" cap="flat" cmpd="sng" algn="ctr">
+                      <a:solidFill>
+                        <a:srgbClr val="BDBDBD"/>
+                      </a:solidFill>
+                    </a:lnL>
+                    <a:lnR w="6350" cap="flat" cmpd="sng" algn="ctr">
+                      <a:solidFill>
+                        <a:srgbClr val="BDBDBD"/>
+                      </a:solidFill>
+                    </a:lnR>
+                    <a:lnT w="6350" cap="flat" cmpd="sng" algn="ctr">
+                      <a:solidFill>
+                        <a:srgbClr val="BDBDBD"/>
+                      </a:solidFill>
+                    </a:lnT>
+                    <a:lnB w="6350" cap="flat" cmpd="sng" algn="ctr">
+                      <a:solidFill>
+                        <a:srgbClr val="BDBDBD"/>
+                      </a:solidFill>
+                    </a:lnB>
                   </a:tcPr>
                 </a:tc>
               </a:tr>
@@ -10589,10 +13483,30 @@
                       </a:r>
                     </a:p>
                   </a:txBody>
-                  <a:tcPr>
+                  <a:tcPr anchor="ctr">
                     <a:solidFill>
                       <a:srgbClr val="FFFFFF"/>
                     </a:solidFill>
+                    <a:lnL w="6350" cap="flat" cmpd="sng" algn="ctr">
+                      <a:solidFill>
+                        <a:srgbClr val="BDBDBD"/>
+                      </a:solidFill>
+                    </a:lnL>
+                    <a:lnR w="6350" cap="flat" cmpd="sng" algn="ctr">
+                      <a:solidFill>
+                        <a:srgbClr val="BDBDBD"/>
+                      </a:solidFill>
+                    </a:lnR>
+                    <a:lnT w="6350" cap="flat" cmpd="sng" algn="ctr">
+                      <a:solidFill>
+                        <a:srgbClr val="BDBDBD"/>
+                      </a:solidFill>
+                    </a:lnT>
+                    <a:lnB w="6350" cap="flat" cmpd="sng" algn="ctr">
+                      <a:solidFill>
+                        <a:srgbClr val="BDBDBD"/>
+                      </a:solidFill>
+                    </a:lnB>
                   </a:tcPr>
                 </a:tc>
                 <a:tc>
@@ -10612,10 +13526,30 @@
                       </a:r>
                     </a:p>
                   </a:txBody>
-                  <a:tcPr>
+                  <a:tcPr anchor="ctr">
                     <a:solidFill>
                       <a:srgbClr val="FFFFFF"/>
                     </a:solidFill>
+                    <a:lnL w="6350" cap="flat" cmpd="sng" algn="ctr">
+                      <a:solidFill>
+                        <a:srgbClr val="BDBDBD"/>
+                      </a:solidFill>
+                    </a:lnL>
+                    <a:lnR w="6350" cap="flat" cmpd="sng" algn="ctr">
+                      <a:solidFill>
+                        <a:srgbClr val="BDBDBD"/>
+                      </a:solidFill>
+                    </a:lnR>
+                    <a:lnT w="6350" cap="flat" cmpd="sng" algn="ctr">
+                      <a:solidFill>
+                        <a:srgbClr val="BDBDBD"/>
+                      </a:solidFill>
+                    </a:lnT>
+                    <a:lnB w="6350" cap="flat" cmpd="sng" algn="ctr">
+                      <a:solidFill>
+                        <a:srgbClr val="BDBDBD"/>
+                      </a:solidFill>
+                    </a:lnB>
                   </a:tcPr>
                 </a:tc>
               </a:tr>
@@ -10637,10 +13571,30 @@
                       </a:r>
                     </a:p>
                   </a:txBody>
-                  <a:tcPr>
-                    <a:solidFill>
-                      <a:srgbClr val="FFF1F2"/>
-                    </a:solidFill>
+                  <a:tcPr anchor="ctr">
+                    <a:solidFill>
+                      <a:srgbClr val="FFFFFF"/>
+                    </a:solidFill>
+                    <a:lnL w="6350" cap="flat" cmpd="sng" algn="ctr">
+                      <a:solidFill>
+                        <a:srgbClr val="BDBDBD"/>
+                      </a:solidFill>
+                    </a:lnL>
+                    <a:lnR w="6350" cap="flat" cmpd="sng" algn="ctr">
+                      <a:solidFill>
+                        <a:srgbClr val="BDBDBD"/>
+                      </a:solidFill>
+                    </a:lnR>
+                    <a:lnT w="6350" cap="flat" cmpd="sng" algn="ctr">
+                      <a:solidFill>
+                        <a:srgbClr val="BDBDBD"/>
+                      </a:solidFill>
+                    </a:lnT>
+                    <a:lnB w="6350" cap="flat" cmpd="sng" algn="ctr">
+                      <a:solidFill>
+                        <a:srgbClr val="BDBDBD"/>
+                      </a:solidFill>
+                    </a:lnB>
                   </a:tcPr>
                 </a:tc>
                 <a:tc>
@@ -10660,10 +13614,30 @@
                       </a:r>
                     </a:p>
                   </a:txBody>
-                  <a:tcPr>
-                    <a:solidFill>
-                      <a:srgbClr val="FFF1F2"/>
-                    </a:solidFill>
+                  <a:tcPr anchor="ctr">
+                    <a:solidFill>
+                      <a:srgbClr val="FFFFFF"/>
+                    </a:solidFill>
+                    <a:lnL w="6350" cap="flat" cmpd="sng" algn="ctr">
+                      <a:solidFill>
+                        <a:srgbClr val="BDBDBD"/>
+                      </a:solidFill>
+                    </a:lnL>
+                    <a:lnR w="6350" cap="flat" cmpd="sng" algn="ctr">
+                      <a:solidFill>
+                        <a:srgbClr val="BDBDBD"/>
+                      </a:solidFill>
+                    </a:lnR>
+                    <a:lnT w="6350" cap="flat" cmpd="sng" algn="ctr">
+                      <a:solidFill>
+                        <a:srgbClr val="BDBDBD"/>
+                      </a:solidFill>
+                    </a:lnT>
+                    <a:lnB w="6350" cap="flat" cmpd="sng" algn="ctr">
+                      <a:solidFill>
+                        <a:srgbClr val="BDBDBD"/>
+                      </a:solidFill>
+                    </a:lnB>
                   </a:tcPr>
                 </a:tc>
               </a:tr>
@@ -10685,10 +13659,30 @@
                       </a:r>
                     </a:p>
                   </a:txBody>
-                  <a:tcPr>
+                  <a:tcPr anchor="ctr">
                     <a:solidFill>
                       <a:srgbClr val="FFFFFF"/>
                     </a:solidFill>
+                    <a:lnL w="6350" cap="flat" cmpd="sng" algn="ctr">
+                      <a:solidFill>
+                        <a:srgbClr val="BDBDBD"/>
+                      </a:solidFill>
+                    </a:lnL>
+                    <a:lnR w="6350" cap="flat" cmpd="sng" algn="ctr">
+                      <a:solidFill>
+                        <a:srgbClr val="BDBDBD"/>
+                      </a:solidFill>
+                    </a:lnR>
+                    <a:lnT w="6350" cap="flat" cmpd="sng" algn="ctr">
+                      <a:solidFill>
+                        <a:srgbClr val="BDBDBD"/>
+                      </a:solidFill>
+                    </a:lnT>
+                    <a:lnB w="6350" cap="flat" cmpd="sng" algn="ctr">
+                      <a:solidFill>
+                        <a:srgbClr val="BDBDBD"/>
+                      </a:solidFill>
+                    </a:lnB>
                   </a:tcPr>
                 </a:tc>
                 <a:tc>
@@ -10708,10 +13702,30 @@
                       </a:r>
                     </a:p>
                   </a:txBody>
-                  <a:tcPr>
+                  <a:tcPr anchor="ctr">
                     <a:solidFill>
                       <a:srgbClr val="FFFFFF"/>
                     </a:solidFill>
+                    <a:lnL w="6350" cap="flat" cmpd="sng" algn="ctr">
+                      <a:solidFill>
+                        <a:srgbClr val="BDBDBD"/>
+                      </a:solidFill>
+                    </a:lnL>
+                    <a:lnR w="6350" cap="flat" cmpd="sng" algn="ctr">
+                      <a:solidFill>
+                        <a:srgbClr val="BDBDBD"/>
+                      </a:solidFill>
+                    </a:lnR>
+                    <a:lnT w="6350" cap="flat" cmpd="sng" algn="ctr">
+                      <a:solidFill>
+                        <a:srgbClr val="BDBDBD"/>
+                      </a:solidFill>
+                    </a:lnT>
+                    <a:lnB w="6350" cap="flat" cmpd="sng" algn="ctr">
+                      <a:solidFill>
+                        <a:srgbClr val="BDBDBD"/>
+                      </a:solidFill>
+                    </a:lnB>
                   </a:tcPr>
                 </a:tc>
               </a:tr>
@@ -10733,10 +13747,30 @@
                       </a:r>
                     </a:p>
                   </a:txBody>
-                  <a:tcPr>
-                    <a:solidFill>
-                      <a:srgbClr val="FFF1F2"/>
-                    </a:solidFill>
+                  <a:tcPr anchor="ctr">
+                    <a:solidFill>
+                      <a:srgbClr val="FFFFFF"/>
+                    </a:solidFill>
+                    <a:lnL w="6350" cap="flat" cmpd="sng" algn="ctr">
+                      <a:solidFill>
+                        <a:srgbClr val="BDBDBD"/>
+                      </a:solidFill>
+                    </a:lnL>
+                    <a:lnR w="6350" cap="flat" cmpd="sng" algn="ctr">
+                      <a:solidFill>
+                        <a:srgbClr val="BDBDBD"/>
+                      </a:solidFill>
+                    </a:lnR>
+                    <a:lnT w="6350" cap="flat" cmpd="sng" algn="ctr">
+                      <a:solidFill>
+                        <a:srgbClr val="BDBDBD"/>
+                      </a:solidFill>
+                    </a:lnT>
+                    <a:lnB w="6350" cap="flat" cmpd="sng" algn="ctr">
+                      <a:solidFill>
+                        <a:srgbClr val="BDBDBD"/>
+                      </a:solidFill>
+                    </a:lnB>
                   </a:tcPr>
                 </a:tc>
                 <a:tc>
@@ -10756,10 +13790,30 @@
                       </a:r>
                     </a:p>
                   </a:txBody>
-                  <a:tcPr>
-                    <a:solidFill>
-                      <a:srgbClr val="FFF1F2"/>
-                    </a:solidFill>
+                  <a:tcPr anchor="ctr">
+                    <a:solidFill>
+                      <a:srgbClr val="FFFFFF"/>
+                    </a:solidFill>
+                    <a:lnL w="6350" cap="flat" cmpd="sng" algn="ctr">
+                      <a:solidFill>
+                        <a:srgbClr val="BDBDBD"/>
+                      </a:solidFill>
+                    </a:lnL>
+                    <a:lnR w="6350" cap="flat" cmpd="sng" algn="ctr">
+                      <a:solidFill>
+                        <a:srgbClr val="BDBDBD"/>
+                      </a:solidFill>
+                    </a:lnR>
+                    <a:lnT w="6350" cap="flat" cmpd="sng" algn="ctr">
+                      <a:solidFill>
+                        <a:srgbClr val="BDBDBD"/>
+                      </a:solidFill>
+                    </a:lnT>
+                    <a:lnB w="6350" cap="flat" cmpd="sng" algn="ctr">
+                      <a:solidFill>
+                        <a:srgbClr val="BDBDBD"/>
+                      </a:solidFill>
+                    </a:lnB>
                   </a:tcPr>
                 </a:tc>
               </a:tr>
@@ -10769,7 +13823,7 @@
       </p:graphicFrame>
       <p:sp>
         <p:nvSpPr>
-          <p:cNvPr id="13" name="TextBox 12"/>
+          <p:cNvPr id="15" name="TextBox 14"/>
           <p:cNvSpPr txBox="1"/>
           <p:nvPr/>
         </p:nvSpPr>
@@ -10804,7 +13858,7 @@
       </p:sp>
       <p:graphicFrame>
         <p:nvGraphicFramePr>
-          <p:cNvPr id="14" name="Table 13"/>
+          <p:cNvPr id="16" name="Table 15"/>
           <p:cNvGraphicFramePr>
             <a:graphicFrameLocks noGrp="1"/>
           </p:cNvGraphicFramePr>
@@ -10842,10 +13896,30 @@
                       </a:r>
                     </a:p>
                   </a:txBody>
-                  <a:tcPr>
+                  <a:tcPr anchor="ctr">
                     <a:solidFill>
                       <a:srgbClr val="F5F5F5"/>
                     </a:solidFill>
+                    <a:lnL w="6350" cap="flat" cmpd="sng" algn="ctr">
+                      <a:solidFill>
+                        <a:srgbClr val="BDBDBD"/>
+                      </a:solidFill>
+                    </a:lnL>
+                    <a:lnR w="6350" cap="flat" cmpd="sng" algn="ctr">
+                      <a:solidFill>
+                        <a:srgbClr val="BDBDBD"/>
+                      </a:solidFill>
+                    </a:lnR>
+                    <a:lnT w="6350" cap="flat" cmpd="sng" algn="ctr">
+                      <a:solidFill>
+                        <a:srgbClr val="BDBDBD"/>
+                      </a:solidFill>
+                    </a:lnT>
+                    <a:lnB w="6350" cap="flat" cmpd="sng" algn="ctr">
+                      <a:solidFill>
+                        <a:srgbClr val="BDBDBD"/>
+                      </a:solidFill>
+                    </a:lnB>
                   </a:tcPr>
                 </a:tc>
                 <a:tc>
@@ -10865,10 +13939,30 @@
                       </a:r>
                     </a:p>
                   </a:txBody>
-                  <a:tcPr>
+                  <a:tcPr anchor="ctr">
                     <a:solidFill>
                       <a:srgbClr val="F5F5F5"/>
                     </a:solidFill>
+                    <a:lnL w="6350" cap="flat" cmpd="sng" algn="ctr">
+                      <a:solidFill>
+                        <a:srgbClr val="BDBDBD"/>
+                      </a:solidFill>
+                    </a:lnL>
+                    <a:lnR w="6350" cap="flat" cmpd="sng" algn="ctr">
+                      <a:solidFill>
+                        <a:srgbClr val="BDBDBD"/>
+                      </a:solidFill>
+                    </a:lnR>
+                    <a:lnT w="6350" cap="flat" cmpd="sng" algn="ctr">
+                      <a:solidFill>
+                        <a:srgbClr val="BDBDBD"/>
+                      </a:solidFill>
+                    </a:lnT>
+                    <a:lnB w="6350" cap="flat" cmpd="sng" algn="ctr">
+                      <a:solidFill>
+                        <a:srgbClr val="BDBDBD"/>
+                      </a:solidFill>
+                    </a:lnB>
                   </a:tcPr>
                 </a:tc>
               </a:tr>
@@ -10890,10 +13984,30 @@
                       </a:r>
                     </a:p>
                   </a:txBody>
-                  <a:tcPr>
+                  <a:tcPr anchor="ctr">
                     <a:solidFill>
                       <a:srgbClr val="FFFFFF"/>
                     </a:solidFill>
+                    <a:lnL w="6350" cap="flat" cmpd="sng" algn="ctr">
+                      <a:solidFill>
+                        <a:srgbClr val="BDBDBD"/>
+                      </a:solidFill>
+                    </a:lnL>
+                    <a:lnR w="6350" cap="flat" cmpd="sng" algn="ctr">
+                      <a:solidFill>
+                        <a:srgbClr val="BDBDBD"/>
+                      </a:solidFill>
+                    </a:lnR>
+                    <a:lnT w="6350" cap="flat" cmpd="sng" algn="ctr">
+                      <a:solidFill>
+                        <a:srgbClr val="BDBDBD"/>
+                      </a:solidFill>
+                    </a:lnT>
+                    <a:lnB w="6350" cap="flat" cmpd="sng" algn="ctr">
+                      <a:solidFill>
+                        <a:srgbClr val="BDBDBD"/>
+                      </a:solidFill>
+                    </a:lnB>
                   </a:tcPr>
                 </a:tc>
                 <a:tc>
@@ -10913,10 +14027,30 @@
                       </a:r>
                     </a:p>
                   </a:txBody>
-                  <a:tcPr>
+                  <a:tcPr anchor="ctr">
                     <a:solidFill>
                       <a:srgbClr val="FFFFFF"/>
                     </a:solidFill>
+                    <a:lnL w="6350" cap="flat" cmpd="sng" algn="ctr">
+                      <a:solidFill>
+                        <a:srgbClr val="BDBDBD"/>
+                      </a:solidFill>
+                    </a:lnL>
+                    <a:lnR w="6350" cap="flat" cmpd="sng" algn="ctr">
+                      <a:solidFill>
+                        <a:srgbClr val="BDBDBD"/>
+                      </a:solidFill>
+                    </a:lnR>
+                    <a:lnT w="6350" cap="flat" cmpd="sng" algn="ctr">
+                      <a:solidFill>
+                        <a:srgbClr val="BDBDBD"/>
+                      </a:solidFill>
+                    </a:lnT>
+                    <a:lnB w="6350" cap="flat" cmpd="sng" algn="ctr">
+                      <a:solidFill>
+                        <a:srgbClr val="BDBDBD"/>
+                      </a:solidFill>
+                    </a:lnB>
                   </a:tcPr>
                 </a:tc>
               </a:tr>
@@ -10938,10 +14072,30 @@
                       </a:r>
                     </a:p>
                   </a:txBody>
-                  <a:tcPr>
-                    <a:solidFill>
-                      <a:srgbClr val="FFF1F2"/>
-                    </a:solidFill>
+                  <a:tcPr anchor="ctr">
+                    <a:solidFill>
+                      <a:srgbClr val="FFFFFF"/>
+                    </a:solidFill>
+                    <a:lnL w="6350" cap="flat" cmpd="sng" algn="ctr">
+                      <a:solidFill>
+                        <a:srgbClr val="BDBDBD"/>
+                      </a:solidFill>
+                    </a:lnL>
+                    <a:lnR w="6350" cap="flat" cmpd="sng" algn="ctr">
+                      <a:solidFill>
+                        <a:srgbClr val="BDBDBD"/>
+                      </a:solidFill>
+                    </a:lnR>
+                    <a:lnT w="6350" cap="flat" cmpd="sng" algn="ctr">
+                      <a:solidFill>
+                        <a:srgbClr val="BDBDBD"/>
+                      </a:solidFill>
+                    </a:lnT>
+                    <a:lnB w="6350" cap="flat" cmpd="sng" algn="ctr">
+                      <a:solidFill>
+                        <a:srgbClr val="BDBDBD"/>
+                      </a:solidFill>
+                    </a:lnB>
                   </a:tcPr>
                 </a:tc>
                 <a:tc>
@@ -10961,10 +14115,30 @@
                       </a:r>
                     </a:p>
                   </a:txBody>
-                  <a:tcPr>
-                    <a:solidFill>
-                      <a:srgbClr val="FFF1F2"/>
-                    </a:solidFill>
+                  <a:tcPr anchor="ctr">
+                    <a:solidFill>
+                      <a:srgbClr val="FFFFFF"/>
+                    </a:solidFill>
+                    <a:lnL w="6350" cap="flat" cmpd="sng" algn="ctr">
+                      <a:solidFill>
+                        <a:srgbClr val="BDBDBD"/>
+                      </a:solidFill>
+                    </a:lnL>
+                    <a:lnR w="6350" cap="flat" cmpd="sng" algn="ctr">
+                      <a:solidFill>
+                        <a:srgbClr val="BDBDBD"/>
+                      </a:solidFill>
+                    </a:lnR>
+                    <a:lnT w="6350" cap="flat" cmpd="sng" algn="ctr">
+                      <a:solidFill>
+                        <a:srgbClr val="BDBDBD"/>
+                      </a:solidFill>
+                    </a:lnT>
+                    <a:lnB w="6350" cap="flat" cmpd="sng" algn="ctr">
+                      <a:solidFill>
+                        <a:srgbClr val="BDBDBD"/>
+                      </a:solidFill>
+                    </a:lnB>
                   </a:tcPr>
                 </a:tc>
               </a:tr>
@@ -10986,10 +14160,30 @@
                       </a:r>
                     </a:p>
                   </a:txBody>
-                  <a:tcPr>
+                  <a:tcPr anchor="ctr">
                     <a:solidFill>
                       <a:srgbClr val="FFFFFF"/>
                     </a:solidFill>
+                    <a:lnL w="6350" cap="flat" cmpd="sng" algn="ctr">
+                      <a:solidFill>
+                        <a:srgbClr val="BDBDBD"/>
+                      </a:solidFill>
+                    </a:lnL>
+                    <a:lnR w="6350" cap="flat" cmpd="sng" algn="ctr">
+                      <a:solidFill>
+                        <a:srgbClr val="BDBDBD"/>
+                      </a:solidFill>
+                    </a:lnR>
+                    <a:lnT w="6350" cap="flat" cmpd="sng" algn="ctr">
+                      <a:solidFill>
+                        <a:srgbClr val="BDBDBD"/>
+                      </a:solidFill>
+                    </a:lnT>
+                    <a:lnB w="6350" cap="flat" cmpd="sng" algn="ctr">
+                      <a:solidFill>
+                        <a:srgbClr val="BDBDBD"/>
+                      </a:solidFill>
+                    </a:lnB>
                   </a:tcPr>
                 </a:tc>
                 <a:tc>
@@ -11009,10 +14203,30 @@
                       </a:r>
                     </a:p>
                   </a:txBody>
-                  <a:tcPr>
+                  <a:tcPr anchor="ctr">
                     <a:solidFill>
                       <a:srgbClr val="FFFFFF"/>
                     </a:solidFill>
+                    <a:lnL w="6350" cap="flat" cmpd="sng" algn="ctr">
+                      <a:solidFill>
+                        <a:srgbClr val="BDBDBD"/>
+                      </a:solidFill>
+                    </a:lnL>
+                    <a:lnR w="6350" cap="flat" cmpd="sng" algn="ctr">
+                      <a:solidFill>
+                        <a:srgbClr val="BDBDBD"/>
+                      </a:solidFill>
+                    </a:lnR>
+                    <a:lnT w="6350" cap="flat" cmpd="sng" algn="ctr">
+                      <a:solidFill>
+                        <a:srgbClr val="BDBDBD"/>
+                      </a:solidFill>
+                    </a:lnT>
+                    <a:lnB w="6350" cap="flat" cmpd="sng" algn="ctr">
+                      <a:solidFill>
+                        <a:srgbClr val="BDBDBD"/>
+                      </a:solidFill>
+                    </a:lnB>
                   </a:tcPr>
                 </a:tc>
               </a:tr>
@@ -11034,10 +14248,30 @@
                       </a:r>
                     </a:p>
                   </a:txBody>
-                  <a:tcPr>
-                    <a:solidFill>
-                      <a:srgbClr val="FFF1F2"/>
-                    </a:solidFill>
+                  <a:tcPr anchor="ctr">
+                    <a:solidFill>
+                      <a:srgbClr val="FFFFFF"/>
+                    </a:solidFill>
+                    <a:lnL w="6350" cap="flat" cmpd="sng" algn="ctr">
+                      <a:solidFill>
+                        <a:srgbClr val="BDBDBD"/>
+                      </a:solidFill>
+                    </a:lnL>
+                    <a:lnR w="6350" cap="flat" cmpd="sng" algn="ctr">
+                      <a:solidFill>
+                        <a:srgbClr val="BDBDBD"/>
+                      </a:solidFill>
+                    </a:lnR>
+                    <a:lnT w="6350" cap="flat" cmpd="sng" algn="ctr">
+                      <a:solidFill>
+                        <a:srgbClr val="BDBDBD"/>
+                      </a:solidFill>
+                    </a:lnT>
+                    <a:lnB w="6350" cap="flat" cmpd="sng" algn="ctr">
+                      <a:solidFill>
+                        <a:srgbClr val="BDBDBD"/>
+                      </a:solidFill>
+                    </a:lnB>
                   </a:tcPr>
                 </a:tc>
                 <a:tc>
@@ -11057,10 +14291,30 @@
                       </a:r>
                     </a:p>
                   </a:txBody>
-                  <a:tcPr>
-                    <a:solidFill>
-                      <a:srgbClr val="FFF1F2"/>
-                    </a:solidFill>
+                  <a:tcPr anchor="ctr">
+                    <a:solidFill>
+                      <a:srgbClr val="FFFFFF"/>
+                    </a:solidFill>
+                    <a:lnL w="6350" cap="flat" cmpd="sng" algn="ctr">
+                      <a:solidFill>
+                        <a:srgbClr val="BDBDBD"/>
+                      </a:solidFill>
+                    </a:lnL>
+                    <a:lnR w="6350" cap="flat" cmpd="sng" algn="ctr">
+                      <a:solidFill>
+                        <a:srgbClr val="BDBDBD"/>
+                      </a:solidFill>
+                    </a:lnR>
+                    <a:lnT w="6350" cap="flat" cmpd="sng" algn="ctr">
+                      <a:solidFill>
+                        <a:srgbClr val="BDBDBD"/>
+                      </a:solidFill>
+                    </a:lnT>
+                    <a:lnB w="6350" cap="flat" cmpd="sng" algn="ctr">
+                      <a:solidFill>
+                        <a:srgbClr val="BDBDBD"/>
+                      </a:solidFill>
+                    </a:lnB>
                   </a:tcPr>
                 </a:tc>
               </a:tr>
@@ -11070,7 +14324,7 @@
       </p:graphicFrame>
       <p:sp>
         <p:nvSpPr>
-          <p:cNvPr id="15" name="Rounded Rectangle 14"/>
+          <p:cNvPr id="17" name="Rounded Rectangle 16"/>
           <p:cNvSpPr/>
           <p:nvPr/>
         </p:nvSpPr>
@@ -11083,7 +14337,7 @@
             <a:avLst/>
           </a:prstGeom>
           <a:solidFill>
-            <a:srgbClr val="FFF1F2"/>
+            <a:srgbClr val="FAFAFA"/>
           </a:solidFill>
           <a:ln>
             <a:solidFill>
@@ -11124,7 +14378,7 @@
       </p:sp>
       <p:sp>
         <p:nvSpPr>
-          <p:cNvPr id="16" name="TextBox 15"/>
+          <p:cNvPr id="18" name="TextBox 17"/>
           <p:cNvSpPr txBox="1"/>
           <p:nvPr/>
         </p:nvSpPr>
@@ -11329,10 +14583,30 @@
                       </a:r>
                     </a:p>
                   </a:txBody>
-                  <a:tcPr>
+                  <a:tcPr anchor="ctr">
                     <a:solidFill>
                       <a:srgbClr val="F5F5F5"/>
                     </a:solidFill>
+                    <a:lnL w="6350" cap="flat" cmpd="sng" algn="ctr">
+                      <a:solidFill>
+                        <a:srgbClr val="BDBDBD"/>
+                      </a:solidFill>
+                    </a:lnL>
+                    <a:lnR w="6350" cap="flat" cmpd="sng" algn="ctr">
+                      <a:solidFill>
+                        <a:srgbClr val="BDBDBD"/>
+                      </a:solidFill>
+                    </a:lnR>
+                    <a:lnT w="6350" cap="flat" cmpd="sng" algn="ctr">
+                      <a:solidFill>
+                        <a:srgbClr val="BDBDBD"/>
+                      </a:solidFill>
+                    </a:lnT>
+                    <a:lnB w="6350" cap="flat" cmpd="sng" algn="ctr">
+                      <a:solidFill>
+                        <a:srgbClr val="BDBDBD"/>
+                      </a:solidFill>
+                    </a:lnB>
                   </a:tcPr>
                 </a:tc>
                 <a:tc>
@@ -11352,10 +14626,30 @@
                       </a:r>
                     </a:p>
                   </a:txBody>
-                  <a:tcPr>
+                  <a:tcPr anchor="ctr">
                     <a:solidFill>
                       <a:srgbClr val="F5F5F5"/>
                     </a:solidFill>
+                    <a:lnL w="6350" cap="flat" cmpd="sng" algn="ctr">
+                      <a:solidFill>
+                        <a:srgbClr val="BDBDBD"/>
+                      </a:solidFill>
+                    </a:lnL>
+                    <a:lnR w="6350" cap="flat" cmpd="sng" algn="ctr">
+                      <a:solidFill>
+                        <a:srgbClr val="BDBDBD"/>
+                      </a:solidFill>
+                    </a:lnR>
+                    <a:lnT w="6350" cap="flat" cmpd="sng" algn="ctr">
+                      <a:solidFill>
+                        <a:srgbClr val="BDBDBD"/>
+                      </a:solidFill>
+                    </a:lnT>
+                    <a:lnB w="6350" cap="flat" cmpd="sng" algn="ctr">
+                      <a:solidFill>
+                        <a:srgbClr val="BDBDBD"/>
+                      </a:solidFill>
+                    </a:lnB>
                   </a:tcPr>
                 </a:tc>
                 <a:tc>
@@ -11375,10 +14669,30 @@
                       </a:r>
                     </a:p>
                   </a:txBody>
-                  <a:tcPr>
+                  <a:tcPr anchor="ctr">
                     <a:solidFill>
                       <a:srgbClr val="F5F5F5"/>
                     </a:solidFill>
+                    <a:lnL w="6350" cap="flat" cmpd="sng" algn="ctr">
+                      <a:solidFill>
+                        <a:srgbClr val="BDBDBD"/>
+                      </a:solidFill>
+                    </a:lnL>
+                    <a:lnR w="6350" cap="flat" cmpd="sng" algn="ctr">
+                      <a:solidFill>
+                        <a:srgbClr val="BDBDBD"/>
+                      </a:solidFill>
+                    </a:lnR>
+                    <a:lnT w="6350" cap="flat" cmpd="sng" algn="ctr">
+                      <a:solidFill>
+                        <a:srgbClr val="BDBDBD"/>
+                      </a:solidFill>
+                    </a:lnT>
+                    <a:lnB w="6350" cap="flat" cmpd="sng" algn="ctr">
+                      <a:solidFill>
+                        <a:srgbClr val="BDBDBD"/>
+                      </a:solidFill>
+                    </a:lnB>
                   </a:tcPr>
                 </a:tc>
               </a:tr>
@@ -11400,10 +14714,30 @@
                       </a:r>
                     </a:p>
                   </a:txBody>
-                  <a:tcPr>
+                  <a:tcPr anchor="ctr">
                     <a:solidFill>
                       <a:srgbClr val="FFFFFF"/>
                     </a:solidFill>
+                    <a:lnL w="6350" cap="flat" cmpd="sng" algn="ctr">
+                      <a:solidFill>
+                        <a:srgbClr val="BDBDBD"/>
+                      </a:solidFill>
+                    </a:lnL>
+                    <a:lnR w="6350" cap="flat" cmpd="sng" algn="ctr">
+                      <a:solidFill>
+                        <a:srgbClr val="BDBDBD"/>
+                      </a:solidFill>
+                    </a:lnR>
+                    <a:lnT w="6350" cap="flat" cmpd="sng" algn="ctr">
+                      <a:solidFill>
+                        <a:srgbClr val="BDBDBD"/>
+                      </a:solidFill>
+                    </a:lnT>
+                    <a:lnB w="6350" cap="flat" cmpd="sng" algn="ctr">
+                      <a:solidFill>
+                        <a:srgbClr val="BDBDBD"/>
+                      </a:solidFill>
+                    </a:lnB>
                   </a:tcPr>
                 </a:tc>
                 <a:tc>
@@ -11423,10 +14757,30 @@
                       </a:r>
                     </a:p>
                   </a:txBody>
-                  <a:tcPr>
+                  <a:tcPr anchor="ctr">
                     <a:solidFill>
                       <a:srgbClr val="FFFFFF"/>
                     </a:solidFill>
+                    <a:lnL w="6350" cap="flat" cmpd="sng" algn="ctr">
+                      <a:solidFill>
+                        <a:srgbClr val="BDBDBD"/>
+                      </a:solidFill>
+                    </a:lnL>
+                    <a:lnR w="6350" cap="flat" cmpd="sng" algn="ctr">
+                      <a:solidFill>
+                        <a:srgbClr val="BDBDBD"/>
+                      </a:solidFill>
+                    </a:lnR>
+                    <a:lnT w="6350" cap="flat" cmpd="sng" algn="ctr">
+                      <a:solidFill>
+                        <a:srgbClr val="BDBDBD"/>
+                      </a:solidFill>
+                    </a:lnT>
+                    <a:lnB w="6350" cap="flat" cmpd="sng" algn="ctr">
+                      <a:solidFill>
+                        <a:srgbClr val="BDBDBD"/>
+                      </a:solidFill>
+                    </a:lnB>
                   </a:tcPr>
                 </a:tc>
                 <a:tc>
@@ -11446,10 +14800,30 @@
                       </a:r>
                     </a:p>
                   </a:txBody>
-                  <a:tcPr>
+                  <a:tcPr anchor="ctr">
                     <a:solidFill>
                       <a:srgbClr val="FFFFFF"/>
                     </a:solidFill>
+                    <a:lnL w="6350" cap="flat" cmpd="sng" algn="ctr">
+                      <a:solidFill>
+                        <a:srgbClr val="BDBDBD"/>
+                      </a:solidFill>
+                    </a:lnL>
+                    <a:lnR w="6350" cap="flat" cmpd="sng" algn="ctr">
+                      <a:solidFill>
+                        <a:srgbClr val="BDBDBD"/>
+                      </a:solidFill>
+                    </a:lnR>
+                    <a:lnT w="6350" cap="flat" cmpd="sng" algn="ctr">
+                      <a:solidFill>
+                        <a:srgbClr val="BDBDBD"/>
+                      </a:solidFill>
+                    </a:lnT>
+                    <a:lnB w="6350" cap="flat" cmpd="sng" algn="ctr">
+                      <a:solidFill>
+                        <a:srgbClr val="BDBDBD"/>
+                      </a:solidFill>
+                    </a:lnB>
                   </a:tcPr>
                 </a:tc>
               </a:tr>
@@ -11471,10 +14845,30 @@
                       </a:r>
                     </a:p>
                   </a:txBody>
-                  <a:tcPr>
-                    <a:solidFill>
-                      <a:srgbClr val="FFF1F2"/>
-                    </a:solidFill>
+                  <a:tcPr anchor="ctr">
+                    <a:solidFill>
+                      <a:srgbClr val="FFFFFF"/>
+                    </a:solidFill>
+                    <a:lnL w="6350" cap="flat" cmpd="sng" algn="ctr">
+                      <a:solidFill>
+                        <a:srgbClr val="BDBDBD"/>
+                      </a:solidFill>
+                    </a:lnL>
+                    <a:lnR w="6350" cap="flat" cmpd="sng" algn="ctr">
+                      <a:solidFill>
+                        <a:srgbClr val="BDBDBD"/>
+                      </a:solidFill>
+                    </a:lnR>
+                    <a:lnT w="6350" cap="flat" cmpd="sng" algn="ctr">
+                      <a:solidFill>
+                        <a:srgbClr val="BDBDBD"/>
+                      </a:solidFill>
+                    </a:lnT>
+                    <a:lnB w="6350" cap="flat" cmpd="sng" algn="ctr">
+                      <a:solidFill>
+                        <a:srgbClr val="BDBDBD"/>
+                      </a:solidFill>
+                    </a:lnB>
                   </a:tcPr>
                 </a:tc>
                 <a:tc>
@@ -11494,10 +14888,30 @@
                       </a:r>
                     </a:p>
                   </a:txBody>
-                  <a:tcPr>
-                    <a:solidFill>
-                      <a:srgbClr val="FFF1F2"/>
-                    </a:solidFill>
+                  <a:tcPr anchor="ctr">
+                    <a:solidFill>
+                      <a:srgbClr val="FFFFFF"/>
+                    </a:solidFill>
+                    <a:lnL w="6350" cap="flat" cmpd="sng" algn="ctr">
+                      <a:solidFill>
+                        <a:srgbClr val="BDBDBD"/>
+                      </a:solidFill>
+                    </a:lnL>
+                    <a:lnR w="6350" cap="flat" cmpd="sng" algn="ctr">
+                      <a:solidFill>
+                        <a:srgbClr val="BDBDBD"/>
+                      </a:solidFill>
+                    </a:lnR>
+                    <a:lnT w="6350" cap="flat" cmpd="sng" algn="ctr">
+                      <a:solidFill>
+                        <a:srgbClr val="BDBDBD"/>
+                      </a:solidFill>
+                    </a:lnT>
+                    <a:lnB w="6350" cap="flat" cmpd="sng" algn="ctr">
+                      <a:solidFill>
+                        <a:srgbClr val="BDBDBD"/>
+                      </a:solidFill>
+                    </a:lnB>
                   </a:tcPr>
                 </a:tc>
                 <a:tc>
@@ -11517,10 +14931,30 @@
                       </a:r>
                     </a:p>
                   </a:txBody>
-                  <a:tcPr>
-                    <a:solidFill>
-                      <a:srgbClr val="FFF1F2"/>
-                    </a:solidFill>
+                  <a:tcPr anchor="ctr">
+                    <a:solidFill>
+                      <a:srgbClr val="FFFFFF"/>
+                    </a:solidFill>
+                    <a:lnL w="6350" cap="flat" cmpd="sng" algn="ctr">
+                      <a:solidFill>
+                        <a:srgbClr val="BDBDBD"/>
+                      </a:solidFill>
+                    </a:lnL>
+                    <a:lnR w="6350" cap="flat" cmpd="sng" algn="ctr">
+                      <a:solidFill>
+                        <a:srgbClr val="BDBDBD"/>
+                      </a:solidFill>
+                    </a:lnR>
+                    <a:lnT w="6350" cap="flat" cmpd="sng" algn="ctr">
+                      <a:solidFill>
+                        <a:srgbClr val="BDBDBD"/>
+                      </a:solidFill>
+                    </a:lnT>
+                    <a:lnB w="6350" cap="flat" cmpd="sng" algn="ctr">
+                      <a:solidFill>
+                        <a:srgbClr val="BDBDBD"/>
+                      </a:solidFill>
+                    </a:lnB>
                   </a:tcPr>
                 </a:tc>
               </a:tr>
@@ -11542,10 +14976,30 @@
                       </a:r>
                     </a:p>
                   </a:txBody>
-                  <a:tcPr>
+                  <a:tcPr anchor="ctr">
                     <a:solidFill>
                       <a:srgbClr val="FFFFFF"/>
                     </a:solidFill>
+                    <a:lnL w="6350" cap="flat" cmpd="sng" algn="ctr">
+                      <a:solidFill>
+                        <a:srgbClr val="BDBDBD"/>
+                      </a:solidFill>
+                    </a:lnL>
+                    <a:lnR w="6350" cap="flat" cmpd="sng" algn="ctr">
+                      <a:solidFill>
+                        <a:srgbClr val="BDBDBD"/>
+                      </a:solidFill>
+                    </a:lnR>
+                    <a:lnT w="6350" cap="flat" cmpd="sng" algn="ctr">
+                      <a:solidFill>
+                        <a:srgbClr val="BDBDBD"/>
+                      </a:solidFill>
+                    </a:lnT>
+                    <a:lnB w="6350" cap="flat" cmpd="sng" algn="ctr">
+                      <a:solidFill>
+                        <a:srgbClr val="BDBDBD"/>
+                      </a:solidFill>
+                    </a:lnB>
                   </a:tcPr>
                 </a:tc>
                 <a:tc>
@@ -11565,10 +15019,30 @@
                       </a:r>
                     </a:p>
                   </a:txBody>
-                  <a:tcPr>
+                  <a:tcPr anchor="ctr">
                     <a:solidFill>
                       <a:srgbClr val="FFFFFF"/>
                     </a:solidFill>
+                    <a:lnL w="6350" cap="flat" cmpd="sng" algn="ctr">
+                      <a:solidFill>
+                        <a:srgbClr val="BDBDBD"/>
+                      </a:solidFill>
+                    </a:lnL>
+                    <a:lnR w="6350" cap="flat" cmpd="sng" algn="ctr">
+                      <a:solidFill>
+                        <a:srgbClr val="BDBDBD"/>
+                      </a:solidFill>
+                    </a:lnR>
+                    <a:lnT w="6350" cap="flat" cmpd="sng" algn="ctr">
+                      <a:solidFill>
+                        <a:srgbClr val="BDBDBD"/>
+                      </a:solidFill>
+                    </a:lnT>
+                    <a:lnB w="6350" cap="flat" cmpd="sng" algn="ctr">
+                      <a:solidFill>
+                        <a:srgbClr val="BDBDBD"/>
+                      </a:solidFill>
+                    </a:lnB>
                   </a:tcPr>
                 </a:tc>
                 <a:tc>
@@ -11588,10 +15062,30 @@
                       </a:r>
                     </a:p>
                   </a:txBody>
-                  <a:tcPr>
+                  <a:tcPr anchor="ctr">
                     <a:solidFill>
                       <a:srgbClr val="FFFFFF"/>
                     </a:solidFill>
+                    <a:lnL w="6350" cap="flat" cmpd="sng" algn="ctr">
+                      <a:solidFill>
+                        <a:srgbClr val="BDBDBD"/>
+                      </a:solidFill>
+                    </a:lnL>
+                    <a:lnR w="6350" cap="flat" cmpd="sng" algn="ctr">
+                      <a:solidFill>
+                        <a:srgbClr val="BDBDBD"/>
+                      </a:solidFill>
+                    </a:lnR>
+                    <a:lnT w="6350" cap="flat" cmpd="sng" algn="ctr">
+                      <a:solidFill>
+                        <a:srgbClr val="BDBDBD"/>
+                      </a:solidFill>
+                    </a:lnT>
+                    <a:lnB w="6350" cap="flat" cmpd="sng" algn="ctr">
+                      <a:solidFill>
+                        <a:srgbClr val="BDBDBD"/>
+                      </a:solidFill>
+                    </a:lnB>
                   </a:tcPr>
                 </a:tc>
               </a:tr>
@@ -11613,10 +15107,30 @@
                       </a:r>
                     </a:p>
                   </a:txBody>
-                  <a:tcPr>
-                    <a:solidFill>
-                      <a:srgbClr val="FFF1F2"/>
-                    </a:solidFill>
+                  <a:tcPr anchor="ctr">
+                    <a:solidFill>
+                      <a:srgbClr val="FFFFFF"/>
+                    </a:solidFill>
+                    <a:lnL w="6350" cap="flat" cmpd="sng" algn="ctr">
+                      <a:solidFill>
+                        <a:srgbClr val="BDBDBD"/>
+                      </a:solidFill>
+                    </a:lnL>
+                    <a:lnR w="6350" cap="flat" cmpd="sng" algn="ctr">
+                      <a:solidFill>
+                        <a:srgbClr val="BDBDBD"/>
+                      </a:solidFill>
+                    </a:lnR>
+                    <a:lnT w="6350" cap="flat" cmpd="sng" algn="ctr">
+                      <a:solidFill>
+                        <a:srgbClr val="BDBDBD"/>
+                      </a:solidFill>
+                    </a:lnT>
+                    <a:lnB w="6350" cap="flat" cmpd="sng" algn="ctr">
+                      <a:solidFill>
+                        <a:srgbClr val="BDBDBD"/>
+                      </a:solidFill>
+                    </a:lnB>
                   </a:tcPr>
                 </a:tc>
                 <a:tc>
@@ -11636,10 +15150,30 @@
                       </a:r>
                     </a:p>
                   </a:txBody>
-                  <a:tcPr>
-                    <a:solidFill>
-                      <a:srgbClr val="FFF1F2"/>
-                    </a:solidFill>
+                  <a:tcPr anchor="ctr">
+                    <a:solidFill>
+                      <a:srgbClr val="FFFFFF"/>
+                    </a:solidFill>
+                    <a:lnL w="6350" cap="flat" cmpd="sng" algn="ctr">
+                      <a:solidFill>
+                        <a:srgbClr val="BDBDBD"/>
+                      </a:solidFill>
+                    </a:lnL>
+                    <a:lnR w="6350" cap="flat" cmpd="sng" algn="ctr">
+                      <a:solidFill>
+                        <a:srgbClr val="BDBDBD"/>
+                      </a:solidFill>
+                    </a:lnR>
+                    <a:lnT w="6350" cap="flat" cmpd="sng" algn="ctr">
+                      <a:solidFill>
+                        <a:srgbClr val="BDBDBD"/>
+                      </a:solidFill>
+                    </a:lnT>
+                    <a:lnB w="6350" cap="flat" cmpd="sng" algn="ctr">
+                      <a:solidFill>
+                        <a:srgbClr val="BDBDBD"/>
+                      </a:solidFill>
+                    </a:lnB>
                   </a:tcPr>
                 </a:tc>
                 <a:tc>
@@ -11659,10 +15193,30 @@
                       </a:r>
                     </a:p>
                   </a:txBody>
-                  <a:tcPr>
-                    <a:solidFill>
-                      <a:srgbClr val="FFF1F2"/>
-                    </a:solidFill>
+                  <a:tcPr anchor="ctr">
+                    <a:solidFill>
+                      <a:srgbClr val="FFFFFF"/>
+                    </a:solidFill>
+                    <a:lnL w="6350" cap="flat" cmpd="sng" algn="ctr">
+                      <a:solidFill>
+                        <a:srgbClr val="BDBDBD"/>
+                      </a:solidFill>
+                    </a:lnL>
+                    <a:lnR w="6350" cap="flat" cmpd="sng" algn="ctr">
+                      <a:solidFill>
+                        <a:srgbClr val="BDBDBD"/>
+                      </a:solidFill>
+                    </a:lnR>
+                    <a:lnT w="6350" cap="flat" cmpd="sng" algn="ctr">
+                      <a:solidFill>
+                        <a:srgbClr val="BDBDBD"/>
+                      </a:solidFill>
+                    </a:lnT>
+                    <a:lnB w="6350" cap="flat" cmpd="sng" algn="ctr">
+                      <a:solidFill>
+                        <a:srgbClr val="BDBDBD"/>
+                      </a:solidFill>
+                    </a:lnB>
                   </a:tcPr>
                 </a:tc>
               </a:tr>
@@ -11684,10 +15238,30 @@
                       </a:r>
                     </a:p>
                   </a:txBody>
-                  <a:tcPr>
+                  <a:tcPr anchor="ctr">
                     <a:solidFill>
                       <a:srgbClr val="FFFFFF"/>
                     </a:solidFill>
+                    <a:lnL w="6350" cap="flat" cmpd="sng" algn="ctr">
+                      <a:solidFill>
+                        <a:srgbClr val="BDBDBD"/>
+                      </a:solidFill>
+                    </a:lnL>
+                    <a:lnR w="6350" cap="flat" cmpd="sng" algn="ctr">
+                      <a:solidFill>
+                        <a:srgbClr val="BDBDBD"/>
+                      </a:solidFill>
+                    </a:lnR>
+                    <a:lnT w="6350" cap="flat" cmpd="sng" algn="ctr">
+                      <a:solidFill>
+                        <a:srgbClr val="BDBDBD"/>
+                      </a:solidFill>
+                    </a:lnT>
+                    <a:lnB w="6350" cap="flat" cmpd="sng" algn="ctr">
+                      <a:solidFill>
+                        <a:srgbClr val="BDBDBD"/>
+                      </a:solidFill>
+                    </a:lnB>
                   </a:tcPr>
                 </a:tc>
                 <a:tc>
@@ -11707,10 +15281,30 @@
                       </a:r>
                     </a:p>
                   </a:txBody>
-                  <a:tcPr>
+                  <a:tcPr anchor="ctr">
                     <a:solidFill>
                       <a:srgbClr val="FFFFFF"/>
                     </a:solidFill>
+                    <a:lnL w="6350" cap="flat" cmpd="sng" algn="ctr">
+                      <a:solidFill>
+                        <a:srgbClr val="BDBDBD"/>
+                      </a:solidFill>
+                    </a:lnL>
+                    <a:lnR w="6350" cap="flat" cmpd="sng" algn="ctr">
+                      <a:solidFill>
+                        <a:srgbClr val="BDBDBD"/>
+                      </a:solidFill>
+                    </a:lnR>
+                    <a:lnT w="6350" cap="flat" cmpd="sng" algn="ctr">
+                      <a:solidFill>
+                        <a:srgbClr val="BDBDBD"/>
+                      </a:solidFill>
+                    </a:lnT>
+                    <a:lnB w="6350" cap="flat" cmpd="sng" algn="ctr">
+                      <a:solidFill>
+                        <a:srgbClr val="BDBDBD"/>
+                      </a:solidFill>
+                    </a:lnB>
                   </a:tcPr>
                 </a:tc>
                 <a:tc>
@@ -11730,10 +15324,30 @@
                       </a:r>
                     </a:p>
                   </a:txBody>
-                  <a:tcPr>
+                  <a:tcPr anchor="ctr">
                     <a:solidFill>
                       <a:srgbClr val="FFFFFF"/>
                     </a:solidFill>
+                    <a:lnL w="6350" cap="flat" cmpd="sng" algn="ctr">
+                      <a:solidFill>
+                        <a:srgbClr val="BDBDBD"/>
+                      </a:solidFill>
+                    </a:lnL>
+                    <a:lnR w="6350" cap="flat" cmpd="sng" algn="ctr">
+                      <a:solidFill>
+                        <a:srgbClr val="BDBDBD"/>
+                      </a:solidFill>
+                    </a:lnR>
+                    <a:lnT w="6350" cap="flat" cmpd="sng" algn="ctr">
+                      <a:solidFill>
+                        <a:srgbClr val="BDBDBD"/>
+                      </a:solidFill>
+                    </a:lnT>
+                    <a:lnB w="6350" cap="flat" cmpd="sng" algn="ctr">
+                      <a:solidFill>
+                        <a:srgbClr val="BDBDBD"/>
+                      </a:solidFill>
+                    </a:lnB>
                   </a:tcPr>
                 </a:tc>
               </a:tr>
@@ -11767,7 +15381,7 @@
             <a:r>
               <a:rPr sz="1400" b="1">
                 <a:solidFill>
-                  <a:srgbClr val="F57C00"/>
+                  <a:srgbClr val="C7000B"/>
                 </a:solidFill>
                 <a:latin typeface="Microsoft YaHei"/>
               </a:rPr>
@@ -11817,10 +15431,30 @@
                       </a:r>
                     </a:p>
                   </a:txBody>
-                  <a:tcPr>
+                  <a:tcPr anchor="ctr">
                     <a:solidFill>
                       <a:srgbClr val="F5F5F5"/>
                     </a:solidFill>
+                    <a:lnL w="6350" cap="flat" cmpd="sng" algn="ctr">
+                      <a:solidFill>
+                        <a:srgbClr val="BDBDBD"/>
+                      </a:solidFill>
+                    </a:lnL>
+                    <a:lnR w="6350" cap="flat" cmpd="sng" algn="ctr">
+                      <a:solidFill>
+                        <a:srgbClr val="BDBDBD"/>
+                      </a:solidFill>
+                    </a:lnR>
+                    <a:lnT w="6350" cap="flat" cmpd="sng" algn="ctr">
+                      <a:solidFill>
+                        <a:srgbClr val="BDBDBD"/>
+                      </a:solidFill>
+                    </a:lnT>
+                    <a:lnB w="6350" cap="flat" cmpd="sng" algn="ctr">
+                      <a:solidFill>
+                        <a:srgbClr val="BDBDBD"/>
+                      </a:solidFill>
+                    </a:lnB>
                   </a:tcPr>
                 </a:tc>
                 <a:tc>
@@ -11840,10 +15474,30 @@
                       </a:r>
                     </a:p>
                   </a:txBody>
-                  <a:tcPr>
+                  <a:tcPr anchor="ctr">
                     <a:solidFill>
                       <a:srgbClr val="F5F5F5"/>
                     </a:solidFill>
+                    <a:lnL w="6350" cap="flat" cmpd="sng" algn="ctr">
+                      <a:solidFill>
+                        <a:srgbClr val="BDBDBD"/>
+                      </a:solidFill>
+                    </a:lnL>
+                    <a:lnR w="6350" cap="flat" cmpd="sng" algn="ctr">
+                      <a:solidFill>
+                        <a:srgbClr val="BDBDBD"/>
+                      </a:solidFill>
+                    </a:lnR>
+                    <a:lnT w="6350" cap="flat" cmpd="sng" algn="ctr">
+                      <a:solidFill>
+                        <a:srgbClr val="BDBDBD"/>
+                      </a:solidFill>
+                    </a:lnT>
+                    <a:lnB w="6350" cap="flat" cmpd="sng" algn="ctr">
+                      <a:solidFill>
+                        <a:srgbClr val="BDBDBD"/>
+                      </a:solidFill>
+                    </a:lnB>
                   </a:tcPr>
                 </a:tc>
                 <a:tc>
@@ -11863,10 +15517,30 @@
                       </a:r>
                     </a:p>
                   </a:txBody>
-                  <a:tcPr>
+                  <a:tcPr anchor="ctr">
                     <a:solidFill>
                       <a:srgbClr val="F5F5F5"/>
                     </a:solidFill>
+                    <a:lnL w="6350" cap="flat" cmpd="sng" algn="ctr">
+                      <a:solidFill>
+                        <a:srgbClr val="BDBDBD"/>
+                      </a:solidFill>
+                    </a:lnL>
+                    <a:lnR w="6350" cap="flat" cmpd="sng" algn="ctr">
+                      <a:solidFill>
+                        <a:srgbClr val="BDBDBD"/>
+                      </a:solidFill>
+                    </a:lnR>
+                    <a:lnT w="6350" cap="flat" cmpd="sng" algn="ctr">
+                      <a:solidFill>
+                        <a:srgbClr val="BDBDBD"/>
+                      </a:solidFill>
+                    </a:lnT>
+                    <a:lnB w="6350" cap="flat" cmpd="sng" algn="ctr">
+                      <a:solidFill>
+                        <a:srgbClr val="BDBDBD"/>
+                      </a:solidFill>
+                    </a:lnB>
                   </a:tcPr>
                 </a:tc>
               </a:tr>
@@ -11888,10 +15562,30 @@
                       </a:r>
                     </a:p>
                   </a:txBody>
-                  <a:tcPr>
+                  <a:tcPr anchor="ctr">
                     <a:solidFill>
                       <a:srgbClr val="FFFFFF"/>
                     </a:solidFill>
+                    <a:lnL w="6350" cap="flat" cmpd="sng" algn="ctr">
+                      <a:solidFill>
+                        <a:srgbClr val="BDBDBD"/>
+                      </a:solidFill>
+                    </a:lnL>
+                    <a:lnR w="6350" cap="flat" cmpd="sng" algn="ctr">
+                      <a:solidFill>
+                        <a:srgbClr val="BDBDBD"/>
+                      </a:solidFill>
+                    </a:lnR>
+                    <a:lnT w="6350" cap="flat" cmpd="sng" algn="ctr">
+                      <a:solidFill>
+                        <a:srgbClr val="BDBDBD"/>
+                      </a:solidFill>
+                    </a:lnT>
+                    <a:lnB w="6350" cap="flat" cmpd="sng" algn="ctr">
+                      <a:solidFill>
+                        <a:srgbClr val="BDBDBD"/>
+                      </a:solidFill>
+                    </a:lnB>
                   </a:tcPr>
                 </a:tc>
                 <a:tc>
@@ -11911,10 +15605,30 @@
                       </a:r>
                     </a:p>
                   </a:txBody>
-                  <a:tcPr>
+                  <a:tcPr anchor="ctr">
                     <a:solidFill>
                       <a:srgbClr val="FFFFFF"/>
                     </a:solidFill>
+                    <a:lnL w="6350" cap="flat" cmpd="sng" algn="ctr">
+                      <a:solidFill>
+                        <a:srgbClr val="BDBDBD"/>
+                      </a:solidFill>
+                    </a:lnL>
+                    <a:lnR w="6350" cap="flat" cmpd="sng" algn="ctr">
+                      <a:solidFill>
+                        <a:srgbClr val="BDBDBD"/>
+                      </a:solidFill>
+                    </a:lnR>
+                    <a:lnT w="6350" cap="flat" cmpd="sng" algn="ctr">
+                      <a:solidFill>
+                        <a:srgbClr val="BDBDBD"/>
+                      </a:solidFill>
+                    </a:lnT>
+                    <a:lnB w="6350" cap="flat" cmpd="sng" algn="ctr">
+                      <a:solidFill>
+                        <a:srgbClr val="BDBDBD"/>
+                      </a:solidFill>
+                    </a:lnB>
                   </a:tcPr>
                 </a:tc>
                 <a:tc>
@@ -11934,10 +15648,30 @@
                       </a:r>
                     </a:p>
                   </a:txBody>
-                  <a:tcPr>
+                  <a:tcPr anchor="ctr">
                     <a:solidFill>
                       <a:srgbClr val="FFFFFF"/>
                     </a:solidFill>
+                    <a:lnL w="6350" cap="flat" cmpd="sng" algn="ctr">
+                      <a:solidFill>
+                        <a:srgbClr val="BDBDBD"/>
+                      </a:solidFill>
+                    </a:lnL>
+                    <a:lnR w="6350" cap="flat" cmpd="sng" algn="ctr">
+                      <a:solidFill>
+                        <a:srgbClr val="BDBDBD"/>
+                      </a:solidFill>
+                    </a:lnR>
+                    <a:lnT w="6350" cap="flat" cmpd="sng" algn="ctr">
+                      <a:solidFill>
+                        <a:srgbClr val="BDBDBD"/>
+                      </a:solidFill>
+                    </a:lnT>
+                    <a:lnB w="6350" cap="flat" cmpd="sng" algn="ctr">
+                      <a:solidFill>
+                        <a:srgbClr val="BDBDBD"/>
+                      </a:solidFill>
+                    </a:lnB>
                   </a:tcPr>
                 </a:tc>
               </a:tr>
@@ -11959,10 +15693,30 @@
                       </a:r>
                     </a:p>
                   </a:txBody>
-                  <a:tcPr>
-                    <a:solidFill>
-                      <a:srgbClr val="FFF1F2"/>
-                    </a:solidFill>
+                  <a:tcPr anchor="ctr">
+                    <a:solidFill>
+                      <a:srgbClr val="FFFFFF"/>
+                    </a:solidFill>
+                    <a:lnL w="6350" cap="flat" cmpd="sng" algn="ctr">
+                      <a:solidFill>
+                        <a:srgbClr val="BDBDBD"/>
+                      </a:solidFill>
+                    </a:lnL>
+                    <a:lnR w="6350" cap="flat" cmpd="sng" algn="ctr">
+                      <a:solidFill>
+                        <a:srgbClr val="BDBDBD"/>
+                      </a:solidFill>
+                    </a:lnR>
+                    <a:lnT w="6350" cap="flat" cmpd="sng" algn="ctr">
+                      <a:solidFill>
+                        <a:srgbClr val="BDBDBD"/>
+                      </a:solidFill>
+                    </a:lnT>
+                    <a:lnB w="6350" cap="flat" cmpd="sng" algn="ctr">
+                      <a:solidFill>
+                        <a:srgbClr val="BDBDBD"/>
+                      </a:solidFill>
+                    </a:lnB>
                   </a:tcPr>
                 </a:tc>
                 <a:tc>
@@ -11982,10 +15736,30 @@
                       </a:r>
                     </a:p>
                   </a:txBody>
-                  <a:tcPr>
-                    <a:solidFill>
-                      <a:srgbClr val="FFF1F2"/>
-                    </a:solidFill>
+                  <a:tcPr anchor="ctr">
+                    <a:solidFill>
+                      <a:srgbClr val="FFFFFF"/>
+                    </a:solidFill>
+                    <a:lnL w="6350" cap="flat" cmpd="sng" algn="ctr">
+                      <a:solidFill>
+                        <a:srgbClr val="BDBDBD"/>
+                      </a:solidFill>
+                    </a:lnL>
+                    <a:lnR w="6350" cap="flat" cmpd="sng" algn="ctr">
+                      <a:solidFill>
+                        <a:srgbClr val="BDBDBD"/>
+                      </a:solidFill>
+                    </a:lnR>
+                    <a:lnT w="6350" cap="flat" cmpd="sng" algn="ctr">
+                      <a:solidFill>
+                        <a:srgbClr val="BDBDBD"/>
+                      </a:solidFill>
+                    </a:lnT>
+                    <a:lnB w="6350" cap="flat" cmpd="sng" algn="ctr">
+                      <a:solidFill>
+                        <a:srgbClr val="BDBDBD"/>
+                      </a:solidFill>
+                    </a:lnB>
                   </a:tcPr>
                 </a:tc>
                 <a:tc>
@@ -12005,10 +15779,30 @@
                       </a:r>
                     </a:p>
                   </a:txBody>
-                  <a:tcPr>
-                    <a:solidFill>
-                      <a:srgbClr val="FFF1F2"/>
-                    </a:solidFill>
+                  <a:tcPr anchor="ctr">
+                    <a:solidFill>
+                      <a:srgbClr val="FFFFFF"/>
+                    </a:solidFill>
+                    <a:lnL w="6350" cap="flat" cmpd="sng" algn="ctr">
+                      <a:solidFill>
+                        <a:srgbClr val="BDBDBD"/>
+                      </a:solidFill>
+                    </a:lnL>
+                    <a:lnR w="6350" cap="flat" cmpd="sng" algn="ctr">
+                      <a:solidFill>
+                        <a:srgbClr val="BDBDBD"/>
+                      </a:solidFill>
+                    </a:lnR>
+                    <a:lnT w="6350" cap="flat" cmpd="sng" algn="ctr">
+                      <a:solidFill>
+                        <a:srgbClr val="BDBDBD"/>
+                      </a:solidFill>
+                    </a:lnT>
+                    <a:lnB w="6350" cap="flat" cmpd="sng" algn="ctr">
+                      <a:solidFill>
+                        <a:srgbClr val="BDBDBD"/>
+                      </a:solidFill>
+                    </a:lnB>
                   </a:tcPr>
                 </a:tc>
               </a:tr>
@@ -12030,10 +15824,30 @@
                       </a:r>
                     </a:p>
                   </a:txBody>
-                  <a:tcPr>
+                  <a:tcPr anchor="ctr">
                     <a:solidFill>
                       <a:srgbClr val="FFFFFF"/>
                     </a:solidFill>
+                    <a:lnL w="6350" cap="flat" cmpd="sng" algn="ctr">
+                      <a:solidFill>
+                        <a:srgbClr val="BDBDBD"/>
+                      </a:solidFill>
+                    </a:lnL>
+                    <a:lnR w="6350" cap="flat" cmpd="sng" algn="ctr">
+                      <a:solidFill>
+                        <a:srgbClr val="BDBDBD"/>
+                      </a:solidFill>
+                    </a:lnR>
+                    <a:lnT w="6350" cap="flat" cmpd="sng" algn="ctr">
+                      <a:solidFill>
+                        <a:srgbClr val="BDBDBD"/>
+                      </a:solidFill>
+                    </a:lnT>
+                    <a:lnB w="6350" cap="flat" cmpd="sng" algn="ctr">
+                      <a:solidFill>
+                        <a:srgbClr val="BDBDBD"/>
+                      </a:solidFill>
+                    </a:lnB>
                   </a:tcPr>
                 </a:tc>
                 <a:tc>
@@ -12053,10 +15867,30 @@
                       </a:r>
                     </a:p>
                   </a:txBody>
-                  <a:tcPr>
+                  <a:tcPr anchor="ctr">
                     <a:solidFill>
                       <a:srgbClr val="FFFFFF"/>
                     </a:solidFill>
+                    <a:lnL w="6350" cap="flat" cmpd="sng" algn="ctr">
+                      <a:solidFill>
+                        <a:srgbClr val="BDBDBD"/>
+                      </a:solidFill>
+                    </a:lnL>
+                    <a:lnR w="6350" cap="flat" cmpd="sng" algn="ctr">
+                      <a:solidFill>
+                        <a:srgbClr val="BDBDBD"/>
+                      </a:solidFill>
+                    </a:lnR>
+                    <a:lnT w="6350" cap="flat" cmpd="sng" algn="ctr">
+                      <a:solidFill>
+                        <a:srgbClr val="BDBDBD"/>
+                      </a:solidFill>
+                    </a:lnT>
+                    <a:lnB w="6350" cap="flat" cmpd="sng" algn="ctr">
+                      <a:solidFill>
+                        <a:srgbClr val="BDBDBD"/>
+                      </a:solidFill>
+                    </a:lnB>
                   </a:tcPr>
                 </a:tc>
                 <a:tc>
@@ -12076,10 +15910,30 @@
                       </a:r>
                     </a:p>
                   </a:txBody>
-                  <a:tcPr>
+                  <a:tcPr anchor="ctr">
                     <a:solidFill>
                       <a:srgbClr val="FFFFFF"/>
                     </a:solidFill>
+                    <a:lnL w="6350" cap="flat" cmpd="sng" algn="ctr">
+                      <a:solidFill>
+                        <a:srgbClr val="BDBDBD"/>
+                      </a:solidFill>
+                    </a:lnL>
+                    <a:lnR w="6350" cap="flat" cmpd="sng" algn="ctr">
+                      <a:solidFill>
+                        <a:srgbClr val="BDBDBD"/>
+                      </a:solidFill>
+                    </a:lnR>
+                    <a:lnT w="6350" cap="flat" cmpd="sng" algn="ctr">
+                      <a:solidFill>
+                        <a:srgbClr val="BDBDBD"/>
+                      </a:solidFill>
+                    </a:lnT>
+                    <a:lnB w="6350" cap="flat" cmpd="sng" algn="ctr">
+                      <a:solidFill>
+                        <a:srgbClr val="BDBDBD"/>
+                      </a:solidFill>
+                    </a:lnB>
                   </a:tcPr>
                 </a:tc>
               </a:tr>
@@ -12101,10 +15955,30 @@
                       </a:r>
                     </a:p>
                   </a:txBody>
-                  <a:tcPr>
-                    <a:solidFill>
-                      <a:srgbClr val="FFF1F2"/>
-                    </a:solidFill>
+                  <a:tcPr anchor="ctr">
+                    <a:solidFill>
+                      <a:srgbClr val="FFFFFF"/>
+                    </a:solidFill>
+                    <a:lnL w="6350" cap="flat" cmpd="sng" algn="ctr">
+                      <a:solidFill>
+                        <a:srgbClr val="BDBDBD"/>
+                      </a:solidFill>
+                    </a:lnL>
+                    <a:lnR w="6350" cap="flat" cmpd="sng" algn="ctr">
+                      <a:solidFill>
+                        <a:srgbClr val="BDBDBD"/>
+                      </a:solidFill>
+                    </a:lnR>
+                    <a:lnT w="6350" cap="flat" cmpd="sng" algn="ctr">
+                      <a:solidFill>
+                        <a:srgbClr val="BDBDBD"/>
+                      </a:solidFill>
+                    </a:lnT>
+                    <a:lnB w="6350" cap="flat" cmpd="sng" algn="ctr">
+                      <a:solidFill>
+                        <a:srgbClr val="BDBDBD"/>
+                      </a:solidFill>
+                    </a:lnB>
                   </a:tcPr>
                 </a:tc>
                 <a:tc>
@@ -12124,10 +15998,30 @@
                       </a:r>
                     </a:p>
                   </a:txBody>
-                  <a:tcPr>
-                    <a:solidFill>
-                      <a:srgbClr val="FFF1F2"/>
-                    </a:solidFill>
+                  <a:tcPr anchor="ctr">
+                    <a:solidFill>
+                      <a:srgbClr val="FFFFFF"/>
+                    </a:solidFill>
+                    <a:lnL w="6350" cap="flat" cmpd="sng" algn="ctr">
+                      <a:solidFill>
+                        <a:srgbClr val="BDBDBD"/>
+                      </a:solidFill>
+                    </a:lnL>
+                    <a:lnR w="6350" cap="flat" cmpd="sng" algn="ctr">
+                      <a:solidFill>
+                        <a:srgbClr val="BDBDBD"/>
+                      </a:solidFill>
+                    </a:lnR>
+                    <a:lnT w="6350" cap="flat" cmpd="sng" algn="ctr">
+                      <a:solidFill>
+                        <a:srgbClr val="BDBDBD"/>
+                      </a:solidFill>
+                    </a:lnT>
+                    <a:lnB w="6350" cap="flat" cmpd="sng" algn="ctr">
+                      <a:solidFill>
+                        <a:srgbClr val="BDBDBD"/>
+                      </a:solidFill>
+                    </a:lnB>
                   </a:tcPr>
                 </a:tc>
                 <a:tc>
@@ -12147,10 +16041,30 @@
                       </a:r>
                     </a:p>
                   </a:txBody>
-                  <a:tcPr>
-                    <a:solidFill>
-                      <a:srgbClr val="FFF1F2"/>
-                    </a:solidFill>
+                  <a:tcPr anchor="ctr">
+                    <a:solidFill>
+                      <a:srgbClr val="FFFFFF"/>
+                    </a:solidFill>
+                    <a:lnL w="6350" cap="flat" cmpd="sng" algn="ctr">
+                      <a:solidFill>
+                        <a:srgbClr val="BDBDBD"/>
+                      </a:solidFill>
+                    </a:lnL>
+                    <a:lnR w="6350" cap="flat" cmpd="sng" algn="ctr">
+                      <a:solidFill>
+                        <a:srgbClr val="BDBDBD"/>
+                      </a:solidFill>
+                    </a:lnR>
+                    <a:lnT w="6350" cap="flat" cmpd="sng" algn="ctr">
+                      <a:solidFill>
+                        <a:srgbClr val="BDBDBD"/>
+                      </a:solidFill>
+                    </a:lnT>
+                    <a:lnB w="6350" cap="flat" cmpd="sng" algn="ctr">
+                      <a:solidFill>
+                        <a:srgbClr val="BDBDBD"/>
+                      </a:solidFill>
+                    </a:lnB>
                   </a:tcPr>
                 </a:tc>
               </a:tr>
@@ -12173,7 +16087,7 @@
             <a:avLst/>
           </a:prstGeom>
           <a:solidFill>
-            <a:srgbClr val="FFF1F2"/>
+            <a:srgbClr val="FAFAFA"/>
           </a:solidFill>
           <a:ln>
             <a:solidFill>
@@ -12419,10 +16333,30 @@
                       </a:r>
                     </a:p>
                   </a:txBody>
-                  <a:tcPr>
+                  <a:tcPr anchor="ctr">
                     <a:solidFill>
                       <a:srgbClr val="F5F5F5"/>
                     </a:solidFill>
+                    <a:lnL w="6350" cap="flat" cmpd="sng" algn="ctr">
+                      <a:solidFill>
+                        <a:srgbClr val="BDBDBD"/>
+                      </a:solidFill>
+                    </a:lnL>
+                    <a:lnR w="6350" cap="flat" cmpd="sng" algn="ctr">
+                      <a:solidFill>
+                        <a:srgbClr val="BDBDBD"/>
+                      </a:solidFill>
+                    </a:lnR>
+                    <a:lnT w="6350" cap="flat" cmpd="sng" algn="ctr">
+                      <a:solidFill>
+                        <a:srgbClr val="BDBDBD"/>
+                      </a:solidFill>
+                    </a:lnT>
+                    <a:lnB w="6350" cap="flat" cmpd="sng" algn="ctr">
+                      <a:solidFill>
+                        <a:srgbClr val="BDBDBD"/>
+                      </a:solidFill>
+                    </a:lnB>
                   </a:tcPr>
                 </a:tc>
                 <a:tc>
@@ -12442,10 +16376,30 @@
                       </a:r>
                     </a:p>
                   </a:txBody>
-                  <a:tcPr>
+                  <a:tcPr anchor="ctr">
                     <a:solidFill>
                       <a:srgbClr val="F5F5F5"/>
                     </a:solidFill>
+                    <a:lnL w="6350" cap="flat" cmpd="sng" algn="ctr">
+                      <a:solidFill>
+                        <a:srgbClr val="BDBDBD"/>
+                      </a:solidFill>
+                    </a:lnL>
+                    <a:lnR w="6350" cap="flat" cmpd="sng" algn="ctr">
+                      <a:solidFill>
+                        <a:srgbClr val="BDBDBD"/>
+                      </a:solidFill>
+                    </a:lnR>
+                    <a:lnT w="6350" cap="flat" cmpd="sng" algn="ctr">
+                      <a:solidFill>
+                        <a:srgbClr val="BDBDBD"/>
+                      </a:solidFill>
+                    </a:lnT>
+                    <a:lnB w="6350" cap="flat" cmpd="sng" algn="ctr">
+                      <a:solidFill>
+                        <a:srgbClr val="BDBDBD"/>
+                      </a:solidFill>
+                    </a:lnB>
                   </a:tcPr>
                 </a:tc>
                 <a:tc>
@@ -12465,10 +16419,30 @@
                       </a:r>
                     </a:p>
                   </a:txBody>
-                  <a:tcPr>
+                  <a:tcPr anchor="ctr">
                     <a:solidFill>
                       <a:srgbClr val="F5F5F5"/>
                     </a:solidFill>
+                    <a:lnL w="6350" cap="flat" cmpd="sng" algn="ctr">
+                      <a:solidFill>
+                        <a:srgbClr val="BDBDBD"/>
+                      </a:solidFill>
+                    </a:lnL>
+                    <a:lnR w="6350" cap="flat" cmpd="sng" algn="ctr">
+                      <a:solidFill>
+                        <a:srgbClr val="BDBDBD"/>
+                      </a:solidFill>
+                    </a:lnR>
+                    <a:lnT w="6350" cap="flat" cmpd="sng" algn="ctr">
+                      <a:solidFill>
+                        <a:srgbClr val="BDBDBD"/>
+                      </a:solidFill>
+                    </a:lnT>
+                    <a:lnB w="6350" cap="flat" cmpd="sng" algn="ctr">
+                      <a:solidFill>
+                        <a:srgbClr val="BDBDBD"/>
+                      </a:solidFill>
+                    </a:lnB>
                   </a:tcPr>
                 </a:tc>
               </a:tr>
@@ -12490,10 +16464,30 @@
                       </a:r>
                     </a:p>
                   </a:txBody>
-                  <a:tcPr>
+                  <a:tcPr anchor="ctr">
                     <a:solidFill>
                       <a:srgbClr val="FFFFFF"/>
                     </a:solidFill>
+                    <a:lnL w="6350" cap="flat" cmpd="sng" algn="ctr">
+                      <a:solidFill>
+                        <a:srgbClr val="BDBDBD"/>
+                      </a:solidFill>
+                    </a:lnL>
+                    <a:lnR w="6350" cap="flat" cmpd="sng" algn="ctr">
+                      <a:solidFill>
+                        <a:srgbClr val="BDBDBD"/>
+                      </a:solidFill>
+                    </a:lnR>
+                    <a:lnT w="6350" cap="flat" cmpd="sng" algn="ctr">
+                      <a:solidFill>
+                        <a:srgbClr val="BDBDBD"/>
+                      </a:solidFill>
+                    </a:lnT>
+                    <a:lnB w="6350" cap="flat" cmpd="sng" algn="ctr">
+                      <a:solidFill>
+                        <a:srgbClr val="BDBDBD"/>
+                      </a:solidFill>
+                    </a:lnB>
                   </a:tcPr>
                 </a:tc>
                 <a:tc>
@@ -12513,10 +16507,30 @@
                       </a:r>
                     </a:p>
                   </a:txBody>
-                  <a:tcPr>
+                  <a:tcPr anchor="ctr">
                     <a:solidFill>
                       <a:srgbClr val="FFFFFF"/>
                     </a:solidFill>
+                    <a:lnL w="6350" cap="flat" cmpd="sng" algn="ctr">
+                      <a:solidFill>
+                        <a:srgbClr val="BDBDBD"/>
+                      </a:solidFill>
+                    </a:lnL>
+                    <a:lnR w="6350" cap="flat" cmpd="sng" algn="ctr">
+                      <a:solidFill>
+                        <a:srgbClr val="BDBDBD"/>
+                      </a:solidFill>
+                    </a:lnR>
+                    <a:lnT w="6350" cap="flat" cmpd="sng" algn="ctr">
+                      <a:solidFill>
+                        <a:srgbClr val="BDBDBD"/>
+                      </a:solidFill>
+                    </a:lnT>
+                    <a:lnB w="6350" cap="flat" cmpd="sng" algn="ctr">
+                      <a:solidFill>
+                        <a:srgbClr val="BDBDBD"/>
+                      </a:solidFill>
+                    </a:lnB>
                   </a:tcPr>
                 </a:tc>
                 <a:tc>
@@ -12536,10 +16550,30 @@
                       </a:r>
                     </a:p>
                   </a:txBody>
-                  <a:tcPr>
+                  <a:tcPr anchor="ctr">
                     <a:solidFill>
                       <a:srgbClr val="FFFFFF"/>
                     </a:solidFill>
+                    <a:lnL w="6350" cap="flat" cmpd="sng" algn="ctr">
+                      <a:solidFill>
+                        <a:srgbClr val="BDBDBD"/>
+                      </a:solidFill>
+                    </a:lnL>
+                    <a:lnR w="6350" cap="flat" cmpd="sng" algn="ctr">
+                      <a:solidFill>
+                        <a:srgbClr val="BDBDBD"/>
+                      </a:solidFill>
+                    </a:lnR>
+                    <a:lnT w="6350" cap="flat" cmpd="sng" algn="ctr">
+                      <a:solidFill>
+                        <a:srgbClr val="BDBDBD"/>
+                      </a:solidFill>
+                    </a:lnT>
+                    <a:lnB w="6350" cap="flat" cmpd="sng" algn="ctr">
+                      <a:solidFill>
+                        <a:srgbClr val="BDBDBD"/>
+                      </a:solidFill>
+                    </a:lnB>
                   </a:tcPr>
                 </a:tc>
               </a:tr>
@@ -12561,10 +16595,30 @@
                       </a:r>
                     </a:p>
                   </a:txBody>
-                  <a:tcPr>
-                    <a:solidFill>
-                      <a:srgbClr val="FFF1F2"/>
-                    </a:solidFill>
+                  <a:tcPr anchor="ctr">
+                    <a:solidFill>
+                      <a:srgbClr val="FFFFFF"/>
+                    </a:solidFill>
+                    <a:lnL w="6350" cap="flat" cmpd="sng" algn="ctr">
+                      <a:solidFill>
+                        <a:srgbClr val="BDBDBD"/>
+                      </a:solidFill>
+                    </a:lnL>
+                    <a:lnR w="6350" cap="flat" cmpd="sng" algn="ctr">
+                      <a:solidFill>
+                        <a:srgbClr val="BDBDBD"/>
+                      </a:solidFill>
+                    </a:lnR>
+                    <a:lnT w="6350" cap="flat" cmpd="sng" algn="ctr">
+                      <a:solidFill>
+                        <a:srgbClr val="BDBDBD"/>
+                      </a:solidFill>
+                    </a:lnT>
+                    <a:lnB w="6350" cap="flat" cmpd="sng" algn="ctr">
+                      <a:solidFill>
+                        <a:srgbClr val="BDBDBD"/>
+                      </a:solidFill>
+                    </a:lnB>
                   </a:tcPr>
                 </a:tc>
                 <a:tc>
@@ -12584,10 +16638,30 @@
                       </a:r>
                     </a:p>
                   </a:txBody>
-                  <a:tcPr>
-                    <a:solidFill>
-                      <a:srgbClr val="FFF1F2"/>
-                    </a:solidFill>
+                  <a:tcPr anchor="ctr">
+                    <a:solidFill>
+                      <a:srgbClr val="FFFFFF"/>
+                    </a:solidFill>
+                    <a:lnL w="6350" cap="flat" cmpd="sng" algn="ctr">
+                      <a:solidFill>
+                        <a:srgbClr val="BDBDBD"/>
+                      </a:solidFill>
+                    </a:lnL>
+                    <a:lnR w="6350" cap="flat" cmpd="sng" algn="ctr">
+                      <a:solidFill>
+                        <a:srgbClr val="BDBDBD"/>
+                      </a:solidFill>
+                    </a:lnR>
+                    <a:lnT w="6350" cap="flat" cmpd="sng" algn="ctr">
+                      <a:solidFill>
+                        <a:srgbClr val="BDBDBD"/>
+                      </a:solidFill>
+                    </a:lnT>
+                    <a:lnB w="6350" cap="flat" cmpd="sng" algn="ctr">
+                      <a:solidFill>
+                        <a:srgbClr val="BDBDBD"/>
+                      </a:solidFill>
+                    </a:lnB>
                   </a:tcPr>
                 </a:tc>
                 <a:tc>
@@ -12607,10 +16681,30 @@
                       </a:r>
                     </a:p>
                   </a:txBody>
-                  <a:tcPr>
-                    <a:solidFill>
-                      <a:srgbClr val="FFF1F2"/>
-                    </a:solidFill>
+                  <a:tcPr anchor="ctr">
+                    <a:solidFill>
+                      <a:srgbClr val="FFFFFF"/>
+                    </a:solidFill>
+                    <a:lnL w="6350" cap="flat" cmpd="sng" algn="ctr">
+                      <a:solidFill>
+                        <a:srgbClr val="BDBDBD"/>
+                      </a:solidFill>
+                    </a:lnL>
+                    <a:lnR w="6350" cap="flat" cmpd="sng" algn="ctr">
+                      <a:solidFill>
+                        <a:srgbClr val="BDBDBD"/>
+                      </a:solidFill>
+                    </a:lnR>
+                    <a:lnT w="6350" cap="flat" cmpd="sng" algn="ctr">
+                      <a:solidFill>
+                        <a:srgbClr val="BDBDBD"/>
+                      </a:solidFill>
+                    </a:lnT>
+                    <a:lnB w="6350" cap="flat" cmpd="sng" algn="ctr">
+                      <a:solidFill>
+                        <a:srgbClr val="BDBDBD"/>
+                      </a:solidFill>
+                    </a:lnB>
                   </a:tcPr>
                 </a:tc>
               </a:tr>
@@ -12632,10 +16726,30 @@
                       </a:r>
                     </a:p>
                   </a:txBody>
-                  <a:tcPr>
+                  <a:tcPr anchor="ctr">
                     <a:solidFill>
                       <a:srgbClr val="FFFFFF"/>
                     </a:solidFill>
+                    <a:lnL w="6350" cap="flat" cmpd="sng" algn="ctr">
+                      <a:solidFill>
+                        <a:srgbClr val="BDBDBD"/>
+                      </a:solidFill>
+                    </a:lnL>
+                    <a:lnR w="6350" cap="flat" cmpd="sng" algn="ctr">
+                      <a:solidFill>
+                        <a:srgbClr val="BDBDBD"/>
+                      </a:solidFill>
+                    </a:lnR>
+                    <a:lnT w="6350" cap="flat" cmpd="sng" algn="ctr">
+                      <a:solidFill>
+                        <a:srgbClr val="BDBDBD"/>
+                      </a:solidFill>
+                    </a:lnT>
+                    <a:lnB w="6350" cap="flat" cmpd="sng" algn="ctr">
+                      <a:solidFill>
+                        <a:srgbClr val="BDBDBD"/>
+                      </a:solidFill>
+                    </a:lnB>
                   </a:tcPr>
                 </a:tc>
                 <a:tc>
@@ -12655,10 +16769,30 @@
                       </a:r>
                     </a:p>
                   </a:txBody>
-                  <a:tcPr>
+                  <a:tcPr anchor="ctr">
                     <a:solidFill>
                       <a:srgbClr val="FFFFFF"/>
                     </a:solidFill>
+                    <a:lnL w="6350" cap="flat" cmpd="sng" algn="ctr">
+                      <a:solidFill>
+                        <a:srgbClr val="BDBDBD"/>
+                      </a:solidFill>
+                    </a:lnL>
+                    <a:lnR w="6350" cap="flat" cmpd="sng" algn="ctr">
+                      <a:solidFill>
+                        <a:srgbClr val="BDBDBD"/>
+                      </a:solidFill>
+                    </a:lnR>
+                    <a:lnT w="6350" cap="flat" cmpd="sng" algn="ctr">
+                      <a:solidFill>
+                        <a:srgbClr val="BDBDBD"/>
+                      </a:solidFill>
+                    </a:lnT>
+                    <a:lnB w="6350" cap="flat" cmpd="sng" algn="ctr">
+                      <a:solidFill>
+                        <a:srgbClr val="BDBDBD"/>
+                      </a:solidFill>
+                    </a:lnB>
                   </a:tcPr>
                 </a:tc>
                 <a:tc>
@@ -12678,10 +16812,30 @@
                       </a:r>
                     </a:p>
                   </a:txBody>
-                  <a:tcPr>
+                  <a:tcPr anchor="ctr">
                     <a:solidFill>
                       <a:srgbClr val="FFFFFF"/>
                     </a:solidFill>
+                    <a:lnL w="6350" cap="flat" cmpd="sng" algn="ctr">
+                      <a:solidFill>
+                        <a:srgbClr val="BDBDBD"/>
+                      </a:solidFill>
+                    </a:lnL>
+                    <a:lnR w="6350" cap="flat" cmpd="sng" algn="ctr">
+                      <a:solidFill>
+                        <a:srgbClr val="BDBDBD"/>
+                      </a:solidFill>
+                    </a:lnR>
+                    <a:lnT w="6350" cap="flat" cmpd="sng" algn="ctr">
+                      <a:solidFill>
+                        <a:srgbClr val="BDBDBD"/>
+                      </a:solidFill>
+                    </a:lnT>
+                    <a:lnB w="6350" cap="flat" cmpd="sng" algn="ctr">
+                      <a:solidFill>
+                        <a:srgbClr val="BDBDBD"/>
+                      </a:solidFill>
+                    </a:lnB>
                   </a:tcPr>
                 </a:tc>
               </a:tr>
@@ -12765,10 +16919,30 @@
                       </a:r>
                     </a:p>
                   </a:txBody>
-                  <a:tcPr>
+                  <a:tcPr anchor="ctr">
                     <a:solidFill>
                       <a:srgbClr val="F5F5F5"/>
                     </a:solidFill>
+                    <a:lnL w="6350" cap="flat" cmpd="sng" algn="ctr">
+                      <a:solidFill>
+                        <a:srgbClr val="BDBDBD"/>
+                      </a:solidFill>
+                    </a:lnL>
+                    <a:lnR w="6350" cap="flat" cmpd="sng" algn="ctr">
+                      <a:solidFill>
+                        <a:srgbClr val="BDBDBD"/>
+                      </a:solidFill>
+                    </a:lnR>
+                    <a:lnT w="6350" cap="flat" cmpd="sng" algn="ctr">
+                      <a:solidFill>
+                        <a:srgbClr val="BDBDBD"/>
+                      </a:solidFill>
+                    </a:lnT>
+                    <a:lnB w="6350" cap="flat" cmpd="sng" algn="ctr">
+                      <a:solidFill>
+                        <a:srgbClr val="BDBDBD"/>
+                      </a:solidFill>
+                    </a:lnB>
                   </a:tcPr>
                 </a:tc>
                 <a:tc>
@@ -12788,10 +16962,30 @@
                       </a:r>
                     </a:p>
                   </a:txBody>
-                  <a:tcPr>
+                  <a:tcPr anchor="ctr">
                     <a:solidFill>
                       <a:srgbClr val="F5F5F5"/>
                     </a:solidFill>
+                    <a:lnL w="6350" cap="flat" cmpd="sng" algn="ctr">
+                      <a:solidFill>
+                        <a:srgbClr val="BDBDBD"/>
+                      </a:solidFill>
+                    </a:lnL>
+                    <a:lnR w="6350" cap="flat" cmpd="sng" algn="ctr">
+                      <a:solidFill>
+                        <a:srgbClr val="BDBDBD"/>
+                      </a:solidFill>
+                    </a:lnR>
+                    <a:lnT w="6350" cap="flat" cmpd="sng" algn="ctr">
+                      <a:solidFill>
+                        <a:srgbClr val="BDBDBD"/>
+                      </a:solidFill>
+                    </a:lnT>
+                    <a:lnB w="6350" cap="flat" cmpd="sng" algn="ctr">
+                      <a:solidFill>
+                        <a:srgbClr val="BDBDBD"/>
+                      </a:solidFill>
+                    </a:lnB>
                   </a:tcPr>
                 </a:tc>
                 <a:tc>
@@ -12811,10 +17005,30 @@
                       </a:r>
                     </a:p>
                   </a:txBody>
-                  <a:tcPr>
+                  <a:tcPr anchor="ctr">
                     <a:solidFill>
                       <a:srgbClr val="F5F5F5"/>
                     </a:solidFill>
+                    <a:lnL w="6350" cap="flat" cmpd="sng" algn="ctr">
+                      <a:solidFill>
+                        <a:srgbClr val="BDBDBD"/>
+                      </a:solidFill>
+                    </a:lnL>
+                    <a:lnR w="6350" cap="flat" cmpd="sng" algn="ctr">
+                      <a:solidFill>
+                        <a:srgbClr val="BDBDBD"/>
+                      </a:solidFill>
+                    </a:lnR>
+                    <a:lnT w="6350" cap="flat" cmpd="sng" algn="ctr">
+                      <a:solidFill>
+                        <a:srgbClr val="BDBDBD"/>
+                      </a:solidFill>
+                    </a:lnT>
+                    <a:lnB w="6350" cap="flat" cmpd="sng" algn="ctr">
+                      <a:solidFill>
+                        <a:srgbClr val="BDBDBD"/>
+                      </a:solidFill>
+                    </a:lnB>
                   </a:tcPr>
                 </a:tc>
               </a:tr>
@@ -12836,10 +17050,30 @@
                       </a:r>
                     </a:p>
                   </a:txBody>
-                  <a:tcPr>
+                  <a:tcPr anchor="ctr">
                     <a:solidFill>
                       <a:srgbClr val="FFFFFF"/>
                     </a:solidFill>
+                    <a:lnL w="6350" cap="flat" cmpd="sng" algn="ctr">
+                      <a:solidFill>
+                        <a:srgbClr val="BDBDBD"/>
+                      </a:solidFill>
+                    </a:lnL>
+                    <a:lnR w="6350" cap="flat" cmpd="sng" algn="ctr">
+                      <a:solidFill>
+                        <a:srgbClr val="BDBDBD"/>
+                      </a:solidFill>
+                    </a:lnR>
+                    <a:lnT w="6350" cap="flat" cmpd="sng" algn="ctr">
+                      <a:solidFill>
+                        <a:srgbClr val="BDBDBD"/>
+                      </a:solidFill>
+                    </a:lnT>
+                    <a:lnB w="6350" cap="flat" cmpd="sng" algn="ctr">
+                      <a:solidFill>
+                        <a:srgbClr val="BDBDBD"/>
+                      </a:solidFill>
+                    </a:lnB>
                   </a:tcPr>
                 </a:tc>
                 <a:tc>
@@ -12859,10 +17093,30 @@
                       </a:r>
                     </a:p>
                   </a:txBody>
-                  <a:tcPr>
+                  <a:tcPr anchor="ctr">
                     <a:solidFill>
                       <a:srgbClr val="FFFFFF"/>
                     </a:solidFill>
+                    <a:lnL w="6350" cap="flat" cmpd="sng" algn="ctr">
+                      <a:solidFill>
+                        <a:srgbClr val="BDBDBD"/>
+                      </a:solidFill>
+                    </a:lnL>
+                    <a:lnR w="6350" cap="flat" cmpd="sng" algn="ctr">
+                      <a:solidFill>
+                        <a:srgbClr val="BDBDBD"/>
+                      </a:solidFill>
+                    </a:lnR>
+                    <a:lnT w="6350" cap="flat" cmpd="sng" algn="ctr">
+                      <a:solidFill>
+                        <a:srgbClr val="BDBDBD"/>
+                      </a:solidFill>
+                    </a:lnT>
+                    <a:lnB w="6350" cap="flat" cmpd="sng" algn="ctr">
+                      <a:solidFill>
+                        <a:srgbClr val="BDBDBD"/>
+                      </a:solidFill>
+                    </a:lnB>
                   </a:tcPr>
                 </a:tc>
                 <a:tc>
@@ -12882,10 +17136,30 @@
                       </a:r>
                     </a:p>
                   </a:txBody>
-                  <a:tcPr>
+                  <a:tcPr anchor="ctr">
                     <a:solidFill>
                       <a:srgbClr val="FFFFFF"/>
                     </a:solidFill>
+                    <a:lnL w="6350" cap="flat" cmpd="sng" algn="ctr">
+                      <a:solidFill>
+                        <a:srgbClr val="BDBDBD"/>
+                      </a:solidFill>
+                    </a:lnL>
+                    <a:lnR w="6350" cap="flat" cmpd="sng" algn="ctr">
+                      <a:solidFill>
+                        <a:srgbClr val="BDBDBD"/>
+                      </a:solidFill>
+                    </a:lnR>
+                    <a:lnT w="6350" cap="flat" cmpd="sng" algn="ctr">
+                      <a:solidFill>
+                        <a:srgbClr val="BDBDBD"/>
+                      </a:solidFill>
+                    </a:lnT>
+                    <a:lnB w="6350" cap="flat" cmpd="sng" algn="ctr">
+                      <a:solidFill>
+                        <a:srgbClr val="BDBDBD"/>
+                      </a:solidFill>
+                    </a:lnB>
                   </a:tcPr>
                 </a:tc>
               </a:tr>
@@ -12907,10 +17181,30 @@
                       </a:r>
                     </a:p>
                   </a:txBody>
-                  <a:tcPr>
-                    <a:solidFill>
-                      <a:srgbClr val="FFF1F2"/>
-                    </a:solidFill>
+                  <a:tcPr anchor="ctr">
+                    <a:solidFill>
+                      <a:srgbClr val="FFFFFF"/>
+                    </a:solidFill>
+                    <a:lnL w="6350" cap="flat" cmpd="sng" algn="ctr">
+                      <a:solidFill>
+                        <a:srgbClr val="BDBDBD"/>
+                      </a:solidFill>
+                    </a:lnL>
+                    <a:lnR w="6350" cap="flat" cmpd="sng" algn="ctr">
+                      <a:solidFill>
+                        <a:srgbClr val="BDBDBD"/>
+                      </a:solidFill>
+                    </a:lnR>
+                    <a:lnT w="6350" cap="flat" cmpd="sng" algn="ctr">
+                      <a:solidFill>
+                        <a:srgbClr val="BDBDBD"/>
+                      </a:solidFill>
+                    </a:lnT>
+                    <a:lnB w="6350" cap="flat" cmpd="sng" algn="ctr">
+                      <a:solidFill>
+                        <a:srgbClr val="BDBDBD"/>
+                      </a:solidFill>
+                    </a:lnB>
                   </a:tcPr>
                 </a:tc>
                 <a:tc>
@@ -12930,10 +17224,30 @@
                       </a:r>
                     </a:p>
                   </a:txBody>
-                  <a:tcPr>
-                    <a:solidFill>
-                      <a:srgbClr val="FFF1F2"/>
-                    </a:solidFill>
+                  <a:tcPr anchor="ctr">
+                    <a:solidFill>
+                      <a:srgbClr val="FFFFFF"/>
+                    </a:solidFill>
+                    <a:lnL w="6350" cap="flat" cmpd="sng" algn="ctr">
+                      <a:solidFill>
+                        <a:srgbClr val="BDBDBD"/>
+                      </a:solidFill>
+                    </a:lnL>
+                    <a:lnR w="6350" cap="flat" cmpd="sng" algn="ctr">
+                      <a:solidFill>
+                        <a:srgbClr val="BDBDBD"/>
+                      </a:solidFill>
+                    </a:lnR>
+                    <a:lnT w="6350" cap="flat" cmpd="sng" algn="ctr">
+                      <a:solidFill>
+                        <a:srgbClr val="BDBDBD"/>
+                      </a:solidFill>
+                    </a:lnT>
+                    <a:lnB w="6350" cap="flat" cmpd="sng" algn="ctr">
+                      <a:solidFill>
+                        <a:srgbClr val="BDBDBD"/>
+                      </a:solidFill>
+                    </a:lnB>
                   </a:tcPr>
                 </a:tc>
                 <a:tc>
@@ -12953,10 +17267,30 @@
                       </a:r>
                     </a:p>
                   </a:txBody>
-                  <a:tcPr>
-                    <a:solidFill>
-                      <a:srgbClr val="FFF1F2"/>
-                    </a:solidFill>
+                  <a:tcPr anchor="ctr">
+                    <a:solidFill>
+                      <a:srgbClr val="FFFFFF"/>
+                    </a:solidFill>
+                    <a:lnL w="6350" cap="flat" cmpd="sng" algn="ctr">
+                      <a:solidFill>
+                        <a:srgbClr val="BDBDBD"/>
+                      </a:solidFill>
+                    </a:lnL>
+                    <a:lnR w="6350" cap="flat" cmpd="sng" algn="ctr">
+                      <a:solidFill>
+                        <a:srgbClr val="BDBDBD"/>
+                      </a:solidFill>
+                    </a:lnR>
+                    <a:lnT w="6350" cap="flat" cmpd="sng" algn="ctr">
+                      <a:solidFill>
+                        <a:srgbClr val="BDBDBD"/>
+                      </a:solidFill>
+                    </a:lnT>
+                    <a:lnB w="6350" cap="flat" cmpd="sng" algn="ctr">
+                      <a:solidFill>
+                        <a:srgbClr val="BDBDBD"/>
+                      </a:solidFill>
+                    </a:lnB>
                   </a:tcPr>
                 </a:tc>
               </a:tr>
@@ -12978,10 +17312,30 @@
                       </a:r>
                     </a:p>
                   </a:txBody>
-                  <a:tcPr>
+                  <a:tcPr anchor="ctr">
                     <a:solidFill>
                       <a:srgbClr val="FFFFFF"/>
                     </a:solidFill>
+                    <a:lnL w="6350" cap="flat" cmpd="sng" algn="ctr">
+                      <a:solidFill>
+                        <a:srgbClr val="BDBDBD"/>
+                      </a:solidFill>
+                    </a:lnL>
+                    <a:lnR w="6350" cap="flat" cmpd="sng" algn="ctr">
+                      <a:solidFill>
+                        <a:srgbClr val="BDBDBD"/>
+                      </a:solidFill>
+                    </a:lnR>
+                    <a:lnT w="6350" cap="flat" cmpd="sng" algn="ctr">
+                      <a:solidFill>
+                        <a:srgbClr val="BDBDBD"/>
+                      </a:solidFill>
+                    </a:lnT>
+                    <a:lnB w="6350" cap="flat" cmpd="sng" algn="ctr">
+                      <a:solidFill>
+                        <a:srgbClr val="BDBDBD"/>
+                      </a:solidFill>
+                    </a:lnB>
                   </a:tcPr>
                 </a:tc>
                 <a:tc>
@@ -13001,10 +17355,30 @@
                       </a:r>
                     </a:p>
                   </a:txBody>
-                  <a:tcPr>
+                  <a:tcPr anchor="ctr">
                     <a:solidFill>
                       <a:srgbClr val="FFFFFF"/>
                     </a:solidFill>
+                    <a:lnL w="6350" cap="flat" cmpd="sng" algn="ctr">
+                      <a:solidFill>
+                        <a:srgbClr val="BDBDBD"/>
+                      </a:solidFill>
+                    </a:lnL>
+                    <a:lnR w="6350" cap="flat" cmpd="sng" algn="ctr">
+                      <a:solidFill>
+                        <a:srgbClr val="BDBDBD"/>
+                      </a:solidFill>
+                    </a:lnR>
+                    <a:lnT w="6350" cap="flat" cmpd="sng" algn="ctr">
+                      <a:solidFill>
+                        <a:srgbClr val="BDBDBD"/>
+                      </a:solidFill>
+                    </a:lnT>
+                    <a:lnB w="6350" cap="flat" cmpd="sng" algn="ctr">
+                      <a:solidFill>
+                        <a:srgbClr val="BDBDBD"/>
+                      </a:solidFill>
+                    </a:lnB>
                   </a:tcPr>
                 </a:tc>
                 <a:tc>
@@ -13024,10 +17398,30 @@
                       </a:r>
                     </a:p>
                   </a:txBody>
-                  <a:tcPr>
+                  <a:tcPr anchor="ctr">
                     <a:solidFill>
                       <a:srgbClr val="FFFFFF"/>
                     </a:solidFill>
+                    <a:lnL w="6350" cap="flat" cmpd="sng" algn="ctr">
+                      <a:solidFill>
+                        <a:srgbClr val="BDBDBD"/>
+                      </a:solidFill>
+                    </a:lnL>
+                    <a:lnR w="6350" cap="flat" cmpd="sng" algn="ctr">
+                      <a:solidFill>
+                        <a:srgbClr val="BDBDBD"/>
+                      </a:solidFill>
+                    </a:lnR>
+                    <a:lnT w="6350" cap="flat" cmpd="sng" algn="ctr">
+                      <a:solidFill>
+                        <a:srgbClr val="BDBDBD"/>
+                      </a:solidFill>
+                    </a:lnT>
+                    <a:lnB w="6350" cap="flat" cmpd="sng" algn="ctr">
+                      <a:solidFill>
+                        <a:srgbClr val="BDBDBD"/>
+                      </a:solidFill>
+                    </a:lnB>
                   </a:tcPr>
                 </a:tc>
               </a:tr>
@@ -13049,10 +17443,30 @@
                       </a:r>
                     </a:p>
                   </a:txBody>
-                  <a:tcPr>
-                    <a:solidFill>
-                      <a:srgbClr val="FFF1F2"/>
-                    </a:solidFill>
+                  <a:tcPr anchor="ctr">
+                    <a:solidFill>
+                      <a:srgbClr val="FFFFFF"/>
+                    </a:solidFill>
+                    <a:lnL w="6350" cap="flat" cmpd="sng" algn="ctr">
+                      <a:solidFill>
+                        <a:srgbClr val="BDBDBD"/>
+                      </a:solidFill>
+                    </a:lnL>
+                    <a:lnR w="6350" cap="flat" cmpd="sng" algn="ctr">
+                      <a:solidFill>
+                        <a:srgbClr val="BDBDBD"/>
+                      </a:solidFill>
+                    </a:lnR>
+                    <a:lnT w="6350" cap="flat" cmpd="sng" algn="ctr">
+                      <a:solidFill>
+                        <a:srgbClr val="BDBDBD"/>
+                      </a:solidFill>
+                    </a:lnT>
+                    <a:lnB w="6350" cap="flat" cmpd="sng" algn="ctr">
+                      <a:solidFill>
+                        <a:srgbClr val="BDBDBD"/>
+                      </a:solidFill>
+                    </a:lnB>
                   </a:tcPr>
                 </a:tc>
                 <a:tc>
@@ -13072,10 +17486,30 @@
                       </a:r>
                     </a:p>
                   </a:txBody>
-                  <a:tcPr>
-                    <a:solidFill>
-                      <a:srgbClr val="FFF1F2"/>
-                    </a:solidFill>
+                  <a:tcPr anchor="ctr">
+                    <a:solidFill>
+                      <a:srgbClr val="FFFFFF"/>
+                    </a:solidFill>
+                    <a:lnL w="6350" cap="flat" cmpd="sng" algn="ctr">
+                      <a:solidFill>
+                        <a:srgbClr val="BDBDBD"/>
+                      </a:solidFill>
+                    </a:lnL>
+                    <a:lnR w="6350" cap="flat" cmpd="sng" algn="ctr">
+                      <a:solidFill>
+                        <a:srgbClr val="BDBDBD"/>
+                      </a:solidFill>
+                    </a:lnR>
+                    <a:lnT w="6350" cap="flat" cmpd="sng" algn="ctr">
+                      <a:solidFill>
+                        <a:srgbClr val="BDBDBD"/>
+                      </a:solidFill>
+                    </a:lnT>
+                    <a:lnB w="6350" cap="flat" cmpd="sng" algn="ctr">
+                      <a:solidFill>
+                        <a:srgbClr val="BDBDBD"/>
+                      </a:solidFill>
+                    </a:lnB>
                   </a:tcPr>
                 </a:tc>
                 <a:tc>
@@ -13095,10 +17529,30 @@
                       </a:r>
                     </a:p>
                   </a:txBody>
-                  <a:tcPr>
-                    <a:solidFill>
-                      <a:srgbClr val="FFF1F2"/>
-                    </a:solidFill>
+                  <a:tcPr anchor="ctr">
+                    <a:solidFill>
+                      <a:srgbClr val="FFFFFF"/>
+                    </a:solidFill>
+                    <a:lnL w="6350" cap="flat" cmpd="sng" algn="ctr">
+                      <a:solidFill>
+                        <a:srgbClr val="BDBDBD"/>
+                      </a:solidFill>
+                    </a:lnL>
+                    <a:lnR w="6350" cap="flat" cmpd="sng" algn="ctr">
+                      <a:solidFill>
+                        <a:srgbClr val="BDBDBD"/>
+                      </a:solidFill>
+                    </a:lnR>
+                    <a:lnT w="6350" cap="flat" cmpd="sng" algn="ctr">
+                      <a:solidFill>
+                        <a:srgbClr val="BDBDBD"/>
+                      </a:solidFill>
+                    </a:lnT>
+                    <a:lnB w="6350" cap="flat" cmpd="sng" algn="ctr">
+                      <a:solidFill>
+                        <a:srgbClr val="BDBDBD"/>
+                      </a:solidFill>
+                    </a:lnB>
                   </a:tcPr>
                 </a:tc>
               </a:tr>
@@ -13120,10 +17574,30 @@
                       </a:r>
                     </a:p>
                   </a:txBody>
-                  <a:tcPr>
+                  <a:tcPr anchor="ctr">
                     <a:solidFill>
                       <a:srgbClr val="FFFFFF"/>
                     </a:solidFill>
+                    <a:lnL w="6350" cap="flat" cmpd="sng" algn="ctr">
+                      <a:solidFill>
+                        <a:srgbClr val="BDBDBD"/>
+                      </a:solidFill>
+                    </a:lnL>
+                    <a:lnR w="6350" cap="flat" cmpd="sng" algn="ctr">
+                      <a:solidFill>
+                        <a:srgbClr val="BDBDBD"/>
+                      </a:solidFill>
+                    </a:lnR>
+                    <a:lnT w="6350" cap="flat" cmpd="sng" algn="ctr">
+                      <a:solidFill>
+                        <a:srgbClr val="BDBDBD"/>
+                      </a:solidFill>
+                    </a:lnT>
+                    <a:lnB w="6350" cap="flat" cmpd="sng" algn="ctr">
+                      <a:solidFill>
+                        <a:srgbClr val="BDBDBD"/>
+                      </a:solidFill>
+                    </a:lnB>
                   </a:tcPr>
                 </a:tc>
                 <a:tc>
@@ -13143,10 +17617,30 @@
                       </a:r>
                     </a:p>
                   </a:txBody>
-                  <a:tcPr>
+                  <a:tcPr anchor="ctr">
                     <a:solidFill>
                       <a:srgbClr val="FFFFFF"/>
                     </a:solidFill>
+                    <a:lnL w="6350" cap="flat" cmpd="sng" algn="ctr">
+                      <a:solidFill>
+                        <a:srgbClr val="BDBDBD"/>
+                      </a:solidFill>
+                    </a:lnL>
+                    <a:lnR w="6350" cap="flat" cmpd="sng" algn="ctr">
+                      <a:solidFill>
+                        <a:srgbClr val="BDBDBD"/>
+                      </a:solidFill>
+                    </a:lnR>
+                    <a:lnT w="6350" cap="flat" cmpd="sng" algn="ctr">
+                      <a:solidFill>
+                        <a:srgbClr val="BDBDBD"/>
+                      </a:solidFill>
+                    </a:lnT>
+                    <a:lnB w="6350" cap="flat" cmpd="sng" algn="ctr">
+                      <a:solidFill>
+                        <a:srgbClr val="BDBDBD"/>
+                      </a:solidFill>
+                    </a:lnB>
                   </a:tcPr>
                 </a:tc>
                 <a:tc>
@@ -13166,10 +17660,30 @@
                       </a:r>
                     </a:p>
                   </a:txBody>
-                  <a:tcPr>
+                  <a:tcPr anchor="ctr">
                     <a:solidFill>
                       <a:srgbClr val="FFFFFF"/>
                     </a:solidFill>
+                    <a:lnL w="6350" cap="flat" cmpd="sng" algn="ctr">
+                      <a:solidFill>
+                        <a:srgbClr val="BDBDBD"/>
+                      </a:solidFill>
+                    </a:lnL>
+                    <a:lnR w="6350" cap="flat" cmpd="sng" algn="ctr">
+                      <a:solidFill>
+                        <a:srgbClr val="BDBDBD"/>
+                      </a:solidFill>
+                    </a:lnR>
+                    <a:lnT w="6350" cap="flat" cmpd="sng" algn="ctr">
+                      <a:solidFill>
+                        <a:srgbClr val="BDBDBD"/>
+                      </a:solidFill>
+                    </a:lnT>
+                    <a:lnB w="6350" cap="flat" cmpd="sng" algn="ctr">
+                      <a:solidFill>
+                        <a:srgbClr val="BDBDBD"/>
+                      </a:solidFill>
+                    </a:lnB>
                   </a:tcPr>
                 </a:tc>
               </a:tr>
@@ -13334,7 +17848,7 @@
             <a:r>
               <a:rPr sz="1400" b="1">
                 <a:solidFill>
-                  <a:srgbClr val="E53935"/>
+                  <a:srgbClr val="C7000B"/>
                 </a:solidFill>
                 <a:latin typeface="Microsoft YaHei"/>
               </a:rPr>
@@ -13489,10 +18003,30 @@
                       </a:r>
                     </a:p>
                   </a:txBody>
-                  <a:tcPr>
+                  <a:tcPr anchor="ctr">
                     <a:solidFill>
                       <a:srgbClr val="F5F5F5"/>
                     </a:solidFill>
+                    <a:lnL w="6350" cap="flat" cmpd="sng" algn="ctr">
+                      <a:solidFill>
+                        <a:srgbClr val="BDBDBD"/>
+                      </a:solidFill>
+                    </a:lnL>
+                    <a:lnR w="6350" cap="flat" cmpd="sng" algn="ctr">
+                      <a:solidFill>
+                        <a:srgbClr val="BDBDBD"/>
+                      </a:solidFill>
+                    </a:lnR>
+                    <a:lnT w="6350" cap="flat" cmpd="sng" algn="ctr">
+                      <a:solidFill>
+                        <a:srgbClr val="BDBDBD"/>
+                      </a:solidFill>
+                    </a:lnT>
+                    <a:lnB w="6350" cap="flat" cmpd="sng" algn="ctr">
+                      <a:solidFill>
+                        <a:srgbClr val="BDBDBD"/>
+                      </a:solidFill>
+                    </a:lnB>
                   </a:tcPr>
                 </a:tc>
                 <a:tc>
@@ -13512,10 +18046,30 @@
                       </a:r>
                     </a:p>
                   </a:txBody>
-                  <a:tcPr>
+                  <a:tcPr anchor="ctr">
                     <a:solidFill>
                       <a:srgbClr val="F5F5F5"/>
                     </a:solidFill>
+                    <a:lnL w="6350" cap="flat" cmpd="sng" algn="ctr">
+                      <a:solidFill>
+                        <a:srgbClr val="BDBDBD"/>
+                      </a:solidFill>
+                    </a:lnL>
+                    <a:lnR w="6350" cap="flat" cmpd="sng" algn="ctr">
+                      <a:solidFill>
+                        <a:srgbClr val="BDBDBD"/>
+                      </a:solidFill>
+                    </a:lnR>
+                    <a:lnT w="6350" cap="flat" cmpd="sng" algn="ctr">
+                      <a:solidFill>
+                        <a:srgbClr val="BDBDBD"/>
+                      </a:solidFill>
+                    </a:lnT>
+                    <a:lnB w="6350" cap="flat" cmpd="sng" algn="ctr">
+                      <a:solidFill>
+                        <a:srgbClr val="BDBDBD"/>
+                      </a:solidFill>
+                    </a:lnB>
                   </a:tcPr>
                 </a:tc>
                 <a:tc>
@@ -13535,10 +18089,30 @@
                       </a:r>
                     </a:p>
                   </a:txBody>
-                  <a:tcPr>
+                  <a:tcPr anchor="ctr">
                     <a:solidFill>
                       <a:srgbClr val="F5F5F5"/>
                     </a:solidFill>
+                    <a:lnL w="6350" cap="flat" cmpd="sng" algn="ctr">
+                      <a:solidFill>
+                        <a:srgbClr val="BDBDBD"/>
+                      </a:solidFill>
+                    </a:lnL>
+                    <a:lnR w="6350" cap="flat" cmpd="sng" algn="ctr">
+                      <a:solidFill>
+                        <a:srgbClr val="BDBDBD"/>
+                      </a:solidFill>
+                    </a:lnR>
+                    <a:lnT w="6350" cap="flat" cmpd="sng" algn="ctr">
+                      <a:solidFill>
+                        <a:srgbClr val="BDBDBD"/>
+                      </a:solidFill>
+                    </a:lnT>
+                    <a:lnB w="6350" cap="flat" cmpd="sng" algn="ctr">
+                      <a:solidFill>
+                        <a:srgbClr val="BDBDBD"/>
+                      </a:solidFill>
+                    </a:lnB>
                   </a:tcPr>
                 </a:tc>
               </a:tr>
@@ -13560,10 +18134,30 @@
                       </a:r>
                     </a:p>
                   </a:txBody>
-                  <a:tcPr>
+                  <a:tcPr anchor="ctr">
                     <a:solidFill>
                       <a:srgbClr val="FFFFFF"/>
                     </a:solidFill>
+                    <a:lnL w="6350" cap="flat" cmpd="sng" algn="ctr">
+                      <a:solidFill>
+                        <a:srgbClr val="BDBDBD"/>
+                      </a:solidFill>
+                    </a:lnL>
+                    <a:lnR w="6350" cap="flat" cmpd="sng" algn="ctr">
+                      <a:solidFill>
+                        <a:srgbClr val="BDBDBD"/>
+                      </a:solidFill>
+                    </a:lnR>
+                    <a:lnT w="6350" cap="flat" cmpd="sng" algn="ctr">
+                      <a:solidFill>
+                        <a:srgbClr val="BDBDBD"/>
+                      </a:solidFill>
+                    </a:lnT>
+                    <a:lnB w="6350" cap="flat" cmpd="sng" algn="ctr">
+                      <a:solidFill>
+                        <a:srgbClr val="BDBDBD"/>
+                      </a:solidFill>
+                    </a:lnB>
                   </a:tcPr>
                 </a:tc>
                 <a:tc>
@@ -13583,10 +18177,30 @@
                       </a:r>
                     </a:p>
                   </a:txBody>
-                  <a:tcPr>
+                  <a:tcPr anchor="ctr">
                     <a:solidFill>
                       <a:srgbClr val="FFFFFF"/>
                     </a:solidFill>
+                    <a:lnL w="6350" cap="flat" cmpd="sng" algn="ctr">
+                      <a:solidFill>
+                        <a:srgbClr val="BDBDBD"/>
+                      </a:solidFill>
+                    </a:lnL>
+                    <a:lnR w="6350" cap="flat" cmpd="sng" algn="ctr">
+                      <a:solidFill>
+                        <a:srgbClr val="BDBDBD"/>
+                      </a:solidFill>
+                    </a:lnR>
+                    <a:lnT w="6350" cap="flat" cmpd="sng" algn="ctr">
+                      <a:solidFill>
+                        <a:srgbClr val="BDBDBD"/>
+                      </a:solidFill>
+                    </a:lnT>
+                    <a:lnB w="6350" cap="flat" cmpd="sng" algn="ctr">
+                      <a:solidFill>
+                        <a:srgbClr val="BDBDBD"/>
+                      </a:solidFill>
+                    </a:lnB>
                   </a:tcPr>
                 </a:tc>
                 <a:tc>
@@ -13606,10 +18220,30 @@
                       </a:r>
                     </a:p>
                   </a:txBody>
-                  <a:tcPr>
+                  <a:tcPr anchor="ctr">
                     <a:solidFill>
                       <a:srgbClr val="FFFFFF"/>
                     </a:solidFill>
+                    <a:lnL w="6350" cap="flat" cmpd="sng" algn="ctr">
+                      <a:solidFill>
+                        <a:srgbClr val="BDBDBD"/>
+                      </a:solidFill>
+                    </a:lnL>
+                    <a:lnR w="6350" cap="flat" cmpd="sng" algn="ctr">
+                      <a:solidFill>
+                        <a:srgbClr val="BDBDBD"/>
+                      </a:solidFill>
+                    </a:lnR>
+                    <a:lnT w="6350" cap="flat" cmpd="sng" algn="ctr">
+                      <a:solidFill>
+                        <a:srgbClr val="BDBDBD"/>
+                      </a:solidFill>
+                    </a:lnT>
+                    <a:lnB w="6350" cap="flat" cmpd="sng" algn="ctr">
+                      <a:solidFill>
+                        <a:srgbClr val="BDBDBD"/>
+                      </a:solidFill>
+                    </a:lnB>
                   </a:tcPr>
                 </a:tc>
               </a:tr>
@@ -13631,10 +18265,30 @@
                       </a:r>
                     </a:p>
                   </a:txBody>
-                  <a:tcPr>
-                    <a:solidFill>
-                      <a:srgbClr val="FFF1F2"/>
-                    </a:solidFill>
+                  <a:tcPr anchor="ctr">
+                    <a:solidFill>
+                      <a:srgbClr val="FFFFFF"/>
+                    </a:solidFill>
+                    <a:lnL w="6350" cap="flat" cmpd="sng" algn="ctr">
+                      <a:solidFill>
+                        <a:srgbClr val="BDBDBD"/>
+                      </a:solidFill>
+                    </a:lnL>
+                    <a:lnR w="6350" cap="flat" cmpd="sng" algn="ctr">
+                      <a:solidFill>
+                        <a:srgbClr val="BDBDBD"/>
+                      </a:solidFill>
+                    </a:lnR>
+                    <a:lnT w="6350" cap="flat" cmpd="sng" algn="ctr">
+                      <a:solidFill>
+                        <a:srgbClr val="BDBDBD"/>
+                      </a:solidFill>
+                    </a:lnT>
+                    <a:lnB w="6350" cap="flat" cmpd="sng" algn="ctr">
+                      <a:solidFill>
+                        <a:srgbClr val="BDBDBD"/>
+                      </a:solidFill>
+                    </a:lnB>
                   </a:tcPr>
                 </a:tc>
                 <a:tc>
@@ -13654,10 +18308,30 @@
                       </a:r>
                     </a:p>
                   </a:txBody>
-                  <a:tcPr>
-                    <a:solidFill>
-                      <a:srgbClr val="FFF1F2"/>
-                    </a:solidFill>
+                  <a:tcPr anchor="ctr">
+                    <a:solidFill>
+                      <a:srgbClr val="FFFFFF"/>
+                    </a:solidFill>
+                    <a:lnL w="6350" cap="flat" cmpd="sng" algn="ctr">
+                      <a:solidFill>
+                        <a:srgbClr val="BDBDBD"/>
+                      </a:solidFill>
+                    </a:lnL>
+                    <a:lnR w="6350" cap="flat" cmpd="sng" algn="ctr">
+                      <a:solidFill>
+                        <a:srgbClr val="BDBDBD"/>
+                      </a:solidFill>
+                    </a:lnR>
+                    <a:lnT w="6350" cap="flat" cmpd="sng" algn="ctr">
+                      <a:solidFill>
+                        <a:srgbClr val="BDBDBD"/>
+                      </a:solidFill>
+                    </a:lnT>
+                    <a:lnB w="6350" cap="flat" cmpd="sng" algn="ctr">
+                      <a:solidFill>
+                        <a:srgbClr val="BDBDBD"/>
+                      </a:solidFill>
+                    </a:lnB>
                   </a:tcPr>
                 </a:tc>
                 <a:tc>
@@ -13677,10 +18351,30 @@
                       </a:r>
                     </a:p>
                   </a:txBody>
-                  <a:tcPr>
-                    <a:solidFill>
-                      <a:srgbClr val="FFF1F2"/>
-                    </a:solidFill>
+                  <a:tcPr anchor="ctr">
+                    <a:solidFill>
+                      <a:srgbClr val="FFFFFF"/>
+                    </a:solidFill>
+                    <a:lnL w="6350" cap="flat" cmpd="sng" algn="ctr">
+                      <a:solidFill>
+                        <a:srgbClr val="BDBDBD"/>
+                      </a:solidFill>
+                    </a:lnL>
+                    <a:lnR w="6350" cap="flat" cmpd="sng" algn="ctr">
+                      <a:solidFill>
+                        <a:srgbClr val="BDBDBD"/>
+                      </a:solidFill>
+                    </a:lnR>
+                    <a:lnT w="6350" cap="flat" cmpd="sng" algn="ctr">
+                      <a:solidFill>
+                        <a:srgbClr val="BDBDBD"/>
+                      </a:solidFill>
+                    </a:lnT>
+                    <a:lnB w="6350" cap="flat" cmpd="sng" algn="ctr">
+                      <a:solidFill>
+                        <a:srgbClr val="BDBDBD"/>
+                      </a:solidFill>
+                    </a:lnB>
                   </a:tcPr>
                 </a:tc>
               </a:tr>
@@ -13702,10 +18396,30 @@
                       </a:r>
                     </a:p>
                   </a:txBody>
-                  <a:tcPr>
+                  <a:tcPr anchor="ctr">
                     <a:solidFill>
                       <a:srgbClr val="FFFFFF"/>
                     </a:solidFill>
+                    <a:lnL w="6350" cap="flat" cmpd="sng" algn="ctr">
+                      <a:solidFill>
+                        <a:srgbClr val="BDBDBD"/>
+                      </a:solidFill>
+                    </a:lnL>
+                    <a:lnR w="6350" cap="flat" cmpd="sng" algn="ctr">
+                      <a:solidFill>
+                        <a:srgbClr val="BDBDBD"/>
+                      </a:solidFill>
+                    </a:lnR>
+                    <a:lnT w="6350" cap="flat" cmpd="sng" algn="ctr">
+                      <a:solidFill>
+                        <a:srgbClr val="BDBDBD"/>
+                      </a:solidFill>
+                    </a:lnT>
+                    <a:lnB w="6350" cap="flat" cmpd="sng" algn="ctr">
+                      <a:solidFill>
+                        <a:srgbClr val="BDBDBD"/>
+                      </a:solidFill>
+                    </a:lnB>
                   </a:tcPr>
                 </a:tc>
                 <a:tc>
@@ -13725,10 +18439,30 @@
                       </a:r>
                     </a:p>
                   </a:txBody>
-                  <a:tcPr>
+                  <a:tcPr anchor="ctr">
                     <a:solidFill>
                       <a:srgbClr val="FFFFFF"/>
                     </a:solidFill>
+                    <a:lnL w="6350" cap="flat" cmpd="sng" algn="ctr">
+                      <a:solidFill>
+                        <a:srgbClr val="BDBDBD"/>
+                      </a:solidFill>
+                    </a:lnL>
+                    <a:lnR w="6350" cap="flat" cmpd="sng" algn="ctr">
+                      <a:solidFill>
+                        <a:srgbClr val="BDBDBD"/>
+                      </a:solidFill>
+                    </a:lnR>
+                    <a:lnT w="6350" cap="flat" cmpd="sng" algn="ctr">
+                      <a:solidFill>
+                        <a:srgbClr val="BDBDBD"/>
+                      </a:solidFill>
+                    </a:lnT>
+                    <a:lnB w="6350" cap="flat" cmpd="sng" algn="ctr">
+                      <a:solidFill>
+                        <a:srgbClr val="BDBDBD"/>
+                      </a:solidFill>
+                    </a:lnB>
                   </a:tcPr>
                 </a:tc>
                 <a:tc>
@@ -13748,10 +18482,30 @@
                       </a:r>
                     </a:p>
                   </a:txBody>
-                  <a:tcPr>
+                  <a:tcPr anchor="ctr">
                     <a:solidFill>
                       <a:srgbClr val="FFFFFF"/>
                     </a:solidFill>
+                    <a:lnL w="6350" cap="flat" cmpd="sng" algn="ctr">
+                      <a:solidFill>
+                        <a:srgbClr val="BDBDBD"/>
+                      </a:solidFill>
+                    </a:lnL>
+                    <a:lnR w="6350" cap="flat" cmpd="sng" algn="ctr">
+                      <a:solidFill>
+                        <a:srgbClr val="BDBDBD"/>
+                      </a:solidFill>
+                    </a:lnR>
+                    <a:lnT w="6350" cap="flat" cmpd="sng" algn="ctr">
+                      <a:solidFill>
+                        <a:srgbClr val="BDBDBD"/>
+                      </a:solidFill>
+                    </a:lnT>
+                    <a:lnB w="6350" cap="flat" cmpd="sng" algn="ctr">
+                      <a:solidFill>
+                        <a:srgbClr val="BDBDBD"/>
+                      </a:solidFill>
+                    </a:lnB>
                   </a:tcPr>
                 </a:tc>
               </a:tr>
@@ -13773,10 +18527,30 @@
                       </a:r>
                     </a:p>
                   </a:txBody>
-                  <a:tcPr>
-                    <a:solidFill>
-                      <a:srgbClr val="FFF1F2"/>
-                    </a:solidFill>
+                  <a:tcPr anchor="ctr">
+                    <a:solidFill>
+                      <a:srgbClr val="FFFFFF"/>
+                    </a:solidFill>
+                    <a:lnL w="6350" cap="flat" cmpd="sng" algn="ctr">
+                      <a:solidFill>
+                        <a:srgbClr val="BDBDBD"/>
+                      </a:solidFill>
+                    </a:lnL>
+                    <a:lnR w="6350" cap="flat" cmpd="sng" algn="ctr">
+                      <a:solidFill>
+                        <a:srgbClr val="BDBDBD"/>
+                      </a:solidFill>
+                    </a:lnR>
+                    <a:lnT w="6350" cap="flat" cmpd="sng" algn="ctr">
+                      <a:solidFill>
+                        <a:srgbClr val="BDBDBD"/>
+                      </a:solidFill>
+                    </a:lnT>
+                    <a:lnB w="6350" cap="flat" cmpd="sng" algn="ctr">
+                      <a:solidFill>
+                        <a:srgbClr val="BDBDBD"/>
+                      </a:solidFill>
+                    </a:lnB>
                   </a:tcPr>
                 </a:tc>
                 <a:tc>
@@ -13796,10 +18570,30 @@
                       </a:r>
                     </a:p>
                   </a:txBody>
-                  <a:tcPr>
-                    <a:solidFill>
-                      <a:srgbClr val="FFF1F2"/>
-                    </a:solidFill>
+                  <a:tcPr anchor="ctr">
+                    <a:solidFill>
+                      <a:srgbClr val="FFFFFF"/>
+                    </a:solidFill>
+                    <a:lnL w="6350" cap="flat" cmpd="sng" algn="ctr">
+                      <a:solidFill>
+                        <a:srgbClr val="BDBDBD"/>
+                      </a:solidFill>
+                    </a:lnL>
+                    <a:lnR w="6350" cap="flat" cmpd="sng" algn="ctr">
+                      <a:solidFill>
+                        <a:srgbClr val="BDBDBD"/>
+                      </a:solidFill>
+                    </a:lnR>
+                    <a:lnT w="6350" cap="flat" cmpd="sng" algn="ctr">
+                      <a:solidFill>
+                        <a:srgbClr val="BDBDBD"/>
+                      </a:solidFill>
+                    </a:lnT>
+                    <a:lnB w="6350" cap="flat" cmpd="sng" algn="ctr">
+                      <a:solidFill>
+                        <a:srgbClr val="BDBDBD"/>
+                      </a:solidFill>
+                    </a:lnB>
                   </a:tcPr>
                 </a:tc>
                 <a:tc>
@@ -13819,10 +18613,30 @@
                       </a:r>
                     </a:p>
                   </a:txBody>
-                  <a:tcPr>
-                    <a:solidFill>
-                      <a:srgbClr val="FFF1F2"/>
-                    </a:solidFill>
+                  <a:tcPr anchor="ctr">
+                    <a:solidFill>
+                      <a:srgbClr val="FFFFFF"/>
+                    </a:solidFill>
+                    <a:lnL w="6350" cap="flat" cmpd="sng" algn="ctr">
+                      <a:solidFill>
+                        <a:srgbClr val="BDBDBD"/>
+                      </a:solidFill>
+                    </a:lnL>
+                    <a:lnR w="6350" cap="flat" cmpd="sng" algn="ctr">
+                      <a:solidFill>
+                        <a:srgbClr val="BDBDBD"/>
+                      </a:solidFill>
+                    </a:lnR>
+                    <a:lnT w="6350" cap="flat" cmpd="sng" algn="ctr">
+                      <a:solidFill>
+                        <a:srgbClr val="BDBDBD"/>
+                      </a:solidFill>
+                    </a:lnT>
+                    <a:lnB w="6350" cap="flat" cmpd="sng" algn="ctr">
+                      <a:solidFill>
+                        <a:srgbClr val="BDBDBD"/>
+                      </a:solidFill>
+                    </a:lnB>
                   </a:tcPr>
                 </a:tc>
               </a:tr>
@@ -13856,7 +18670,7 @@
             <a:r>
               <a:rPr sz="1400" b="1">
                 <a:solidFill>
-                  <a:srgbClr val="2E7D32"/>
+                  <a:srgbClr val="202020"/>
                 </a:solidFill>
                 <a:latin typeface="Microsoft YaHei"/>
               </a:rPr>
@@ -13978,7 +18792,7 @@
             <a:avLst/>
           </a:prstGeom>
           <a:solidFill>
-            <a:srgbClr val="FFF1F2"/>
+            <a:srgbClr val="FAFAFA"/>
           </a:solidFill>
           <a:ln>
             <a:solidFill>
@@ -14468,10 +19282,30 @@
                       </a:r>
                     </a:p>
                   </a:txBody>
-                  <a:tcPr>
+                  <a:tcPr anchor="ctr">
                     <a:solidFill>
                       <a:srgbClr val="F5F5F5"/>
                     </a:solidFill>
+                    <a:lnL w="6350" cap="flat" cmpd="sng" algn="ctr">
+                      <a:solidFill>
+                        <a:srgbClr val="BDBDBD"/>
+                      </a:solidFill>
+                    </a:lnL>
+                    <a:lnR w="6350" cap="flat" cmpd="sng" algn="ctr">
+                      <a:solidFill>
+                        <a:srgbClr val="BDBDBD"/>
+                      </a:solidFill>
+                    </a:lnR>
+                    <a:lnT w="6350" cap="flat" cmpd="sng" algn="ctr">
+                      <a:solidFill>
+                        <a:srgbClr val="BDBDBD"/>
+                      </a:solidFill>
+                    </a:lnT>
+                    <a:lnB w="6350" cap="flat" cmpd="sng" algn="ctr">
+                      <a:solidFill>
+                        <a:srgbClr val="BDBDBD"/>
+                      </a:solidFill>
+                    </a:lnB>
                   </a:tcPr>
                 </a:tc>
                 <a:tc>
@@ -14491,10 +19325,30 @@
                       </a:r>
                     </a:p>
                   </a:txBody>
-                  <a:tcPr>
+                  <a:tcPr anchor="ctr">
                     <a:solidFill>
                       <a:srgbClr val="F5F5F5"/>
                     </a:solidFill>
+                    <a:lnL w="6350" cap="flat" cmpd="sng" algn="ctr">
+                      <a:solidFill>
+                        <a:srgbClr val="BDBDBD"/>
+                      </a:solidFill>
+                    </a:lnL>
+                    <a:lnR w="6350" cap="flat" cmpd="sng" algn="ctr">
+                      <a:solidFill>
+                        <a:srgbClr val="BDBDBD"/>
+                      </a:solidFill>
+                    </a:lnR>
+                    <a:lnT w="6350" cap="flat" cmpd="sng" algn="ctr">
+                      <a:solidFill>
+                        <a:srgbClr val="BDBDBD"/>
+                      </a:solidFill>
+                    </a:lnT>
+                    <a:lnB w="6350" cap="flat" cmpd="sng" algn="ctr">
+                      <a:solidFill>
+                        <a:srgbClr val="BDBDBD"/>
+                      </a:solidFill>
+                    </a:lnB>
                   </a:tcPr>
                 </a:tc>
               </a:tr>
@@ -14516,10 +19370,30 @@
                       </a:r>
                     </a:p>
                   </a:txBody>
-                  <a:tcPr>
+                  <a:tcPr anchor="ctr">
                     <a:solidFill>
                       <a:srgbClr val="FFFFFF"/>
                     </a:solidFill>
+                    <a:lnL w="6350" cap="flat" cmpd="sng" algn="ctr">
+                      <a:solidFill>
+                        <a:srgbClr val="BDBDBD"/>
+                      </a:solidFill>
+                    </a:lnL>
+                    <a:lnR w="6350" cap="flat" cmpd="sng" algn="ctr">
+                      <a:solidFill>
+                        <a:srgbClr val="BDBDBD"/>
+                      </a:solidFill>
+                    </a:lnR>
+                    <a:lnT w="6350" cap="flat" cmpd="sng" algn="ctr">
+                      <a:solidFill>
+                        <a:srgbClr val="BDBDBD"/>
+                      </a:solidFill>
+                    </a:lnT>
+                    <a:lnB w="6350" cap="flat" cmpd="sng" algn="ctr">
+                      <a:solidFill>
+                        <a:srgbClr val="BDBDBD"/>
+                      </a:solidFill>
+                    </a:lnB>
                   </a:tcPr>
                 </a:tc>
                 <a:tc>
@@ -14539,10 +19413,30 @@
                       </a:r>
                     </a:p>
                   </a:txBody>
-                  <a:tcPr>
+                  <a:tcPr anchor="ctr">
                     <a:solidFill>
                       <a:srgbClr val="FFFFFF"/>
                     </a:solidFill>
+                    <a:lnL w="6350" cap="flat" cmpd="sng" algn="ctr">
+                      <a:solidFill>
+                        <a:srgbClr val="BDBDBD"/>
+                      </a:solidFill>
+                    </a:lnL>
+                    <a:lnR w="6350" cap="flat" cmpd="sng" algn="ctr">
+                      <a:solidFill>
+                        <a:srgbClr val="BDBDBD"/>
+                      </a:solidFill>
+                    </a:lnR>
+                    <a:lnT w="6350" cap="flat" cmpd="sng" algn="ctr">
+                      <a:solidFill>
+                        <a:srgbClr val="BDBDBD"/>
+                      </a:solidFill>
+                    </a:lnT>
+                    <a:lnB w="6350" cap="flat" cmpd="sng" algn="ctr">
+                      <a:solidFill>
+                        <a:srgbClr val="BDBDBD"/>
+                      </a:solidFill>
+                    </a:lnB>
                   </a:tcPr>
                 </a:tc>
               </a:tr>
@@ -14564,10 +19458,30 @@
                       </a:r>
                     </a:p>
                   </a:txBody>
-                  <a:tcPr>
-                    <a:solidFill>
-                      <a:srgbClr val="FFF1F2"/>
-                    </a:solidFill>
+                  <a:tcPr anchor="ctr">
+                    <a:solidFill>
+                      <a:srgbClr val="FFFFFF"/>
+                    </a:solidFill>
+                    <a:lnL w="6350" cap="flat" cmpd="sng" algn="ctr">
+                      <a:solidFill>
+                        <a:srgbClr val="BDBDBD"/>
+                      </a:solidFill>
+                    </a:lnL>
+                    <a:lnR w="6350" cap="flat" cmpd="sng" algn="ctr">
+                      <a:solidFill>
+                        <a:srgbClr val="BDBDBD"/>
+                      </a:solidFill>
+                    </a:lnR>
+                    <a:lnT w="6350" cap="flat" cmpd="sng" algn="ctr">
+                      <a:solidFill>
+                        <a:srgbClr val="BDBDBD"/>
+                      </a:solidFill>
+                    </a:lnT>
+                    <a:lnB w="6350" cap="flat" cmpd="sng" algn="ctr">
+                      <a:solidFill>
+                        <a:srgbClr val="BDBDBD"/>
+                      </a:solidFill>
+                    </a:lnB>
                   </a:tcPr>
                 </a:tc>
                 <a:tc>
@@ -14587,10 +19501,30 @@
                       </a:r>
                     </a:p>
                   </a:txBody>
-                  <a:tcPr>
-                    <a:solidFill>
-                      <a:srgbClr val="FFF1F2"/>
-                    </a:solidFill>
+                  <a:tcPr anchor="ctr">
+                    <a:solidFill>
+                      <a:srgbClr val="FFFFFF"/>
+                    </a:solidFill>
+                    <a:lnL w="6350" cap="flat" cmpd="sng" algn="ctr">
+                      <a:solidFill>
+                        <a:srgbClr val="BDBDBD"/>
+                      </a:solidFill>
+                    </a:lnL>
+                    <a:lnR w="6350" cap="flat" cmpd="sng" algn="ctr">
+                      <a:solidFill>
+                        <a:srgbClr val="BDBDBD"/>
+                      </a:solidFill>
+                    </a:lnR>
+                    <a:lnT w="6350" cap="flat" cmpd="sng" algn="ctr">
+                      <a:solidFill>
+                        <a:srgbClr val="BDBDBD"/>
+                      </a:solidFill>
+                    </a:lnT>
+                    <a:lnB w="6350" cap="flat" cmpd="sng" algn="ctr">
+                      <a:solidFill>
+                        <a:srgbClr val="BDBDBD"/>
+                      </a:solidFill>
+                    </a:lnB>
                   </a:tcPr>
                 </a:tc>
               </a:tr>
@@ -14612,10 +19546,30 @@
                       </a:r>
                     </a:p>
                   </a:txBody>
-                  <a:tcPr>
+                  <a:tcPr anchor="ctr">
                     <a:solidFill>
                       <a:srgbClr val="FFFFFF"/>
                     </a:solidFill>
+                    <a:lnL w="6350" cap="flat" cmpd="sng" algn="ctr">
+                      <a:solidFill>
+                        <a:srgbClr val="BDBDBD"/>
+                      </a:solidFill>
+                    </a:lnL>
+                    <a:lnR w="6350" cap="flat" cmpd="sng" algn="ctr">
+                      <a:solidFill>
+                        <a:srgbClr val="BDBDBD"/>
+                      </a:solidFill>
+                    </a:lnR>
+                    <a:lnT w="6350" cap="flat" cmpd="sng" algn="ctr">
+                      <a:solidFill>
+                        <a:srgbClr val="BDBDBD"/>
+                      </a:solidFill>
+                    </a:lnT>
+                    <a:lnB w="6350" cap="flat" cmpd="sng" algn="ctr">
+                      <a:solidFill>
+                        <a:srgbClr val="BDBDBD"/>
+                      </a:solidFill>
+                    </a:lnB>
                   </a:tcPr>
                 </a:tc>
                 <a:tc>
@@ -14635,10 +19589,30 @@
                       </a:r>
                     </a:p>
                   </a:txBody>
-                  <a:tcPr>
+                  <a:tcPr anchor="ctr">
                     <a:solidFill>
                       <a:srgbClr val="FFFFFF"/>
                     </a:solidFill>
+                    <a:lnL w="6350" cap="flat" cmpd="sng" algn="ctr">
+                      <a:solidFill>
+                        <a:srgbClr val="BDBDBD"/>
+                      </a:solidFill>
+                    </a:lnL>
+                    <a:lnR w="6350" cap="flat" cmpd="sng" algn="ctr">
+                      <a:solidFill>
+                        <a:srgbClr val="BDBDBD"/>
+                      </a:solidFill>
+                    </a:lnR>
+                    <a:lnT w="6350" cap="flat" cmpd="sng" algn="ctr">
+                      <a:solidFill>
+                        <a:srgbClr val="BDBDBD"/>
+                      </a:solidFill>
+                    </a:lnT>
+                    <a:lnB w="6350" cap="flat" cmpd="sng" algn="ctr">
+                      <a:solidFill>
+                        <a:srgbClr val="BDBDBD"/>
+                      </a:solidFill>
+                    </a:lnB>
                   </a:tcPr>
                 </a:tc>
               </a:tr>
@@ -14660,10 +19634,30 @@
                       </a:r>
                     </a:p>
                   </a:txBody>
-                  <a:tcPr>
-                    <a:solidFill>
-                      <a:srgbClr val="FFF1F2"/>
-                    </a:solidFill>
+                  <a:tcPr anchor="ctr">
+                    <a:solidFill>
+                      <a:srgbClr val="FFFFFF"/>
+                    </a:solidFill>
+                    <a:lnL w="6350" cap="flat" cmpd="sng" algn="ctr">
+                      <a:solidFill>
+                        <a:srgbClr val="BDBDBD"/>
+                      </a:solidFill>
+                    </a:lnL>
+                    <a:lnR w="6350" cap="flat" cmpd="sng" algn="ctr">
+                      <a:solidFill>
+                        <a:srgbClr val="BDBDBD"/>
+                      </a:solidFill>
+                    </a:lnR>
+                    <a:lnT w="6350" cap="flat" cmpd="sng" algn="ctr">
+                      <a:solidFill>
+                        <a:srgbClr val="BDBDBD"/>
+                      </a:solidFill>
+                    </a:lnT>
+                    <a:lnB w="6350" cap="flat" cmpd="sng" algn="ctr">
+                      <a:solidFill>
+                        <a:srgbClr val="BDBDBD"/>
+                      </a:solidFill>
+                    </a:lnB>
                   </a:tcPr>
                 </a:tc>
                 <a:tc>
@@ -14683,10 +19677,30 @@
                       </a:r>
                     </a:p>
                   </a:txBody>
-                  <a:tcPr>
-                    <a:solidFill>
-                      <a:srgbClr val="FFF1F2"/>
-                    </a:solidFill>
+                  <a:tcPr anchor="ctr">
+                    <a:solidFill>
+                      <a:srgbClr val="FFFFFF"/>
+                    </a:solidFill>
+                    <a:lnL w="6350" cap="flat" cmpd="sng" algn="ctr">
+                      <a:solidFill>
+                        <a:srgbClr val="BDBDBD"/>
+                      </a:solidFill>
+                    </a:lnL>
+                    <a:lnR w="6350" cap="flat" cmpd="sng" algn="ctr">
+                      <a:solidFill>
+                        <a:srgbClr val="BDBDBD"/>
+                      </a:solidFill>
+                    </a:lnR>
+                    <a:lnT w="6350" cap="flat" cmpd="sng" algn="ctr">
+                      <a:solidFill>
+                        <a:srgbClr val="BDBDBD"/>
+                      </a:solidFill>
+                    </a:lnT>
+                    <a:lnB w="6350" cap="flat" cmpd="sng" algn="ctr">
+                      <a:solidFill>
+                        <a:srgbClr val="BDBDBD"/>
+                      </a:solidFill>
+                    </a:lnB>
                   </a:tcPr>
                 </a:tc>
               </a:tr>
@@ -14708,10 +19722,30 @@
                       </a:r>
                     </a:p>
                   </a:txBody>
-                  <a:tcPr>
+                  <a:tcPr anchor="ctr">
                     <a:solidFill>
                       <a:srgbClr val="FFFFFF"/>
                     </a:solidFill>
+                    <a:lnL w="6350" cap="flat" cmpd="sng" algn="ctr">
+                      <a:solidFill>
+                        <a:srgbClr val="BDBDBD"/>
+                      </a:solidFill>
+                    </a:lnL>
+                    <a:lnR w="6350" cap="flat" cmpd="sng" algn="ctr">
+                      <a:solidFill>
+                        <a:srgbClr val="BDBDBD"/>
+                      </a:solidFill>
+                    </a:lnR>
+                    <a:lnT w="6350" cap="flat" cmpd="sng" algn="ctr">
+                      <a:solidFill>
+                        <a:srgbClr val="BDBDBD"/>
+                      </a:solidFill>
+                    </a:lnT>
+                    <a:lnB w="6350" cap="flat" cmpd="sng" algn="ctr">
+                      <a:solidFill>
+                        <a:srgbClr val="BDBDBD"/>
+                      </a:solidFill>
+                    </a:lnB>
                   </a:tcPr>
                 </a:tc>
                 <a:tc>
@@ -14731,10 +19765,30 @@
                       </a:r>
                     </a:p>
                   </a:txBody>
-                  <a:tcPr>
+                  <a:tcPr anchor="ctr">
                     <a:solidFill>
                       <a:srgbClr val="FFFFFF"/>
                     </a:solidFill>
+                    <a:lnL w="6350" cap="flat" cmpd="sng" algn="ctr">
+                      <a:solidFill>
+                        <a:srgbClr val="BDBDBD"/>
+                      </a:solidFill>
+                    </a:lnL>
+                    <a:lnR w="6350" cap="flat" cmpd="sng" algn="ctr">
+                      <a:solidFill>
+                        <a:srgbClr val="BDBDBD"/>
+                      </a:solidFill>
+                    </a:lnR>
+                    <a:lnT w="6350" cap="flat" cmpd="sng" algn="ctr">
+                      <a:solidFill>
+                        <a:srgbClr val="BDBDBD"/>
+                      </a:solidFill>
+                    </a:lnT>
+                    <a:lnB w="6350" cap="flat" cmpd="sng" algn="ctr">
+                      <a:solidFill>
+                        <a:srgbClr val="BDBDBD"/>
+                      </a:solidFill>
+                    </a:lnB>
                   </a:tcPr>
                 </a:tc>
               </a:tr>
@@ -14756,10 +19810,30 @@
                       </a:r>
                     </a:p>
                   </a:txBody>
-                  <a:tcPr>
-                    <a:solidFill>
-                      <a:srgbClr val="FFF1F2"/>
-                    </a:solidFill>
+                  <a:tcPr anchor="ctr">
+                    <a:solidFill>
+                      <a:srgbClr val="FFFFFF"/>
+                    </a:solidFill>
+                    <a:lnL w="6350" cap="flat" cmpd="sng" algn="ctr">
+                      <a:solidFill>
+                        <a:srgbClr val="BDBDBD"/>
+                      </a:solidFill>
+                    </a:lnL>
+                    <a:lnR w="6350" cap="flat" cmpd="sng" algn="ctr">
+                      <a:solidFill>
+                        <a:srgbClr val="BDBDBD"/>
+                      </a:solidFill>
+                    </a:lnR>
+                    <a:lnT w="6350" cap="flat" cmpd="sng" algn="ctr">
+                      <a:solidFill>
+                        <a:srgbClr val="BDBDBD"/>
+                      </a:solidFill>
+                    </a:lnT>
+                    <a:lnB w="6350" cap="flat" cmpd="sng" algn="ctr">
+                      <a:solidFill>
+                        <a:srgbClr val="BDBDBD"/>
+                      </a:solidFill>
+                    </a:lnB>
                   </a:tcPr>
                 </a:tc>
                 <a:tc>
@@ -14779,10 +19853,30 @@
                       </a:r>
                     </a:p>
                   </a:txBody>
-                  <a:tcPr>
-                    <a:solidFill>
-                      <a:srgbClr val="FFF1F2"/>
-                    </a:solidFill>
+                  <a:tcPr anchor="ctr">
+                    <a:solidFill>
+                      <a:srgbClr val="FFFFFF"/>
+                    </a:solidFill>
+                    <a:lnL w="6350" cap="flat" cmpd="sng" algn="ctr">
+                      <a:solidFill>
+                        <a:srgbClr val="BDBDBD"/>
+                      </a:solidFill>
+                    </a:lnL>
+                    <a:lnR w="6350" cap="flat" cmpd="sng" algn="ctr">
+                      <a:solidFill>
+                        <a:srgbClr val="BDBDBD"/>
+                      </a:solidFill>
+                    </a:lnR>
+                    <a:lnT w="6350" cap="flat" cmpd="sng" algn="ctr">
+                      <a:solidFill>
+                        <a:srgbClr val="BDBDBD"/>
+                      </a:solidFill>
+                    </a:lnT>
+                    <a:lnB w="6350" cap="flat" cmpd="sng" algn="ctr">
+                      <a:solidFill>
+                        <a:srgbClr val="BDBDBD"/>
+                      </a:solidFill>
+                    </a:lnB>
                   </a:tcPr>
                 </a:tc>
               </a:tr>
@@ -14805,7 +19899,7 @@
             <a:avLst/>
           </a:prstGeom>
           <a:solidFill>
-            <a:srgbClr val="FFF1F2"/>
+            <a:srgbClr val="FAFAFA"/>
           </a:solidFill>
           <a:ln>
             <a:solidFill>
@@ -14966,7 +20060,7 @@
             <a:r>
               <a:rPr sz="1200" b="1">
                 <a:solidFill>
-                  <a:srgbClr val="2E7D32"/>
+                  <a:srgbClr val="202020"/>
                 </a:solidFill>
                 <a:latin typeface="Microsoft YaHei"/>
               </a:rPr>

--- a/docs/dev_summary.pptx
+++ b/docs/dev_summary.pptx
@@ -3668,22 +3668,22 @@
                     </a:solidFill>
                     <a:lnL w="6350" cap="flat" cmpd="sng" algn="ctr">
                       <a:solidFill>
-                        <a:srgbClr val="BDBDBD"/>
-                      </a:solidFill>
-                    </a:lnL>
-                    <a:lnR w="6350" cap="flat" cmpd="sng" algn="ctr">
-                      <a:solidFill>
-                        <a:srgbClr val="BDBDBD"/>
-                      </a:solidFill>
-                    </a:lnR>
-                    <a:lnT w="6350" cap="flat" cmpd="sng" algn="ctr">
-                      <a:solidFill>
-                        <a:srgbClr val="BDBDBD"/>
-                      </a:solidFill>
-                    </a:lnT>
-                    <a:lnB w="6350" cap="flat" cmpd="sng" algn="ctr">
-                      <a:solidFill>
-                        <a:srgbClr val="BDBDBD"/>
+                        <a:srgbClr val="808080"/>
+                      </a:solidFill>
+                    </a:lnL>
+                    <a:lnR w="6350" cap="flat" cmpd="sng" algn="ctr">
+                      <a:solidFill>
+                        <a:srgbClr val="808080"/>
+                      </a:solidFill>
+                    </a:lnR>
+                    <a:lnT w="6350" cap="flat" cmpd="sng" algn="ctr">
+                      <a:solidFill>
+                        <a:srgbClr val="808080"/>
+                      </a:solidFill>
+                    </a:lnT>
+                    <a:lnB w="6350" cap="flat" cmpd="sng" algn="ctr">
+                      <a:solidFill>
+                        <a:srgbClr val="808080"/>
                       </a:solidFill>
                     </a:lnB>
                   </a:tcPr>
@@ -3711,22 +3711,22 @@
                     </a:solidFill>
                     <a:lnL w="6350" cap="flat" cmpd="sng" algn="ctr">
                       <a:solidFill>
-                        <a:srgbClr val="BDBDBD"/>
-                      </a:solidFill>
-                    </a:lnL>
-                    <a:lnR w="6350" cap="flat" cmpd="sng" algn="ctr">
-                      <a:solidFill>
-                        <a:srgbClr val="BDBDBD"/>
-                      </a:solidFill>
-                    </a:lnR>
-                    <a:lnT w="6350" cap="flat" cmpd="sng" algn="ctr">
-                      <a:solidFill>
-                        <a:srgbClr val="BDBDBD"/>
-                      </a:solidFill>
-                    </a:lnT>
-                    <a:lnB w="6350" cap="flat" cmpd="sng" algn="ctr">
-                      <a:solidFill>
-                        <a:srgbClr val="BDBDBD"/>
+                        <a:srgbClr val="808080"/>
+                      </a:solidFill>
+                    </a:lnL>
+                    <a:lnR w="6350" cap="flat" cmpd="sng" algn="ctr">
+                      <a:solidFill>
+                        <a:srgbClr val="808080"/>
+                      </a:solidFill>
+                    </a:lnR>
+                    <a:lnT w="6350" cap="flat" cmpd="sng" algn="ctr">
+                      <a:solidFill>
+                        <a:srgbClr val="808080"/>
+                      </a:solidFill>
+                    </a:lnT>
+                    <a:lnB w="6350" cap="flat" cmpd="sng" algn="ctr">
+                      <a:solidFill>
+                        <a:srgbClr val="808080"/>
                       </a:solidFill>
                     </a:lnB>
                   </a:tcPr>
@@ -3754,22 +3754,22 @@
                     </a:solidFill>
                     <a:lnL w="6350" cap="flat" cmpd="sng" algn="ctr">
                       <a:solidFill>
-                        <a:srgbClr val="BDBDBD"/>
-                      </a:solidFill>
-                    </a:lnL>
-                    <a:lnR w="6350" cap="flat" cmpd="sng" algn="ctr">
-                      <a:solidFill>
-                        <a:srgbClr val="BDBDBD"/>
-                      </a:solidFill>
-                    </a:lnR>
-                    <a:lnT w="6350" cap="flat" cmpd="sng" algn="ctr">
-                      <a:solidFill>
-                        <a:srgbClr val="BDBDBD"/>
-                      </a:solidFill>
-                    </a:lnT>
-                    <a:lnB w="6350" cap="flat" cmpd="sng" algn="ctr">
-                      <a:solidFill>
-                        <a:srgbClr val="BDBDBD"/>
+                        <a:srgbClr val="808080"/>
+                      </a:solidFill>
+                    </a:lnL>
+                    <a:lnR w="6350" cap="flat" cmpd="sng" algn="ctr">
+                      <a:solidFill>
+                        <a:srgbClr val="808080"/>
+                      </a:solidFill>
+                    </a:lnR>
+                    <a:lnT w="6350" cap="flat" cmpd="sng" algn="ctr">
+                      <a:solidFill>
+                        <a:srgbClr val="808080"/>
+                      </a:solidFill>
+                    </a:lnT>
+                    <a:lnB w="6350" cap="flat" cmpd="sng" algn="ctr">
+                      <a:solidFill>
+                        <a:srgbClr val="808080"/>
                       </a:solidFill>
                     </a:lnB>
                   </a:tcPr>
@@ -3799,22 +3799,22 @@
                     </a:solidFill>
                     <a:lnL w="6350" cap="flat" cmpd="sng" algn="ctr">
                       <a:solidFill>
-                        <a:srgbClr val="BDBDBD"/>
-                      </a:solidFill>
-                    </a:lnL>
-                    <a:lnR w="6350" cap="flat" cmpd="sng" algn="ctr">
-                      <a:solidFill>
-                        <a:srgbClr val="BDBDBD"/>
-                      </a:solidFill>
-                    </a:lnR>
-                    <a:lnT w="6350" cap="flat" cmpd="sng" algn="ctr">
-                      <a:solidFill>
-                        <a:srgbClr val="BDBDBD"/>
-                      </a:solidFill>
-                    </a:lnT>
-                    <a:lnB w="6350" cap="flat" cmpd="sng" algn="ctr">
-                      <a:solidFill>
-                        <a:srgbClr val="BDBDBD"/>
+                        <a:srgbClr val="808080"/>
+                      </a:solidFill>
+                    </a:lnL>
+                    <a:lnR w="6350" cap="flat" cmpd="sng" algn="ctr">
+                      <a:solidFill>
+                        <a:srgbClr val="808080"/>
+                      </a:solidFill>
+                    </a:lnR>
+                    <a:lnT w="6350" cap="flat" cmpd="sng" algn="ctr">
+                      <a:solidFill>
+                        <a:srgbClr val="808080"/>
+                      </a:solidFill>
+                    </a:lnT>
+                    <a:lnB w="6350" cap="flat" cmpd="sng" algn="ctr">
+                      <a:solidFill>
+                        <a:srgbClr val="808080"/>
                       </a:solidFill>
                     </a:lnB>
                   </a:tcPr>
@@ -3842,22 +3842,22 @@
                     </a:solidFill>
                     <a:lnL w="6350" cap="flat" cmpd="sng" algn="ctr">
                       <a:solidFill>
-                        <a:srgbClr val="BDBDBD"/>
-                      </a:solidFill>
-                    </a:lnL>
-                    <a:lnR w="6350" cap="flat" cmpd="sng" algn="ctr">
-                      <a:solidFill>
-                        <a:srgbClr val="BDBDBD"/>
-                      </a:solidFill>
-                    </a:lnR>
-                    <a:lnT w="6350" cap="flat" cmpd="sng" algn="ctr">
-                      <a:solidFill>
-                        <a:srgbClr val="BDBDBD"/>
-                      </a:solidFill>
-                    </a:lnT>
-                    <a:lnB w="6350" cap="flat" cmpd="sng" algn="ctr">
-                      <a:solidFill>
-                        <a:srgbClr val="BDBDBD"/>
+                        <a:srgbClr val="808080"/>
+                      </a:solidFill>
+                    </a:lnL>
+                    <a:lnR w="6350" cap="flat" cmpd="sng" algn="ctr">
+                      <a:solidFill>
+                        <a:srgbClr val="808080"/>
+                      </a:solidFill>
+                    </a:lnR>
+                    <a:lnT w="6350" cap="flat" cmpd="sng" algn="ctr">
+                      <a:solidFill>
+                        <a:srgbClr val="808080"/>
+                      </a:solidFill>
+                    </a:lnT>
+                    <a:lnB w="6350" cap="flat" cmpd="sng" algn="ctr">
+                      <a:solidFill>
+                        <a:srgbClr val="808080"/>
                       </a:solidFill>
                     </a:lnB>
                   </a:tcPr>
@@ -3885,22 +3885,22 @@
                     </a:solidFill>
                     <a:lnL w="6350" cap="flat" cmpd="sng" algn="ctr">
                       <a:solidFill>
-                        <a:srgbClr val="BDBDBD"/>
-                      </a:solidFill>
-                    </a:lnL>
-                    <a:lnR w="6350" cap="flat" cmpd="sng" algn="ctr">
-                      <a:solidFill>
-                        <a:srgbClr val="BDBDBD"/>
-                      </a:solidFill>
-                    </a:lnR>
-                    <a:lnT w="6350" cap="flat" cmpd="sng" algn="ctr">
-                      <a:solidFill>
-                        <a:srgbClr val="BDBDBD"/>
-                      </a:solidFill>
-                    </a:lnT>
-                    <a:lnB w="6350" cap="flat" cmpd="sng" algn="ctr">
-                      <a:solidFill>
-                        <a:srgbClr val="BDBDBD"/>
+                        <a:srgbClr val="808080"/>
+                      </a:solidFill>
+                    </a:lnL>
+                    <a:lnR w="6350" cap="flat" cmpd="sng" algn="ctr">
+                      <a:solidFill>
+                        <a:srgbClr val="808080"/>
+                      </a:solidFill>
+                    </a:lnR>
+                    <a:lnT w="6350" cap="flat" cmpd="sng" algn="ctr">
+                      <a:solidFill>
+                        <a:srgbClr val="808080"/>
+                      </a:solidFill>
+                    </a:lnT>
+                    <a:lnB w="6350" cap="flat" cmpd="sng" algn="ctr">
+                      <a:solidFill>
+                        <a:srgbClr val="808080"/>
                       </a:solidFill>
                     </a:lnB>
                   </a:tcPr>
@@ -3930,22 +3930,22 @@
                     </a:solidFill>
                     <a:lnL w="6350" cap="flat" cmpd="sng" algn="ctr">
                       <a:solidFill>
-                        <a:srgbClr val="BDBDBD"/>
-                      </a:solidFill>
-                    </a:lnL>
-                    <a:lnR w="6350" cap="flat" cmpd="sng" algn="ctr">
-                      <a:solidFill>
-                        <a:srgbClr val="BDBDBD"/>
-                      </a:solidFill>
-                    </a:lnR>
-                    <a:lnT w="6350" cap="flat" cmpd="sng" algn="ctr">
-                      <a:solidFill>
-                        <a:srgbClr val="BDBDBD"/>
-                      </a:solidFill>
-                    </a:lnT>
-                    <a:lnB w="6350" cap="flat" cmpd="sng" algn="ctr">
-                      <a:solidFill>
-                        <a:srgbClr val="BDBDBD"/>
+                        <a:srgbClr val="808080"/>
+                      </a:solidFill>
+                    </a:lnL>
+                    <a:lnR w="6350" cap="flat" cmpd="sng" algn="ctr">
+                      <a:solidFill>
+                        <a:srgbClr val="808080"/>
+                      </a:solidFill>
+                    </a:lnR>
+                    <a:lnT w="6350" cap="flat" cmpd="sng" algn="ctr">
+                      <a:solidFill>
+                        <a:srgbClr val="808080"/>
+                      </a:solidFill>
+                    </a:lnT>
+                    <a:lnB w="6350" cap="flat" cmpd="sng" algn="ctr">
+                      <a:solidFill>
+                        <a:srgbClr val="808080"/>
                       </a:solidFill>
                     </a:lnB>
                   </a:tcPr>
@@ -3973,22 +3973,22 @@
                     </a:solidFill>
                     <a:lnL w="6350" cap="flat" cmpd="sng" algn="ctr">
                       <a:solidFill>
-                        <a:srgbClr val="BDBDBD"/>
-                      </a:solidFill>
-                    </a:lnL>
-                    <a:lnR w="6350" cap="flat" cmpd="sng" algn="ctr">
-                      <a:solidFill>
-                        <a:srgbClr val="BDBDBD"/>
-                      </a:solidFill>
-                    </a:lnR>
-                    <a:lnT w="6350" cap="flat" cmpd="sng" algn="ctr">
-                      <a:solidFill>
-                        <a:srgbClr val="BDBDBD"/>
-                      </a:solidFill>
-                    </a:lnT>
-                    <a:lnB w="6350" cap="flat" cmpd="sng" algn="ctr">
-                      <a:solidFill>
-                        <a:srgbClr val="BDBDBD"/>
+                        <a:srgbClr val="808080"/>
+                      </a:solidFill>
+                    </a:lnL>
+                    <a:lnR w="6350" cap="flat" cmpd="sng" algn="ctr">
+                      <a:solidFill>
+                        <a:srgbClr val="808080"/>
+                      </a:solidFill>
+                    </a:lnR>
+                    <a:lnT w="6350" cap="flat" cmpd="sng" algn="ctr">
+                      <a:solidFill>
+                        <a:srgbClr val="808080"/>
+                      </a:solidFill>
+                    </a:lnT>
+                    <a:lnB w="6350" cap="flat" cmpd="sng" algn="ctr">
+                      <a:solidFill>
+                        <a:srgbClr val="808080"/>
                       </a:solidFill>
                     </a:lnB>
                   </a:tcPr>
@@ -4016,22 +4016,22 @@
                     </a:solidFill>
                     <a:lnL w="6350" cap="flat" cmpd="sng" algn="ctr">
                       <a:solidFill>
-                        <a:srgbClr val="BDBDBD"/>
-                      </a:solidFill>
-                    </a:lnL>
-                    <a:lnR w="6350" cap="flat" cmpd="sng" algn="ctr">
-                      <a:solidFill>
-                        <a:srgbClr val="BDBDBD"/>
-                      </a:solidFill>
-                    </a:lnR>
-                    <a:lnT w="6350" cap="flat" cmpd="sng" algn="ctr">
-                      <a:solidFill>
-                        <a:srgbClr val="BDBDBD"/>
-                      </a:solidFill>
-                    </a:lnT>
-                    <a:lnB w="6350" cap="flat" cmpd="sng" algn="ctr">
-                      <a:solidFill>
-                        <a:srgbClr val="BDBDBD"/>
+                        <a:srgbClr val="808080"/>
+                      </a:solidFill>
+                    </a:lnL>
+                    <a:lnR w="6350" cap="flat" cmpd="sng" algn="ctr">
+                      <a:solidFill>
+                        <a:srgbClr val="808080"/>
+                      </a:solidFill>
+                    </a:lnR>
+                    <a:lnT w="6350" cap="flat" cmpd="sng" algn="ctr">
+                      <a:solidFill>
+                        <a:srgbClr val="808080"/>
+                      </a:solidFill>
+                    </a:lnT>
+                    <a:lnB w="6350" cap="flat" cmpd="sng" algn="ctr">
+                      <a:solidFill>
+                        <a:srgbClr val="808080"/>
                       </a:solidFill>
                     </a:lnB>
                   </a:tcPr>
@@ -4061,22 +4061,22 @@
                     </a:solidFill>
                     <a:lnL w="6350" cap="flat" cmpd="sng" algn="ctr">
                       <a:solidFill>
-                        <a:srgbClr val="BDBDBD"/>
-                      </a:solidFill>
-                    </a:lnL>
-                    <a:lnR w="6350" cap="flat" cmpd="sng" algn="ctr">
-                      <a:solidFill>
-                        <a:srgbClr val="BDBDBD"/>
-                      </a:solidFill>
-                    </a:lnR>
-                    <a:lnT w="6350" cap="flat" cmpd="sng" algn="ctr">
-                      <a:solidFill>
-                        <a:srgbClr val="BDBDBD"/>
-                      </a:solidFill>
-                    </a:lnT>
-                    <a:lnB w="6350" cap="flat" cmpd="sng" algn="ctr">
-                      <a:solidFill>
-                        <a:srgbClr val="BDBDBD"/>
+                        <a:srgbClr val="808080"/>
+                      </a:solidFill>
+                    </a:lnL>
+                    <a:lnR w="6350" cap="flat" cmpd="sng" algn="ctr">
+                      <a:solidFill>
+                        <a:srgbClr val="808080"/>
+                      </a:solidFill>
+                    </a:lnR>
+                    <a:lnT w="6350" cap="flat" cmpd="sng" algn="ctr">
+                      <a:solidFill>
+                        <a:srgbClr val="808080"/>
+                      </a:solidFill>
+                    </a:lnT>
+                    <a:lnB w="6350" cap="flat" cmpd="sng" algn="ctr">
+                      <a:solidFill>
+                        <a:srgbClr val="808080"/>
                       </a:solidFill>
                     </a:lnB>
                   </a:tcPr>
@@ -4104,22 +4104,22 @@
                     </a:solidFill>
                     <a:lnL w="6350" cap="flat" cmpd="sng" algn="ctr">
                       <a:solidFill>
-                        <a:srgbClr val="BDBDBD"/>
-                      </a:solidFill>
-                    </a:lnL>
-                    <a:lnR w="6350" cap="flat" cmpd="sng" algn="ctr">
-                      <a:solidFill>
-                        <a:srgbClr val="BDBDBD"/>
-                      </a:solidFill>
-                    </a:lnR>
-                    <a:lnT w="6350" cap="flat" cmpd="sng" algn="ctr">
-                      <a:solidFill>
-                        <a:srgbClr val="BDBDBD"/>
-                      </a:solidFill>
-                    </a:lnT>
-                    <a:lnB w="6350" cap="flat" cmpd="sng" algn="ctr">
-                      <a:solidFill>
-                        <a:srgbClr val="BDBDBD"/>
+                        <a:srgbClr val="808080"/>
+                      </a:solidFill>
+                    </a:lnL>
+                    <a:lnR w="6350" cap="flat" cmpd="sng" algn="ctr">
+                      <a:solidFill>
+                        <a:srgbClr val="808080"/>
+                      </a:solidFill>
+                    </a:lnR>
+                    <a:lnT w="6350" cap="flat" cmpd="sng" algn="ctr">
+                      <a:solidFill>
+                        <a:srgbClr val="808080"/>
+                      </a:solidFill>
+                    </a:lnT>
+                    <a:lnB w="6350" cap="flat" cmpd="sng" algn="ctr">
+                      <a:solidFill>
+                        <a:srgbClr val="808080"/>
                       </a:solidFill>
                     </a:lnB>
                   </a:tcPr>
@@ -4147,22 +4147,22 @@
                     </a:solidFill>
                     <a:lnL w="6350" cap="flat" cmpd="sng" algn="ctr">
                       <a:solidFill>
-                        <a:srgbClr val="BDBDBD"/>
-                      </a:solidFill>
-                    </a:lnL>
-                    <a:lnR w="6350" cap="flat" cmpd="sng" algn="ctr">
-                      <a:solidFill>
-                        <a:srgbClr val="BDBDBD"/>
-                      </a:solidFill>
-                    </a:lnR>
-                    <a:lnT w="6350" cap="flat" cmpd="sng" algn="ctr">
-                      <a:solidFill>
-                        <a:srgbClr val="BDBDBD"/>
-                      </a:solidFill>
-                    </a:lnT>
-                    <a:lnB w="6350" cap="flat" cmpd="sng" algn="ctr">
-                      <a:solidFill>
-                        <a:srgbClr val="BDBDBD"/>
+                        <a:srgbClr val="808080"/>
+                      </a:solidFill>
+                    </a:lnL>
+                    <a:lnR w="6350" cap="flat" cmpd="sng" algn="ctr">
+                      <a:solidFill>
+                        <a:srgbClr val="808080"/>
+                      </a:solidFill>
+                    </a:lnR>
+                    <a:lnT w="6350" cap="flat" cmpd="sng" algn="ctr">
+                      <a:solidFill>
+                        <a:srgbClr val="808080"/>
+                      </a:solidFill>
+                    </a:lnT>
+                    <a:lnB w="6350" cap="flat" cmpd="sng" algn="ctr">
+                      <a:solidFill>
+                        <a:srgbClr val="808080"/>
                       </a:solidFill>
                     </a:lnB>
                   </a:tcPr>
@@ -4253,22 +4253,22 @@
                     </a:solidFill>
                     <a:lnL w="6350" cap="flat" cmpd="sng" algn="ctr">
                       <a:solidFill>
-                        <a:srgbClr val="BDBDBD"/>
-                      </a:solidFill>
-                    </a:lnL>
-                    <a:lnR w="6350" cap="flat" cmpd="sng" algn="ctr">
-                      <a:solidFill>
-                        <a:srgbClr val="BDBDBD"/>
-                      </a:solidFill>
-                    </a:lnR>
-                    <a:lnT w="6350" cap="flat" cmpd="sng" algn="ctr">
-                      <a:solidFill>
-                        <a:srgbClr val="BDBDBD"/>
-                      </a:solidFill>
-                    </a:lnT>
-                    <a:lnB w="6350" cap="flat" cmpd="sng" algn="ctr">
-                      <a:solidFill>
-                        <a:srgbClr val="BDBDBD"/>
+                        <a:srgbClr val="808080"/>
+                      </a:solidFill>
+                    </a:lnL>
+                    <a:lnR w="6350" cap="flat" cmpd="sng" algn="ctr">
+                      <a:solidFill>
+                        <a:srgbClr val="808080"/>
+                      </a:solidFill>
+                    </a:lnR>
+                    <a:lnT w="6350" cap="flat" cmpd="sng" algn="ctr">
+                      <a:solidFill>
+                        <a:srgbClr val="808080"/>
+                      </a:solidFill>
+                    </a:lnT>
+                    <a:lnB w="6350" cap="flat" cmpd="sng" algn="ctr">
+                      <a:solidFill>
+                        <a:srgbClr val="808080"/>
                       </a:solidFill>
                     </a:lnB>
                   </a:tcPr>
@@ -4296,22 +4296,22 @@
                     </a:solidFill>
                     <a:lnL w="6350" cap="flat" cmpd="sng" algn="ctr">
                       <a:solidFill>
-                        <a:srgbClr val="BDBDBD"/>
-                      </a:solidFill>
-                    </a:lnL>
-                    <a:lnR w="6350" cap="flat" cmpd="sng" algn="ctr">
-                      <a:solidFill>
-                        <a:srgbClr val="BDBDBD"/>
-                      </a:solidFill>
-                    </a:lnR>
-                    <a:lnT w="6350" cap="flat" cmpd="sng" algn="ctr">
-                      <a:solidFill>
-                        <a:srgbClr val="BDBDBD"/>
-                      </a:solidFill>
-                    </a:lnT>
-                    <a:lnB w="6350" cap="flat" cmpd="sng" algn="ctr">
-                      <a:solidFill>
-                        <a:srgbClr val="BDBDBD"/>
+                        <a:srgbClr val="808080"/>
+                      </a:solidFill>
+                    </a:lnL>
+                    <a:lnR w="6350" cap="flat" cmpd="sng" algn="ctr">
+                      <a:solidFill>
+                        <a:srgbClr val="808080"/>
+                      </a:solidFill>
+                    </a:lnR>
+                    <a:lnT w="6350" cap="flat" cmpd="sng" algn="ctr">
+                      <a:solidFill>
+                        <a:srgbClr val="808080"/>
+                      </a:solidFill>
+                    </a:lnT>
+                    <a:lnB w="6350" cap="flat" cmpd="sng" algn="ctr">
+                      <a:solidFill>
+                        <a:srgbClr val="808080"/>
                       </a:solidFill>
                     </a:lnB>
                   </a:tcPr>
@@ -4341,22 +4341,22 @@
                     </a:solidFill>
                     <a:lnL w="6350" cap="flat" cmpd="sng" algn="ctr">
                       <a:solidFill>
-                        <a:srgbClr val="BDBDBD"/>
-                      </a:solidFill>
-                    </a:lnL>
-                    <a:lnR w="6350" cap="flat" cmpd="sng" algn="ctr">
-                      <a:solidFill>
-                        <a:srgbClr val="BDBDBD"/>
-                      </a:solidFill>
-                    </a:lnR>
-                    <a:lnT w="6350" cap="flat" cmpd="sng" algn="ctr">
-                      <a:solidFill>
-                        <a:srgbClr val="BDBDBD"/>
-                      </a:solidFill>
-                    </a:lnT>
-                    <a:lnB w="6350" cap="flat" cmpd="sng" algn="ctr">
-                      <a:solidFill>
-                        <a:srgbClr val="BDBDBD"/>
+                        <a:srgbClr val="808080"/>
+                      </a:solidFill>
+                    </a:lnL>
+                    <a:lnR w="6350" cap="flat" cmpd="sng" algn="ctr">
+                      <a:solidFill>
+                        <a:srgbClr val="808080"/>
+                      </a:solidFill>
+                    </a:lnR>
+                    <a:lnT w="6350" cap="flat" cmpd="sng" algn="ctr">
+                      <a:solidFill>
+                        <a:srgbClr val="808080"/>
+                      </a:solidFill>
+                    </a:lnT>
+                    <a:lnB w="6350" cap="flat" cmpd="sng" algn="ctr">
+                      <a:solidFill>
+                        <a:srgbClr val="808080"/>
                       </a:solidFill>
                     </a:lnB>
                   </a:tcPr>
@@ -4384,22 +4384,22 @@
                     </a:solidFill>
                     <a:lnL w="6350" cap="flat" cmpd="sng" algn="ctr">
                       <a:solidFill>
-                        <a:srgbClr val="BDBDBD"/>
-                      </a:solidFill>
-                    </a:lnL>
-                    <a:lnR w="6350" cap="flat" cmpd="sng" algn="ctr">
-                      <a:solidFill>
-                        <a:srgbClr val="BDBDBD"/>
-                      </a:solidFill>
-                    </a:lnR>
-                    <a:lnT w="6350" cap="flat" cmpd="sng" algn="ctr">
-                      <a:solidFill>
-                        <a:srgbClr val="BDBDBD"/>
-                      </a:solidFill>
-                    </a:lnT>
-                    <a:lnB w="6350" cap="flat" cmpd="sng" algn="ctr">
-                      <a:solidFill>
-                        <a:srgbClr val="BDBDBD"/>
+                        <a:srgbClr val="808080"/>
+                      </a:solidFill>
+                    </a:lnL>
+                    <a:lnR w="6350" cap="flat" cmpd="sng" algn="ctr">
+                      <a:solidFill>
+                        <a:srgbClr val="808080"/>
+                      </a:solidFill>
+                    </a:lnR>
+                    <a:lnT w="6350" cap="flat" cmpd="sng" algn="ctr">
+                      <a:solidFill>
+                        <a:srgbClr val="808080"/>
+                      </a:solidFill>
+                    </a:lnT>
+                    <a:lnB w="6350" cap="flat" cmpd="sng" algn="ctr">
+                      <a:solidFill>
+                        <a:srgbClr val="808080"/>
                       </a:solidFill>
                     </a:lnB>
                   </a:tcPr>
@@ -4429,22 +4429,22 @@
                     </a:solidFill>
                     <a:lnL w="6350" cap="flat" cmpd="sng" algn="ctr">
                       <a:solidFill>
-                        <a:srgbClr val="BDBDBD"/>
-                      </a:solidFill>
-                    </a:lnL>
-                    <a:lnR w="6350" cap="flat" cmpd="sng" algn="ctr">
-                      <a:solidFill>
-                        <a:srgbClr val="BDBDBD"/>
-                      </a:solidFill>
-                    </a:lnR>
-                    <a:lnT w="6350" cap="flat" cmpd="sng" algn="ctr">
-                      <a:solidFill>
-                        <a:srgbClr val="BDBDBD"/>
-                      </a:solidFill>
-                    </a:lnT>
-                    <a:lnB w="6350" cap="flat" cmpd="sng" algn="ctr">
-                      <a:solidFill>
-                        <a:srgbClr val="BDBDBD"/>
+                        <a:srgbClr val="808080"/>
+                      </a:solidFill>
+                    </a:lnL>
+                    <a:lnR w="6350" cap="flat" cmpd="sng" algn="ctr">
+                      <a:solidFill>
+                        <a:srgbClr val="808080"/>
+                      </a:solidFill>
+                    </a:lnR>
+                    <a:lnT w="6350" cap="flat" cmpd="sng" algn="ctr">
+                      <a:solidFill>
+                        <a:srgbClr val="808080"/>
+                      </a:solidFill>
+                    </a:lnT>
+                    <a:lnB w="6350" cap="flat" cmpd="sng" algn="ctr">
+                      <a:solidFill>
+                        <a:srgbClr val="808080"/>
                       </a:solidFill>
                     </a:lnB>
                   </a:tcPr>
@@ -4472,22 +4472,22 @@
                     </a:solidFill>
                     <a:lnL w="6350" cap="flat" cmpd="sng" algn="ctr">
                       <a:solidFill>
-                        <a:srgbClr val="BDBDBD"/>
-                      </a:solidFill>
-                    </a:lnL>
-                    <a:lnR w="6350" cap="flat" cmpd="sng" algn="ctr">
-                      <a:solidFill>
-                        <a:srgbClr val="BDBDBD"/>
-                      </a:solidFill>
-                    </a:lnR>
-                    <a:lnT w="6350" cap="flat" cmpd="sng" algn="ctr">
-                      <a:solidFill>
-                        <a:srgbClr val="BDBDBD"/>
-                      </a:solidFill>
-                    </a:lnT>
-                    <a:lnB w="6350" cap="flat" cmpd="sng" algn="ctr">
-                      <a:solidFill>
-                        <a:srgbClr val="BDBDBD"/>
+                        <a:srgbClr val="808080"/>
+                      </a:solidFill>
+                    </a:lnL>
+                    <a:lnR w="6350" cap="flat" cmpd="sng" algn="ctr">
+                      <a:solidFill>
+                        <a:srgbClr val="808080"/>
+                      </a:solidFill>
+                    </a:lnR>
+                    <a:lnT w="6350" cap="flat" cmpd="sng" algn="ctr">
+                      <a:solidFill>
+                        <a:srgbClr val="808080"/>
+                      </a:solidFill>
+                    </a:lnT>
+                    <a:lnB w="6350" cap="flat" cmpd="sng" algn="ctr">
+                      <a:solidFill>
+                        <a:srgbClr val="808080"/>
                       </a:solidFill>
                     </a:lnB>
                   </a:tcPr>
@@ -4517,22 +4517,22 @@
                     </a:solidFill>
                     <a:lnL w="6350" cap="flat" cmpd="sng" algn="ctr">
                       <a:solidFill>
-                        <a:srgbClr val="BDBDBD"/>
-                      </a:solidFill>
-                    </a:lnL>
-                    <a:lnR w="6350" cap="flat" cmpd="sng" algn="ctr">
-                      <a:solidFill>
-                        <a:srgbClr val="BDBDBD"/>
-                      </a:solidFill>
-                    </a:lnR>
-                    <a:lnT w="6350" cap="flat" cmpd="sng" algn="ctr">
-                      <a:solidFill>
-                        <a:srgbClr val="BDBDBD"/>
-                      </a:solidFill>
-                    </a:lnT>
-                    <a:lnB w="6350" cap="flat" cmpd="sng" algn="ctr">
-                      <a:solidFill>
-                        <a:srgbClr val="BDBDBD"/>
+                        <a:srgbClr val="808080"/>
+                      </a:solidFill>
+                    </a:lnL>
+                    <a:lnR w="6350" cap="flat" cmpd="sng" algn="ctr">
+                      <a:solidFill>
+                        <a:srgbClr val="808080"/>
+                      </a:solidFill>
+                    </a:lnR>
+                    <a:lnT w="6350" cap="flat" cmpd="sng" algn="ctr">
+                      <a:solidFill>
+                        <a:srgbClr val="808080"/>
+                      </a:solidFill>
+                    </a:lnT>
+                    <a:lnB w="6350" cap="flat" cmpd="sng" algn="ctr">
+                      <a:solidFill>
+                        <a:srgbClr val="808080"/>
                       </a:solidFill>
                     </a:lnB>
                   </a:tcPr>
@@ -4560,22 +4560,22 @@
                     </a:solidFill>
                     <a:lnL w="6350" cap="flat" cmpd="sng" algn="ctr">
                       <a:solidFill>
-                        <a:srgbClr val="BDBDBD"/>
-                      </a:solidFill>
-                    </a:lnL>
-                    <a:lnR w="6350" cap="flat" cmpd="sng" algn="ctr">
-                      <a:solidFill>
-                        <a:srgbClr val="BDBDBD"/>
-                      </a:solidFill>
-                    </a:lnR>
-                    <a:lnT w="6350" cap="flat" cmpd="sng" algn="ctr">
-                      <a:solidFill>
-                        <a:srgbClr val="BDBDBD"/>
-                      </a:solidFill>
-                    </a:lnT>
-                    <a:lnB w="6350" cap="flat" cmpd="sng" algn="ctr">
-                      <a:solidFill>
-                        <a:srgbClr val="BDBDBD"/>
+                        <a:srgbClr val="808080"/>
+                      </a:solidFill>
+                    </a:lnL>
+                    <a:lnR w="6350" cap="flat" cmpd="sng" algn="ctr">
+                      <a:solidFill>
+                        <a:srgbClr val="808080"/>
+                      </a:solidFill>
+                    </a:lnR>
+                    <a:lnT w="6350" cap="flat" cmpd="sng" algn="ctr">
+                      <a:solidFill>
+                        <a:srgbClr val="808080"/>
+                      </a:solidFill>
+                    </a:lnT>
+                    <a:lnB w="6350" cap="flat" cmpd="sng" algn="ctr">
+                      <a:solidFill>
+                        <a:srgbClr val="808080"/>
                       </a:solidFill>
                     </a:lnB>
                   </a:tcPr>
@@ -4641,7 +4641,7 @@
           </a:solidFill>
           <a:ln w="19050">
             <a:solidFill>
-              <a:srgbClr val="BDBDBD"/>
+              <a:srgbClr val="808080"/>
             </a:solidFill>
           </a:ln>
         </p:spPr>
@@ -4721,7 +4721,7 @@
           </a:solidFill>
           <a:ln w="19050">
             <a:solidFill>
-              <a:srgbClr val="BDBDBD"/>
+              <a:srgbClr val="808080"/>
             </a:solidFill>
           </a:ln>
         </p:spPr>
@@ -4801,7 +4801,7 @@
           </a:solidFill>
           <a:ln w="19050">
             <a:solidFill>
-              <a:srgbClr val="BDBDBD"/>
+              <a:srgbClr val="808080"/>
             </a:solidFill>
           </a:ln>
         </p:spPr>
@@ -4881,7 +4881,7 @@
           </a:solidFill>
           <a:ln w="19050">
             <a:solidFill>
-              <a:srgbClr val="BDBDBD"/>
+              <a:srgbClr val="808080"/>
             </a:solidFill>
           </a:ln>
         </p:spPr>
@@ -4961,7 +4961,7 @@
           </a:solidFill>
           <a:ln w="19050">
             <a:solidFill>
-              <a:srgbClr val="BDBDBD"/>
+              <a:srgbClr val="808080"/>
             </a:solidFill>
           </a:ln>
         </p:spPr>
@@ -5321,22 +5321,22 @@
                     </a:solidFill>
                     <a:lnL w="6350" cap="flat" cmpd="sng" algn="ctr">
                       <a:solidFill>
-                        <a:srgbClr val="BDBDBD"/>
-                      </a:solidFill>
-                    </a:lnL>
-                    <a:lnR w="6350" cap="flat" cmpd="sng" algn="ctr">
-                      <a:solidFill>
-                        <a:srgbClr val="BDBDBD"/>
-                      </a:solidFill>
-                    </a:lnR>
-                    <a:lnT w="6350" cap="flat" cmpd="sng" algn="ctr">
-                      <a:solidFill>
-                        <a:srgbClr val="BDBDBD"/>
-                      </a:solidFill>
-                    </a:lnT>
-                    <a:lnB w="6350" cap="flat" cmpd="sng" algn="ctr">
-                      <a:solidFill>
-                        <a:srgbClr val="BDBDBD"/>
+                        <a:srgbClr val="808080"/>
+                      </a:solidFill>
+                    </a:lnL>
+                    <a:lnR w="6350" cap="flat" cmpd="sng" algn="ctr">
+                      <a:solidFill>
+                        <a:srgbClr val="808080"/>
+                      </a:solidFill>
+                    </a:lnR>
+                    <a:lnT w="6350" cap="flat" cmpd="sng" algn="ctr">
+                      <a:solidFill>
+                        <a:srgbClr val="808080"/>
+                      </a:solidFill>
+                    </a:lnT>
+                    <a:lnB w="6350" cap="flat" cmpd="sng" algn="ctr">
+                      <a:solidFill>
+                        <a:srgbClr val="808080"/>
                       </a:solidFill>
                     </a:lnB>
                   </a:tcPr>
@@ -5364,22 +5364,22 @@
                     </a:solidFill>
                     <a:lnL w="6350" cap="flat" cmpd="sng" algn="ctr">
                       <a:solidFill>
-                        <a:srgbClr val="BDBDBD"/>
-                      </a:solidFill>
-                    </a:lnL>
-                    <a:lnR w="6350" cap="flat" cmpd="sng" algn="ctr">
-                      <a:solidFill>
-                        <a:srgbClr val="BDBDBD"/>
-                      </a:solidFill>
-                    </a:lnR>
-                    <a:lnT w="6350" cap="flat" cmpd="sng" algn="ctr">
-                      <a:solidFill>
-                        <a:srgbClr val="BDBDBD"/>
-                      </a:solidFill>
-                    </a:lnT>
-                    <a:lnB w="6350" cap="flat" cmpd="sng" algn="ctr">
-                      <a:solidFill>
-                        <a:srgbClr val="BDBDBD"/>
+                        <a:srgbClr val="808080"/>
+                      </a:solidFill>
+                    </a:lnL>
+                    <a:lnR w="6350" cap="flat" cmpd="sng" algn="ctr">
+                      <a:solidFill>
+                        <a:srgbClr val="808080"/>
+                      </a:solidFill>
+                    </a:lnR>
+                    <a:lnT w="6350" cap="flat" cmpd="sng" algn="ctr">
+                      <a:solidFill>
+                        <a:srgbClr val="808080"/>
+                      </a:solidFill>
+                    </a:lnT>
+                    <a:lnB w="6350" cap="flat" cmpd="sng" algn="ctr">
+                      <a:solidFill>
+                        <a:srgbClr val="808080"/>
                       </a:solidFill>
                     </a:lnB>
                   </a:tcPr>
@@ -5409,22 +5409,22 @@
                     </a:solidFill>
                     <a:lnL w="6350" cap="flat" cmpd="sng" algn="ctr">
                       <a:solidFill>
-                        <a:srgbClr val="BDBDBD"/>
-                      </a:solidFill>
-                    </a:lnL>
-                    <a:lnR w="6350" cap="flat" cmpd="sng" algn="ctr">
-                      <a:solidFill>
-                        <a:srgbClr val="BDBDBD"/>
-                      </a:solidFill>
-                    </a:lnR>
-                    <a:lnT w="6350" cap="flat" cmpd="sng" algn="ctr">
-                      <a:solidFill>
-                        <a:srgbClr val="BDBDBD"/>
-                      </a:solidFill>
-                    </a:lnT>
-                    <a:lnB w="6350" cap="flat" cmpd="sng" algn="ctr">
-                      <a:solidFill>
-                        <a:srgbClr val="BDBDBD"/>
+                        <a:srgbClr val="808080"/>
+                      </a:solidFill>
+                    </a:lnL>
+                    <a:lnR w="6350" cap="flat" cmpd="sng" algn="ctr">
+                      <a:solidFill>
+                        <a:srgbClr val="808080"/>
+                      </a:solidFill>
+                    </a:lnR>
+                    <a:lnT w="6350" cap="flat" cmpd="sng" algn="ctr">
+                      <a:solidFill>
+                        <a:srgbClr val="808080"/>
+                      </a:solidFill>
+                    </a:lnT>
+                    <a:lnB w="6350" cap="flat" cmpd="sng" algn="ctr">
+                      <a:solidFill>
+                        <a:srgbClr val="808080"/>
                       </a:solidFill>
                     </a:lnB>
                   </a:tcPr>
@@ -5452,22 +5452,22 @@
                     </a:solidFill>
                     <a:lnL w="6350" cap="flat" cmpd="sng" algn="ctr">
                       <a:solidFill>
-                        <a:srgbClr val="BDBDBD"/>
-                      </a:solidFill>
-                    </a:lnL>
-                    <a:lnR w="6350" cap="flat" cmpd="sng" algn="ctr">
-                      <a:solidFill>
-                        <a:srgbClr val="BDBDBD"/>
-                      </a:solidFill>
-                    </a:lnR>
-                    <a:lnT w="6350" cap="flat" cmpd="sng" algn="ctr">
-                      <a:solidFill>
-                        <a:srgbClr val="BDBDBD"/>
-                      </a:solidFill>
-                    </a:lnT>
-                    <a:lnB w="6350" cap="flat" cmpd="sng" algn="ctr">
-                      <a:solidFill>
-                        <a:srgbClr val="BDBDBD"/>
+                        <a:srgbClr val="808080"/>
+                      </a:solidFill>
+                    </a:lnL>
+                    <a:lnR w="6350" cap="flat" cmpd="sng" algn="ctr">
+                      <a:solidFill>
+                        <a:srgbClr val="808080"/>
+                      </a:solidFill>
+                    </a:lnR>
+                    <a:lnT w="6350" cap="flat" cmpd="sng" algn="ctr">
+                      <a:solidFill>
+                        <a:srgbClr val="808080"/>
+                      </a:solidFill>
+                    </a:lnT>
+                    <a:lnB w="6350" cap="flat" cmpd="sng" algn="ctr">
+                      <a:solidFill>
+                        <a:srgbClr val="808080"/>
                       </a:solidFill>
                     </a:lnB>
                   </a:tcPr>
@@ -5497,22 +5497,22 @@
                     </a:solidFill>
                     <a:lnL w="6350" cap="flat" cmpd="sng" algn="ctr">
                       <a:solidFill>
-                        <a:srgbClr val="BDBDBD"/>
-                      </a:solidFill>
-                    </a:lnL>
-                    <a:lnR w="6350" cap="flat" cmpd="sng" algn="ctr">
-                      <a:solidFill>
-                        <a:srgbClr val="BDBDBD"/>
-                      </a:solidFill>
-                    </a:lnR>
-                    <a:lnT w="6350" cap="flat" cmpd="sng" algn="ctr">
-                      <a:solidFill>
-                        <a:srgbClr val="BDBDBD"/>
-                      </a:solidFill>
-                    </a:lnT>
-                    <a:lnB w="6350" cap="flat" cmpd="sng" algn="ctr">
-                      <a:solidFill>
-                        <a:srgbClr val="BDBDBD"/>
+                        <a:srgbClr val="808080"/>
+                      </a:solidFill>
+                    </a:lnL>
+                    <a:lnR w="6350" cap="flat" cmpd="sng" algn="ctr">
+                      <a:solidFill>
+                        <a:srgbClr val="808080"/>
+                      </a:solidFill>
+                    </a:lnR>
+                    <a:lnT w="6350" cap="flat" cmpd="sng" algn="ctr">
+                      <a:solidFill>
+                        <a:srgbClr val="808080"/>
+                      </a:solidFill>
+                    </a:lnT>
+                    <a:lnB w="6350" cap="flat" cmpd="sng" algn="ctr">
+                      <a:solidFill>
+                        <a:srgbClr val="808080"/>
                       </a:solidFill>
                     </a:lnB>
                   </a:tcPr>
@@ -5540,22 +5540,22 @@
                     </a:solidFill>
                     <a:lnL w="6350" cap="flat" cmpd="sng" algn="ctr">
                       <a:solidFill>
-                        <a:srgbClr val="BDBDBD"/>
-                      </a:solidFill>
-                    </a:lnL>
-                    <a:lnR w="6350" cap="flat" cmpd="sng" algn="ctr">
-                      <a:solidFill>
-                        <a:srgbClr val="BDBDBD"/>
-                      </a:solidFill>
-                    </a:lnR>
-                    <a:lnT w="6350" cap="flat" cmpd="sng" algn="ctr">
-                      <a:solidFill>
-                        <a:srgbClr val="BDBDBD"/>
-                      </a:solidFill>
-                    </a:lnT>
-                    <a:lnB w="6350" cap="flat" cmpd="sng" algn="ctr">
-                      <a:solidFill>
-                        <a:srgbClr val="BDBDBD"/>
+                        <a:srgbClr val="808080"/>
+                      </a:solidFill>
+                    </a:lnL>
+                    <a:lnR w="6350" cap="flat" cmpd="sng" algn="ctr">
+                      <a:solidFill>
+                        <a:srgbClr val="808080"/>
+                      </a:solidFill>
+                    </a:lnR>
+                    <a:lnT w="6350" cap="flat" cmpd="sng" algn="ctr">
+                      <a:solidFill>
+                        <a:srgbClr val="808080"/>
+                      </a:solidFill>
+                    </a:lnT>
+                    <a:lnB w="6350" cap="flat" cmpd="sng" algn="ctr">
+                      <a:solidFill>
+                        <a:srgbClr val="808080"/>
                       </a:solidFill>
                     </a:lnB>
                   </a:tcPr>
@@ -5585,22 +5585,22 @@
                     </a:solidFill>
                     <a:lnL w="6350" cap="flat" cmpd="sng" algn="ctr">
                       <a:solidFill>
-                        <a:srgbClr val="BDBDBD"/>
-                      </a:solidFill>
-                    </a:lnL>
-                    <a:lnR w="6350" cap="flat" cmpd="sng" algn="ctr">
-                      <a:solidFill>
-                        <a:srgbClr val="BDBDBD"/>
-                      </a:solidFill>
-                    </a:lnR>
-                    <a:lnT w="6350" cap="flat" cmpd="sng" algn="ctr">
-                      <a:solidFill>
-                        <a:srgbClr val="BDBDBD"/>
-                      </a:solidFill>
-                    </a:lnT>
-                    <a:lnB w="6350" cap="flat" cmpd="sng" algn="ctr">
-                      <a:solidFill>
-                        <a:srgbClr val="BDBDBD"/>
+                        <a:srgbClr val="808080"/>
+                      </a:solidFill>
+                    </a:lnL>
+                    <a:lnR w="6350" cap="flat" cmpd="sng" algn="ctr">
+                      <a:solidFill>
+                        <a:srgbClr val="808080"/>
+                      </a:solidFill>
+                    </a:lnR>
+                    <a:lnT w="6350" cap="flat" cmpd="sng" algn="ctr">
+                      <a:solidFill>
+                        <a:srgbClr val="808080"/>
+                      </a:solidFill>
+                    </a:lnT>
+                    <a:lnB w="6350" cap="flat" cmpd="sng" algn="ctr">
+                      <a:solidFill>
+                        <a:srgbClr val="808080"/>
                       </a:solidFill>
                     </a:lnB>
                   </a:tcPr>
@@ -5628,22 +5628,22 @@
                     </a:solidFill>
                     <a:lnL w="6350" cap="flat" cmpd="sng" algn="ctr">
                       <a:solidFill>
-                        <a:srgbClr val="BDBDBD"/>
-                      </a:solidFill>
-                    </a:lnL>
-                    <a:lnR w="6350" cap="flat" cmpd="sng" algn="ctr">
-                      <a:solidFill>
-                        <a:srgbClr val="BDBDBD"/>
-                      </a:solidFill>
-                    </a:lnR>
-                    <a:lnT w="6350" cap="flat" cmpd="sng" algn="ctr">
-                      <a:solidFill>
-                        <a:srgbClr val="BDBDBD"/>
-                      </a:solidFill>
-                    </a:lnT>
-                    <a:lnB w="6350" cap="flat" cmpd="sng" algn="ctr">
-                      <a:solidFill>
-                        <a:srgbClr val="BDBDBD"/>
+                        <a:srgbClr val="808080"/>
+                      </a:solidFill>
+                    </a:lnL>
+                    <a:lnR w="6350" cap="flat" cmpd="sng" algn="ctr">
+                      <a:solidFill>
+                        <a:srgbClr val="808080"/>
+                      </a:solidFill>
+                    </a:lnR>
+                    <a:lnT w="6350" cap="flat" cmpd="sng" algn="ctr">
+                      <a:solidFill>
+                        <a:srgbClr val="808080"/>
+                      </a:solidFill>
+                    </a:lnT>
+                    <a:lnB w="6350" cap="flat" cmpd="sng" algn="ctr">
+                      <a:solidFill>
+                        <a:srgbClr val="808080"/>
                       </a:solidFill>
                     </a:lnB>
                   </a:tcPr>
@@ -5673,22 +5673,22 @@
                     </a:solidFill>
                     <a:lnL w="6350" cap="flat" cmpd="sng" algn="ctr">
                       <a:solidFill>
-                        <a:srgbClr val="BDBDBD"/>
-                      </a:solidFill>
-                    </a:lnL>
-                    <a:lnR w="6350" cap="flat" cmpd="sng" algn="ctr">
-                      <a:solidFill>
-                        <a:srgbClr val="BDBDBD"/>
-                      </a:solidFill>
-                    </a:lnR>
-                    <a:lnT w="6350" cap="flat" cmpd="sng" algn="ctr">
-                      <a:solidFill>
-                        <a:srgbClr val="BDBDBD"/>
-                      </a:solidFill>
-                    </a:lnT>
-                    <a:lnB w="6350" cap="flat" cmpd="sng" algn="ctr">
-                      <a:solidFill>
-                        <a:srgbClr val="BDBDBD"/>
+                        <a:srgbClr val="808080"/>
+                      </a:solidFill>
+                    </a:lnL>
+                    <a:lnR w="6350" cap="flat" cmpd="sng" algn="ctr">
+                      <a:solidFill>
+                        <a:srgbClr val="808080"/>
+                      </a:solidFill>
+                    </a:lnR>
+                    <a:lnT w="6350" cap="flat" cmpd="sng" algn="ctr">
+                      <a:solidFill>
+                        <a:srgbClr val="808080"/>
+                      </a:solidFill>
+                    </a:lnT>
+                    <a:lnB w="6350" cap="flat" cmpd="sng" algn="ctr">
+                      <a:solidFill>
+                        <a:srgbClr val="808080"/>
                       </a:solidFill>
                     </a:lnB>
                   </a:tcPr>
@@ -5716,22 +5716,22 @@
                     </a:solidFill>
                     <a:lnL w="6350" cap="flat" cmpd="sng" algn="ctr">
                       <a:solidFill>
-                        <a:srgbClr val="BDBDBD"/>
-                      </a:solidFill>
-                    </a:lnL>
-                    <a:lnR w="6350" cap="flat" cmpd="sng" algn="ctr">
-                      <a:solidFill>
-                        <a:srgbClr val="BDBDBD"/>
-                      </a:solidFill>
-                    </a:lnR>
-                    <a:lnT w="6350" cap="flat" cmpd="sng" algn="ctr">
-                      <a:solidFill>
-                        <a:srgbClr val="BDBDBD"/>
-                      </a:solidFill>
-                    </a:lnT>
-                    <a:lnB w="6350" cap="flat" cmpd="sng" algn="ctr">
-                      <a:solidFill>
-                        <a:srgbClr val="BDBDBD"/>
+                        <a:srgbClr val="808080"/>
+                      </a:solidFill>
+                    </a:lnL>
+                    <a:lnR w="6350" cap="flat" cmpd="sng" algn="ctr">
+                      <a:solidFill>
+                        <a:srgbClr val="808080"/>
+                      </a:solidFill>
+                    </a:lnR>
+                    <a:lnT w="6350" cap="flat" cmpd="sng" algn="ctr">
+                      <a:solidFill>
+                        <a:srgbClr val="808080"/>
+                      </a:solidFill>
+                    </a:lnT>
+                    <a:lnB w="6350" cap="flat" cmpd="sng" algn="ctr">
+                      <a:solidFill>
+                        <a:srgbClr val="808080"/>
                       </a:solidFill>
                     </a:lnB>
                   </a:tcPr>
@@ -5761,22 +5761,22 @@
                     </a:solidFill>
                     <a:lnL w="6350" cap="flat" cmpd="sng" algn="ctr">
                       <a:solidFill>
-                        <a:srgbClr val="BDBDBD"/>
-                      </a:solidFill>
-                    </a:lnL>
-                    <a:lnR w="6350" cap="flat" cmpd="sng" algn="ctr">
-                      <a:solidFill>
-                        <a:srgbClr val="BDBDBD"/>
-                      </a:solidFill>
-                    </a:lnR>
-                    <a:lnT w="6350" cap="flat" cmpd="sng" algn="ctr">
-                      <a:solidFill>
-                        <a:srgbClr val="BDBDBD"/>
-                      </a:solidFill>
-                    </a:lnT>
-                    <a:lnB w="6350" cap="flat" cmpd="sng" algn="ctr">
-                      <a:solidFill>
-                        <a:srgbClr val="BDBDBD"/>
+                        <a:srgbClr val="808080"/>
+                      </a:solidFill>
+                    </a:lnL>
+                    <a:lnR w="6350" cap="flat" cmpd="sng" algn="ctr">
+                      <a:solidFill>
+                        <a:srgbClr val="808080"/>
+                      </a:solidFill>
+                    </a:lnR>
+                    <a:lnT w="6350" cap="flat" cmpd="sng" algn="ctr">
+                      <a:solidFill>
+                        <a:srgbClr val="808080"/>
+                      </a:solidFill>
+                    </a:lnT>
+                    <a:lnB w="6350" cap="flat" cmpd="sng" algn="ctr">
+                      <a:solidFill>
+                        <a:srgbClr val="808080"/>
                       </a:solidFill>
                     </a:lnB>
                   </a:tcPr>
@@ -5804,22 +5804,22 @@
                     </a:solidFill>
                     <a:lnL w="6350" cap="flat" cmpd="sng" algn="ctr">
                       <a:solidFill>
-                        <a:srgbClr val="BDBDBD"/>
-                      </a:solidFill>
-                    </a:lnL>
-                    <a:lnR w="6350" cap="flat" cmpd="sng" algn="ctr">
-                      <a:solidFill>
-                        <a:srgbClr val="BDBDBD"/>
-                      </a:solidFill>
-                    </a:lnR>
-                    <a:lnT w="6350" cap="flat" cmpd="sng" algn="ctr">
-                      <a:solidFill>
-                        <a:srgbClr val="BDBDBD"/>
-                      </a:solidFill>
-                    </a:lnT>
-                    <a:lnB w="6350" cap="flat" cmpd="sng" algn="ctr">
-                      <a:solidFill>
-                        <a:srgbClr val="BDBDBD"/>
+                        <a:srgbClr val="808080"/>
+                      </a:solidFill>
+                    </a:lnL>
+                    <a:lnR w="6350" cap="flat" cmpd="sng" algn="ctr">
+                      <a:solidFill>
+                        <a:srgbClr val="808080"/>
+                      </a:solidFill>
+                    </a:lnR>
+                    <a:lnT w="6350" cap="flat" cmpd="sng" algn="ctr">
+                      <a:solidFill>
+                        <a:srgbClr val="808080"/>
+                      </a:solidFill>
+                    </a:lnT>
+                    <a:lnB w="6350" cap="flat" cmpd="sng" algn="ctr">
+                      <a:solidFill>
+                        <a:srgbClr val="808080"/>
                       </a:solidFill>
                     </a:lnB>
                   </a:tcPr>
@@ -5910,22 +5910,22 @@
                     </a:solidFill>
                     <a:lnL w="6350" cap="flat" cmpd="sng" algn="ctr">
                       <a:solidFill>
-                        <a:srgbClr val="BDBDBD"/>
-                      </a:solidFill>
-                    </a:lnL>
-                    <a:lnR w="6350" cap="flat" cmpd="sng" algn="ctr">
-                      <a:solidFill>
-                        <a:srgbClr val="BDBDBD"/>
-                      </a:solidFill>
-                    </a:lnR>
-                    <a:lnT w="6350" cap="flat" cmpd="sng" algn="ctr">
-                      <a:solidFill>
-                        <a:srgbClr val="BDBDBD"/>
-                      </a:solidFill>
-                    </a:lnT>
-                    <a:lnB w="6350" cap="flat" cmpd="sng" algn="ctr">
-                      <a:solidFill>
-                        <a:srgbClr val="BDBDBD"/>
+                        <a:srgbClr val="808080"/>
+                      </a:solidFill>
+                    </a:lnL>
+                    <a:lnR w="6350" cap="flat" cmpd="sng" algn="ctr">
+                      <a:solidFill>
+                        <a:srgbClr val="808080"/>
+                      </a:solidFill>
+                    </a:lnR>
+                    <a:lnT w="6350" cap="flat" cmpd="sng" algn="ctr">
+                      <a:solidFill>
+                        <a:srgbClr val="808080"/>
+                      </a:solidFill>
+                    </a:lnT>
+                    <a:lnB w="6350" cap="flat" cmpd="sng" algn="ctr">
+                      <a:solidFill>
+                        <a:srgbClr val="808080"/>
                       </a:solidFill>
                     </a:lnB>
                   </a:tcPr>
@@ -5953,22 +5953,22 @@
                     </a:solidFill>
                     <a:lnL w="6350" cap="flat" cmpd="sng" algn="ctr">
                       <a:solidFill>
-                        <a:srgbClr val="BDBDBD"/>
-                      </a:solidFill>
-                    </a:lnL>
-                    <a:lnR w="6350" cap="flat" cmpd="sng" algn="ctr">
-                      <a:solidFill>
-                        <a:srgbClr val="BDBDBD"/>
-                      </a:solidFill>
-                    </a:lnR>
-                    <a:lnT w="6350" cap="flat" cmpd="sng" algn="ctr">
-                      <a:solidFill>
-                        <a:srgbClr val="BDBDBD"/>
-                      </a:solidFill>
-                    </a:lnT>
-                    <a:lnB w="6350" cap="flat" cmpd="sng" algn="ctr">
-                      <a:solidFill>
-                        <a:srgbClr val="BDBDBD"/>
+                        <a:srgbClr val="808080"/>
+                      </a:solidFill>
+                    </a:lnL>
+                    <a:lnR w="6350" cap="flat" cmpd="sng" algn="ctr">
+                      <a:solidFill>
+                        <a:srgbClr val="808080"/>
+                      </a:solidFill>
+                    </a:lnR>
+                    <a:lnT w="6350" cap="flat" cmpd="sng" algn="ctr">
+                      <a:solidFill>
+                        <a:srgbClr val="808080"/>
+                      </a:solidFill>
+                    </a:lnT>
+                    <a:lnB w="6350" cap="flat" cmpd="sng" algn="ctr">
+                      <a:solidFill>
+                        <a:srgbClr val="808080"/>
                       </a:solidFill>
                     </a:lnB>
                   </a:tcPr>
@@ -5998,22 +5998,22 @@
                     </a:solidFill>
                     <a:lnL w="6350" cap="flat" cmpd="sng" algn="ctr">
                       <a:solidFill>
-                        <a:srgbClr val="BDBDBD"/>
-                      </a:solidFill>
-                    </a:lnL>
-                    <a:lnR w="6350" cap="flat" cmpd="sng" algn="ctr">
-                      <a:solidFill>
-                        <a:srgbClr val="BDBDBD"/>
-                      </a:solidFill>
-                    </a:lnR>
-                    <a:lnT w="6350" cap="flat" cmpd="sng" algn="ctr">
-                      <a:solidFill>
-                        <a:srgbClr val="BDBDBD"/>
-                      </a:solidFill>
-                    </a:lnT>
-                    <a:lnB w="6350" cap="flat" cmpd="sng" algn="ctr">
-                      <a:solidFill>
-                        <a:srgbClr val="BDBDBD"/>
+                        <a:srgbClr val="808080"/>
+                      </a:solidFill>
+                    </a:lnL>
+                    <a:lnR w="6350" cap="flat" cmpd="sng" algn="ctr">
+                      <a:solidFill>
+                        <a:srgbClr val="808080"/>
+                      </a:solidFill>
+                    </a:lnR>
+                    <a:lnT w="6350" cap="flat" cmpd="sng" algn="ctr">
+                      <a:solidFill>
+                        <a:srgbClr val="808080"/>
+                      </a:solidFill>
+                    </a:lnT>
+                    <a:lnB w="6350" cap="flat" cmpd="sng" algn="ctr">
+                      <a:solidFill>
+                        <a:srgbClr val="808080"/>
                       </a:solidFill>
                     </a:lnB>
                   </a:tcPr>
@@ -6041,22 +6041,22 @@
                     </a:solidFill>
                     <a:lnL w="6350" cap="flat" cmpd="sng" algn="ctr">
                       <a:solidFill>
-                        <a:srgbClr val="BDBDBD"/>
-                      </a:solidFill>
-                    </a:lnL>
-                    <a:lnR w="6350" cap="flat" cmpd="sng" algn="ctr">
-                      <a:solidFill>
-                        <a:srgbClr val="BDBDBD"/>
-                      </a:solidFill>
-                    </a:lnR>
-                    <a:lnT w="6350" cap="flat" cmpd="sng" algn="ctr">
-                      <a:solidFill>
-                        <a:srgbClr val="BDBDBD"/>
-                      </a:solidFill>
-                    </a:lnT>
-                    <a:lnB w="6350" cap="flat" cmpd="sng" algn="ctr">
-                      <a:solidFill>
-                        <a:srgbClr val="BDBDBD"/>
+                        <a:srgbClr val="808080"/>
+                      </a:solidFill>
+                    </a:lnL>
+                    <a:lnR w="6350" cap="flat" cmpd="sng" algn="ctr">
+                      <a:solidFill>
+                        <a:srgbClr val="808080"/>
+                      </a:solidFill>
+                    </a:lnR>
+                    <a:lnT w="6350" cap="flat" cmpd="sng" algn="ctr">
+                      <a:solidFill>
+                        <a:srgbClr val="808080"/>
+                      </a:solidFill>
+                    </a:lnT>
+                    <a:lnB w="6350" cap="flat" cmpd="sng" algn="ctr">
+                      <a:solidFill>
+                        <a:srgbClr val="808080"/>
                       </a:solidFill>
                     </a:lnB>
                   </a:tcPr>
@@ -6086,22 +6086,22 @@
                     </a:solidFill>
                     <a:lnL w="6350" cap="flat" cmpd="sng" algn="ctr">
                       <a:solidFill>
-                        <a:srgbClr val="BDBDBD"/>
-                      </a:solidFill>
-                    </a:lnL>
-                    <a:lnR w="6350" cap="flat" cmpd="sng" algn="ctr">
-                      <a:solidFill>
-                        <a:srgbClr val="BDBDBD"/>
-                      </a:solidFill>
-                    </a:lnR>
-                    <a:lnT w="6350" cap="flat" cmpd="sng" algn="ctr">
-                      <a:solidFill>
-                        <a:srgbClr val="BDBDBD"/>
-                      </a:solidFill>
-                    </a:lnT>
-                    <a:lnB w="6350" cap="flat" cmpd="sng" algn="ctr">
-                      <a:solidFill>
-                        <a:srgbClr val="BDBDBD"/>
+                        <a:srgbClr val="808080"/>
+                      </a:solidFill>
+                    </a:lnL>
+                    <a:lnR w="6350" cap="flat" cmpd="sng" algn="ctr">
+                      <a:solidFill>
+                        <a:srgbClr val="808080"/>
+                      </a:solidFill>
+                    </a:lnR>
+                    <a:lnT w="6350" cap="flat" cmpd="sng" algn="ctr">
+                      <a:solidFill>
+                        <a:srgbClr val="808080"/>
+                      </a:solidFill>
+                    </a:lnT>
+                    <a:lnB w="6350" cap="flat" cmpd="sng" algn="ctr">
+                      <a:solidFill>
+                        <a:srgbClr val="808080"/>
                       </a:solidFill>
                     </a:lnB>
                   </a:tcPr>
@@ -6129,22 +6129,22 @@
                     </a:solidFill>
                     <a:lnL w="6350" cap="flat" cmpd="sng" algn="ctr">
                       <a:solidFill>
-                        <a:srgbClr val="BDBDBD"/>
-                      </a:solidFill>
-                    </a:lnL>
-                    <a:lnR w="6350" cap="flat" cmpd="sng" algn="ctr">
-                      <a:solidFill>
-                        <a:srgbClr val="BDBDBD"/>
-                      </a:solidFill>
-                    </a:lnR>
-                    <a:lnT w="6350" cap="flat" cmpd="sng" algn="ctr">
-                      <a:solidFill>
-                        <a:srgbClr val="BDBDBD"/>
-                      </a:solidFill>
-                    </a:lnT>
-                    <a:lnB w="6350" cap="flat" cmpd="sng" algn="ctr">
-                      <a:solidFill>
-                        <a:srgbClr val="BDBDBD"/>
+                        <a:srgbClr val="808080"/>
+                      </a:solidFill>
+                    </a:lnL>
+                    <a:lnR w="6350" cap="flat" cmpd="sng" algn="ctr">
+                      <a:solidFill>
+                        <a:srgbClr val="808080"/>
+                      </a:solidFill>
+                    </a:lnR>
+                    <a:lnT w="6350" cap="flat" cmpd="sng" algn="ctr">
+                      <a:solidFill>
+                        <a:srgbClr val="808080"/>
+                      </a:solidFill>
+                    </a:lnT>
+                    <a:lnB w="6350" cap="flat" cmpd="sng" algn="ctr">
+                      <a:solidFill>
+                        <a:srgbClr val="808080"/>
                       </a:solidFill>
                     </a:lnB>
                   </a:tcPr>
@@ -6174,22 +6174,22 @@
                     </a:solidFill>
                     <a:lnL w="6350" cap="flat" cmpd="sng" algn="ctr">
                       <a:solidFill>
-                        <a:srgbClr val="BDBDBD"/>
-                      </a:solidFill>
-                    </a:lnL>
-                    <a:lnR w="6350" cap="flat" cmpd="sng" algn="ctr">
-                      <a:solidFill>
-                        <a:srgbClr val="BDBDBD"/>
-                      </a:solidFill>
-                    </a:lnR>
-                    <a:lnT w="6350" cap="flat" cmpd="sng" algn="ctr">
-                      <a:solidFill>
-                        <a:srgbClr val="BDBDBD"/>
-                      </a:solidFill>
-                    </a:lnT>
-                    <a:lnB w="6350" cap="flat" cmpd="sng" algn="ctr">
-                      <a:solidFill>
-                        <a:srgbClr val="BDBDBD"/>
+                        <a:srgbClr val="808080"/>
+                      </a:solidFill>
+                    </a:lnL>
+                    <a:lnR w="6350" cap="flat" cmpd="sng" algn="ctr">
+                      <a:solidFill>
+                        <a:srgbClr val="808080"/>
+                      </a:solidFill>
+                    </a:lnR>
+                    <a:lnT w="6350" cap="flat" cmpd="sng" algn="ctr">
+                      <a:solidFill>
+                        <a:srgbClr val="808080"/>
+                      </a:solidFill>
+                    </a:lnT>
+                    <a:lnB w="6350" cap="flat" cmpd="sng" algn="ctr">
+                      <a:solidFill>
+                        <a:srgbClr val="808080"/>
                       </a:solidFill>
                     </a:lnB>
                   </a:tcPr>
@@ -6217,22 +6217,22 @@
                     </a:solidFill>
                     <a:lnL w="6350" cap="flat" cmpd="sng" algn="ctr">
                       <a:solidFill>
-                        <a:srgbClr val="BDBDBD"/>
-                      </a:solidFill>
-                    </a:lnL>
-                    <a:lnR w="6350" cap="flat" cmpd="sng" algn="ctr">
-                      <a:solidFill>
-                        <a:srgbClr val="BDBDBD"/>
-                      </a:solidFill>
-                    </a:lnR>
-                    <a:lnT w="6350" cap="flat" cmpd="sng" algn="ctr">
-                      <a:solidFill>
-                        <a:srgbClr val="BDBDBD"/>
-                      </a:solidFill>
-                    </a:lnT>
-                    <a:lnB w="6350" cap="flat" cmpd="sng" algn="ctr">
-                      <a:solidFill>
-                        <a:srgbClr val="BDBDBD"/>
+                        <a:srgbClr val="808080"/>
+                      </a:solidFill>
+                    </a:lnL>
+                    <a:lnR w="6350" cap="flat" cmpd="sng" algn="ctr">
+                      <a:solidFill>
+                        <a:srgbClr val="808080"/>
+                      </a:solidFill>
+                    </a:lnR>
+                    <a:lnT w="6350" cap="flat" cmpd="sng" algn="ctr">
+                      <a:solidFill>
+                        <a:srgbClr val="808080"/>
+                      </a:solidFill>
+                    </a:lnT>
+                    <a:lnB w="6350" cap="flat" cmpd="sng" algn="ctr">
+                      <a:solidFill>
+                        <a:srgbClr val="808080"/>
                       </a:solidFill>
                     </a:lnB>
                   </a:tcPr>
@@ -6262,22 +6262,22 @@
                     </a:solidFill>
                     <a:lnL w="6350" cap="flat" cmpd="sng" algn="ctr">
                       <a:solidFill>
-                        <a:srgbClr val="BDBDBD"/>
-                      </a:solidFill>
-                    </a:lnL>
-                    <a:lnR w="6350" cap="flat" cmpd="sng" algn="ctr">
-                      <a:solidFill>
-                        <a:srgbClr val="BDBDBD"/>
-                      </a:solidFill>
-                    </a:lnR>
-                    <a:lnT w="6350" cap="flat" cmpd="sng" algn="ctr">
-                      <a:solidFill>
-                        <a:srgbClr val="BDBDBD"/>
-                      </a:solidFill>
-                    </a:lnT>
-                    <a:lnB w="6350" cap="flat" cmpd="sng" algn="ctr">
-                      <a:solidFill>
-                        <a:srgbClr val="BDBDBD"/>
+                        <a:srgbClr val="808080"/>
+                      </a:solidFill>
+                    </a:lnL>
+                    <a:lnR w="6350" cap="flat" cmpd="sng" algn="ctr">
+                      <a:solidFill>
+                        <a:srgbClr val="808080"/>
+                      </a:solidFill>
+                    </a:lnR>
+                    <a:lnT w="6350" cap="flat" cmpd="sng" algn="ctr">
+                      <a:solidFill>
+                        <a:srgbClr val="808080"/>
+                      </a:solidFill>
+                    </a:lnT>
+                    <a:lnB w="6350" cap="flat" cmpd="sng" algn="ctr">
+                      <a:solidFill>
+                        <a:srgbClr val="808080"/>
                       </a:solidFill>
                     </a:lnB>
                   </a:tcPr>
@@ -6305,22 +6305,22 @@
                     </a:solidFill>
                     <a:lnL w="6350" cap="flat" cmpd="sng" algn="ctr">
                       <a:solidFill>
-                        <a:srgbClr val="BDBDBD"/>
-                      </a:solidFill>
-                    </a:lnL>
-                    <a:lnR w="6350" cap="flat" cmpd="sng" algn="ctr">
-                      <a:solidFill>
-                        <a:srgbClr val="BDBDBD"/>
-                      </a:solidFill>
-                    </a:lnR>
-                    <a:lnT w="6350" cap="flat" cmpd="sng" algn="ctr">
-                      <a:solidFill>
-                        <a:srgbClr val="BDBDBD"/>
-                      </a:solidFill>
-                    </a:lnT>
-                    <a:lnB w="6350" cap="flat" cmpd="sng" algn="ctr">
-                      <a:solidFill>
-                        <a:srgbClr val="BDBDBD"/>
+                        <a:srgbClr val="808080"/>
+                      </a:solidFill>
+                    </a:lnL>
+                    <a:lnR w="6350" cap="flat" cmpd="sng" algn="ctr">
+                      <a:solidFill>
+                        <a:srgbClr val="808080"/>
+                      </a:solidFill>
+                    </a:lnR>
+                    <a:lnT w="6350" cap="flat" cmpd="sng" algn="ctr">
+                      <a:solidFill>
+                        <a:srgbClr val="808080"/>
+                      </a:solidFill>
+                    </a:lnT>
+                    <a:lnB w="6350" cap="flat" cmpd="sng" algn="ctr">
+                      <a:solidFill>
+                        <a:srgbClr val="808080"/>
                       </a:solidFill>
                     </a:lnB>
                   </a:tcPr>
@@ -6350,22 +6350,22 @@
                     </a:solidFill>
                     <a:lnL w="6350" cap="flat" cmpd="sng" algn="ctr">
                       <a:solidFill>
-                        <a:srgbClr val="BDBDBD"/>
-                      </a:solidFill>
-                    </a:lnL>
-                    <a:lnR w="6350" cap="flat" cmpd="sng" algn="ctr">
-                      <a:solidFill>
-                        <a:srgbClr val="BDBDBD"/>
-                      </a:solidFill>
-                    </a:lnR>
-                    <a:lnT w="6350" cap="flat" cmpd="sng" algn="ctr">
-                      <a:solidFill>
-                        <a:srgbClr val="BDBDBD"/>
-                      </a:solidFill>
-                    </a:lnT>
-                    <a:lnB w="6350" cap="flat" cmpd="sng" algn="ctr">
-                      <a:solidFill>
-                        <a:srgbClr val="BDBDBD"/>
+                        <a:srgbClr val="808080"/>
+                      </a:solidFill>
+                    </a:lnL>
+                    <a:lnR w="6350" cap="flat" cmpd="sng" algn="ctr">
+                      <a:solidFill>
+                        <a:srgbClr val="808080"/>
+                      </a:solidFill>
+                    </a:lnR>
+                    <a:lnT w="6350" cap="flat" cmpd="sng" algn="ctr">
+                      <a:solidFill>
+                        <a:srgbClr val="808080"/>
+                      </a:solidFill>
+                    </a:lnT>
+                    <a:lnB w="6350" cap="flat" cmpd="sng" algn="ctr">
+                      <a:solidFill>
+                        <a:srgbClr val="808080"/>
                       </a:solidFill>
                     </a:lnB>
                   </a:tcPr>
@@ -6393,22 +6393,22 @@
                     </a:solidFill>
                     <a:lnL w="6350" cap="flat" cmpd="sng" algn="ctr">
                       <a:solidFill>
-                        <a:srgbClr val="BDBDBD"/>
-                      </a:solidFill>
-                    </a:lnL>
-                    <a:lnR w="6350" cap="flat" cmpd="sng" algn="ctr">
-                      <a:solidFill>
-                        <a:srgbClr val="BDBDBD"/>
-                      </a:solidFill>
-                    </a:lnR>
-                    <a:lnT w="6350" cap="flat" cmpd="sng" algn="ctr">
-                      <a:solidFill>
-                        <a:srgbClr val="BDBDBD"/>
-                      </a:solidFill>
-                    </a:lnT>
-                    <a:lnB w="6350" cap="flat" cmpd="sng" algn="ctr">
-                      <a:solidFill>
-                        <a:srgbClr val="BDBDBD"/>
+                        <a:srgbClr val="808080"/>
+                      </a:solidFill>
+                    </a:lnL>
+                    <a:lnR w="6350" cap="flat" cmpd="sng" algn="ctr">
+                      <a:solidFill>
+                        <a:srgbClr val="808080"/>
+                      </a:solidFill>
+                    </a:lnR>
+                    <a:lnT w="6350" cap="flat" cmpd="sng" algn="ctr">
+                      <a:solidFill>
+                        <a:srgbClr val="808080"/>
+                      </a:solidFill>
+                    </a:lnT>
+                    <a:lnB w="6350" cap="flat" cmpd="sng" algn="ctr">
+                      <a:solidFill>
+                        <a:srgbClr val="808080"/>
                       </a:solidFill>
                     </a:lnB>
                   </a:tcPr>
@@ -6500,22 +6500,22 @@
                     </a:solidFill>
                     <a:lnL w="6350" cap="flat" cmpd="sng" algn="ctr">
                       <a:solidFill>
-                        <a:srgbClr val="BDBDBD"/>
-                      </a:solidFill>
-                    </a:lnL>
-                    <a:lnR w="6350" cap="flat" cmpd="sng" algn="ctr">
-                      <a:solidFill>
-                        <a:srgbClr val="BDBDBD"/>
-                      </a:solidFill>
-                    </a:lnR>
-                    <a:lnT w="6350" cap="flat" cmpd="sng" algn="ctr">
-                      <a:solidFill>
-                        <a:srgbClr val="BDBDBD"/>
-                      </a:solidFill>
-                    </a:lnT>
-                    <a:lnB w="6350" cap="flat" cmpd="sng" algn="ctr">
-                      <a:solidFill>
-                        <a:srgbClr val="BDBDBD"/>
+                        <a:srgbClr val="808080"/>
+                      </a:solidFill>
+                    </a:lnL>
+                    <a:lnR w="6350" cap="flat" cmpd="sng" algn="ctr">
+                      <a:solidFill>
+                        <a:srgbClr val="808080"/>
+                      </a:solidFill>
+                    </a:lnR>
+                    <a:lnT w="6350" cap="flat" cmpd="sng" algn="ctr">
+                      <a:solidFill>
+                        <a:srgbClr val="808080"/>
+                      </a:solidFill>
+                    </a:lnT>
+                    <a:lnB w="6350" cap="flat" cmpd="sng" algn="ctr">
+                      <a:solidFill>
+                        <a:srgbClr val="808080"/>
                       </a:solidFill>
                     </a:lnB>
                   </a:tcPr>
@@ -6543,22 +6543,22 @@
                     </a:solidFill>
                     <a:lnL w="6350" cap="flat" cmpd="sng" algn="ctr">
                       <a:solidFill>
-                        <a:srgbClr val="BDBDBD"/>
-                      </a:solidFill>
-                    </a:lnL>
-                    <a:lnR w="6350" cap="flat" cmpd="sng" algn="ctr">
-                      <a:solidFill>
-                        <a:srgbClr val="BDBDBD"/>
-                      </a:solidFill>
-                    </a:lnR>
-                    <a:lnT w="6350" cap="flat" cmpd="sng" algn="ctr">
-                      <a:solidFill>
-                        <a:srgbClr val="BDBDBD"/>
-                      </a:solidFill>
-                    </a:lnT>
-                    <a:lnB w="6350" cap="flat" cmpd="sng" algn="ctr">
-                      <a:solidFill>
-                        <a:srgbClr val="BDBDBD"/>
+                        <a:srgbClr val="808080"/>
+                      </a:solidFill>
+                    </a:lnL>
+                    <a:lnR w="6350" cap="flat" cmpd="sng" algn="ctr">
+                      <a:solidFill>
+                        <a:srgbClr val="808080"/>
+                      </a:solidFill>
+                    </a:lnR>
+                    <a:lnT w="6350" cap="flat" cmpd="sng" algn="ctr">
+                      <a:solidFill>
+                        <a:srgbClr val="808080"/>
+                      </a:solidFill>
+                    </a:lnT>
+                    <a:lnB w="6350" cap="flat" cmpd="sng" algn="ctr">
+                      <a:solidFill>
+                        <a:srgbClr val="808080"/>
                       </a:solidFill>
                     </a:lnB>
                   </a:tcPr>
@@ -6586,22 +6586,22 @@
                     </a:solidFill>
                     <a:lnL w="6350" cap="flat" cmpd="sng" algn="ctr">
                       <a:solidFill>
-                        <a:srgbClr val="BDBDBD"/>
-                      </a:solidFill>
-                    </a:lnL>
-                    <a:lnR w="6350" cap="flat" cmpd="sng" algn="ctr">
-                      <a:solidFill>
-                        <a:srgbClr val="BDBDBD"/>
-                      </a:solidFill>
-                    </a:lnR>
-                    <a:lnT w="6350" cap="flat" cmpd="sng" algn="ctr">
-                      <a:solidFill>
-                        <a:srgbClr val="BDBDBD"/>
-                      </a:solidFill>
-                    </a:lnT>
-                    <a:lnB w="6350" cap="flat" cmpd="sng" algn="ctr">
-                      <a:solidFill>
-                        <a:srgbClr val="BDBDBD"/>
+                        <a:srgbClr val="808080"/>
+                      </a:solidFill>
+                    </a:lnL>
+                    <a:lnR w="6350" cap="flat" cmpd="sng" algn="ctr">
+                      <a:solidFill>
+                        <a:srgbClr val="808080"/>
+                      </a:solidFill>
+                    </a:lnR>
+                    <a:lnT w="6350" cap="flat" cmpd="sng" algn="ctr">
+                      <a:solidFill>
+                        <a:srgbClr val="808080"/>
+                      </a:solidFill>
+                    </a:lnT>
+                    <a:lnB w="6350" cap="flat" cmpd="sng" algn="ctr">
+                      <a:solidFill>
+                        <a:srgbClr val="808080"/>
                       </a:solidFill>
                     </a:lnB>
                   </a:tcPr>
@@ -6631,22 +6631,22 @@
                     </a:solidFill>
                     <a:lnL w="6350" cap="flat" cmpd="sng" algn="ctr">
                       <a:solidFill>
-                        <a:srgbClr val="BDBDBD"/>
-                      </a:solidFill>
-                    </a:lnL>
-                    <a:lnR w="6350" cap="flat" cmpd="sng" algn="ctr">
-                      <a:solidFill>
-                        <a:srgbClr val="BDBDBD"/>
-                      </a:solidFill>
-                    </a:lnR>
-                    <a:lnT w="6350" cap="flat" cmpd="sng" algn="ctr">
-                      <a:solidFill>
-                        <a:srgbClr val="BDBDBD"/>
-                      </a:solidFill>
-                    </a:lnT>
-                    <a:lnB w="6350" cap="flat" cmpd="sng" algn="ctr">
-                      <a:solidFill>
-                        <a:srgbClr val="BDBDBD"/>
+                        <a:srgbClr val="808080"/>
+                      </a:solidFill>
+                    </a:lnL>
+                    <a:lnR w="6350" cap="flat" cmpd="sng" algn="ctr">
+                      <a:solidFill>
+                        <a:srgbClr val="808080"/>
+                      </a:solidFill>
+                    </a:lnR>
+                    <a:lnT w="6350" cap="flat" cmpd="sng" algn="ctr">
+                      <a:solidFill>
+                        <a:srgbClr val="808080"/>
+                      </a:solidFill>
+                    </a:lnT>
+                    <a:lnB w="6350" cap="flat" cmpd="sng" algn="ctr">
+                      <a:solidFill>
+                        <a:srgbClr val="808080"/>
                       </a:solidFill>
                     </a:lnB>
                   </a:tcPr>
@@ -6674,22 +6674,22 @@
                     </a:solidFill>
                     <a:lnL w="6350" cap="flat" cmpd="sng" algn="ctr">
                       <a:solidFill>
-                        <a:srgbClr val="BDBDBD"/>
-                      </a:solidFill>
-                    </a:lnL>
-                    <a:lnR w="6350" cap="flat" cmpd="sng" algn="ctr">
-                      <a:solidFill>
-                        <a:srgbClr val="BDBDBD"/>
-                      </a:solidFill>
-                    </a:lnR>
-                    <a:lnT w="6350" cap="flat" cmpd="sng" algn="ctr">
-                      <a:solidFill>
-                        <a:srgbClr val="BDBDBD"/>
-                      </a:solidFill>
-                    </a:lnT>
-                    <a:lnB w="6350" cap="flat" cmpd="sng" algn="ctr">
-                      <a:solidFill>
-                        <a:srgbClr val="BDBDBD"/>
+                        <a:srgbClr val="808080"/>
+                      </a:solidFill>
+                    </a:lnL>
+                    <a:lnR w="6350" cap="flat" cmpd="sng" algn="ctr">
+                      <a:solidFill>
+                        <a:srgbClr val="808080"/>
+                      </a:solidFill>
+                    </a:lnR>
+                    <a:lnT w="6350" cap="flat" cmpd="sng" algn="ctr">
+                      <a:solidFill>
+                        <a:srgbClr val="808080"/>
+                      </a:solidFill>
+                    </a:lnT>
+                    <a:lnB w="6350" cap="flat" cmpd="sng" algn="ctr">
+                      <a:solidFill>
+                        <a:srgbClr val="808080"/>
                       </a:solidFill>
                     </a:lnB>
                   </a:tcPr>
@@ -6717,22 +6717,22 @@
                     </a:solidFill>
                     <a:lnL w="6350" cap="flat" cmpd="sng" algn="ctr">
                       <a:solidFill>
-                        <a:srgbClr val="BDBDBD"/>
-                      </a:solidFill>
-                    </a:lnL>
-                    <a:lnR w="6350" cap="flat" cmpd="sng" algn="ctr">
-                      <a:solidFill>
-                        <a:srgbClr val="BDBDBD"/>
-                      </a:solidFill>
-                    </a:lnR>
-                    <a:lnT w="6350" cap="flat" cmpd="sng" algn="ctr">
-                      <a:solidFill>
-                        <a:srgbClr val="BDBDBD"/>
-                      </a:solidFill>
-                    </a:lnT>
-                    <a:lnB w="6350" cap="flat" cmpd="sng" algn="ctr">
-                      <a:solidFill>
-                        <a:srgbClr val="BDBDBD"/>
+                        <a:srgbClr val="808080"/>
+                      </a:solidFill>
+                    </a:lnL>
+                    <a:lnR w="6350" cap="flat" cmpd="sng" algn="ctr">
+                      <a:solidFill>
+                        <a:srgbClr val="808080"/>
+                      </a:solidFill>
+                    </a:lnR>
+                    <a:lnT w="6350" cap="flat" cmpd="sng" algn="ctr">
+                      <a:solidFill>
+                        <a:srgbClr val="808080"/>
+                      </a:solidFill>
+                    </a:lnT>
+                    <a:lnB w="6350" cap="flat" cmpd="sng" algn="ctr">
+                      <a:solidFill>
+                        <a:srgbClr val="808080"/>
                       </a:solidFill>
                     </a:lnB>
                   </a:tcPr>
@@ -6762,22 +6762,22 @@
                     </a:solidFill>
                     <a:lnL w="6350" cap="flat" cmpd="sng" algn="ctr">
                       <a:solidFill>
-                        <a:srgbClr val="BDBDBD"/>
-                      </a:solidFill>
-                    </a:lnL>
-                    <a:lnR w="6350" cap="flat" cmpd="sng" algn="ctr">
-                      <a:solidFill>
-                        <a:srgbClr val="BDBDBD"/>
-                      </a:solidFill>
-                    </a:lnR>
-                    <a:lnT w="6350" cap="flat" cmpd="sng" algn="ctr">
-                      <a:solidFill>
-                        <a:srgbClr val="BDBDBD"/>
-                      </a:solidFill>
-                    </a:lnT>
-                    <a:lnB w="6350" cap="flat" cmpd="sng" algn="ctr">
-                      <a:solidFill>
-                        <a:srgbClr val="BDBDBD"/>
+                        <a:srgbClr val="808080"/>
+                      </a:solidFill>
+                    </a:lnL>
+                    <a:lnR w="6350" cap="flat" cmpd="sng" algn="ctr">
+                      <a:solidFill>
+                        <a:srgbClr val="808080"/>
+                      </a:solidFill>
+                    </a:lnR>
+                    <a:lnT w="6350" cap="flat" cmpd="sng" algn="ctr">
+                      <a:solidFill>
+                        <a:srgbClr val="808080"/>
+                      </a:solidFill>
+                    </a:lnT>
+                    <a:lnB w="6350" cap="flat" cmpd="sng" algn="ctr">
+                      <a:solidFill>
+                        <a:srgbClr val="808080"/>
                       </a:solidFill>
                     </a:lnB>
                   </a:tcPr>
@@ -6805,22 +6805,22 @@
                     </a:solidFill>
                     <a:lnL w="6350" cap="flat" cmpd="sng" algn="ctr">
                       <a:solidFill>
-                        <a:srgbClr val="BDBDBD"/>
-                      </a:solidFill>
-                    </a:lnL>
-                    <a:lnR w="6350" cap="flat" cmpd="sng" algn="ctr">
-                      <a:solidFill>
-                        <a:srgbClr val="BDBDBD"/>
-                      </a:solidFill>
-                    </a:lnR>
-                    <a:lnT w="6350" cap="flat" cmpd="sng" algn="ctr">
-                      <a:solidFill>
-                        <a:srgbClr val="BDBDBD"/>
-                      </a:solidFill>
-                    </a:lnT>
-                    <a:lnB w="6350" cap="flat" cmpd="sng" algn="ctr">
-                      <a:solidFill>
-                        <a:srgbClr val="BDBDBD"/>
+                        <a:srgbClr val="808080"/>
+                      </a:solidFill>
+                    </a:lnL>
+                    <a:lnR w="6350" cap="flat" cmpd="sng" algn="ctr">
+                      <a:solidFill>
+                        <a:srgbClr val="808080"/>
+                      </a:solidFill>
+                    </a:lnR>
+                    <a:lnT w="6350" cap="flat" cmpd="sng" algn="ctr">
+                      <a:solidFill>
+                        <a:srgbClr val="808080"/>
+                      </a:solidFill>
+                    </a:lnT>
+                    <a:lnB w="6350" cap="flat" cmpd="sng" algn="ctr">
+                      <a:solidFill>
+                        <a:srgbClr val="808080"/>
                       </a:solidFill>
                     </a:lnB>
                   </a:tcPr>
@@ -6848,22 +6848,22 @@
                     </a:solidFill>
                     <a:lnL w="6350" cap="flat" cmpd="sng" algn="ctr">
                       <a:solidFill>
-                        <a:srgbClr val="BDBDBD"/>
-                      </a:solidFill>
-                    </a:lnL>
-                    <a:lnR w="6350" cap="flat" cmpd="sng" algn="ctr">
-                      <a:solidFill>
-                        <a:srgbClr val="BDBDBD"/>
-                      </a:solidFill>
-                    </a:lnR>
-                    <a:lnT w="6350" cap="flat" cmpd="sng" algn="ctr">
-                      <a:solidFill>
-                        <a:srgbClr val="BDBDBD"/>
-                      </a:solidFill>
-                    </a:lnT>
-                    <a:lnB w="6350" cap="flat" cmpd="sng" algn="ctr">
-                      <a:solidFill>
-                        <a:srgbClr val="BDBDBD"/>
+                        <a:srgbClr val="808080"/>
+                      </a:solidFill>
+                    </a:lnL>
+                    <a:lnR w="6350" cap="flat" cmpd="sng" algn="ctr">
+                      <a:solidFill>
+                        <a:srgbClr val="808080"/>
+                      </a:solidFill>
+                    </a:lnR>
+                    <a:lnT w="6350" cap="flat" cmpd="sng" algn="ctr">
+                      <a:solidFill>
+                        <a:srgbClr val="808080"/>
+                      </a:solidFill>
+                    </a:lnT>
+                    <a:lnB w="6350" cap="flat" cmpd="sng" algn="ctr">
+                      <a:solidFill>
+                        <a:srgbClr val="808080"/>
                       </a:solidFill>
                     </a:lnB>
                   </a:tcPr>
@@ -6893,22 +6893,22 @@
                     </a:solidFill>
                     <a:lnL w="6350" cap="flat" cmpd="sng" algn="ctr">
                       <a:solidFill>
-                        <a:srgbClr val="BDBDBD"/>
-                      </a:solidFill>
-                    </a:lnL>
-                    <a:lnR w="6350" cap="flat" cmpd="sng" algn="ctr">
-                      <a:solidFill>
-                        <a:srgbClr val="BDBDBD"/>
-                      </a:solidFill>
-                    </a:lnR>
-                    <a:lnT w="6350" cap="flat" cmpd="sng" algn="ctr">
-                      <a:solidFill>
-                        <a:srgbClr val="BDBDBD"/>
-                      </a:solidFill>
-                    </a:lnT>
-                    <a:lnB w="6350" cap="flat" cmpd="sng" algn="ctr">
-                      <a:solidFill>
-                        <a:srgbClr val="BDBDBD"/>
+                        <a:srgbClr val="808080"/>
+                      </a:solidFill>
+                    </a:lnL>
+                    <a:lnR w="6350" cap="flat" cmpd="sng" algn="ctr">
+                      <a:solidFill>
+                        <a:srgbClr val="808080"/>
+                      </a:solidFill>
+                    </a:lnR>
+                    <a:lnT w="6350" cap="flat" cmpd="sng" algn="ctr">
+                      <a:solidFill>
+                        <a:srgbClr val="808080"/>
+                      </a:solidFill>
+                    </a:lnT>
+                    <a:lnB w="6350" cap="flat" cmpd="sng" algn="ctr">
+                      <a:solidFill>
+                        <a:srgbClr val="808080"/>
                       </a:solidFill>
                     </a:lnB>
                   </a:tcPr>
@@ -6936,22 +6936,22 @@
                     </a:solidFill>
                     <a:lnL w="6350" cap="flat" cmpd="sng" algn="ctr">
                       <a:solidFill>
-                        <a:srgbClr val="BDBDBD"/>
-                      </a:solidFill>
-                    </a:lnL>
-                    <a:lnR w="6350" cap="flat" cmpd="sng" algn="ctr">
-                      <a:solidFill>
-                        <a:srgbClr val="BDBDBD"/>
-                      </a:solidFill>
-                    </a:lnR>
-                    <a:lnT w="6350" cap="flat" cmpd="sng" algn="ctr">
-                      <a:solidFill>
-                        <a:srgbClr val="BDBDBD"/>
-                      </a:solidFill>
-                    </a:lnT>
-                    <a:lnB w="6350" cap="flat" cmpd="sng" algn="ctr">
-                      <a:solidFill>
-                        <a:srgbClr val="BDBDBD"/>
+                        <a:srgbClr val="808080"/>
+                      </a:solidFill>
+                    </a:lnL>
+                    <a:lnR w="6350" cap="flat" cmpd="sng" algn="ctr">
+                      <a:solidFill>
+                        <a:srgbClr val="808080"/>
+                      </a:solidFill>
+                    </a:lnR>
+                    <a:lnT w="6350" cap="flat" cmpd="sng" algn="ctr">
+                      <a:solidFill>
+                        <a:srgbClr val="808080"/>
+                      </a:solidFill>
+                    </a:lnT>
+                    <a:lnB w="6350" cap="flat" cmpd="sng" algn="ctr">
+                      <a:solidFill>
+                        <a:srgbClr val="808080"/>
                       </a:solidFill>
                     </a:lnB>
                   </a:tcPr>
@@ -6979,22 +6979,22 @@
                     </a:solidFill>
                     <a:lnL w="6350" cap="flat" cmpd="sng" algn="ctr">
                       <a:solidFill>
-                        <a:srgbClr val="BDBDBD"/>
-                      </a:solidFill>
-                    </a:lnL>
-                    <a:lnR w="6350" cap="flat" cmpd="sng" algn="ctr">
-                      <a:solidFill>
-                        <a:srgbClr val="BDBDBD"/>
-                      </a:solidFill>
-                    </a:lnR>
-                    <a:lnT w="6350" cap="flat" cmpd="sng" algn="ctr">
-                      <a:solidFill>
-                        <a:srgbClr val="BDBDBD"/>
-                      </a:solidFill>
-                    </a:lnT>
-                    <a:lnB w="6350" cap="flat" cmpd="sng" algn="ctr">
-                      <a:solidFill>
-                        <a:srgbClr val="BDBDBD"/>
+                        <a:srgbClr val="808080"/>
+                      </a:solidFill>
+                    </a:lnL>
+                    <a:lnR w="6350" cap="flat" cmpd="sng" algn="ctr">
+                      <a:solidFill>
+                        <a:srgbClr val="808080"/>
+                      </a:solidFill>
+                    </a:lnR>
+                    <a:lnT w="6350" cap="flat" cmpd="sng" algn="ctr">
+                      <a:solidFill>
+                        <a:srgbClr val="808080"/>
+                      </a:solidFill>
+                    </a:lnT>
+                    <a:lnB w="6350" cap="flat" cmpd="sng" algn="ctr">
+                      <a:solidFill>
+                        <a:srgbClr val="808080"/>
                       </a:solidFill>
                     </a:lnB>
                   </a:tcPr>
@@ -7024,22 +7024,22 @@
                     </a:solidFill>
                     <a:lnL w="6350" cap="flat" cmpd="sng" algn="ctr">
                       <a:solidFill>
-                        <a:srgbClr val="BDBDBD"/>
-                      </a:solidFill>
-                    </a:lnL>
-                    <a:lnR w="6350" cap="flat" cmpd="sng" algn="ctr">
-                      <a:solidFill>
-                        <a:srgbClr val="BDBDBD"/>
-                      </a:solidFill>
-                    </a:lnR>
-                    <a:lnT w="6350" cap="flat" cmpd="sng" algn="ctr">
-                      <a:solidFill>
-                        <a:srgbClr val="BDBDBD"/>
-                      </a:solidFill>
-                    </a:lnT>
-                    <a:lnB w="6350" cap="flat" cmpd="sng" algn="ctr">
-                      <a:solidFill>
-                        <a:srgbClr val="BDBDBD"/>
+                        <a:srgbClr val="808080"/>
+                      </a:solidFill>
+                    </a:lnL>
+                    <a:lnR w="6350" cap="flat" cmpd="sng" algn="ctr">
+                      <a:solidFill>
+                        <a:srgbClr val="808080"/>
+                      </a:solidFill>
+                    </a:lnR>
+                    <a:lnT w="6350" cap="flat" cmpd="sng" algn="ctr">
+                      <a:solidFill>
+                        <a:srgbClr val="808080"/>
+                      </a:solidFill>
+                    </a:lnT>
+                    <a:lnB w="6350" cap="flat" cmpd="sng" algn="ctr">
+                      <a:solidFill>
+                        <a:srgbClr val="808080"/>
                       </a:solidFill>
                     </a:lnB>
                   </a:tcPr>
@@ -7067,22 +7067,22 @@
                     </a:solidFill>
                     <a:lnL w="6350" cap="flat" cmpd="sng" algn="ctr">
                       <a:solidFill>
-                        <a:srgbClr val="BDBDBD"/>
-                      </a:solidFill>
-                    </a:lnL>
-                    <a:lnR w="6350" cap="flat" cmpd="sng" algn="ctr">
-                      <a:solidFill>
-                        <a:srgbClr val="BDBDBD"/>
-                      </a:solidFill>
-                    </a:lnR>
-                    <a:lnT w="6350" cap="flat" cmpd="sng" algn="ctr">
-                      <a:solidFill>
-                        <a:srgbClr val="BDBDBD"/>
-                      </a:solidFill>
-                    </a:lnT>
-                    <a:lnB w="6350" cap="flat" cmpd="sng" algn="ctr">
-                      <a:solidFill>
-                        <a:srgbClr val="BDBDBD"/>
+                        <a:srgbClr val="808080"/>
+                      </a:solidFill>
+                    </a:lnL>
+                    <a:lnR w="6350" cap="flat" cmpd="sng" algn="ctr">
+                      <a:solidFill>
+                        <a:srgbClr val="808080"/>
+                      </a:solidFill>
+                    </a:lnR>
+                    <a:lnT w="6350" cap="flat" cmpd="sng" algn="ctr">
+                      <a:solidFill>
+                        <a:srgbClr val="808080"/>
+                      </a:solidFill>
+                    </a:lnT>
+                    <a:lnB w="6350" cap="flat" cmpd="sng" algn="ctr">
+                      <a:solidFill>
+                        <a:srgbClr val="808080"/>
                       </a:solidFill>
                     </a:lnB>
                   </a:tcPr>
@@ -7110,22 +7110,22 @@
                     </a:solidFill>
                     <a:lnL w="6350" cap="flat" cmpd="sng" algn="ctr">
                       <a:solidFill>
-                        <a:srgbClr val="BDBDBD"/>
-                      </a:solidFill>
-                    </a:lnL>
-                    <a:lnR w="6350" cap="flat" cmpd="sng" algn="ctr">
-                      <a:solidFill>
-                        <a:srgbClr val="BDBDBD"/>
-                      </a:solidFill>
-                    </a:lnR>
-                    <a:lnT w="6350" cap="flat" cmpd="sng" algn="ctr">
-                      <a:solidFill>
-                        <a:srgbClr val="BDBDBD"/>
-                      </a:solidFill>
-                    </a:lnT>
-                    <a:lnB w="6350" cap="flat" cmpd="sng" algn="ctr">
-                      <a:solidFill>
-                        <a:srgbClr val="BDBDBD"/>
+                        <a:srgbClr val="808080"/>
+                      </a:solidFill>
+                    </a:lnL>
+                    <a:lnR w="6350" cap="flat" cmpd="sng" algn="ctr">
+                      <a:solidFill>
+                        <a:srgbClr val="808080"/>
+                      </a:solidFill>
+                    </a:lnR>
+                    <a:lnT w="6350" cap="flat" cmpd="sng" algn="ctr">
+                      <a:solidFill>
+                        <a:srgbClr val="808080"/>
+                      </a:solidFill>
+                    </a:lnT>
+                    <a:lnB w="6350" cap="flat" cmpd="sng" algn="ctr">
+                      <a:solidFill>
+                        <a:srgbClr val="808080"/>
                       </a:solidFill>
                     </a:lnB>
                   </a:tcPr>
@@ -7155,22 +7155,22 @@
                     </a:solidFill>
                     <a:lnL w="6350" cap="flat" cmpd="sng" algn="ctr">
                       <a:solidFill>
-                        <a:srgbClr val="BDBDBD"/>
-                      </a:solidFill>
-                    </a:lnL>
-                    <a:lnR w="6350" cap="flat" cmpd="sng" algn="ctr">
-                      <a:solidFill>
-                        <a:srgbClr val="BDBDBD"/>
-                      </a:solidFill>
-                    </a:lnR>
-                    <a:lnT w="6350" cap="flat" cmpd="sng" algn="ctr">
-                      <a:solidFill>
-                        <a:srgbClr val="BDBDBD"/>
-                      </a:solidFill>
-                    </a:lnT>
-                    <a:lnB w="6350" cap="flat" cmpd="sng" algn="ctr">
-                      <a:solidFill>
-                        <a:srgbClr val="BDBDBD"/>
+                        <a:srgbClr val="808080"/>
+                      </a:solidFill>
+                    </a:lnL>
+                    <a:lnR w="6350" cap="flat" cmpd="sng" algn="ctr">
+                      <a:solidFill>
+                        <a:srgbClr val="808080"/>
+                      </a:solidFill>
+                    </a:lnR>
+                    <a:lnT w="6350" cap="flat" cmpd="sng" algn="ctr">
+                      <a:solidFill>
+                        <a:srgbClr val="808080"/>
+                      </a:solidFill>
+                    </a:lnT>
+                    <a:lnB w="6350" cap="flat" cmpd="sng" algn="ctr">
+                      <a:solidFill>
+                        <a:srgbClr val="808080"/>
                       </a:solidFill>
                     </a:lnB>
                   </a:tcPr>
@@ -7198,22 +7198,22 @@
                     </a:solidFill>
                     <a:lnL w="6350" cap="flat" cmpd="sng" algn="ctr">
                       <a:solidFill>
-                        <a:srgbClr val="BDBDBD"/>
-                      </a:solidFill>
-                    </a:lnL>
-                    <a:lnR w="6350" cap="flat" cmpd="sng" algn="ctr">
-                      <a:solidFill>
-                        <a:srgbClr val="BDBDBD"/>
-                      </a:solidFill>
-                    </a:lnR>
-                    <a:lnT w="6350" cap="flat" cmpd="sng" algn="ctr">
-                      <a:solidFill>
-                        <a:srgbClr val="BDBDBD"/>
-                      </a:solidFill>
-                    </a:lnT>
-                    <a:lnB w="6350" cap="flat" cmpd="sng" algn="ctr">
-                      <a:solidFill>
-                        <a:srgbClr val="BDBDBD"/>
+                        <a:srgbClr val="808080"/>
+                      </a:solidFill>
+                    </a:lnL>
+                    <a:lnR w="6350" cap="flat" cmpd="sng" algn="ctr">
+                      <a:solidFill>
+                        <a:srgbClr val="808080"/>
+                      </a:solidFill>
+                    </a:lnR>
+                    <a:lnT w="6350" cap="flat" cmpd="sng" algn="ctr">
+                      <a:solidFill>
+                        <a:srgbClr val="808080"/>
+                      </a:solidFill>
+                    </a:lnT>
+                    <a:lnB w="6350" cap="flat" cmpd="sng" algn="ctr">
+                      <a:solidFill>
+                        <a:srgbClr val="808080"/>
                       </a:solidFill>
                     </a:lnB>
                   </a:tcPr>
@@ -7241,22 +7241,22 @@
                     </a:solidFill>
                     <a:lnL w="6350" cap="flat" cmpd="sng" algn="ctr">
                       <a:solidFill>
-                        <a:srgbClr val="BDBDBD"/>
-                      </a:solidFill>
-                    </a:lnL>
-                    <a:lnR w="6350" cap="flat" cmpd="sng" algn="ctr">
-                      <a:solidFill>
-                        <a:srgbClr val="BDBDBD"/>
-                      </a:solidFill>
-                    </a:lnR>
-                    <a:lnT w="6350" cap="flat" cmpd="sng" algn="ctr">
-                      <a:solidFill>
-                        <a:srgbClr val="BDBDBD"/>
-                      </a:solidFill>
-                    </a:lnT>
-                    <a:lnB w="6350" cap="flat" cmpd="sng" algn="ctr">
-                      <a:solidFill>
-                        <a:srgbClr val="BDBDBD"/>
+                        <a:srgbClr val="808080"/>
+                      </a:solidFill>
+                    </a:lnL>
+                    <a:lnR w="6350" cap="flat" cmpd="sng" algn="ctr">
+                      <a:solidFill>
+                        <a:srgbClr val="808080"/>
+                      </a:solidFill>
+                    </a:lnR>
+                    <a:lnT w="6350" cap="flat" cmpd="sng" algn="ctr">
+                      <a:solidFill>
+                        <a:srgbClr val="808080"/>
+                      </a:solidFill>
+                    </a:lnT>
+                    <a:lnB w="6350" cap="flat" cmpd="sng" algn="ctr">
+                      <a:solidFill>
+                        <a:srgbClr val="808080"/>
                       </a:solidFill>
                     </a:lnB>
                   </a:tcPr>
@@ -7286,22 +7286,22 @@
                     </a:solidFill>
                     <a:lnL w="6350" cap="flat" cmpd="sng" algn="ctr">
                       <a:solidFill>
-                        <a:srgbClr val="BDBDBD"/>
-                      </a:solidFill>
-                    </a:lnL>
-                    <a:lnR w="6350" cap="flat" cmpd="sng" algn="ctr">
-                      <a:solidFill>
-                        <a:srgbClr val="BDBDBD"/>
-                      </a:solidFill>
-                    </a:lnR>
-                    <a:lnT w="6350" cap="flat" cmpd="sng" algn="ctr">
-                      <a:solidFill>
-                        <a:srgbClr val="BDBDBD"/>
-                      </a:solidFill>
-                    </a:lnT>
-                    <a:lnB w="6350" cap="flat" cmpd="sng" algn="ctr">
-                      <a:solidFill>
-                        <a:srgbClr val="BDBDBD"/>
+                        <a:srgbClr val="808080"/>
+                      </a:solidFill>
+                    </a:lnL>
+                    <a:lnR w="6350" cap="flat" cmpd="sng" algn="ctr">
+                      <a:solidFill>
+                        <a:srgbClr val="808080"/>
+                      </a:solidFill>
+                    </a:lnR>
+                    <a:lnT w="6350" cap="flat" cmpd="sng" algn="ctr">
+                      <a:solidFill>
+                        <a:srgbClr val="808080"/>
+                      </a:solidFill>
+                    </a:lnT>
+                    <a:lnB w="6350" cap="flat" cmpd="sng" algn="ctr">
+                      <a:solidFill>
+                        <a:srgbClr val="808080"/>
                       </a:solidFill>
                     </a:lnB>
                   </a:tcPr>
@@ -7329,22 +7329,22 @@
                     </a:solidFill>
                     <a:lnL w="6350" cap="flat" cmpd="sng" algn="ctr">
                       <a:solidFill>
-                        <a:srgbClr val="BDBDBD"/>
-                      </a:solidFill>
-                    </a:lnL>
-                    <a:lnR w="6350" cap="flat" cmpd="sng" algn="ctr">
-                      <a:solidFill>
-                        <a:srgbClr val="BDBDBD"/>
-                      </a:solidFill>
-                    </a:lnR>
-                    <a:lnT w="6350" cap="flat" cmpd="sng" algn="ctr">
-                      <a:solidFill>
-                        <a:srgbClr val="BDBDBD"/>
-                      </a:solidFill>
-                    </a:lnT>
-                    <a:lnB w="6350" cap="flat" cmpd="sng" algn="ctr">
-                      <a:solidFill>
-                        <a:srgbClr val="BDBDBD"/>
+                        <a:srgbClr val="808080"/>
+                      </a:solidFill>
+                    </a:lnL>
+                    <a:lnR w="6350" cap="flat" cmpd="sng" algn="ctr">
+                      <a:solidFill>
+                        <a:srgbClr val="808080"/>
+                      </a:solidFill>
+                    </a:lnR>
+                    <a:lnT w="6350" cap="flat" cmpd="sng" algn="ctr">
+                      <a:solidFill>
+                        <a:srgbClr val="808080"/>
+                      </a:solidFill>
+                    </a:lnT>
+                    <a:lnB w="6350" cap="flat" cmpd="sng" algn="ctr">
+                      <a:solidFill>
+                        <a:srgbClr val="808080"/>
                       </a:solidFill>
                     </a:lnB>
                   </a:tcPr>
@@ -7372,22 +7372,22 @@
                     </a:solidFill>
                     <a:lnL w="6350" cap="flat" cmpd="sng" algn="ctr">
                       <a:solidFill>
-                        <a:srgbClr val="BDBDBD"/>
-                      </a:solidFill>
-                    </a:lnL>
-                    <a:lnR w="6350" cap="flat" cmpd="sng" algn="ctr">
-                      <a:solidFill>
-                        <a:srgbClr val="BDBDBD"/>
-                      </a:solidFill>
-                    </a:lnR>
-                    <a:lnT w="6350" cap="flat" cmpd="sng" algn="ctr">
-                      <a:solidFill>
-                        <a:srgbClr val="BDBDBD"/>
-                      </a:solidFill>
-                    </a:lnT>
-                    <a:lnB w="6350" cap="flat" cmpd="sng" algn="ctr">
-                      <a:solidFill>
-                        <a:srgbClr val="BDBDBD"/>
+                        <a:srgbClr val="808080"/>
+                      </a:solidFill>
+                    </a:lnL>
+                    <a:lnR w="6350" cap="flat" cmpd="sng" algn="ctr">
+                      <a:solidFill>
+                        <a:srgbClr val="808080"/>
+                      </a:solidFill>
+                    </a:lnR>
+                    <a:lnT w="6350" cap="flat" cmpd="sng" algn="ctr">
+                      <a:solidFill>
+                        <a:srgbClr val="808080"/>
+                      </a:solidFill>
+                    </a:lnT>
+                    <a:lnB w="6350" cap="flat" cmpd="sng" algn="ctr">
+                      <a:solidFill>
+                        <a:srgbClr val="808080"/>
                       </a:solidFill>
                     </a:lnB>
                   </a:tcPr>
@@ -7417,22 +7417,22 @@
                     </a:solidFill>
                     <a:lnL w="6350" cap="flat" cmpd="sng" algn="ctr">
                       <a:solidFill>
-                        <a:srgbClr val="BDBDBD"/>
-                      </a:solidFill>
-                    </a:lnL>
-                    <a:lnR w="6350" cap="flat" cmpd="sng" algn="ctr">
-                      <a:solidFill>
-                        <a:srgbClr val="BDBDBD"/>
-                      </a:solidFill>
-                    </a:lnR>
-                    <a:lnT w="6350" cap="flat" cmpd="sng" algn="ctr">
-                      <a:solidFill>
-                        <a:srgbClr val="BDBDBD"/>
-                      </a:solidFill>
-                    </a:lnT>
-                    <a:lnB w="6350" cap="flat" cmpd="sng" algn="ctr">
-                      <a:solidFill>
-                        <a:srgbClr val="BDBDBD"/>
+                        <a:srgbClr val="808080"/>
+                      </a:solidFill>
+                    </a:lnL>
+                    <a:lnR w="6350" cap="flat" cmpd="sng" algn="ctr">
+                      <a:solidFill>
+                        <a:srgbClr val="808080"/>
+                      </a:solidFill>
+                    </a:lnR>
+                    <a:lnT w="6350" cap="flat" cmpd="sng" algn="ctr">
+                      <a:solidFill>
+                        <a:srgbClr val="808080"/>
+                      </a:solidFill>
+                    </a:lnT>
+                    <a:lnB w="6350" cap="flat" cmpd="sng" algn="ctr">
+                      <a:solidFill>
+                        <a:srgbClr val="808080"/>
                       </a:solidFill>
                     </a:lnB>
                   </a:tcPr>
@@ -7460,22 +7460,22 @@
                     </a:solidFill>
                     <a:lnL w="6350" cap="flat" cmpd="sng" algn="ctr">
                       <a:solidFill>
-                        <a:srgbClr val="BDBDBD"/>
-                      </a:solidFill>
-                    </a:lnL>
-                    <a:lnR w="6350" cap="flat" cmpd="sng" algn="ctr">
-                      <a:solidFill>
-                        <a:srgbClr val="BDBDBD"/>
-                      </a:solidFill>
-                    </a:lnR>
-                    <a:lnT w="6350" cap="flat" cmpd="sng" algn="ctr">
-                      <a:solidFill>
-                        <a:srgbClr val="BDBDBD"/>
-                      </a:solidFill>
-                    </a:lnT>
-                    <a:lnB w="6350" cap="flat" cmpd="sng" algn="ctr">
-                      <a:solidFill>
-                        <a:srgbClr val="BDBDBD"/>
+                        <a:srgbClr val="808080"/>
+                      </a:solidFill>
+                    </a:lnL>
+                    <a:lnR w="6350" cap="flat" cmpd="sng" algn="ctr">
+                      <a:solidFill>
+                        <a:srgbClr val="808080"/>
+                      </a:solidFill>
+                    </a:lnR>
+                    <a:lnT w="6350" cap="flat" cmpd="sng" algn="ctr">
+                      <a:solidFill>
+                        <a:srgbClr val="808080"/>
+                      </a:solidFill>
+                    </a:lnT>
+                    <a:lnB w="6350" cap="flat" cmpd="sng" algn="ctr">
+                      <a:solidFill>
+                        <a:srgbClr val="808080"/>
                       </a:solidFill>
                     </a:lnB>
                   </a:tcPr>
@@ -7503,22 +7503,22 @@
                     </a:solidFill>
                     <a:lnL w="6350" cap="flat" cmpd="sng" algn="ctr">
                       <a:solidFill>
-                        <a:srgbClr val="BDBDBD"/>
-                      </a:solidFill>
-                    </a:lnL>
-                    <a:lnR w="6350" cap="flat" cmpd="sng" algn="ctr">
-                      <a:solidFill>
-                        <a:srgbClr val="BDBDBD"/>
-                      </a:solidFill>
-                    </a:lnR>
-                    <a:lnT w="6350" cap="flat" cmpd="sng" algn="ctr">
-                      <a:solidFill>
-                        <a:srgbClr val="BDBDBD"/>
-                      </a:solidFill>
-                    </a:lnT>
-                    <a:lnB w="6350" cap="flat" cmpd="sng" algn="ctr">
-                      <a:solidFill>
-                        <a:srgbClr val="BDBDBD"/>
+                        <a:srgbClr val="808080"/>
+                      </a:solidFill>
+                    </a:lnL>
+                    <a:lnR w="6350" cap="flat" cmpd="sng" algn="ctr">
+                      <a:solidFill>
+                        <a:srgbClr val="808080"/>
+                      </a:solidFill>
+                    </a:lnR>
+                    <a:lnT w="6350" cap="flat" cmpd="sng" algn="ctr">
+                      <a:solidFill>
+                        <a:srgbClr val="808080"/>
+                      </a:solidFill>
+                    </a:lnT>
+                    <a:lnB w="6350" cap="flat" cmpd="sng" algn="ctr">
+                      <a:solidFill>
+                        <a:srgbClr val="808080"/>
                       </a:solidFill>
                     </a:lnB>
                   </a:tcPr>
@@ -7548,22 +7548,22 @@
                     </a:solidFill>
                     <a:lnL w="6350" cap="flat" cmpd="sng" algn="ctr">
                       <a:solidFill>
-                        <a:srgbClr val="BDBDBD"/>
-                      </a:solidFill>
-                    </a:lnL>
-                    <a:lnR w="6350" cap="flat" cmpd="sng" algn="ctr">
-                      <a:solidFill>
-                        <a:srgbClr val="BDBDBD"/>
-                      </a:solidFill>
-                    </a:lnR>
-                    <a:lnT w="6350" cap="flat" cmpd="sng" algn="ctr">
-                      <a:solidFill>
-                        <a:srgbClr val="BDBDBD"/>
-                      </a:solidFill>
-                    </a:lnT>
-                    <a:lnB w="6350" cap="flat" cmpd="sng" algn="ctr">
-                      <a:solidFill>
-                        <a:srgbClr val="BDBDBD"/>
+                        <a:srgbClr val="808080"/>
+                      </a:solidFill>
+                    </a:lnL>
+                    <a:lnR w="6350" cap="flat" cmpd="sng" algn="ctr">
+                      <a:solidFill>
+                        <a:srgbClr val="808080"/>
+                      </a:solidFill>
+                    </a:lnR>
+                    <a:lnT w="6350" cap="flat" cmpd="sng" algn="ctr">
+                      <a:solidFill>
+                        <a:srgbClr val="808080"/>
+                      </a:solidFill>
+                    </a:lnT>
+                    <a:lnB w="6350" cap="flat" cmpd="sng" algn="ctr">
+                      <a:solidFill>
+                        <a:srgbClr val="808080"/>
                       </a:solidFill>
                     </a:lnB>
                   </a:tcPr>
@@ -7591,22 +7591,22 @@
                     </a:solidFill>
                     <a:lnL w="6350" cap="flat" cmpd="sng" algn="ctr">
                       <a:solidFill>
-                        <a:srgbClr val="BDBDBD"/>
-                      </a:solidFill>
-                    </a:lnL>
-                    <a:lnR w="6350" cap="flat" cmpd="sng" algn="ctr">
-                      <a:solidFill>
-                        <a:srgbClr val="BDBDBD"/>
-                      </a:solidFill>
-                    </a:lnR>
-                    <a:lnT w="6350" cap="flat" cmpd="sng" algn="ctr">
-                      <a:solidFill>
-                        <a:srgbClr val="BDBDBD"/>
-                      </a:solidFill>
-                    </a:lnT>
-                    <a:lnB w="6350" cap="flat" cmpd="sng" algn="ctr">
-                      <a:solidFill>
-                        <a:srgbClr val="BDBDBD"/>
+                        <a:srgbClr val="808080"/>
+                      </a:solidFill>
+                    </a:lnL>
+                    <a:lnR w="6350" cap="flat" cmpd="sng" algn="ctr">
+                      <a:solidFill>
+                        <a:srgbClr val="808080"/>
+                      </a:solidFill>
+                    </a:lnR>
+                    <a:lnT w="6350" cap="flat" cmpd="sng" algn="ctr">
+                      <a:solidFill>
+                        <a:srgbClr val="808080"/>
+                      </a:solidFill>
+                    </a:lnT>
+                    <a:lnB w="6350" cap="flat" cmpd="sng" algn="ctr">
+                      <a:solidFill>
+                        <a:srgbClr val="808080"/>
                       </a:solidFill>
                     </a:lnB>
                   </a:tcPr>
@@ -7634,22 +7634,22 @@
                     </a:solidFill>
                     <a:lnL w="6350" cap="flat" cmpd="sng" algn="ctr">
                       <a:solidFill>
-                        <a:srgbClr val="BDBDBD"/>
-                      </a:solidFill>
-                    </a:lnL>
-                    <a:lnR w="6350" cap="flat" cmpd="sng" algn="ctr">
-                      <a:solidFill>
-                        <a:srgbClr val="BDBDBD"/>
-                      </a:solidFill>
-                    </a:lnR>
-                    <a:lnT w="6350" cap="flat" cmpd="sng" algn="ctr">
-                      <a:solidFill>
-                        <a:srgbClr val="BDBDBD"/>
-                      </a:solidFill>
-                    </a:lnT>
-                    <a:lnB w="6350" cap="flat" cmpd="sng" algn="ctr">
-                      <a:solidFill>
-                        <a:srgbClr val="BDBDBD"/>
+                        <a:srgbClr val="808080"/>
+                      </a:solidFill>
+                    </a:lnL>
+                    <a:lnR w="6350" cap="flat" cmpd="sng" algn="ctr">
+                      <a:solidFill>
+                        <a:srgbClr val="808080"/>
+                      </a:solidFill>
+                    </a:lnR>
+                    <a:lnT w="6350" cap="flat" cmpd="sng" algn="ctr">
+                      <a:solidFill>
+                        <a:srgbClr val="808080"/>
+                      </a:solidFill>
+                    </a:lnT>
+                    <a:lnB w="6350" cap="flat" cmpd="sng" algn="ctr">
+                      <a:solidFill>
+                        <a:srgbClr val="808080"/>
                       </a:solidFill>
                     </a:lnB>
                   </a:tcPr>
@@ -7811,7 +7811,7 @@
           </a:solidFill>
           <a:ln w="19050">
             <a:solidFill>
-              <a:srgbClr val="BDBDBD"/>
+              <a:srgbClr val="808080"/>
             </a:solidFill>
           </a:ln>
         </p:spPr>
@@ -7903,7 +7903,7 @@
           </a:solidFill>
           <a:ln w="19050">
             <a:solidFill>
-              <a:srgbClr val="BDBDBD"/>
+              <a:srgbClr val="808080"/>
             </a:solidFill>
           </a:ln>
         </p:spPr>
@@ -7995,7 +7995,7 @@
           </a:solidFill>
           <a:ln w="19050">
             <a:solidFill>
-              <a:srgbClr val="BDBDBD"/>
+              <a:srgbClr val="808080"/>
             </a:solidFill>
           </a:ln>
         </p:spPr>
@@ -8111,7 +8111,7 @@
           </a:solidFill>
           <a:ln w="19050">
             <a:solidFill>
-              <a:srgbClr val="BDBDBD"/>
+              <a:srgbClr val="808080"/>
             </a:solidFill>
           </a:ln>
         </p:spPr>
@@ -8627,22 +8627,22 @@
                     </a:solidFill>
                     <a:lnL w="6350" cap="flat" cmpd="sng" algn="ctr">
                       <a:solidFill>
-                        <a:srgbClr val="BDBDBD"/>
-                      </a:solidFill>
-                    </a:lnL>
-                    <a:lnR w="6350" cap="flat" cmpd="sng" algn="ctr">
-                      <a:solidFill>
-                        <a:srgbClr val="BDBDBD"/>
-                      </a:solidFill>
-                    </a:lnR>
-                    <a:lnT w="6350" cap="flat" cmpd="sng" algn="ctr">
-                      <a:solidFill>
-                        <a:srgbClr val="BDBDBD"/>
-                      </a:solidFill>
-                    </a:lnT>
-                    <a:lnB w="6350" cap="flat" cmpd="sng" algn="ctr">
-                      <a:solidFill>
-                        <a:srgbClr val="BDBDBD"/>
+                        <a:srgbClr val="808080"/>
+                      </a:solidFill>
+                    </a:lnL>
+                    <a:lnR w="6350" cap="flat" cmpd="sng" algn="ctr">
+                      <a:solidFill>
+                        <a:srgbClr val="808080"/>
+                      </a:solidFill>
+                    </a:lnR>
+                    <a:lnT w="6350" cap="flat" cmpd="sng" algn="ctr">
+                      <a:solidFill>
+                        <a:srgbClr val="808080"/>
+                      </a:solidFill>
+                    </a:lnT>
+                    <a:lnB w="6350" cap="flat" cmpd="sng" algn="ctr">
+                      <a:solidFill>
+                        <a:srgbClr val="808080"/>
                       </a:solidFill>
                     </a:lnB>
                   </a:tcPr>
@@ -8670,22 +8670,22 @@
                     </a:solidFill>
                     <a:lnL w="6350" cap="flat" cmpd="sng" algn="ctr">
                       <a:solidFill>
-                        <a:srgbClr val="BDBDBD"/>
-                      </a:solidFill>
-                    </a:lnL>
-                    <a:lnR w="6350" cap="flat" cmpd="sng" algn="ctr">
-                      <a:solidFill>
-                        <a:srgbClr val="BDBDBD"/>
-                      </a:solidFill>
-                    </a:lnR>
-                    <a:lnT w="6350" cap="flat" cmpd="sng" algn="ctr">
-                      <a:solidFill>
-                        <a:srgbClr val="BDBDBD"/>
-                      </a:solidFill>
-                    </a:lnT>
-                    <a:lnB w="6350" cap="flat" cmpd="sng" algn="ctr">
-                      <a:solidFill>
-                        <a:srgbClr val="BDBDBD"/>
+                        <a:srgbClr val="808080"/>
+                      </a:solidFill>
+                    </a:lnL>
+                    <a:lnR w="6350" cap="flat" cmpd="sng" algn="ctr">
+                      <a:solidFill>
+                        <a:srgbClr val="808080"/>
+                      </a:solidFill>
+                    </a:lnR>
+                    <a:lnT w="6350" cap="flat" cmpd="sng" algn="ctr">
+                      <a:solidFill>
+                        <a:srgbClr val="808080"/>
+                      </a:solidFill>
+                    </a:lnT>
+                    <a:lnB w="6350" cap="flat" cmpd="sng" algn="ctr">
+                      <a:solidFill>
+                        <a:srgbClr val="808080"/>
                       </a:solidFill>
                     </a:lnB>
                   </a:tcPr>
@@ -8715,22 +8715,22 @@
                     </a:solidFill>
                     <a:lnL w="6350" cap="flat" cmpd="sng" algn="ctr">
                       <a:solidFill>
-                        <a:srgbClr val="BDBDBD"/>
-                      </a:solidFill>
-                    </a:lnL>
-                    <a:lnR w="6350" cap="flat" cmpd="sng" algn="ctr">
-                      <a:solidFill>
-                        <a:srgbClr val="BDBDBD"/>
-                      </a:solidFill>
-                    </a:lnR>
-                    <a:lnT w="6350" cap="flat" cmpd="sng" algn="ctr">
-                      <a:solidFill>
-                        <a:srgbClr val="BDBDBD"/>
-                      </a:solidFill>
-                    </a:lnT>
-                    <a:lnB w="6350" cap="flat" cmpd="sng" algn="ctr">
-                      <a:solidFill>
-                        <a:srgbClr val="BDBDBD"/>
+                        <a:srgbClr val="808080"/>
+                      </a:solidFill>
+                    </a:lnL>
+                    <a:lnR w="6350" cap="flat" cmpd="sng" algn="ctr">
+                      <a:solidFill>
+                        <a:srgbClr val="808080"/>
+                      </a:solidFill>
+                    </a:lnR>
+                    <a:lnT w="6350" cap="flat" cmpd="sng" algn="ctr">
+                      <a:solidFill>
+                        <a:srgbClr val="808080"/>
+                      </a:solidFill>
+                    </a:lnT>
+                    <a:lnB w="6350" cap="flat" cmpd="sng" algn="ctr">
+                      <a:solidFill>
+                        <a:srgbClr val="808080"/>
                       </a:solidFill>
                     </a:lnB>
                   </a:tcPr>
@@ -8758,22 +8758,22 @@
                     </a:solidFill>
                     <a:lnL w="6350" cap="flat" cmpd="sng" algn="ctr">
                       <a:solidFill>
-                        <a:srgbClr val="BDBDBD"/>
-                      </a:solidFill>
-                    </a:lnL>
-                    <a:lnR w="6350" cap="flat" cmpd="sng" algn="ctr">
-                      <a:solidFill>
-                        <a:srgbClr val="BDBDBD"/>
-                      </a:solidFill>
-                    </a:lnR>
-                    <a:lnT w="6350" cap="flat" cmpd="sng" algn="ctr">
-                      <a:solidFill>
-                        <a:srgbClr val="BDBDBD"/>
-                      </a:solidFill>
-                    </a:lnT>
-                    <a:lnB w="6350" cap="flat" cmpd="sng" algn="ctr">
-                      <a:solidFill>
-                        <a:srgbClr val="BDBDBD"/>
+                        <a:srgbClr val="808080"/>
+                      </a:solidFill>
+                    </a:lnL>
+                    <a:lnR w="6350" cap="flat" cmpd="sng" algn="ctr">
+                      <a:solidFill>
+                        <a:srgbClr val="808080"/>
+                      </a:solidFill>
+                    </a:lnR>
+                    <a:lnT w="6350" cap="flat" cmpd="sng" algn="ctr">
+                      <a:solidFill>
+                        <a:srgbClr val="808080"/>
+                      </a:solidFill>
+                    </a:lnT>
+                    <a:lnB w="6350" cap="flat" cmpd="sng" algn="ctr">
+                      <a:solidFill>
+                        <a:srgbClr val="808080"/>
                       </a:solidFill>
                     </a:lnB>
                   </a:tcPr>
@@ -8803,22 +8803,22 @@
                     </a:solidFill>
                     <a:lnL w="6350" cap="flat" cmpd="sng" algn="ctr">
                       <a:solidFill>
-                        <a:srgbClr val="BDBDBD"/>
-                      </a:solidFill>
-                    </a:lnL>
-                    <a:lnR w="6350" cap="flat" cmpd="sng" algn="ctr">
-                      <a:solidFill>
-                        <a:srgbClr val="BDBDBD"/>
-                      </a:solidFill>
-                    </a:lnR>
-                    <a:lnT w="6350" cap="flat" cmpd="sng" algn="ctr">
-                      <a:solidFill>
-                        <a:srgbClr val="BDBDBD"/>
-                      </a:solidFill>
-                    </a:lnT>
-                    <a:lnB w="6350" cap="flat" cmpd="sng" algn="ctr">
-                      <a:solidFill>
-                        <a:srgbClr val="BDBDBD"/>
+                        <a:srgbClr val="808080"/>
+                      </a:solidFill>
+                    </a:lnL>
+                    <a:lnR w="6350" cap="flat" cmpd="sng" algn="ctr">
+                      <a:solidFill>
+                        <a:srgbClr val="808080"/>
+                      </a:solidFill>
+                    </a:lnR>
+                    <a:lnT w="6350" cap="flat" cmpd="sng" algn="ctr">
+                      <a:solidFill>
+                        <a:srgbClr val="808080"/>
+                      </a:solidFill>
+                    </a:lnT>
+                    <a:lnB w="6350" cap="flat" cmpd="sng" algn="ctr">
+                      <a:solidFill>
+                        <a:srgbClr val="808080"/>
                       </a:solidFill>
                     </a:lnB>
                   </a:tcPr>
@@ -8846,22 +8846,22 @@
                     </a:solidFill>
                     <a:lnL w="6350" cap="flat" cmpd="sng" algn="ctr">
                       <a:solidFill>
-                        <a:srgbClr val="BDBDBD"/>
-                      </a:solidFill>
-                    </a:lnL>
-                    <a:lnR w="6350" cap="flat" cmpd="sng" algn="ctr">
-                      <a:solidFill>
-                        <a:srgbClr val="BDBDBD"/>
-                      </a:solidFill>
-                    </a:lnR>
-                    <a:lnT w="6350" cap="flat" cmpd="sng" algn="ctr">
-                      <a:solidFill>
-                        <a:srgbClr val="BDBDBD"/>
-                      </a:solidFill>
-                    </a:lnT>
-                    <a:lnB w="6350" cap="flat" cmpd="sng" algn="ctr">
-                      <a:solidFill>
-                        <a:srgbClr val="BDBDBD"/>
+                        <a:srgbClr val="808080"/>
+                      </a:solidFill>
+                    </a:lnL>
+                    <a:lnR w="6350" cap="flat" cmpd="sng" algn="ctr">
+                      <a:solidFill>
+                        <a:srgbClr val="808080"/>
+                      </a:solidFill>
+                    </a:lnR>
+                    <a:lnT w="6350" cap="flat" cmpd="sng" algn="ctr">
+                      <a:solidFill>
+                        <a:srgbClr val="808080"/>
+                      </a:solidFill>
+                    </a:lnT>
+                    <a:lnB w="6350" cap="flat" cmpd="sng" algn="ctr">
+                      <a:solidFill>
+                        <a:srgbClr val="808080"/>
                       </a:solidFill>
                     </a:lnB>
                   </a:tcPr>
@@ -8891,22 +8891,22 @@
                     </a:solidFill>
                     <a:lnL w="6350" cap="flat" cmpd="sng" algn="ctr">
                       <a:solidFill>
-                        <a:srgbClr val="BDBDBD"/>
-                      </a:solidFill>
-                    </a:lnL>
-                    <a:lnR w="6350" cap="flat" cmpd="sng" algn="ctr">
-                      <a:solidFill>
-                        <a:srgbClr val="BDBDBD"/>
-                      </a:solidFill>
-                    </a:lnR>
-                    <a:lnT w="6350" cap="flat" cmpd="sng" algn="ctr">
-                      <a:solidFill>
-                        <a:srgbClr val="BDBDBD"/>
-                      </a:solidFill>
-                    </a:lnT>
-                    <a:lnB w="6350" cap="flat" cmpd="sng" algn="ctr">
-                      <a:solidFill>
-                        <a:srgbClr val="BDBDBD"/>
+                        <a:srgbClr val="808080"/>
+                      </a:solidFill>
+                    </a:lnL>
+                    <a:lnR w="6350" cap="flat" cmpd="sng" algn="ctr">
+                      <a:solidFill>
+                        <a:srgbClr val="808080"/>
+                      </a:solidFill>
+                    </a:lnR>
+                    <a:lnT w="6350" cap="flat" cmpd="sng" algn="ctr">
+                      <a:solidFill>
+                        <a:srgbClr val="808080"/>
+                      </a:solidFill>
+                    </a:lnT>
+                    <a:lnB w="6350" cap="flat" cmpd="sng" algn="ctr">
+                      <a:solidFill>
+                        <a:srgbClr val="808080"/>
                       </a:solidFill>
                     </a:lnB>
                   </a:tcPr>
@@ -8934,22 +8934,22 @@
                     </a:solidFill>
                     <a:lnL w="6350" cap="flat" cmpd="sng" algn="ctr">
                       <a:solidFill>
-                        <a:srgbClr val="BDBDBD"/>
-                      </a:solidFill>
-                    </a:lnL>
-                    <a:lnR w="6350" cap="flat" cmpd="sng" algn="ctr">
-                      <a:solidFill>
-                        <a:srgbClr val="BDBDBD"/>
-                      </a:solidFill>
-                    </a:lnR>
-                    <a:lnT w="6350" cap="flat" cmpd="sng" algn="ctr">
-                      <a:solidFill>
-                        <a:srgbClr val="BDBDBD"/>
-                      </a:solidFill>
-                    </a:lnT>
-                    <a:lnB w="6350" cap="flat" cmpd="sng" algn="ctr">
-                      <a:solidFill>
-                        <a:srgbClr val="BDBDBD"/>
+                        <a:srgbClr val="808080"/>
+                      </a:solidFill>
+                    </a:lnL>
+                    <a:lnR w="6350" cap="flat" cmpd="sng" algn="ctr">
+                      <a:solidFill>
+                        <a:srgbClr val="808080"/>
+                      </a:solidFill>
+                    </a:lnR>
+                    <a:lnT w="6350" cap="flat" cmpd="sng" algn="ctr">
+                      <a:solidFill>
+                        <a:srgbClr val="808080"/>
+                      </a:solidFill>
+                    </a:lnT>
+                    <a:lnB w="6350" cap="flat" cmpd="sng" algn="ctr">
+                      <a:solidFill>
+                        <a:srgbClr val="808080"/>
                       </a:solidFill>
                     </a:lnB>
                   </a:tcPr>
@@ -8979,22 +8979,22 @@
                     </a:solidFill>
                     <a:lnL w="6350" cap="flat" cmpd="sng" algn="ctr">
                       <a:solidFill>
-                        <a:srgbClr val="BDBDBD"/>
-                      </a:solidFill>
-                    </a:lnL>
-                    <a:lnR w="6350" cap="flat" cmpd="sng" algn="ctr">
-                      <a:solidFill>
-                        <a:srgbClr val="BDBDBD"/>
-                      </a:solidFill>
-                    </a:lnR>
-                    <a:lnT w="6350" cap="flat" cmpd="sng" algn="ctr">
-                      <a:solidFill>
-                        <a:srgbClr val="BDBDBD"/>
-                      </a:solidFill>
-                    </a:lnT>
-                    <a:lnB w="6350" cap="flat" cmpd="sng" algn="ctr">
-                      <a:solidFill>
-                        <a:srgbClr val="BDBDBD"/>
+                        <a:srgbClr val="808080"/>
+                      </a:solidFill>
+                    </a:lnL>
+                    <a:lnR w="6350" cap="flat" cmpd="sng" algn="ctr">
+                      <a:solidFill>
+                        <a:srgbClr val="808080"/>
+                      </a:solidFill>
+                    </a:lnR>
+                    <a:lnT w="6350" cap="flat" cmpd="sng" algn="ctr">
+                      <a:solidFill>
+                        <a:srgbClr val="808080"/>
+                      </a:solidFill>
+                    </a:lnT>
+                    <a:lnB w="6350" cap="flat" cmpd="sng" algn="ctr">
+                      <a:solidFill>
+                        <a:srgbClr val="808080"/>
                       </a:solidFill>
                     </a:lnB>
                   </a:tcPr>
@@ -9022,22 +9022,22 @@
                     </a:solidFill>
                     <a:lnL w="6350" cap="flat" cmpd="sng" algn="ctr">
                       <a:solidFill>
-                        <a:srgbClr val="BDBDBD"/>
-                      </a:solidFill>
-                    </a:lnL>
-                    <a:lnR w="6350" cap="flat" cmpd="sng" algn="ctr">
-                      <a:solidFill>
-                        <a:srgbClr val="BDBDBD"/>
-                      </a:solidFill>
-                    </a:lnR>
-                    <a:lnT w="6350" cap="flat" cmpd="sng" algn="ctr">
-                      <a:solidFill>
-                        <a:srgbClr val="BDBDBD"/>
-                      </a:solidFill>
-                    </a:lnT>
-                    <a:lnB w="6350" cap="flat" cmpd="sng" algn="ctr">
-                      <a:solidFill>
-                        <a:srgbClr val="BDBDBD"/>
+                        <a:srgbClr val="808080"/>
+                      </a:solidFill>
+                    </a:lnL>
+                    <a:lnR w="6350" cap="flat" cmpd="sng" algn="ctr">
+                      <a:solidFill>
+                        <a:srgbClr val="808080"/>
+                      </a:solidFill>
+                    </a:lnR>
+                    <a:lnT w="6350" cap="flat" cmpd="sng" algn="ctr">
+                      <a:solidFill>
+                        <a:srgbClr val="808080"/>
+                      </a:solidFill>
+                    </a:lnT>
+                    <a:lnB w="6350" cap="flat" cmpd="sng" algn="ctr">
+                      <a:solidFill>
+                        <a:srgbClr val="808080"/>
                       </a:solidFill>
                     </a:lnB>
                   </a:tcPr>
@@ -9067,22 +9067,22 @@
                     </a:solidFill>
                     <a:lnL w="6350" cap="flat" cmpd="sng" algn="ctr">
                       <a:solidFill>
-                        <a:srgbClr val="BDBDBD"/>
-                      </a:solidFill>
-                    </a:lnL>
-                    <a:lnR w="6350" cap="flat" cmpd="sng" algn="ctr">
-                      <a:solidFill>
-                        <a:srgbClr val="BDBDBD"/>
-                      </a:solidFill>
-                    </a:lnR>
-                    <a:lnT w="6350" cap="flat" cmpd="sng" algn="ctr">
-                      <a:solidFill>
-                        <a:srgbClr val="BDBDBD"/>
-                      </a:solidFill>
-                    </a:lnT>
-                    <a:lnB w="6350" cap="flat" cmpd="sng" algn="ctr">
-                      <a:solidFill>
-                        <a:srgbClr val="BDBDBD"/>
+                        <a:srgbClr val="808080"/>
+                      </a:solidFill>
+                    </a:lnL>
+                    <a:lnR w="6350" cap="flat" cmpd="sng" algn="ctr">
+                      <a:solidFill>
+                        <a:srgbClr val="808080"/>
+                      </a:solidFill>
+                    </a:lnR>
+                    <a:lnT w="6350" cap="flat" cmpd="sng" algn="ctr">
+                      <a:solidFill>
+                        <a:srgbClr val="808080"/>
+                      </a:solidFill>
+                    </a:lnT>
+                    <a:lnB w="6350" cap="flat" cmpd="sng" algn="ctr">
+                      <a:solidFill>
+                        <a:srgbClr val="808080"/>
                       </a:solidFill>
                     </a:lnB>
                   </a:tcPr>
@@ -9110,22 +9110,22 @@
                     </a:solidFill>
                     <a:lnL w="6350" cap="flat" cmpd="sng" algn="ctr">
                       <a:solidFill>
-                        <a:srgbClr val="BDBDBD"/>
-                      </a:solidFill>
-                    </a:lnL>
-                    <a:lnR w="6350" cap="flat" cmpd="sng" algn="ctr">
-                      <a:solidFill>
-                        <a:srgbClr val="BDBDBD"/>
-                      </a:solidFill>
-                    </a:lnR>
-                    <a:lnT w="6350" cap="flat" cmpd="sng" algn="ctr">
-                      <a:solidFill>
-                        <a:srgbClr val="BDBDBD"/>
-                      </a:solidFill>
-                    </a:lnT>
-                    <a:lnB w="6350" cap="flat" cmpd="sng" algn="ctr">
-                      <a:solidFill>
-                        <a:srgbClr val="BDBDBD"/>
+                        <a:srgbClr val="808080"/>
+                      </a:solidFill>
+                    </a:lnL>
+                    <a:lnR w="6350" cap="flat" cmpd="sng" algn="ctr">
+                      <a:solidFill>
+                        <a:srgbClr val="808080"/>
+                      </a:solidFill>
+                    </a:lnR>
+                    <a:lnT w="6350" cap="flat" cmpd="sng" algn="ctr">
+                      <a:solidFill>
+                        <a:srgbClr val="808080"/>
+                      </a:solidFill>
+                    </a:lnT>
+                    <a:lnB w="6350" cap="flat" cmpd="sng" algn="ctr">
+                      <a:solidFill>
+                        <a:srgbClr val="808080"/>
                       </a:solidFill>
                     </a:lnB>
                   </a:tcPr>
@@ -9155,22 +9155,22 @@
                     </a:solidFill>
                     <a:lnL w="6350" cap="flat" cmpd="sng" algn="ctr">
                       <a:solidFill>
-                        <a:srgbClr val="BDBDBD"/>
-                      </a:solidFill>
-                    </a:lnL>
-                    <a:lnR w="6350" cap="flat" cmpd="sng" algn="ctr">
-                      <a:solidFill>
-                        <a:srgbClr val="BDBDBD"/>
-                      </a:solidFill>
-                    </a:lnR>
-                    <a:lnT w="6350" cap="flat" cmpd="sng" algn="ctr">
-                      <a:solidFill>
-                        <a:srgbClr val="BDBDBD"/>
-                      </a:solidFill>
-                    </a:lnT>
-                    <a:lnB w="6350" cap="flat" cmpd="sng" algn="ctr">
-                      <a:solidFill>
-                        <a:srgbClr val="BDBDBD"/>
+                        <a:srgbClr val="808080"/>
+                      </a:solidFill>
+                    </a:lnL>
+                    <a:lnR w="6350" cap="flat" cmpd="sng" algn="ctr">
+                      <a:solidFill>
+                        <a:srgbClr val="808080"/>
+                      </a:solidFill>
+                    </a:lnR>
+                    <a:lnT w="6350" cap="flat" cmpd="sng" algn="ctr">
+                      <a:solidFill>
+                        <a:srgbClr val="808080"/>
+                      </a:solidFill>
+                    </a:lnT>
+                    <a:lnB w="6350" cap="flat" cmpd="sng" algn="ctr">
+                      <a:solidFill>
+                        <a:srgbClr val="808080"/>
                       </a:solidFill>
                     </a:lnB>
                   </a:tcPr>
@@ -9198,22 +9198,22 @@
                     </a:solidFill>
                     <a:lnL w="6350" cap="flat" cmpd="sng" algn="ctr">
                       <a:solidFill>
-                        <a:srgbClr val="BDBDBD"/>
-                      </a:solidFill>
-                    </a:lnL>
-                    <a:lnR w="6350" cap="flat" cmpd="sng" algn="ctr">
-                      <a:solidFill>
-                        <a:srgbClr val="BDBDBD"/>
-                      </a:solidFill>
-                    </a:lnR>
-                    <a:lnT w="6350" cap="flat" cmpd="sng" algn="ctr">
-                      <a:solidFill>
-                        <a:srgbClr val="BDBDBD"/>
-                      </a:solidFill>
-                    </a:lnT>
-                    <a:lnB w="6350" cap="flat" cmpd="sng" algn="ctr">
-                      <a:solidFill>
-                        <a:srgbClr val="BDBDBD"/>
+                        <a:srgbClr val="808080"/>
+                      </a:solidFill>
+                    </a:lnL>
+                    <a:lnR w="6350" cap="flat" cmpd="sng" algn="ctr">
+                      <a:solidFill>
+                        <a:srgbClr val="808080"/>
+                      </a:solidFill>
+                    </a:lnR>
+                    <a:lnT w="6350" cap="flat" cmpd="sng" algn="ctr">
+                      <a:solidFill>
+                        <a:srgbClr val="808080"/>
+                      </a:solidFill>
+                    </a:lnT>
+                    <a:lnB w="6350" cap="flat" cmpd="sng" algn="ctr">
+                      <a:solidFill>
+                        <a:srgbClr val="808080"/>
                       </a:solidFill>
                     </a:lnB>
                   </a:tcPr>
@@ -9304,22 +9304,22 @@
                     </a:solidFill>
                     <a:lnL w="6350" cap="flat" cmpd="sng" algn="ctr">
                       <a:solidFill>
-                        <a:srgbClr val="BDBDBD"/>
-                      </a:solidFill>
-                    </a:lnL>
-                    <a:lnR w="6350" cap="flat" cmpd="sng" algn="ctr">
-                      <a:solidFill>
-                        <a:srgbClr val="BDBDBD"/>
-                      </a:solidFill>
-                    </a:lnR>
-                    <a:lnT w="6350" cap="flat" cmpd="sng" algn="ctr">
-                      <a:solidFill>
-                        <a:srgbClr val="BDBDBD"/>
-                      </a:solidFill>
-                    </a:lnT>
-                    <a:lnB w="6350" cap="flat" cmpd="sng" algn="ctr">
-                      <a:solidFill>
-                        <a:srgbClr val="BDBDBD"/>
+                        <a:srgbClr val="808080"/>
+                      </a:solidFill>
+                    </a:lnL>
+                    <a:lnR w="6350" cap="flat" cmpd="sng" algn="ctr">
+                      <a:solidFill>
+                        <a:srgbClr val="808080"/>
+                      </a:solidFill>
+                    </a:lnR>
+                    <a:lnT w="6350" cap="flat" cmpd="sng" algn="ctr">
+                      <a:solidFill>
+                        <a:srgbClr val="808080"/>
+                      </a:solidFill>
+                    </a:lnT>
+                    <a:lnB w="6350" cap="flat" cmpd="sng" algn="ctr">
+                      <a:solidFill>
+                        <a:srgbClr val="808080"/>
                       </a:solidFill>
                     </a:lnB>
                   </a:tcPr>
@@ -9347,22 +9347,22 @@
                     </a:solidFill>
                     <a:lnL w="6350" cap="flat" cmpd="sng" algn="ctr">
                       <a:solidFill>
-                        <a:srgbClr val="BDBDBD"/>
-                      </a:solidFill>
-                    </a:lnL>
-                    <a:lnR w="6350" cap="flat" cmpd="sng" algn="ctr">
-                      <a:solidFill>
-                        <a:srgbClr val="BDBDBD"/>
-                      </a:solidFill>
-                    </a:lnR>
-                    <a:lnT w="6350" cap="flat" cmpd="sng" algn="ctr">
-                      <a:solidFill>
-                        <a:srgbClr val="BDBDBD"/>
-                      </a:solidFill>
-                    </a:lnT>
-                    <a:lnB w="6350" cap="flat" cmpd="sng" algn="ctr">
-                      <a:solidFill>
-                        <a:srgbClr val="BDBDBD"/>
+                        <a:srgbClr val="808080"/>
+                      </a:solidFill>
+                    </a:lnL>
+                    <a:lnR w="6350" cap="flat" cmpd="sng" algn="ctr">
+                      <a:solidFill>
+                        <a:srgbClr val="808080"/>
+                      </a:solidFill>
+                    </a:lnR>
+                    <a:lnT w="6350" cap="flat" cmpd="sng" algn="ctr">
+                      <a:solidFill>
+                        <a:srgbClr val="808080"/>
+                      </a:solidFill>
+                    </a:lnT>
+                    <a:lnB w="6350" cap="flat" cmpd="sng" algn="ctr">
+                      <a:solidFill>
+                        <a:srgbClr val="808080"/>
                       </a:solidFill>
                     </a:lnB>
                   </a:tcPr>
@@ -9392,22 +9392,22 @@
                     </a:solidFill>
                     <a:lnL w="6350" cap="flat" cmpd="sng" algn="ctr">
                       <a:solidFill>
-                        <a:srgbClr val="BDBDBD"/>
-                      </a:solidFill>
-                    </a:lnL>
-                    <a:lnR w="6350" cap="flat" cmpd="sng" algn="ctr">
-                      <a:solidFill>
-                        <a:srgbClr val="BDBDBD"/>
-                      </a:solidFill>
-                    </a:lnR>
-                    <a:lnT w="6350" cap="flat" cmpd="sng" algn="ctr">
-                      <a:solidFill>
-                        <a:srgbClr val="BDBDBD"/>
-                      </a:solidFill>
-                    </a:lnT>
-                    <a:lnB w="6350" cap="flat" cmpd="sng" algn="ctr">
-                      <a:solidFill>
-                        <a:srgbClr val="BDBDBD"/>
+                        <a:srgbClr val="808080"/>
+                      </a:solidFill>
+                    </a:lnL>
+                    <a:lnR w="6350" cap="flat" cmpd="sng" algn="ctr">
+                      <a:solidFill>
+                        <a:srgbClr val="808080"/>
+                      </a:solidFill>
+                    </a:lnR>
+                    <a:lnT w="6350" cap="flat" cmpd="sng" algn="ctr">
+                      <a:solidFill>
+                        <a:srgbClr val="808080"/>
+                      </a:solidFill>
+                    </a:lnT>
+                    <a:lnB w="6350" cap="flat" cmpd="sng" algn="ctr">
+                      <a:solidFill>
+                        <a:srgbClr val="808080"/>
                       </a:solidFill>
                     </a:lnB>
                   </a:tcPr>
@@ -9435,22 +9435,22 @@
                     </a:solidFill>
                     <a:lnL w="6350" cap="flat" cmpd="sng" algn="ctr">
                       <a:solidFill>
-                        <a:srgbClr val="BDBDBD"/>
-                      </a:solidFill>
-                    </a:lnL>
-                    <a:lnR w="6350" cap="flat" cmpd="sng" algn="ctr">
-                      <a:solidFill>
-                        <a:srgbClr val="BDBDBD"/>
-                      </a:solidFill>
-                    </a:lnR>
-                    <a:lnT w="6350" cap="flat" cmpd="sng" algn="ctr">
-                      <a:solidFill>
-                        <a:srgbClr val="BDBDBD"/>
-                      </a:solidFill>
-                    </a:lnT>
-                    <a:lnB w="6350" cap="flat" cmpd="sng" algn="ctr">
-                      <a:solidFill>
-                        <a:srgbClr val="BDBDBD"/>
+                        <a:srgbClr val="808080"/>
+                      </a:solidFill>
+                    </a:lnL>
+                    <a:lnR w="6350" cap="flat" cmpd="sng" algn="ctr">
+                      <a:solidFill>
+                        <a:srgbClr val="808080"/>
+                      </a:solidFill>
+                    </a:lnR>
+                    <a:lnT w="6350" cap="flat" cmpd="sng" algn="ctr">
+                      <a:solidFill>
+                        <a:srgbClr val="808080"/>
+                      </a:solidFill>
+                    </a:lnT>
+                    <a:lnB w="6350" cap="flat" cmpd="sng" algn="ctr">
+                      <a:solidFill>
+                        <a:srgbClr val="808080"/>
                       </a:solidFill>
                     </a:lnB>
                   </a:tcPr>
@@ -9480,22 +9480,22 @@
                     </a:solidFill>
                     <a:lnL w="6350" cap="flat" cmpd="sng" algn="ctr">
                       <a:solidFill>
-                        <a:srgbClr val="BDBDBD"/>
-                      </a:solidFill>
-                    </a:lnL>
-                    <a:lnR w="6350" cap="flat" cmpd="sng" algn="ctr">
-                      <a:solidFill>
-                        <a:srgbClr val="BDBDBD"/>
-                      </a:solidFill>
-                    </a:lnR>
-                    <a:lnT w="6350" cap="flat" cmpd="sng" algn="ctr">
-                      <a:solidFill>
-                        <a:srgbClr val="BDBDBD"/>
-                      </a:solidFill>
-                    </a:lnT>
-                    <a:lnB w="6350" cap="flat" cmpd="sng" algn="ctr">
-                      <a:solidFill>
-                        <a:srgbClr val="BDBDBD"/>
+                        <a:srgbClr val="808080"/>
+                      </a:solidFill>
+                    </a:lnL>
+                    <a:lnR w="6350" cap="flat" cmpd="sng" algn="ctr">
+                      <a:solidFill>
+                        <a:srgbClr val="808080"/>
+                      </a:solidFill>
+                    </a:lnR>
+                    <a:lnT w="6350" cap="flat" cmpd="sng" algn="ctr">
+                      <a:solidFill>
+                        <a:srgbClr val="808080"/>
+                      </a:solidFill>
+                    </a:lnT>
+                    <a:lnB w="6350" cap="flat" cmpd="sng" algn="ctr">
+                      <a:solidFill>
+                        <a:srgbClr val="808080"/>
                       </a:solidFill>
                     </a:lnB>
                   </a:tcPr>
@@ -9523,22 +9523,22 @@
                     </a:solidFill>
                     <a:lnL w="6350" cap="flat" cmpd="sng" algn="ctr">
                       <a:solidFill>
-                        <a:srgbClr val="BDBDBD"/>
-                      </a:solidFill>
-                    </a:lnL>
-                    <a:lnR w="6350" cap="flat" cmpd="sng" algn="ctr">
-                      <a:solidFill>
-                        <a:srgbClr val="BDBDBD"/>
-                      </a:solidFill>
-                    </a:lnR>
-                    <a:lnT w="6350" cap="flat" cmpd="sng" algn="ctr">
-                      <a:solidFill>
-                        <a:srgbClr val="BDBDBD"/>
-                      </a:solidFill>
-                    </a:lnT>
-                    <a:lnB w="6350" cap="flat" cmpd="sng" algn="ctr">
-                      <a:solidFill>
-                        <a:srgbClr val="BDBDBD"/>
+                        <a:srgbClr val="808080"/>
+                      </a:solidFill>
+                    </a:lnL>
+                    <a:lnR w="6350" cap="flat" cmpd="sng" algn="ctr">
+                      <a:solidFill>
+                        <a:srgbClr val="808080"/>
+                      </a:solidFill>
+                    </a:lnR>
+                    <a:lnT w="6350" cap="flat" cmpd="sng" algn="ctr">
+                      <a:solidFill>
+                        <a:srgbClr val="808080"/>
+                      </a:solidFill>
+                    </a:lnT>
+                    <a:lnB w="6350" cap="flat" cmpd="sng" algn="ctr">
+                      <a:solidFill>
+                        <a:srgbClr val="808080"/>
                       </a:solidFill>
                     </a:lnB>
                   </a:tcPr>
@@ -9568,22 +9568,22 @@
                     </a:solidFill>
                     <a:lnL w="6350" cap="flat" cmpd="sng" algn="ctr">
                       <a:solidFill>
-                        <a:srgbClr val="BDBDBD"/>
-                      </a:solidFill>
-                    </a:lnL>
-                    <a:lnR w="6350" cap="flat" cmpd="sng" algn="ctr">
-                      <a:solidFill>
-                        <a:srgbClr val="BDBDBD"/>
-                      </a:solidFill>
-                    </a:lnR>
-                    <a:lnT w="6350" cap="flat" cmpd="sng" algn="ctr">
-                      <a:solidFill>
-                        <a:srgbClr val="BDBDBD"/>
-                      </a:solidFill>
-                    </a:lnT>
-                    <a:lnB w="6350" cap="flat" cmpd="sng" algn="ctr">
-                      <a:solidFill>
-                        <a:srgbClr val="BDBDBD"/>
+                        <a:srgbClr val="808080"/>
+                      </a:solidFill>
+                    </a:lnL>
+                    <a:lnR w="6350" cap="flat" cmpd="sng" algn="ctr">
+                      <a:solidFill>
+                        <a:srgbClr val="808080"/>
+                      </a:solidFill>
+                    </a:lnR>
+                    <a:lnT w="6350" cap="flat" cmpd="sng" algn="ctr">
+                      <a:solidFill>
+                        <a:srgbClr val="808080"/>
+                      </a:solidFill>
+                    </a:lnT>
+                    <a:lnB w="6350" cap="flat" cmpd="sng" algn="ctr">
+                      <a:solidFill>
+                        <a:srgbClr val="808080"/>
                       </a:solidFill>
                     </a:lnB>
                   </a:tcPr>
@@ -9611,22 +9611,22 @@
                     </a:solidFill>
                     <a:lnL w="6350" cap="flat" cmpd="sng" algn="ctr">
                       <a:solidFill>
-                        <a:srgbClr val="BDBDBD"/>
-                      </a:solidFill>
-                    </a:lnL>
-                    <a:lnR w="6350" cap="flat" cmpd="sng" algn="ctr">
-                      <a:solidFill>
-                        <a:srgbClr val="BDBDBD"/>
-                      </a:solidFill>
-                    </a:lnR>
-                    <a:lnT w="6350" cap="flat" cmpd="sng" algn="ctr">
-                      <a:solidFill>
-                        <a:srgbClr val="BDBDBD"/>
-                      </a:solidFill>
-                    </a:lnT>
-                    <a:lnB w="6350" cap="flat" cmpd="sng" algn="ctr">
-                      <a:solidFill>
-                        <a:srgbClr val="BDBDBD"/>
+                        <a:srgbClr val="808080"/>
+                      </a:solidFill>
+                    </a:lnL>
+                    <a:lnR w="6350" cap="flat" cmpd="sng" algn="ctr">
+                      <a:solidFill>
+                        <a:srgbClr val="808080"/>
+                      </a:solidFill>
+                    </a:lnR>
+                    <a:lnT w="6350" cap="flat" cmpd="sng" algn="ctr">
+                      <a:solidFill>
+                        <a:srgbClr val="808080"/>
+                      </a:solidFill>
+                    </a:lnT>
+                    <a:lnB w="6350" cap="flat" cmpd="sng" algn="ctr">
+                      <a:solidFill>
+                        <a:srgbClr val="808080"/>
                       </a:solidFill>
                     </a:lnB>
                   </a:tcPr>
@@ -9840,7 +9840,7 @@
           </a:solidFill>
           <a:ln w="6350">
             <a:solidFill>
-              <a:srgbClr val="BDBDBD"/>
+              <a:srgbClr val="808080"/>
             </a:solidFill>
           </a:ln>
         </p:spPr>
@@ -9990,7 +9990,7 @@
           </a:solidFill>
           <a:ln w="6350">
             <a:solidFill>
-              <a:srgbClr val="BDBDBD"/>
+              <a:srgbClr val="808080"/>
             </a:solidFill>
           </a:ln>
         </p:spPr>
@@ -10140,7 +10140,7 @@
           </a:solidFill>
           <a:ln w="6350">
             <a:solidFill>
-              <a:srgbClr val="BDBDBD"/>
+              <a:srgbClr val="808080"/>
             </a:solidFill>
           </a:ln>
         </p:spPr>
@@ -10290,7 +10290,7 @@
           </a:solidFill>
           <a:ln w="6350">
             <a:solidFill>
-              <a:srgbClr val="BDBDBD"/>
+              <a:srgbClr val="808080"/>
             </a:solidFill>
           </a:ln>
         </p:spPr>
@@ -10502,22 +10502,22 @@
                     </a:solidFill>
                     <a:lnL w="6350" cap="flat" cmpd="sng" algn="ctr">
                       <a:solidFill>
-                        <a:srgbClr val="BDBDBD"/>
-                      </a:solidFill>
-                    </a:lnL>
-                    <a:lnR w="6350" cap="flat" cmpd="sng" algn="ctr">
-                      <a:solidFill>
-                        <a:srgbClr val="BDBDBD"/>
-                      </a:solidFill>
-                    </a:lnR>
-                    <a:lnT w="6350" cap="flat" cmpd="sng" algn="ctr">
-                      <a:solidFill>
-                        <a:srgbClr val="BDBDBD"/>
-                      </a:solidFill>
-                    </a:lnT>
-                    <a:lnB w="6350" cap="flat" cmpd="sng" algn="ctr">
-                      <a:solidFill>
-                        <a:srgbClr val="BDBDBD"/>
+                        <a:srgbClr val="808080"/>
+                      </a:solidFill>
+                    </a:lnL>
+                    <a:lnR w="6350" cap="flat" cmpd="sng" algn="ctr">
+                      <a:solidFill>
+                        <a:srgbClr val="808080"/>
+                      </a:solidFill>
+                    </a:lnR>
+                    <a:lnT w="6350" cap="flat" cmpd="sng" algn="ctr">
+                      <a:solidFill>
+                        <a:srgbClr val="808080"/>
+                      </a:solidFill>
+                    </a:lnT>
+                    <a:lnB w="6350" cap="flat" cmpd="sng" algn="ctr">
+                      <a:solidFill>
+                        <a:srgbClr val="808080"/>
                       </a:solidFill>
                     </a:lnB>
                   </a:tcPr>
@@ -10545,22 +10545,22 @@
                     </a:solidFill>
                     <a:lnL w="6350" cap="flat" cmpd="sng" algn="ctr">
                       <a:solidFill>
-                        <a:srgbClr val="BDBDBD"/>
-                      </a:solidFill>
-                    </a:lnL>
-                    <a:lnR w="6350" cap="flat" cmpd="sng" algn="ctr">
-                      <a:solidFill>
-                        <a:srgbClr val="BDBDBD"/>
-                      </a:solidFill>
-                    </a:lnR>
-                    <a:lnT w="6350" cap="flat" cmpd="sng" algn="ctr">
-                      <a:solidFill>
-                        <a:srgbClr val="BDBDBD"/>
-                      </a:solidFill>
-                    </a:lnT>
-                    <a:lnB w="6350" cap="flat" cmpd="sng" algn="ctr">
-                      <a:solidFill>
-                        <a:srgbClr val="BDBDBD"/>
+                        <a:srgbClr val="808080"/>
+                      </a:solidFill>
+                    </a:lnL>
+                    <a:lnR w="6350" cap="flat" cmpd="sng" algn="ctr">
+                      <a:solidFill>
+                        <a:srgbClr val="808080"/>
+                      </a:solidFill>
+                    </a:lnR>
+                    <a:lnT w="6350" cap="flat" cmpd="sng" algn="ctr">
+                      <a:solidFill>
+                        <a:srgbClr val="808080"/>
+                      </a:solidFill>
+                    </a:lnT>
+                    <a:lnB w="6350" cap="flat" cmpd="sng" algn="ctr">
+                      <a:solidFill>
+                        <a:srgbClr val="808080"/>
                       </a:solidFill>
                     </a:lnB>
                   </a:tcPr>
@@ -10590,22 +10590,22 @@
                     </a:solidFill>
                     <a:lnL w="6350" cap="flat" cmpd="sng" algn="ctr">
                       <a:solidFill>
-                        <a:srgbClr val="BDBDBD"/>
-                      </a:solidFill>
-                    </a:lnL>
-                    <a:lnR w="6350" cap="flat" cmpd="sng" algn="ctr">
-                      <a:solidFill>
-                        <a:srgbClr val="BDBDBD"/>
-                      </a:solidFill>
-                    </a:lnR>
-                    <a:lnT w="6350" cap="flat" cmpd="sng" algn="ctr">
-                      <a:solidFill>
-                        <a:srgbClr val="BDBDBD"/>
-                      </a:solidFill>
-                    </a:lnT>
-                    <a:lnB w="6350" cap="flat" cmpd="sng" algn="ctr">
-                      <a:solidFill>
-                        <a:srgbClr val="BDBDBD"/>
+                        <a:srgbClr val="808080"/>
+                      </a:solidFill>
+                    </a:lnL>
+                    <a:lnR w="6350" cap="flat" cmpd="sng" algn="ctr">
+                      <a:solidFill>
+                        <a:srgbClr val="808080"/>
+                      </a:solidFill>
+                    </a:lnR>
+                    <a:lnT w="6350" cap="flat" cmpd="sng" algn="ctr">
+                      <a:solidFill>
+                        <a:srgbClr val="808080"/>
+                      </a:solidFill>
+                    </a:lnT>
+                    <a:lnB w="6350" cap="flat" cmpd="sng" algn="ctr">
+                      <a:solidFill>
+                        <a:srgbClr val="808080"/>
                       </a:solidFill>
                     </a:lnB>
                   </a:tcPr>
@@ -10633,22 +10633,22 @@
                     </a:solidFill>
                     <a:lnL w="6350" cap="flat" cmpd="sng" algn="ctr">
                       <a:solidFill>
-                        <a:srgbClr val="BDBDBD"/>
-                      </a:solidFill>
-                    </a:lnL>
-                    <a:lnR w="6350" cap="flat" cmpd="sng" algn="ctr">
-                      <a:solidFill>
-                        <a:srgbClr val="BDBDBD"/>
-                      </a:solidFill>
-                    </a:lnR>
-                    <a:lnT w="6350" cap="flat" cmpd="sng" algn="ctr">
-                      <a:solidFill>
-                        <a:srgbClr val="BDBDBD"/>
-                      </a:solidFill>
-                    </a:lnT>
-                    <a:lnB w="6350" cap="flat" cmpd="sng" algn="ctr">
-                      <a:solidFill>
-                        <a:srgbClr val="BDBDBD"/>
+                        <a:srgbClr val="808080"/>
+                      </a:solidFill>
+                    </a:lnL>
+                    <a:lnR w="6350" cap="flat" cmpd="sng" algn="ctr">
+                      <a:solidFill>
+                        <a:srgbClr val="808080"/>
+                      </a:solidFill>
+                    </a:lnR>
+                    <a:lnT w="6350" cap="flat" cmpd="sng" algn="ctr">
+                      <a:solidFill>
+                        <a:srgbClr val="808080"/>
+                      </a:solidFill>
+                    </a:lnT>
+                    <a:lnB w="6350" cap="flat" cmpd="sng" algn="ctr">
+                      <a:solidFill>
+                        <a:srgbClr val="808080"/>
                       </a:solidFill>
                     </a:lnB>
                   </a:tcPr>
@@ -10678,22 +10678,22 @@
                     </a:solidFill>
                     <a:lnL w="6350" cap="flat" cmpd="sng" algn="ctr">
                       <a:solidFill>
-                        <a:srgbClr val="BDBDBD"/>
-                      </a:solidFill>
-                    </a:lnL>
-                    <a:lnR w="6350" cap="flat" cmpd="sng" algn="ctr">
-                      <a:solidFill>
-                        <a:srgbClr val="BDBDBD"/>
-                      </a:solidFill>
-                    </a:lnR>
-                    <a:lnT w="6350" cap="flat" cmpd="sng" algn="ctr">
-                      <a:solidFill>
-                        <a:srgbClr val="BDBDBD"/>
-                      </a:solidFill>
-                    </a:lnT>
-                    <a:lnB w="6350" cap="flat" cmpd="sng" algn="ctr">
-                      <a:solidFill>
-                        <a:srgbClr val="BDBDBD"/>
+                        <a:srgbClr val="808080"/>
+                      </a:solidFill>
+                    </a:lnL>
+                    <a:lnR w="6350" cap="flat" cmpd="sng" algn="ctr">
+                      <a:solidFill>
+                        <a:srgbClr val="808080"/>
+                      </a:solidFill>
+                    </a:lnR>
+                    <a:lnT w="6350" cap="flat" cmpd="sng" algn="ctr">
+                      <a:solidFill>
+                        <a:srgbClr val="808080"/>
+                      </a:solidFill>
+                    </a:lnT>
+                    <a:lnB w="6350" cap="flat" cmpd="sng" algn="ctr">
+                      <a:solidFill>
+                        <a:srgbClr val="808080"/>
                       </a:solidFill>
                     </a:lnB>
                   </a:tcPr>
@@ -10721,22 +10721,22 @@
                     </a:solidFill>
                     <a:lnL w="6350" cap="flat" cmpd="sng" algn="ctr">
                       <a:solidFill>
-                        <a:srgbClr val="BDBDBD"/>
-                      </a:solidFill>
-                    </a:lnL>
-                    <a:lnR w="6350" cap="flat" cmpd="sng" algn="ctr">
-                      <a:solidFill>
-                        <a:srgbClr val="BDBDBD"/>
-                      </a:solidFill>
-                    </a:lnR>
-                    <a:lnT w="6350" cap="flat" cmpd="sng" algn="ctr">
-                      <a:solidFill>
-                        <a:srgbClr val="BDBDBD"/>
-                      </a:solidFill>
-                    </a:lnT>
-                    <a:lnB w="6350" cap="flat" cmpd="sng" algn="ctr">
-                      <a:solidFill>
-                        <a:srgbClr val="BDBDBD"/>
+                        <a:srgbClr val="808080"/>
+                      </a:solidFill>
+                    </a:lnL>
+                    <a:lnR w="6350" cap="flat" cmpd="sng" algn="ctr">
+                      <a:solidFill>
+                        <a:srgbClr val="808080"/>
+                      </a:solidFill>
+                    </a:lnR>
+                    <a:lnT w="6350" cap="flat" cmpd="sng" algn="ctr">
+                      <a:solidFill>
+                        <a:srgbClr val="808080"/>
+                      </a:solidFill>
+                    </a:lnT>
+                    <a:lnB w="6350" cap="flat" cmpd="sng" algn="ctr">
+                      <a:solidFill>
+                        <a:srgbClr val="808080"/>
                       </a:solidFill>
                     </a:lnB>
                   </a:tcPr>
@@ -10766,22 +10766,22 @@
                     </a:solidFill>
                     <a:lnL w="6350" cap="flat" cmpd="sng" algn="ctr">
                       <a:solidFill>
-                        <a:srgbClr val="BDBDBD"/>
-                      </a:solidFill>
-                    </a:lnL>
-                    <a:lnR w="6350" cap="flat" cmpd="sng" algn="ctr">
-                      <a:solidFill>
-                        <a:srgbClr val="BDBDBD"/>
-                      </a:solidFill>
-                    </a:lnR>
-                    <a:lnT w="6350" cap="flat" cmpd="sng" algn="ctr">
-                      <a:solidFill>
-                        <a:srgbClr val="BDBDBD"/>
-                      </a:solidFill>
-                    </a:lnT>
-                    <a:lnB w="6350" cap="flat" cmpd="sng" algn="ctr">
-                      <a:solidFill>
-                        <a:srgbClr val="BDBDBD"/>
+                        <a:srgbClr val="808080"/>
+                      </a:solidFill>
+                    </a:lnL>
+                    <a:lnR w="6350" cap="flat" cmpd="sng" algn="ctr">
+                      <a:solidFill>
+                        <a:srgbClr val="808080"/>
+                      </a:solidFill>
+                    </a:lnR>
+                    <a:lnT w="6350" cap="flat" cmpd="sng" algn="ctr">
+                      <a:solidFill>
+                        <a:srgbClr val="808080"/>
+                      </a:solidFill>
+                    </a:lnT>
+                    <a:lnB w="6350" cap="flat" cmpd="sng" algn="ctr">
+                      <a:solidFill>
+                        <a:srgbClr val="808080"/>
                       </a:solidFill>
                     </a:lnB>
                   </a:tcPr>
@@ -10809,22 +10809,22 @@
                     </a:solidFill>
                     <a:lnL w="6350" cap="flat" cmpd="sng" algn="ctr">
                       <a:solidFill>
-                        <a:srgbClr val="BDBDBD"/>
-                      </a:solidFill>
-                    </a:lnL>
-                    <a:lnR w="6350" cap="flat" cmpd="sng" algn="ctr">
-                      <a:solidFill>
-                        <a:srgbClr val="BDBDBD"/>
-                      </a:solidFill>
-                    </a:lnR>
-                    <a:lnT w="6350" cap="flat" cmpd="sng" algn="ctr">
-                      <a:solidFill>
-                        <a:srgbClr val="BDBDBD"/>
-                      </a:solidFill>
-                    </a:lnT>
-                    <a:lnB w="6350" cap="flat" cmpd="sng" algn="ctr">
-                      <a:solidFill>
-                        <a:srgbClr val="BDBDBD"/>
+                        <a:srgbClr val="808080"/>
+                      </a:solidFill>
+                    </a:lnL>
+                    <a:lnR w="6350" cap="flat" cmpd="sng" algn="ctr">
+                      <a:solidFill>
+                        <a:srgbClr val="808080"/>
+                      </a:solidFill>
+                    </a:lnR>
+                    <a:lnT w="6350" cap="flat" cmpd="sng" algn="ctr">
+                      <a:solidFill>
+                        <a:srgbClr val="808080"/>
+                      </a:solidFill>
+                    </a:lnT>
+                    <a:lnB w="6350" cap="flat" cmpd="sng" algn="ctr">
+                      <a:solidFill>
+                        <a:srgbClr val="808080"/>
                       </a:solidFill>
                     </a:lnB>
                   </a:tcPr>
@@ -10915,22 +10915,22 @@
                     </a:solidFill>
                     <a:lnL w="6350" cap="flat" cmpd="sng" algn="ctr">
                       <a:solidFill>
-                        <a:srgbClr val="BDBDBD"/>
-                      </a:solidFill>
-                    </a:lnL>
-                    <a:lnR w="6350" cap="flat" cmpd="sng" algn="ctr">
-                      <a:solidFill>
-                        <a:srgbClr val="BDBDBD"/>
-                      </a:solidFill>
-                    </a:lnR>
-                    <a:lnT w="6350" cap="flat" cmpd="sng" algn="ctr">
-                      <a:solidFill>
-                        <a:srgbClr val="BDBDBD"/>
-                      </a:solidFill>
-                    </a:lnT>
-                    <a:lnB w="6350" cap="flat" cmpd="sng" algn="ctr">
-                      <a:solidFill>
-                        <a:srgbClr val="BDBDBD"/>
+                        <a:srgbClr val="808080"/>
+                      </a:solidFill>
+                    </a:lnL>
+                    <a:lnR w="6350" cap="flat" cmpd="sng" algn="ctr">
+                      <a:solidFill>
+                        <a:srgbClr val="808080"/>
+                      </a:solidFill>
+                    </a:lnR>
+                    <a:lnT w="6350" cap="flat" cmpd="sng" algn="ctr">
+                      <a:solidFill>
+                        <a:srgbClr val="808080"/>
+                      </a:solidFill>
+                    </a:lnT>
+                    <a:lnB w="6350" cap="flat" cmpd="sng" algn="ctr">
+                      <a:solidFill>
+                        <a:srgbClr val="808080"/>
                       </a:solidFill>
                     </a:lnB>
                   </a:tcPr>
@@ -10958,22 +10958,22 @@
                     </a:solidFill>
                     <a:lnL w="6350" cap="flat" cmpd="sng" algn="ctr">
                       <a:solidFill>
-                        <a:srgbClr val="BDBDBD"/>
-                      </a:solidFill>
-                    </a:lnL>
-                    <a:lnR w="6350" cap="flat" cmpd="sng" algn="ctr">
-                      <a:solidFill>
-                        <a:srgbClr val="BDBDBD"/>
-                      </a:solidFill>
-                    </a:lnR>
-                    <a:lnT w="6350" cap="flat" cmpd="sng" algn="ctr">
-                      <a:solidFill>
-                        <a:srgbClr val="BDBDBD"/>
-                      </a:solidFill>
-                    </a:lnT>
-                    <a:lnB w="6350" cap="flat" cmpd="sng" algn="ctr">
-                      <a:solidFill>
-                        <a:srgbClr val="BDBDBD"/>
+                        <a:srgbClr val="808080"/>
+                      </a:solidFill>
+                    </a:lnL>
+                    <a:lnR w="6350" cap="flat" cmpd="sng" algn="ctr">
+                      <a:solidFill>
+                        <a:srgbClr val="808080"/>
+                      </a:solidFill>
+                    </a:lnR>
+                    <a:lnT w="6350" cap="flat" cmpd="sng" algn="ctr">
+                      <a:solidFill>
+                        <a:srgbClr val="808080"/>
+                      </a:solidFill>
+                    </a:lnT>
+                    <a:lnB w="6350" cap="flat" cmpd="sng" algn="ctr">
+                      <a:solidFill>
+                        <a:srgbClr val="808080"/>
                       </a:solidFill>
                     </a:lnB>
                   </a:tcPr>
@@ -11003,22 +11003,22 @@
                     </a:solidFill>
                     <a:lnL w="6350" cap="flat" cmpd="sng" algn="ctr">
                       <a:solidFill>
-                        <a:srgbClr val="BDBDBD"/>
-                      </a:solidFill>
-                    </a:lnL>
-                    <a:lnR w="6350" cap="flat" cmpd="sng" algn="ctr">
-                      <a:solidFill>
-                        <a:srgbClr val="BDBDBD"/>
-                      </a:solidFill>
-                    </a:lnR>
-                    <a:lnT w="6350" cap="flat" cmpd="sng" algn="ctr">
-                      <a:solidFill>
-                        <a:srgbClr val="BDBDBD"/>
-                      </a:solidFill>
-                    </a:lnT>
-                    <a:lnB w="6350" cap="flat" cmpd="sng" algn="ctr">
-                      <a:solidFill>
-                        <a:srgbClr val="BDBDBD"/>
+                        <a:srgbClr val="808080"/>
+                      </a:solidFill>
+                    </a:lnL>
+                    <a:lnR w="6350" cap="flat" cmpd="sng" algn="ctr">
+                      <a:solidFill>
+                        <a:srgbClr val="808080"/>
+                      </a:solidFill>
+                    </a:lnR>
+                    <a:lnT w="6350" cap="flat" cmpd="sng" algn="ctr">
+                      <a:solidFill>
+                        <a:srgbClr val="808080"/>
+                      </a:solidFill>
+                    </a:lnT>
+                    <a:lnB w="6350" cap="flat" cmpd="sng" algn="ctr">
+                      <a:solidFill>
+                        <a:srgbClr val="808080"/>
                       </a:solidFill>
                     </a:lnB>
                   </a:tcPr>
@@ -11046,22 +11046,22 @@
                     </a:solidFill>
                     <a:lnL w="6350" cap="flat" cmpd="sng" algn="ctr">
                       <a:solidFill>
-                        <a:srgbClr val="BDBDBD"/>
-                      </a:solidFill>
-                    </a:lnL>
-                    <a:lnR w="6350" cap="flat" cmpd="sng" algn="ctr">
-                      <a:solidFill>
-                        <a:srgbClr val="BDBDBD"/>
-                      </a:solidFill>
-                    </a:lnR>
-                    <a:lnT w="6350" cap="flat" cmpd="sng" algn="ctr">
-                      <a:solidFill>
-                        <a:srgbClr val="BDBDBD"/>
-                      </a:solidFill>
-                    </a:lnT>
-                    <a:lnB w="6350" cap="flat" cmpd="sng" algn="ctr">
-                      <a:solidFill>
-                        <a:srgbClr val="BDBDBD"/>
+                        <a:srgbClr val="808080"/>
+                      </a:solidFill>
+                    </a:lnL>
+                    <a:lnR w="6350" cap="flat" cmpd="sng" algn="ctr">
+                      <a:solidFill>
+                        <a:srgbClr val="808080"/>
+                      </a:solidFill>
+                    </a:lnR>
+                    <a:lnT w="6350" cap="flat" cmpd="sng" algn="ctr">
+                      <a:solidFill>
+                        <a:srgbClr val="808080"/>
+                      </a:solidFill>
+                    </a:lnT>
+                    <a:lnB w="6350" cap="flat" cmpd="sng" algn="ctr">
+                      <a:solidFill>
+                        <a:srgbClr val="808080"/>
                       </a:solidFill>
                     </a:lnB>
                   </a:tcPr>
@@ -11091,22 +11091,22 @@
                     </a:solidFill>
                     <a:lnL w="6350" cap="flat" cmpd="sng" algn="ctr">
                       <a:solidFill>
-                        <a:srgbClr val="BDBDBD"/>
-                      </a:solidFill>
-                    </a:lnL>
-                    <a:lnR w="6350" cap="flat" cmpd="sng" algn="ctr">
-                      <a:solidFill>
-                        <a:srgbClr val="BDBDBD"/>
-                      </a:solidFill>
-                    </a:lnR>
-                    <a:lnT w="6350" cap="flat" cmpd="sng" algn="ctr">
-                      <a:solidFill>
-                        <a:srgbClr val="BDBDBD"/>
-                      </a:solidFill>
-                    </a:lnT>
-                    <a:lnB w="6350" cap="flat" cmpd="sng" algn="ctr">
-                      <a:solidFill>
-                        <a:srgbClr val="BDBDBD"/>
+                        <a:srgbClr val="808080"/>
+                      </a:solidFill>
+                    </a:lnL>
+                    <a:lnR w="6350" cap="flat" cmpd="sng" algn="ctr">
+                      <a:solidFill>
+                        <a:srgbClr val="808080"/>
+                      </a:solidFill>
+                    </a:lnR>
+                    <a:lnT w="6350" cap="flat" cmpd="sng" algn="ctr">
+                      <a:solidFill>
+                        <a:srgbClr val="808080"/>
+                      </a:solidFill>
+                    </a:lnT>
+                    <a:lnB w="6350" cap="flat" cmpd="sng" algn="ctr">
+                      <a:solidFill>
+                        <a:srgbClr val="808080"/>
                       </a:solidFill>
                     </a:lnB>
                   </a:tcPr>
@@ -11134,22 +11134,22 @@
                     </a:solidFill>
                     <a:lnL w="6350" cap="flat" cmpd="sng" algn="ctr">
                       <a:solidFill>
-                        <a:srgbClr val="BDBDBD"/>
-                      </a:solidFill>
-                    </a:lnL>
-                    <a:lnR w="6350" cap="flat" cmpd="sng" algn="ctr">
-                      <a:solidFill>
-                        <a:srgbClr val="BDBDBD"/>
-                      </a:solidFill>
-                    </a:lnR>
-                    <a:lnT w="6350" cap="flat" cmpd="sng" algn="ctr">
-                      <a:solidFill>
-                        <a:srgbClr val="BDBDBD"/>
-                      </a:solidFill>
-                    </a:lnT>
-                    <a:lnB w="6350" cap="flat" cmpd="sng" algn="ctr">
-                      <a:solidFill>
-                        <a:srgbClr val="BDBDBD"/>
+                        <a:srgbClr val="808080"/>
+                      </a:solidFill>
+                    </a:lnL>
+                    <a:lnR w="6350" cap="flat" cmpd="sng" algn="ctr">
+                      <a:solidFill>
+                        <a:srgbClr val="808080"/>
+                      </a:solidFill>
+                    </a:lnR>
+                    <a:lnT w="6350" cap="flat" cmpd="sng" algn="ctr">
+                      <a:solidFill>
+                        <a:srgbClr val="808080"/>
+                      </a:solidFill>
+                    </a:lnT>
+                    <a:lnB w="6350" cap="flat" cmpd="sng" algn="ctr">
+                      <a:solidFill>
+                        <a:srgbClr val="808080"/>
                       </a:solidFill>
                     </a:lnB>
                   </a:tcPr>
@@ -11179,22 +11179,22 @@
                     </a:solidFill>
                     <a:lnL w="6350" cap="flat" cmpd="sng" algn="ctr">
                       <a:solidFill>
-                        <a:srgbClr val="BDBDBD"/>
-                      </a:solidFill>
-                    </a:lnL>
-                    <a:lnR w="6350" cap="flat" cmpd="sng" algn="ctr">
-                      <a:solidFill>
-                        <a:srgbClr val="BDBDBD"/>
-                      </a:solidFill>
-                    </a:lnR>
-                    <a:lnT w="6350" cap="flat" cmpd="sng" algn="ctr">
-                      <a:solidFill>
-                        <a:srgbClr val="BDBDBD"/>
-                      </a:solidFill>
-                    </a:lnT>
-                    <a:lnB w="6350" cap="flat" cmpd="sng" algn="ctr">
-                      <a:solidFill>
-                        <a:srgbClr val="BDBDBD"/>
+                        <a:srgbClr val="808080"/>
+                      </a:solidFill>
+                    </a:lnL>
+                    <a:lnR w="6350" cap="flat" cmpd="sng" algn="ctr">
+                      <a:solidFill>
+                        <a:srgbClr val="808080"/>
+                      </a:solidFill>
+                    </a:lnR>
+                    <a:lnT w="6350" cap="flat" cmpd="sng" algn="ctr">
+                      <a:solidFill>
+                        <a:srgbClr val="808080"/>
+                      </a:solidFill>
+                    </a:lnT>
+                    <a:lnB w="6350" cap="flat" cmpd="sng" algn="ctr">
+                      <a:solidFill>
+                        <a:srgbClr val="808080"/>
                       </a:solidFill>
                     </a:lnB>
                   </a:tcPr>
@@ -11222,22 +11222,22 @@
                     </a:solidFill>
                     <a:lnL w="6350" cap="flat" cmpd="sng" algn="ctr">
                       <a:solidFill>
-                        <a:srgbClr val="BDBDBD"/>
-                      </a:solidFill>
-                    </a:lnL>
-                    <a:lnR w="6350" cap="flat" cmpd="sng" algn="ctr">
-                      <a:solidFill>
-                        <a:srgbClr val="BDBDBD"/>
-                      </a:solidFill>
-                    </a:lnR>
-                    <a:lnT w="6350" cap="flat" cmpd="sng" algn="ctr">
-                      <a:solidFill>
-                        <a:srgbClr val="BDBDBD"/>
-                      </a:solidFill>
-                    </a:lnT>
-                    <a:lnB w="6350" cap="flat" cmpd="sng" algn="ctr">
-                      <a:solidFill>
-                        <a:srgbClr val="BDBDBD"/>
+                        <a:srgbClr val="808080"/>
+                      </a:solidFill>
+                    </a:lnL>
+                    <a:lnR w="6350" cap="flat" cmpd="sng" algn="ctr">
+                      <a:solidFill>
+                        <a:srgbClr val="808080"/>
+                      </a:solidFill>
+                    </a:lnR>
+                    <a:lnT w="6350" cap="flat" cmpd="sng" algn="ctr">
+                      <a:solidFill>
+                        <a:srgbClr val="808080"/>
+                      </a:solidFill>
+                    </a:lnT>
+                    <a:lnB w="6350" cap="flat" cmpd="sng" algn="ctr">
+                      <a:solidFill>
+                        <a:srgbClr val="808080"/>
                       </a:solidFill>
                     </a:lnB>
                   </a:tcPr>
@@ -11267,22 +11267,22 @@
                     </a:solidFill>
                     <a:lnL w="6350" cap="flat" cmpd="sng" algn="ctr">
                       <a:solidFill>
-                        <a:srgbClr val="BDBDBD"/>
-                      </a:solidFill>
-                    </a:lnL>
-                    <a:lnR w="6350" cap="flat" cmpd="sng" algn="ctr">
-                      <a:solidFill>
-                        <a:srgbClr val="BDBDBD"/>
-                      </a:solidFill>
-                    </a:lnR>
-                    <a:lnT w="6350" cap="flat" cmpd="sng" algn="ctr">
-                      <a:solidFill>
-                        <a:srgbClr val="BDBDBD"/>
-                      </a:solidFill>
-                    </a:lnT>
-                    <a:lnB w="6350" cap="flat" cmpd="sng" algn="ctr">
-                      <a:solidFill>
-                        <a:srgbClr val="BDBDBD"/>
+                        <a:srgbClr val="808080"/>
+                      </a:solidFill>
+                    </a:lnL>
+                    <a:lnR w="6350" cap="flat" cmpd="sng" algn="ctr">
+                      <a:solidFill>
+                        <a:srgbClr val="808080"/>
+                      </a:solidFill>
+                    </a:lnR>
+                    <a:lnT w="6350" cap="flat" cmpd="sng" algn="ctr">
+                      <a:solidFill>
+                        <a:srgbClr val="808080"/>
+                      </a:solidFill>
+                    </a:lnT>
+                    <a:lnB w="6350" cap="flat" cmpd="sng" algn="ctr">
+                      <a:solidFill>
+                        <a:srgbClr val="808080"/>
                       </a:solidFill>
                     </a:lnB>
                   </a:tcPr>
@@ -11310,22 +11310,22 @@
                     </a:solidFill>
                     <a:lnL w="6350" cap="flat" cmpd="sng" algn="ctr">
                       <a:solidFill>
-                        <a:srgbClr val="BDBDBD"/>
-                      </a:solidFill>
-                    </a:lnL>
-                    <a:lnR w="6350" cap="flat" cmpd="sng" algn="ctr">
-                      <a:solidFill>
-                        <a:srgbClr val="BDBDBD"/>
-                      </a:solidFill>
-                    </a:lnR>
-                    <a:lnT w="6350" cap="flat" cmpd="sng" algn="ctr">
-                      <a:solidFill>
-                        <a:srgbClr val="BDBDBD"/>
-                      </a:solidFill>
-                    </a:lnT>
-                    <a:lnB w="6350" cap="flat" cmpd="sng" algn="ctr">
-                      <a:solidFill>
-                        <a:srgbClr val="BDBDBD"/>
+                        <a:srgbClr val="808080"/>
+                      </a:solidFill>
+                    </a:lnL>
+                    <a:lnR w="6350" cap="flat" cmpd="sng" algn="ctr">
+                      <a:solidFill>
+                        <a:srgbClr val="808080"/>
+                      </a:solidFill>
+                    </a:lnR>
+                    <a:lnT w="6350" cap="flat" cmpd="sng" algn="ctr">
+                      <a:solidFill>
+                        <a:srgbClr val="808080"/>
+                      </a:solidFill>
+                    </a:lnT>
+                    <a:lnB w="6350" cap="flat" cmpd="sng" algn="ctr">
+                      <a:solidFill>
+                        <a:srgbClr val="808080"/>
                       </a:solidFill>
                     </a:lnB>
                   </a:tcPr>
@@ -11742,7 +11742,7 @@
           </a:solidFill>
           <a:ln w="19050">
             <a:solidFill>
-              <a:srgbClr val="BDBDBD"/>
+              <a:srgbClr val="808080"/>
             </a:solidFill>
           </a:ln>
         </p:spPr>
@@ -11810,7 +11810,7 @@
           </a:solidFill>
           <a:ln w="19050">
             <a:solidFill>
-              <a:srgbClr val="BDBDBD"/>
+              <a:srgbClr val="808080"/>
             </a:solidFill>
           </a:ln>
         </p:spPr>
@@ -11878,7 +11878,7 @@
           </a:solidFill>
           <a:ln w="19050">
             <a:solidFill>
-              <a:srgbClr val="BDBDBD"/>
+              <a:srgbClr val="808080"/>
             </a:solidFill>
           </a:ln>
         </p:spPr>
@@ -11989,7 +11989,7 @@
           </a:solidFill>
           <a:ln w="19050">
             <a:solidFill>
-              <a:srgbClr val="BDBDBD"/>
+              <a:srgbClr val="808080"/>
             </a:solidFill>
           </a:ln>
         </p:spPr>
@@ -12161,22 +12161,22 @@
                     </a:solidFill>
                     <a:lnL w="6350" cap="flat" cmpd="sng" algn="ctr">
                       <a:solidFill>
-                        <a:srgbClr val="BDBDBD"/>
-                      </a:solidFill>
-                    </a:lnL>
-                    <a:lnR w="6350" cap="flat" cmpd="sng" algn="ctr">
-                      <a:solidFill>
-                        <a:srgbClr val="BDBDBD"/>
-                      </a:solidFill>
-                    </a:lnR>
-                    <a:lnT w="6350" cap="flat" cmpd="sng" algn="ctr">
-                      <a:solidFill>
-                        <a:srgbClr val="BDBDBD"/>
-                      </a:solidFill>
-                    </a:lnT>
-                    <a:lnB w="6350" cap="flat" cmpd="sng" algn="ctr">
-                      <a:solidFill>
-                        <a:srgbClr val="BDBDBD"/>
+                        <a:srgbClr val="808080"/>
+                      </a:solidFill>
+                    </a:lnL>
+                    <a:lnR w="6350" cap="flat" cmpd="sng" algn="ctr">
+                      <a:solidFill>
+                        <a:srgbClr val="808080"/>
+                      </a:solidFill>
+                    </a:lnR>
+                    <a:lnT w="6350" cap="flat" cmpd="sng" algn="ctr">
+                      <a:solidFill>
+                        <a:srgbClr val="808080"/>
+                      </a:solidFill>
+                    </a:lnT>
+                    <a:lnB w="6350" cap="flat" cmpd="sng" algn="ctr">
+                      <a:solidFill>
+                        <a:srgbClr val="808080"/>
                       </a:solidFill>
                     </a:lnB>
                   </a:tcPr>
@@ -12204,22 +12204,22 @@
                     </a:solidFill>
                     <a:lnL w="6350" cap="flat" cmpd="sng" algn="ctr">
                       <a:solidFill>
-                        <a:srgbClr val="BDBDBD"/>
-                      </a:solidFill>
-                    </a:lnL>
-                    <a:lnR w="6350" cap="flat" cmpd="sng" algn="ctr">
-                      <a:solidFill>
-                        <a:srgbClr val="BDBDBD"/>
-                      </a:solidFill>
-                    </a:lnR>
-                    <a:lnT w="6350" cap="flat" cmpd="sng" algn="ctr">
-                      <a:solidFill>
-                        <a:srgbClr val="BDBDBD"/>
-                      </a:solidFill>
-                    </a:lnT>
-                    <a:lnB w="6350" cap="flat" cmpd="sng" algn="ctr">
-                      <a:solidFill>
-                        <a:srgbClr val="BDBDBD"/>
+                        <a:srgbClr val="808080"/>
+                      </a:solidFill>
+                    </a:lnL>
+                    <a:lnR w="6350" cap="flat" cmpd="sng" algn="ctr">
+                      <a:solidFill>
+                        <a:srgbClr val="808080"/>
+                      </a:solidFill>
+                    </a:lnR>
+                    <a:lnT w="6350" cap="flat" cmpd="sng" algn="ctr">
+                      <a:solidFill>
+                        <a:srgbClr val="808080"/>
+                      </a:solidFill>
+                    </a:lnT>
+                    <a:lnB w="6350" cap="flat" cmpd="sng" algn="ctr">
+                      <a:solidFill>
+                        <a:srgbClr val="808080"/>
                       </a:solidFill>
                     </a:lnB>
                   </a:tcPr>
@@ -12247,22 +12247,22 @@
                     </a:solidFill>
                     <a:lnL w="6350" cap="flat" cmpd="sng" algn="ctr">
                       <a:solidFill>
-                        <a:srgbClr val="BDBDBD"/>
-                      </a:solidFill>
-                    </a:lnL>
-                    <a:lnR w="6350" cap="flat" cmpd="sng" algn="ctr">
-                      <a:solidFill>
-                        <a:srgbClr val="BDBDBD"/>
-                      </a:solidFill>
-                    </a:lnR>
-                    <a:lnT w="6350" cap="flat" cmpd="sng" algn="ctr">
-                      <a:solidFill>
-                        <a:srgbClr val="BDBDBD"/>
-                      </a:solidFill>
-                    </a:lnT>
-                    <a:lnB w="6350" cap="flat" cmpd="sng" algn="ctr">
-                      <a:solidFill>
-                        <a:srgbClr val="BDBDBD"/>
+                        <a:srgbClr val="808080"/>
+                      </a:solidFill>
+                    </a:lnL>
+                    <a:lnR w="6350" cap="flat" cmpd="sng" algn="ctr">
+                      <a:solidFill>
+                        <a:srgbClr val="808080"/>
+                      </a:solidFill>
+                    </a:lnR>
+                    <a:lnT w="6350" cap="flat" cmpd="sng" algn="ctr">
+                      <a:solidFill>
+                        <a:srgbClr val="808080"/>
+                      </a:solidFill>
+                    </a:lnT>
+                    <a:lnB w="6350" cap="flat" cmpd="sng" algn="ctr">
+                      <a:solidFill>
+                        <a:srgbClr val="808080"/>
                       </a:solidFill>
                     </a:lnB>
                   </a:tcPr>
@@ -12292,22 +12292,22 @@
                     </a:solidFill>
                     <a:lnL w="6350" cap="flat" cmpd="sng" algn="ctr">
                       <a:solidFill>
-                        <a:srgbClr val="BDBDBD"/>
-                      </a:solidFill>
-                    </a:lnL>
-                    <a:lnR w="6350" cap="flat" cmpd="sng" algn="ctr">
-                      <a:solidFill>
-                        <a:srgbClr val="BDBDBD"/>
-                      </a:solidFill>
-                    </a:lnR>
-                    <a:lnT w="6350" cap="flat" cmpd="sng" algn="ctr">
-                      <a:solidFill>
-                        <a:srgbClr val="BDBDBD"/>
-                      </a:solidFill>
-                    </a:lnT>
-                    <a:lnB w="6350" cap="flat" cmpd="sng" algn="ctr">
-                      <a:solidFill>
-                        <a:srgbClr val="BDBDBD"/>
+                        <a:srgbClr val="808080"/>
+                      </a:solidFill>
+                    </a:lnL>
+                    <a:lnR w="6350" cap="flat" cmpd="sng" algn="ctr">
+                      <a:solidFill>
+                        <a:srgbClr val="808080"/>
+                      </a:solidFill>
+                    </a:lnR>
+                    <a:lnT w="6350" cap="flat" cmpd="sng" algn="ctr">
+                      <a:solidFill>
+                        <a:srgbClr val="808080"/>
+                      </a:solidFill>
+                    </a:lnT>
+                    <a:lnB w="6350" cap="flat" cmpd="sng" algn="ctr">
+                      <a:solidFill>
+                        <a:srgbClr val="808080"/>
                       </a:solidFill>
                     </a:lnB>
                   </a:tcPr>
@@ -12335,22 +12335,22 @@
                     </a:solidFill>
                     <a:lnL w="6350" cap="flat" cmpd="sng" algn="ctr">
                       <a:solidFill>
-                        <a:srgbClr val="BDBDBD"/>
-                      </a:solidFill>
-                    </a:lnL>
-                    <a:lnR w="6350" cap="flat" cmpd="sng" algn="ctr">
-                      <a:solidFill>
-                        <a:srgbClr val="BDBDBD"/>
-                      </a:solidFill>
-                    </a:lnR>
-                    <a:lnT w="6350" cap="flat" cmpd="sng" algn="ctr">
-                      <a:solidFill>
-                        <a:srgbClr val="BDBDBD"/>
-                      </a:solidFill>
-                    </a:lnT>
-                    <a:lnB w="6350" cap="flat" cmpd="sng" algn="ctr">
-                      <a:solidFill>
-                        <a:srgbClr val="BDBDBD"/>
+                        <a:srgbClr val="808080"/>
+                      </a:solidFill>
+                    </a:lnL>
+                    <a:lnR w="6350" cap="flat" cmpd="sng" algn="ctr">
+                      <a:solidFill>
+                        <a:srgbClr val="808080"/>
+                      </a:solidFill>
+                    </a:lnR>
+                    <a:lnT w="6350" cap="flat" cmpd="sng" algn="ctr">
+                      <a:solidFill>
+                        <a:srgbClr val="808080"/>
+                      </a:solidFill>
+                    </a:lnT>
+                    <a:lnB w="6350" cap="flat" cmpd="sng" algn="ctr">
+                      <a:solidFill>
+                        <a:srgbClr val="808080"/>
                       </a:solidFill>
                     </a:lnB>
                   </a:tcPr>
@@ -12378,22 +12378,22 @@
                     </a:solidFill>
                     <a:lnL w="6350" cap="flat" cmpd="sng" algn="ctr">
                       <a:solidFill>
-                        <a:srgbClr val="BDBDBD"/>
-                      </a:solidFill>
-                    </a:lnL>
-                    <a:lnR w="6350" cap="flat" cmpd="sng" algn="ctr">
-                      <a:solidFill>
-                        <a:srgbClr val="BDBDBD"/>
-                      </a:solidFill>
-                    </a:lnR>
-                    <a:lnT w="6350" cap="flat" cmpd="sng" algn="ctr">
-                      <a:solidFill>
-                        <a:srgbClr val="BDBDBD"/>
-                      </a:solidFill>
-                    </a:lnT>
-                    <a:lnB w="6350" cap="flat" cmpd="sng" algn="ctr">
-                      <a:solidFill>
-                        <a:srgbClr val="BDBDBD"/>
+                        <a:srgbClr val="808080"/>
+                      </a:solidFill>
+                    </a:lnL>
+                    <a:lnR w="6350" cap="flat" cmpd="sng" algn="ctr">
+                      <a:solidFill>
+                        <a:srgbClr val="808080"/>
+                      </a:solidFill>
+                    </a:lnR>
+                    <a:lnT w="6350" cap="flat" cmpd="sng" algn="ctr">
+                      <a:solidFill>
+                        <a:srgbClr val="808080"/>
+                      </a:solidFill>
+                    </a:lnT>
+                    <a:lnB w="6350" cap="flat" cmpd="sng" algn="ctr">
+                      <a:solidFill>
+                        <a:srgbClr val="808080"/>
                       </a:solidFill>
                     </a:lnB>
                   </a:tcPr>
@@ -12423,22 +12423,22 @@
                     </a:solidFill>
                     <a:lnL w="6350" cap="flat" cmpd="sng" algn="ctr">
                       <a:solidFill>
-                        <a:srgbClr val="BDBDBD"/>
-                      </a:solidFill>
-                    </a:lnL>
-                    <a:lnR w="6350" cap="flat" cmpd="sng" algn="ctr">
-                      <a:solidFill>
-                        <a:srgbClr val="BDBDBD"/>
-                      </a:solidFill>
-                    </a:lnR>
-                    <a:lnT w="6350" cap="flat" cmpd="sng" algn="ctr">
-                      <a:solidFill>
-                        <a:srgbClr val="BDBDBD"/>
-                      </a:solidFill>
-                    </a:lnT>
-                    <a:lnB w="6350" cap="flat" cmpd="sng" algn="ctr">
-                      <a:solidFill>
-                        <a:srgbClr val="BDBDBD"/>
+                        <a:srgbClr val="808080"/>
+                      </a:solidFill>
+                    </a:lnL>
+                    <a:lnR w="6350" cap="flat" cmpd="sng" algn="ctr">
+                      <a:solidFill>
+                        <a:srgbClr val="808080"/>
+                      </a:solidFill>
+                    </a:lnR>
+                    <a:lnT w="6350" cap="flat" cmpd="sng" algn="ctr">
+                      <a:solidFill>
+                        <a:srgbClr val="808080"/>
+                      </a:solidFill>
+                    </a:lnT>
+                    <a:lnB w="6350" cap="flat" cmpd="sng" algn="ctr">
+                      <a:solidFill>
+                        <a:srgbClr val="808080"/>
                       </a:solidFill>
                     </a:lnB>
                   </a:tcPr>
@@ -12466,22 +12466,22 @@
                     </a:solidFill>
                     <a:lnL w="6350" cap="flat" cmpd="sng" algn="ctr">
                       <a:solidFill>
-                        <a:srgbClr val="BDBDBD"/>
-                      </a:solidFill>
-                    </a:lnL>
-                    <a:lnR w="6350" cap="flat" cmpd="sng" algn="ctr">
-                      <a:solidFill>
-                        <a:srgbClr val="BDBDBD"/>
-                      </a:solidFill>
-                    </a:lnR>
-                    <a:lnT w="6350" cap="flat" cmpd="sng" algn="ctr">
-                      <a:solidFill>
-                        <a:srgbClr val="BDBDBD"/>
-                      </a:solidFill>
-                    </a:lnT>
-                    <a:lnB w="6350" cap="flat" cmpd="sng" algn="ctr">
-                      <a:solidFill>
-                        <a:srgbClr val="BDBDBD"/>
+                        <a:srgbClr val="808080"/>
+                      </a:solidFill>
+                    </a:lnL>
+                    <a:lnR w="6350" cap="flat" cmpd="sng" algn="ctr">
+                      <a:solidFill>
+                        <a:srgbClr val="808080"/>
+                      </a:solidFill>
+                    </a:lnR>
+                    <a:lnT w="6350" cap="flat" cmpd="sng" algn="ctr">
+                      <a:solidFill>
+                        <a:srgbClr val="808080"/>
+                      </a:solidFill>
+                    </a:lnT>
+                    <a:lnB w="6350" cap="flat" cmpd="sng" algn="ctr">
+                      <a:solidFill>
+                        <a:srgbClr val="808080"/>
                       </a:solidFill>
                     </a:lnB>
                   </a:tcPr>
@@ -12509,22 +12509,22 @@
                     </a:solidFill>
                     <a:lnL w="6350" cap="flat" cmpd="sng" algn="ctr">
                       <a:solidFill>
-                        <a:srgbClr val="BDBDBD"/>
-                      </a:solidFill>
-                    </a:lnL>
-                    <a:lnR w="6350" cap="flat" cmpd="sng" algn="ctr">
-                      <a:solidFill>
-                        <a:srgbClr val="BDBDBD"/>
-                      </a:solidFill>
-                    </a:lnR>
-                    <a:lnT w="6350" cap="flat" cmpd="sng" algn="ctr">
-                      <a:solidFill>
-                        <a:srgbClr val="BDBDBD"/>
-                      </a:solidFill>
-                    </a:lnT>
-                    <a:lnB w="6350" cap="flat" cmpd="sng" algn="ctr">
-                      <a:solidFill>
-                        <a:srgbClr val="BDBDBD"/>
+                        <a:srgbClr val="808080"/>
+                      </a:solidFill>
+                    </a:lnL>
+                    <a:lnR w="6350" cap="flat" cmpd="sng" algn="ctr">
+                      <a:solidFill>
+                        <a:srgbClr val="808080"/>
+                      </a:solidFill>
+                    </a:lnR>
+                    <a:lnT w="6350" cap="flat" cmpd="sng" algn="ctr">
+                      <a:solidFill>
+                        <a:srgbClr val="808080"/>
+                      </a:solidFill>
+                    </a:lnT>
+                    <a:lnB w="6350" cap="flat" cmpd="sng" algn="ctr">
+                      <a:solidFill>
+                        <a:srgbClr val="808080"/>
                       </a:solidFill>
                     </a:lnB>
                   </a:tcPr>
@@ -12554,22 +12554,22 @@
                     </a:solidFill>
                     <a:lnL w="6350" cap="flat" cmpd="sng" algn="ctr">
                       <a:solidFill>
-                        <a:srgbClr val="BDBDBD"/>
-                      </a:solidFill>
-                    </a:lnL>
-                    <a:lnR w="6350" cap="flat" cmpd="sng" algn="ctr">
-                      <a:solidFill>
-                        <a:srgbClr val="BDBDBD"/>
-                      </a:solidFill>
-                    </a:lnR>
-                    <a:lnT w="6350" cap="flat" cmpd="sng" algn="ctr">
-                      <a:solidFill>
-                        <a:srgbClr val="BDBDBD"/>
-                      </a:solidFill>
-                    </a:lnT>
-                    <a:lnB w="6350" cap="flat" cmpd="sng" algn="ctr">
-                      <a:solidFill>
-                        <a:srgbClr val="BDBDBD"/>
+                        <a:srgbClr val="808080"/>
+                      </a:solidFill>
+                    </a:lnL>
+                    <a:lnR w="6350" cap="flat" cmpd="sng" algn="ctr">
+                      <a:solidFill>
+                        <a:srgbClr val="808080"/>
+                      </a:solidFill>
+                    </a:lnR>
+                    <a:lnT w="6350" cap="flat" cmpd="sng" algn="ctr">
+                      <a:solidFill>
+                        <a:srgbClr val="808080"/>
+                      </a:solidFill>
+                    </a:lnT>
+                    <a:lnB w="6350" cap="flat" cmpd="sng" algn="ctr">
+                      <a:solidFill>
+                        <a:srgbClr val="808080"/>
                       </a:solidFill>
                     </a:lnB>
                   </a:tcPr>
@@ -12597,22 +12597,22 @@
                     </a:solidFill>
                     <a:lnL w="6350" cap="flat" cmpd="sng" algn="ctr">
                       <a:solidFill>
-                        <a:srgbClr val="BDBDBD"/>
-                      </a:solidFill>
-                    </a:lnL>
-                    <a:lnR w="6350" cap="flat" cmpd="sng" algn="ctr">
-                      <a:solidFill>
-                        <a:srgbClr val="BDBDBD"/>
-                      </a:solidFill>
-                    </a:lnR>
-                    <a:lnT w="6350" cap="flat" cmpd="sng" algn="ctr">
-                      <a:solidFill>
-                        <a:srgbClr val="BDBDBD"/>
-                      </a:solidFill>
-                    </a:lnT>
-                    <a:lnB w="6350" cap="flat" cmpd="sng" algn="ctr">
-                      <a:solidFill>
-                        <a:srgbClr val="BDBDBD"/>
+                        <a:srgbClr val="808080"/>
+                      </a:solidFill>
+                    </a:lnL>
+                    <a:lnR w="6350" cap="flat" cmpd="sng" algn="ctr">
+                      <a:solidFill>
+                        <a:srgbClr val="808080"/>
+                      </a:solidFill>
+                    </a:lnR>
+                    <a:lnT w="6350" cap="flat" cmpd="sng" algn="ctr">
+                      <a:solidFill>
+                        <a:srgbClr val="808080"/>
+                      </a:solidFill>
+                    </a:lnT>
+                    <a:lnB w="6350" cap="flat" cmpd="sng" algn="ctr">
+                      <a:solidFill>
+                        <a:srgbClr val="808080"/>
                       </a:solidFill>
                     </a:lnB>
                   </a:tcPr>
@@ -12640,22 +12640,22 @@
                     </a:solidFill>
                     <a:lnL w="6350" cap="flat" cmpd="sng" algn="ctr">
                       <a:solidFill>
-                        <a:srgbClr val="BDBDBD"/>
-                      </a:solidFill>
-                    </a:lnL>
-                    <a:lnR w="6350" cap="flat" cmpd="sng" algn="ctr">
-                      <a:solidFill>
-                        <a:srgbClr val="BDBDBD"/>
-                      </a:solidFill>
-                    </a:lnR>
-                    <a:lnT w="6350" cap="flat" cmpd="sng" algn="ctr">
-                      <a:solidFill>
-                        <a:srgbClr val="BDBDBD"/>
-                      </a:solidFill>
-                    </a:lnT>
-                    <a:lnB w="6350" cap="flat" cmpd="sng" algn="ctr">
-                      <a:solidFill>
-                        <a:srgbClr val="BDBDBD"/>
+                        <a:srgbClr val="808080"/>
+                      </a:solidFill>
+                    </a:lnL>
+                    <a:lnR w="6350" cap="flat" cmpd="sng" algn="ctr">
+                      <a:solidFill>
+                        <a:srgbClr val="808080"/>
+                      </a:solidFill>
+                    </a:lnR>
+                    <a:lnT w="6350" cap="flat" cmpd="sng" algn="ctr">
+                      <a:solidFill>
+                        <a:srgbClr val="808080"/>
+                      </a:solidFill>
+                    </a:lnT>
+                    <a:lnB w="6350" cap="flat" cmpd="sng" algn="ctr">
+                      <a:solidFill>
+                        <a:srgbClr val="808080"/>
                       </a:solidFill>
                     </a:lnB>
                   </a:tcPr>
@@ -12685,22 +12685,22 @@
                     </a:solidFill>
                     <a:lnL w="6350" cap="flat" cmpd="sng" algn="ctr">
                       <a:solidFill>
-                        <a:srgbClr val="BDBDBD"/>
-                      </a:solidFill>
-                    </a:lnL>
-                    <a:lnR w="6350" cap="flat" cmpd="sng" algn="ctr">
-                      <a:solidFill>
-                        <a:srgbClr val="BDBDBD"/>
-                      </a:solidFill>
-                    </a:lnR>
-                    <a:lnT w="6350" cap="flat" cmpd="sng" algn="ctr">
-                      <a:solidFill>
-                        <a:srgbClr val="BDBDBD"/>
-                      </a:solidFill>
-                    </a:lnT>
-                    <a:lnB w="6350" cap="flat" cmpd="sng" algn="ctr">
-                      <a:solidFill>
-                        <a:srgbClr val="BDBDBD"/>
+                        <a:srgbClr val="808080"/>
+                      </a:solidFill>
+                    </a:lnL>
+                    <a:lnR w="6350" cap="flat" cmpd="sng" algn="ctr">
+                      <a:solidFill>
+                        <a:srgbClr val="808080"/>
+                      </a:solidFill>
+                    </a:lnR>
+                    <a:lnT w="6350" cap="flat" cmpd="sng" algn="ctr">
+                      <a:solidFill>
+                        <a:srgbClr val="808080"/>
+                      </a:solidFill>
+                    </a:lnT>
+                    <a:lnB w="6350" cap="flat" cmpd="sng" algn="ctr">
+                      <a:solidFill>
+                        <a:srgbClr val="808080"/>
                       </a:solidFill>
                     </a:lnB>
                   </a:tcPr>
@@ -12728,22 +12728,22 @@
                     </a:solidFill>
                     <a:lnL w="6350" cap="flat" cmpd="sng" algn="ctr">
                       <a:solidFill>
-                        <a:srgbClr val="BDBDBD"/>
-                      </a:solidFill>
-                    </a:lnL>
-                    <a:lnR w="6350" cap="flat" cmpd="sng" algn="ctr">
-                      <a:solidFill>
-                        <a:srgbClr val="BDBDBD"/>
-                      </a:solidFill>
-                    </a:lnR>
-                    <a:lnT w="6350" cap="flat" cmpd="sng" algn="ctr">
-                      <a:solidFill>
-                        <a:srgbClr val="BDBDBD"/>
-                      </a:solidFill>
-                    </a:lnT>
-                    <a:lnB w="6350" cap="flat" cmpd="sng" algn="ctr">
-                      <a:solidFill>
-                        <a:srgbClr val="BDBDBD"/>
+                        <a:srgbClr val="808080"/>
+                      </a:solidFill>
+                    </a:lnL>
+                    <a:lnR w="6350" cap="flat" cmpd="sng" algn="ctr">
+                      <a:solidFill>
+                        <a:srgbClr val="808080"/>
+                      </a:solidFill>
+                    </a:lnR>
+                    <a:lnT w="6350" cap="flat" cmpd="sng" algn="ctr">
+                      <a:solidFill>
+                        <a:srgbClr val="808080"/>
+                      </a:solidFill>
+                    </a:lnT>
+                    <a:lnB w="6350" cap="flat" cmpd="sng" algn="ctr">
+                      <a:solidFill>
+                        <a:srgbClr val="808080"/>
                       </a:solidFill>
                     </a:lnB>
                   </a:tcPr>
@@ -12771,22 +12771,22 @@
                     </a:solidFill>
                     <a:lnL w="6350" cap="flat" cmpd="sng" algn="ctr">
                       <a:solidFill>
-                        <a:srgbClr val="BDBDBD"/>
-                      </a:solidFill>
-                    </a:lnL>
-                    <a:lnR w="6350" cap="flat" cmpd="sng" algn="ctr">
-                      <a:solidFill>
-                        <a:srgbClr val="BDBDBD"/>
-                      </a:solidFill>
-                    </a:lnR>
-                    <a:lnT w="6350" cap="flat" cmpd="sng" algn="ctr">
-                      <a:solidFill>
-                        <a:srgbClr val="BDBDBD"/>
-                      </a:solidFill>
-                    </a:lnT>
-                    <a:lnB w="6350" cap="flat" cmpd="sng" algn="ctr">
-                      <a:solidFill>
-                        <a:srgbClr val="BDBDBD"/>
+                        <a:srgbClr val="808080"/>
+                      </a:solidFill>
+                    </a:lnL>
+                    <a:lnR w="6350" cap="flat" cmpd="sng" algn="ctr">
+                      <a:solidFill>
+                        <a:srgbClr val="808080"/>
+                      </a:solidFill>
+                    </a:lnR>
+                    <a:lnT w="6350" cap="flat" cmpd="sng" algn="ctr">
+                      <a:solidFill>
+                        <a:srgbClr val="808080"/>
+                      </a:solidFill>
+                    </a:lnT>
+                    <a:lnB w="6350" cap="flat" cmpd="sng" algn="ctr">
+                      <a:solidFill>
+                        <a:srgbClr val="808080"/>
                       </a:solidFill>
                     </a:lnB>
                   </a:tcPr>
@@ -12816,22 +12816,22 @@
                     </a:solidFill>
                     <a:lnL w="6350" cap="flat" cmpd="sng" algn="ctr">
                       <a:solidFill>
-                        <a:srgbClr val="BDBDBD"/>
-                      </a:solidFill>
-                    </a:lnL>
-                    <a:lnR w="6350" cap="flat" cmpd="sng" algn="ctr">
-                      <a:solidFill>
-                        <a:srgbClr val="BDBDBD"/>
-                      </a:solidFill>
-                    </a:lnR>
-                    <a:lnT w="6350" cap="flat" cmpd="sng" algn="ctr">
-                      <a:solidFill>
-                        <a:srgbClr val="BDBDBD"/>
-                      </a:solidFill>
-                    </a:lnT>
-                    <a:lnB w="6350" cap="flat" cmpd="sng" algn="ctr">
-                      <a:solidFill>
-                        <a:srgbClr val="BDBDBD"/>
+                        <a:srgbClr val="808080"/>
+                      </a:solidFill>
+                    </a:lnL>
+                    <a:lnR w="6350" cap="flat" cmpd="sng" algn="ctr">
+                      <a:solidFill>
+                        <a:srgbClr val="808080"/>
+                      </a:solidFill>
+                    </a:lnR>
+                    <a:lnT w="6350" cap="flat" cmpd="sng" algn="ctr">
+                      <a:solidFill>
+                        <a:srgbClr val="808080"/>
+                      </a:solidFill>
+                    </a:lnT>
+                    <a:lnB w="6350" cap="flat" cmpd="sng" algn="ctr">
+                      <a:solidFill>
+                        <a:srgbClr val="808080"/>
                       </a:solidFill>
                     </a:lnB>
                   </a:tcPr>
@@ -12859,22 +12859,22 @@
                     </a:solidFill>
                     <a:lnL w="6350" cap="flat" cmpd="sng" algn="ctr">
                       <a:solidFill>
-                        <a:srgbClr val="BDBDBD"/>
-                      </a:solidFill>
-                    </a:lnL>
-                    <a:lnR w="6350" cap="flat" cmpd="sng" algn="ctr">
-                      <a:solidFill>
-                        <a:srgbClr val="BDBDBD"/>
-                      </a:solidFill>
-                    </a:lnR>
-                    <a:lnT w="6350" cap="flat" cmpd="sng" algn="ctr">
-                      <a:solidFill>
-                        <a:srgbClr val="BDBDBD"/>
-                      </a:solidFill>
-                    </a:lnT>
-                    <a:lnB w="6350" cap="flat" cmpd="sng" algn="ctr">
-                      <a:solidFill>
-                        <a:srgbClr val="BDBDBD"/>
+                        <a:srgbClr val="808080"/>
+                      </a:solidFill>
+                    </a:lnL>
+                    <a:lnR w="6350" cap="flat" cmpd="sng" algn="ctr">
+                      <a:solidFill>
+                        <a:srgbClr val="808080"/>
+                      </a:solidFill>
+                    </a:lnR>
+                    <a:lnT w="6350" cap="flat" cmpd="sng" algn="ctr">
+                      <a:solidFill>
+                        <a:srgbClr val="808080"/>
+                      </a:solidFill>
+                    </a:lnT>
+                    <a:lnB w="6350" cap="flat" cmpd="sng" algn="ctr">
+                      <a:solidFill>
+                        <a:srgbClr val="808080"/>
                       </a:solidFill>
                     </a:lnB>
                   </a:tcPr>
@@ -12902,22 +12902,22 @@
                     </a:solidFill>
                     <a:lnL w="6350" cap="flat" cmpd="sng" algn="ctr">
                       <a:solidFill>
-                        <a:srgbClr val="BDBDBD"/>
-                      </a:solidFill>
-                    </a:lnL>
-                    <a:lnR w="6350" cap="flat" cmpd="sng" algn="ctr">
-                      <a:solidFill>
-                        <a:srgbClr val="BDBDBD"/>
-                      </a:solidFill>
-                    </a:lnR>
-                    <a:lnT w="6350" cap="flat" cmpd="sng" algn="ctr">
-                      <a:solidFill>
-                        <a:srgbClr val="BDBDBD"/>
-                      </a:solidFill>
-                    </a:lnT>
-                    <a:lnB w="6350" cap="flat" cmpd="sng" algn="ctr">
-                      <a:solidFill>
-                        <a:srgbClr val="BDBDBD"/>
+                        <a:srgbClr val="808080"/>
+                      </a:solidFill>
+                    </a:lnL>
+                    <a:lnR w="6350" cap="flat" cmpd="sng" algn="ctr">
+                      <a:solidFill>
+                        <a:srgbClr val="808080"/>
+                      </a:solidFill>
+                    </a:lnR>
+                    <a:lnT w="6350" cap="flat" cmpd="sng" algn="ctr">
+                      <a:solidFill>
+                        <a:srgbClr val="808080"/>
+                      </a:solidFill>
+                    </a:lnT>
+                    <a:lnB w="6350" cap="flat" cmpd="sng" algn="ctr">
+                      <a:solidFill>
+                        <a:srgbClr val="808080"/>
                       </a:solidFill>
                     </a:lnB>
                   </a:tcPr>
@@ -12947,22 +12947,22 @@
                     </a:solidFill>
                     <a:lnL w="6350" cap="flat" cmpd="sng" algn="ctr">
                       <a:solidFill>
-                        <a:srgbClr val="BDBDBD"/>
-                      </a:solidFill>
-                    </a:lnL>
-                    <a:lnR w="6350" cap="flat" cmpd="sng" algn="ctr">
-                      <a:solidFill>
-                        <a:srgbClr val="BDBDBD"/>
-                      </a:solidFill>
-                    </a:lnR>
-                    <a:lnT w="6350" cap="flat" cmpd="sng" algn="ctr">
-                      <a:solidFill>
-                        <a:srgbClr val="BDBDBD"/>
-                      </a:solidFill>
-                    </a:lnT>
-                    <a:lnB w="6350" cap="flat" cmpd="sng" algn="ctr">
-                      <a:solidFill>
-                        <a:srgbClr val="BDBDBD"/>
+                        <a:srgbClr val="808080"/>
+                      </a:solidFill>
+                    </a:lnL>
+                    <a:lnR w="6350" cap="flat" cmpd="sng" algn="ctr">
+                      <a:solidFill>
+                        <a:srgbClr val="808080"/>
+                      </a:solidFill>
+                    </a:lnR>
+                    <a:lnT w="6350" cap="flat" cmpd="sng" algn="ctr">
+                      <a:solidFill>
+                        <a:srgbClr val="808080"/>
+                      </a:solidFill>
+                    </a:lnT>
+                    <a:lnB w="6350" cap="flat" cmpd="sng" algn="ctr">
+                      <a:solidFill>
+                        <a:srgbClr val="808080"/>
                       </a:solidFill>
                     </a:lnB>
                   </a:tcPr>
@@ -12990,22 +12990,22 @@
                     </a:solidFill>
                     <a:lnL w="6350" cap="flat" cmpd="sng" algn="ctr">
                       <a:solidFill>
-                        <a:srgbClr val="BDBDBD"/>
-                      </a:solidFill>
-                    </a:lnL>
-                    <a:lnR w="6350" cap="flat" cmpd="sng" algn="ctr">
-                      <a:solidFill>
-                        <a:srgbClr val="BDBDBD"/>
-                      </a:solidFill>
-                    </a:lnR>
-                    <a:lnT w="6350" cap="flat" cmpd="sng" algn="ctr">
-                      <a:solidFill>
-                        <a:srgbClr val="BDBDBD"/>
-                      </a:solidFill>
-                    </a:lnT>
-                    <a:lnB w="6350" cap="flat" cmpd="sng" algn="ctr">
-                      <a:solidFill>
-                        <a:srgbClr val="BDBDBD"/>
+                        <a:srgbClr val="808080"/>
+                      </a:solidFill>
+                    </a:lnL>
+                    <a:lnR w="6350" cap="flat" cmpd="sng" algn="ctr">
+                      <a:solidFill>
+                        <a:srgbClr val="808080"/>
+                      </a:solidFill>
+                    </a:lnR>
+                    <a:lnT w="6350" cap="flat" cmpd="sng" algn="ctr">
+                      <a:solidFill>
+                        <a:srgbClr val="808080"/>
+                      </a:solidFill>
+                    </a:lnT>
+                    <a:lnB w="6350" cap="flat" cmpd="sng" algn="ctr">
+                      <a:solidFill>
+                        <a:srgbClr val="808080"/>
                       </a:solidFill>
                     </a:lnB>
                   </a:tcPr>
@@ -13033,22 +13033,22 @@
                     </a:solidFill>
                     <a:lnL w="6350" cap="flat" cmpd="sng" algn="ctr">
                       <a:solidFill>
-                        <a:srgbClr val="BDBDBD"/>
-                      </a:solidFill>
-                    </a:lnL>
-                    <a:lnR w="6350" cap="flat" cmpd="sng" algn="ctr">
-                      <a:solidFill>
-                        <a:srgbClr val="BDBDBD"/>
-                      </a:solidFill>
-                    </a:lnR>
-                    <a:lnT w="6350" cap="flat" cmpd="sng" algn="ctr">
-                      <a:solidFill>
-                        <a:srgbClr val="BDBDBD"/>
-                      </a:solidFill>
-                    </a:lnT>
-                    <a:lnB w="6350" cap="flat" cmpd="sng" algn="ctr">
-                      <a:solidFill>
-                        <a:srgbClr val="BDBDBD"/>
+                        <a:srgbClr val="808080"/>
+                      </a:solidFill>
+                    </a:lnL>
+                    <a:lnR w="6350" cap="flat" cmpd="sng" algn="ctr">
+                      <a:solidFill>
+                        <a:srgbClr val="808080"/>
+                      </a:solidFill>
+                    </a:lnR>
+                    <a:lnT w="6350" cap="flat" cmpd="sng" algn="ctr">
+                      <a:solidFill>
+                        <a:srgbClr val="808080"/>
+                      </a:solidFill>
+                    </a:lnT>
+                    <a:lnB w="6350" cap="flat" cmpd="sng" algn="ctr">
+                      <a:solidFill>
+                        <a:srgbClr val="808080"/>
                       </a:solidFill>
                     </a:lnB>
                   </a:tcPr>
@@ -13078,22 +13078,22 @@
                     </a:solidFill>
                     <a:lnL w="6350" cap="flat" cmpd="sng" algn="ctr">
                       <a:solidFill>
-                        <a:srgbClr val="BDBDBD"/>
-                      </a:solidFill>
-                    </a:lnL>
-                    <a:lnR w="6350" cap="flat" cmpd="sng" algn="ctr">
-                      <a:solidFill>
-                        <a:srgbClr val="BDBDBD"/>
-                      </a:solidFill>
-                    </a:lnR>
-                    <a:lnT w="6350" cap="flat" cmpd="sng" algn="ctr">
-                      <a:solidFill>
-                        <a:srgbClr val="BDBDBD"/>
-                      </a:solidFill>
-                    </a:lnT>
-                    <a:lnB w="6350" cap="flat" cmpd="sng" algn="ctr">
-                      <a:solidFill>
-                        <a:srgbClr val="BDBDBD"/>
+                        <a:srgbClr val="808080"/>
+                      </a:solidFill>
+                    </a:lnL>
+                    <a:lnR w="6350" cap="flat" cmpd="sng" algn="ctr">
+                      <a:solidFill>
+                        <a:srgbClr val="808080"/>
+                      </a:solidFill>
+                    </a:lnR>
+                    <a:lnT w="6350" cap="flat" cmpd="sng" algn="ctr">
+                      <a:solidFill>
+                        <a:srgbClr val="808080"/>
+                      </a:solidFill>
+                    </a:lnT>
+                    <a:lnB w="6350" cap="flat" cmpd="sng" algn="ctr">
+                      <a:solidFill>
+                        <a:srgbClr val="808080"/>
                       </a:solidFill>
                     </a:lnB>
                   </a:tcPr>
@@ -13121,22 +13121,22 @@
                     </a:solidFill>
                     <a:lnL w="6350" cap="flat" cmpd="sng" algn="ctr">
                       <a:solidFill>
-                        <a:srgbClr val="BDBDBD"/>
-                      </a:solidFill>
-                    </a:lnL>
-                    <a:lnR w="6350" cap="flat" cmpd="sng" algn="ctr">
-                      <a:solidFill>
-                        <a:srgbClr val="BDBDBD"/>
-                      </a:solidFill>
-                    </a:lnR>
-                    <a:lnT w="6350" cap="flat" cmpd="sng" algn="ctr">
-                      <a:solidFill>
-                        <a:srgbClr val="BDBDBD"/>
-                      </a:solidFill>
-                    </a:lnT>
-                    <a:lnB w="6350" cap="flat" cmpd="sng" algn="ctr">
-                      <a:solidFill>
-                        <a:srgbClr val="BDBDBD"/>
+                        <a:srgbClr val="808080"/>
+                      </a:solidFill>
+                    </a:lnL>
+                    <a:lnR w="6350" cap="flat" cmpd="sng" algn="ctr">
+                      <a:solidFill>
+                        <a:srgbClr val="808080"/>
+                      </a:solidFill>
+                    </a:lnR>
+                    <a:lnT w="6350" cap="flat" cmpd="sng" algn="ctr">
+                      <a:solidFill>
+                        <a:srgbClr val="808080"/>
+                      </a:solidFill>
+                    </a:lnT>
+                    <a:lnB w="6350" cap="flat" cmpd="sng" algn="ctr">
+                      <a:solidFill>
+                        <a:srgbClr val="808080"/>
                       </a:solidFill>
                     </a:lnB>
                   </a:tcPr>
@@ -13164,22 +13164,22 @@
                     </a:solidFill>
                     <a:lnL w="6350" cap="flat" cmpd="sng" algn="ctr">
                       <a:solidFill>
-                        <a:srgbClr val="BDBDBD"/>
-                      </a:solidFill>
-                    </a:lnL>
-                    <a:lnR w="6350" cap="flat" cmpd="sng" algn="ctr">
-                      <a:solidFill>
-                        <a:srgbClr val="BDBDBD"/>
-                      </a:solidFill>
-                    </a:lnR>
-                    <a:lnT w="6350" cap="flat" cmpd="sng" algn="ctr">
-                      <a:solidFill>
-                        <a:srgbClr val="BDBDBD"/>
-                      </a:solidFill>
-                    </a:lnT>
-                    <a:lnB w="6350" cap="flat" cmpd="sng" algn="ctr">
-                      <a:solidFill>
-                        <a:srgbClr val="BDBDBD"/>
+                        <a:srgbClr val="808080"/>
+                      </a:solidFill>
+                    </a:lnL>
+                    <a:lnR w="6350" cap="flat" cmpd="sng" algn="ctr">
+                      <a:solidFill>
+                        <a:srgbClr val="808080"/>
+                      </a:solidFill>
+                    </a:lnR>
+                    <a:lnT w="6350" cap="flat" cmpd="sng" algn="ctr">
+                      <a:solidFill>
+                        <a:srgbClr val="808080"/>
+                      </a:solidFill>
+                    </a:lnT>
+                    <a:lnB w="6350" cap="flat" cmpd="sng" algn="ctr">
+                      <a:solidFill>
+                        <a:srgbClr val="808080"/>
                       </a:solidFill>
                     </a:lnB>
                   </a:tcPr>
@@ -13209,22 +13209,22 @@
                     </a:solidFill>
                     <a:lnL w="6350" cap="flat" cmpd="sng" algn="ctr">
                       <a:solidFill>
-                        <a:srgbClr val="BDBDBD"/>
-                      </a:solidFill>
-                    </a:lnL>
-                    <a:lnR w="6350" cap="flat" cmpd="sng" algn="ctr">
-                      <a:solidFill>
-                        <a:srgbClr val="BDBDBD"/>
-                      </a:solidFill>
-                    </a:lnR>
-                    <a:lnT w="6350" cap="flat" cmpd="sng" algn="ctr">
-                      <a:solidFill>
-                        <a:srgbClr val="BDBDBD"/>
-                      </a:solidFill>
-                    </a:lnT>
-                    <a:lnB w="6350" cap="flat" cmpd="sng" algn="ctr">
-                      <a:solidFill>
-                        <a:srgbClr val="BDBDBD"/>
+                        <a:srgbClr val="808080"/>
+                      </a:solidFill>
+                    </a:lnL>
+                    <a:lnR w="6350" cap="flat" cmpd="sng" algn="ctr">
+                      <a:solidFill>
+                        <a:srgbClr val="808080"/>
+                      </a:solidFill>
+                    </a:lnR>
+                    <a:lnT w="6350" cap="flat" cmpd="sng" algn="ctr">
+                      <a:solidFill>
+                        <a:srgbClr val="808080"/>
+                      </a:solidFill>
+                    </a:lnT>
+                    <a:lnB w="6350" cap="flat" cmpd="sng" algn="ctr">
+                      <a:solidFill>
+                        <a:srgbClr val="808080"/>
                       </a:solidFill>
                     </a:lnB>
                   </a:tcPr>
@@ -13252,22 +13252,22 @@
                     </a:solidFill>
                     <a:lnL w="6350" cap="flat" cmpd="sng" algn="ctr">
                       <a:solidFill>
-                        <a:srgbClr val="BDBDBD"/>
-                      </a:solidFill>
-                    </a:lnL>
-                    <a:lnR w="6350" cap="flat" cmpd="sng" algn="ctr">
-                      <a:solidFill>
-                        <a:srgbClr val="BDBDBD"/>
-                      </a:solidFill>
-                    </a:lnR>
-                    <a:lnT w="6350" cap="flat" cmpd="sng" algn="ctr">
-                      <a:solidFill>
-                        <a:srgbClr val="BDBDBD"/>
-                      </a:solidFill>
-                    </a:lnT>
-                    <a:lnB w="6350" cap="flat" cmpd="sng" algn="ctr">
-                      <a:solidFill>
-                        <a:srgbClr val="BDBDBD"/>
+                        <a:srgbClr val="808080"/>
+                      </a:solidFill>
+                    </a:lnL>
+                    <a:lnR w="6350" cap="flat" cmpd="sng" algn="ctr">
+                      <a:solidFill>
+                        <a:srgbClr val="808080"/>
+                      </a:solidFill>
+                    </a:lnR>
+                    <a:lnT w="6350" cap="flat" cmpd="sng" algn="ctr">
+                      <a:solidFill>
+                        <a:srgbClr val="808080"/>
+                      </a:solidFill>
+                    </a:lnT>
+                    <a:lnB w="6350" cap="flat" cmpd="sng" algn="ctr">
+                      <a:solidFill>
+                        <a:srgbClr val="808080"/>
                       </a:solidFill>
                     </a:lnB>
                   </a:tcPr>
@@ -13295,22 +13295,22 @@
                     </a:solidFill>
                     <a:lnL w="6350" cap="flat" cmpd="sng" algn="ctr">
                       <a:solidFill>
-                        <a:srgbClr val="BDBDBD"/>
-                      </a:solidFill>
-                    </a:lnL>
-                    <a:lnR w="6350" cap="flat" cmpd="sng" algn="ctr">
-                      <a:solidFill>
-                        <a:srgbClr val="BDBDBD"/>
-                      </a:solidFill>
-                    </a:lnR>
-                    <a:lnT w="6350" cap="flat" cmpd="sng" algn="ctr">
-                      <a:solidFill>
-                        <a:srgbClr val="BDBDBD"/>
-                      </a:solidFill>
-                    </a:lnT>
-                    <a:lnB w="6350" cap="flat" cmpd="sng" algn="ctr">
-                      <a:solidFill>
-                        <a:srgbClr val="BDBDBD"/>
+                        <a:srgbClr val="808080"/>
+                      </a:solidFill>
+                    </a:lnL>
+                    <a:lnR w="6350" cap="flat" cmpd="sng" algn="ctr">
+                      <a:solidFill>
+                        <a:srgbClr val="808080"/>
+                      </a:solidFill>
+                    </a:lnR>
+                    <a:lnT w="6350" cap="flat" cmpd="sng" algn="ctr">
+                      <a:solidFill>
+                        <a:srgbClr val="808080"/>
+                      </a:solidFill>
+                    </a:lnT>
+                    <a:lnB w="6350" cap="flat" cmpd="sng" algn="ctr">
+                      <a:solidFill>
+                        <a:srgbClr val="808080"/>
                       </a:solidFill>
                     </a:lnB>
                   </a:tcPr>
@@ -13401,22 +13401,22 @@
                     </a:solidFill>
                     <a:lnL w="6350" cap="flat" cmpd="sng" algn="ctr">
                       <a:solidFill>
-                        <a:srgbClr val="BDBDBD"/>
-                      </a:solidFill>
-                    </a:lnL>
-                    <a:lnR w="6350" cap="flat" cmpd="sng" algn="ctr">
-                      <a:solidFill>
-                        <a:srgbClr val="BDBDBD"/>
-                      </a:solidFill>
-                    </a:lnR>
-                    <a:lnT w="6350" cap="flat" cmpd="sng" algn="ctr">
-                      <a:solidFill>
-                        <a:srgbClr val="BDBDBD"/>
-                      </a:solidFill>
-                    </a:lnT>
-                    <a:lnB w="6350" cap="flat" cmpd="sng" algn="ctr">
-                      <a:solidFill>
-                        <a:srgbClr val="BDBDBD"/>
+                        <a:srgbClr val="808080"/>
+                      </a:solidFill>
+                    </a:lnL>
+                    <a:lnR w="6350" cap="flat" cmpd="sng" algn="ctr">
+                      <a:solidFill>
+                        <a:srgbClr val="808080"/>
+                      </a:solidFill>
+                    </a:lnR>
+                    <a:lnT w="6350" cap="flat" cmpd="sng" algn="ctr">
+                      <a:solidFill>
+                        <a:srgbClr val="808080"/>
+                      </a:solidFill>
+                    </a:lnT>
+                    <a:lnB w="6350" cap="flat" cmpd="sng" algn="ctr">
+                      <a:solidFill>
+                        <a:srgbClr val="808080"/>
                       </a:solidFill>
                     </a:lnB>
                   </a:tcPr>
@@ -13444,22 +13444,22 @@
                     </a:solidFill>
                     <a:lnL w="6350" cap="flat" cmpd="sng" algn="ctr">
                       <a:solidFill>
-                        <a:srgbClr val="BDBDBD"/>
-                      </a:solidFill>
-                    </a:lnL>
-                    <a:lnR w="6350" cap="flat" cmpd="sng" algn="ctr">
-                      <a:solidFill>
-                        <a:srgbClr val="BDBDBD"/>
-                      </a:solidFill>
-                    </a:lnR>
-                    <a:lnT w="6350" cap="flat" cmpd="sng" algn="ctr">
-                      <a:solidFill>
-                        <a:srgbClr val="BDBDBD"/>
-                      </a:solidFill>
-                    </a:lnT>
-                    <a:lnB w="6350" cap="flat" cmpd="sng" algn="ctr">
-                      <a:solidFill>
-                        <a:srgbClr val="BDBDBD"/>
+                        <a:srgbClr val="808080"/>
+                      </a:solidFill>
+                    </a:lnL>
+                    <a:lnR w="6350" cap="flat" cmpd="sng" algn="ctr">
+                      <a:solidFill>
+                        <a:srgbClr val="808080"/>
+                      </a:solidFill>
+                    </a:lnR>
+                    <a:lnT w="6350" cap="flat" cmpd="sng" algn="ctr">
+                      <a:solidFill>
+                        <a:srgbClr val="808080"/>
+                      </a:solidFill>
+                    </a:lnT>
+                    <a:lnB w="6350" cap="flat" cmpd="sng" algn="ctr">
+                      <a:solidFill>
+                        <a:srgbClr val="808080"/>
                       </a:solidFill>
                     </a:lnB>
                   </a:tcPr>
@@ -13489,22 +13489,22 @@
                     </a:solidFill>
                     <a:lnL w="6350" cap="flat" cmpd="sng" algn="ctr">
                       <a:solidFill>
-                        <a:srgbClr val="BDBDBD"/>
-                      </a:solidFill>
-                    </a:lnL>
-                    <a:lnR w="6350" cap="flat" cmpd="sng" algn="ctr">
-                      <a:solidFill>
-                        <a:srgbClr val="BDBDBD"/>
-                      </a:solidFill>
-                    </a:lnR>
-                    <a:lnT w="6350" cap="flat" cmpd="sng" algn="ctr">
-                      <a:solidFill>
-                        <a:srgbClr val="BDBDBD"/>
-                      </a:solidFill>
-                    </a:lnT>
-                    <a:lnB w="6350" cap="flat" cmpd="sng" algn="ctr">
-                      <a:solidFill>
-                        <a:srgbClr val="BDBDBD"/>
+                        <a:srgbClr val="808080"/>
+                      </a:solidFill>
+                    </a:lnL>
+                    <a:lnR w="6350" cap="flat" cmpd="sng" algn="ctr">
+                      <a:solidFill>
+                        <a:srgbClr val="808080"/>
+                      </a:solidFill>
+                    </a:lnR>
+                    <a:lnT w="6350" cap="flat" cmpd="sng" algn="ctr">
+                      <a:solidFill>
+                        <a:srgbClr val="808080"/>
+                      </a:solidFill>
+                    </a:lnT>
+                    <a:lnB w="6350" cap="flat" cmpd="sng" algn="ctr">
+                      <a:solidFill>
+                        <a:srgbClr val="808080"/>
                       </a:solidFill>
                     </a:lnB>
                   </a:tcPr>
@@ -13532,22 +13532,22 @@
                     </a:solidFill>
                     <a:lnL w="6350" cap="flat" cmpd="sng" algn="ctr">
                       <a:solidFill>
-                        <a:srgbClr val="BDBDBD"/>
-                      </a:solidFill>
-                    </a:lnL>
-                    <a:lnR w="6350" cap="flat" cmpd="sng" algn="ctr">
-                      <a:solidFill>
-                        <a:srgbClr val="BDBDBD"/>
-                      </a:solidFill>
-                    </a:lnR>
-                    <a:lnT w="6350" cap="flat" cmpd="sng" algn="ctr">
-                      <a:solidFill>
-                        <a:srgbClr val="BDBDBD"/>
-                      </a:solidFill>
-                    </a:lnT>
-                    <a:lnB w="6350" cap="flat" cmpd="sng" algn="ctr">
-                      <a:solidFill>
-                        <a:srgbClr val="BDBDBD"/>
+                        <a:srgbClr val="808080"/>
+                      </a:solidFill>
+                    </a:lnL>
+                    <a:lnR w="6350" cap="flat" cmpd="sng" algn="ctr">
+                      <a:solidFill>
+                        <a:srgbClr val="808080"/>
+                      </a:solidFill>
+                    </a:lnR>
+                    <a:lnT w="6350" cap="flat" cmpd="sng" algn="ctr">
+                      <a:solidFill>
+                        <a:srgbClr val="808080"/>
+                      </a:solidFill>
+                    </a:lnT>
+                    <a:lnB w="6350" cap="flat" cmpd="sng" algn="ctr">
+                      <a:solidFill>
+                        <a:srgbClr val="808080"/>
                       </a:solidFill>
                     </a:lnB>
                   </a:tcPr>
@@ -13577,22 +13577,22 @@
                     </a:solidFill>
                     <a:lnL w="6350" cap="flat" cmpd="sng" algn="ctr">
                       <a:solidFill>
-                        <a:srgbClr val="BDBDBD"/>
-                      </a:solidFill>
-                    </a:lnL>
-                    <a:lnR w="6350" cap="flat" cmpd="sng" algn="ctr">
-                      <a:solidFill>
-                        <a:srgbClr val="BDBDBD"/>
-                      </a:solidFill>
-                    </a:lnR>
-                    <a:lnT w="6350" cap="flat" cmpd="sng" algn="ctr">
-                      <a:solidFill>
-                        <a:srgbClr val="BDBDBD"/>
-                      </a:solidFill>
-                    </a:lnT>
-                    <a:lnB w="6350" cap="flat" cmpd="sng" algn="ctr">
-                      <a:solidFill>
-                        <a:srgbClr val="BDBDBD"/>
+                        <a:srgbClr val="808080"/>
+                      </a:solidFill>
+                    </a:lnL>
+                    <a:lnR w="6350" cap="flat" cmpd="sng" algn="ctr">
+                      <a:solidFill>
+                        <a:srgbClr val="808080"/>
+                      </a:solidFill>
+                    </a:lnR>
+                    <a:lnT w="6350" cap="flat" cmpd="sng" algn="ctr">
+                      <a:solidFill>
+                        <a:srgbClr val="808080"/>
+                      </a:solidFill>
+                    </a:lnT>
+                    <a:lnB w="6350" cap="flat" cmpd="sng" algn="ctr">
+                      <a:solidFill>
+                        <a:srgbClr val="808080"/>
                       </a:solidFill>
                     </a:lnB>
                   </a:tcPr>
@@ -13620,22 +13620,22 @@
                     </a:solidFill>
                     <a:lnL w="6350" cap="flat" cmpd="sng" algn="ctr">
                       <a:solidFill>
-                        <a:srgbClr val="BDBDBD"/>
-                      </a:solidFill>
-                    </a:lnL>
-                    <a:lnR w="6350" cap="flat" cmpd="sng" algn="ctr">
-                      <a:solidFill>
-                        <a:srgbClr val="BDBDBD"/>
-                      </a:solidFill>
-                    </a:lnR>
-                    <a:lnT w="6350" cap="flat" cmpd="sng" algn="ctr">
-                      <a:solidFill>
-                        <a:srgbClr val="BDBDBD"/>
-                      </a:solidFill>
-                    </a:lnT>
-                    <a:lnB w="6350" cap="flat" cmpd="sng" algn="ctr">
-                      <a:solidFill>
-                        <a:srgbClr val="BDBDBD"/>
+                        <a:srgbClr val="808080"/>
+                      </a:solidFill>
+                    </a:lnL>
+                    <a:lnR w="6350" cap="flat" cmpd="sng" algn="ctr">
+                      <a:solidFill>
+                        <a:srgbClr val="808080"/>
+                      </a:solidFill>
+                    </a:lnR>
+                    <a:lnT w="6350" cap="flat" cmpd="sng" algn="ctr">
+                      <a:solidFill>
+                        <a:srgbClr val="808080"/>
+                      </a:solidFill>
+                    </a:lnT>
+                    <a:lnB w="6350" cap="flat" cmpd="sng" algn="ctr">
+                      <a:solidFill>
+                        <a:srgbClr val="808080"/>
                       </a:solidFill>
                     </a:lnB>
                   </a:tcPr>
@@ -13665,22 +13665,22 @@
                     </a:solidFill>
                     <a:lnL w="6350" cap="flat" cmpd="sng" algn="ctr">
                       <a:solidFill>
-                        <a:srgbClr val="BDBDBD"/>
-                      </a:solidFill>
-                    </a:lnL>
-                    <a:lnR w="6350" cap="flat" cmpd="sng" algn="ctr">
-                      <a:solidFill>
-                        <a:srgbClr val="BDBDBD"/>
-                      </a:solidFill>
-                    </a:lnR>
-                    <a:lnT w="6350" cap="flat" cmpd="sng" algn="ctr">
-                      <a:solidFill>
-                        <a:srgbClr val="BDBDBD"/>
-                      </a:solidFill>
-                    </a:lnT>
-                    <a:lnB w="6350" cap="flat" cmpd="sng" algn="ctr">
-                      <a:solidFill>
-                        <a:srgbClr val="BDBDBD"/>
+                        <a:srgbClr val="808080"/>
+                      </a:solidFill>
+                    </a:lnL>
+                    <a:lnR w="6350" cap="flat" cmpd="sng" algn="ctr">
+                      <a:solidFill>
+                        <a:srgbClr val="808080"/>
+                      </a:solidFill>
+                    </a:lnR>
+                    <a:lnT w="6350" cap="flat" cmpd="sng" algn="ctr">
+                      <a:solidFill>
+                        <a:srgbClr val="808080"/>
+                      </a:solidFill>
+                    </a:lnT>
+                    <a:lnB w="6350" cap="flat" cmpd="sng" algn="ctr">
+                      <a:solidFill>
+                        <a:srgbClr val="808080"/>
                       </a:solidFill>
                     </a:lnB>
                   </a:tcPr>
@@ -13708,22 +13708,22 @@
                     </a:solidFill>
                     <a:lnL w="6350" cap="flat" cmpd="sng" algn="ctr">
                       <a:solidFill>
-                        <a:srgbClr val="BDBDBD"/>
-                      </a:solidFill>
-                    </a:lnL>
-                    <a:lnR w="6350" cap="flat" cmpd="sng" algn="ctr">
-                      <a:solidFill>
-                        <a:srgbClr val="BDBDBD"/>
-                      </a:solidFill>
-                    </a:lnR>
-                    <a:lnT w="6350" cap="flat" cmpd="sng" algn="ctr">
-                      <a:solidFill>
-                        <a:srgbClr val="BDBDBD"/>
-                      </a:solidFill>
-                    </a:lnT>
-                    <a:lnB w="6350" cap="flat" cmpd="sng" algn="ctr">
-                      <a:solidFill>
-                        <a:srgbClr val="BDBDBD"/>
+                        <a:srgbClr val="808080"/>
+                      </a:solidFill>
+                    </a:lnL>
+                    <a:lnR w="6350" cap="flat" cmpd="sng" algn="ctr">
+                      <a:solidFill>
+                        <a:srgbClr val="808080"/>
+                      </a:solidFill>
+                    </a:lnR>
+                    <a:lnT w="6350" cap="flat" cmpd="sng" algn="ctr">
+                      <a:solidFill>
+                        <a:srgbClr val="808080"/>
+                      </a:solidFill>
+                    </a:lnT>
+                    <a:lnB w="6350" cap="flat" cmpd="sng" algn="ctr">
+                      <a:solidFill>
+                        <a:srgbClr val="808080"/>
                       </a:solidFill>
                     </a:lnB>
                   </a:tcPr>
@@ -13753,22 +13753,22 @@
                     </a:solidFill>
                     <a:lnL w="6350" cap="flat" cmpd="sng" algn="ctr">
                       <a:solidFill>
-                        <a:srgbClr val="BDBDBD"/>
-                      </a:solidFill>
-                    </a:lnL>
-                    <a:lnR w="6350" cap="flat" cmpd="sng" algn="ctr">
-                      <a:solidFill>
-                        <a:srgbClr val="BDBDBD"/>
-                      </a:solidFill>
-                    </a:lnR>
-                    <a:lnT w="6350" cap="flat" cmpd="sng" algn="ctr">
-                      <a:solidFill>
-                        <a:srgbClr val="BDBDBD"/>
-                      </a:solidFill>
-                    </a:lnT>
-                    <a:lnB w="6350" cap="flat" cmpd="sng" algn="ctr">
-                      <a:solidFill>
-                        <a:srgbClr val="BDBDBD"/>
+                        <a:srgbClr val="808080"/>
+                      </a:solidFill>
+                    </a:lnL>
+                    <a:lnR w="6350" cap="flat" cmpd="sng" algn="ctr">
+                      <a:solidFill>
+                        <a:srgbClr val="808080"/>
+                      </a:solidFill>
+                    </a:lnR>
+                    <a:lnT w="6350" cap="flat" cmpd="sng" algn="ctr">
+                      <a:solidFill>
+                        <a:srgbClr val="808080"/>
+                      </a:solidFill>
+                    </a:lnT>
+                    <a:lnB w="6350" cap="flat" cmpd="sng" algn="ctr">
+                      <a:solidFill>
+                        <a:srgbClr val="808080"/>
                       </a:solidFill>
                     </a:lnB>
                   </a:tcPr>
@@ -13796,22 +13796,22 @@
                     </a:solidFill>
                     <a:lnL w="6350" cap="flat" cmpd="sng" algn="ctr">
                       <a:solidFill>
-                        <a:srgbClr val="BDBDBD"/>
-                      </a:solidFill>
-                    </a:lnL>
-                    <a:lnR w="6350" cap="flat" cmpd="sng" algn="ctr">
-                      <a:solidFill>
-                        <a:srgbClr val="BDBDBD"/>
-                      </a:solidFill>
-                    </a:lnR>
-                    <a:lnT w="6350" cap="flat" cmpd="sng" algn="ctr">
-                      <a:solidFill>
-                        <a:srgbClr val="BDBDBD"/>
-                      </a:solidFill>
-                    </a:lnT>
-                    <a:lnB w="6350" cap="flat" cmpd="sng" algn="ctr">
-                      <a:solidFill>
-                        <a:srgbClr val="BDBDBD"/>
+                        <a:srgbClr val="808080"/>
+                      </a:solidFill>
+                    </a:lnL>
+                    <a:lnR w="6350" cap="flat" cmpd="sng" algn="ctr">
+                      <a:solidFill>
+                        <a:srgbClr val="808080"/>
+                      </a:solidFill>
+                    </a:lnR>
+                    <a:lnT w="6350" cap="flat" cmpd="sng" algn="ctr">
+                      <a:solidFill>
+                        <a:srgbClr val="808080"/>
+                      </a:solidFill>
+                    </a:lnT>
+                    <a:lnB w="6350" cap="flat" cmpd="sng" algn="ctr">
+                      <a:solidFill>
+                        <a:srgbClr val="808080"/>
                       </a:solidFill>
                     </a:lnB>
                   </a:tcPr>
@@ -13902,22 +13902,22 @@
                     </a:solidFill>
                     <a:lnL w="6350" cap="flat" cmpd="sng" algn="ctr">
                       <a:solidFill>
-                        <a:srgbClr val="BDBDBD"/>
-                      </a:solidFill>
-                    </a:lnL>
-                    <a:lnR w="6350" cap="flat" cmpd="sng" algn="ctr">
-                      <a:solidFill>
-                        <a:srgbClr val="BDBDBD"/>
-                      </a:solidFill>
-                    </a:lnR>
-                    <a:lnT w="6350" cap="flat" cmpd="sng" algn="ctr">
-                      <a:solidFill>
-                        <a:srgbClr val="BDBDBD"/>
-                      </a:solidFill>
-                    </a:lnT>
-                    <a:lnB w="6350" cap="flat" cmpd="sng" algn="ctr">
-                      <a:solidFill>
-                        <a:srgbClr val="BDBDBD"/>
+                        <a:srgbClr val="808080"/>
+                      </a:solidFill>
+                    </a:lnL>
+                    <a:lnR w="6350" cap="flat" cmpd="sng" algn="ctr">
+                      <a:solidFill>
+                        <a:srgbClr val="808080"/>
+                      </a:solidFill>
+                    </a:lnR>
+                    <a:lnT w="6350" cap="flat" cmpd="sng" algn="ctr">
+                      <a:solidFill>
+                        <a:srgbClr val="808080"/>
+                      </a:solidFill>
+                    </a:lnT>
+                    <a:lnB w="6350" cap="flat" cmpd="sng" algn="ctr">
+                      <a:solidFill>
+                        <a:srgbClr val="808080"/>
                       </a:solidFill>
                     </a:lnB>
                   </a:tcPr>
@@ -13945,22 +13945,22 @@
                     </a:solidFill>
                     <a:lnL w="6350" cap="flat" cmpd="sng" algn="ctr">
                       <a:solidFill>
-                        <a:srgbClr val="BDBDBD"/>
-                      </a:solidFill>
-                    </a:lnL>
-                    <a:lnR w="6350" cap="flat" cmpd="sng" algn="ctr">
-                      <a:solidFill>
-                        <a:srgbClr val="BDBDBD"/>
-                      </a:solidFill>
-                    </a:lnR>
-                    <a:lnT w="6350" cap="flat" cmpd="sng" algn="ctr">
-                      <a:solidFill>
-                        <a:srgbClr val="BDBDBD"/>
-                      </a:solidFill>
-                    </a:lnT>
-                    <a:lnB w="6350" cap="flat" cmpd="sng" algn="ctr">
-                      <a:solidFill>
-                        <a:srgbClr val="BDBDBD"/>
+                        <a:srgbClr val="808080"/>
+                      </a:solidFill>
+                    </a:lnL>
+                    <a:lnR w="6350" cap="flat" cmpd="sng" algn="ctr">
+                      <a:solidFill>
+                        <a:srgbClr val="808080"/>
+                      </a:solidFill>
+                    </a:lnR>
+                    <a:lnT w="6350" cap="flat" cmpd="sng" algn="ctr">
+                      <a:solidFill>
+                        <a:srgbClr val="808080"/>
+                      </a:solidFill>
+                    </a:lnT>
+                    <a:lnB w="6350" cap="flat" cmpd="sng" algn="ctr">
+                      <a:solidFill>
+                        <a:srgbClr val="808080"/>
                       </a:solidFill>
                     </a:lnB>
                   </a:tcPr>
@@ -13990,22 +13990,22 @@
                     </a:solidFill>
                     <a:lnL w="6350" cap="flat" cmpd="sng" algn="ctr">
                       <a:solidFill>
-                        <a:srgbClr val="BDBDBD"/>
-                      </a:solidFill>
-                    </a:lnL>
-                    <a:lnR w="6350" cap="flat" cmpd="sng" algn="ctr">
-                      <a:solidFill>
-                        <a:srgbClr val="BDBDBD"/>
-                      </a:solidFill>
-                    </a:lnR>
-                    <a:lnT w="6350" cap="flat" cmpd="sng" algn="ctr">
-                      <a:solidFill>
-                        <a:srgbClr val="BDBDBD"/>
-                      </a:solidFill>
-                    </a:lnT>
-                    <a:lnB w="6350" cap="flat" cmpd="sng" algn="ctr">
-                      <a:solidFill>
-                        <a:srgbClr val="BDBDBD"/>
+                        <a:srgbClr val="808080"/>
+                      </a:solidFill>
+                    </a:lnL>
+                    <a:lnR w="6350" cap="flat" cmpd="sng" algn="ctr">
+                      <a:solidFill>
+                        <a:srgbClr val="808080"/>
+                      </a:solidFill>
+                    </a:lnR>
+                    <a:lnT w="6350" cap="flat" cmpd="sng" algn="ctr">
+                      <a:solidFill>
+                        <a:srgbClr val="808080"/>
+                      </a:solidFill>
+                    </a:lnT>
+                    <a:lnB w="6350" cap="flat" cmpd="sng" algn="ctr">
+                      <a:solidFill>
+                        <a:srgbClr val="808080"/>
                       </a:solidFill>
                     </a:lnB>
                   </a:tcPr>
@@ -14033,22 +14033,22 @@
                     </a:solidFill>
                     <a:lnL w="6350" cap="flat" cmpd="sng" algn="ctr">
                       <a:solidFill>
-                        <a:srgbClr val="BDBDBD"/>
-                      </a:solidFill>
-                    </a:lnL>
-                    <a:lnR w="6350" cap="flat" cmpd="sng" algn="ctr">
-                      <a:solidFill>
-                        <a:srgbClr val="BDBDBD"/>
-                      </a:solidFill>
-                    </a:lnR>
-                    <a:lnT w="6350" cap="flat" cmpd="sng" algn="ctr">
-                      <a:solidFill>
-                        <a:srgbClr val="BDBDBD"/>
-                      </a:solidFill>
-                    </a:lnT>
-                    <a:lnB w="6350" cap="flat" cmpd="sng" algn="ctr">
-                      <a:solidFill>
-                        <a:srgbClr val="BDBDBD"/>
+                        <a:srgbClr val="808080"/>
+                      </a:solidFill>
+                    </a:lnL>
+                    <a:lnR w="6350" cap="flat" cmpd="sng" algn="ctr">
+                      <a:solidFill>
+                        <a:srgbClr val="808080"/>
+                      </a:solidFill>
+                    </a:lnR>
+                    <a:lnT w="6350" cap="flat" cmpd="sng" algn="ctr">
+                      <a:solidFill>
+                        <a:srgbClr val="808080"/>
+                      </a:solidFill>
+                    </a:lnT>
+                    <a:lnB w="6350" cap="flat" cmpd="sng" algn="ctr">
+                      <a:solidFill>
+                        <a:srgbClr val="808080"/>
                       </a:solidFill>
                     </a:lnB>
                   </a:tcPr>
@@ -14078,22 +14078,22 @@
                     </a:solidFill>
                     <a:lnL w="6350" cap="flat" cmpd="sng" algn="ctr">
                       <a:solidFill>
-                        <a:srgbClr val="BDBDBD"/>
-                      </a:solidFill>
-                    </a:lnL>
-                    <a:lnR w="6350" cap="flat" cmpd="sng" algn="ctr">
-                      <a:solidFill>
-                        <a:srgbClr val="BDBDBD"/>
-                      </a:solidFill>
-                    </a:lnR>
-                    <a:lnT w="6350" cap="flat" cmpd="sng" algn="ctr">
-                      <a:solidFill>
-                        <a:srgbClr val="BDBDBD"/>
-                      </a:solidFill>
-                    </a:lnT>
-                    <a:lnB w="6350" cap="flat" cmpd="sng" algn="ctr">
-                      <a:solidFill>
-                        <a:srgbClr val="BDBDBD"/>
+                        <a:srgbClr val="808080"/>
+                      </a:solidFill>
+                    </a:lnL>
+                    <a:lnR w="6350" cap="flat" cmpd="sng" algn="ctr">
+                      <a:solidFill>
+                        <a:srgbClr val="808080"/>
+                      </a:solidFill>
+                    </a:lnR>
+                    <a:lnT w="6350" cap="flat" cmpd="sng" algn="ctr">
+                      <a:solidFill>
+                        <a:srgbClr val="808080"/>
+                      </a:solidFill>
+                    </a:lnT>
+                    <a:lnB w="6350" cap="flat" cmpd="sng" algn="ctr">
+                      <a:solidFill>
+                        <a:srgbClr val="808080"/>
                       </a:solidFill>
                     </a:lnB>
                   </a:tcPr>
@@ -14121,22 +14121,22 @@
                     </a:solidFill>
                     <a:lnL w="6350" cap="flat" cmpd="sng" algn="ctr">
                       <a:solidFill>
-                        <a:srgbClr val="BDBDBD"/>
-                      </a:solidFill>
-                    </a:lnL>
-                    <a:lnR w="6350" cap="flat" cmpd="sng" algn="ctr">
-                      <a:solidFill>
-                        <a:srgbClr val="BDBDBD"/>
-                      </a:solidFill>
-                    </a:lnR>
-                    <a:lnT w="6350" cap="flat" cmpd="sng" algn="ctr">
-                      <a:solidFill>
-                        <a:srgbClr val="BDBDBD"/>
-                      </a:solidFill>
-                    </a:lnT>
-                    <a:lnB w="6350" cap="flat" cmpd="sng" algn="ctr">
-                      <a:solidFill>
-                        <a:srgbClr val="BDBDBD"/>
+                        <a:srgbClr val="808080"/>
+                      </a:solidFill>
+                    </a:lnL>
+                    <a:lnR w="6350" cap="flat" cmpd="sng" algn="ctr">
+                      <a:solidFill>
+                        <a:srgbClr val="808080"/>
+                      </a:solidFill>
+                    </a:lnR>
+                    <a:lnT w="6350" cap="flat" cmpd="sng" algn="ctr">
+                      <a:solidFill>
+                        <a:srgbClr val="808080"/>
+                      </a:solidFill>
+                    </a:lnT>
+                    <a:lnB w="6350" cap="flat" cmpd="sng" algn="ctr">
+                      <a:solidFill>
+                        <a:srgbClr val="808080"/>
                       </a:solidFill>
                     </a:lnB>
                   </a:tcPr>
@@ -14166,22 +14166,22 @@
                     </a:solidFill>
                     <a:lnL w="6350" cap="flat" cmpd="sng" algn="ctr">
                       <a:solidFill>
-                        <a:srgbClr val="BDBDBD"/>
-                      </a:solidFill>
-                    </a:lnL>
-                    <a:lnR w="6350" cap="flat" cmpd="sng" algn="ctr">
-                      <a:solidFill>
-                        <a:srgbClr val="BDBDBD"/>
-                      </a:solidFill>
-                    </a:lnR>
-                    <a:lnT w="6350" cap="flat" cmpd="sng" algn="ctr">
-                      <a:solidFill>
-                        <a:srgbClr val="BDBDBD"/>
-                      </a:solidFill>
-                    </a:lnT>
-                    <a:lnB w="6350" cap="flat" cmpd="sng" algn="ctr">
-                      <a:solidFill>
-                        <a:srgbClr val="BDBDBD"/>
+                        <a:srgbClr val="808080"/>
+                      </a:solidFill>
+                    </a:lnL>
+                    <a:lnR w="6350" cap="flat" cmpd="sng" algn="ctr">
+                      <a:solidFill>
+                        <a:srgbClr val="808080"/>
+                      </a:solidFill>
+                    </a:lnR>
+                    <a:lnT w="6350" cap="flat" cmpd="sng" algn="ctr">
+                      <a:solidFill>
+                        <a:srgbClr val="808080"/>
+                      </a:solidFill>
+                    </a:lnT>
+                    <a:lnB w="6350" cap="flat" cmpd="sng" algn="ctr">
+                      <a:solidFill>
+                        <a:srgbClr val="808080"/>
                       </a:solidFill>
                     </a:lnB>
                   </a:tcPr>
@@ -14209,22 +14209,22 @@
                     </a:solidFill>
                     <a:lnL w="6350" cap="flat" cmpd="sng" algn="ctr">
                       <a:solidFill>
-                        <a:srgbClr val="BDBDBD"/>
-                      </a:solidFill>
-                    </a:lnL>
-                    <a:lnR w="6350" cap="flat" cmpd="sng" algn="ctr">
-                      <a:solidFill>
-                        <a:srgbClr val="BDBDBD"/>
-                      </a:solidFill>
-                    </a:lnR>
-                    <a:lnT w="6350" cap="flat" cmpd="sng" algn="ctr">
-                      <a:solidFill>
-                        <a:srgbClr val="BDBDBD"/>
-                      </a:solidFill>
-                    </a:lnT>
-                    <a:lnB w="6350" cap="flat" cmpd="sng" algn="ctr">
-                      <a:solidFill>
-                        <a:srgbClr val="BDBDBD"/>
+                        <a:srgbClr val="808080"/>
+                      </a:solidFill>
+                    </a:lnL>
+                    <a:lnR w="6350" cap="flat" cmpd="sng" algn="ctr">
+                      <a:solidFill>
+                        <a:srgbClr val="808080"/>
+                      </a:solidFill>
+                    </a:lnR>
+                    <a:lnT w="6350" cap="flat" cmpd="sng" algn="ctr">
+                      <a:solidFill>
+                        <a:srgbClr val="808080"/>
+                      </a:solidFill>
+                    </a:lnT>
+                    <a:lnB w="6350" cap="flat" cmpd="sng" algn="ctr">
+                      <a:solidFill>
+                        <a:srgbClr val="808080"/>
                       </a:solidFill>
                     </a:lnB>
                   </a:tcPr>
@@ -14254,22 +14254,22 @@
                     </a:solidFill>
                     <a:lnL w="6350" cap="flat" cmpd="sng" algn="ctr">
                       <a:solidFill>
-                        <a:srgbClr val="BDBDBD"/>
-                      </a:solidFill>
-                    </a:lnL>
-                    <a:lnR w="6350" cap="flat" cmpd="sng" algn="ctr">
-                      <a:solidFill>
-                        <a:srgbClr val="BDBDBD"/>
-                      </a:solidFill>
-                    </a:lnR>
-                    <a:lnT w="6350" cap="flat" cmpd="sng" algn="ctr">
-                      <a:solidFill>
-                        <a:srgbClr val="BDBDBD"/>
-                      </a:solidFill>
-                    </a:lnT>
-                    <a:lnB w="6350" cap="flat" cmpd="sng" algn="ctr">
-                      <a:solidFill>
-                        <a:srgbClr val="BDBDBD"/>
+                        <a:srgbClr val="808080"/>
+                      </a:solidFill>
+                    </a:lnL>
+                    <a:lnR w="6350" cap="flat" cmpd="sng" algn="ctr">
+                      <a:solidFill>
+                        <a:srgbClr val="808080"/>
+                      </a:solidFill>
+                    </a:lnR>
+                    <a:lnT w="6350" cap="flat" cmpd="sng" algn="ctr">
+                      <a:solidFill>
+                        <a:srgbClr val="808080"/>
+                      </a:solidFill>
+                    </a:lnT>
+                    <a:lnB w="6350" cap="flat" cmpd="sng" algn="ctr">
+                      <a:solidFill>
+                        <a:srgbClr val="808080"/>
                       </a:solidFill>
                     </a:lnB>
                   </a:tcPr>
@@ -14297,22 +14297,22 @@
                     </a:solidFill>
                     <a:lnL w="6350" cap="flat" cmpd="sng" algn="ctr">
                       <a:solidFill>
-                        <a:srgbClr val="BDBDBD"/>
-                      </a:solidFill>
-                    </a:lnL>
-                    <a:lnR w="6350" cap="flat" cmpd="sng" algn="ctr">
-                      <a:solidFill>
-                        <a:srgbClr val="BDBDBD"/>
-                      </a:solidFill>
-                    </a:lnR>
-                    <a:lnT w="6350" cap="flat" cmpd="sng" algn="ctr">
-                      <a:solidFill>
-                        <a:srgbClr val="BDBDBD"/>
-                      </a:solidFill>
-                    </a:lnT>
-                    <a:lnB w="6350" cap="flat" cmpd="sng" algn="ctr">
-                      <a:solidFill>
-                        <a:srgbClr val="BDBDBD"/>
+                        <a:srgbClr val="808080"/>
+                      </a:solidFill>
+                    </a:lnL>
+                    <a:lnR w="6350" cap="flat" cmpd="sng" algn="ctr">
+                      <a:solidFill>
+                        <a:srgbClr val="808080"/>
+                      </a:solidFill>
+                    </a:lnR>
+                    <a:lnT w="6350" cap="flat" cmpd="sng" algn="ctr">
+                      <a:solidFill>
+                        <a:srgbClr val="808080"/>
+                      </a:solidFill>
+                    </a:lnT>
+                    <a:lnB w="6350" cap="flat" cmpd="sng" algn="ctr">
+                      <a:solidFill>
+                        <a:srgbClr val="808080"/>
                       </a:solidFill>
                     </a:lnB>
                   </a:tcPr>
@@ -14589,22 +14589,22 @@
                     </a:solidFill>
                     <a:lnL w="6350" cap="flat" cmpd="sng" algn="ctr">
                       <a:solidFill>
-                        <a:srgbClr val="BDBDBD"/>
-                      </a:solidFill>
-                    </a:lnL>
-                    <a:lnR w="6350" cap="flat" cmpd="sng" algn="ctr">
-                      <a:solidFill>
-                        <a:srgbClr val="BDBDBD"/>
-                      </a:solidFill>
-                    </a:lnR>
-                    <a:lnT w="6350" cap="flat" cmpd="sng" algn="ctr">
-                      <a:solidFill>
-                        <a:srgbClr val="BDBDBD"/>
-                      </a:solidFill>
-                    </a:lnT>
-                    <a:lnB w="6350" cap="flat" cmpd="sng" algn="ctr">
-                      <a:solidFill>
-                        <a:srgbClr val="BDBDBD"/>
+                        <a:srgbClr val="808080"/>
+                      </a:solidFill>
+                    </a:lnL>
+                    <a:lnR w="6350" cap="flat" cmpd="sng" algn="ctr">
+                      <a:solidFill>
+                        <a:srgbClr val="808080"/>
+                      </a:solidFill>
+                    </a:lnR>
+                    <a:lnT w="6350" cap="flat" cmpd="sng" algn="ctr">
+                      <a:solidFill>
+                        <a:srgbClr val="808080"/>
+                      </a:solidFill>
+                    </a:lnT>
+                    <a:lnB w="6350" cap="flat" cmpd="sng" algn="ctr">
+                      <a:solidFill>
+                        <a:srgbClr val="808080"/>
                       </a:solidFill>
                     </a:lnB>
                   </a:tcPr>
@@ -14632,22 +14632,22 @@
                     </a:solidFill>
                     <a:lnL w="6350" cap="flat" cmpd="sng" algn="ctr">
                       <a:solidFill>
-                        <a:srgbClr val="BDBDBD"/>
-                      </a:solidFill>
-                    </a:lnL>
-                    <a:lnR w="6350" cap="flat" cmpd="sng" algn="ctr">
-                      <a:solidFill>
-                        <a:srgbClr val="BDBDBD"/>
-                      </a:solidFill>
-                    </a:lnR>
-                    <a:lnT w="6350" cap="flat" cmpd="sng" algn="ctr">
-                      <a:solidFill>
-                        <a:srgbClr val="BDBDBD"/>
-                      </a:solidFill>
-                    </a:lnT>
-                    <a:lnB w="6350" cap="flat" cmpd="sng" algn="ctr">
-                      <a:solidFill>
-                        <a:srgbClr val="BDBDBD"/>
+                        <a:srgbClr val="808080"/>
+                      </a:solidFill>
+                    </a:lnL>
+                    <a:lnR w="6350" cap="flat" cmpd="sng" algn="ctr">
+                      <a:solidFill>
+                        <a:srgbClr val="808080"/>
+                      </a:solidFill>
+                    </a:lnR>
+                    <a:lnT w="6350" cap="flat" cmpd="sng" algn="ctr">
+                      <a:solidFill>
+                        <a:srgbClr val="808080"/>
+                      </a:solidFill>
+                    </a:lnT>
+                    <a:lnB w="6350" cap="flat" cmpd="sng" algn="ctr">
+                      <a:solidFill>
+                        <a:srgbClr val="808080"/>
                       </a:solidFill>
                     </a:lnB>
                   </a:tcPr>
@@ -14675,22 +14675,22 @@
                     </a:solidFill>
                     <a:lnL w="6350" cap="flat" cmpd="sng" algn="ctr">
                       <a:solidFill>
-                        <a:srgbClr val="BDBDBD"/>
-                      </a:solidFill>
-                    </a:lnL>
-                    <a:lnR w="6350" cap="flat" cmpd="sng" algn="ctr">
-                      <a:solidFill>
-                        <a:srgbClr val="BDBDBD"/>
-                      </a:solidFill>
-                    </a:lnR>
-                    <a:lnT w="6350" cap="flat" cmpd="sng" algn="ctr">
-                      <a:solidFill>
-                        <a:srgbClr val="BDBDBD"/>
-                      </a:solidFill>
-                    </a:lnT>
-                    <a:lnB w="6350" cap="flat" cmpd="sng" algn="ctr">
-                      <a:solidFill>
-                        <a:srgbClr val="BDBDBD"/>
+                        <a:srgbClr val="808080"/>
+                      </a:solidFill>
+                    </a:lnL>
+                    <a:lnR w="6350" cap="flat" cmpd="sng" algn="ctr">
+                      <a:solidFill>
+                        <a:srgbClr val="808080"/>
+                      </a:solidFill>
+                    </a:lnR>
+                    <a:lnT w="6350" cap="flat" cmpd="sng" algn="ctr">
+                      <a:solidFill>
+                        <a:srgbClr val="808080"/>
+                      </a:solidFill>
+                    </a:lnT>
+                    <a:lnB w="6350" cap="flat" cmpd="sng" algn="ctr">
+                      <a:solidFill>
+                        <a:srgbClr val="808080"/>
                       </a:solidFill>
                     </a:lnB>
                   </a:tcPr>
@@ -14720,22 +14720,22 @@
                     </a:solidFill>
                     <a:lnL w="6350" cap="flat" cmpd="sng" algn="ctr">
                       <a:solidFill>
-                        <a:srgbClr val="BDBDBD"/>
-                      </a:solidFill>
-                    </a:lnL>
-                    <a:lnR w="6350" cap="flat" cmpd="sng" algn="ctr">
-                      <a:solidFill>
-                        <a:srgbClr val="BDBDBD"/>
-                      </a:solidFill>
-                    </a:lnR>
-                    <a:lnT w="6350" cap="flat" cmpd="sng" algn="ctr">
-                      <a:solidFill>
-                        <a:srgbClr val="BDBDBD"/>
-                      </a:solidFill>
-                    </a:lnT>
-                    <a:lnB w="6350" cap="flat" cmpd="sng" algn="ctr">
-                      <a:solidFill>
-                        <a:srgbClr val="BDBDBD"/>
+                        <a:srgbClr val="808080"/>
+                      </a:solidFill>
+                    </a:lnL>
+                    <a:lnR w="6350" cap="flat" cmpd="sng" algn="ctr">
+                      <a:solidFill>
+                        <a:srgbClr val="808080"/>
+                      </a:solidFill>
+                    </a:lnR>
+                    <a:lnT w="6350" cap="flat" cmpd="sng" algn="ctr">
+                      <a:solidFill>
+                        <a:srgbClr val="808080"/>
+                      </a:solidFill>
+                    </a:lnT>
+                    <a:lnB w="6350" cap="flat" cmpd="sng" algn="ctr">
+                      <a:solidFill>
+                        <a:srgbClr val="808080"/>
                       </a:solidFill>
                     </a:lnB>
                   </a:tcPr>
@@ -14763,22 +14763,22 @@
                     </a:solidFill>
                     <a:lnL w="6350" cap="flat" cmpd="sng" algn="ctr">
                       <a:solidFill>
-                        <a:srgbClr val="BDBDBD"/>
-                      </a:solidFill>
-                    </a:lnL>
-                    <a:lnR w="6350" cap="flat" cmpd="sng" algn="ctr">
-                      <a:solidFill>
-                        <a:srgbClr val="BDBDBD"/>
-                      </a:solidFill>
-                    </a:lnR>
-                    <a:lnT w="6350" cap="flat" cmpd="sng" algn="ctr">
-                      <a:solidFill>
-                        <a:srgbClr val="BDBDBD"/>
-                      </a:solidFill>
-                    </a:lnT>
-                    <a:lnB w="6350" cap="flat" cmpd="sng" algn="ctr">
-                      <a:solidFill>
-                        <a:srgbClr val="BDBDBD"/>
+                        <a:srgbClr val="808080"/>
+                      </a:solidFill>
+                    </a:lnL>
+                    <a:lnR w="6350" cap="flat" cmpd="sng" algn="ctr">
+                      <a:solidFill>
+                        <a:srgbClr val="808080"/>
+                      </a:solidFill>
+                    </a:lnR>
+                    <a:lnT w="6350" cap="flat" cmpd="sng" algn="ctr">
+                      <a:solidFill>
+                        <a:srgbClr val="808080"/>
+                      </a:solidFill>
+                    </a:lnT>
+                    <a:lnB w="6350" cap="flat" cmpd="sng" algn="ctr">
+                      <a:solidFill>
+                        <a:srgbClr val="808080"/>
                       </a:solidFill>
                     </a:lnB>
                   </a:tcPr>
@@ -14806,22 +14806,22 @@
                     </a:solidFill>
                     <a:lnL w="6350" cap="flat" cmpd="sng" algn="ctr">
                       <a:solidFill>
-                        <a:srgbClr val="BDBDBD"/>
-                      </a:solidFill>
-                    </a:lnL>
-                    <a:lnR w="6350" cap="flat" cmpd="sng" algn="ctr">
-                      <a:solidFill>
-                        <a:srgbClr val="BDBDBD"/>
-                      </a:solidFill>
-                    </a:lnR>
-                    <a:lnT w="6350" cap="flat" cmpd="sng" algn="ctr">
-                      <a:solidFill>
-                        <a:srgbClr val="BDBDBD"/>
-                      </a:solidFill>
-                    </a:lnT>
-                    <a:lnB w="6350" cap="flat" cmpd="sng" algn="ctr">
-                      <a:solidFill>
-                        <a:srgbClr val="BDBDBD"/>
+                        <a:srgbClr val="808080"/>
+                      </a:solidFill>
+                    </a:lnL>
+                    <a:lnR w="6350" cap="flat" cmpd="sng" algn="ctr">
+                      <a:solidFill>
+                        <a:srgbClr val="808080"/>
+                      </a:solidFill>
+                    </a:lnR>
+                    <a:lnT w="6350" cap="flat" cmpd="sng" algn="ctr">
+                      <a:solidFill>
+                        <a:srgbClr val="808080"/>
+                      </a:solidFill>
+                    </a:lnT>
+                    <a:lnB w="6350" cap="flat" cmpd="sng" algn="ctr">
+                      <a:solidFill>
+                        <a:srgbClr val="808080"/>
                       </a:solidFill>
                     </a:lnB>
                   </a:tcPr>
@@ -14851,22 +14851,22 @@
                     </a:solidFill>
                     <a:lnL w="6350" cap="flat" cmpd="sng" algn="ctr">
                       <a:solidFill>
-                        <a:srgbClr val="BDBDBD"/>
-                      </a:solidFill>
-                    </a:lnL>
-                    <a:lnR w="6350" cap="flat" cmpd="sng" algn="ctr">
-                      <a:solidFill>
-                        <a:srgbClr val="BDBDBD"/>
-                      </a:solidFill>
-                    </a:lnR>
-                    <a:lnT w="6350" cap="flat" cmpd="sng" algn="ctr">
-                      <a:solidFill>
-                        <a:srgbClr val="BDBDBD"/>
-                      </a:solidFill>
-                    </a:lnT>
-                    <a:lnB w="6350" cap="flat" cmpd="sng" algn="ctr">
-                      <a:solidFill>
-                        <a:srgbClr val="BDBDBD"/>
+                        <a:srgbClr val="808080"/>
+                      </a:solidFill>
+                    </a:lnL>
+                    <a:lnR w="6350" cap="flat" cmpd="sng" algn="ctr">
+                      <a:solidFill>
+                        <a:srgbClr val="808080"/>
+                      </a:solidFill>
+                    </a:lnR>
+                    <a:lnT w="6350" cap="flat" cmpd="sng" algn="ctr">
+                      <a:solidFill>
+                        <a:srgbClr val="808080"/>
+                      </a:solidFill>
+                    </a:lnT>
+                    <a:lnB w="6350" cap="flat" cmpd="sng" algn="ctr">
+                      <a:solidFill>
+                        <a:srgbClr val="808080"/>
                       </a:solidFill>
                     </a:lnB>
                   </a:tcPr>
@@ -14894,22 +14894,22 @@
                     </a:solidFill>
                     <a:lnL w="6350" cap="flat" cmpd="sng" algn="ctr">
                       <a:solidFill>
-                        <a:srgbClr val="BDBDBD"/>
-                      </a:solidFill>
-                    </a:lnL>
-                    <a:lnR w="6350" cap="flat" cmpd="sng" algn="ctr">
-                      <a:solidFill>
-                        <a:srgbClr val="BDBDBD"/>
-                      </a:solidFill>
-                    </a:lnR>
-                    <a:lnT w="6350" cap="flat" cmpd="sng" algn="ctr">
-                      <a:solidFill>
-                        <a:srgbClr val="BDBDBD"/>
-                      </a:solidFill>
-                    </a:lnT>
-                    <a:lnB w="6350" cap="flat" cmpd="sng" algn="ctr">
-                      <a:solidFill>
-                        <a:srgbClr val="BDBDBD"/>
+                        <a:srgbClr val="808080"/>
+                      </a:solidFill>
+                    </a:lnL>
+                    <a:lnR w="6350" cap="flat" cmpd="sng" algn="ctr">
+                      <a:solidFill>
+                        <a:srgbClr val="808080"/>
+                      </a:solidFill>
+                    </a:lnR>
+                    <a:lnT w="6350" cap="flat" cmpd="sng" algn="ctr">
+                      <a:solidFill>
+                        <a:srgbClr val="808080"/>
+                      </a:solidFill>
+                    </a:lnT>
+                    <a:lnB w="6350" cap="flat" cmpd="sng" algn="ctr">
+                      <a:solidFill>
+                        <a:srgbClr val="808080"/>
                       </a:solidFill>
                     </a:lnB>
                   </a:tcPr>
@@ -14937,22 +14937,22 @@
                     </a:solidFill>
                     <a:lnL w="6350" cap="flat" cmpd="sng" algn="ctr">
                       <a:solidFill>
-                        <a:srgbClr val="BDBDBD"/>
-                      </a:solidFill>
-                    </a:lnL>
-                    <a:lnR w="6350" cap="flat" cmpd="sng" algn="ctr">
-                      <a:solidFill>
-                        <a:srgbClr val="BDBDBD"/>
-                      </a:solidFill>
-                    </a:lnR>
-                    <a:lnT w="6350" cap="flat" cmpd="sng" algn="ctr">
-                      <a:solidFill>
-                        <a:srgbClr val="BDBDBD"/>
-                      </a:solidFill>
-                    </a:lnT>
-                    <a:lnB w="6350" cap="flat" cmpd="sng" algn="ctr">
-                      <a:solidFill>
-                        <a:srgbClr val="BDBDBD"/>
+                        <a:srgbClr val="808080"/>
+                      </a:solidFill>
+                    </a:lnL>
+                    <a:lnR w="6350" cap="flat" cmpd="sng" algn="ctr">
+                      <a:solidFill>
+                        <a:srgbClr val="808080"/>
+                      </a:solidFill>
+                    </a:lnR>
+                    <a:lnT w="6350" cap="flat" cmpd="sng" algn="ctr">
+                      <a:solidFill>
+                        <a:srgbClr val="808080"/>
+                      </a:solidFill>
+                    </a:lnT>
+                    <a:lnB w="6350" cap="flat" cmpd="sng" algn="ctr">
+                      <a:solidFill>
+                        <a:srgbClr val="808080"/>
                       </a:solidFill>
                     </a:lnB>
                   </a:tcPr>
@@ -14982,22 +14982,22 @@
                     </a:solidFill>
                     <a:lnL w="6350" cap="flat" cmpd="sng" algn="ctr">
                       <a:solidFill>
-                        <a:srgbClr val="BDBDBD"/>
-                      </a:solidFill>
-                    </a:lnL>
-                    <a:lnR w="6350" cap="flat" cmpd="sng" algn="ctr">
-                      <a:solidFill>
-                        <a:srgbClr val="BDBDBD"/>
-                      </a:solidFill>
-                    </a:lnR>
-                    <a:lnT w="6350" cap="flat" cmpd="sng" algn="ctr">
-                      <a:solidFill>
-                        <a:srgbClr val="BDBDBD"/>
-                      </a:solidFill>
-                    </a:lnT>
-                    <a:lnB w="6350" cap="flat" cmpd="sng" algn="ctr">
-                      <a:solidFill>
-                        <a:srgbClr val="BDBDBD"/>
+                        <a:srgbClr val="808080"/>
+                      </a:solidFill>
+                    </a:lnL>
+                    <a:lnR w="6350" cap="flat" cmpd="sng" algn="ctr">
+                      <a:solidFill>
+                        <a:srgbClr val="808080"/>
+                      </a:solidFill>
+                    </a:lnR>
+                    <a:lnT w="6350" cap="flat" cmpd="sng" algn="ctr">
+                      <a:solidFill>
+                        <a:srgbClr val="808080"/>
+                      </a:solidFill>
+                    </a:lnT>
+                    <a:lnB w="6350" cap="flat" cmpd="sng" algn="ctr">
+                      <a:solidFill>
+                        <a:srgbClr val="808080"/>
                       </a:solidFill>
                     </a:lnB>
                   </a:tcPr>
@@ -15025,22 +15025,22 @@
                     </a:solidFill>
                     <a:lnL w="6350" cap="flat" cmpd="sng" algn="ctr">
                       <a:solidFill>
-                        <a:srgbClr val="BDBDBD"/>
-                      </a:solidFill>
-                    </a:lnL>
-                    <a:lnR w="6350" cap="flat" cmpd="sng" algn="ctr">
-                      <a:solidFill>
-                        <a:srgbClr val="BDBDBD"/>
-                      </a:solidFill>
-                    </a:lnR>
-                    <a:lnT w="6350" cap="flat" cmpd="sng" algn="ctr">
-                      <a:solidFill>
-                        <a:srgbClr val="BDBDBD"/>
-                      </a:solidFill>
-                    </a:lnT>
-                    <a:lnB w="6350" cap="flat" cmpd="sng" algn="ctr">
-                      <a:solidFill>
-                        <a:srgbClr val="BDBDBD"/>
+                        <a:srgbClr val="808080"/>
+                      </a:solidFill>
+                    </a:lnL>
+                    <a:lnR w="6350" cap="flat" cmpd="sng" algn="ctr">
+                      <a:solidFill>
+                        <a:srgbClr val="808080"/>
+                      </a:solidFill>
+                    </a:lnR>
+                    <a:lnT w="6350" cap="flat" cmpd="sng" algn="ctr">
+                      <a:solidFill>
+                        <a:srgbClr val="808080"/>
+                      </a:solidFill>
+                    </a:lnT>
+                    <a:lnB w="6350" cap="flat" cmpd="sng" algn="ctr">
+                      <a:solidFill>
+                        <a:srgbClr val="808080"/>
                       </a:solidFill>
                     </a:lnB>
                   </a:tcPr>
@@ -15068,22 +15068,22 @@
                     </a:solidFill>
                     <a:lnL w="6350" cap="flat" cmpd="sng" algn="ctr">
                       <a:solidFill>
-                        <a:srgbClr val="BDBDBD"/>
-                      </a:solidFill>
-                    </a:lnL>
-                    <a:lnR w="6350" cap="flat" cmpd="sng" algn="ctr">
-                      <a:solidFill>
-                        <a:srgbClr val="BDBDBD"/>
-                      </a:solidFill>
-                    </a:lnR>
-                    <a:lnT w="6350" cap="flat" cmpd="sng" algn="ctr">
-                      <a:solidFill>
-                        <a:srgbClr val="BDBDBD"/>
-                      </a:solidFill>
-                    </a:lnT>
-                    <a:lnB w="6350" cap="flat" cmpd="sng" algn="ctr">
-                      <a:solidFill>
-                        <a:srgbClr val="BDBDBD"/>
+                        <a:srgbClr val="808080"/>
+                      </a:solidFill>
+                    </a:lnL>
+                    <a:lnR w="6350" cap="flat" cmpd="sng" algn="ctr">
+                      <a:solidFill>
+                        <a:srgbClr val="808080"/>
+                      </a:solidFill>
+                    </a:lnR>
+                    <a:lnT w="6350" cap="flat" cmpd="sng" algn="ctr">
+                      <a:solidFill>
+                        <a:srgbClr val="808080"/>
+                      </a:solidFill>
+                    </a:lnT>
+                    <a:lnB w="6350" cap="flat" cmpd="sng" algn="ctr">
+                      <a:solidFill>
+                        <a:srgbClr val="808080"/>
                       </a:solidFill>
                     </a:lnB>
                   </a:tcPr>
@@ -15113,22 +15113,22 @@
                     </a:solidFill>
                     <a:lnL w="6350" cap="flat" cmpd="sng" algn="ctr">
                       <a:solidFill>
-                        <a:srgbClr val="BDBDBD"/>
-                      </a:solidFill>
-                    </a:lnL>
-                    <a:lnR w="6350" cap="flat" cmpd="sng" algn="ctr">
-                      <a:solidFill>
-                        <a:srgbClr val="BDBDBD"/>
-                      </a:solidFill>
-                    </a:lnR>
-                    <a:lnT w="6350" cap="flat" cmpd="sng" algn="ctr">
-                      <a:solidFill>
-                        <a:srgbClr val="BDBDBD"/>
-                      </a:solidFill>
-                    </a:lnT>
-                    <a:lnB w="6350" cap="flat" cmpd="sng" algn="ctr">
-                      <a:solidFill>
-                        <a:srgbClr val="BDBDBD"/>
+                        <a:srgbClr val="808080"/>
+                      </a:solidFill>
+                    </a:lnL>
+                    <a:lnR w="6350" cap="flat" cmpd="sng" algn="ctr">
+                      <a:solidFill>
+                        <a:srgbClr val="808080"/>
+                      </a:solidFill>
+                    </a:lnR>
+                    <a:lnT w="6350" cap="flat" cmpd="sng" algn="ctr">
+                      <a:solidFill>
+                        <a:srgbClr val="808080"/>
+                      </a:solidFill>
+                    </a:lnT>
+                    <a:lnB w="6350" cap="flat" cmpd="sng" algn="ctr">
+                      <a:solidFill>
+                        <a:srgbClr val="808080"/>
                       </a:solidFill>
                     </a:lnB>
                   </a:tcPr>
@@ -15156,22 +15156,22 @@
                     </a:solidFill>
                     <a:lnL w="6350" cap="flat" cmpd="sng" algn="ctr">
                       <a:solidFill>
-                        <a:srgbClr val="BDBDBD"/>
-                      </a:solidFill>
-                    </a:lnL>
-                    <a:lnR w="6350" cap="flat" cmpd="sng" algn="ctr">
-                      <a:solidFill>
-                        <a:srgbClr val="BDBDBD"/>
-                      </a:solidFill>
-                    </a:lnR>
-                    <a:lnT w="6350" cap="flat" cmpd="sng" algn="ctr">
-                      <a:solidFill>
-                        <a:srgbClr val="BDBDBD"/>
-                      </a:solidFill>
-                    </a:lnT>
-                    <a:lnB w="6350" cap="flat" cmpd="sng" algn="ctr">
-                      <a:solidFill>
-                        <a:srgbClr val="BDBDBD"/>
+                        <a:srgbClr val="808080"/>
+                      </a:solidFill>
+                    </a:lnL>
+                    <a:lnR w="6350" cap="flat" cmpd="sng" algn="ctr">
+                      <a:solidFill>
+                        <a:srgbClr val="808080"/>
+                      </a:solidFill>
+                    </a:lnR>
+                    <a:lnT w="6350" cap="flat" cmpd="sng" algn="ctr">
+                      <a:solidFill>
+                        <a:srgbClr val="808080"/>
+                      </a:solidFill>
+                    </a:lnT>
+                    <a:lnB w="6350" cap="flat" cmpd="sng" algn="ctr">
+                      <a:solidFill>
+                        <a:srgbClr val="808080"/>
                       </a:solidFill>
                     </a:lnB>
                   </a:tcPr>
@@ -15199,22 +15199,22 @@
                     </a:solidFill>
                     <a:lnL w="6350" cap="flat" cmpd="sng" algn="ctr">
                       <a:solidFill>
-                        <a:srgbClr val="BDBDBD"/>
-                      </a:solidFill>
-                    </a:lnL>
-                    <a:lnR w="6350" cap="flat" cmpd="sng" algn="ctr">
-                      <a:solidFill>
-                        <a:srgbClr val="BDBDBD"/>
-                      </a:solidFill>
-                    </a:lnR>
-                    <a:lnT w="6350" cap="flat" cmpd="sng" algn="ctr">
-                      <a:solidFill>
-                        <a:srgbClr val="BDBDBD"/>
-                      </a:solidFill>
-                    </a:lnT>
-                    <a:lnB w="6350" cap="flat" cmpd="sng" algn="ctr">
-                      <a:solidFill>
-                        <a:srgbClr val="BDBDBD"/>
+                        <a:srgbClr val="808080"/>
+                      </a:solidFill>
+                    </a:lnL>
+                    <a:lnR w="6350" cap="flat" cmpd="sng" algn="ctr">
+                      <a:solidFill>
+                        <a:srgbClr val="808080"/>
+                      </a:solidFill>
+                    </a:lnR>
+                    <a:lnT w="6350" cap="flat" cmpd="sng" algn="ctr">
+                      <a:solidFill>
+                        <a:srgbClr val="808080"/>
+                      </a:solidFill>
+                    </a:lnT>
+                    <a:lnB w="6350" cap="flat" cmpd="sng" algn="ctr">
+                      <a:solidFill>
+                        <a:srgbClr val="808080"/>
                       </a:solidFill>
                     </a:lnB>
                   </a:tcPr>
@@ -15244,22 +15244,22 @@
                     </a:solidFill>
                     <a:lnL w="6350" cap="flat" cmpd="sng" algn="ctr">
                       <a:solidFill>
-                        <a:srgbClr val="BDBDBD"/>
-                      </a:solidFill>
-                    </a:lnL>
-                    <a:lnR w="6350" cap="flat" cmpd="sng" algn="ctr">
-                      <a:solidFill>
-                        <a:srgbClr val="BDBDBD"/>
-                      </a:solidFill>
-                    </a:lnR>
-                    <a:lnT w="6350" cap="flat" cmpd="sng" algn="ctr">
-                      <a:solidFill>
-                        <a:srgbClr val="BDBDBD"/>
-                      </a:solidFill>
-                    </a:lnT>
-                    <a:lnB w="6350" cap="flat" cmpd="sng" algn="ctr">
-                      <a:solidFill>
-                        <a:srgbClr val="BDBDBD"/>
+                        <a:srgbClr val="808080"/>
+                      </a:solidFill>
+                    </a:lnL>
+                    <a:lnR w="6350" cap="flat" cmpd="sng" algn="ctr">
+                      <a:solidFill>
+                        <a:srgbClr val="808080"/>
+                      </a:solidFill>
+                    </a:lnR>
+                    <a:lnT w="6350" cap="flat" cmpd="sng" algn="ctr">
+                      <a:solidFill>
+                        <a:srgbClr val="808080"/>
+                      </a:solidFill>
+                    </a:lnT>
+                    <a:lnB w="6350" cap="flat" cmpd="sng" algn="ctr">
+                      <a:solidFill>
+                        <a:srgbClr val="808080"/>
                       </a:solidFill>
                     </a:lnB>
                   </a:tcPr>
@@ -15287,22 +15287,22 @@
                     </a:solidFill>
                     <a:lnL w="6350" cap="flat" cmpd="sng" algn="ctr">
                       <a:solidFill>
-                        <a:srgbClr val="BDBDBD"/>
-                      </a:solidFill>
-                    </a:lnL>
-                    <a:lnR w="6350" cap="flat" cmpd="sng" algn="ctr">
-                      <a:solidFill>
-                        <a:srgbClr val="BDBDBD"/>
-                      </a:solidFill>
-                    </a:lnR>
-                    <a:lnT w="6350" cap="flat" cmpd="sng" algn="ctr">
-                      <a:solidFill>
-                        <a:srgbClr val="BDBDBD"/>
-                      </a:solidFill>
-                    </a:lnT>
-                    <a:lnB w="6350" cap="flat" cmpd="sng" algn="ctr">
-                      <a:solidFill>
-                        <a:srgbClr val="BDBDBD"/>
+                        <a:srgbClr val="808080"/>
+                      </a:solidFill>
+                    </a:lnL>
+                    <a:lnR w="6350" cap="flat" cmpd="sng" algn="ctr">
+                      <a:solidFill>
+                        <a:srgbClr val="808080"/>
+                      </a:solidFill>
+                    </a:lnR>
+                    <a:lnT w="6350" cap="flat" cmpd="sng" algn="ctr">
+                      <a:solidFill>
+                        <a:srgbClr val="808080"/>
+                      </a:solidFill>
+                    </a:lnT>
+                    <a:lnB w="6350" cap="flat" cmpd="sng" algn="ctr">
+                      <a:solidFill>
+                        <a:srgbClr val="808080"/>
                       </a:solidFill>
                     </a:lnB>
                   </a:tcPr>
@@ -15330,22 +15330,22 @@
                     </a:solidFill>
                     <a:lnL w="6350" cap="flat" cmpd="sng" algn="ctr">
                       <a:solidFill>
-                        <a:srgbClr val="BDBDBD"/>
-                      </a:solidFill>
-                    </a:lnL>
-                    <a:lnR w="6350" cap="flat" cmpd="sng" algn="ctr">
-                      <a:solidFill>
-                        <a:srgbClr val="BDBDBD"/>
-                      </a:solidFill>
-                    </a:lnR>
-                    <a:lnT w="6350" cap="flat" cmpd="sng" algn="ctr">
-                      <a:solidFill>
-                        <a:srgbClr val="BDBDBD"/>
-                      </a:solidFill>
-                    </a:lnT>
-                    <a:lnB w="6350" cap="flat" cmpd="sng" algn="ctr">
-                      <a:solidFill>
-                        <a:srgbClr val="BDBDBD"/>
+                        <a:srgbClr val="808080"/>
+                      </a:solidFill>
+                    </a:lnL>
+                    <a:lnR w="6350" cap="flat" cmpd="sng" algn="ctr">
+                      <a:solidFill>
+                        <a:srgbClr val="808080"/>
+                      </a:solidFill>
+                    </a:lnR>
+                    <a:lnT w="6350" cap="flat" cmpd="sng" algn="ctr">
+                      <a:solidFill>
+                        <a:srgbClr val="808080"/>
+                      </a:solidFill>
+                    </a:lnT>
+                    <a:lnB w="6350" cap="flat" cmpd="sng" algn="ctr">
+                      <a:solidFill>
+                        <a:srgbClr val="808080"/>
                       </a:solidFill>
                     </a:lnB>
                   </a:tcPr>
@@ -15437,22 +15437,22 @@
                     </a:solidFill>
                     <a:lnL w="6350" cap="flat" cmpd="sng" algn="ctr">
                       <a:solidFill>
-                        <a:srgbClr val="BDBDBD"/>
-                      </a:solidFill>
-                    </a:lnL>
-                    <a:lnR w="6350" cap="flat" cmpd="sng" algn="ctr">
-                      <a:solidFill>
-                        <a:srgbClr val="BDBDBD"/>
-                      </a:solidFill>
-                    </a:lnR>
-                    <a:lnT w="6350" cap="flat" cmpd="sng" algn="ctr">
-                      <a:solidFill>
-                        <a:srgbClr val="BDBDBD"/>
-                      </a:solidFill>
-                    </a:lnT>
-                    <a:lnB w="6350" cap="flat" cmpd="sng" algn="ctr">
-                      <a:solidFill>
-                        <a:srgbClr val="BDBDBD"/>
+                        <a:srgbClr val="808080"/>
+                      </a:solidFill>
+                    </a:lnL>
+                    <a:lnR w="6350" cap="flat" cmpd="sng" algn="ctr">
+                      <a:solidFill>
+                        <a:srgbClr val="808080"/>
+                      </a:solidFill>
+                    </a:lnR>
+                    <a:lnT w="6350" cap="flat" cmpd="sng" algn="ctr">
+                      <a:solidFill>
+                        <a:srgbClr val="808080"/>
+                      </a:solidFill>
+                    </a:lnT>
+                    <a:lnB w="6350" cap="flat" cmpd="sng" algn="ctr">
+                      <a:solidFill>
+                        <a:srgbClr val="808080"/>
                       </a:solidFill>
                     </a:lnB>
                   </a:tcPr>
@@ -15480,22 +15480,22 @@
                     </a:solidFill>
                     <a:lnL w="6350" cap="flat" cmpd="sng" algn="ctr">
                       <a:solidFill>
-                        <a:srgbClr val="BDBDBD"/>
-                      </a:solidFill>
-                    </a:lnL>
-                    <a:lnR w="6350" cap="flat" cmpd="sng" algn="ctr">
-                      <a:solidFill>
-                        <a:srgbClr val="BDBDBD"/>
-                      </a:solidFill>
-                    </a:lnR>
-                    <a:lnT w="6350" cap="flat" cmpd="sng" algn="ctr">
-                      <a:solidFill>
-                        <a:srgbClr val="BDBDBD"/>
-                      </a:solidFill>
-                    </a:lnT>
-                    <a:lnB w="6350" cap="flat" cmpd="sng" algn="ctr">
-                      <a:solidFill>
-                        <a:srgbClr val="BDBDBD"/>
+                        <a:srgbClr val="808080"/>
+                      </a:solidFill>
+                    </a:lnL>
+                    <a:lnR w="6350" cap="flat" cmpd="sng" algn="ctr">
+                      <a:solidFill>
+                        <a:srgbClr val="808080"/>
+                      </a:solidFill>
+                    </a:lnR>
+                    <a:lnT w="6350" cap="flat" cmpd="sng" algn="ctr">
+                      <a:solidFill>
+                        <a:srgbClr val="808080"/>
+                      </a:solidFill>
+                    </a:lnT>
+                    <a:lnB w="6350" cap="flat" cmpd="sng" algn="ctr">
+                      <a:solidFill>
+                        <a:srgbClr val="808080"/>
                       </a:solidFill>
                     </a:lnB>
                   </a:tcPr>
@@ -15523,22 +15523,22 @@
                     </a:solidFill>
                     <a:lnL w="6350" cap="flat" cmpd="sng" algn="ctr">
                       <a:solidFill>
-                        <a:srgbClr val="BDBDBD"/>
-                      </a:solidFill>
-                    </a:lnL>
-                    <a:lnR w="6350" cap="flat" cmpd="sng" algn="ctr">
-                      <a:solidFill>
-                        <a:srgbClr val="BDBDBD"/>
-                      </a:solidFill>
-                    </a:lnR>
-                    <a:lnT w="6350" cap="flat" cmpd="sng" algn="ctr">
-                      <a:solidFill>
-                        <a:srgbClr val="BDBDBD"/>
-                      </a:solidFill>
-                    </a:lnT>
-                    <a:lnB w="6350" cap="flat" cmpd="sng" algn="ctr">
-                      <a:solidFill>
-                        <a:srgbClr val="BDBDBD"/>
+                        <a:srgbClr val="808080"/>
+                      </a:solidFill>
+                    </a:lnL>
+                    <a:lnR w="6350" cap="flat" cmpd="sng" algn="ctr">
+                      <a:solidFill>
+                        <a:srgbClr val="808080"/>
+                      </a:solidFill>
+                    </a:lnR>
+                    <a:lnT w="6350" cap="flat" cmpd="sng" algn="ctr">
+                      <a:solidFill>
+                        <a:srgbClr val="808080"/>
+                      </a:solidFill>
+                    </a:lnT>
+                    <a:lnB w="6350" cap="flat" cmpd="sng" algn="ctr">
+                      <a:solidFill>
+                        <a:srgbClr val="808080"/>
                       </a:solidFill>
                     </a:lnB>
                   </a:tcPr>
@@ -15568,22 +15568,22 @@
                     </a:solidFill>
                     <a:lnL w="6350" cap="flat" cmpd="sng" algn="ctr">
                       <a:solidFill>
-                        <a:srgbClr val="BDBDBD"/>
-                      </a:solidFill>
-                    </a:lnL>
-                    <a:lnR w="6350" cap="flat" cmpd="sng" algn="ctr">
-                      <a:solidFill>
-                        <a:srgbClr val="BDBDBD"/>
-                      </a:solidFill>
-                    </a:lnR>
-                    <a:lnT w="6350" cap="flat" cmpd="sng" algn="ctr">
-                      <a:solidFill>
-                        <a:srgbClr val="BDBDBD"/>
-                      </a:solidFill>
-                    </a:lnT>
-                    <a:lnB w="6350" cap="flat" cmpd="sng" algn="ctr">
-                      <a:solidFill>
-                        <a:srgbClr val="BDBDBD"/>
+                        <a:srgbClr val="808080"/>
+                      </a:solidFill>
+                    </a:lnL>
+                    <a:lnR w="6350" cap="flat" cmpd="sng" algn="ctr">
+                      <a:solidFill>
+                        <a:srgbClr val="808080"/>
+                      </a:solidFill>
+                    </a:lnR>
+                    <a:lnT w="6350" cap="flat" cmpd="sng" algn="ctr">
+                      <a:solidFill>
+                        <a:srgbClr val="808080"/>
+                      </a:solidFill>
+                    </a:lnT>
+                    <a:lnB w="6350" cap="flat" cmpd="sng" algn="ctr">
+                      <a:solidFill>
+                        <a:srgbClr val="808080"/>
                       </a:solidFill>
                     </a:lnB>
                   </a:tcPr>
@@ -15611,22 +15611,22 @@
                     </a:solidFill>
                     <a:lnL w="6350" cap="flat" cmpd="sng" algn="ctr">
                       <a:solidFill>
-                        <a:srgbClr val="BDBDBD"/>
-                      </a:solidFill>
-                    </a:lnL>
-                    <a:lnR w="6350" cap="flat" cmpd="sng" algn="ctr">
-                      <a:solidFill>
-                        <a:srgbClr val="BDBDBD"/>
-                      </a:solidFill>
-                    </a:lnR>
-                    <a:lnT w="6350" cap="flat" cmpd="sng" algn="ctr">
-                      <a:solidFill>
-                        <a:srgbClr val="BDBDBD"/>
-                      </a:solidFill>
-                    </a:lnT>
-                    <a:lnB w="6350" cap="flat" cmpd="sng" algn="ctr">
-                      <a:solidFill>
-                        <a:srgbClr val="BDBDBD"/>
+                        <a:srgbClr val="808080"/>
+                      </a:solidFill>
+                    </a:lnL>
+                    <a:lnR w="6350" cap="flat" cmpd="sng" algn="ctr">
+                      <a:solidFill>
+                        <a:srgbClr val="808080"/>
+                      </a:solidFill>
+                    </a:lnR>
+                    <a:lnT w="6350" cap="flat" cmpd="sng" algn="ctr">
+                      <a:solidFill>
+                        <a:srgbClr val="808080"/>
+                      </a:solidFill>
+                    </a:lnT>
+                    <a:lnB w="6350" cap="flat" cmpd="sng" algn="ctr">
+                      <a:solidFill>
+                        <a:srgbClr val="808080"/>
                       </a:solidFill>
                     </a:lnB>
                   </a:tcPr>
@@ -15654,22 +15654,22 @@
                     </a:solidFill>
                     <a:lnL w="6350" cap="flat" cmpd="sng" algn="ctr">
                       <a:solidFill>
-                        <a:srgbClr val="BDBDBD"/>
-                      </a:solidFill>
-                    </a:lnL>
-                    <a:lnR w="6350" cap="flat" cmpd="sng" algn="ctr">
-                      <a:solidFill>
-                        <a:srgbClr val="BDBDBD"/>
-                      </a:solidFill>
-                    </a:lnR>
-                    <a:lnT w="6350" cap="flat" cmpd="sng" algn="ctr">
-                      <a:solidFill>
-                        <a:srgbClr val="BDBDBD"/>
-                      </a:solidFill>
-                    </a:lnT>
-                    <a:lnB w="6350" cap="flat" cmpd="sng" algn="ctr">
-                      <a:solidFill>
-                        <a:srgbClr val="BDBDBD"/>
+                        <a:srgbClr val="808080"/>
+                      </a:solidFill>
+                    </a:lnL>
+                    <a:lnR w="6350" cap="flat" cmpd="sng" algn="ctr">
+                      <a:solidFill>
+                        <a:srgbClr val="808080"/>
+                      </a:solidFill>
+                    </a:lnR>
+                    <a:lnT w="6350" cap="flat" cmpd="sng" algn="ctr">
+                      <a:solidFill>
+                        <a:srgbClr val="808080"/>
+                      </a:solidFill>
+                    </a:lnT>
+                    <a:lnB w="6350" cap="flat" cmpd="sng" algn="ctr">
+                      <a:solidFill>
+                        <a:srgbClr val="808080"/>
                       </a:solidFill>
                     </a:lnB>
                   </a:tcPr>
@@ -15699,22 +15699,22 @@
                     </a:solidFill>
                     <a:lnL w="6350" cap="flat" cmpd="sng" algn="ctr">
                       <a:solidFill>
-                        <a:srgbClr val="BDBDBD"/>
-                      </a:solidFill>
-                    </a:lnL>
-                    <a:lnR w="6350" cap="flat" cmpd="sng" algn="ctr">
-                      <a:solidFill>
-                        <a:srgbClr val="BDBDBD"/>
-                      </a:solidFill>
-                    </a:lnR>
-                    <a:lnT w="6350" cap="flat" cmpd="sng" algn="ctr">
-                      <a:solidFill>
-                        <a:srgbClr val="BDBDBD"/>
-                      </a:solidFill>
-                    </a:lnT>
-                    <a:lnB w="6350" cap="flat" cmpd="sng" algn="ctr">
-                      <a:solidFill>
-                        <a:srgbClr val="BDBDBD"/>
+                        <a:srgbClr val="808080"/>
+                      </a:solidFill>
+                    </a:lnL>
+                    <a:lnR w="6350" cap="flat" cmpd="sng" algn="ctr">
+                      <a:solidFill>
+                        <a:srgbClr val="808080"/>
+                      </a:solidFill>
+                    </a:lnR>
+                    <a:lnT w="6350" cap="flat" cmpd="sng" algn="ctr">
+                      <a:solidFill>
+                        <a:srgbClr val="808080"/>
+                      </a:solidFill>
+                    </a:lnT>
+                    <a:lnB w="6350" cap="flat" cmpd="sng" algn="ctr">
+                      <a:solidFill>
+                        <a:srgbClr val="808080"/>
                       </a:solidFill>
                     </a:lnB>
                   </a:tcPr>
@@ -15742,22 +15742,22 @@
                     </a:solidFill>
                     <a:lnL w="6350" cap="flat" cmpd="sng" algn="ctr">
                       <a:solidFill>
-                        <a:srgbClr val="BDBDBD"/>
-                      </a:solidFill>
-                    </a:lnL>
-                    <a:lnR w="6350" cap="flat" cmpd="sng" algn="ctr">
-                      <a:solidFill>
-                        <a:srgbClr val="BDBDBD"/>
-                      </a:solidFill>
-                    </a:lnR>
-                    <a:lnT w="6350" cap="flat" cmpd="sng" algn="ctr">
-                      <a:solidFill>
-                        <a:srgbClr val="BDBDBD"/>
-                      </a:solidFill>
-                    </a:lnT>
-                    <a:lnB w="6350" cap="flat" cmpd="sng" algn="ctr">
-                      <a:solidFill>
-                        <a:srgbClr val="BDBDBD"/>
+                        <a:srgbClr val="808080"/>
+                      </a:solidFill>
+                    </a:lnL>
+                    <a:lnR w="6350" cap="flat" cmpd="sng" algn="ctr">
+                      <a:solidFill>
+                        <a:srgbClr val="808080"/>
+                      </a:solidFill>
+                    </a:lnR>
+                    <a:lnT w="6350" cap="flat" cmpd="sng" algn="ctr">
+                      <a:solidFill>
+                        <a:srgbClr val="808080"/>
+                      </a:solidFill>
+                    </a:lnT>
+                    <a:lnB w="6350" cap="flat" cmpd="sng" algn="ctr">
+                      <a:solidFill>
+                        <a:srgbClr val="808080"/>
                       </a:solidFill>
                     </a:lnB>
                   </a:tcPr>
@@ -15785,22 +15785,22 @@
                     </a:solidFill>
                     <a:lnL w="6350" cap="flat" cmpd="sng" algn="ctr">
                       <a:solidFill>
-                        <a:srgbClr val="BDBDBD"/>
-                      </a:solidFill>
-                    </a:lnL>
-                    <a:lnR w="6350" cap="flat" cmpd="sng" algn="ctr">
-                      <a:solidFill>
-                        <a:srgbClr val="BDBDBD"/>
-                      </a:solidFill>
-                    </a:lnR>
-                    <a:lnT w="6350" cap="flat" cmpd="sng" algn="ctr">
-                      <a:solidFill>
-                        <a:srgbClr val="BDBDBD"/>
-                      </a:solidFill>
-                    </a:lnT>
-                    <a:lnB w="6350" cap="flat" cmpd="sng" algn="ctr">
-                      <a:solidFill>
-                        <a:srgbClr val="BDBDBD"/>
+                        <a:srgbClr val="808080"/>
+                      </a:solidFill>
+                    </a:lnL>
+                    <a:lnR w="6350" cap="flat" cmpd="sng" algn="ctr">
+                      <a:solidFill>
+                        <a:srgbClr val="808080"/>
+                      </a:solidFill>
+                    </a:lnR>
+                    <a:lnT w="6350" cap="flat" cmpd="sng" algn="ctr">
+                      <a:solidFill>
+                        <a:srgbClr val="808080"/>
+                      </a:solidFill>
+                    </a:lnT>
+                    <a:lnB w="6350" cap="flat" cmpd="sng" algn="ctr">
+                      <a:solidFill>
+                        <a:srgbClr val="808080"/>
                       </a:solidFill>
                     </a:lnB>
                   </a:tcPr>
@@ -15830,22 +15830,22 @@
                     </a:solidFill>
                     <a:lnL w="6350" cap="flat" cmpd="sng" algn="ctr">
                       <a:solidFill>
-                        <a:srgbClr val="BDBDBD"/>
-                      </a:solidFill>
-                    </a:lnL>
-                    <a:lnR w="6350" cap="flat" cmpd="sng" algn="ctr">
-                      <a:solidFill>
-                        <a:srgbClr val="BDBDBD"/>
-                      </a:solidFill>
-                    </a:lnR>
-                    <a:lnT w="6350" cap="flat" cmpd="sng" algn="ctr">
-                      <a:solidFill>
-                        <a:srgbClr val="BDBDBD"/>
-                      </a:solidFill>
-                    </a:lnT>
-                    <a:lnB w="6350" cap="flat" cmpd="sng" algn="ctr">
-                      <a:solidFill>
-                        <a:srgbClr val="BDBDBD"/>
+                        <a:srgbClr val="808080"/>
+                      </a:solidFill>
+                    </a:lnL>
+                    <a:lnR w="6350" cap="flat" cmpd="sng" algn="ctr">
+                      <a:solidFill>
+                        <a:srgbClr val="808080"/>
+                      </a:solidFill>
+                    </a:lnR>
+                    <a:lnT w="6350" cap="flat" cmpd="sng" algn="ctr">
+                      <a:solidFill>
+                        <a:srgbClr val="808080"/>
+                      </a:solidFill>
+                    </a:lnT>
+                    <a:lnB w="6350" cap="flat" cmpd="sng" algn="ctr">
+                      <a:solidFill>
+                        <a:srgbClr val="808080"/>
                       </a:solidFill>
                     </a:lnB>
                   </a:tcPr>
@@ -15873,22 +15873,22 @@
                     </a:solidFill>
                     <a:lnL w="6350" cap="flat" cmpd="sng" algn="ctr">
                       <a:solidFill>
-                        <a:srgbClr val="BDBDBD"/>
-                      </a:solidFill>
-                    </a:lnL>
-                    <a:lnR w="6350" cap="flat" cmpd="sng" algn="ctr">
-                      <a:solidFill>
-                        <a:srgbClr val="BDBDBD"/>
-                      </a:solidFill>
-                    </a:lnR>
-                    <a:lnT w="6350" cap="flat" cmpd="sng" algn="ctr">
-                      <a:solidFill>
-                        <a:srgbClr val="BDBDBD"/>
-                      </a:solidFill>
-                    </a:lnT>
-                    <a:lnB w="6350" cap="flat" cmpd="sng" algn="ctr">
-                      <a:solidFill>
-                        <a:srgbClr val="BDBDBD"/>
+                        <a:srgbClr val="808080"/>
+                      </a:solidFill>
+                    </a:lnL>
+                    <a:lnR w="6350" cap="flat" cmpd="sng" algn="ctr">
+                      <a:solidFill>
+                        <a:srgbClr val="808080"/>
+                      </a:solidFill>
+                    </a:lnR>
+                    <a:lnT w="6350" cap="flat" cmpd="sng" algn="ctr">
+                      <a:solidFill>
+                        <a:srgbClr val="808080"/>
+                      </a:solidFill>
+                    </a:lnT>
+                    <a:lnB w="6350" cap="flat" cmpd="sng" algn="ctr">
+                      <a:solidFill>
+                        <a:srgbClr val="808080"/>
                       </a:solidFill>
                     </a:lnB>
                   </a:tcPr>
@@ -15916,22 +15916,22 @@
                     </a:solidFill>
                     <a:lnL w="6350" cap="flat" cmpd="sng" algn="ctr">
                       <a:solidFill>
-                        <a:srgbClr val="BDBDBD"/>
-                      </a:solidFill>
-                    </a:lnL>
-                    <a:lnR w="6350" cap="flat" cmpd="sng" algn="ctr">
-                      <a:solidFill>
-                        <a:srgbClr val="BDBDBD"/>
-                      </a:solidFill>
-                    </a:lnR>
-                    <a:lnT w="6350" cap="flat" cmpd="sng" algn="ctr">
-                      <a:solidFill>
-                        <a:srgbClr val="BDBDBD"/>
-                      </a:solidFill>
-                    </a:lnT>
-                    <a:lnB w="6350" cap="flat" cmpd="sng" algn="ctr">
-                      <a:solidFill>
-                        <a:srgbClr val="BDBDBD"/>
+                        <a:srgbClr val="808080"/>
+                      </a:solidFill>
+                    </a:lnL>
+                    <a:lnR w="6350" cap="flat" cmpd="sng" algn="ctr">
+                      <a:solidFill>
+                        <a:srgbClr val="808080"/>
+                      </a:solidFill>
+                    </a:lnR>
+                    <a:lnT w="6350" cap="flat" cmpd="sng" algn="ctr">
+                      <a:solidFill>
+                        <a:srgbClr val="808080"/>
+                      </a:solidFill>
+                    </a:lnT>
+                    <a:lnB w="6350" cap="flat" cmpd="sng" algn="ctr">
+                      <a:solidFill>
+                        <a:srgbClr val="808080"/>
                       </a:solidFill>
                     </a:lnB>
                   </a:tcPr>
@@ -15961,22 +15961,22 @@
                     </a:solidFill>
                     <a:lnL w="6350" cap="flat" cmpd="sng" algn="ctr">
                       <a:solidFill>
-                        <a:srgbClr val="BDBDBD"/>
-                      </a:solidFill>
-                    </a:lnL>
-                    <a:lnR w="6350" cap="flat" cmpd="sng" algn="ctr">
-                      <a:solidFill>
-                        <a:srgbClr val="BDBDBD"/>
-                      </a:solidFill>
-                    </a:lnR>
-                    <a:lnT w="6350" cap="flat" cmpd="sng" algn="ctr">
-                      <a:solidFill>
-                        <a:srgbClr val="BDBDBD"/>
-                      </a:solidFill>
-                    </a:lnT>
-                    <a:lnB w="6350" cap="flat" cmpd="sng" algn="ctr">
-                      <a:solidFill>
-                        <a:srgbClr val="BDBDBD"/>
+                        <a:srgbClr val="808080"/>
+                      </a:solidFill>
+                    </a:lnL>
+                    <a:lnR w="6350" cap="flat" cmpd="sng" algn="ctr">
+                      <a:solidFill>
+                        <a:srgbClr val="808080"/>
+                      </a:solidFill>
+                    </a:lnR>
+                    <a:lnT w="6350" cap="flat" cmpd="sng" algn="ctr">
+                      <a:solidFill>
+                        <a:srgbClr val="808080"/>
+                      </a:solidFill>
+                    </a:lnT>
+                    <a:lnB w="6350" cap="flat" cmpd="sng" algn="ctr">
+                      <a:solidFill>
+                        <a:srgbClr val="808080"/>
                       </a:solidFill>
                     </a:lnB>
                   </a:tcPr>
@@ -16004,22 +16004,22 @@
                     </a:solidFill>
                     <a:lnL w="6350" cap="flat" cmpd="sng" algn="ctr">
                       <a:solidFill>
-                        <a:srgbClr val="BDBDBD"/>
-                      </a:solidFill>
-                    </a:lnL>
-                    <a:lnR w="6350" cap="flat" cmpd="sng" algn="ctr">
-                      <a:solidFill>
-                        <a:srgbClr val="BDBDBD"/>
-                      </a:solidFill>
-                    </a:lnR>
-                    <a:lnT w="6350" cap="flat" cmpd="sng" algn="ctr">
-                      <a:solidFill>
-                        <a:srgbClr val="BDBDBD"/>
-                      </a:solidFill>
-                    </a:lnT>
-                    <a:lnB w="6350" cap="flat" cmpd="sng" algn="ctr">
-                      <a:solidFill>
-                        <a:srgbClr val="BDBDBD"/>
+                        <a:srgbClr val="808080"/>
+                      </a:solidFill>
+                    </a:lnL>
+                    <a:lnR w="6350" cap="flat" cmpd="sng" algn="ctr">
+                      <a:solidFill>
+                        <a:srgbClr val="808080"/>
+                      </a:solidFill>
+                    </a:lnR>
+                    <a:lnT w="6350" cap="flat" cmpd="sng" algn="ctr">
+                      <a:solidFill>
+                        <a:srgbClr val="808080"/>
+                      </a:solidFill>
+                    </a:lnT>
+                    <a:lnB w="6350" cap="flat" cmpd="sng" algn="ctr">
+                      <a:solidFill>
+                        <a:srgbClr val="808080"/>
                       </a:solidFill>
                     </a:lnB>
                   </a:tcPr>
@@ -16047,22 +16047,22 @@
                     </a:solidFill>
                     <a:lnL w="6350" cap="flat" cmpd="sng" algn="ctr">
                       <a:solidFill>
-                        <a:srgbClr val="BDBDBD"/>
-                      </a:solidFill>
-                    </a:lnL>
-                    <a:lnR w="6350" cap="flat" cmpd="sng" algn="ctr">
-                      <a:solidFill>
-                        <a:srgbClr val="BDBDBD"/>
-                      </a:solidFill>
-                    </a:lnR>
-                    <a:lnT w="6350" cap="flat" cmpd="sng" algn="ctr">
-                      <a:solidFill>
-                        <a:srgbClr val="BDBDBD"/>
-                      </a:solidFill>
-                    </a:lnT>
-                    <a:lnB w="6350" cap="flat" cmpd="sng" algn="ctr">
-                      <a:solidFill>
-                        <a:srgbClr val="BDBDBD"/>
+                        <a:srgbClr val="808080"/>
+                      </a:solidFill>
+                    </a:lnL>
+                    <a:lnR w="6350" cap="flat" cmpd="sng" algn="ctr">
+                      <a:solidFill>
+                        <a:srgbClr val="808080"/>
+                      </a:solidFill>
+                    </a:lnR>
+                    <a:lnT w="6350" cap="flat" cmpd="sng" algn="ctr">
+                      <a:solidFill>
+                        <a:srgbClr val="808080"/>
+                      </a:solidFill>
+                    </a:lnT>
+                    <a:lnB w="6350" cap="flat" cmpd="sng" algn="ctr">
+                      <a:solidFill>
+                        <a:srgbClr val="808080"/>
                       </a:solidFill>
                     </a:lnB>
                   </a:tcPr>
@@ -16339,22 +16339,22 @@
                     </a:solidFill>
                     <a:lnL w="6350" cap="flat" cmpd="sng" algn="ctr">
                       <a:solidFill>
-                        <a:srgbClr val="BDBDBD"/>
-                      </a:solidFill>
-                    </a:lnL>
-                    <a:lnR w="6350" cap="flat" cmpd="sng" algn="ctr">
-                      <a:solidFill>
-                        <a:srgbClr val="BDBDBD"/>
-                      </a:solidFill>
-                    </a:lnR>
-                    <a:lnT w="6350" cap="flat" cmpd="sng" algn="ctr">
-                      <a:solidFill>
-                        <a:srgbClr val="BDBDBD"/>
-                      </a:solidFill>
-                    </a:lnT>
-                    <a:lnB w="6350" cap="flat" cmpd="sng" algn="ctr">
-                      <a:solidFill>
-                        <a:srgbClr val="BDBDBD"/>
+                        <a:srgbClr val="808080"/>
+                      </a:solidFill>
+                    </a:lnL>
+                    <a:lnR w="6350" cap="flat" cmpd="sng" algn="ctr">
+                      <a:solidFill>
+                        <a:srgbClr val="808080"/>
+                      </a:solidFill>
+                    </a:lnR>
+                    <a:lnT w="6350" cap="flat" cmpd="sng" algn="ctr">
+                      <a:solidFill>
+                        <a:srgbClr val="808080"/>
+                      </a:solidFill>
+                    </a:lnT>
+                    <a:lnB w="6350" cap="flat" cmpd="sng" algn="ctr">
+                      <a:solidFill>
+                        <a:srgbClr val="808080"/>
                       </a:solidFill>
                     </a:lnB>
                   </a:tcPr>
@@ -16382,22 +16382,22 @@
                     </a:solidFill>
                     <a:lnL w="6350" cap="flat" cmpd="sng" algn="ctr">
                       <a:solidFill>
-                        <a:srgbClr val="BDBDBD"/>
-                      </a:solidFill>
-                    </a:lnL>
-                    <a:lnR w="6350" cap="flat" cmpd="sng" algn="ctr">
-                      <a:solidFill>
-                        <a:srgbClr val="BDBDBD"/>
-                      </a:solidFill>
-                    </a:lnR>
-                    <a:lnT w="6350" cap="flat" cmpd="sng" algn="ctr">
-                      <a:solidFill>
-                        <a:srgbClr val="BDBDBD"/>
-                      </a:solidFill>
-                    </a:lnT>
-                    <a:lnB w="6350" cap="flat" cmpd="sng" algn="ctr">
-                      <a:solidFill>
-                        <a:srgbClr val="BDBDBD"/>
+                        <a:srgbClr val="808080"/>
+                      </a:solidFill>
+                    </a:lnL>
+                    <a:lnR w="6350" cap="flat" cmpd="sng" algn="ctr">
+                      <a:solidFill>
+                        <a:srgbClr val="808080"/>
+                      </a:solidFill>
+                    </a:lnR>
+                    <a:lnT w="6350" cap="flat" cmpd="sng" algn="ctr">
+                      <a:solidFill>
+                        <a:srgbClr val="808080"/>
+                      </a:solidFill>
+                    </a:lnT>
+                    <a:lnB w="6350" cap="flat" cmpd="sng" algn="ctr">
+                      <a:solidFill>
+                        <a:srgbClr val="808080"/>
                       </a:solidFill>
                     </a:lnB>
                   </a:tcPr>
@@ -16425,22 +16425,22 @@
                     </a:solidFill>
                     <a:lnL w="6350" cap="flat" cmpd="sng" algn="ctr">
                       <a:solidFill>
-                        <a:srgbClr val="BDBDBD"/>
-                      </a:solidFill>
-                    </a:lnL>
-                    <a:lnR w="6350" cap="flat" cmpd="sng" algn="ctr">
-                      <a:solidFill>
-                        <a:srgbClr val="BDBDBD"/>
-                      </a:solidFill>
-                    </a:lnR>
-                    <a:lnT w="6350" cap="flat" cmpd="sng" algn="ctr">
-                      <a:solidFill>
-                        <a:srgbClr val="BDBDBD"/>
-                      </a:solidFill>
-                    </a:lnT>
-                    <a:lnB w="6350" cap="flat" cmpd="sng" algn="ctr">
-                      <a:solidFill>
-                        <a:srgbClr val="BDBDBD"/>
+                        <a:srgbClr val="808080"/>
+                      </a:solidFill>
+                    </a:lnL>
+                    <a:lnR w="6350" cap="flat" cmpd="sng" algn="ctr">
+                      <a:solidFill>
+                        <a:srgbClr val="808080"/>
+                      </a:solidFill>
+                    </a:lnR>
+                    <a:lnT w="6350" cap="flat" cmpd="sng" algn="ctr">
+                      <a:solidFill>
+                        <a:srgbClr val="808080"/>
+                      </a:solidFill>
+                    </a:lnT>
+                    <a:lnB w="6350" cap="flat" cmpd="sng" algn="ctr">
+                      <a:solidFill>
+                        <a:srgbClr val="808080"/>
                       </a:solidFill>
                     </a:lnB>
                   </a:tcPr>
@@ -16470,22 +16470,22 @@
                     </a:solidFill>
                     <a:lnL w="6350" cap="flat" cmpd="sng" algn="ctr">
                       <a:solidFill>
-                        <a:srgbClr val="BDBDBD"/>
-                      </a:solidFill>
-                    </a:lnL>
-                    <a:lnR w="6350" cap="flat" cmpd="sng" algn="ctr">
-                      <a:solidFill>
-                        <a:srgbClr val="BDBDBD"/>
-                      </a:solidFill>
-                    </a:lnR>
-                    <a:lnT w="6350" cap="flat" cmpd="sng" algn="ctr">
-                      <a:solidFill>
-                        <a:srgbClr val="BDBDBD"/>
-                      </a:solidFill>
-                    </a:lnT>
-                    <a:lnB w="6350" cap="flat" cmpd="sng" algn="ctr">
-                      <a:solidFill>
-                        <a:srgbClr val="BDBDBD"/>
+                        <a:srgbClr val="808080"/>
+                      </a:solidFill>
+                    </a:lnL>
+                    <a:lnR w="6350" cap="flat" cmpd="sng" algn="ctr">
+                      <a:solidFill>
+                        <a:srgbClr val="808080"/>
+                      </a:solidFill>
+                    </a:lnR>
+                    <a:lnT w="6350" cap="flat" cmpd="sng" algn="ctr">
+                      <a:solidFill>
+                        <a:srgbClr val="808080"/>
+                      </a:solidFill>
+                    </a:lnT>
+                    <a:lnB w="6350" cap="flat" cmpd="sng" algn="ctr">
+                      <a:solidFill>
+                        <a:srgbClr val="808080"/>
                       </a:solidFill>
                     </a:lnB>
                   </a:tcPr>
@@ -16513,22 +16513,22 @@
                     </a:solidFill>
                     <a:lnL w="6350" cap="flat" cmpd="sng" algn="ctr">
                       <a:solidFill>
-                        <a:srgbClr val="BDBDBD"/>
-                      </a:solidFill>
-                    </a:lnL>
-                    <a:lnR w="6350" cap="flat" cmpd="sng" algn="ctr">
-                      <a:solidFill>
-                        <a:srgbClr val="BDBDBD"/>
-                      </a:solidFill>
-                    </a:lnR>
-                    <a:lnT w="6350" cap="flat" cmpd="sng" algn="ctr">
-                      <a:solidFill>
-                        <a:srgbClr val="BDBDBD"/>
-                      </a:solidFill>
-                    </a:lnT>
-                    <a:lnB w="6350" cap="flat" cmpd="sng" algn="ctr">
-                      <a:solidFill>
-                        <a:srgbClr val="BDBDBD"/>
+                        <a:srgbClr val="808080"/>
+                      </a:solidFill>
+                    </a:lnL>
+                    <a:lnR w="6350" cap="flat" cmpd="sng" algn="ctr">
+                      <a:solidFill>
+                        <a:srgbClr val="808080"/>
+                      </a:solidFill>
+                    </a:lnR>
+                    <a:lnT w="6350" cap="flat" cmpd="sng" algn="ctr">
+                      <a:solidFill>
+                        <a:srgbClr val="808080"/>
+                      </a:solidFill>
+                    </a:lnT>
+                    <a:lnB w="6350" cap="flat" cmpd="sng" algn="ctr">
+                      <a:solidFill>
+                        <a:srgbClr val="808080"/>
                       </a:solidFill>
                     </a:lnB>
                   </a:tcPr>
@@ -16556,22 +16556,22 @@
                     </a:solidFill>
                     <a:lnL w="6350" cap="flat" cmpd="sng" algn="ctr">
                       <a:solidFill>
-                        <a:srgbClr val="BDBDBD"/>
-                      </a:solidFill>
-                    </a:lnL>
-                    <a:lnR w="6350" cap="flat" cmpd="sng" algn="ctr">
-                      <a:solidFill>
-                        <a:srgbClr val="BDBDBD"/>
-                      </a:solidFill>
-                    </a:lnR>
-                    <a:lnT w="6350" cap="flat" cmpd="sng" algn="ctr">
-                      <a:solidFill>
-                        <a:srgbClr val="BDBDBD"/>
-                      </a:solidFill>
-                    </a:lnT>
-                    <a:lnB w="6350" cap="flat" cmpd="sng" algn="ctr">
-                      <a:solidFill>
-                        <a:srgbClr val="BDBDBD"/>
+                        <a:srgbClr val="808080"/>
+                      </a:solidFill>
+                    </a:lnL>
+                    <a:lnR w="6350" cap="flat" cmpd="sng" algn="ctr">
+                      <a:solidFill>
+                        <a:srgbClr val="808080"/>
+                      </a:solidFill>
+                    </a:lnR>
+                    <a:lnT w="6350" cap="flat" cmpd="sng" algn="ctr">
+                      <a:solidFill>
+                        <a:srgbClr val="808080"/>
+                      </a:solidFill>
+                    </a:lnT>
+                    <a:lnB w="6350" cap="flat" cmpd="sng" algn="ctr">
+                      <a:solidFill>
+                        <a:srgbClr val="808080"/>
                       </a:solidFill>
                     </a:lnB>
                   </a:tcPr>
@@ -16601,22 +16601,22 @@
                     </a:solidFill>
                     <a:lnL w="6350" cap="flat" cmpd="sng" algn="ctr">
                       <a:solidFill>
-                        <a:srgbClr val="BDBDBD"/>
-                      </a:solidFill>
-                    </a:lnL>
-                    <a:lnR w="6350" cap="flat" cmpd="sng" algn="ctr">
-                      <a:solidFill>
-                        <a:srgbClr val="BDBDBD"/>
-                      </a:solidFill>
-                    </a:lnR>
-                    <a:lnT w="6350" cap="flat" cmpd="sng" algn="ctr">
-                      <a:solidFill>
-                        <a:srgbClr val="BDBDBD"/>
-                      </a:solidFill>
-                    </a:lnT>
-                    <a:lnB w="6350" cap="flat" cmpd="sng" algn="ctr">
-                      <a:solidFill>
-                        <a:srgbClr val="BDBDBD"/>
+                        <a:srgbClr val="808080"/>
+                      </a:solidFill>
+                    </a:lnL>
+                    <a:lnR w="6350" cap="flat" cmpd="sng" algn="ctr">
+                      <a:solidFill>
+                        <a:srgbClr val="808080"/>
+                      </a:solidFill>
+                    </a:lnR>
+                    <a:lnT w="6350" cap="flat" cmpd="sng" algn="ctr">
+                      <a:solidFill>
+                        <a:srgbClr val="808080"/>
+                      </a:solidFill>
+                    </a:lnT>
+                    <a:lnB w="6350" cap="flat" cmpd="sng" algn="ctr">
+                      <a:solidFill>
+                        <a:srgbClr val="808080"/>
                       </a:solidFill>
                     </a:lnB>
                   </a:tcPr>
@@ -16644,22 +16644,22 @@
                     </a:solidFill>
                     <a:lnL w="6350" cap="flat" cmpd="sng" algn="ctr">
                       <a:solidFill>
-                        <a:srgbClr val="BDBDBD"/>
-                      </a:solidFill>
-                    </a:lnL>
-                    <a:lnR w="6350" cap="flat" cmpd="sng" algn="ctr">
-                      <a:solidFill>
-                        <a:srgbClr val="BDBDBD"/>
-                      </a:solidFill>
-                    </a:lnR>
-                    <a:lnT w="6350" cap="flat" cmpd="sng" algn="ctr">
-                      <a:solidFill>
-                        <a:srgbClr val="BDBDBD"/>
-                      </a:solidFill>
-                    </a:lnT>
-                    <a:lnB w="6350" cap="flat" cmpd="sng" algn="ctr">
-                      <a:solidFill>
-                        <a:srgbClr val="BDBDBD"/>
+                        <a:srgbClr val="808080"/>
+                      </a:solidFill>
+                    </a:lnL>
+                    <a:lnR w="6350" cap="flat" cmpd="sng" algn="ctr">
+                      <a:solidFill>
+                        <a:srgbClr val="808080"/>
+                      </a:solidFill>
+                    </a:lnR>
+                    <a:lnT w="6350" cap="flat" cmpd="sng" algn="ctr">
+                      <a:solidFill>
+                        <a:srgbClr val="808080"/>
+                      </a:solidFill>
+                    </a:lnT>
+                    <a:lnB w="6350" cap="flat" cmpd="sng" algn="ctr">
+                      <a:solidFill>
+                        <a:srgbClr val="808080"/>
                       </a:solidFill>
                     </a:lnB>
                   </a:tcPr>
@@ -16687,22 +16687,22 @@
                     </a:solidFill>
                     <a:lnL w="6350" cap="flat" cmpd="sng" algn="ctr">
                       <a:solidFill>
-                        <a:srgbClr val="BDBDBD"/>
-                      </a:solidFill>
-                    </a:lnL>
-                    <a:lnR w="6350" cap="flat" cmpd="sng" algn="ctr">
-                      <a:solidFill>
-                        <a:srgbClr val="BDBDBD"/>
-                      </a:solidFill>
-                    </a:lnR>
-                    <a:lnT w="6350" cap="flat" cmpd="sng" algn="ctr">
-                      <a:solidFill>
-                        <a:srgbClr val="BDBDBD"/>
-                      </a:solidFill>
-                    </a:lnT>
-                    <a:lnB w="6350" cap="flat" cmpd="sng" algn="ctr">
-                      <a:solidFill>
-                        <a:srgbClr val="BDBDBD"/>
+                        <a:srgbClr val="808080"/>
+                      </a:solidFill>
+                    </a:lnL>
+                    <a:lnR w="6350" cap="flat" cmpd="sng" algn="ctr">
+                      <a:solidFill>
+                        <a:srgbClr val="808080"/>
+                      </a:solidFill>
+                    </a:lnR>
+                    <a:lnT w="6350" cap="flat" cmpd="sng" algn="ctr">
+                      <a:solidFill>
+                        <a:srgbClr val="808080"/>
+                      </a:solidFill>
+                    </a:lnT>
+                    <a:lnB w="6350" cap="flat" cmpd="sng" algn="ctr">
+                      <a:solidFill>
+                        <a:srgbClr val="808080"/>
                       </a:solidFill>
                     </a:lnB>
                   </a:tcPr>
@@ -16732,22 +16732,22 @@
                     </a:solidFill>
                     <a:lnL w="6350" cap="flat" cmpd="sng" algn="ctr">
                       <a:solidFill>
-                        <a:srgbClr val="BDBDBD"/>
-                      </a:solidFill>
-                    </a:lnL>
-                    <a:lnR w="6350" cap="flat" cmpd="sng" algn="ctr">
-                      <a:solidFill>
-                        <a:srgbClr val="BDBDBD"/>
-                      </a:solidFill>
-                    </a:lnR>
-                    <a:lnT w="6350" cap="flat" cmpd="sng" algn="ctr">
-                      <a:solidFill>
-                        <a:srgbClr val="BDBDBD"/>
-                      </a:solidFill>
-                    </a:lnT>
-                    <a:lnB w="6350" cap="flat" cmpd="sng" algn="ctr">
-                      <a:solidFill>
-                        <a:srgbClr val="BDBDBD"/>
+                        <a:srgbClr val="808080"/>
+                      </a:solidFill>
+                    </a:lnL>
+                    <a:lnR w="6350" cap="flat" cmpd="sng" algn="ctr">
+                      <a:solidFill>
+                        <a:srgbClr val="808080"/>
+                      </a:solidFill>
+                    </a:lnR>
+                    <a:lnT w="6350" cap="flat" cmpd="sng" algn="ctr">
+                      <a:solidFill>
+                        <a:srgbClr val="808080"/>
+                      </a:solidFill>
+                    </a:lnT>
+                    <a:lnB w="6350" cap="flat" cmpd="sng" algn="ctr">
+                      <a:solidFill>
+                        <a:srgbClr val="808080"/>
                       </a:solidFill>
                     </a:lnB>
                   </a:tcPr>
@@ -16775,22 +16775,22 @@
                     </a:solidFill>
                     <a:lnL w="6350" cap="flat" cmpd="sng" algn="ctr">
                       <a:solidFill>
-                        <a:srgbClr val="BDBDBD"/>
-                      </a:solidFill>
-                    </a:lnL>
-                    <a:lnR w="6350" cap="flat" cmpd="sng" algn="ctr">
-                      <a:solidFill>
-                        <a:srgbClr val="BDBDBD"/>
-                      </a:solidFill>
-                    </a:lnR>
-                    <a:lnT w="6350" cap="flat" cmpd="sng" algn="ctr">
-                      <a:solidFill>
-                        <a:srgbClr val="BDBDBD"/>
-                      </a:solidFill>
-                    </a:lnT>
-                    <a:lnB w="6350" cap="flat" cmpd="sng" algn="ctr">
-                      <a:solidFill>
-                        <a:srgbClr val="BDBDBD"/>
+                        <a:srgbClr val="808080"/>
+                      </a:solidFill>
+                    </a:lnL>
+                    <a:lnR w="6350" cap="flat" cmpd="sng" algn="ctr">
+                      <a:solidFill>
+                        <a:srgbClr val="808080"/>
+                      </a:solidFill>
+                    </a:lnR>
+                    <a:lnT w="6350" cap="flat" cmpd="sng" algn="ctr">
+                      <a:solidFill>
+                        <a:srgbClr val="808080"/>
+                      </a:solidFill>
+                    </a:lnT>
+                    <a:lnB w="6350" cap="flat" cmpd="sng" algn="ctr">
+                      <a:solidFill>
+                        <a:srgbClr val="808080"/>
                       </a:solidFill>
                     </a:lnB>
                   </a:tcPr>
@@ -16818,22 +16818,22 @@
                     </a:solidFill>
                     <a:lnL w="6350" cap="flat" cmpd="sng" algn="ctr">
                       <a:solidFill>
-                        <a:srgbClr val="BDBDBD"/>
-                      </a:solidFill>
-                    </a:lnL>
-                    <a:lnR w="6350" cap="flat" cmpd="sng" algn="ctr">
-                      <a:solidFill>
-                        <a:srgbClr val="BDBDBD"/>
-                      </a:solidFill>
-                    </a:lnR>
-                    <a:lnT w="6350" cap="flat" cmpd="sng" algn="ctr">
-                      <a:solidFill>
-                        <a:srgbClr val="BDBDBD"/>
-                      </a:solidFill>
-                    </a:lnT>
-                    <a:lnB w="6350" cap="flat" cmpd="sng" algn="ctr">
-                      <a:solidFill>
-                        <a:srgbClr val="BDBDBD"/>
+                        <a:srgbClr val="808080"/>
+                      </a:solidFill>
+                    </a:lnL>
+                    <a:lnR w="6350" cap="flat" cmpd="sng" algn="ctr">
+                      <a:solidFill>
+                        <a:srgbClr val="808080"/>
+                      </a:solidFill>
+                    </a:lnR>
+                    <a:lnT w="6350" cap="flat" cmpd="sng" algn="ctr">
+                      <a:solidFill>
+                        <a:srgbClr val="808080"/>
+                      </a:solidFill>
+                    </a:lnT>
+                    <a:lnB w="6350" cap="flat" cmpd="sng" algn="ctr">
+                      <a:solidFill>
+                        <a:srgbClr val="808080"/>
                       </a:solidFill>
                     </a:lnB>
                   </a:tcPr>
@@ -16925,22 +16925,22 @@
                     </a:solidFill>
                     <a:lnL w="6350" cap="flat" cmpd="sng" algn="ctr">
                       <a:solidFill>
-                        <a:srgbClr val="BDBDBD"/>
-                      </a:solidFill>
-                    </a:lnL>
-                    <a:lnR w="6350" cap="flat" cmpd="sng" algn="ctr">
-                      <a:solidFill>
-                        <a:srgbClr val="BDBDBD"/>
-                      </a:solidFill>
-                    </a:lnR>
-                    <a:lnT w="6350" cap="flat" cmpd="sng" algn="ctr">
-                      <a:solidFill>
-                        <a:srgbClr val="BDBDBD"/>
-                      </a:solidFill>
-                    </a:lnT>
-                    <a:lnB w="6350" cap="flat" cmpd="sng" algn="ctr">
-                      <a:solidFill>
-                        <a:srgbClr val="BDBDBD"/>
+                        <a:srgbClr val="808080"/>
+                      </a:solidFill>
+                    </a:lnL>
+                    <a:lnR w="6350" cap="flat" cmpd="sng" algn="ctr">
+                      <a:solidFill>
+                        <a:srgbClr val="808080"/>
+                      </a:solidFill>
+                    </a:lnR>
+                    <a:lnT w="6350" cap="flat" cmpd="sng" algn="ctr">
+                      <a:solidFill>
+                        <a:srgbClr val="808080"/>
+                      </a:solidFill>
+                    </a:lnT>
+                    <a:lnB w="6350" cap="flat" cmpd="sng" algn="ctr">
+                      <a:solidFill>
+                        <a:srgbClr val="808080"/>
                       </a:solidFill>
                     </a:lnB>
                   </a:tcPr>
@@ -16968,22 +16968,22 @@
                     </a:solidFill>
                     <a:lnL w="6350" cap="flat" cmpd="sng" algn="ctr">
                       <a:solidFill>
-                        <a:srgbClr val="BDBDBD"/>
-                      </a:solidFill>
-                    </a:lnL>
-                    <a:lnR w="6350" cap="flat" cmpd="sng" algn="ctr">
-                      <a:solidFill>
-                        <a:srgbClr val="BDBDBD"/>
-                      </a:solidFill>
-                    </a:lnR>
-                    <a:lnT w="6350" cap="flat" cmpd="sng" algn="ctr">
-                      <a:solidFill>
-                        <a:srgbClr val="BDBDBD"/>
-                      </a:solidFill>
-                    </a:lnT>
-                    <a:lnB w="6350" cap="flat" cmpd="sng" algn="ctr">
-                      <a:solidFill>
-                        <a:srgbClr val="BDBDBD"/>
+                        <a:srgbClr val="808080"/>
+                      </a:solidFill>
+                    </a:lnL>
+                    <a:lnR w="6350" cap="flat" cmpd="sng" algn="ctr">
+                      <a:solidFill>
+                        <a:srgbClr val="808080"/>
+                      </a:solidFill>
+                    </a:lnR>
+                    <a:lnT w="6350" cap="flat" cmpd="sng" algn="ctr">
+                      <a:solidFill>
+                        <a:srgbClr val="808080"/>
+                      </a:solidFill>
+                    </a:lnT>
+                    <a:lnB w="6350" cap="flat" cmpd="sng" algn="ctr">
+                      <a:solidFill>
+                        <a:srgbClr val="808080"/>
                       </a:solidFill>
                     </a:lnB>
                   </a:tcPr>
@@ -17011,22 +17011,22 @@
                     </a:solidFill>
                     <a:lnL w="6350" cap="flat" cmpd="sng" algn="ctr">
                       <a:solidFill>
-                        <a:srgbClr val="BDBDBD"/>
-                      </a:solidFill>
-                    </a:lnL>
-                    <a:lnR w="6350" cap="flat" cmpd="sng" algn="ctr">
-                      <a:solidFill>
-                        <a:srgbClr val="BDBDBD"/>
-                      </a:solidFill>
-                    </a:lnR>
-                    <a:lnT w="6350" cap="flat" cmpd="sng" algn="ctr">
-                      <a:solidFill>
-                        <a:srgbClr val="BDBDBD"/>
-                      </a:solidFill>
-                    </a:lnT>
-                    <a:lnB w="6350" cap="flat" cmpd="sng" algn="ctr">
-                      <a:solidFill>
-                        <a:srgbClr val="BDBDBD"/>
+                        <a:srgbClr val="808080"/>
+                      </a:solidFill>
+                    </a:lnL>
+                    <a:lnR w="6350" cap="flat" cmpd="sng" algn="ctr">
+                      <a:solidFill>
+                        <a:srgbClr val="808080"/>
+                      </a:solidFill>
+                    </a:lnR>
+                    <a:lnT w="6350" cap="flat" cmpd="sng" algn="ctr">
+                      <a:solidFill>
+                        <a:srgbClr val="808080"/>
+                      </a:solidFill>
+                    </a:lnT>
+                    <a:lnB w="6350" cap="flat" cmpd="sng" algn="ctr">
+                      <a:solidFill>
+                        <a:srgbClr val="808080"/>
                       </a:solidFill>
                     </a:lnB>
                   </a:tcPr>
@@ -17056,22 +17056,22 @@
                     </a:solidFill>
                     <a:lnL w="6350" cap="flat" cmpd="sng" algn="ctr">
                       <a:solidFill>
-                        <a:srgbClr val="BDBDBD"/>
-                      </a:solidFill>
-                    </a:lnL>
-                    <a:lnR w="6350" cap="flat" cmpd="sng" algn="ctr">
-                      <a:solidFill>
-                        <a:srgbClr val="BDBDBD"/>
-                      </a:solidFill>
-                    </a:lnR>
-                    <a:lnT w="6350" cap="flat" cmpd="sng" algn="ctr">
-                      <a:solidFill>
-                        <a:srgbClr val="BDBDBD"/>
-                      </a:solidFill>
-                    </a:lnT>
-                    <a:lnB w="6350" cap="flat" cmpd="sng" algn="ctr">
-                      <a:solidFill>
-                        <a:srgbClr val="BDBDBD"/>
+                        <a:srgbClr val="808080"/>
+                      </a:solidFill>
+                    </a:lnL>
+                    <a:lnR w="6350" cap="flat" cmpd="sng" algn="ctr">
+                      <a:solidFill>
+                        <a:srgbClr val="808080"/>
+                      </a:solidFill>
+                    </a:lnR>
+                    <a:lnT w="6350" cap="flat" cmpd="sng" algn="ctr">
+                      <a:solidFill>
+                        <a:srgbClr val="808080"/>
+                      </a:solidFill>
+                    </a:lnT>
+                    <a:lnB w="6350" cap="flat" cmpd="sng" algn="ctr">
+                      <a:solidFill>
+                        <a:srgbClr val="808080"/>
                       </a:solidFill>
                     </a:lnB>
                   </a:tcPr>
@@ -17099,22 +17099,22 @@
                     </a:solidFill>
                     <a:lnL w="6350" cap="flat" cmpd="sng" algn="ctr">
                       <a:solidFill>
-                        <a:srgbClr val="BDBDBD"/>
-                      </a:solidFill>
-                    </a:lnL>
-                    <a:lnR w="6350" cap="flat" cmpd="sng" algn="ctr">
-                      <a:solidFill>
-                        <a:srgbClr val="BDBDBD"/>
-                      </a:solidFill>
-                    </a:lnR>
-                    <a:lnT w="6350" cap="flat" cmpd="sng" algn="ctr">
-                      <a:solidFill>
-                        <a:srgbClr val="BDBDBD"/>
-                      </a:solidFill>
-                    </a:lnT>
-                    <a:lnB w="6350" cap="flat" cmpd="sng" algn="ctr">
-                      <a:solidFill>
-                        <a:srgbClr val="BDBDBD"/>
+                        <a:srgbClr val="808080"/>
+                      </a:solidFill>
+                    </a:lnL>
+                    <a:lnR w="6350" cap="flat" cmpd="sng" algn="ctr">
+                      <a:solidFill>
+                        <a:srgbClr val="808080"/>
+                      </a:solidFill>
+                    </a:lnR>
+                    <a:lnT w="6350" cap="flat" cmpd="sng" algn="ctr">
+                      <a:solidFill>
+                        <a:srgbClr val="808080"/>
+                      </a:solidFill>
+                    </a:lnT>
+                    <a:lnB w="6350" cap="flat" cmpd="sng" algn="ctr">
+                      <a:solidFill>
+                        <a:srgbClr val="808080"/>
                       </a:solidFill>
                     </a:lnB>
                   </a:tcPr>
@@ -17142,22 +17142,22 @@
                     </a:solidFill>
                     <a:lnL w="6350" cap="flat" cmpd="sng" algn="ctr">
                       <a:solidFill>
-                        <a:srgbClr val="BDBDBD"/>
-                      </a:solidFill>
-                    </a:lnL>
-                    <a:lnR w="6350" cap="flat" cmpd="sng" algn="ctr">
-                      <a:solidFill>
-                        <a:srgbClr val="BDBDBD"/>
-                      </a:solidFill>
-                    </a:lnR>
-                    <a:lnT w="6350" cap="flat" cmpd="sng" algn="ctr">
-                      <a:solidFill>
-                        <a:srgbClr val="BDBDBD"/>
-                      </a:solidFill>
-                    </a:lnT>
-                    <a:lnB w="6350" cap="flat" cmpd="sng" algn="ctr">
-                      <a:solidFill>
-                        <a:srgbClr val="BDBDBD"/>
+                        <a:srgbClr val="808080"/>
+                      </a:solidFill>
+                    </a:lnL>
+                    <a:lnR w="6350" cap="flat" cmpd="sng" algn="ctr">
+                      <a:solidFill>
+                        <a:srgbClr val="808080"/>
+                      </a:solidFill>
+                    </a:lnR>
+                    <a:lnT w="6350" cap="flat" cmpd="sng" algn="ctr">
+                      <a:solidFill>
+                        <a:srgbClr val="808080"/>
+                      </a:solidFill>
+                    </a:lnT>
+                    <a:lnB w="6350" cap="flat" cmpd="sng" algn="ctr">
+                      <a:solidFill>
+                        <a:srgbClr val="808080"/>
                       </a:solidFill>
                     </a:lnB>
                   </a:tcPr>
@@ -17187,22 +17187,22 @@
                     </a:solidFill>
                     <a:lnL w="6350" cap="flat" cmpd="sng" algn="ctr">
                       <a:solidFill>
-                        <a:srgbClr val="BDBDBD"/>
-                      </a:solidFill>
-                    </a:lnL>
-                    <a:lnR w="6350" cap="flat" cmpd="sng" algn="ctr">
-                      <a:solidFill>
-                        <a:srgbClr val="BDBDBD"/>
-                      </a:solidFill>
-                    </a:lnR>
-                    <a:lnT w="6350" cap="flat" cmpd="sng" algn="ctr">
-                      <a:solidFill>
-                        <a:srgbClr val="BDBDBD"/>
-                      </a:solidFill>
-                    </a:lnT>
-                    <a:lnB w="6350" cap="flat" cmpd="sng" algn="ctr">
-                      <a:solidFill>
-                        <a:srgbClr val="BDBDBD"/>
+                        <a:srgbClr val="808080"/>
+                      </a:solidFill>
+                    </a:lnL>
+                    <a:lnR w="6350" cap="flat" cmpd="sng" algn="ctr">
+                      <a:solidFill>
+                        <a:srgbClr val="808080"/>
+                      </a:solidFill>
+                    </a:lnR>
+                    <a:lnT w="6350" cap="flat" cmpd="sng" algn="ctr">
+                      <a:solidFill>
+                        <a:srgbClr val="808080"/>
+                      </a:solidFill>
+                    </a:lnT>
+                    <a:lnB w="6350" cap="flat" cmpd="sng" algn="ctr">
+                      <a:solidFill>
+                        <a:srgbClr val="808080"/>
                       </a:solidFill>
                     </a:lnB>
                   </a:tcPr>
@@ -17230,22 +17230,22 @@
                     </a:solidFill>
                     <a:lnL w="6350" cap="flat" cmpd="sng" algn="ctr">
                       <a:solidFill>
-                        <a:srgbClr val="BDBDBD"/>
-                      </a:solidFill>
-                    </a:lnL>
-                    <a:lnR w="6350" cap="flat" cmpd="sng" algn="ctr">
-                      <a:solidFill>
-                        <a:srgbClr val="BDBDBD"/>
-                      </a:solidFill>
-                    </a:lnR>
-                    <a:lnT w="6350" cap="flat" cmpd="sng" algn="ctr">
-                      <a:solidFill>
-                        <a:srgbClr val="BDBDBD"/>
-                      </a:solidFill>
-                    </a:lnT>
-                    <a:lnB w="6350" cap="flat" cmpd="sng" algn="ctr">
-                      <a:solidFill>
-                        <a:srgbClr val="BDBDBD"/>
+                        <a:srgbClr val="808080"/>
+                      </a:solidFill>
+                    </a:lnL>
+                    <a:lnR w="6350" cap="flat" cmpd="sng" algn="ctr">
+                      <a:solidFill>
+                        <a:srgbClr val="808080"/>
+                      </a:solidFill>
+                    </a:lnR>
+                    <a:lnT w="6350" cap="flat" cmpd="sng" algn="ctr">
+                      <a:solidFill>
+                        <a:srgbClr val="808080"/>
+                      </a:solidFill>
+                    </a:lnT>
+                    <a:lnB w="6350" cap="flat" cmpd="sng" algn="ctr">
+                      <a:solidFill>
+                        <a:srgbClr val="808080"/>
                       </a:solidFill>
                     </a:lnB>
                   </a:tcPr>
@@ -17273,22 +17273,22 @@
                     </a:solidFill>
                     <a:lnL w="6350" cap="flat" cmpd="sng" algn="ctr">
                       <a:solidFill>
-                        <a:srgbClr val="BDBDBD"/>
-                      </a:solidFill>
-                    </a:lnL>
-                    <a:lnR w="6350" cap="flat" cmpd="sng" algn="ctr">
-                      <a:solidFill>
-                        <a:srgbClr val="BDBDBD"/>
-                      </a:solidFill>
-                    </a:lnR>
-                    <a:lnT w="6350" cap="flat" cmpd="sng" algn="ctr">
-                      <a:solidFill>
-                        <a:srgbClr val="BDBDBD"/>
-                      </a:solidFill>
-                    </a:lnT>
-                    <a:lnB w="6350" cap="flat" cmpd="sng" algn="ctr">
-                      <a:solidFill>
-                        <a:srgbClr val="BDBDBD"/>
+                        <a:srgbClr val="808080"/>
+                      </a:solidFill>
+                    </a:lnL>
+                    <a:lnR w="6350" cap="flat" cmpd="sng" algn="ctr">
+                      <a:solidFill>
+                        <a:srgbClr val="808080"/>
+                      </a:solidFill>
+                    </a:lnR>
+                    <a:lnT w="6350" cap="flat" cmpd="sng" algn="ctr">
+                      <a:solidFill>
+                        <a:srgbClr val="808080"/>
+                      </a:solidFill>
+                    </a:lnT>
+                    <a:lnB w="6350" cap="flat" cmpd="sng" algn="ctr">
+                      <a:solidFill>
+                        <a:srgbClr val="808080"/>
                       </a:solidFill>
                     </a:lnB>
                   </a:tcPr>
@@ -17318,22 +17318,22 @@
                     </a:solidFill>
                     <a:lnL w="6350" cap="flat" cmpd="sng" algn="ctr">
                       <a:solidFill>
-                        <a:srgbClr val="BDBDBD"/>
-                      </a:solidFill>
-                    </a:lnL>
-                    <a:lnR w="6350" cap="flat" cmpd="sng" algn="ctr">
-                      <a:solidFill>
-                        <a:srgbClr val="BDBDBD"/>
-                      </a:solidFill>
-                    </a:lnR>
-                    <a:lnT w="6350" cap="flat" cmpd="sng" algn="ctr">
-                      <a:solidFill>
-                        <a:srgbClr val="BDBDBD"/>
-                      </a:solidFill>
-                    </a:lnT>
-                    <a:lnB w="6350" cap="flat" cmpd="sng" algn="ctr">
-                      <a:solidFill>
-                        <a:srgbClr val="BDBDBD"/>
+                        <a:srgbClr val="808080"/>
+                      </a:solidFill>
+                    </a:lnL>
+                    <a:lnR w="6350" cap="flat" cmpd="sng" algn="ctr">
+                      <a:solidFill>
+                        <a:srgbClr val="808080"/>
+                      </a:solidFill>
+                    </a:lnR>
+                    <a:lnT w="6350" cap="flat" cmpd="sng" algn="ctr">
+                      <a:solidFill>
+                        <a:srgbClr val="808080"/>
+                      </a:solidFill>
+                    </a:lnT>
+                    <a:lnB w="6350" cap="flat" cmpd="sng" algn="ctr">
+                      <a:solidFill>
+                        <a:srgbClr val="808080"/>
                       </a:solidFill>
                     </a:lnB>
                   </a:tcPr>
@@ -17361,22 +17361,22 @@
                     </a:solidFill>
                     <a:lnL w="6350" cap="flat" cmpd="sng" algn="ctr">
                       <a:solidFill>
-                        <a:srgbClr val="BDBDBD"/>
-                      </a:solidFill>
-                    </a:lnL>
-                    <a:lnR w="6350" cap="flat" cmpd="sng" algn="ctr">
-                      <a:solidFill>
-                        <a:srgbClr val="BDBDBD"/>
-                      </a:solidFill>
-                    </a:lnR>
-                    <a:lnT w="6350" cap="flat" cmpd="sng" algn="ctr">
-                      <a:solidFill>
-                        <a:srgbClr val="BDBDBD"/>
-                      </a:solidFill>
-                    </a:lnT>
-                    <a:lnB w="6350" cap="flat" cmpd="sng" algn="ctr">
-                      <a:solidFill>
-                        <a:srgbClr val="BDBDBD"/>
+                        <a:srgbClr val="808080"/>
+                      </a:solidFill>
+                    </a:lnL>
+                    <a:lnR w="6350" cap="flat" cmpd="sng" algn="ctr">
+                      <a:solidFill>
+                        <a:srgbClr val="808080"/>
+                      </a:solidFill>
+                    </a:lnR>
+                    <a:lnT w="6350" cap="flat" cmpd="sng" algn="ctr">
+                      <a:solidFill>
+                        <a:srgbClr val="808080"/>
+                      </a:solidFill>
+                    </a:lnT>
+                    <a:lnB w="6350" cap="flat" cmpd="sng" algn="ctr">
+                      <a:solidFill>
+                        <a:srgbClr val="808080"/>
                       </a:solidFill>
                     </a:lnB>
                   </a:tcPr>
@@ -17404,22 +17404,22 @@
                     </a:solidFill>
                     <a:lnL w="6350" cap="flat" cmpd="sng" algn="ctr">
                       <a:solidFill>
-                        <a:srgbClr val="BDBDBD"/>
-                      </a:solidFill>
-                    </a:lnL>
-                    <a:lnR w="6350" cap="flat" cmpd="sng" algn="ctr">
-                      <a:solidFill>
-                        <a:srgbClr val="BDBDBD"/>
-                      </a:solidFill>
-                    </a:lnR>
-                    <a:lnT w="6350" cap="flat" cmpd="sng" algn="ctr">
-                      <a:solidFill>
-                        <a:srgbClr val="BDBDBD"/>
-                      </a:solidFill>
-                    </a:lnT>
-                    <a:lnB w="6350" cap="flat" cmpd="sng" algn="ctr">
-                      <a:solidFill>
-                        <a:srgbClr val="BDBDBD"/>
+                        <a:srgbClr val="808080"/>
+                      </a:solidFill>
+                    </a:lnL>
+                    <a:lnR w="6350" cap="flat" cmpd="sng" algn="ctr">
+                      <a:solidFill>
+                        <a:srgbClr val="808080"/>
+                      </a:solidFill>
+                    </a:lnR>
+                    <a:lnT w="6350" cap="flat" cmpd="sng" algn="ctr">
+                      <a:solidFill>
+                        <a:srgbClr val="808080"/>
+                      </a:solidFill>
+                    </a:lnT>
+                    <a:lnB w="6350" cap="flat" cmpd="sng" algn="ctr">
+                      <a:solidFill>
+                        <a:srgbClr val="808080"/>
                       </a:solidFill>
                     </a:lnB>
                   </a:tcPr>
@@ -17449,22 +17449,22 @@
                     </a:solidFill>
                     <a:lnL w="6350" cap="flat" cmpd="sng" algn="ctr">
                       <a:solidFill>
-                        <a:srgbClr val="BDBDBD"/>
-                      </a:solidFill>
-                    </a:lnL>
-                    <a:lnR w="6350" cap="flat" cmpd="sng" algn="ctr">
-                      <a:solidFill>
-                        <a:srgbClr val="BDBDBD"/>
-                      </a:solidFill>
-                    </a:lnR>
-                    <a:lnT w="6350" cap="flat" cmpd="sng" algn="ctr">
-                      <a:solidFill>
-                        <a:srgbClr val="BDBDBD"/>
-                      </a:solidFill>
-                    </a:lnT>
-                    <a:lnB w="6350" cap="flat" cmpd="sng" algn="ctr">
-                      <a:solidFill>
-                        <a:srgbClr val="BDBDBD"/>
+                        <a:srgbClr val="808080"/>
+                      </a:solidFill>
+                    </a:lnL>
+                    <a:lnR w="6350" cap="flat" cmpd="sng" algn="ctr">
+                      <a:solidFill>
+                        <a:srgbClr val="808080"/>
+                      </a:solidFill>
+                    </a:lnR>
+                    <a:lnT w="6350" cap="flat" cmpd="sng" algn="ctr">
+                      <a:solidFill>
+                        <a:srgbClr val="808080"/>
+                      </a:solidFill>
+                    </a:lnT>
+                    <a:lnB w="6350" cap="flat" cmpd="sng" algn="ctr">
+                      <a:solidFill>
+                        <a:srgbClr val="808080"/>
                       </a:solidFill>
                     </a:lnB>
                   </a:tcPr>
@@ -17492,22 +17492,22 @@
                     </a:solidFill>
                     <a:lnL w="6350" cap="flat" cmpd="sng" algn="ctr">
                       <a:solidFill>
-                        <a:srgbClr val="BDBDBD"/>
-                      </a:solidFill>
-                    </a:lnL>
-                    <a:lnR w="6350" cap="flat" cmpd="sng" algn="ctr">
-                      <a:solidFill>
-                        <a:srgbClr val="BDBDBD"/>
-                      </a:solidFill>
-                    </a:lnR>
-                    <a:lnT w="6350" cap="flat" cmpd="sng" algn="ctr">
-                      <a:solidFill>
-                        <a:srgbClr val="BDBDBD"/>
-                      </a:solidFill>
-                    </a:lnT>
-                    <a:lnB w="6350" cap="flat" cmpd="sng" algn="ctr">
-                      <a:solidFill>
-                        <a:srgbClr val="BDBDBD"/>
+                        <a:srgbClr val="808080"/>
+                      </a:solidFill>
+                    </a:lnL>
+                    <a:lnR w="6350" cap="flat" cmpd="sng" algn="ctr">
+                      <a:solidFill>
+                        <a:srgbClr val="808080"/>
+                      </a:solidFill>
+                    </a:lnR>
+                    <a:lnT w="6350" cap="flat" cmpd="sng" algn="ctr">
+                      <a:solidFill>
+                        <a:srgbClr val="808080"/>
+                      </a:solidFill>
+                    </a:lnT>
+                    <a:lnB w="6350" cap="flat" cmpd="sng" algn="ctr">
+                      <a:solidFill>
+                        <a:srgbClr val="808080"/>
                       </a:solidFill>
                     </a:lnB>
                   </a:tcPr>
@@ -17535,22 +17535,22 @@
                     </a:solidFill>
                     <a:lnL w="6350" cap="flat" cmpd="sng" algn="ctr">
                       <a:solidFill>
-                        <a:srgbClr val="BDBDBD"/>
-                      </a:solidFill>
-                    </a:lnL>
-                    <a:lnR w="6350" cap="flat" cmpd="sng" algn="ctr">
-                      <a:solidFill>
-                        <a:srgbClr val="BDBDBD"/>
-                      </a:solidFill>
-                    </a:lnR>
-                    <a:lnT w="6350" cap="flat" cmpd="sng" algn="ctr">
-                      <a:solidFill>
-                        <a:srgbClr val="BDBDBD"/>
-                      </a:solidFill>
-                    </a:lnT>
-                    <a:lnB w="6350" cap="flat" cmpd="sng" algn="ctr">
-                      <a:solidFill>
-                        <a:srgbClr val="BDBDBD"/>
+                        <a:srgbClr val="808080"/>
+                      </a:solidFill>
+                    </a:lnL>
+                    <a:lnR w="6350" cap="flat" cmpd="sng" algn="ctr">
+                      <a:solidFill>
+                        <a:srgbClr val="808080"/>
+                      </a:solidFill>
+                    </a:lnR>
+                    <a:lnT w="6350" cap="flat" cmpd="sng" algn="ctr">
+                      <a:solidFill>
+                        <a:srgbClr val="808080"/>
+                      </a:solidFill>
+                    </a:lnT>
+                    <a:lnB w="6350" cap="flat" cmpd="sng" algn="ctr">
+                      <a:solidFill>
+                        <a:srgbClr val="808080"/>
                       </a:solidFill>
                     </a:lnB>
                   </a:tcPr>
@@ -17580,22 +17580,22 @@
                     </a:solidFill>
                     <a:lnL w="6350" cap="flat" cmpd="sng" algn="ctr">
                       <a:solidFill>
-                        <a:srgbClr val="BDBDBD"/>
-                      </a:solidFill>
-                    </a:lnL>
-                    <a:lnR w="6350" cap="flat" cmpd="sng" algn="ctr">
-                      <a:solidFill>
-                        <a:srgbClr val="BDBDBD"/>
-                      </a:solidFill>
-                    </a:lnR>
-                    <a:lnT w="6350" cap="flat" cmpd="sng" algn="ctr">
-                      <a:solidFill>
-                        <a:srgbClr val="BDBDBD"/>
-                      </a:solidFill>
-                    </a:lnT>
-                    <a:lnB w="6350" cap="flat" cmpd="sng" algn="ctr">
-                      <a:solidFill>
-                        <a:srgbClr val="BDBDBD"/>
+                        <a:srgbClr val="808080"/>
+                      </a:solidFill>
+                    </a:lnL>
+                    <a:lnR w="6350" cap="flat" cmpd="sng" algn="ctr">
+                      <a:solidFill>
+                        <a:srgbClr val="808080"/>
+                      </a:solidFill>
+                    </a:lnR>
+                    <a:lnT w="6350" cap="flat" cmpd="sng" algn="ctr">
+                      <a:solidFill>
+                        <a:srgbClr val="808080"/>
+                      </a:solidFill>
+                    </a:lnT>
+                    <a:lnB w="6350" cap="flat" cmpd="sng" algn="ctr">
+                      <a:solidFill>
+                        <a:srgbClr val="808080"/>
                       </a:solidFill>
                     </a:lnB>
                   </a:tcPr>
@@ -17623,22 +17623,22 @@
                     </a:solidFill>
                     <a:lnL w="6350" cap="flat" cmpd="sng" algn="ctr">
                       <a:solidFill>
-                        <a:srgbClr val="BDBDBD"/>
-                      </a:solidFill>
-                    </a:lnL>
-                    <a:lnR w="6350" cap="flat" cmpd="sng" algn="ctr">
-                      <a:solidFill>
-                        <a:srgbClr val="BDBDBD"/>
-                      </a:solidFill>
-                    </a:lnR>
-                    <a:lnT w="6350" cap="flat" cmpd="sng" algn="ctr">
-                      <a:solidFill>
-                        <a:srgbClr val="BDBDBD"/>
-                      </a:solidFill>
-                    </a:lnT>
-                    <a:lnB w="6350" cap="flat" cmpd="sng" algn="ctr">
-                      <a:solidFill>
-                        <a:srgbClr val="BDBDBD"/>
+                        <a:srgbClr val="808080"/>
+                      </a:solidFill>
+                    </a:lnL>
+                    <a:lnR w="6350" cap="flat" cmpd="sng" algn="ctr">
+                      <a:solidFill>
+                        <a:srgbClr val="808080"/>
+                      </a:solidFill>
+                    </a:lnR>
+                    <a:lnT w="6350" cap="flat" cmpd="sng" algn="ctr">
+                      <a:solidFill>
+                        <a:srgbClr val="808080"/>
+                      </a:solidFill>
+                    </a:lnT>
+                    <a:lnB w="6350" cap="flat" cmpd="sng" algn="ctr">
+                      <a:solidFill>
+                        <a:srgbClr val="808080"/>
                       </a:solidFill>
                     </a:lnB>
                   </a:tcPr>
@@ -17666,22 +17666,22 @@
                     </a:solidFill>
                     <a:lnL w="6350" cap="flat" cmpd="sng" algn="ctr">
                       <a:solidFill>
-                        <a:srgbClr val="BDBDBD"/>
-                      </a:solidFill>
-                    </a:lnL>
-                    <a:lnR w="6350" cap="flat" cmpd="sng" algn="ctr">
-                      <a:solidFill>
-                        <a:srgbClr val="BDBDBD"/>
-                      </a:solidFill>
-                    </a:lnR>
-                    <a:lnT w="6350" cap="flat" cmpd="sng" algn="ctr">
-                      <a:solidFill>
-                        <a:srgbClr val="BDBDBD"/>
-                      </a:solidFill>
-                    </a:lnT>
-                    <a:lnB w="6350" cap="flat" cmpd="sng" algn="ctr">
-                      <a:solidFill>
-                        <a:srgbClr val="BDBDBD"/>
+                        <a:srgbClr val="808080"/>
+                      </a:solidFill>
+                    </a:lnL>
+                    <a:lnR w="6350" cap="flat" cmpd="sng" algn="ctr">
+                      <a:solidFill>
+                        <a:srgbClr val="808080"/>
+                      </a:solidFill>
+                    </a:lnR>
+                    <a:lnT w="6350" cap="flat" cmpd="sng" algn="ctr">
+                      <a:solidFill>
+                        <a:srgbClr val="808080"/>
+                      </a:solidFill>
+                    </a:lnT>
+                    <a:lnB w="6350" cap="flat" cmpd="sng" algn="ctr">
+                      <a:solidFill>
+                        <a:srgbClr val="808080"/>
                       </a:solidFill>
                     </a:lnB>
                   </a:tcPr>
@@ -18009,22 +18009,22 @@
                     </a:solidFill>
                     <a:lnL w="6350" cap="flat" cmpd="sng" algn="ctr">
                       <a:solidFill>
-                        <a:srgbClr val="BDBDBD"/>
-                      </a:solidFill>
-                    </a:lnL>
-                    <a:lnR w="6350" cap="flat" cmpd="sng" algn="ctr">
-                      <a:solidFill>
-                        <a:srgbClr val="BDBDBD"/>
-                      </a:solidFill>
-                    </a:lnR>
-                    <a:lnT w="6350" cap="flat" cmpd="sng" algn="ctr">
-                      <a:solidFill>
-                        <a:srgbClr val="BDBDBD"/>
-                      </a:solidFill>
-                    </a:lnT>
-                    <a:lnB w="6350" cap="flat" cmpd="sng" algn="ctr">
-                      <a:solidFill>
-                        <a:srgbClr val="BDBDBD"/>
+                        <a:srgbClr val="808080"/>
+                      </a:solidFill>
+                    </a:lnL>
+                    <a:lnR w="6350" cap="flat" cmpd="sng" algn="ctr">
+                      <a:solidFill>
+                        <a:srgbClr val="808080"/>
+                      </a:solidFill>
+                    </a:lnR>
+                    <a:lnT w="6350" cap="flat" cmpd="sng" algn="ctr">
+                      <a:solidFill>
+                        <a:srgbClr val="808080"/>
+                      </a:solidFill>
+                    </a:lnT>
+                    <a:lnB w="6350" cap="flat" cmpd="sng" algn="ctr">
+                      <a:solidFill>
+                        <a:srgbClr val="808080"/>
                       </a:solidFill>
                     </a:lnB>
                   </a:tcPr>
@@ -18052,22 +18052,22 @@
                     </a:solidFill>
                     <a:lnL w="6350" cap="flat" cmpd="sng" algn="ctr">
                       <a:solidFill>
-                        <a:srgbClr val="BDBDBD"/>
-                      </a:solidFill>
-                    </a:lnL>
-                    <a:lnR w="6350" cap="flat" cmpd="sng" algn="ctr">
-                      <a:solidFill>
-                        <a:srgbClr val="BDBDBD"/>
-                      </a:solidFill>
-                    </a:lnR>
-                    <a:lnT w="6350" cap="flat" cmpd="sng" algn="ctr">
-                      <a:solidFill>
-                        <a:srgbClr val="BDBDBD"/>
-                      </a:solidFill>
-                    </a:lnT>
-                    <a:lnB w="6350" cap="flat" cmpd="sng" algn="ctr">
-                      <a:solidFill>
-                        <a:srgbClr val="BDBDBD"/>
+                        <a:srgbClr val="808080"/>
+                      </a:solidFill>
+                    </a:lnL>
+                    <a:lnR w="6350" cap="flat" cmpd="sng" algn="ctr">
+                      <a:solidFill>
+                        <a:srgbClr val="808080"/>
+                      </a:solidFill>
+                    </a:lnR>
+                    <a:lnT w="6350" cap="flat" cmpd="sng" algn="ctr">
+                      <a:solidFill>
+                        <a:srgbClr val="808080"/>
+                      </a:solidFill>
+                    </a:lnT>
+                    <a:lnB w="6350" cap="flat" cmpd="sng" algn="ctr">
+                      <a:solidFill>
+                        <a:srgbClr val="808080"/>
                       </a:solidFill>
                     </a:lnB>
                   </a:tcPr>
@@ -18095,22 +18095,22 @@
                     </a:solidFill>
                     <a:lnL w="6350" cap="flat" cmpd="sng" algn="ctr">
                       <a:solidFill>
-                        <a:srgbClr val="BDBDBD"/>
-                      </a:solidFill>
-                    </a:lnL>
-                    <a:lnR w="6350" cap="flat" cmpd="sng" algn="ctr">
-                      <a:solidFill>
-                        <a:srgbClr val="BDBDBD"/>
-                      </a:solidFill>
-                    </a:lnR>
-                    <a:lnT w="6350" cap="flat" cmpd="sng" algn="ctr">
-                      <a:solidFill>
-                        <a:srgbClr val="BDBDBD"/>
-                      </a:solidFill>
-                    </a:lnT>
-                    <a:lnB w="6350" cap="flat" cmpd="sng" algn="ctr">
-                      <a:solidFill>
-                        <a:srgbClr val="BDBDBD"/>
+                        <a:srgbClr val="808080"/>
+                      </a:solidFill>
+                    </a:lnL>
+                    <a:lnR w="6350" cap="flat" cmpd="sng" algn="ctr">
+                      <a:solidFill>
+                        <a:srgbClr val="808080"/>
+                      </a:solidFill>
+                    </a:lnR>
+                    <a:lnT w="6350" cap="flat" cmpd="sng" algn="ctr">
+                      <a:solidFill>
+                        <a:srgbClr val="808080"/>
+                      </a:solidFill>
+                    </a:lnT>
+                    <a:lnB w="6350" cap="flat" cmpd="sng" algn="ctr">
+                      <a:solidFill>
+                        <a:srgbClr val="808080"/>
                       </a:solidFill>
                     </a:lnB>
                   </a:tcPr>
@@ -18140,22 +18140,22 @@
                     </a:solidFill>
                     <a:lnL w="6350" cap="flat" cmpd="sng" algn="ctr">
                       <a:solidFill>
-                        <a:srgbClr val="BDBDBD"/>
-                      </a:solidFill>
-                    </a:lnL>
-                    <a:lnR w="6350" cap="flat" cmpd="sng" algn="ctr">
-                      <a:solidFill>
-                        <a:srgbClr val="BDBDBD"/>
-                      </a:solidFill>
-                    </a:lnR>
-                    <a:lnT w="6350" cap="flat" cmpd="sng" algn="ctr">
-                      <a:solidFill>
-                        <a:srgbClr val="BDBDBD"/>
-                      </a:solidFill>
-                    </a:lnT>
-                    <a:lnB w="6350" cap="flat" cmpd="sng" algn="ctr">
-                      <a:solidFill>
-                        <a:srgbClr val="BDBDBD"/>
+                        <a:srgbClr val="808080"/>
+                      </a:solidFill>
+                    </a:lnL>
+                    <a:lnR w="6350" cap="flat" cmpd="sng" algn="ctr">
+                      <a:solidFill>
+                        <a:srgbClr val="808080"/>
+                      </a:solidFill>
+                    </a:lnR>
+                    <a:lnT w="6350" cap="flat" cmpd="sng" algn="ctr">
+                      <a:solidFill>
+                        <a:srgbClr val="808080"/>
+                      </a:solidFill>
+                    </a:lnT>
+                    <a:lnB w="6350" cap="flat" cmpd="sng" algn="ctr">
+                      <a:solidFill>
+                        <a:srgbClr val="808080"/>
                       </a:solidFill>
                     </a:lnB>
                   </a:tcPr>
@@ -18183,22 +18183,22 @@
                     </a:solidFill>
                     <a:lnL w="6350" cap="flat" cmpd="sng" algn="ctr">
                       <a:solidFill>
-                        <a:srgbClr val="BDBDBD"/>
-                      </a:solidFill>
-                    </a:lnL>
-                    <a:lnR w="6350" cap="flat" cmpd="sng" algn="ctr">
-                      <a:solidFill>
-                        <a:srgbClr val="BDBDBD"/>
-                      </a:solidFill>
-                    </a:lnR>
-                    <a:lnT w="6350" cap="flat" cmpd="sng" algn="ctr">
-                      <a:solidFill>
-                        <a:srgbClr val="BDBDBD"/>
-                      </a:solidFill>
-                    </a:lnT>
-                    <a:lnB w="6350" cap="flat" cmpd="sng" algn="ctr">
-                      <a:solidFill>
-                        <a:srgbClr val="BDBDBD"/>
+                        <a:srgbClr val="808080"/>
+                      </a:solidFill>
+                    </a:lnL>
+                    <a:lnR w="6350" cap="flat" cmpd="sng" algn="ctr">
+                      <a:solidFill>
+                        <a:srgbClr val="808080"/>
+                      </a:solidFill>
+                    </a:lnR>
+                    <a:lnT w="6350" cap="flat" cmpd="sng" algn="ctr">
+                      <a:solidFill>
+                        <a:srgbClr val="808080"/>
+                      </a:solidFill>
+                    </a:lnT>
+                    <a:lnB w="6350" cap="flat" cmpd="sng" algn="ctr">
+                      <a:solidFill>
+                        <a:srgbClr val="808080"/>
                       </a:solidFill>
                     </a:lnB>
                   </a:tcPr>
@@ -18226,22 +18226,22 @@
                     </a:solidFill>
                     <a:lnL w="6350" cap="flat" cmpd="sng" algn="ctr">
                       <a:solidFill>
-                        <a:srgbClr val="BDBDBD"/>
-                      </a:solidFill>
-                    </a:lnL>
-                    <a:lnR w="6350" cap="flat" cmpd="sng" algn="ctr">
-                      <a:solidFill>
-                        <a:srgbClr val="BDBDBD"/>
-                      </a:solidFill>
-                    </a:lnR>
-                    <a:lnT w="6350" cap="flat" cmpd="sng" algn="ctr">
-                      <a:solidFill>
-                        <a:srgbClr val="BDBDBD"/>
-                      </a:solidFill>
-                    </a:lnT>
-                    <a:lnB w="6350" cap="flat" cmpd="sng" algn="ctr">
-                      <a:solidFill>
-                        <a:srgbClr val="BDBDBD"/>
+                        <a:srgbClr val="808080"/>
+                      </a:solidFill>
+                    </a:lnL>
+                    <a:lnR w="6350" cap="flat" cmpd="sng" algn="ctr">
+                      <a:solidFill>
+                        <a:srgbClr val="808080"/>
+                      </a:solidFill>
+                    </a:lnR>
+                    <a:lnT w="6350" cap="flat" cmpd="sng" algn="ctr">
+                      <a:solidFill>
+                        <a:srgbClr val="808080"/>
+                      </a:solidFill>
+                    </a:lnT>
+                    <a:lnB w="6350" cap="flat" cmpd="sng" algn="ctr">
+                      <a:solidFill>
+                        <a:srgbClr val="808080"/>
                       </a:solidFill>
                     </a:lnB>
                   </a:tcPr>
@@ -18271,22 +18271,22 @@
                     </a:solidFill>
                     <a:lnL w="6350" cap="flat" cmpd="sng" algn="ctr">
                       <a:solidFill>
-                        <a:srgbClr val="BDBDBD"/>
-                      </a:solidFill>
-                    </a:lnL>
-                    <a:lnR w="6350" cap="flat" cmpd="sng" algn="ctr">
-                      <a:solidFill>
-                        <a:srgbClr val="BDBDBD"/>
-                      </a:solidFill>
-                    </a:lnR>
-                    <a:lnT w="6350" cap="flat" cmpd="sng" algn="ctr">
-                      <a:solidFill>
-                        <a:srgbClr val="BDBDBD"/>
-                      </a:solidFill>
-                    </a:lnT>
-                    <a:lnB w="6350" cap="flat" cmpd="sng" algn="ctr">
-                      <a:solidFill>
-                        <a:srgbClr val="BDBDBD"/>
+                        <a:srgbClr val="808080"/>
+                      </a:solidFill>
+                    </a:lnL>
+                    <a:lnR w="6350" cap="flat" cmpd="sng" algn="ctr">
+                      <a:solidFill>
+                        <a:srgbClr val="808080"/>
+                      </a:solidFill>
+                    </a:lnR>
+                    <a:lnT w="6350" cap="flat" cmpd="sng" algn="ctr">
+                      <a:solidFill>
+                        <a:srgbClr val="808080"/>
+                      </a:solidFill>
+                    </a:lnT>
+                    <a:lnB w="6350" cap="flat" cmpd="sng" algn="ctr">
+                      <a:solidFill>
+                        <a:srgbClr val="808080"/>
                       </a:solidFill>
                     </a:lnB>
                   </a:tcPr>
@@ -18314,22 +18314,22 @@
                     </a:solidFill>
                     <a:lnL w="6350" cap="flat" cmpd="sng" algn="ctr">
                       <a:solidFill>
-                        <a:srgbClr val="BDBDBD"/>
-                      </a:solidFill>
-                    </a:lnL>
-                    <a:lnR w="6350" cap="flat" cmpd="sng" algn="ctr">
-                      <a:solidFill>
-                        <a:srgbClr val="BDBDBD"/>
-                      </a:solidFill>
-                    </a:lnR>
-                    <a:lnT w="6350" cap="flat" cmpd="sng" algn="ctr">
-                      <a:solidFill>
-                        <a:srgbClr val="BDBDBD"/>
-                      </a:solidFill>
-                    </a:lnT>
-                    <a:lnB w="6350" cap="flat" cmpd="sng" algn="ctr">
-                      <a:solidFill>
-                        <a:srgbClr val="BDBDBD"/>
+                        <a:srgbClr val="808080"/>
+                      </a:solidFill>
+                    </a:lnL>
+                    <a:lnR w="6350" cap="flat" cmpd="sng" algn="ctr">
+                      <a:solidFill>
+                        <a:srgbClr val="808080"/>
+                      </a:solidFill>
+                    </a:lnR>
+                    <a:lnT w="6350" cap="flat" cmpd="sng" algn="ctr">
+                      <a:solidFill>
+                        <a:srgbClr val="808080"/>
+                      </a:solidFill>
+                    </a:lnT>
+                    <a:lnB w="6350" cap="flat" cmpd="sng" algn="ctr">
+                      <a:solidFill>
+                        <a:srgbClr val="808080"/>
                       </a:solidFill>
                     </a:lnB>
                   </a:tcPr>
@@ -18357,22 +18357,22 @@
                     </a:solidFill>
                     <a:lnL w="6350" cap="flat" cmpd="sng" algn="ctr">
                       <a:solidFill>
-                        <a:srgbClr val="BDBDBD"/>
-                      </a:solidFill>
-                    </a:lnL>
-                    <a:lnR w="6350" cap="flat" cmpd="sng" algn="ctr">
-                      <a:solidFill>
-                        <a:srgbClr val="BDBDBD"/>
-                      </a:solidFill>
-                    </a:lnR>
-                    <a:lnT w="6350" cap="flat" cmpd="sng" algn="ctr">
-                      <a:solidFill>
-                        <a:srgbClr val="BDBDBD"/>
-                      </a:solidFill>
-                    </a:lnT>
-                    <a:lnB w="6350" cap="flat" cmpd="sng" algn="ctr">
-                      <a:solidFill>
-                        <a:srgbClr val="BDBDBD"/>
+                        <a:srgbClr val="808080"/>
+                      </a:solidFill>
+                    </a:lnL>
+                    <a:lnR w="6350" cap="flat" cmpd="sng" algn="ctr">
+                      <a:solidFill>
+                        <a:srgbClr val="808080"/>
+                      </a:solidFill>
+                    </a:lnR>
+                    <a:lnT w="6350" cap="flat" cmpd="sng" algn="ctr">
+                      <a:solidFill>
+                        <a:srgbClr val="808080"/>
+                      </a:solidFill>
+                    </a:lnT>
+                    <a:lnB w="6350" cap="flat" cmpd="sng" algn="ctr">
+                      <a:solidFill>
+                        <a:srgbClr val="808080"/>
                       </a:solidFill>
                     </a:lnB>
                   </a:tcPr>
@@ -18402,22 +18402,22 @@
                     </a:solidFill>
                     <a:lnL w="6350" cap="flat" cmpd="sng" algn="ctr">
                       <a:solidFill>
-                        <a:srgbClr val="BDBDBD"/>
-                      </a:solidFill>
-                    </a:lnL>
-                    <a:lnR w="6350" cap="flat" cmpd="sng" algn="ctr">
-                      <a:solidFill>
-                        <a:srgbClr val="BDBDBD"/>
-                      </a:solidFill>
-                    </a:lnR>
-                    <a:lnT w="6350" cap="flat" cmpd="sng" algn="ctr">
-                      <a:solidFill>
-                        <a:srgbClr val="BDBDBD"/>
-                      </a:solidFill>
-                    </a:lnT>
-                    <a:lnB w="6350" cap="flat" cmpd="sng" algn="ctr">
-                      <a:solidFill>
-                        <a:srgbClr val="BDBDBD"/>
+                        <a:srgbClr val="808080"/>
+                      </a:solidFill>
+                    </a:lnL>
+                    <a:lnR w="6350" cap="flat" cmpd="sng" algn="ctr">
+                      <a:solidFill>
+                        <a:srgbClr val="808080"/>
+                      </a:solidFill>
+                    </a:lnR>
+                    <a:lnT w="6350" cap="flat" cmpd="sng" algn="ctr">
+                      <a:solidFill>
+                        <a:srgbClr val="808080"/>
+                      </a:solidFill>
+                    </a:lnT>
+                    <a:lnB w="6350" cap="flat" cmpd="sng" algn="ctr">
+                      <a:solidFill>
+                        <a:srgbClr val="808080"/>
                       </a:solidFill>
                     </a:lnB>
                   </a:tcPr>
@@ -18445,22 +18445,22 @@
                     </a:solidFill>
                     <a:lnL w="6350" cap="flat" cmpd="sng" algn="ctr">
                       <a:solidFill>
-                        <a:srgbClr val="BDBDBD"/>
-                      </a:solidFill>
-                    </a:lnL>
-                    <a:lnR w="6350" cap="flat" cmpd="sng" algn="ctr">
-                      <a:solidFill>
-                        <a:srgbClr val="BDBDBD"/>
-                      </a:solidFill>
-                    </a:lnR>
-                    <a:lnT w="6350" cap="flat" cmpd="sng" algn="ctr">
-                      <a:solidFill>
-                        <a:srgbClr val="BDBDBD"/>
-                      </a:solidFill>
-                    </a:lnT>
-                    <a:lnB w="6350" cap="flat" cmpd="sng" algn="ctr">
-                      <a:solidFill>
-                        <a:srgbClr val="BDBDBD"/>
+                        <a:srgbClr val="808080"/>
+                      </a:solidFill>
+                    </a:lnL>
+                    <a:lnR w="6350" cap="flat" cmpd="sng" algn="ctr">
+                      <a:solidFill>
+                        <a:srgbClr val="808080"/>
+                      </a:solidFill>
+                    </a:lnR>
+                    <a:lnT w="6350" cap="flat" cmpd="sng" algn="ctr">
+                      <a:solidFill>
+                        <a:srgbClr val="808080"/>
+                      </a:solidFill>
+                    </a:lnT>
+                    <a:lnB w="6350" cap="flat" cmpd="sng" algn="ctr">
+                      <a:solidFill>
+                        <a:srgbClr val="808080"/>
                       </a:solidFill>
                     </a:lnB>
                   </a:tcPr>
@@ -18488,22 +18488,22 @@
                     </a:solidFill>
                     <a:lnL w="6350" cap="flat" cmpd="sng" algn="ctr">
                       <a:solidFill>
-                        <a:srgbClr val="BDBDBD"/>
-                      </a:solidFill>
-                    </a:lnL>
-                    <a:lnR w="6350" cap="flat" cmpd="sng" algn="ctr">
-                      <a:solidFill>
-                        <a:srgbClr val="BDBDBD"/>
-                      </a:solidFill>
-                    </a:lnR>
-                    <a:lnT w="6350" cap="flat" cmpd="sng" algn="ctr">
-                      <a:solidFill>
-                        <a:srgbClr val="BDBDBD"/>
-                      </a:solidFill>
-                    </a:lnT>
-                    <a:lnB w="6350" cap="flat" cmpd="sng" algn="ctr">
-                      <a:solidFill>
-                        <a:srgbClr val="BDBDBD"/>
+                        <a:srgbClr val="808080"/>
+                      </a:solidFill>
+                    </a:lnL>
+                    <a:lnR w="6350" cap="flat" cmpd="sng" algn="ctr">
+                      <a:solidFill>
+                        <a:srgbClr val="808080"/>
+                      </a:solidFill>
+                    </a:lnR>
+                    <a:lnT w="6350" cap="flat" cmpd="sng" algn="ctr">
+                      <a:solidFill>
+                        <a:srgbClr val="808080"/>
+                      </a:solidFill>
+                    </a:lnT>
+                    <a:lnB w="6350" cap="flat" cmpd="sng" algn="ctr">
+                      <a:solidFill>
+                        <a:srgbClr val="808080"/>
                       </a:solidFill>
                     </a:lnB>
                   </a:tcPr>
@@ -18533,22 +18533,22 @@
                     </a:solidFill>
                     <a:lnL w="6350" cap="flat" cmpd="sng" algn="ctr">
                       <a:solidFill>
-                        <a:srgbClr val="BDBDBD"/>
-                      </a:solidFill>
-                    </a:lnL>
-                    <a:lnR w="6350" cap="flat" cmpd="sng" algn="ctr">
-                      <a:solidFill>
-                        <a:srgbClr val="BDBDBD"/>
-                      </a:solidFill>
-                    </a:lnR>
-                    <a:lnT w="6350" cap="flat" cmpd="sng" algn="ctr">
-                      <a:solidFill>
-                        <a:srgbClr val="BDBDBD"/>
-                      </a:solidFill>
-                    </a:lnT>
-                    <a:lnB w="6350" cap="flat" cmpd="sng" algn="ctr">
-                      <a:solidFill>
-                        <a:srgbClr val="BDBDBD"/>
+                        <a:srgbClr val="808080"/>
+                      </a:solidFill>
+                    </a:lnL>
+                    <a:lnR w="6350" cap="flat" cmpd="sng" algn="ctr">
+                      <a:solidFill>
+                        <a:srgbClr val="808080"/>
+                      </a:solidFill>
+                    </a:lnR>
+                    <a:lnT w="6350" cap="flat" cmpd="sng" algn="ctr">
+                      <a:solidFill>
+                        <a:srgbClr val="808080"/>
+                      </a:solidFill>
+                    </a:lnT>
+                    <a:lnB w="6350" cap="flat" cmpd="sng" algn="ctr">
+                      <a:solidFill>
+                        <a:srgbClr val="808080"/>
                       </a:solidFill>
                     </a:lnB>
                   </a:tcPr>
@@ -18576,22 +18576,22 @@
                     </a:solidFill>
                     <a:lnL w="6350" cap="flat" cmpd="sng" algn="ctr">
                       <a:solidFill>
-                        <a:srgbClr val="BDBDBD"/>
-                      </a:solidFill>
-                    </a:lnL>
-                    <a:lnR w="6350" cap="flat" cmpd="sng" algn="ctr">
-                      <a:solidFill>
-                        <a:srgbClr val="BDBDBD"/>
-                      </a:solidFill>
-                    </a:lnR>
-                    <a:lnT w="6350" cap="flat" cmpd="sng" algn="ctr">
-                      <a:solidFill>
-                        <a:srgbClr val="BDBDBD"/>
-                      </a:solidFill>
-                    </a:lnT>
-                    <a:lnB w="6350" cap="flat" cmpd="sng" algn="ctr">
-                      <a:solidFill>
-                        <a:srgbClr val="BDBDBD"/>
+                        <a:srgbClr val="808080"/>
+                      </a:solidFill>
+                    </a:lnL>
+                    <a:lnR w="6350" cap="flat" cmpd="sng" algn="ctr">
+                      <a:solidFill>
+                        <a:srgbClr val="808080"/>
+                      </a:solidFill>
+                    </a:lnR>
+                    <a:lnT w="6350" cap="flat" cmpd="sng" algn="ctr">
+                      <a:solidFill>
+                        <a:srgbClr val="808080"/>
+                      </a:solidFill>
+                    </a:lnT>
+                    <a:lnB w="6350" cap="flat" cmpd="sng" algn="ctr">
+                      <a:solidFill>
+                        <a:srgbClr val="808080"/>
                       </a:solidFill>
                     </a:lnB>
                   </a:tcPr>
@@ -18619,22 +18619,22 @@
                     </a:solidFill>
                     <a:lnL w="6350" cap="flat" cmpd="sng" algn="ctr">
                       <a:solidFill>
-                        <a:srgbClr val="BDBDBD"/>
-                      </a:solidFill>
-                    </a:lnL>
-                    <a:lnR w="6350" cap="flat" cmpd="sng" algn="ctr">
-                      <a:solidFill>
-                        <a:srgbClr val="BDBDBD"/>
-                      </a:solidFill>
-                    </a:lnR>
-                    <a:lnT w="6350" cap="flat" cmpd="sng" algn="ctr">
-                      <a:solidFill>
-                        <a:srgbClr val="BDBDBD"/>
-                      </a:solidFill>
-                    </a:lnT>
-                    <a:lnB w="6350" cap="flat" cmpd="sng" algn="ctr">
-                      <a:solidFill>
-                        <a:srgbClr val="BDBDBD"/>
+                        <a:srgbClr val="808080"/>
+                      </a:solidFill>
+                    </a:lnL>
+                    <a:lnR w="6350" cap="flat" cmpd="sng" algn="ctr">
+                      <a:solidFill>
+                        <a:srgbClr val="808080"/>
+                      </a:solidFill>
+                    </a:lnR>
+                    <a:lnT w="6350" cap="flat" cmpd="sng" algn="ctr">
+                      <a:solidFill>
+                        <a:srgbClr val="808080"/>
+                      </a:solidFill>
+                    </a:lnT>
+                    <a:lnB w="6350" cap="flat" cmpd="sng" algn="ctr">
+                      <a:solidFill>
+                        <a:srgbClr val="808080"/>
                       </a:solidFill>
                     </a:lnB>
                   </a:tcPr>
@@ -19288,22 +19288,22 @@
                     </a:solidFill>
                     <a:lnL w="6350" cap="flat" cmpd="sng" algn="ctr">
                       <a:solidFill>
-                        <a:srgbClr val="BDBDBD"/>
-                      </a:solidFill>
-                    </a:lnL>
-                    <a:lnR w="6350" cap="flat" cmpd="sng" algn="ctr">
-                      <a:solidFill>
-                        <a:srgbClr val="BDBDBD"/>
-                      </a:solidFill>
-                    </a:lnR>
-                    <a:lnT w="6350" cap="flat" cmpd="sng" algn="ctr">
-                      <a:solidFill>
-                        <a:srgbClr val="BDBDBD"/>
-                      </a:solidFill>
-                    </a:lnT>
-                    <a:lnB w="6350" cap="flat" cmpd="sng" algn="ctr">
-                      <a:solidFill>
-                        <a:srgbClr val="BDBDBD"/>
+                        <a:srgbClr val="808080"/>
+                      </a:solidFill>
+                    </a:lnL>
+                    <a:lnR w="6350" cap="flat" cmpd="sng" algn="ctr">
+                      <a:solidFill>
+                        <a:srgbClr val="808080"/>
+                      </a:solidFill>
+                    </a:lnR>
+                    <a:lnT w="6350" cap="flat" cmpd="sng" algn="ctr">
+                      <a:solidFill>
+                        <a:srgbClr val="808080"/>
+                      </a:solidFill>
+                    </a:lnT>
+                    <a:lnB w="6350" cap="flat" cmpd="sng" algn="ctr">
+                      <a:solidFill>
+                        <a:srgbClr val="808080"/>
                       </a:solidFill>
                     </a:lnB>
                   </a:tcPr>
@@ -19331,22 +19331,22 @@
                     </a:solidFill>
                     <a:lnL w="6350" cap="flat" cmpd="sng" algn="ctr">
                       <a:solidFill>
-                        <a:srgbClr val="BDBDBD"/>
-                      </a:solidFill>
-                    </a:lnL>
-                    <a:lnR w="6350" cap="flat" cmpd="sng" algn="ctr">
-                      <a:solidFill>
-                        <a:srgbClr val="BDBDBD"/>
-                      </a:solidFill>
-                    </a:lnR>
-                    <a:lnT w="6350" cap="flat" cmpd="sng" algn="ctr">
-                      <a:solidFill>
-                        <a:srgbClr val="BDBDBD"/>
-                      </a:solidFill>
-                    </a:lnT>
-                    <a:lnB w="6350" cap="flat" cmpd="sng" algn="ctr">
-                      <a:solidFill>
-                        <a:srgbClr val="BDBDBD"/>
+                        <a:srgbClr val="808080"/>
+                      </a:solidFill>
+                    </a:lnL>
+                    <a:lnR w="6350" cap="flat" cmpd="sng" algn="ctr">
+                      <a:solidFill>
+                        <a:srgbClr val="808080"/>
+                      </a:solidFill>
+                    </a:lnR>
+                    <a:lnT w="6350" cap="flat" cmpd="sng" algn="ctr">
+                      <a:solidFill>
+                        <a:srgbClr val="808080"/>
+                      </a:solidFill>
+                    </a:lnT>
+                    <a:lnB w="6350" cap="flat" cmpd="sng" algn="ctr">
+                      <a:solidFill>
+                        <a:srgbClr val="808080"/>
                       </a:solidFill>
                     </a:lnB>
                   </a:tcPr>
@@ -19376,22 +19376,22 @@
                     </a:solidFill>
                     <a:lnL w="6350" cap="flat" cmpd="sng" algn="ctr">
                       <a:solidFill>
-                        <a:srgbClr val="BDBDBD"/>
-                      </a:solidFill>
-                    </a:lnL>
-                    <a:lnR w="6350" cap="flat" cmpd="sng" algn="ctr">
-                      <a:solidFill>
-                        <a:srgbClr val="BDBDBD"/>
-                      </a:solidFill>
-                    </a:lnR>
-                    <a:lnT w="6350" cap="flat" cmpd="sng" algn="ctr">
-                      <a:solidFill>
-                        <a:srgbClr val="BDBDBD"/>
-                      </a:solidFill>
-                    </a:lnT>
-                    <a:lnB w="6350" cap="flat" cmpd="sng" algn="ctr">
-                      <a:solidFill>
-                        <a:srgbClr val="BDBDBD"/>
+                        <a:srgbClr val="808080"/>
+                      </a:solidFill>
+                    </a:lnL>
+                    <a:lnR w="6350" cap="flat" cmpd="sng" algn="ctr">
+                      <a:solidFill>
+                        <a:srgbClr val="808080"/>
+                      </a:solidFill>
+                    </a:lnR>
+                    <a:lnT w="6350" cap="flat" cmpd="sng" algn="ctr">
+                      <a:solidFill>
+                        <a:srgbClr val="808080"/>
+                      </a:solidFill>
+                    </a:lnT>
+                    <a:lnB w="6350" cap="flat" cmpd="sng" algn="ctr">
+                      <a:solidFill>
+                        <a:srgbClr val="808080"/>
                       </a:solidFill>
                     </a:lnB>
                   </a:tcPr>
@@ -19419,22 +19419,22 @@
                     </a:solidFill>
                     <a:lnL w="6350" cap="flat" cmpd="sng" algn="ctr">
                       <a:solidFill>
-                        <a:srgbClr val="BDBDBD"/>
-                      </a:solidFill>
-                    </a:lnL>
-                    <a:lnR w="6350" cap="flat" cmpd="sng" algn="ctr">
-                      <a:solidFill>
-                        <a:srgbClr val="BDBDBD"/>
-                      </a:solidFill>
-                    </a:lnR>
-                    <a:lnT w="6350" cap="flat" cmpd="sng" algn="ctr">
-                      <a:solidFill>
-                        <a:srgbClr val="BDBDBD"/>
-                      </a:solidFill>
-                    </a:lnT>
-                    <a:lnB w="6350" cap="flat" cmpd="sng" algn="ctr">
-                      <a:solidFill>
-                        <a:srgbClr val="BDBDBD"/>
+                        <a:srgbClr val="808080"/>
+                      </a:solidFill>
+                    </a:lnL>
+                    <a:lnR w="6350" cap="flat" cmpd="sng" algn="ctr">
+                      <a:solidFill>
+                        <a:srgbClr val="808080"/>
+                      </a:solidFill>
+                    </a:lnR>
+                    <a:lnT w="6350" cap="flat" cmpd="sng" algn="ctr">
+                      <a:solidFill>
+                        <a:srgbClr val="808080"/>
+                      </a:solidFill>
+                    </a:lnT>
+                    <a:lnB w="6350" cap="flat" cmpd="sng" algn="ctr">
+                      <a:solidFill>
+                        <a:srgbClr val="808080"/>
                       </a:solidFill>
                     </a:lnB>
                   </a:tcPr>
@@ -19464,22 +19464,22 @@
                     </a:solidFill>
                     <a:lnL w="6350" cap="flat" cmpd="sng" algn="ctr">
                       <a:solidFill>
-                        <a:srgbClr val="BDBDBD"/>
-                      </a:solidFill>
-                    </a:lnL>
-                    <a:lnR w="6350" cap="flat" cmpd="sng" algn="ctr">
-                      <a:solidFill>
-                        <a:srgbClr val="BDBDBD"/>
-                      </a:solidFill>
-                    </a:lnR>
-                    <a:lnT w="6350" cap="flat" cmpd="sng" algn="ctr">
-                      <a:solidFill>
-                        <a:srgbClr val="BDBDBD"/>
-                      </a:solidFill>
-                    </a:lnT>
-                    <a:lnB w="6350" cap="flat" cmpd="sng" algn="ctr">
-                      <a:solidFill>
-                        <a:srgbClr val="BDBDBD"/>
+                        <a:srgbClr val="808080"/>
+                      </a:solidFill>
+                    </a:lnL>
+                    <a:lnR w="6350" cap="flat" cmpd="sng" algn="ctr">
+                      <a:solidFill>
+                        <a:srgbClr val="808080"/>
+                      </a:solidFill>
+                    </a:lnR>
+                    <a:lnT w="6350" cap="flat" cmpd="sng" algn="ctr">
+                      <a:solidFill>
+                        <a:srgbClr val="808080"/>
+                      </a:solidFill>
+                    </a:lnT>
+                    <a:lnB w="6350" cap="flat" cmpd="sng" algn="ctr">
+                      <a:solidFill>
+                        <a:srgbClr val="808080"/>
                       </a:solidFill>
                     </a:lnB>
                   </a:tcPr>
@@ -19507,22 +19507,22 @@
                     </a:solidFill>
                     <a:lnL w="6350" cap="flat" cmpd="sng" algn="ctr">
                       <a:solidFill>
-                        <a:srgbClr val="BDBDBD"/>
-                      </a:solidFill>
-                    </a:lnL>
-                    <a:lnR w="6350" cap="flat" cmpd="sng" algn="ctr">
-                      <a:solidFill>
-                        <a:srgbClr val="BDBDBD"/>
-                      </a:solidFill>
-                    </a:lnR>
-                    <a:lnT w="6350" cap="flat" cmpd="sng" algn="ctr">
-                      <a:solidFill>
-                        <a:srgbClr val="BDBDBD"/>
-                      </a:solidFill>
-                    </a:lnT>
-                    <a:lnB w="6350" cap="flat" cmpd="sng" algn="ctr">
-                      <a:solidFill>
-                        <a:srgbClr val="BDBDBD"/>
+                        <a:srgbClr val="808080"/>
+                      </a:solidFill>
+                    </a:lnL>
+                    <a:lnR w="6350" cap="flat" cmpd="sng" algn="ctr">
+                      <a:solidFill>
+                        <a:srgbClr val="808080"/>
+                      </a:solidFill>
+                    </a:lnR>
+                    <a:lnT w="6350" cap="flat" cmpd="sng" algn="ctr">
+                      <a:solidFill>
+                        <a:srgbClr val="808080"/>
+                      </a:solidFill>
+                    </a:lnT>
+                    <a:lnB w="6350" cap="flat" cmpd="sng" algn="ctr">
+                      <a:solidFill>
+                        <a:srgbClr val="808080"/>
                       </a:solidFill>
                     </a:lnB>
                   </a:tcPr>
@@ -19552,22 +19552,22 @@
                     </a:solidFill>
                     <a:lnL w="6350" cap="flat" cmpd="sng" algn="ctr">
                       <a:solidFill>
-                        <a:srgbClr val="BDBDBD"/>
-                      </a:solidFill>
-                    </a:lnL>
-                    <a:lnR w="6350" cap="flat" cmpd="sng" algn="ctr">
-                      <a:solidFill>
-                        <a:srgbClr val="BDBDBD"/>
-                      </a:solidFill>
-                    </a:lnR>
-                    <a:lnT w="6350" cap="flat" cmpd="sng" algn="ctr">
-                      <a:solidFill>
-                        <a:srgbClr val="BDBDBD"/>
-                      </a:solidFill>
-                    </a:lnT>
-                    <a:lnB w="6350" cap="flat" cmpd="sng" algn="ctr">
-                      <a:solidFill>
-                        <a:srgbClr val="BDBDBD"/>
+                        <a:srgbClr val="808080"/>
+                      </a:solidFill>
+                    </a:lnL>
+                    <a:lnR w="6350" cap="flat" cmpd="sng" algn="ctr">
+                      <a:solidFill>
+                        <a:srgbClr val="808080"/>
+                      </a:solidFill>
+                    </a:lnR>
+                    <a:lnT w="6350" cap="flat" cmpd="sng" algn="ctr">
+                      <a:solidFill>
+                        <a:srgbClr val="808080"/>
+                      </a:solidFill>
+                    </a:lnT>
+                    <a:lnB w="6350" cap="flat" cmpd="sng" algn="ctr">
+                      <a:solidFill>
+                        <a:srgbClr val="808080"/>
                       </a:solidFill>
                     </a:lnB>
                   </a:tcPr>
@@ -19595,22 +19595,22 @@
                     </a:solidFill>
                     <a:lnL w="6350" cap="flat" cmpd="sng" algn="ctr">
                       <a:solidFill>
-                        <a:srgbClr val="BDBDBD"/>
-                      </a:solidFill>
-                    </a:lnL>
-                    <a:lnR w="6350" cap="flat" cmpd="sng" algn="ctr">
-                      <a:solidFill>
-                        <a:srgbClr val="BDBDBD"/>
-                      </a:solidFill>
-                    </a:lnR>
-                    <a:lnT w="6350" cap="flat" cmpd="sng" algn="ctr">
-                      <a:solidFill>
-                        <a:srgbClr val="BDBDBD"/>
-                      </a:solidFill>
-                    </a:lnT>
-                    <a:lnB w="6350" cap="flat" cmpd="sng" algn="ctr">
-                      <a:solidFill>
-                        <a:srgbClr val="BDBDBD"/>
+                        <a:srgbClr val="808080"/>
+                      </a:solidFill>
+                    </a:lnL>
+                    <a:lnR w="6350" cap="flat" cmpd="sng" algn="ctr">
+                      <a:solidFill>
+                        <a:srgbClr val="808080"/>
+                      </a:solidFill>
+                    </a:lnR>
+                    <a:lnT w="6350" cap="flat" cmpd="sng" algn="ctr">
+                      <a:solidFill>
+                        <a:srgbClr val="808080"/>
+                      </a:solidFill>
+                    </a:lnT>
+                    <a:lnB w="6350" cap="flat" cmpd="sng" algn="ctr">
+                      <a:solidFill>
+                        <a:srgbClr val="808080"/>
                       </a:solidFill>
                     </a:lnB>
                   </a:tcPr>
@@ -19640,22 +19640,22 @@
                     </a:solidFill>
                     <a:lnL w="6350" cap="flat" cmpd="sng" algn="ctr">
                       <a:solidFill>
-                        <a:srgbClr val="BDBDBD"/>
-                      </a:solidFill>
-                    </a:lnL>
-                    <a:lnR w="6350" cap="flat" cmpd="sng" algn="ctr">
-                      <a:solidFill>
-                        <a:srgbClr val="BDBDBD"/>
-                      </a:solidFill>
-                    </a:lnR>
-                    <a:lnT w="6350" cap="flat" cmpd="sng" algn="ctr">
-                      <a:solidFill>
-                        <a:srgbClr val="BDBDBD"/>
-                      </a:solidFill>
-                    </a:lnT>
-                    <a:lnB w="6350" cap="flat" cmpd="sng" algn="ctr">
-                      <a:solidFill>
-                        <a:srgbClr val="BDBDBD"/>
+                        <a:srgbClr val="808080"/>
+                      </a:solidFill>
+                    </a:lnL>
+                    <a:lnR w="6350" cap="flat" cmpd="sng" algn="ctr">
+                      <a:solidFill>
+                        <a:srgbClr val="808080"/>
+                      </a:solidFill>
+                    </a:lnR>
+                    <a:lnT w="6350" cap="flat" cmpd="sng" algn="ctr">
+                      <a:solidFill>
+                        <a:srgbClr val="808080"/>
+                      </a:solidFill>
+                    </a:lnT>
+                    <a:lnB w="6350" cap="flat" cmpd="sng" algn="ctr">
+                      <a:solidFill>
+                        <a:srgbClr val="808080"/>
                       </a:solidFill>
                     </a:lnB>
                   </a:tcPr>
@@ -19683,22 +19683,22 @@
                     </a:solidFill>
                     <a:lnL w="6350" cap="flat" cmpd="sng" algn="ctr">
                       <a:solidFill>
-                        <a:srgbClr val="BDBDBD"/>
-                      </a:solidFill>
-                    </a:lnL>
-                    <a:lnR w="6350" cap="flat" cmpd="sng" algn="ctr">
-                      <a:solidFill>
-                        <a:srgbClr val="BDBDBD"/>
-                      </a:solidFill>
-                    </a:lnR>
-                    <a:lnT w="6350" cap="flat" cmpd="sng" algn="ctr">
-                      <a:solidFill>
-                        <a:srgbClr val="BDBDBD"/>
-                      </a:solidFill>
-                    </a:lnT>
-                    <a:lnB w="6350" cap="flat" cmpd="sng" algn="ctr">
-                      <a:solidFill>
-                        <a:srgbClr val="BDBDBD"/>
+                        <a:srgbClr val="808080"/>
+                      </a:solidFill>
+                    </a:lnL>
+                    <a:lnR w="6350" cap="flat" cmpd="sng" algn="ctr">
+                      <a:solidFill>
+                        <a:srgbClr val="808080"/>
+                      </a:solidFill>
+                    </a:lnR>
+                    <a:lnT w="6350" cap="flat" cmpd="sng" algn="ctr">
+                      <a:solidFill>
+                        <a:srgbClr val="808080"/>
+                      </a:solidFill>
+                    </a:lnT>
+                    <a:lnB w="6350" cap="flat" cmpd="sng" algn="ctr">
+                      <a:solidFill>
+                        <a:srgbClr val="808080"/>
                       </a:solidFill>
                     </a:lnB>
                   </a:tcPr>
@@ -19728,22 +19728,22 @@
                     </a:solidFill>
                     <a:lnL w="6350" cap="flat" cmpd="sng" algn="ctr">
                       <a:solidFill>
-                        <a:srgbClr val="BDBDBD"/>
-                      </a:solidFill>
-                    </a:lnL>
-                    <a:lnR w="6350" cap="flat" cmpd="sng" algn="ctr">
-                      <a:solidFill>
-                        <a:srgbClr val="BDBDBD"/>
-                      </a:solidFill>
-                    </a:lnR>
-                    <a:lnT w="6350" cap="flat" cmpd="sng" algn="ctr">
-                      <a:solidFill>
-                        <a:srgbClr val="BDBDBD"/>
-                      </a:solidFill>
-                    </a:lnT>
-                    <a:lnB w="6350" cap="flat" cmpd="sng" algn="ctr">
-                      <a:solidFill>
-                        <a:srgbClr val="BDBDBD"/>
+                        <a:srgbClr val="808080"/>
+                      </a:solidFill>
+                    </a:lnL>
+                    <a:lnR w="6350" cap="flat" cmpd="sng" algn="ctr">
+                      <a:solidFill>
+                        <a:srgbClr val="808080"/>
+                      </a:solidFill>
+                    </a:lnR>
+                    <a:lnT w="6350" cap="flat" cmpd="sng" algn="ctr">
+                      <a:solidFill>
+                        <a:srgbClr val="808080"/>
+                      </a:solidFill>
+                    </a:lnT>
+                    <a:lnB w="6350" cap="flat" cmpd="sng" algn="ctr">
+                      <a:solidFill>
+                        <a:srgbClr val="808080"/>
                       </a:solidFill>
                     </a:lnB>
                   </a:tcPr>
@@ -19771,22 +19771,22 @@
                     </a:solidFill>
                     <a:lnL w="6350" cap="flat" cmpd="sng" algn="ctr">
                       <a:solidFill>
-                        <a:srgbClr val="BDBDBD"/>
-                      </a:solidFill>
-                    </a:lnL>
-                    <a:lnR w="6350" cap="flat" cmpd="sng" algn="ctr">
-                      <a:solidFill>
-                        <a:srgbClr val="BDBDBD"/>
-                      </a:solidFill>
-                    </a:lnR>
-                    <a:lnT w="6350" cap="flat" cmpd="sng" algn="ctr">
-                      <a:solidFill>
-                        <a:srgbClr val="BDBDBD"/>
-                      </a:solidFill>
-                    </a:lnT>
-                    <a:lnB w="6350" cap="flat" cmpd="sng" algn="ctr">
-                      <a:solidFill>
-                        <a:srgbClr val="BDBDBD"/>
+                        <a:srgbClr val="808080"/>
+                      </a:solidFill>
+                    </a:lnL>
+                    <a:lnR w="6350" cap="flat" cmpd="sng" algn="ctr">
+                      <a:solidFill>
+                        <a:srgbClr val="808080"/>
+                      </a:solidFill>
+                    </a:lnR>
+                    <a:lnT w="6350" cap="flat" cmpd="sng" algn="ctr">
+                      <a:solidFill>
+                        <a:srgbClr val="808080"/>
+                      </a:solidFill>
+                    </a:lnT>
+                    <a:lnB w="6350" cap="flat" cmpd="sng" algn="ctr">
+                      <a:solidFill>
+                        <a:srgbClr val="808080"/>
                       </a:solidFill>
                     </a:lnB>
                   </a:tcPr>
@@ -19816,22 +19816,22 @@
                     </a:solidFill>
                     <a:lnL w="6350" cap="flat" cmpd="sng" algn="ctr">
                       <a:solidFill>
-                        <a:srgbClr val="BDBDBD"/>
-                      </a:solidFill>
-                    </a:lnL>
-                    <a:lnR w="6350" cap="flat" cmpd="sng" algn="ctr">
-                      <a:solidFill>
-                        <a:srgbClr val="BDBDBD"/>
-                      </a:solidFill>
-                    </a:lnR>
-                    <a:lnT w="6350" cap="flat" cmpd="sng" algn="ctr">
-                      <a:solidFill>
-                        <a:srgbClr val="BDBDBD"/>
-                      </a:solidFill>
-                    </a:lnT>
-                    <a:lnB w="6350" cap="flat" cmpd="sng" algn="ctr">
-                      <a:solidFill>
-                        <a:srgbClr val="BDBDBD"/>
+                        <a:srgbClr val="808080"/>
+                      </a:solidFill>
+                    </a:lnL>
+                    <a:lnR w="6350" cap="flat" cmpd="sng" algn="ctr">
+                      <a:solidFill>
+                        <a:srgbClr val="808080"/>
+                      </a:solidFill>
+                    </a:lnR>
+                    <a:lnT w="6350" cap="flat" cmpd="sng" algn="ctr">
+                      <a:solidFill>
+                        <a:srgbClr val="808080"/>
+                      </a:solidFill>
+                    </a:lnT>
+                    <a:lnB w="6350" cap="flat" cmpd="sng" algn="ctr">
+                      <a:solidFill>
+                        <a:srgbClr val="808080"/>
                       </a:solidFill>
                     </a:lnB>
                   </a:tcPr>
@@ -19859,22 +19859,22 @@
                     </a:solidFill>
                     <a:lnL w="6350" cap="flat" cmpd="sng" algn="ctr">
                       <a:solidFill>
-                        <a:srgbClr val="BDBDBD"/>
-                      </a:solidFill>
-                    </a:lnL>
-                    <a:lnR w="6350" cap="flat" cmpd="sng" algn="ctr">
-                      <a:solidFill>
-                        <a:srgbClr val="BDBDBD"/>
-                      </a:solidFill>
-                    </a:lnR>
-                    <a:lnT w="6350" cap="flat" cmpd="sng" algn="ctr">
-                      <a:solidFill>
-                        <a:srgbClr val="BDBDBD"/>
-                      </a:solidFill>
-                    </a:lnT>
-                    <a:lnB w="6350" cap="flat" cmpd="sng" algn="ctr">
-                      <a:solidFill>
-                        <a:srgbClr val="BDBDBD"/>
+                        <a:srgbClr val="808080"/>
+                      </a:solidFill>
+                    </a:lnL>
+                    <a:lnR w="6350" cap="flat" cmpd="sng" algn="ctr">
+                      <a:solidFill>
+                        <a:srgbClr val="808080"/>
+                      </a:solidFill>
+                    </a:lnR>
+                    <a:lnT w="6350" cap="flat" cmpd="sng" algn="ctr">
+                      <a:solidFill>
+                        <a:srgbClr val="808080"/>
+                      </a:solidFill>
+                    </a:lnT>
+                    <a:lnB w="6350" cap="flat" cmpd="sng" algn="ctr">
+                      <a:solidFill>
+                        <a:srgbClr val="808080"/>
                       </a:solidFill>
                     </a:lnB>
                   </a:tcPr>

--- a/docs/dev_summary.pptx
+++ b/docs/dev_summary.pptx
@@ -3240,7 +3240,7 @@
                 </a:solidFill>
                 <a:latin typeface="Microsoft YaHei"/>
               </a:rPr>
-              <a:t>沟通牌  ×  Claude Code  ×  54 PR · 有效开发 18 天</a:t>
+              <a:t>沟通牌  ×  Claude Code  ×  62 PR · 有效开发 19 天</a:t>
             </a:r>
           </a:p>
         </p:txBody>
@@ -5859,7 +5859,7 @@
                 </a:solidFill>
                 <a:latin typeface="Microsoft YaHei"/>
               </a:rPr>
-              <a:t>代码规模 (PR #54 后)  ·  约 19,250 行</a:t>
+              <a:t>代码规模 (PR #62 后)  ·  约 23,360 行 / 98 文件</a:t>
             </a:r>
           </a:p>
         </p:txBody>
@@ -5886,7 +5886,7 @@
                 <a:gridCol w="2194560"/>
                 <a:gridCol w="3291840"/>
               </a:tblGrid>
-              <a:tr h="350520">
+              <a:tr h="300445">
                 <a:tc>
                   <a:txBody>
                     <a:bodyPr lIns="40000" rIns="40000" tIns="15000" bIns="15000"/>
@@ -5974,7 +5974,7 @@
                   </a:tcPr>
                 </a:tc>
               </a:tr>
-              <a:tr h="350520">
+              <a:tr h="300445">
                 <a:tc>
                   <a:txBody>
                     <a:bodyPr lIns="40000" rIns="40000" tIns="10000" bIns="10000" wrap="square"/>
@@ -6031,7 +6031,7 @@
                           </a:solidFill>
                           <a:latin typeface="Microsoft YaHei"/>
                         </a:rPr>
-                        <a:t>19 文件 · ~6,300 行</a:t>
+                        <a:t>20 文件 · ~6,440 行</a:t>
                       </a:r>
                     </a:p>
                   </a:txBody>
@@ -6062,7 +6062,7 @@
                   </a:tcPr>
                 </a:tc>
               </a:tr>
-              <a:tr h="350520">
+              <a:tr h="300445">
                 <a:tc>
                   <a:txBody>
                     <a:bodyPr lIns="40000" rIns="40000" tIns="10000" bIns="10000" wrap="square"/>
@@ -6119,7 +6119,7 @@
                           </a:solidFill>
                           <a:latin typeface="Microsoft YaHei"/>
                         </a:rPr>
-                        <a:t>23 文件 · ~3,470 行</a:t>
+                        <a:t>25 文件 · ~4,320 行</a:t>
                       </a:r>
                     </a:p>
                   </a:txBody>
@@ -6150,7 +6150,7 @@
                   </a:tcPr>
                 </a:tc>
               </a:tr>
-              <a:tr h="350520">
+              <a:tr h="300445">
                 <a:tc>
                   <a:txBody>
                     <a:bodyPr lIns="40000" rIns="40000" tIns="10000" bIns="10000" wrap="square"/>
@@ -6238,7 +6238,7 @@
                   </a:tcPr>
                 </a:tc>
               </a:tr>
-              <a:tr h="350520">
+              <a:tr h="300445">
                 <a:tc>
                   <a:txBody>
                     <a:bodyPr lIns="40000" rIns="40000" tIns="10000" bIns="10000" wrap="square"/>
@@ -6252,7 +6252,7 @@
                           </a:solidFill>
                           <a:latin typeface="Microsoft YaHei"/>
                         </a:rPr>
-                        <a:t>:server (Ktor)</a:t>
+                        <a:t>:server (Ktor + admin)</a:t>
                       </a:r>
                     </a:p>
                   </a:txBody>
@@ -6295,7 +6295,7 @@
                           </a:solidFill>
                           <a:latin typeface="Microsoft YaHei"/>
                         </a:rPr>
-                        <a:t>4 文件 · ~1,960 行</a:t>
+                        <a:t>25 文件 · ~4,840 行</a:t>
                       </a:r>
                     </a:p>
                   </a:txBody>
@@ -6326,7 +6326,7 @@
                   </a:tcPr>
                 </a:tc>
               </a:tr>
-              <a:tr h="350520">
+              <a:tr h="300445">
                 <a:tc>
                   <a:txBody>
                     <a:bodyPr lIns="40000" rIns="40000" tIns="10000" bIns="10000" wrap="square"/>
@@ -6340,7 +6340,7 @@
                           </a:solidFill>
                           <a:latin typeface="Microsoft YaHei"/>
                         </a:rPr>
-                        <a:t>测试 + Android XML</a:t>
+                        <a:t>apps/admin (Vue 3 SPA)</a:t>
                       </a:r>
                     </a:p>
                   </a:txBody>
@@ -6383,7 +6383,95 @@
                           </a:solidFill>
                           <a:latin typeface="Microsoft YaHei"/>
                         </a:rPr>
-                        <a:t>24 文件 · ~4,850 行</a:t>
+                        <a:t>19 文件 · ~1,470 行</a:t>
+                      </a:r>
+                    </a:p>
+                  </a:txBody>
+                  <a:tcPr anchor="ctr">
+                    <a:solidFill>
+                      <a:srgbClr val="FFFFFF"/>
+                    </a:solidFill>
+                    <a:lnL w="6350" cap="flat" cmpd="sng" algn="ctr">
+                      <a:solidFill>
+                        <a:srgbClr val="808080"/>
+                      </a:solidFill>
+                    </a:lnL>
+                    <a:lnR w="6350" cap="flat" cmpd="sng" algn="ctr">
+                      <a:solidFill>
+                        <a:srgbClr val="808080"/>
+                      </a:solidFill>
+                    </a:lnR>
+                    <a:lnT w="6350" cap="flat" cmpd="sng" algn="ctr">
+                      <a:solidFill>
+                        <a:srgbClr val="808080"/>
+                      </a:solidFill>
+                    </a:lnT>
+                    <a:lnB w="6350" cap="flat" cmpd="sng" algn="ctr">
+                      <a:solidFill>
+                        <a:srgbClr val="808080"/>
+                      </a:solidFill>
+                    </a:lnB>
+                  </a:tcPr>
+                </a:tc>
+              </a:tr>
+              <a:tr h="300450">
+                <a:tc>
+                  <a:txBody>
+                    <a:bodyPr lIns="40000" rIns="40000" tIns="10000" bIns="10000" wrap="square"/>
+                    <a:lstStyle/>
+                    <a:p>
+                      <a:pPr algn="l"/>
+                      <a:r>
+                        <a:rPr sz="1200">
+                          <a:solidFill>
+                            <a:srgbClr val="202020"/>
+                          </a:solidFill>
+                          <a:latin typeface="Microsoft YaHei"/>
+                        </a:rPr>
+                        <a:t>测试 (server + shared)</a:t>
+                      </a:r>
+                    </a:p>
+                  </a:txBody>
+                  <a:tcPr anchor="ctr">
+                    <a:solidFill>
+                      <a:srgbClr val="FFFFFF"/>
+                    </a:solidFill>
+                    <a:lnL w="6350" cap="flat" cmpd="sng" algn="ctr">
+                      <a:solidFill>
+                        <a:srgbClr val="808080"/>
+                      </a:solidFill>
+                    </a:lnL>
+                    <a:lnR w="6350" cap="flat" cmpd="sng" algn="ctr">
+                      <a:solidFill>
+                        <a:srgbClr val="808080"/>
+                      </a:solidFill>
+                    </a:lnR>
+                    <a:lnT w="6350" cap="flat" cmpd="sng" algn="ctr">
+                      <a:solidFill>
+                        <a:srgbClr val="808080"/>
+                      </a:solidFill>
+                    </a:lnT>
+                    <a:lnB w="6350" cap="flat" cmpd="sng" algn="ctr">
+                      <a:solidFill>
+                        <a:srgbClr val="808080"/>
+                      </a:solidFill>
+                    </a:lnB>
+                  </a:tcPr>
+                </a:tc>
+                <a:tc>
+                  <a:txBody>
+                    <a:bodyPr lIns="40000" rIns="40000" tIns="10000" bIns="10000" wrap="square"/>
+                    <a:lstStyle/>
+                    <a:p>
+                      <a:pPr algn="l"/>
+                      <a:r>
+                        <a:rPr sz="1200">
+                          <a:solidFill>
+                            <a:srgbClr val="202020"/>
+                          </a:solidFill>
+                          <a:latin typeface="Microsoft YaHei"/>
+                        </a:rPr>
+                        <a:t>14 文件 · 186 用例 · ~3,620 行</a:t>
                       </a:r>
                     </a:p>
                   </a:txBody>
@@ -6448,7 +6536,7 @@
                 </a:solidFill>
                 <a:latin typeface="Microsoft YaHei"/>
               </a:rPr>
-              <a:t>12 阶段时间线  ·  54 PR  ·  ~170 commit  ·  有效开发 18 天</a:t>
+              <a:t>13 阶段时间线  ·  62 PR  ·  ~250 commit  ·  有效开发 19 天</a:t>
             </a:r>
           </a:p>
         </p:txBody>
@@ -6476,7 +6564,7 @@
                 <a:gridCol w="3383280"/>
                 <a:gridCol w="5486400"/>
               </a:tblGrid>
-              <a:tr h="203200">
+              <a:tr h="140676">
                 <a:tc>
                   <a:txBody>
                     <a:bodyPr lIns="40000" rIns="40000" tIns="15000" bIns="15000"/>
@@ -6607,7 +6695,7 @@
                   </a:tcPr>
                 </a:tc>
               </a:tr>
-              <a:tr h="203200">
+              <a:tr h="140676">
                 <a:tc>
                   <a:txBody>
                     <a:bodyPr lIns="40000" rIns="40000" tIns="10000" bIns="10000" wrap="square"/>
@@ -6738,7 +6826,7 @@
                   </a:tcPr>
                 </a:tc>
               </a:tr>
-              <a:tr h="203200">
+              <a:tr h="140676">
                 <a:tc>
                   <a:txBody>
                     <a:bodyPr lIns="40000" rIns="40000" tIns="10000" bIns="10000" wrap="square"/>
@@ -6869,7 +6957,7 @@
                   </a:tcPr>
                 </a:tc>
               </a:tr>
-              <a:tr h="203200">
+              <a:tr h="140676">
                 <a:tc>
                   <a:txBody>
                     <a:bodyPr lIns="40000" rIns="40000" tIns="10000" bIns="10000" wrap="square"/>
@@ -7000,7 +7088,7 @@
                   </a:tcPr>
                 </a:tc>
               </a:tr>
-              <a:tr h="203200">
+              <a:tr h="140676">
                 <a:tc>
                   <a:txBody>
                     <a:bodyPr lIns="40000" rIns="40000" tIns="10000" bIns="10000" wrap="square"/>
@@ -7131,7 +7219,7 @@
                   </a:tcPr>
                 </a:tc>
               </a:tr>
-              <a:tr h="203200">
+              <a:tr h="140676">
                 <a:tc>
                   <a:txBody>
                     <a:bodyPr lIns="40000" rIns="40000" tIns="10000" bIns="10000" wrap="square"/>
@@ -7262,7 +7350,7 @@
                   </a:tcPr>
                 </a:tc>
               </a:tr>
-              <a:tr h="203200">
+              <a:tr h="140676">
                 <a:tc>
                   <a:txBody>
                     <a:bodyPr lIns="40000" rIns="40000" tIns="10000" bIns="10000" wrap="square"/>
@@ -7393,7 +7481,7 @@
                   </a:tcPr>
                 </a:tc>
               </a:tr>
-              <a:tr h="203200">
+              <a:tr h="140676">
                 <a:tc>
                   <a:txBody>
                     <a:bodyPr lIns="40000" rIns="40000" tIns="10000" bIns="10000" wrap="square"/>
@@ -7524,7 +7612,7 @@
                   </a:tcPr>
                 </a:tc>
               </a:tr>
-              <a:tr h="203200">
+              <a:tr h="140676">
                 <a:tc>
                   <a:txBody>
                     <a:bodyPr lIns="40000" rIns="40000" tIns="10000" bIns="10000" wrap="square"/>
@@ -7581,7 +7669,7 @@
                           </a:solidFill>
                           <a:latin typeface="Microsoft YaHei"/>
                         </a:rPr>
-                        <a:t>AI 接管 + 单机修复 (#51–54)</a:t>
+                        <a:t>AI 接管 + 约束 6/7/8 (#51-58)</a:t>
                       </a:r>
                     </a:p>
                   </a:txBody>
@@ -7624,7 +7712,531 @@
                           </a:solidFill>
                           <a:latin typeface="Microsoft YaHei"/>
                         </a:rPr>
-                        <a:t>G34-G38 · PROTOCOL_VERSION 3</a:t>
+                        <a:t>G34-G38 · PROTOCOL=3 · UI 基线</a:t>
+                      </a:r>
+                    </a:p>
+                  </a:txBody>
+                  <a:tcPr anchor="ctr">
+                    <a:solidFill>
+                      <a:srgbClr val="FFFFFF"/>
+                    </a:solidFill>
+                    <a:lnL w="6350" cap="flat" cmpd="sng" algn="ctr">
+                      <a:solidFill>
+                        <a:srgbClr val="808080"/>
+                      </a:solidFill>
+                    </a:lnL>
+                    <a:lnR w="6350" cap="flat" cmpd="sng" algn="ctr">
+                      <a:solidFill>
+                        <a:srgbClr val="808080"/>
+                      </a:solidFill>
+                    </a:lnR>
+                    <a:lnT w="6350" cap="flat" cmpd="sng" algn="ctr">
+                      <a:solidFill>
+                        <a:srgbClr val="808080"/>
+                      </a:solidFill>
+                    </a:lnT>
+                    <a:lnB w="6350" cap="flat" cmpd="sng" algn="ctr">
+                      <a:solidFill>
+                        <a:srgbClr val="808080"/>
+                      </a:solidFill>
+                    </a:lnB>
+                  </a:tcPr>
+                </a:tc>
+              </a:tr>
+              <a:tr h="140676">
+                <a:tc>
+                  <a:txBody>
+                    <a:bodyPr lIns="40000" rIns="40000" tIns="10000" bIns="10000" wrap="square"/>
+                    <a:lstStyle/>
+                    <a:p>
+                      <a:pPr algn="l"/>
+                      <a:r>
+                        <a:rPr sz="1200">
+                          <a:solidFill>
+                            <a:srgbClr val="202020"/>
+                          </a:solidFill>
+                          <a:latin typeface="Microsoft YaHei"/>
+                        </a:rPr>
+                        <a:t>2026-05-11</a:t>
+                      </a:r>
+                    </a:p>
+                  </a:txBody>
+                  <a:tcPr anchor="ctr">
+                    <a:solidFill>
+                      <a:srgbClr val="FFFFFF"/>
+                    </a:solidFill>
+                    <a:lnL w="6350" cap="flat" cmpd="sng" algn="ctr">
+                      <a:solidFill>
+                        <a:srgbClr val="808080"/>
+                      </a:solidFill>
+                    </a:lnL>
+                    <a:lnR w="6350" cap="flat" cmpd="sng" algn="ctr">
+                      <a:solidFill>
+                        <a:srgbClr val="808080"/>
+                      </a:solidFill>
+                    </a:lnR>
+                    <a:lnT w="6350" cap="flat" cmpd="sng" algn="ctr">
+                      <a:solidFill>
+                        <a:srgbClr val="808080"/>
+                      </a:solidFill>
+                    </a:lnT>
+                    <a:lnB w="6350" cap="flat" cmpd="sng" algn="ctr">
+                      <a:solidFill>
+                        <a:srgbClr val="808080"/>
+                      </a:solidFill>
+                    </a:lnB>
+                  </a:tcPr>
+                </a:tc>
+                <a:tc>
+                  <a:txBody>
+                    <a:bodyPr lIns="40000" rIns="40000" tIns="10000" bIns="10000" wrap="square"/>
+                    <a:lstStyle/>
+                    <a:p>
+                      <a:pPr algn="l"/>
+                      <a:r>
+                        <a:rPr sz="1200">
+                          <a:solidFill>
+                            <a:srgbClr val="202020"/>
+                          </a:solidFill>
+                          <a:latin typeface="Microsoft YaHei"/>
+                        </a:rPr>
+                        <a:t>bermin.cn HTTPS (#60)</a:t>
+                      </a:r>
+                    </a:p>
+                  </a:txBody>
+                  <a:tcPr anchor="ctr">
+                    <a:solidFill>
+                      <a:srgbClr val="FFFFFF"/>
+                    </a:solidFill>
+                    <a:lnL w="6350" cap="flat" cmpd="sng" algn="ctr">
+                      <a:solidFill>
+                        <a:srgbClr val="808080"/>
+                      </a:solidFill>
+                    </a:lnL>
+                    <a:lnR w="6350" cap="flat" cmpd="sng" algn="ctr">
+                      <a:solidFill>
+                        <a:srgbClr val="808080"/>
+                      </a:solidFill>
+                    </a:lnR>
+                    <a:lnT w="6350" cap="flat" cmpd="sng" algn="ctr">
+                      <a:solidFill>
+                        <a:srgbClr val="808080"/>
+                      </a:solidFill>
+                    </a:lnT>
+                    <a:lnB w="6350" cap="flat" cmpd="sng" algn="ctr">
+                      <a:solidFill>
+                        <a:srgbClr val="808080"/>
+                      </a:solidFill>
+                    </a:lnB>
+                  </a:tcPr>
+                </a:tc>
+                <a:tc>
+                  <a:txBody>
+                    <a:bodyPr lIns="40000" rIns="40000" tIns="10000" bIns="10000" wrap="square"/>
+                    <a:lstStyle/>
+                    <a:p>
+                      <a:pPr algn="l"/>
+                      <a:r>
+                        <a:rPr sz="1200">
+                          <a:solidFill>
+                            <a:srgbClr val="202020"/>
+                          </a:solidFill>
+                          <a:latin typeface="Microsoft YaHei"/>
+                        </a:rPr>
+                        <a:t>Caddy ACME · :80 fallback</a:t>
+                      </a:r>
+                    </a:p>
+                  </a:txBody>
+                  <a:tcPr anchor="ctr">
+                    <a:solidFill>
+                      <a:srgbClr val="FFFFFF"/>
+                    </a:solidFill>
+                    <a:lnL w="6350" cap="flat" cmpd="sng" algn="ctr">
+                      <a:solidFill>
+                        <a:srgbClr val="808080"/>
+                      </a:solidFill>
+                    </a:lnL>
+                    <a:lnR w="6350" cap="flat" cmpd="sng" algn="ctr">
+                      <a:solidFill>
+                        <a:srgbClr val="808080"/>
+                      </a:solidFill>
+                    </a:lnR>
+                    <a:lnT w="6350" cap="flat" cmpd="sng" algn="ctr">
+                      <a:solidFill>
+                        <a:srgbClr val="808080"/>
+                      </a:solidFill>
+                    </a:lnT>
+                    <a:lnB w="6350" cap="flat" cmpd="sng" algn="ctr">
+                      <a:solidFill>
+                        <a:srgbClr val="808080"/>
+                      </a:solidFill>
+                    </a:lnB>
+                  </a:tcPr>
+                </a:tc>
+              </a:tr>
+              <a:tr h="140676">
+                <a:tc>
+                  <a:txBody>
+                    <a:bodyPr lIns="40000" rIns="40000" tIns="10000" bIns="10000" wrap="square"/>
+                    <a:lstStyle/>
+                    <a:p>
+                      <a:pPr algn="l"/>
+                      <a:r>
+                        <a:rPr sz="1200">
+                          <a:solidFill>
+                            <a:srgbClr val="202020"/>
+                          </a:solidFill>
+                          <a:latin typeface="Microsoft YaHei"/>
+                        </a:rPr>
+                        <a:t>2026-05-12</a:t>
+                      </a:r>
+                    </a:p>
+                  </a:txBody>
+                  <a:tcPr anchor="ctr">
+                    <a:solidFill>
+                      <a:srgbClr val="FFFFFF"/>
+                    </a:solidFill>
+                    <a:lnL w="6350" cap="flat" cmpd="sng" algn="ctr">
+                      <a:solidFill>
+                        <a:srgbClr val="808080"/>
+                      </a:solidFill>
+                    </a:lnL>
+                    <a:lnR w="6350" cap="flat" cmpd="sng" algn="ctr">
+                      <a:solidFill>
+                        <a:srgbClr val="808080"/>
+                      </a:solidFill>
+                    </a:lnR>
+                    <a:lnT w="6350" cap="flat" cmpd="sng" algn="ctr">
+                      <a:solidFill>
+                        <a:srgbClr val="808080"/>
+                      </a:solidFill>
+                    </a:lnT>
+                    <a:lnB w="6350" cap="flat" cmpd="sng" algn="ctr">
+                      <a:solidFill>
+                        <a:srgbClr val="808080"/>
+                      </a:solidFill>
+                    </a:lnB>
+                  </a:tcPr>
+                </a:tc>
+                <a:tc>
+                  <a:txBody>
+                    <a:bodyPr lIns="40000" rIns="40000" tIns="10000" bIns="10000" wrap="square"/>
+                    <a:lstStyle/>
+                    <a:p>
+                      <a:pPr algn="l"/>
+                      <a:r>
+                        <a:rPr sz="1200">
+                          <a:solidFill>
+                            <a:srgbClr val="202020"/>
+                          </a:solidFill>
+                          <a:latin typeface="Microsoft YaHei"/>
+                        </a:rPr>
+                        <a:t>WS 重连 + HTML docs (#59)</a:t>
+                      </a:r>
+                    </a:p>
+                  </a:txBody>
+                  <a:tcPr anchor="ctr">
+                    <a:solidFill>
+                      <a:srgbClr val="FFFFFF"/>
+                    </a:solidFill>
+                    <a:lnL w="6350" cap="flat" cmpd="sng" algn="ctr">
+                      <a:solidFill>
+                        <a:srgbClr val="808080"/>
+                      </a:solidFill>
+                    </a:lnL>
+                    <a:lnR w="6350" cap="flat" cmpd="sng" algn="ctr">
+                      <a:solidFill>
+                        <a:srgbClr val="808080"/>
+                      </a:solidFill>
+                    </a:lnR>
+                    <a:lnT w="6350" cap="flat" cmpd="sng" algn="ctr">
+                      <a:solidFill>
+                        <a:srgbClr val="808080"/>
+                      </a:solidFill>
+                    </a:lnT>
+                    <a:lnB w="6350" cap="flat" cmpd="sng" algn="ctr">
+                      <a:solidFill>
+                        <a:srgbClr val="808080"/>
+                      </a:solidFill>
+                    </a:lnB>
+                  </a:tcPr>
+                </a:tc>
+                <a:tc>
+                  <a:txBody>
+                    <a:bodyPr lIns="40000" rIns="40000" tIns="10000" bIns="10000" wrap="square"/>
+                    <a:lstStyle/>
+                    <a:p>
+                      <a:pPr algn="l"/>
+                      <a:r>
+                        <a:rPr sz="1200">
+                          <a:solidFill>
+                            <a:srgbClr val="202020"/>
+                          </a:solidFill>
+                          <a:latin typeface="Microsoft YaHei"/>
+                        </a:rPr>
+                        <a:t>指数退避 ×5 · dev_summary.html</a:t>
+                      </a:r>
+                    </a:p>
+                  </a:txBody>
+                  <a:tcPr anchor="ctr">
+                    <a:solidFill>
+                      <a:srgbClr val="FFFFFF"/>
+                    </a:solidFill>
+                    <a:lnL w="6350" cap="flat" cmpd="sng" algn="ctr">
+                      <a:solidFill>
+                        <a:srgbClr val="808080"/>
+                      </a:solidFill>
+                    </a:lnL>
+                    <a:lnR w="6350" cap="flat" cmpd="sng" algn="ctr">
+                      <a:solidFill>
+                        <a:srgbClr val="808080"/>
+                      </a:solidFill>
+                    </a:lnR>
+                    <a:lnT w="6350" cap="flat" cmpd="sng" algn="ctr">
+                      <a:solidFill>
+                        <a:srgbClr val="808080"/>
+                      </a:solidFill>
+                    </a:lnT>
+                    <a:lnB w="6350" cap="flat" cmpd="sng" algn="ctr">
+                      <a:solidFill>
+                        <a:srgbClr val="808080"/>
+                      </a:solidFill>
+                    </a:lnB>
+                  </a:tcPr>
+                </a:tc>
+              </a:tr>
+              <a:tr h="140676">
+                <a:tc>
+                  <a:txBody>
+                    <a:bodyPr lIns="40000" rIns="40000" tIns="10000" bIns="10000" wrap="square"/>
+                    <a:lstStyle/>
+                    <a:p>
+                      <a:pPr algn="l"/>
+                      <a:r>
+                        <a:rPr sz="1200">
+                          <a:solidFill>
+                            <a:srgbClr val="202020"/>
+                          </a:solidFill>
+                          <a:latin typeface="Microsoft YaHei"/>
+                        </a:rPr>
+                        <a:t>2026-05-13</a:t>
+                      </a:r>
+                    </a:p>
+                  </a:txBody>
+                  <a:tcPr anchor="ctr">
+                    <a:solidFill>
+                      <a:srgbClr val="FFFFFF"/>
+                    </a:solidFill>
+                    <a:lnL w="6350" cap="flat" cmpd="sng" algn="ctr">
+                      <a:solidFill>
+                        <a:srgbClr val="808080"/>
+                      </a:solidFill>
+                    </a:lnL>
+                    <a:lnR w="6350" cap="flat" cmpd="sng" algn="ctr">
+                      <a:solidFill>
+                        <a:srgbClr val="808080"/>
+                      </a:solidFill>
+                    </a:lnR>
+                    <a:lnT w="6350" cap="flat" cmpd="sng" algn="ctr">
+                      <a:solidFill>
+                        <a:srgbClr val="808080"/>
+                      </a:solidFill>
+                    </a:lnT>
+                    <a:lnB w="6350" cap="flat" cmpd="sng" algn="ctr">
+                      <a:solidFill>
+                        <a:srgbClr val="808080"/>
+                      </a:solidFill>
+                    </a:lnB>
+                  </a:tcPr>
+                </a:tc>
+                <a:tc>
+                  <a:txBody>
+                    <a:bodyPr lIns="40000" rIns="40000" tIns="10000" bIns="10000" wrap="square"/>
+                    <a:lstStyle/>
+                    <a:p>
+                      <a:pPr algn="l"/>
+                      <a:r>
+                        <a:rPr sz="1200">
+                          <a:solidFill>
+                            <a:srgbClr val="202020"/>
+                          </a:solidFill>
+                          <a:latin typeface="Microsoft YaHei"/>
+                        </a:rPr>
+                        <a:t>Admin MVP (#61) PR 0-4</a:t>
+                      </a:r>
+                    </a:p>
+                  </a:txBody>
+                  <a:tcPr anchor="ctr">
+                    <a:solidFill>
+                      <a:srgbClr val="FFFFFF"/>
+                    </a:solidFill>
+                    <a:lnL w="6350" cap="flat" cmpd="sng" algn="ctr">
+                      <a:solidFill>
+                        <a:srgbClr val="808080"/>
+                      </a:solidFill>
+                    </a:lnL>
+                    <a:lnR w="6350" cap="flat" cmpd="sng" algn="ctr">
+                      <a:solidFill>
+                        <a:srgbClr val="808080"/>
+                      </a:solidFill>
+                    </a:lnR>
+                    <a:lnT w="6350" cap="flat" cmpd="sng" algn="ctr">
+                      <a:solidFill>
+                        <a:srgbClr val="808080"/>
+                      </a:solidFill>
+                    </a:lnT>
+                    <a:lnB w="6350" cap="flat" cmpd="sng" algn="ctr">
+                      <a:solidFill>
+                        <a:srgbClr val="808080"/>
+                      </a:solidFill>
+                    </a:lnB>
+                  </a:tcPr>
+                </a:tc>
+                <a:tc>
+                  <a:txBody>
+                    <a:bodyPr lIns="40000" rIns="40000" tIns="10000" bIns="10000" wrap="square"/>
+                    <a:lstStyle/>
+                    <a:p>
+                      <a:pPr algn="l"/>
+                      <a:r>
+                        <a:rPr sz="1200">
+                          <a:solidFill>
+                            <a:srgbClr val="202020"/>
+                          </a:solidFill>
+                          <a:latin typeface="Microsoft YaHei"/>
+                        </a:rPr>
+                        <a:t>SQLite/bcrypt/监控/告警/Vue SPA</a:t>
+                      </a:r>
+                    </a:p>
+                  </a:txBody>
+                  <a:tcPr anchor="ctr">
+                    <a:solidFill>
+                      <a:srgbClr val="FFFFFF"/>
+                    </a:solidFill>
+                    <a:lnL w="6350" cap="flat" cmpd="sng" algn="ctr">
+                      <a:solidFill>
+                        <a:srgbClr val="808080"/>
+                      </a:solidFill>
+                    </a:lnL>
+                    <a:lnR w="6350" cap="flat" cmpd="sng" algn="ctr">
+                      <a:solidFill>
+                        <a:srgbClr val="808080"/>
+                      </a:solidFill>
+                    </a:lnR>
+                    <a:lnT w="6350" cap="flat" cmpd="sng" algn="ctr">
+                      <a:solidFill>
+                        <a:srgbClr val="808080"/>
+                      </a:solidFill>
+                    </a:lnT>
+                    <a:lnB w="6350" cap="flat" cmpd="sng" algn="ctr">
+                      <a:solidFill>
+                        <a:srgbClr val="808080"/>
+                      </a:solidFill>
+                    </a:lnB>
+                  </a:tcPr>
+                </a:tc>
+              </a:tr>
+              <a:tr h="140688">
+                <a:tc>
+                  <a:txBody>
+                    <a:bodyPr lIns="40000" rIns="40000" tIns="10000" bIns="10000" wrap="square"/>
+                    <a:lstStyle/>
+                    <a:p>
+                      <a:pPr algn="l"/>
+                      <a:r>
+                        <a:rPr sz="1200">
+                          <a:solidFill>
+                            <a:srgbClr val="202020"/>
+                          </a:solidFill>
+                          <a:latin typeface="Microsoft YaHei"/>
+                        </a:rPr>
+                        <a:t>2026-05-13</a:t>
+                      </a:r>
+                    </a:p>
+                  </a:txBody>
+                  <a:tcPr anchor="ctr">
+                    <a:solidFill>
+                      <a:srgbClr val="FFFFFF"/>
+                    </a:solidFill>
+                    <a:lnL w="6350" cap="flat" cmpd="sng" algn="ctr">
+                      <a:solidFill>
+                        <a:srgbClr val="808080"/>
+                      </a:solidFill>
+                    </a:lnL>
+                    <a:lnR w="6350" cap="flat" cmpd="sng" algn="ctr">
+                      <a:solidFill>
+                        <a:srgbClr val="808080"/>
+                      </a:solidFill>
+                    </a:lnR>
+                    <a:lnT w="6350" cap="flat" cmpd="sng" algn="ctr">
+                      <a:solidFill>
+                        <a:srgbClr val="808080"/>
+                      </a:solidFill>
+                    </a:lnT>
+                    <a:lnB w="6350" cap="flat" cmpd="sng" algn="ctr">
+                      <a:solidFill>
+                        <a:srgbClr val="808080"/>
+                      </a:solidFill>
+                    </a:lnB>
+                  </a:tcPr>
+                </a:tc>
+                <a:tc>
+                  <a:txBody>
+                    <a:bodyPr lIns="40000" rIns="40000" tIns="10000" bIns="10000" wrap="square"/>
+                    <a:lstStyle/>
+                    <a:p>
+                      <a:pPr algn="l"/>
+                      <a:r>
+                        <a:rPr sz="1200">
+                          <a:solidFill>
+                            <a:srgbClr val="202020"/>
+                          </a:solidFill>
+                          <a:latin typeface="Microsoft YaHei"/>
+                        </a:rPr>
+                        <a:t>Admin 优化 (#62) PR 5a-d</a:t>
+                      </a:r>
+                    </a:p>
+                  </a:txBody>
+                  <a:tcPr anchor="ctr">
+                    <a:solidFill>
+                      <a:srgbClr val="FFFFFF"/>
+                    </a:solidFill>
+                    <a:lnL w="6350" cap="flat" cmpd="sng" algn="ctr">
+                      <a:solidFill>
+                        <a:srgbClr val="808080"/>
+                      </a:solidFill>
+                    </a:lnL>
+                    <a:lnR w="6350" cap="flat" cmpd="sng" algn="ctr">
+                      <a:solidFill>
+                        <a:srgbClr val="808080"/>
+                      </a:solidFill>
+                    </a:lnR>
+                    <a:lnT w="6350" cap="flat" cmpd="sng" algn="ctr">
+                      <a:solidFill>
+                        <a:srgbClr val="808080"/>
+                      </a:solidFill>
+                    </a:lnT>
+                    <a:lnB w="6350" cap="flat" cmpd="sng" algn="ctr">
+                      <a:solidFill>
+                        <a:srgbClr val="808080"/>
+                      </a:solidFill>
+                    </a:lnB>
+                  </a:tcPr>
+                </a:tc>
+                <a:tc>
+                  <a:txBody>
+                    <a:bodyPr lIns="40000" rIns="40000" tIns="10000" bIns="10000" wrap="square"/>
+                    <a:lstStyle/>
+                    <a:p>
+                      <a:pPr algn="l"/>
+                      <a:r>
+                        <a:rPr sz="1200">
+                          <a:solidFill>
+                            <a:srgbClr val="202020"/>
+                          </a:solidFill>
+                          <a:latin typeface="Microsoft YaHei"/>
+                        </a:rPr>
+                        <a:t>SSE / 趋势图 / JSON / 事件回放</a:t>
                       </a:r>
                     </a:p>
                   </a:txBody>
@@ -9773,7 +10385,7 @@
                 </a:solidFill>
                 <a:latin typeface="Microsoft YaHei"/>
               </a:rPr>
-              <a:t>三、问题发现：人工 + AI（~128 个，4 视角不重叠）</a:t>
+              <a:t>三、问题发现：5 层审查（~162 个；PR #1-#62 全程）</a:t>
             </a:r>
           </a:p>
         </p:txBody>
@@ -9896,7 +10508,7 @@
                 </a:solidFill>
                 <a:latin typeface="Microsoft YaHei"/>
               </a:rPr>
-              <a:t>🔴 人工测试 / 反馈</a:t>
+              <a:t>🔴 人工 + 真机</a:t>
             </a:r>
           </a:p>
         </p:txBody>
@@ -9931,7 +10543,7 @@
                 </a:solidFill>
                 <a:latin typeface="Microsoft YaHei"/>
               </a:rPr>
-              <a:t>~35  (27%)</a:t>
+              <a:t>~38  (23%)</a:t>
             </a:r>
           </a:p>
         </p:txBody>
@@ -9966,7 +10578,7 @@
                 </a:solidFill>
                 <a:latin typeface="Microsoft YaHei"/>
               </a:rPr>
-              <a:t>UI · 部署 · 真机崩溃</a:t>
+              <a:t>UI · 部署 · UI race (Web 连点 3 次)</a:t>
             </a:r>
           </a:p>
         </p:txBody>
@@ -10081,7 +10693,7 @@
                 </a:solidFill>
                 <a:latin typeface="Microsoft YaHei"/>
               </a:rPr>
-              <a:t>~55  (43%)</a:t>
+              <a:t>~65  (40%)</a:t>
             </a:r>
           </a:p>
         </p:txBody>
@@ -10116,7 +10728,7 @@
                 </a:solidFill>
                 <a:latin typeface="Microsoft YaHei"/>
               </a:rPr>
-              <a:t>全量扫描 · 跨文件 · 并发</a:t>
+              <a:t>全量扫描 + CI 修复 (4 次 quirks)</a:t>
             </a:r>
           </a:p>
         </p:txBody>
@@ -10231,7 +10843,7 @@
                 </a:solidFill>
                 <a:latin typeface="Microsoft YaHei"/>
               </a:rPr>
-              <a:t>~15  (12%)</a:t>
+              <a:t>~22  (14%)</a:t>
             </a:r>
           </a:p>
         </p:txBody>
@@ -10266,7 +10878,7 @@
                 </a:solidFill>
                 <a:latin typeface="Microsoft YaHei"/>
               </a:rPr>
-              <a:t>独立 context · 跨文件契约</a:t>
+              <a:t>PR #61 一次审 1 P0 + 4 P1</a:t>
             </a:r>
           </a:p>
         </p:txBody>
@@ -10381,7 +10993,7 @@
                 </a:solidFill>
                 <a:latin typeface="Microsoft YaHei"/>
               </a:rPr>
-              <a:t>~13  (10%)</a:t>
+              <a:t>25 精确  (15%)</a:t>
             </a:r>
           </a:p>
         </p:txBody>
@@ -10416,7 +11028,7 @@
                 </a:solidFill>
                 <a:latin typeface="Microsoft YaHei"/>
               </a:rPr>
-              <a:t>语句级边界 · entropy · 文案</a:t>
+              <a:t>全量审计 · 0 误报 · P1×7/P2×18</a:t>
             </a:r>
           </a:p>
         </p:txBody>
@@ -10451,7 +11063,7 @@
                 </a:solidFill>
                 <a:latin typeface="Microsoft YaHei"/>
               </a:rPr>
-              <a:t>🔴 人工发现（~35，3 阶段）</a:t>
+              <a:t>🔴 人工 + 真机（~38；含 Web 连点 3 次 race）</a:t>
             </a:r>
           </a:p>
         </p:txBody>
@@ -10864,7 +11476,7 @@
                 </a:solidFill>
                 <a:latin typeface="Microsoft YaHei"/>
               </a:rPr>
-              <a:t>🔵 AI 发现（Claude ~55 · pr-reviewer ~15 · Codex ~13）</a:t>
+              <a:t>🔵 AI 发现（Claude ~65 · pr-reviewer ~22 · Codex 25 精确）</a:t>
             </a:r>
           </a:p>
         </p:txBody>
@@ -19994,7 +20606,7 @@
                 </a:solidFill>
                 <a:latin typeface="Microsoft YaHei"/>
               </a:rPr>
-              <a:t>·  全程 54 PR / ~170 commit  ·  有效开发 18 天  ·  发现 ~128 个问题</a:t>
+              <a:t>·  全程 62 PR / ~250 commit  ·  有效开发 19 天  ·  发现 ~162 个问题</a:t>
             </a:r>
           </a:p>
         </p:txBody>

--- a/docs/dev_summary.pptx
+++ b/docs/dev_summary.pptx
@@ -3240,7 +3240,7 @@
                 </a:solidFill>
                 <a:latin typeface="Microsoft YaHei"/>
               </a:rPr>
-              <a:t>沟通牌  ×  Claude Code  ×  62 PR · 有效开发 19 天</a:t>
+              <a:t>沟通牌  ×  Claude Code  ×  86 PR · 有效开发 22 天</a:t>
             </a:r>
           </a:p>
         </p:txBody>
@@ -5859,7 +5859,7 @@
                 </a:solidFill>
                 <a:latin typeface="Microsoft YaHei"/>
               </a:rPr>
-              <a:t>代码规模 (PR #62 后)  ·  约 23,360 行 / 98 文件</a:t>
+              <a:t>代码规模 (PR #85 后)  ·  约 25,000 行 / 102 文件</a:t>
             </a:r>
           </a:p>
         </p:txBody>
@@ -6119,7 +6119,7 @@
                           </a:solidFill>
                           <a:latin typeface="Microsoft YaHei"/>
                         </a:rPr>
-                        <a:t>25 文件 · ~4,320 行</a:t>
+                        <a:t>27 文件 · ~4,800 行</a:t>
                       </a:r>
                     </a:p>
                   </a:txBody>
@@ -6295,7 +6295,7 @@
                           </a:solidFill>
                           <a:latin typeface="Microsoft YaHei"/>
                         </a:rPr>
-                        <a:t>25 文件 · ~4,840 行</a:t>
+                        <a:t>25 文件 · ~5,040 行</a:t>
                       </a:r>
                     </a:p>
                   </a:txBody>
@@ -6383,7 +6383,7 @@
                           </a:solidFill>
                           <a:latin typeface="Microsoft YaHei"/>
                         </a:rPr>
-                        <a:t>19 文件 · ~1,470 行</a:t>
+                        <a:t>19 文件 · ~1,490 行</a:t>
                       </a:r>
                     </a:p>
                   </a:txBody>
@@ -6428,7 +6428,7 @@
                           </a:solidFill>
                           <a:latin typeface="Microsoft YaHei"/>
                         </a:rPr>
-                        <a:t>测试 (server + shared)</a:t>
+                        <a:t>测试 (含 PR #74 fuzz)</a:t>
                       </a:r>
                     </a:p>
                   </a:txBody>
@@ -6471,7 +6471,7 @@
                           </a:solidFill>
                           <a:latin typeface="Microsoft YaHei"/>
                         </a:rPr>
-                        <a:t>14 文件 · 186 用例 · ~3,620 行</a:t>
+                        <a:t>17 文件 · 195+ 用例 · ~4,560 行</a:t>
                       </a:r>
                     </a:p>
                   </a:txBody>
@@ -6536,7 +6536,7 @@
                 </a:solidFill>
                 <a:latin typeface="Microsoft YaHei"/>
               </a:rPr>
-              <a:t>13 阶段时间线  ·  62 PR  ·  ~250 commit  ·  有效开发 19 天</a:t>
+              <a:t>13 阶段时间线  ·  86 PR  ·  ~280 commit  ·  有效开发 22 天</a:t>
             </a:r>
           </a:p>
         </p:txBody>
@@ -10385,7 +10385,7 @@
                 </a:solidFill>
                 <a:latin typeface="Microsoft YaHei"/>
               </a:rPr>
-              <a:t>三、问题发现：5 层审查（~162 个；PR #1-#62 全程）</a:t>
+              <a:t>三、问题发现：5 层审查（~168 个；PR #1-#86 全程）</a:t>
             </a:r>
           </a:p>
         </p:txBody>
@@ -10993,7 +10993,7 @@
                 </a:solidFill>
                 <a:latin typeface="Microsoft YaHei"/>
               </a:rPr>
-              <a:t>25 精确  (15%)</a:t>
+              <a:t>34 精确  (20%)</a:t>
             </a:r>
           </a:p>
         </p:txBody>
@@ -11028,7 +11028,7 @@
                 </a:solidFill>
                 <a:latin typeface="Microsoft YaHei"/>
               </a:rPr>
-              <a:t>全量审计 · 0 误报 · P1×7/P2×18</a:t>
+              <a:t>全量审计 · 0 误报 · 含 BCrypt SIOOBE 真 bug</a:t>
             </a:r>
           </a:p>
         </p:txBody>
@@ -20606,7 +20606,7 @@
                 </a:solidFill>
                 <a:latin typeface="Microsoft YaHei"/>
               </a:rPr>
-              <a:t>·  全程 62 PR / ~250 commit  ·  有效开发 19 天  ·  发现 ~162 个问题</a:t>
+              <a:t>·  全程 86 PR / ~280 commit  ·  有效开发 22 天  ·  发现 ~168 个问题</a:t>
             </a:r>
           </a:p>
         </p:txBody>
